--- a/docs/product/presentation.pptx
+++ b/docs/product/presentation.pptx
@@ -4405,14 +4405,340 @@
       </p:sp>
       <p:sp>
         <p:nvSpPr>
-          <p:cNvPr id="5" name="TextBox 4"/>
+          <p:cNvPr id="5" name="Rounded Rectangle 4"/>
+          <p:cNvSpPr/>
+          <p:nvPr/>
+        </p:nvSpPr>
+        <p:spPr>
+          <a:xfrm>
+            <a:off x="731520" y="3200400"/>
+            <a:ext cx="4206240" cy="1691640"/>
+          </a:xfrm>
+          <a:prstGeom prst="roundRect">
+            <a:avLst>
+              <a:gd name="adj" fmla="val 6000"/>
+            </a:avLst>
+          </a:prstGeom>
+          <a:solidFill>
+            <a:srgbClr val="FFFFFF"/>
+          </a:solidFill>
+          <a:ln w="19050">
+            <a:solidFill>
+              <a:srgbClr val="43B02A"/>
+            </a:solidFill>
+          </a:ln>
+          <a:effectLst/>
+        </p:spPr>
+        <p:style>
+          <a:lnRef idx="1">
+            <a:schemeClr val="accent1"/>
+          </a:lnRef>
+          <a:fillRef idx="3">
+            <a:schemeClr val="accent1"/>
+          </a:fillRef>
+          <a:effectRef idx="2">
+            <a:schemeClr val="accent1"/>
+          </a:effectRef>
+          <a:fontRef idx="minor">
+            <a:schemeClr val="lt1"/>
+          </a:fontRef>
+        </p:style>
+        <p:txBody>
+          <a:bodyPr rtlCol="0" anchor="ctr"/>
+          <a:lstStyle/>
+          <a:p>
+            <a:pPr algn="ctr"/>
+          </a:p>
+        </p:txBody>
+      </p:sp>
+      <p:sp>
+        <p:nvSpPr>
+          <p:cNvPr id="6" name="TextBox 5"/>
           <p:cNvSpPr txBox="1"/>
           <p:nvPr/>
         </p:nvSpPr>
         <p:spPr>
           <a:xfrm>
-            <a:off x="1115568" y="3063240"/>
-            <a:ext cx="9509760" cy="822960"/>
+            <a:off x="1024128" y="3429000"/>
+            <a:ext cx="3657600" cy="219456"/>
+          </a:xfrm>
+          <a:prstGeom prst="rect">
+            <a:avLst/>
+          </a:prstGeom>
+          <a:noFill/>
+        </p:spPr>
+        <p:txBody>
+          <a:bodyPr wrap="square" lIns="0" rIns="0" tIns="0" bIns="0">
+            <a:spAutoFit/>
+          </a:bodyPr>
+          <a:lstStyle/>
+          <a:p>
+            <a:pPr algn="l">
+              <a:lnSpc>
+                <a:spcPct val="132000"/>
+              </a:lnSpc>
+            </a:pPr>
+            <a:r>
+              <a:rPr sz="1050" b="1" cap="all" spc="140">
+                <a:solidFill>
+                  <a:srgbClr val="379123"/>
+                </a:solidFill>
+                <a:latin typeface="Inter Tight"/>
+              </a:rPr>
+              <a:t>Модель</a:t>
+            </a:r>
+          </a:p>
+        </p:txBody>
+      </p:sp>
+      <p:sp>
+        <p:nvSpPr>
+          <p:cNvPr id="7" name="TextBox 6"/>
+          <p:cNvSpPr txBox="1"/>
+          <p:nvPr/>
+        </p:nvSpPr>
+        <p:spPr>
+          <a:xfrm>
+            <a:off x="1024128" y="3749039"/>
+            <a:ext cx="3657600" cy="1005840"/>
+          </a:xfrm>
+          <a:prstGeom prst="rect">
+            <a:avLst/>
+          </a:prstGeom>
+          <a:noFill/>
+        </p:spPr>
+        <p:txBody>
+          <a:bodyPr wrap="square" lIns="0" rIns="0" tIns="0" bIns="0">
+            <a:spAutoFit/>
+          </a:bodyPr>
+          <a:lstStyle/>
+          <a:p>
+            <a:pPr algn="l">
+              <a:lnSpc>
+                <a:spcPct val="150000"/>
+              </a:lnSpc>
+            </a:pPr>
+            <a:r>
+              <a:rPr sz="1500" b="0">
+                <a:solidFill>
+                  <a:srgbClr val="231F20"/>
+                </a:solidFill>
+                <a:latin typeface="Inter Tight"/>
+              </a:rPr>
+              <a:t>К1 · 3    К2 · 2    К3 · 3
+К4 · 0    К5 · 0    К6 · 3
+и обоснование к каждому баллу</a:t>
+            </a:r>
+          </a:p>
+        </p:txBody>
+      </p:sp>
+      <p:sp>
+        <p:nvSpPr>
+          <p:cNvPr id="8" name="Can 7"/>
+          <p:cNvSpPr/>
+          <p:nvPr/>
+        </p:nvSpPr>
+        <p:spPr>
+          <a:xfrm>
+            <a:off x="5166360" y="3968496"/>
+            <a:ext cx="777240" cy="146304"/>
+          </a:xfrm>
+          <a:prstGeom prst="can">
+            <a:avLst/>
+          </a:prstGeom>
+          <a:solidFill>
+            <a:srgbClr val="379123"/>
+          </a:solidFill>
+          <a:ln>
+            <a:noFill/>
+          </a:ln>
+          <a:effectLst/>
+        </p:spPr>
+        <p:style>
+          <a:lnRef idx="1">
+            <a:schemeClr val="accent1"/>
+          </a:lnRef>
+          <a:fillRef idx="3">
+            <a:schemeClr val="accent1"/>
+          </a:fillRef>
+          <a:effectRef idx="2">
+            <a:schemeClr val="accent1"/>
+          </a:effectRef>
+          <a:fontRef idx="minor">
+            <a:schemeClr val="lt1"/>
+          </a:fontRef>
+        </p:style>
+        <p:txBody>
+          <a:bodyPr rtlCol="0" anchor="ctr"/>
+          <a:lstStyle/>
+          <a:p>
+            <a:pPr algn="ctr"/>
+          </a:p>
+        </p:txBody>
+      </p:sp>
+      <p:sp>
+        <p:nvSpPr>
+          <p:cNvPr id="9" name="Rounded Rectangle 8"/>
+          <p:cNvSpPr/>
+          <p:nvPr/>
+        </p:nvSpPr>
+        <p:spPr>
+          <a:xfrm>
+            <a:off x="6217920" y="3200400"/>
+            <a:ext cx="4480560" cy="1691640"/>
+          </a:xfrm>
+          <a:prstGeom prst="roundRect">
+            <a:avLst>
+              <a:gd name="adj" fmla="val 6000"/>
+            </a:avLst>
+          </a:prstGeom>
+          <a:solidFill>
+            <a:srgbClr val="231F20"/>
+          </a:solidFill>
+          <a:ln w="19050">
+            <a:solidFill>
+              <a:srgbClr val="231F20"/>
+            </a:solidFill>
+          </a:ln>
+          <a:effectLst/>
+        </p:spPr>
+        <p:style>
+          <a:lnRef idx="1">
+            <a:schemeClr val="accent1"/>
+          </a:lnRef>
+          <a:fillRef idx="3">
+            <a:schemeClr val="accent1"/>
+          </a:fillRef>
+          <a:effectRef idx="2">
+            <a:schemeClr val="accent1"/>
+          </a:effectRef>
+          <a:fontRef idx="minor">
+            <a:schemeClr val="lt1"/>
+          </a:fontRef>
+        </p:style>
+        <p:txBody>
+          <a:bodyPr rtlCol="0" anchor="ctr"/>
+          <a:lstStyle/>
+          <a:p>
+            <a:pPr algn="ctr"/>
+          </a:p>
+        </p:txBody>
+      </p:sp>
+      <p:sp>
+        <p:nvSpPr>
+          <p:cNvPr id="10" name="TextBox 9"/>
+          <p:cNvSpPr txBox="1"/>
+          <p:nvPr/>
+        </p:nvSpPr>
+        <p:spPr>
+          <a:xfrm>
+            <a:off x="6510528" y="3429000"/>
+            <a:ext cx="3840480" cy="219456"/>
+          </a:xfrm>
+          <a:prstGeom prst="rect">
+            <a:avLst/>
+          </a:prstGeom>
+          <a:noFill/>
+        </p:spPr>
+        <p:txBody>
+          <a:bodyPr wrap="square" lIns="0" rIns="0" tIns="0" bIns="0">
+            <a:spAutoFit/>
+          </a:bodyPr>
+          <a:lstStyle/>
+          <a:p>
+            <a:pPr algn="l">
+              <a:lnSpc>
+                <a:spcPct val="132000"/>
+              </a:lnSpc>
+            </a:pPr>
+            <a:r>
+              <a:rPr sz="1050" b="1" cap="all" spc="140">
+                <a:solidFill>
+                  <a:srgbClr val="9AE088"/>
+                </a:solidFill>
+                <a:latin typeface="Inter Tight"/>
+              </a:rPr>
+              <a:t>Код</a:t>
+            </a:r>
+          </a:p>
+        </p:txBody>
+      </p:sp>
+      <p:sp>
+        <p:nvSpPr>
+          <p:cNvPr id="11" name="TextBox 10"/>
+          <p:cNvSpPr txBox="1"/>
+          <p:nvPr/>
+        </p:nvSpPr>
+        <p:spPr>
+          <a:xfrm>
+            <a:off x="6510528" y="3730752"/>
+            <a:ext cx="3931920" cy="1097280"/>
+          </a:xfrm>
+          <a:prstGeom prst="rect">
+            <a:avLst/>
+          </a:prstGeom>
+          <a:noFill/>
+        </p:spPr>
+        <p:txBody>
+          <a:bodyPr wrap="square" lIns="0" rIns="0" tIns="0" bIns="0">
+            <a:spAutoFit/>
+          </a:bodyPr>
+          <a:lstStyle/>
+          <a:p>
+            <a:pPr algn="l">
+              <a:lnSpc>
+                <a:spcPct val="150000"/>
+              </a:lnSpc>
+            </a:pPr>
+            <a:r>
+              <a:rPr sz="1700" b="1">
+                <a:solidFill>
+                  <a:srgbClr val="FFFFFF"/>
+                </a:solidFill>
+                <a:latin typeface="Inter Tight"/>
+              </a:rPr>
+              <a:t>индекс 65,0</a:t>
+            </a:r>
+            <a:r>
+              <a:rPr sz="1700" b="0">
+                <a:solidFill>
+                  <a:srgbClr val="9AA1AB"/>
+                </a:solidFill>
+                <a:latin typeface="Inter Tight"/>
+              </a:rPr>
+              <a:t>  →  </a:t>
+            </a:r>
+            <a:r>
+              <a:rPr sz="1700" b="1">
+                <a:solidFill>
+                  <a:srgbClr val="FFFFFF"/>
+                </a:solidFill>
+                <a:latin typeface="Inter Tight"/>
+              </a:rPr>
+              <a:t>категория «Среднее»</a:t>
+            </a:r>
+            <a:r>
+              <a:rPr sz="1300" b="0">
+                <a:solidFill>
+                  <a:srgbClr val="C8D4C8"/>
+                </a:solidFill>
+                <a:latin typeface="Inter Tight"/>
+              </a:rPr>
+              <a:t>
+флаг эскалации поднимает до «Высокого»</a:t>
+            </a:r>
+          </a:p>
+        </p:txBody>
+      </p:sp>
+      <p:sp>
+        <p:nvSpPr>
+          <p:cNvPr id="12" name="TextBox 11"/>
+          <p:cNvSpPr txBox="1"/>
+          <p:nvPr/>
+        </p:nvSpPr>
+        <p:spPr>
+          <a:xfrm>
+            <a:off x="731520" y="5257800"/>
+            <a:ext cx="10058400" cy="640080"/>
           </a:xfrm>
           <a:prstGeom prst="rect">
             <a:avLst/>
@@ -4431,27 +4757,36 @@
               </a:lnSpc>
             </a:pPr>
             <a:r>
-              <a:rPr sz="1550" b="0">
-                <a:solidFill>
-                  <a:srgbClr val="6B7280"/>
+              <a:rPr sz="1450" b="1">
+                <a:solidFill>
+                  <a:srgbClr val="231F20"/>
                 </a:solidFill>
                 <a:latin typeface="Inter Tight"/>
               </a:rPr>
-              <a:t>В контракте ответа модели полей «индекс» и «категория» нет вовсе — она физически не может их вернуть. Поэтому оценку можно проверить, объяснить и поправить.</a:t>
-            </a:r>
-          </a:p>
-        </p:txBody>
-      </p:sp>
-      <p:sp>
-        <p:nvSpPr>
-          <p:cNvPr id="6" name="TextBox 5"/>
+              <a:t>В контракте ответа модели полей «индекс» и «категория» нет вовсе. </a:t>
+            </a:r>
+            <a:r>
+              <a:rPr sz="1450" b="0">
+                <a:solidFill>
+                  <a:srgbClr val="6B7280"/>
+                </a:solidFill>
+                <a:latin typeface="Inter Tight"/>
+              </a:rPr>
+              <a:t>Она физически не может их вернуть — поэтому оценку можно проверить и поправить.</a:t>
+            </a:r>
+          </a:p>
+        </p:txBody>
+      </p:sp>
+      <p:sp>
+        <p:nvSpPr>
+          <p:cNvPr id="13" name="TextBox 12"/>
           <p:cNvSpPr txBox="1"/>
           <p:nvPr/>
         </p:nvSpPr>
         <p:spPr>
           <a:xfrm>
-            <a:off x="1115568" y="4315968"/>
-            <a:ext cx="10058400" cy="822960"/>
+            <a:off x="731520" y="6382512"/>
+            <a:ext cx="8778240" cy="237744"/>
           </a:xfrm>
           <a:prstGeom prst="rect">
             <a:avLst/>
@@ -4470,84 +4805,6 @@
               </a:lnSpc>
             </a:pPr>
             <a:r>
-              <a:rPr sz="3200" b="1">
-                <a:solidFill>
-                  <a:srgbClr val="379123"/>
-                </a:solidFill>
-                <a:latin typeface="Inter Tight"/>
-              </a:rPr>
-              <a:t>ИВ  =  ( Σ балл × вес )  ÷  3  ×  100</a:t>
-            </a:r>
-          </a:p>
-        </p:txBody>
-      </p:sp>
-      <p:sp>
-        <p:nvSpPr>
-          <p:cNvPr id="7" name="TextBox 6"/>
-          <p:cNvSpPr txBox="1"/>
-          <p:nvPr/>
-        </p:nvSpPr>
-        <p:spPr>
-          <a:xfrm>
-            <a:off x="1115568" y="5257800"/>
-            <a:ext cx="9509760" cy="640080"/>
-          </a:xfrm>
-          <a:prstGeom prst="rect">
-            <a:avLst/>
-          </a:prstGeom>
-          <a:noFill/>
-        </p:spPr>
-        <p:txBody>
-          <a:bodyPr wrap="square" lIns="0" rIns="0" tIns="0" bIns="0">
-            <a:spAutoFit/>
-          </a:bodyPr>
-          <a:lstStyle/>
-          <a:p>
-            <a:pPr algn="l">
-              <a:lnSpc>
-                <a:spcPct val="145000"/>
-              </a:lnSpc>
-            </a:pPr>
-            <a:r>
-              <a:rPr sz="1350" b="0">
-                <a:solidFill>
-                  <a:srgbClr val="6B7280"/>
-                </a:solidFill>
-                <a:latin typeface="Inter Tight"/>
-              </a:rPr>
-              <a:t>Веса и пороги — методика заказчика, она у него уже была в Excel. Мы её не придумывали и менять можем только с его согласия.</a:t>
-            </a:r>
-          </a:p>
-        </p:txBody>
-      </p:sp>
-      <p:sp>
-        <p:nvSpPr>
-          <p:cNvPr id="8" name="TextBox 7"/>
-          <p:cNvSpPr txBox="1"/>
-          <p:nvPr/>
-        </p:nvSpPr>
-        <p:spPr>
-          <a:xfrm>
-            <a:off x="731520" y="6382512"/>
-            <a:ext cx="8778240" cy="237744"/>
-          </a:xfrm>
-          <a:prstGeom prst="rect">
-            <a:avLst/>
-          </a:prstGeom>
-          <a:noFill/>
-        </p:spPr>
-        <p:txBody>
-          <a:bodyPr wrap="square" lIns="0" rIns="0" tIns="0" bIns="0">
-            <a:spAutoFit/>
-          </a:bodyPr>
-          <a:lstStyle/>
-          <a:p>
-            <a:pPr algn="l">
-              <a:lnSpc>
-                <a:spcPct val="132000"/>
-              </a:lnSpc>
-            </a:pPr>
-            <a:r>
               <a:rPr sz="950" b="0">
                 <a:solidFill>
                   <a:srgbClr val="9AA1AB"/>
@@ -4561,7 +4818,7 @@
       </p:sp>
       <p:sp>
         <p:nvSpPr>
-          <p:cNvPr id="9" name="TextBox 8"/>
+          <p:cNvPr id="14" name="TextBox 13"/>
           <p:cNvSpPr txBox="1"/>
           <p:nvPr/>
         </p:nvSpPr>
@@ -5727,14 +5984,53 @@
       </p:sp>
       <p:sp>
         <p:nvSpPr>
-          <p:cNvPr id="5" name="Rectangle 4"/>
+          <p:cNvPr id="5" name="TextBox 4"/>
+          <p:cNvSpPr txBox="1"/>
+          <p:nvPr/>
+        </p:nvSpPr>
+        <p:spPr>
+          <a:xfrm>
+            <a:off x="731520" y="3200400"/>
+            <a:ext cx="5486400" cy="274320"/>
+          </a:xfrm>
+          <a:prstGeom prst="rect">
+            <a:avLst/>
+          </a:prstGeom>
+          <a:noFill/>
+        </p:spPr>
+        <p:txBody>
+          <a:bodyPr wrap="square" lIns="0" rIns="0" tIns="0" bIns="0">
+            <a:spAutoFit/>
+          </a:bodyPr>
+          <a:lstStyle/>
+          <a:p>
+            <a:pPr algn="l">
+              <a:lnSpc>
+                <a:spcPct val="132000"/>
+              </a:lnSpc>
+            </a:pPr>
+            <a:r>
+              <a:rPr sz="1300" b="0">
+                <a:solidFill>
+                  <a:srgbClr val="6B7280"/>
+                </a:solidFill>
+                <a:latin typeface="Inter Tight"/>
+              </a:rPr>
+              <a:t>Год работы модели на потоке 150 материалов в сутки</a:t>
+            </a:r>
+          </a:p>
+        </p:txBody>
+      </p:sp>
+      <p:sp>
+        <p:nvSpPr>
+          <p:cNvPr id="6" name="Rectangle 5"/>
           <p:cNvSpPr/>
           <p:nvPr/>
         </p:nvSpPr>
         <p:spPr>
           <a:xfrm>
-            <a:off x="731520" y="3035808"/>
-            <a:ext cx="50292" cy="914400"/>
+            <a:off x="731520" y="3520440"/>
+            <a:ext cx="42245" cy="310896"/>
           </a:xfrm>
           <a:prstGeom prst="rect">
             <a:avLst/>
@@ -5771,53 +6067,14 @@
       </p:sp>
       <p:sp>
         <p:nvSpPr>
-          <p:cNvPr id="6" name="TextBox 5"/>
-          <p:cNvSpPr txBox="1"/>
-          <p:nvPr/>
-        </p:nvSpPr>
-        <p:spPr>
-          <a:xfrm>
-            <a:off x="1115568" y="3017520"/>
-            <a:ext cx="4572000" cy="851337"/>
-          </a:xfrm>
-          <a:prstGeom prst="rect">
-            <a:avLst/>
-          </a:prstGeom>
-          <a:noFill/>
-        </p:spPr>
-        <p:txBody>
-          <a:bodyPr wrap="square" lIns="0" rIns="0" tIns="0" bIns="0">
-            <a:spAutoFit/>
-          </a:bodyPr>
-          <a:lstStyle/>
-          <a:p>
-            <a:pPr algn="l">
-              <a:lnSpc>
-                <a:spcPct val="100000"/>
-              </a:lnSpc>
-            </a:pPr>
-            <a:r>
-              <a:rPr sz="5400" b="1">
-                <a:solidFill>
-                  <a:srgbClr val="379123"/>
-                </a:solidFill>
-                <a:latin typeface="Inter Tight"/>
-              </a:rPr>
-              <a:t>≈ 2 100 ₽</a:t>
-            </a:r>
-          </a:p>
-        </p:txBody>
-      </p:sp>
-      <p:sp>
-        <p:nvSpPr>
           <p:cNvPr id="7" name="TextBox 6"/>
           <p:cNvSpPr txBox="1"/>
           <p:nvPr/>
         </p:nvSpPr>
         <p:spPr>
           <a:xfrm>
-            <a:off x="1115568" y="3977639"/>
-            <a:ext cx="4572000" cy="219456"/>
+            <a:off x="896112" y="3502152"/>
+            <a:ext cx="3657600" cy="320040"/>
           </a:xfrm>
           <a:prstGeom prst="rect">
             <a:avLst/>
@@ -5836,13 +6093,13 @@
               </a:lnSpc>
             </a:pPr>
             <a:r>
-              <a:rPr sz="1050" b="1" cap="all" spc="140">
-                <a:solidFill>
-                  <a:srgbClr val="6B7280"/>
+              <a:rPr sz="1700" b="1">
+                <a:solidFill>
+                  <a:srgbClr val="379123"/>
                 </a:solidFill>
                 <a:latin typeface="Inter Tight"/>
               </a:rPr>
-              <a:t>в год</a:t>
+              <a:t>≈ 2 100 ₽</a:t>
             </a:r>
           </a:p>
         </p:txBody>
@@ -5855,8 +6112,8 @@
         </p:nvSpPr>
         <p:spPr>
           <a:xfrm>
-            <a:off x="1115568" y="4315968"/>
-            <a:ext cx="4389120" cy="914400"/>
+            <a:off x="731520" y="4343400"/>
+            <a:ext cx="7315200" cy="274320"/>
           </a:xfrm>
           <a:prstGeom prst="rect">
             <a:avLst/>
@@ -5871,17 +6128,17 @@
           <a:p>
             <a:pPr algn="l">
               <a:lnSpc>
-                <a:spcPct val="145000"/>
+                <a:spcPct val="132000"/>
               </a:lnSpc>
             </a:pPr>
             <a:r>
-              <a:rPr sz="1350" b="0">
+              <a:rPr sz="1300" b="0">
                 <a:solidFill>
                   <a:srgbClr val="6B7280"/>
                 </a:solidFill>
                 <a:latin typeface="Inter Tight"/>
               </a:rPr>
-              <a:t>Полная обработка потока в 150 материалов в сутки: саммари, заземление, классификация и оценка. Четыре копейки за материал.</a:t>
+              <a:t>Один штраф по ФЗ № 295-ФЗ для операторов цифровых платформ, верхняя граница</a:t>
             </a:r>
           </a:p>
         </p:txBody>
@@ -5894,8 +6151,8 @@
         </p:nvSpPr>
         <p:spPr>
           <a:xfrm>
-            <a:off x="6492240" y="3035808"/>
-            <a:ext cx="50292" cy="914400"/>
+            <a:off x="731520" y="4663440"/>
+            <a:ext cx="10058400" cy="310896"/>
           </a:xfrm>
           <a:prstGeom prst="rect">
             <a:avLst/>
@@ -5938,47 +6195,8 @@
         </p:nvSpPr>
         <p:spPr>
           <a:xfrm>
-            <a:off x="6876288" y="3017520"/>
-            <a:ext cx="4754880" cy="851337"/>
-          </a:xfrm>
-          <a:prstGeom prst="rect">
-            <a:avLst/>
-          </a:prstGeom>
-          <a:noFill/>
-        </p:spPr>
-        <p:txBody>
-          <a:bodyPr wrap="square" lIns="0" rIns="0" tIns="0" bIns="0">
-            <a:spAutoFit/>
-          </a:bodyPr>
-          <a:lstStyle/>
-          <a:p>
-            <a:pPr algn="l">
-              <a:lnSpc>
-                <a:spcPct val="100000"/>
-              </a:lnSpc>
-            </a:pPr>
-            <a:r>
-              <a:rPr sz="5400" b="1">
-                <a:solidFill>
-                  <a:srgbClr val="231F20"/>
-                </a:solidFill>
-                <a:latin typeface="Inter Tight"/>
-              </a:rPr>
-              <a:t>500 000 ₽</a:t>
-            </a:r>
-          </a:p>
-        </p:txBody>
-      </p:sp>
-      <p:sp>
-        <p:nvSpPr>
-          <p:cNvPr id="11" name="TextBox 10"/>
-          <p:cNvSpPr txBox="1"/>
-          <p:nvPr/>
-        </p:nvSpPr>
-        <p:spPr>
-          <a:xfrm>
-            <a:off x="6876288" y="3977639"/>
-            <a:ext cx="4754880" cy="219456"/>
+            <a:off x="896112" y="4645152"/>
+            <a:ext cx="3657600" cy="320040"/>
           </a:xfrm>
           <a:prstGeom prst="rect">
             <a:avLst/>
@@ -5997,27 +6215,27 @@
               </a:lnSpc>
             </a:pPr>
             <a:r>
-              <a:rPr sz="1050" b="1" cap="all" spc="140">
-                <a:solidFill>
-                  <a:srgbClr val="6B7280"/>
+              <a:rPr sz="1700" b="1">
+                <a:solidFill>
+                  <a:srgbClr val="FFFFFF"/>
                 </a:solidFill>
                 <a:latin typeface="Inter Tight"/>
               </a:rPr>
-              <a:t>один штраф</a:t>
-            </a:r>
-          </a:p>
-        </p:txBody>
-      </p:sp>
-      <p:sp>
-        <p:nvSpPr>
-          <p:cNvPr id="12" name="TextBox 11"/>
+              <a:t>500 000 ₽</a:t>
+            </a:r>
+          </a:p>
+        </p:txBody>
+      </p:sp>
+      <p:sp>
+        <p:nvSpPr>
+          <p:cNvPr id="11" name="TextBox 10"/>
           <p:cNvSpPr txBox="1"/>
           <p:nvPr/>
         </p:nvSpPr>
         <p:spPr>
           <a:xfrm>
-            <a:off x="6876288" y="4315968"/>
-            <a:ext cx="4572000" cy="914400"/>
+            <a:off x="731520" y="5257800"/>
+            <a:ext cx="10698480" cy="640080"/>
           </a:xfrm>
           <a:prstGeom prst="rect">
             <a:avLst/>
@@ -6036,27 +6254,36 @@
               </a:lnSpc>
             </a:pPr>
             <a:r>
-              <a:rPr sz="1350" b="0">
-                <a:solidFill>
-                  <a:srgbClr val="6B7280"/>
+              <a:rPr sz="1450" b="1">
+                <a:solidFill>
+                  <a:srgbClr val="231F20"/>
                 </a:solidFill>
                 <a:latin typeface="Inter Tight"/>
               </a:rPr>
-              <a:t>Верхняя граница по ФЗ № 295-ФЗ для операторов цифровых платформ. Одного пропуска хватает, чтобы перекрыть двести лет работы модели.</a:t>
-            </a:r>
-          </a:p>
-        </p:txBody>
-      </p:sp>
-      <p:sp>
-        <p:nvSpPr>
-          <p:cNvPr id="13" name="TextBox 12"/>
+              <a:t>Полосы в одном масштабе. </a:t>
+            </a:r>
+            <a:r>
+              <a:rPr sz="1450" b="0">
+                <a:solidFill>
+                  <a:srgbClr val="6B7280"/>
+                </a:solidFill>
+                <a:latin typeface="Inter Tight"/>
+              </a:rPr>
+              <a:t>Верхняя — годовая стоимость обработки: четыре копейки за материал. Одного пропущенного документа хватает, чтобы перекрыть двести лет её работы.</a:t>
+            </a:r>
+          </a:p>
+        </p:txBody>
+      </p:sp>
+      <p:sp>
+        <p:nvSpPr>
+          <p:cNvPr id="12" name="TextBox 11"/>
           <p:cNvSpPr txBox="1"/>
           <p:nvPr/>
         </p:nvSpPr>
         <p:spPr>
           <a:xfrm>
-            <a:off x="731520" y="5715000"/>
-            <a:ext cx="10698480" cy="365760"/>
+            <a:off x="731520" y="5989320"/>
+            <a:ext cx="10698480" cy="274320"/>
           </a:xfrm>
           <a:prstGeom prst="rect">
             <a:avLst/>
@@ -6088,7 +6315,7 @@
       </p:sp>
       <p:sp>
         <p:nvSpPr>
-          <p:cNvPr id="14" name="TextBox 13"/>
+          <p:cNvPr id="13" name="TextBox 12"/>
           <p:cNvSpPr txBox="1"/>
           <p:nvPr/>
         </p:nvSpPr>
@@ -6127,7 +6354,7 @@
       </p:sp>
       <p:sp>
         <p:nvSpPr>
-          <p:cNvPr id="15" name="TextBox 14"/>
+          <p:cNvPr id="14" name="TextBox 13"/>
           <p:cNvSpPr txBox="1"/>
           <p:nvPr/>
         </p:nvSpPr>
@@ -6317,8 +6544,2144 @@
         </p:nvSpPr>
         <p:spPr>
           <a:xfrm>
-            <a:off x="731520" y="2514600"/>
-            <a:ext cx="3840480" cy="882868"/>
+            <a:off x="1115568" y="1965960"/>
+            <a:ext cx="9692640" cy="365760"/>
+          </a:xfrm>
+          <a:prstGeom prst="rect">
+            <a:avLst/>
+          </a:prstGeom>
+          <a:noFill/>
+        </p:spPr>
+        <p:txBody>
+          <a:bodyPr wrap="square" lIns="0" rIns="0" tIns="0" bIns="0">
+            <a:spAutoFit/>
+          </a:bodyPr>
+          <a:lstStyle/>
+          <a:p>
+            <a:pPr algn="l">
+              <a:lnSpc>
+                <a:spcPct val="132000"/>
+              </a:lnSpc>
+            </a:pPr>
+            <a:r>
+              <a:rPr sz="1400" b="0">
+                <a:solidFill>
+                  <a:srgbClr val="6B7280"/>
+                </a:solidFill>
+                <a:latin typeface="Inter Tight"/>
+              </a:rPr>
+              <a:t>Сорок две карточки, баллы в них проставлены человеком. Одна клетка — одна карточка.</a:t>
+            </a:r>
+          </a:p>
+        </p:txBody>
+      </p:sp>
+      <p:sp>
+        <p:nvSpPr>
+          <p:cNvPr id="6" name="Rectangle 5"/>
+          <p:cNvSpPr/>
+          <p:nvPr/>
+        </p:nvSpPr>
+        <p:spPr>
+          <a:xfrm>
+            <a:off x="731520" y="2606040"/>
+            <a:ext cx="384048" cy="384048"/>
+          </a:xfrm>
+          <a:prstGeom prst="rect">
+            <a:avLst/>
+          </a:prstGeom>
+          <a:solidFill>
+            <a:srgbClr val="43B02A"/>
+          </a:solidFill>
+          <a:ln>
+            <a:noFill/>
+          </a:ln>
+          <a:effectLst/>
+        </p:spPr>
+        <p:style>
+          <a:lnRef idx="1">
+            <a:schemeClr val="accent1"/>
+          </a:lnRef>
+          <a:fillRef idx="3">
+            <a:schemeClr val="accent1"/>
+          </a:fillRef>
+          <a:effectRef idx="2">
+            <a:schemeClr val="accent1"/>
+          </a:effectRef>
+          <a:fontRef idx="minor">
+            <a:schemeClr val="lt1"/>
+          </a:fontRef>
+        </p:style>
+        <p:txBody>
+          <a:bodyPr rtlCol="0" anchor="ctr"/>
+          <a:lstStyle/>
+          <a:p>
+            <a:pPr algn="ctr"/>
+          </a:p>
+        </p:txBody>
+      </p:sp>
+      <p:sp>
+        <p:nvSpPr>
+          <p:cNvPr id="7" name="Rectangle 6"/>
+          <p:cNvSpPr/>
+          <p:nvPr/>
+        </p:nvSpPr>
+        <p:spPr>
+          <a:xfrm>
+            <a:off x="1197864" y="2606040"/>
+            <a:ext cx="384048" cy="384048"/>
+          </a:xfrm>
+          <a:prstGeom prst="rect">
+            <a:avLst/>
+          </a:prstGeom>
+          <a:solidFill>
+            <a:srgbClr val="43B02A"/>
+          </a:solidFill>
+          <a:ln>
+            <a:noFill/>
+          </a:ln>
+          <a:effectLst/>
+        </p:spPr>
+        <p:style>
+          <a:lnRef idx="1">
+            <a:schemeClr val="accent1"/>
+          </a:lnRef>
+          <a:fillRef idx="3">
+            <a:schemeClr val="accent1"/>
+          </a:fillRef>
+          <a:effectRef idx="2">
+            <a:schemeClr val="accent1"/>
+          </a:effectRef>
+          <a:fontRef idx="minor">
+            <a:schemeClr val="lt1"/>
+          </a:fontRef>
+        </p:style>
+        <p:txBody>
+          <a:bodyPr rtlCol="0" anchor="ctr"/>
+          <a:lstStyle/>
+          <a:p>
+            <a:pPr algn="ctr"/>
+          </a:p>
+        </p:txBody>
+      </p:sp>
+      <p:sp>
+        <p:nvSpPr>
+          <p:cNvPr id="8" name="Rectangle 7"/>
+          <p:cNvSpPr/>
+          <p:nvPr/>
+        </p:nvSpPr>
+        <p:spPr>
+          <a:xfrm>
+            <a:off x="1664208" y="2606040"/>
+            <a:ext cx="384048" cy="384048"/>
+          </a:xfrm>
+          <a:prstGeom prst="rect">
+            <a:avLst/>
+          </a:prstGeom>
+          <a:solidFill>
+            <a:srgbClr val="43B02A"/>
+          </a:solidFill>
+          <a:ln>
+            <a:noFill/>
+          </a:ln>
+          <a:effectLst/>
+        </p:spPr>
+        <p:style>
+          <a:lnRef idx="1">
+            <a:schemeClr val="accent1"/>
+          </a:lnRef>
+          <a:fillRef idx="3">
+            <a:schemeClr val="accent1"/>
+          </a:fillRef>
+          <a:effectRef idx="2">
+            <a:schemeClr val="accent1"/>
+          </a:effectRef>
+          <a:fontRef idx="minor">
+            <a:schemeClr val="lt1"/>
+          </a:fontRef>
+        </p:style>
+        <p:txBody>
+          <a:bodyPr rtlCol="0" anchor="ctr"/>
+          <a:lstStyle/>
+          <a:p>
+            <a:pPr algn="ctr"/>
+          </a:p>
+        </p:txBody>
+      </p:sp>
+      <p:sp>
+        <p:nvSpPr>
+          <p:cNvPr id="9" name="Rectangle 8"/>
+          <p:cNvSpPr/>
+          <p:nvPr/>
+        </p:nvSpPr>
+        <p:spPr>
+          <a:xfrm>
+            <a:off x="2130552" y="2606040"/>
+            <a:ext cx="384048" cy="384048"/>
+          </a:xfrm>
+          <a:prstGeom prst="rect">
+            <a:avLst/>
+          </a:prstGeom>
+          <a:solidFill>
+            <a:srgbClr val="43B02A"/>
+          </a:solidFill>
+          <a:ln>
+            <a:noFill/>
+          </a:ln>
+          <a:effectLst/>
+        </p:spPr>
+        <p:style>
+          <a:lnRef idx="1">
+            <a:schemeClr val="accent1"/>
+          </a:lnRef>
+          <a:fillRef idx="3">
+            <a:schemeClr val="accent1"/>
+          </a:fillRef>
+          <a:effectRef idx="2">
+            <a:schemeClr val="accent1"/>
+          </a:effectRef>
+          <a:fontRef idx="minor">
+            <a:schemeClr val="lt1"/>
+          </a:fontRef>
+        </p:style>
+        <p:txBody>
+          <a:bodyPr rtlCol="0" anchor="ctr"/>
+          <a:lstStyle/>
+          <a:p>
+            <a:pPr algn="ctr"/>
+          </a:p>
+        </p:txBody>
+      </p:sp>
+      <p:sp>
+        <p:nvSpPr>
+          <p:cNvPr id="10" name="Rectangle 9"/>
+          <p:cNvSpPr/>
+          <p:nvPr/>
+        </p:nvSpPr>
+        <p:spPr>
+          <a:xfrm>
+            <a:off x="2596896" y="2606040"/>
+            <a:ext cx="384048" cy="384048"/>
+          </a:xfrm>
+          <a:prstGeom prst="rect">
+            <a:avLst/>
+          </a:prstGeom>
+          <a:solidFill>
+            <a:srgbClr val="43B02A"/>
+          </a:solidFill>
+          <a:ln>
+            <a:noFill/>
+          </a:ln>
+          <a:effectLst/>
+        </p:spPr>
+        <p:style>
+          <a:lnRef idx="1">
+            <a:schemeClr val="accent1"/>
+          </a:lnRef>
+          <a:fillRef idx="3">
+            <a:schemeClr val="accent1"/>
+          </a:fillRef>
+          <a:effectRef idx="2">
+            <a:schemeClr val="accent1"/>
+          </a:effectRef>
+          <a:fontRef idx="minor">
+            <a:schemeClr val="lt1"/>
+          </a:fontRef>
+        </p:style>
+        <p:txBody>
+          <a:bodyPr rtlCol="0" anchor="ctr"/>
+          <a:lstStyle/>
+          <a:p>
+            <a:pPr algn="ctr"/>
+          </a:p>
+        </p:txBody>
+      </p:sp>
+      <p:sp>
+        <p:nvSpPr>
+          <p:cNvPr id="11" name="Rectangle 10"/>
+          <p:cNvSpPr/>
+          <p:nvPr/>
+        </p:nvSpPr>
+        <p:spPr>
+          <a:xfrm>
+            <a:off x="3063240" y="2606040"/>
+            <a:ext cx="384048" cy="384048"/>
+          </a:xfrm>
+          <a:prstGeom prst="rect">
+            <a:avLst/>
+          </a:prstGeom>
+          <a:solidFill>
+            <a:srgbClr val="43B02A"/>
+          </a:solidFill>
+          <a:ln>
+            <a:noFill/>
+          </a:ln>
+          <a:effectLst/>
+        </p:spPr>
+        <p:style>
+          <a:lnRef idx="1">
+            <a:schemeClr val="accent1"/>
+          </a:lnRef>
+          <a:fillRef idx="3">
+            <a:schemeClr val="accent1"/>
+          </a:fillRef>
+          <a:effectRef idx="2">
+            <a:schemeClr val="accent1"/>
+          </a:effectRef>
+          <a:fontRef idx="minor">
+            <a:schemeClr val="lt1"/>
+          </a:fontRef>
+        </p:style>
+        <p:txBody>
+          <a:bodyPr rtlCol="0" anchor="ctr"/>
+          <a:lstStyle/>
+          <a:p>
+            <a:pPr algn="ctr"/>
+          </a:p>
+        </p:txBody>
+      </p:sp>
+      <p:sp>
+        <p:nvSpPr>
+          <p:cNvPr id="12" name="Rectangle 11"/>
+          <p:cNvSpPr/>
+          <p:nvPr/>
+        </p:nvSpPr>
+        <p:spPr>
+          <a:xfrm>
+            <a:off x="3529584" y="2606040"/>
+            <a:ext cx="384048" cy="384048"/>
+          </a:xfrm>
+          <a:prstGeom prst="rect">
+            <a:avLst/>
+          </a:prstGeom>
+          <a:solidFill>
+            <a:srgbClr val="43B02A"/>
+          </a:solidFill>
+          <a:ln>
+            <a:noFill/>
+          </a:ln>
+          <a:effectLst/>
+        </p:spPr>
+        <p:style>
+          <a:lnRef idx="1">
+            <a:schemeClr val="accent1"/>
+          </a:lnRef>
+          <a:fillRef idx="3">
+            <a:schemeClr val="accent1"/>
+          </a:fillRef>
+          <a:effectRef idx="2">
+            <a:schemeClr val="accent1"/>
+          </a:effectRef>
+          <a:fontRef idx="minor">
+            <a:schemeClr val="lt1"/>
+          </a:fontRef>
+        </p:style>
+        <p:txBody>
+          <a:bodyPr rtlCol="0" anchor="ctr"/>
+          <a:lstStyle/>
+          <a:p>
+            <a:pPr algn="ctr"/>
+          </a:p>
+        </p:txBody>
+      </p:sp>
+      <p:sp>
+        <p:nvSpPr>
+          <p:cNvPr id="13" name="Rectangle 12"/>
+          <p:cNvSpPr/>
+          <p:nvPr/>
+        </p:nvSpPr>
+        <p:spPr>
+          <a:xfrm>
+            <a:off x="3995928" y="2606040"/>
+            <a:ext cx="384048" cy="384048"/>
+          </a:xfrm>
+          <a:prstGeom prst="rect">
+            <a:avLst/>
+          </a:prstGeom>
+          <a:solidFill>
+            <a:srgbClr val="43B02A"/>
+          </a:solidFill>
+          <a:ln>
+            <a:noFill/>
+          </a:ln>
+          <a:effectLst/>
+        </p:spPr>
+        <p:style>
+          <a:lnRef idx="1">
+            <a:schemeClr val="accent1"/>
+          </a:lnRef>
+          <a:fillRef idx="3">
+            <a:schemeClr val="accent1"/>
+          </a:fillRef>
+          <a:effectRef idx="2">
+            <a:schemeClr val="accent1"/>
+          </a:effectRef>
+          <a:fontRef idx="minor">
+            <a:schemeClr val="lt1"/>
+          </a:fontRef>
+        </p:style>
+        <p:txBody>
+          <a:bodyPr rtlCol="0" anchor="ctr"/>
+          <a:lstStyle/>
+          <a:p>
+            <a:pPr algn="ctr"/>
+          </a:p>
+        </p:txBody>
+      </p:sp>
+      <p:sp>
+        <p:nvSpPr>
+          <p:cNvPr id="14" name="Rectangle 13"/>
+          <p:cNvSpPr/>
+          <p:nvPr/>
+        </p:nvSpPr>
+        <p:spPr>
+          <a:xfrm>
+            <a:off x="4462272" y="2606040"/>
+            <a:ext cx="384048" cy="384048"/>
+          </a:xfrm>
+          <a:prstGeom prst="rect">
+            <a:avLst/>
+          </a:prstGeom>
+          <a:solidFill>
+            <a:srgbClr val="43B02A"/>
+          </a:solidFill>
+          <a:ln>
+            <a:noFill/>
+          </a:ln>
+          <a:effectLst/>
+        </p:spPr>
+        <p:style>
+          <a:lnRef idx="1">
+            <a:schemeClr val="accent1"/>
+          </a:lnRef>
+          <a:fillRef idx="3">
+            <a:schemeClr val="accent1"/>
+          </a:fillRef>
+          <a:effectRef idx="2">
+            <a:schemeClr val="accent1"/>
+          </a:effectRef>
+          <a:fontRef idx="minor">
+            <a:schemeClr val="lt1"/>
+          </a:fontRef>
+        </p:style>
+        <p:txBody>
+          <a:bodyPr rtlCol="0" anchor="ctr"/>
+          <a:lstStyle/>
+          <a:p>
+            <a:pPr algn="ctr"/>
+          </a:p>
+        </p:txBody>
+      </p:sp>
+      <p:sp>
+        <p:nvSpPr>
+          <p:cNvPr id="15" name="Rectangle 14"/>
+          <p:cNvSpPr/>
+          <p:nvPr/>
+        </p:nvSpPr>
+        <p:spPr>
+          <a:xfrm>
+            <a:off x="4928616" y="2606040"/>
+            <a:ext cx="384048" cy="384048"/>
+          </a:xfrm>
+          <a:prstGeom prst="rect">
+            <a:avLst/>
+          </a:prstGeom>
+          <a:solidFill>
+            <a:srgbClr val="43B02A"/>
+          </a:solidFill>
+          <a:ln>
+            <a:noFill/>
+          </a:ln>
+          <a:effectLst/>
+        </p:spPr>
+        <p:style>
+          <a:lnRef idx="1">
+            <a:schemeClr val="accent1"/>
+          </a:lnRef>
+          <a:fillRef idx="3">
+            <a:schemeClr val="accent1"/>
+          </a:fillRef>
+          <a:effectRef idx="2">
+            <a:schemeClr val="accent1"/>
+          </a:effectRef>
+          <a:fontRef idx="minor">
+            <a:schemeClr val="lt1"/>
+          </a:fontRef>
+        </p:style>
+        <p:txBody>
+          <a:bodyPr rtlCol="0" anchor="ctr"/>
+          <a:lstStyle/>
+          <a:p>
+            <a:pPr algn="ctr"/>
+          </a:p>
+        </p:txBody>
+      </p:sp>
+      <p:sp>
+        <p:nvSpPr>
+          <p:cNvPr id="16" name="Rectangle 15"/>
+          <p:cNvSpPr/>
+          <p:nvPr/>
+        </p:nvSpPr>
+        <p:spPr>
+          <a:xfrm>
+            <a:off x="5394960" y="2606040"/>
+            <a:ext cx="384048" cy="384048"/>
+          </a:xfrm>
+          <a:prstGeom prst="rect">
+            <a:avLst/>
+          </a:prstGeom>
+          <a:solidFill>
+            <a:srgbClr val="43B02A"/>
+          </a:solidFill>
+          <a:ln>
+            <a:noFill/>
+          </a:ln>
+          <a:effectLst/>
+        </p:spPr>
+        <p:style>
+          <a:lnRef idx="1">
+            <a:schemeClr val="accent1"/>
+          </a:lnRef>
+          <a:fillRef idx="3">
+            <a:schemeClr val="accent1"/>
+          </a:fillRef>
+          <a:effectRef idx="2">
+            <a:schemeClr val="accent1"/>
+          </a:effectRef>
+          <a:fontRef idx="minor">
+            <a:schemeClr val="lt1"/>
+          </a:fontRef>
+        </p:style>
+        <p:txBody>
+          <a:bodyPr rtlCol="0" anchor="ctr"/>
+          <a:lstStyle/>
+          <a:p>
+            <a:pPr algn="ctr"/>
+          </a:p>
+        </p:txBody>
+      </p:sp>
+      <p:sp>
+        <p:nvSpPr>
+          <p:cNvPr id="17" name="Rectangle 16"/>
+          <p:cNvSpPr/>
+          <p:nvPr/>
+        </p:nvSpPr>
+        <p:spPr>
+          <a:xfrm>
+            <a:off x="5861304" y="2606040"/>
+            <a:ext cx="384048" cy="384048"/>
+          </a:xfrm>
+          <a:prstGeom prst="rect">
+            <a:avLst/>
+          </a:prstGeom>
+          <a:solidFill>
+            <a:srgbClr val="43B02A"/>
+          </a:solidFill>
+          <a:ln>
+            <a:noFill/>
+          </a:ln>
+          <a:effectLst/>
+        </p:spPr>
+        <p:style>
+          <a:lnRef idx="1">
+            <a:schemeClr val="accent1"/>
+          </a:lnRef>
+          <a:fillRef idx="3">
+            <a:schemeClr val="accent1"/>
+          </a:fillRef>
+          <a:effectRef idx="2">
+            <a:schemeClr val="accent1"/>
+          </a:effectRef>
+          <a:fontRef idx="minor">
+            <a:schemeClr val="lt1"/>
+          </a:fontRef>
+        </p:style>
+        <p:txBody>
+          <a:bodyPr rtlCol="0" anchor="ctr"/>
+          <a:lstStyle/>
+          <a:p>
+            <a:pPr algn="ctr"/>
+          </a:p>
+        </p:txBody>
+      </p:sp>
+      <p:sp>
+        <p:nvSpPr>
+          <p:cNvPr id="18" name="Rectangle 17"/>
+          <p:cNvSpPr/>
+          <p:nvPr/>
+        </p:nvSpPr>
+        <p:spPr>
+          <a:xfrm>
+            <a:off x="6327648" y="2606040"/>
+            <a:ext cx="384048" cy="384048"/>
+          </a:xfrm>
+          <a:prstGeom prst="rect">
+            <a:avLst/>
+          </a:prstGeom>
+          <a:solidFill>
+            <a:srgbClr val="43B02A"/>
+          </a:solidFill>
+          <a:ln>
+            <a:noFill/>
+          </a:ln>
+          <a:effectLst/>
+        </p:spPr>
+        <p:style>
+          <a:lnRef idx="1">
+            <a:schemeClr val="accent1"/>
+          </a:lnRef>
+          <a:fillRef idx="3">
+            <a:schemeClr val="accent1"/>
+          </a:fillRef>
+          <a:effectRef idx="2">
+            <a:schemeClr val="accent1"/>
+          </a:effectRef>
+          <a:fontRef idx="minor">
+            <a:schemeClr val="lt1"/>
+          </a:fontRef>
+        </p:style>
+        <p:txBody>
+          <a:bodyPr rtlCol="0" anchor="ctr"/>
+          <a:lstStyle/>
+          <a:p>
+            <a:pPr algn="ctr"/>
+          </a:p>
+        </p:txBody>
+      </p:sp>
+      <p:sp>
+        <p:nvSpPr>
+          <p:cNvPr id="19" name="Rectangle 18"/>
+          <p:cNvSpPr/>
+          <p:nvPr/>
+        </p:nvSpPr>
+        <p:spPr>
+          <a:xfrm>
+            <a:off x="6793992" y="2606040"/>
+            <a:ext cx="384048" cy="384048"/>
+          </a:xfrm>
+          <a:prstGeom prst="rect">
+            <a:avLst/>
+          </a:prstGeom>
+          <a:solidFill>
+            <a:srgbClr val="43B02A"/>
+          </a:solidFill>
+          <a:ln>
+            <a:noFill/>
+          </a:ln>
+          <a:effectLst/>
+        </p:spPr>
+        <p:style>
+          <a:lnRef idx="1">
+            <a:schemeClr val="accent1"/>
+          </a:lnRef>
+          <a:fillRef idx="3">
+            <a:schemeClr val="accent1"/>
+          </a:fillRef>
+          <a:effectRef idx="2">
+            <a:schemeClr val="accent1"/>
+          </a:effectRef>
+          <a:fontRef idx="minor">
+            <a:schemeClr val="lt1"/>
+          </a:fontRef>
+        </p:style>
+        <p:txBody>
+          <a:bodyPr rtlCol="0" anchor="ctr"/>
+          <a:lstStyle/>
+          <a:p>
+            <a:pPr algn="ctr"/>
+          </a:p>
+        </p:txBody>
+      </p:sp>
+      <p:sp>
+        <p:nvSpPr>
+          <p:cNvPr id="20" name="Rectangle 19"/>
+          <p:cNvSpPr/>
+          <p:nvPr/>
+        </p:nvSpPr>
+        <p:spPr>
+          <a:xfrm>
+            <a:off x="731520" y="3072384"/>
+            <a:ext cx="384048" cy="384048"/>
+          </a:xfrm>
+          <a:prstGeom prst="rect">
+            <a:avLst/>
+          </a:prstGeom>
+          <a:solidFill>
+            <a:srgbClr val="43B02A"/>
+          </a:solidFill>
+          <a:ln>
+            <a:noFill/>
+          </a:ln>
+          <a:effectLst/>
+        </p:spPr>
+        <p:style>
+          <a:lnRef idx="1">
+            <a:schemeClr val="accent1"/>
+          </a:lnRef>
+          <a:fillRef idx="3">
+            <a:schemeClr val="accent1"/>
+          </a:fillRef>
+          <a:effectRef idx="2">
+            <a:schemeClr val="accent1"/>
+          </a:effectRef>
+          <a:fontRef idx="minor">
+            <a:schemeClr val="lt1"/>
+          </a:fontRef>
+        </p:style>
+        <p:txBody>
+          <a:bodyPr rtlCol="0" anchor="ctr"/>
+          <a:lstStyle/>
+          <a:p>
+            <a:pPr algn="ctr"/>
+          </a:p>
+        </p:txBody>
+      </p:sp>
+      <p:sp>
+        <p:nvSpPr>
+          <p:cNvPr id="21" name="Rectangle 20"/>
+          <p:cNvSpPr/>
+          <p:nvPr/>
+        </p:nvSpPr>
+        <p:spPr>
+          <a:xfrm>
+            <a:off x="1197864" y="3072384"/>
+            <a:ext cx="384048" cy="384048"/>
+          </a:xfrm>
+          <a:prstGeom prst="rect">
+            <a:avLst/>
+          </a:prstGeom>
+          <a:solidFill>
+            <a:srgbClr val="43B02A"/>
+          </a:solidFill>
+          <a:ln>
+            <a:noFill/>
+          </a:ln>
+          <a:effectLst/>
+        </p:spPr>
+        <p:style>
+          <a:lnRef idx="1">
+            <a:schemeClr val="accent1"/>
+          </a:lnRef>
+          <a:fillRef idx="3">
+            <a:schemeClr val="accent1"/>
+          </a:fillRef>
+          <a:effectRef idx="2">
+            <a:schemeClr val="accent1"/>
+          </a:effectRef>
+          <a:fontRef idx="minor">
+            <a:schemeClr val="lt1"/>
+          </a:fontRef>
+        </p:style>
+        <p:txBody>
+          <a:bodyPr rtlCol="0" anchor="ctr"/>
+          <a:lstStyle/>
+          <a:p>
+            <a:pPr algn="ctr"/>
+          </a:p>
+        </p:txBody>
+      </p:sp>
+      <p:sp>
+        <p:nvSpPr>
+          <p:cNvPr id="22" name="Rectangle 21"/>
+          <p:cNvSpPr/>
+          <p:nvPr/>
+        </p:nvSpPr>
+        <p:spPr>
+          <a:xfrm>
+            <a:off x="1664208" y="3072384"/>
+            <a:ext cx="384048" cy="384048"/>
+          </a:xfrm>
+          <a:prstGeom prst="rect">
+            <a:avLst/>
+          </a:prstGeom>
+          <a:solidFill>
+            <a:srgbClr val="43B02A"/>
+          </a:solidFill>
+          <a:ln>
+            <a:noFill/>
+          </a:ln>
+          <a:effectLst/>
+        </p:spPr>
+        <p:style>
+          <a:lnRef idx="1">
+            <a:schemeClr val="accent1"/>
+          </a:lnRef>
+          <a:fillRef idx="3">
+            <a:schemeClr val="accent1"/>
+          </a:fillRef>
+          <a:effectRef idx="2">
+            <a:schemeClr val="accent1"/>
+          </a:effectRef>
+          <a:fontRef idx="minor">
+            <a:schemeClr val="lt1"/>
+          </a:fontRef>
+        </p:style>
+        <p:txBody>
+          <a:bodyPr rtlCol="0" anchor="ctr"/>
+          <a:lstStyle/>
+          <a:p>
+            <a:pPr algn="ctr"/>
+          </a:p>
+        </p:txBody>
+      </p:sp>
+      <p:sp>
+        <p:nvSpPr>
+          <p:cNvPr id="23" name="Rectangle 22"/>
+          <p:cNvSpPr/>
+          <p:nvPr/>
+        </p:nvSpPr>
+        <p:spPr>
+          <a:xfrm>
+            <a:off x="2130552" y="3072384"/>
+            <a:ext cx="384048" cy="384048"/>
+          </a:xfrm>
+          <a:prstGeom prst="rect">
+            <a:avLst/>
+          </a:prstGeom>
+          <a:solidFill>
+            <a:srgbClr val="43B02A"/>
+          </a:solidFill>
+          <a:ln>
+            <a:noFill/>
+          </a:ln>
+          <a:effectLst/>
+        </p:spPr>
+        <p:style>
+          <a:lnRef idx="1">
+            <a:schemeClr val="accent1"/>
+          </a:lnRef>
+          <a:fillRef idx="3">
+            <a:schemeClr val="accent1"/>
+          </a:fillRef>
+          <a:effectRef idx="2">
+            <a:schemeClr val="accent1"/>
+          </a:effectRef>
+          <a:fontRef idx="minor">
+            <a:schemeClr val="lt1"/>
+          </a:fontRef>
+        </p:style>
+        <p:txBody>
+          <a:bodyPr rtlCol="0" anchor="ctr"/>
+          <a:lstStyle/>
+          <a:p>
+            <a:pPr algn="ctr"/>
+          </a:p>
+        </p:txBody>
+      </p:sp>
+      <p:sp>
+        <p:nvSpPr>
+          <p:cNvPr id="24" name="Rectangle 23"/>
+          <p:cNvSpPr/>
+          <p:nvPr/>
+        </p:nvSpPr>
+        <p:spPr>
+          <a:xfrm>
+            <a:off x="2596896" y="3072384"/>
+            <a:ext cx="384048" cy="384048"/>
+          </a:xfrm>
+          <a:prstGeom prst="rect">
+            <a:avLst/>
+          </a:prstGeom>
+          <a:solidFill>
+            <a:srgbClr val="A8DC98"/>
+          </a:solidFill>
+          <a:ln>
+            <a:noFill/>
+          </a:ln>
+          <a:effectLst/>
+        </p:spPr>
+        <p:style>
+          <a:lnRef idx="1">
+            <a:schemeClr val="accent1"/>
+          </a:lnRef>
+          <a:fillRef idx="3">
+            <a:schemeClr val="accent1"/>
+          </a:fillRef>
+          <a:effectRef idx="2">
+            <a:schemeClr val="accent1"/>
+          </a:effectRef>
+          <a:fontRef idx="minor">
+            <a:schemeClr val="lt1"/>
+          </a:fontRef>
+        </p:style>
+        <p:txBody>
+          <a:bodyPr rtlCol="0" anchor="ctr"/>
+          <a:lstStyle/>
+          <a:p>
+            <a:pPr algn="ctr"/>
+          </a:p>
+        </p:txBody>
+      </p:sp>
+      <p:sp>
+        <p:nvSpPr>
+          <p:cNvPr id="25" name="Rectangle 24"/>
+          <p:cNvSpPr/>
+          <p:nvPr/>
+        </p:nvSpPr>
+        <p:spPr>
+          <a:xfrm>
+            <a:off x="3063240" y="3072384"/>
+            <a:ext cx="384048" cy="384048"/>
+          </a:xfrm>
+          <a:prstGeom prst="rect">
+            <a:avLst/>
+          </a:prstGeom>
+          <a:solidFill>
+            <a:srgbClr val="A8DC98"/>
+          </a:solidFill>
+          <a:ln>
+            <a:noFill/>
+          </a:ln>
+          <a:effectLst/>
+        </p:spPr>
+        <p:style>
+          <a:lnRef idx="1">
+            <a:schemeClr val="accent1"/>
+          </a:lnRef>
+          <a:fillRef idx="3">
+            <a:schemeClr val="accent1"/>
+          </a:fillRef>
+          <a:effectRef idx="2">
+            <a:schemeClr val="accent1"/>
+          </a:effectRef>
+          <a:fontRef idx="minor">
+            <a:schemeClr val="lt1"/>
+          </a:fontRef>
+        </p:style>
+        <p:txBody>
+          <a:bodyPr rtlCol="0" anchor="ctr"/>
+          <a:lstStyle/>
+          <a:p>
+            <a:pPr algn="ctr"/>
+          </a:p>
+        </p:txBody>
+      </p:sp>
+      <p:sp>
+        <p:nvSpPr>
+          <p:cNvPr id="26" name="Rectangle 25"/>
+          <p:cNvSpPr/>
+          <p:nvPr/>
+        </p:nvSpPr>
+        <p:spPr>
+          <a:xfrm>
+            <a:off x="3529584" y="3072384"/>
+            <a:ext cx="384048" cy="384048"/>
+          </a:xfrm>
+          <a:prstGeom prst="rect">
+            <a:avLst/>
+          </a:prstGeom>
+          <a:solidFill>
+            <a:srgbClr val="A8DC98"/>
+          </a:solidFill>
+          <a:ln>
+            <a:noFill/>
+          </a:ln>
+          <a:effectLst/>
+        </p:spPr>
+        <p:style>
+          <a:lnRef idx="1">
+            <a:schemeClr val="accent1"/>
+          </a:lnRef>
+          <a:fillRef idx="3">
+            <a:schemeClr val="accent1"/>
+          </a:fillRef>
+          <a:effectRef idx="2">
+            <a:schemeClr val="accent1"/>
+          </a:effectRef>
+          <a:fontRef idx="minor">
+            <a:schemeClr val="lt1"/>
+          </a:fontRef>
+        </p:style>
+        <p:txBody>
+          <a:bodyPr rtlCol="0" anchor="ctr"/>
+          <a:lstStyle/>
+          <a:p>
+            <a:pPr algn="ctr"/>
+          </a:p>
+        </p:txBody>
+      </p:sp>
+      <p:sp>
+        <p:nvSpPr>
+          <p:cNvPr id="27" name="Rectangle 26"/>
+          <p:cNvSpPr/>
+          <p:nvPr/>
+        </p:nvSpPr>
+        <p:spPr>
+          <a:xfrm>
+            <a:off x="3995928" y="3072384"/>
+            <a:ext cx="384048" cy="384048"/>
+          </a:xfrm>
+          <a:prstGeom prst="rect">
+            <a:avLst/>
+          </a:prstGeom>
+          <a:solidFill>
+            <a:srgbClr val="A8DC98"/>
+          </a:solidFill>
+          <a:ln>
+            <a:noFill/>
+          </a:ln>
+          <a:effectLst/>
+        </p:spPr>
+        <p:style>
+          <a:lnRef idx="1">
+            <a:schemeClr val="accent1"/>
+          </a:lnRef>
+          <a:fillRef idx="3">
+            <a:schemeClr val="accent1"/>
+          </a:fillRef>
+          <a:effectRef idx="2">
+            <a:schemeClr val="accent1"/>
+          </a:effectRef>
+          <a:fontRef idx="minor">
+            <a:schemeClr val="lt1"/>
+          </a:fontRef>
+        </p:style>
+        <p:txBody>
+          <a:bodyPr rtlCol="0" anchor="ctr"/>
+          <a:lstStyle/>
+          <a:p>
+            <a:pPr algn="ctr"/>
+          </a:p>
+        </p:txBody>
+      </p:sp>
+      <p:sp>
+        <p:nvSpPr>
+          <p:cNvPr id="28" name="Rectangle 27"/>
+          <p:cNvSpPr/>
+          <p:nvPr/>
+        </p:nvSpPr>
+        <p:spPr>
+          <a:xfrm>
+            <a:off x="4462272" y="3072384"/>
+            <a:ext cx="384048" cy="384048"/>
+          </a:xfrm>
+          <a:prstGeom prst="rect">
+            <a:avLst/>
+          </a:prstGeom>
+          <a:solidFill>
+            <a:srgbClr val="A8DC98"/>
+          </a:solidFill>
+          <a:ln>
+            <a:noFill/>
+          </a:ln>
+          <a:effectLst/>
+        </p:spPr>
+        <p:style>
+          <a:lnRef idx="1">
+            <a:schemeClr val="accent1"/>
+          </a:lnRef>
+          <a:fillRef idx="3">
+            <a:schemeClr val="accent1"/>
+          </a:fillRef>
+          <a:effectRef idx="2">
+            <a:schemeClr val="accent1"/>
+          </a:effectRef>
+          <a:fontRef idx="minor">
+            <a:schemeClr val="lt1"/>
+          </a:fontRef>
+        </p:style>
+        <p:txBody>
+          <a:bodyPr rtlCol="0" anchor="ctr"/>
+          <a:lstStyle/>
+          <a:p>
+            <a:pPr algn="ctr"/>
+          </a:p>
+        </p:txBody>
+      </p:sp>
+      <p:sp>
+        <p:nvSpPr>
+          <p:cNvPr id="29" name="Rectangle 28"/>
+          <p:cNvSpPr/>
+          <p:nvPr/>
+        </p:nvSpPr>
+        <p:spPr>
+          <a:xfrm>
+            <a:off x="4928616" y="3072384"/>
+            <a:ext cx="384048" cy="384048"/>
+          </a:xfrm>
+          <a:prstGeom prst="rect">
+            <a:avLst/>
+          </a:prstGeom>
+          <a:solidFill>
+            <a:srgbClr val="A8DC98"/>
+          </a:solidFill>
+          <a:ln>
+            <a:noFill/>
+          </a:ln>
+          <a:effectLst/>
+        </p:spPr>
+        <p:style>
+          <a:lnRef idx="1">
+            <a:schemeClr val="accent1"/>
+          </a:lnRef>
+          <a:fillRef idx="3">
+            <a:schemeClr val="accent1"/>
+          </a:fillRef>
+          <a:effectRef idx="2">
+            <a:schemeClr val="accent1"/>
+          </a:effectRef>
+          <a:fontRef idx="minor">
+            <a:schemeClr val="lt1"/>
+          </a:fontRef>
+        </p:style>
+        <p:txBody>
+          <a:bodyPr rtlCol="0" anchor="ctr"/>
+          <a:lstStyle/>
+          <a:p>
+            <a:pPr algn="ctr"/>
+          </a:p>
+        </p:txBody>
+      </p:sp>
+      <p:sp>
+        <p:nvSpPr>
+          <p:cNvPr id="30" name="Rectangle 29"/>
+          <p:cNvSpPr/>
+          <p:nvPr/>
+        </p:nvSpPr>
+        <p:spPr>
+          <a:xfrm>
+            <a:off x="5394960" y="3072384"/>
+            <a:ext cx="384048" cy="384048"/>
+          </a:xfrm>
+          <a:prstGeom prst="rect">
+            <a:avLst/>
+          </a:prstGeom>
+          <a:solidFill>
+            <a:srgbClr val="A8DC98"/>
+          </a:solidFill>
+          <a:ln>
+            <a:noFill/>
+          </a:ln>
+          <a:effectLst/>
+        </p:spPr>
+        <p:style>
+          <a:lnRef idx="1">
+            <a:schemeClr val="accent1"/>
+          </a:lnRef>
+          <a:fillRef idx="3">
+            <a:schemeClr val="accent1"/>
+          </a:fillRef>
+          <a:effectRef idx="2">
+            <a:schemeClr val="accent1"/>
+          </a:effectRef>
+          <a:fontRef idx="minor">
+            <a:schemeClr val="lt1"/>
+          </a:fontRef>
+        </p:style>
+        <p:txBody>
+          <a:bodyPr rtlCol="0" anchor="ctr"/>
+          <a:lstStyle/>
+          <a:p>
+            <a:pPr algn="ctr"/>
+          </a:p>
+        </p:txBody>
+      </p:sp>
+      <p:sp>
+        <p:nvSpPr>
+          <p:cNvPr id="31" name="Rectangle 30"/>
+          <p:cNvSpPr/>
+          <p:nvPr/>
+        </p:nvSpPr>
+        <p:spPr>
+          <a:xfrm>
+            <a:off x="5861304" y="3072384"/>
+            <a:ext cx="384048" cy="384048"/>
+          </a:xfrm>
+          <a:prstGeom prst="rect">
+            <a:avLst/>
+          </a:prstGeom>
+          <a:solidFill>
+            <a:srgbClr val="A8DC98"/>
+          </a:solidFill>
+          <a:ln>
+            <a:noFill/>
+          </a:ln>
+          <a:effectLst/>
+        </p:spPr>
+        <p:style>
+          <a:lnRef idx="1">
+            <a:schemeClr val="accent1"/>
+          </a:lnRef>
+          <a:fillRef idx="3">
+            <a:schemeClr val="accent1"/>
+          </a:fillRef>
+          <a:effectRef idx="2">
+            <a:schemeClr val="accent1"/>
+          </a:effectRef>
+          <a:fontRef idx="minor">
+            <a:schemeClr val="lt1"/>
+          </a:fontRef>
+        </p:style>
+        <p:txBody>
+          <a:bodyPr rtlCol="0" anchor="ctr"/>
+          <a:lstStyle/>
+          <a:p>
+            <a:pPr algn="ctr"/>
+          </a:p>
+        </p:txBody>
+      </p:sp>
+      <p:sp>
+        <p:nvSpPr>
+          <p:cNvPr id="32" name="Rectangle 31"/>
+          <p:cNvSpPr/>
+          <p:nvPr/>
+        </p:nvSpPr>
+        <p:spPr>
+          <a:xfrm>
+            <a:off x="6327648" y="3072384"/>
+            <a:ext cx="384048" cy="384048"/>
+          </a:xfrm>
+          <a:prstGeom prst="rect">
+            <a:avLst/>
+          </a:prstGeom>
+          <a:solidFill>
+            <a:srgbClr val="A8DC98"/>
+          </a:solidFill>
+          <a:ln>
+            <a:noFill/>
+          </a:ln>
+          <a:effectLst/>
+        </p:spPr>
+        <p:style>
+          <a:lnRef idx="1">
+            <a:schemeClr val="accent1"/>
+          </a:lnRef>
+          <a:fillRef idx="3">
+            <a:schemeClr val="accent1"/>
+          </a:fillRef>
+          <a:effectRef idx="2">
+            <a:schemeClr val="accent1"/>
+          </a:effectRef>
+          <a:fontRef idx="minor">
+            <a:schemeClr val="lt1"/>
+          </a:fontRef>
+        </p:style>
+        <p:txBody>
+          <a:bodyPr rtlCol="0" anchor="ctr"/>
+          <a:lstStyle/>
+          <a:p>
+            <a:pPr algn="ctr"/>
+          </a:p>
+        </p:txBody>
+      </p:sp>
+      <p:sp>
+        <p:nvSpPr>
+          <p:cNvPr id="33" name="Rectangle 32"/>
+          <p:cNvSpPr/>
+          <p:nvPr/>
+        </p:nvSpPr>
+        <p:spPr>
+          <a:xfrm>
+            <a:off x="6793992" y="3072384"/>
+            <a:ext cx="384048" cy="384048"/>
+          </a:xfrm>
+          <a:prstGeom prst="rect">
+            <a:avLst/>
+          </a:prstGeom>
+          <a:solidFill>
+            <a:srgbClr val="A8DC98"/>
+          </a:solidFill>
+          <a:ln>
+            <a:noFill/>
+          </a:ln>
+          <a:effectLst/>
+        </p:spPr>
+        <p:style>
+          <a:lnRef idx="1">
+            <a:schemeClr val="accent1"/>
+          </a:lnRef>
+          <a:fillRef idx="3">
+            <a:schemeClr val="accent1"/>
+          </a:fillRef>
+          <a:effectRef idx="2">
+            <a:schemeClr val="accent1"/>
+          </a:effectRef>
+          <a:fontRef idx="minor">
+            <a:schemeClr val="lt1"/>
+          </a:fontRef>
+        </p:style>
+        <p:txBody>
+          <a:bodyPr rtlCol="0" anchor="ctr"/>
+          <a:lstStyle/>
+          <a:p>
+            <a:pPr algn="ctr"/>
+          </a:p>
+        </p:txBody>
+      </p:sp>
+      <p:sp>
+        <p:nvSpPr>
+          <p:cNvPr id="34" name="Rectangle 33"/>
+          <p:cNvSpPr/>
+          <p:nvPr/>
+        </p:nvSpPr>
+        <p:spPr>
+          <a:xfrm>
+            <a:off x="731520" y="3538728"/>
+            <a:ext cx="384048" cy="384048"/>
+          </a:xfrm>
+          <a:prstGeom prst="rect">
+            <a:avLst/>
+          </a:prstGeom>
+          <a:solidFill>
+            <a:srgbClr val="A8DC98"/>
+          </a:solidFill>
+          <a:ln>
+            <a:noFill/>
+          </a:ln>
+          <a:effectLst/>
+        </p:spPr>
+        <p:style>
+          <a:lnRef idx="1">
+            <a:schemeClr val="accent1"/>
+          </a:lnRef>
+          <a:fillRef idx="3">
+            <a:schemeClr val="accent1"/>
+          </a:fillRef>
+          <a:effectRef idx="2">
+            <a:schemeClr val="accent1"/>
+          </a:effectRef>
+          <a:fontRef idx="minor">
+            <a:schemeClr val="lt1"/>
+          </a:fontRef>
+        </p:style>
+        <p:txBody>
+          <a:bodyPr rtlCol="0" anchor="ctr"/>
+          <a:lstStyle/>
+          <a:p>
+            <a:pPr algn="ctr"/>
+          </a:p>
+        </p:txBody>
+      </p:sp>
+      <p:sp>
+        <p:nvSpPr>
+          <p:cNvPr id="35" name="Rectangle 34"/>
+          <p:cNvSpPr/>
+          <p:nvPr/>
+        </p:nvSpPr>
+        <p:spPr>
+          <a:xfrm>
+            <a:off x="1197864" y="3538728"/>
+            <a:ext cx="384048" cy="384048"/>
+          </a:xfrm>
+          <a:prstGeom prst="rect">
+            <a:avLst/>
+          </a:prstGeom>
+          <a:solidFill>
+            <a:srgbClr val="A8DC98"/>
+          </a:solidFill>
+          <a:ln>
+            <a:noFill/>
+          </a:ln>
+          <a:effectLst/>
+        </p:spPr>
+        <p:style>
+          <a:lnRef idx="1">
+            <a:schemeClr val="accent1"/>
+          </a:lnRef>
+          <a:fillRef idx="3">
+            <a:schemeClr val="accent1"/>
+          </a:fillRef>
+          <a:effectRef idx="2">
+            <a:schemeClr val="accent1"/>
+          </a:effectRef>
+          <a:fontRef idx="minor">
+            <a:schemeClr val="lt1"/>
+          </a:fontRef>
+        </p:style>
+        <p:txBody>
+          <a:bodyPr rtlCol="0" anchor="ctr"/>
+          <a:lstStyle/>
+          <a:p>
+            <a:pPr algn="ctr"/>
+          </a:p>
+        </p:txBody>
+      </p:sp>
+      <p:sp>
+        <p:nvSpPr>
+          <p:cNvPr id="36" name="Rectangle 35"/>
+          <p:cNvSpPr/>
+          <p:nvPr/>
+        </p:nvSpPr>
+        <p:spPr>
+          <a:xfrm>
+            <a:off x="1664208" y="3538728"/>
+            <a:ext cx="384048" cy="384048"/>
+          </a:xfrm>
+          <a:prstGeom prst="rect">
+            <a:avLst/>
+          </a:prstGeom>
+          <a:solidFill>
+            <a:srgbClr val="A8DC98"/>
+          </a:solidFill>
+          <a:ln>
+            <a:noFill/>
+          </a:ln>
+          <a:effectLst/>
+        </p:spPr>
+        <p:style>
+          <a:lnRef idx="1">
+            <a:schemeClr val="accent1"/>
+          </a:lnRef>
+          <a:fillRef idx="3">
+            <a:schemeClr val="accent1"/>
+          </a:fillRef>
+          <a:effectRef idx="2">
+            <a:schemeClr val="accent1"/>
+          </a:effectRef>
+          <a:fontRef idx="minor">
+            <a:schemeClr val="lt1"/>
+          </a:fontRef>
+        </p:style>
+        <p:txBody>
+          <a:bodyPr rtlCol="0" anchor="ctr"/>
+          <a:lstStyle/>
+          <a:p>
+            <a:pPr algn="ctr"/>
+          </a:p>
+        </p:txBody>
+      </p:sp>
+      <p:sp>
+        <p:nvSpPr>
+          <p:cNvPr id="37" name="Rectangle 36"/>
+          <p:cNvSpPr/>
+          <p:nvPr/>
+        </p:nvSpPr>
+        <p:spPr>
+          <a:xfrm>
+            <a:off x="2130552" y="3538728"/>
+            <a:ext cx="384048" cy="384048"/>
+          </a:xfrm>
+          <a:prstGeom prst="rect">
+            <a:avLst/>
+          </a:prstGeom>
+          <a:solidFill>
+            <a:srgbClr val="A8DC98"/>
+          </a:solidFill>
+          <a:ln>
+            <a:noFill/>
+          </a:ln>
+          <a:effectLst/>
+        </p:spPr>
+        <p:style>
+          <a:lnRef idx="1">
+            <a:schemeClr val="accent1"/>
+          </a:lnRef>
+          <a:fillRef idx="3">
+            <a:schemeClr val="accent1"/>
+          </a:fillRef>
+          <a:effectRef idx="2">
+            <a:schemeClr val="accent1"/>
+          </a:effectRef>
+          <a:fontRef idx="minor">
+            <a:schemeClr val="lt1"/>
+          </a:fontRef>
+        </p:style>
+        <p:txBody>
+          <a:bodyPr rtlCol="0" anchor="ctr"/>
+          <a:lstStyle/>
+          <a:p>
+            <a:pPr algn="ctr"/>
+          </a:p>
+        </p:txBody>
+      </p:sp>
+      <p:sp>
+        <p:nvSpPr>
+          <p:cNvPr id="38" name="Rectangle 37"/>
+          <p:cNvSpPr/>
+          <p:nvPr/>
+        </p:nvSpPr>
+        <p:spPr>
+          <a:xfrm>
+            <a:off x="2596896" y="3538728"/>
+            <a:ext cx="384048" cy="384048"/>
+          </a:xfrm>
+          <a:prstGeom prst="rect">
+            <a:avLst/>
+          </a:prstGeom>
+          <a:solidFill>
+            <a:srgbClr val="A8DC98"/>
+          </a:solidFill>
+          <a:ln>
+            <a:noFill/>
+          </a:ln>
+          <a:effectLst/>
+        </p:spPr>
+        <p:style>
+          <a:lnRef idx="1">
+            <a:schemeClr val="accent1"/>
+          </a:lnRef>
+          <a:fillRef idx="3">
+            <a:schemeClr val="accent1"/>
+          </a:fillRef>
+          <a:effectRef idx="2">
+            <a:schemeClr val="accent1"/>
+          </a:effectRef>
+          <a:fontRef idx="minor">
+            <a:schemeClr val="lt1"/>
+          </a:fontRef>
+        </p:style>
+        <p:txBody>
+          <a:bodyPr rtlCol="0" anchor="ctr"/>
+          <a:lstStyle/>
+          <a:p>
+            <a:pPr algn="ctr"/>
+          </a:p>
+        </p:txBody>
+      </p:sp>
+      <p:sp>
+        <p:nvSpPr>
+          <p:cNvPr id="39" name="Rectangle 38"/>
+          <p:cNvSpPr/>
+          <p:nvPr/>
+        </p:nvSpPr>
+        <p:spPr>
+          <a:xfrm>
+            <a:off x="3063240" y="3538728"/>
+            <a:ext cx="384048" cy="384048"/>
+          </a:xfrm>
+          <a:prstGeom prst="rect">
+            <a:avLst/>
+          </a:prstGeom>
+          <a:solidFill>
+            <a:srgbClr val="A8DC98"/>
+          </a:solidFill>
+          <a:ln>
+            <a:noFill/>
+          </a:ln>
+          <a:effectLst/>
+        </p:spPr>
+        <p:style>
+          <a:lnRef idx="1">
+            <a:schemeClr val="accent1"/>
+          </a:lnRef>
+          <a:fillRef idx="3">
+            <a:schemeClr val="accent1"/>
+          </a:fillRef>
+          <a:effectRef idx="2">
+            <a:schemeClr val="accent1"/>
+          </a:effectRef>
+          <a:fontRef idx="minor">
+            <a:schemeClr val="lt1"/>
+          </a:fontRef>
+        </p:style>
+        <p:txBody>
+          <a:bodyPr rtlCol="0" anchor="ctr"/>
+          <a:lstStyle/>
+          <a:p>
+            <a:pPr algn="ctr"/>
+          </a:p>
+        </p:txBody>
+      </p:sp>
+      <p:sp>
+        <p:nvSpPr>
+          <p:cNvPr id="40" name="Rectangle 39"/>
+          <p:cNvSpPr/>
+          <p:nvPr/>
+        </p:nvSpPr>
+        <p:spPr>
+          <a:xfrm>
+            <a:off x="3529584" y="3538728"/>
+            <a:ext cx="384048" cy="384048"/>
+          </a:xfrm>
+          <a:prstGeom prst="rect">
+            <a:avLst/>
+          </a:prstGeom>
+          <a:solidFill>
+            <a:srgbClr val="A8DC98"/>
+          </a:solidFill>
+          <a:ln>
+            <a:noFill/>
+          </a:ln>
+          <a:effectLst/>
+        </p:spPr>
+        <p:style>
+          <a:lnRef idx="1">
+            <a:schemeClr val="accent1"/>
+          </a:lnRef>
+          <a:fillRef idx="3">
+            <a:schemeClr val="accent1"/>
+          </a:fillRef>
+          <a:effectRef idx="2">
+            <a:schemeClr val="accent1"/>
+          </a:effectRef>
+          <a:fontRef idx="minor">
+            <a:schemeClr val="lt1"/>
+          </a:fontRef>
+        </p:style>
+        <p:txBody>
+          <a:bodyPr rtlCol="0" anchor="ctr"/>
+          <a:lstStyle/>
+          <a:p>
+            <a:pPr algn="ctr"/>
+          </a:p>
+        </p:txBody>
+      </p:sp>
+      <p:sp>
+        <p:nvSpPr>
+          <p:cNvPr id="41" name="Rectangle 40"/>
+          <p:cNvSpPr/>
+          <p:nvPr/>
+        </p:nvSpPr>
+        <p:spPr>
+          <a:xfrm>
+            <a:off x="3995928" y="3538728"/>
+            <a:ext cx="384048" cy="384048"/>
+          </a:xfrm>
+          <a:prstGeom prst="rect">
+            <a:avLst/>
+          </a:prstGeom>
+          <a:solidFill>
+            <a:srgbClr val="A8DC98"/>
+          </a:solidFill>
+          <a:ln>
+            <a:noFill/>
+          </a:ln>
+          <a:effectLst/>
+        </p:spPr>
+        <p:style>
+          <a:lnRef idx="1">
+            <a:schemeClr val="accent1"/>
+          </a:lnRef>
+          <a:fillRef idx="3">
+            <a:schemeClr val="accent1"/>
+          </a:fillRef>
+          <a:effectRef idx="2">
+            <a:schemeClr val="accent1"/>
+          </a:effectRef>
+          <a:fontRef idx="minor">
+            <a:schemeClr val="lt1"/>
+          </a:fontRef>
+        </p:style>
+        <p:txBody>
+          <a:bodyPr rtlCol="0" anchor="ctr"/>
+          <a:lstStyle/>
+          <a:p>
+            <a:pPr algn="ctr"/>
+          </a:p>
+        </p:txBody>
+      </p:sp>
+      <p:sp>
+        <p:nvSpPr>
+          <p:cNvPr id="42" name="Rectangle 41"/>
+          <p:cNvSpPr/>
+          <p:nvPr/>
+        </p:nvSpPr>
+        <p:spPr>
+          <a:xfrm>
+            <a:off x="4462272" y="3538728"/>
+            <a:ext cx="384048" cy="384048"/>
+          </a:xfrm>
+          <a:prstGeom prst="rect">
+            <a:avLst/>
+          </a:prstGeom>
+          <a:solidFill>
+            <a:srgbClr val="A8DC98"/>
+          </a:solidFill>
+          <a:ln>
+            <a:noFill/>
+          </a:ln>
+          <a:effectLst/>
+        </p:spPr>
+        <p:style>
+          <a:lnRef idx="1">
+            <a:schemeClr val="accent1"/>
+          </a:lnRef>
+          <a:fillRef idx="3">
+            <a:schemeClr val="accent1"/>
+          </a:fillRef>
+          <a:effectRef idx="2">
+            <a:schemeClr val="accent1"/>
+          </a:effectRef>
+          <a:fontRef idx="minor">
+            <a:schemeClr val="lt1"/>
+          </a:fontRef>
+        </p:style>
+        <p:txBody>
+          <a:bodyPr rtlCol="0" anchor="ctr"/>
+          <a:lstStyle/>
+          <a:p>
+            <a:pPr algn="ctr"/>
+          </a:p>
+        </p:txBody>
+      </p:sp>
+      <p:sp>
+        <p:nvSpPr>
+          <p:cNvPr id="43" name="Rectangle 42"/>
+          <p:cNvSpPr/>
+          <p:nvPr/>
+        </p:nvSpPr>
+        <p:spPr>
+          <a:xfrm>
+            <a:off x="4928616" y="3538728"/>
+            <a:ext cx="384048" cy="384048"/>
+          </a:xfrm>
+          <a:prstGeom prst="rect">
+            <a:avLst/>
+          </a:prstGeom>
+          <a:solidFill>
+            <a:srgbClr val="A8DC98"/>
+          </a:solidFill>
+          <a:ln>
+            <a:noFill/>
+          </a:ln>
+          <a:effectLst/>
+        </p:spPr>
+        <p:style>
+          <a:lnRef idx="1">
+            <a:schemeClr val="accent1"/>
+          </a:lnRef>
+          <a:fillRef idx="3">
+            <a:schemeClr val="accent1"/>
+          </a:fillRef>
+          <a:effectRef idx="2">
+            <a:schemeClr val="accent1"/>
+          </a:effectRef>
+          <a:fontRef idx="minor">
+            <a:schemeClr val="lt1"/>
+          </a:fontRef>
+        </p:style>
+        <p:txBody>
+          <a:bodyPr rtlCol="0" anchor="ctr"/>
+          <a:lstStyle/>
+          <a:p>
+            <a:pPr algn="ctr"/>
+          </a:p>
+        </p:txBody>
+      </p:sp>
+      <p:sp>
+        <p:nvSpPr>
+          <p:cNvPr id="44" name="Rectangle 43"/>
+          <p:cNvSpPr/>
+          <p:nvPr/>
+        </p:nvSpPr>
+        <p:spPr>
+          <a:xfrm>
+            <a:off x="5394960" y="3538728"/>
+            <a:ext cx="384048" cy="384048"/>
+          </a:xfrm>
+          <a:prstGeom prst="rect">
+            <a:avLst/>
+          </a:prstGeom>
+          <a:solidFill>
+            <a:srgbClr val="EB5757"/>
+          </a:solidFill>
+          <a:ln>
+            <a:noFill/>
+          </a:ln>
+          <a:effectLst/>
+        </p:spPr>
+        <p:style>
+          <a:lnRef idx="1">
+            <a:schemeClr val="accent1"/>
+          </a:lnRef>
+          <a:fillRef idx="3">
+            <a:schemeClr val="accent1"/>
+          </a:fillRef>
+          <a:effectRef idx="2">
+            <a:schemeClr val="accent1"/>
+          </a:effectRef>
+          <a:fontRef idx="minor">
+            <a:schemeClr val="lt1"/>
+          </a:fontRef>
+        </p:style>
+        <p:txBody>
+          <a:bodyPr rtlCol="0" anchor="ctr"/>
+          <a:lstStyle/>
+          <a:p>
+            <a:pPr algn="ctr"/>
+          </a:p>
+        </p:txBody>
+      </p:sp>
+      <p:sp>
+        <p:nvSpPr>
+          <p:cNvPr id="45" name="Rectangle 44"/>
+          <p:cNvSpPr/>
+          <p:nvPr/>
+        </p:nvSpPr>
+        <p:spPr>
+          <a:xfrm>
+            <a:off x="5861304" y="3538728"/>
+            <a:ext cx="384048" cy="384048"/>
+          </a:xfrm>
+          <a:prstGeom prst="rect">
+            <a:avLst/>
+          </a:prstGeom>
+          <a:solidFill>
+            <a:srgbClr val="EB5757"/>
+          </a:solidFill>
+          <a:ln>
+            <a:noFill/>
+          </a:ln>
+          <a:effectLst/>
+        </p:spPr>
+        <p:style>
+          <a:lnRef idx="1">
+            <a:schemeClr val="accent1"/>
+          </a:lnRef>
+          <a:fillRef idx="3">
+            <a:schemeClr val="accent1"/>
+          </a:fillRef>
+          <a:effectRef idx="2">
+            <a:schemeClr val="accent1"/>
+          </a:effectRef>
+          <a:fontRef idx="minor">
+            <a:schemeClr val="lt1"/>
+          </a:fontRef>
+        </p:style>
+        <p:txBody>
+          <a:bodyPr rtlCol="0" anchor="ctr"/>
+          <a:lstStyle/>
+          <a:p>
+            <a:pPr algn="ctr"/>
+          </a:p>
+        </p:txBody>
+      </p:sp>
+      <p:sp>
+        <p:nvSpPr>
+          <p:cNvPr id="46" name="Rectangle 45"/>
+          <p:cNvSpPr/>
+          <p:nvPr/>
+        </p:nvSpPr>
+        <p:spPr>
+          <a:xfrm>
+            <a:off x="6327648" y="3538728"/>
+            <a:ext cx="384048" cy="384048"/>
+          </a:xfrm>
+          <a:prstGeom prst="rect">
+            <a:avLst/>
+          </a:prstGeom>
+          <a:solidFill>
+            <a:srgbClr val="EB5757"/>
+          </a:solidFill>
+          <a:ln>
+            <a:noFill/>
+          </a:ln>
+          <a:effectLst/>
+        </p:spPr>
+        <p:style>
+          <a:lnRef idx="1">
+            <a:schemeClr val="accent1"/>
+          </a:lnRef>
+          <a:fillRef idx="3">
+            <a:schemeClr val="accent1"/>
+          </a:fillRef>
+          <a:effectRef idx="2">
+            <a:schemeClr val="accent1"/>
+          </a:effectRef>
+          <a:fontRef idx="minor">
+            <a:schemeClr val="lt1"/>
+          </a:fontRef>
+        </p:style>
+        <p:txBody>
+          <a:bodyPr rtlCol="0" anchor="ctr"/>
+          <a:lstStyle/>
+          <a:p>
+            <a:pPr algn="ctr"/>
+          </a:p>
+        </p:txBody>
+      </p:sp>
+      <p:sp>
+        <p:nvSpPr>
+          <p:cNvPr id="47" name="Rectangle 46"/>
+          <p:cNvSpPr/>
+          <p:nvPr/>
+        </p:nvSpPr>
+        <p:spPr>
+          <a:xfrm>
+            <a:off x="6793992" y="3538728"/>
+            <a:ext cx="384048" cy="384048"/>
+          </a:xfrm>
+          <a:prstGeom prst="rect">
+            <a:avLst/>
+          </a:prstGeom>
+          <a:solidFill>
+            <a:srgbClr val="EB5757"/>
+          </a:solidFill>
+          <a:ln>
+            <a:noFill/>
+          </a:ln>
+          <a:effectLst/>
+        </p:spPr>
+        <p:style>
+          <a:lnRef idx="1">
+            <a:schemeClr val="accent1"/>
+          </a:lnRef>
+          <a:fillRef idx="3">
+            <a:schemeClr val="accent1"/>
+          </a:fillRef>
+          <a:effectRef idx="2">
+            <a:schemeClr val="accent1"/>
+          </a:effectRef>
+          <a:fontRef idx="minor">
+            <a:schemeClr val="lt1"/>
+          </a:fontRef>
+        </p:style>
+        <p:txBody>
+          <a:bodyPr rtlCol="0" anchor="ctr"/>
+          <a:lstStyle/>
+          <a:p>
+            <a:pPr algn="ctr"/>
+          </a:p>
+        </p:txBody>
+      </p:sp>
+      <p:sp>
+        <p:nvSpPr>
+          <p:cNvPr id="48" name="Rectangle 47"/>
+          <p:cNvSpPr/>
+          <p:nvPr/>
+        </p:nvSpPr>
+        <p:spPr>
+          <a:xfrm>
+            <a:off x="731520" y="4325112"/>
+            <a:ext cx="146304" cy="146304"/>
+          </a:xfrm>
+          <a:prstGeom prst="rect">
+            <a:avLst/>
+          </a:prstGeom>
+          <a:solidFill>
+            <a:srgbClr val="43B02A"/>
+          </a:solidFill>
+          <a:ln>
+            <a:noFill/>
+          </a:ln>
+          <a:effectLst/>
+        </p:spPr>
+        <p:style>
+          <a:lnRef idx="1">
+            <a:schemeClr val="accent1"/>
+          </a:lnRef>
+          <a:fillRef idx="3">
+            <a:schemeClr val="accent1"/>
+          </a:fillRef>
+          <a:effectRef idx="2">
+            <a:schemeClr val="accent1"/>
+          </a:effectRef>
+          <a:fontRef idx="minor">
+            <a:schemeClr val="lt1"/>
+          </a:fontRef>
+        </p:style>
+        <p:txBody>
+          <a:bodyPr rtlCol="0" anchor="ctr"/>
+          <a:lstStyle/>
+          <a:p>
+            <a:pPr algn="ctr"/>
+          </a:p>
+        </p:txBody>
+      </p:sp>
+      <p:sp>
+        <p:nvSpPr>
+          <p:cNvPr id="49" name="TextBox 48"/>
+          <p:cNvSpPr txBox="1"/>
+          <p:nvPr/>
+        </p:nvSpPr>
+        <p:spPr>
+          <a:xfrm>
+            <a:off x="969264" y="4297680"/>
+            <a:ext cx="2651760" cy="228600"/>
+          </a:xfrm>
+          <a:prstGeom prst="rect">
+            <a:avLst/>
+          </a:prstGeom>
+          <a:noFill/>
+        </p:spPr>
+        <p:txBody>
+          <a:bodyPr wrap="square" lIns="0" rIns="0" tIns="0" bIns="0">
+            <a:spAutoFit/>
+          </a:bodyPr>
+          <a:lstStyle/>
+          <a:p>
+            <a:pPr algn="l">
+              <a:lnSpc>
+                <a:spcPct val="132000"/>
+              </a:lnSpc>
+            </a:pPr>
+            <a:r>
+              <a:rPr sz="1200" b="0">
+                <a:solidFill>
+                  <a:srgbClr val="6B7280"/>
+                </a:solidFill>
+                <a:latin typeface="Inter Tight"/>
+              </a:rPr>
+              <a:t>18 — категория совпала точно</a:t>
+            </a:r>
+          </a:p>
+        </p:txBody>
+      </p:sp>
+      <p:sp>
+        <p:nvSpPr>
+          <p:cNvPr id="50" name="Rectangle 49"/>
+          <p:cNvSpPr/>
+          <p:nvPr/>
+        </p:nvSpPr>
+        <p:spPr>
+          <a:xfrm>
+            <a:off x="3611880" y="4325112"/>
+            <a:ext cx="146304" cy="146304"/>
+          </a:xfrm>
+          <a:prstGeom prst="rect">
+            <a:avLst/>
+          </a:prstGeom>
+          <a:solidFill>
+            <a:srgbClr val="A8DC98"/>
+          </a:solidFill>
+          <a:ln>
+            <a:noFill/>
+          </a:ln>
+          <a:effectLst/>
+        </p:spPr>
+        <p:style>
+          <a:lnRef idx="1">
+            <a:schemeClr val="accent1"/>
+          </a:lnRef>
+          <a:fillRef idx="3">
+            <a:schemeClr val="accent1"/>
+          </a:fillRef>
+          <a:effectRef idx="2">
+            <a:schemeClr val="accent1"/>
+          </a:effectRef>
+          <a:fontRef idx="minor">
+            <a:schemeClr val="lt1"/>
+          </a:fontRef>
+        </p:style>
+        <p:txBody>
+          <a:bodyPr rtlCol="0" anchor="ctr"/>
+          <a:lstStyle/>
+          <a:p>
+            <a:pPr algn="ctr"/>
+          </a:p>
+        </p:txBody>
+      </p:sp>
+      <p:sp>
+        <p:nvSpPr>
+          <p:cNvPr id="51" name="TextBox 50"/>
+          <p:cNvSpPr txBox="1"/>
+          <p:nvPr/>
+        </p:nvSpPr>
+        <p:spPr>
+          <a:xfrm>
+            <a:off x="3849624" y="4297680"/>
+            <a:ext cx="2651760" cy="228600"/>
+          </a:xfrm>
+          <a:prstGeom prst="rect">
+            <a:avLst/>
+          </a:prstGeom>
+          <a:noFill/>
+        </p:spPr>
+        <p:txBody>
+          <a:bodyPr wrap="square" lIns="0" rIns="0" tIns="0" bIns="0">
+            <a:spAutoFit/>
+          </a:bodyPr>
+          <a:lstStyle/>
+          <a:p>
+            <a:pPr algn="l">
+              <a:lnSpc>
+                <a:spcPct val="132000"/>
+              </a:lnSpc>
+            </a:pPr>
+            <a:r>
+              <a:rPr sz="1200" b="0">
+                <a:solidFill>
+                  <a:srgbClr val="6B7280"/>
+                </a:solidFill>
+                <a:latin typeface="Inter Tight"/>
+              </a:rPr>
+              <a:t>20 — разошлась на одну ступень</a:t>
+            </a:r>
+          </a:p>
+        </p:txBody>
+      </p:sp>
+      <p:sp>
+        <p:nvSpPr>
+          <p:cNvPr id="52" name="Rectangle 51"/>
+          <p:cNvSpPr/>
+          <p:nvPr/>
+        </p:nvSpPr>
+        <p:spPr>
+          <a:xfrm>
+            <a:off x="6492240" y="4325112"/>
+            <a:ext cx="146304" cy="146304"/>
+          </a:xfrm>
+          <a:prstGeom prst="rect">
+            <a:avLst/>
+          </a:prstGeom>
+          <a:solidFill>
+            <a:srgbClr val="EB5757"/>
+          </a:solidFill>
+          <a:ln>
+            <a:noFill/>
+          </a:ln>
+          <a:effectLst/>
+        </p:spPr>
+        <p:style>
+          <a:lnRef idx="1">
+            <a:schemeClr val="accent1"/>
+          </a:lnRef>
+          <a:fillRef idx="3">
+            <a:schemeClr val="accent1"/>
+          </a:fillRef>
+          <a:effectRef idx="2">
+            <a:schemeClr val="accent1"/>
+          </a:effectRef>
+          <a:fontRef idx="minor">
+            <a:schemeClr val="lt1"/>
+          </a:fontRef>
+        </p:style>
+        <p:txBody>
+          <a:bodyPr rtlCol="0" anchor="ctr"/>
+          <a:lstStyle/>
+          <a:p>
+            <a:pPr algn="ctr"/>
+          </a:p>
+        </p:txBody>
+      </p:sp>
+      <p:sp>
+        <p:nvSpPr>
+          <p:cNvPr id="53" name="TextBox 52"/>
+          <p:cNvSpPr txBox="1"/>
+          <p:nvPr/>
+        </p:nvSpPr>
+        <p:spPr>
+          <a:xfrm>
+            <a:off x="6729984" y="4297680"/>
+            <a:ext cx="2651760" cy="228600"/>
+          </a:xfrm>
+          <a:prstGeom prst="rect">
+            <a:avLst/>
+          </a:prstGeom>
+          <a:noFill/>
+        </p:spPr>
+        <p:txBody>
+          <a:bodyPr wrap="square" lIns="0" rIns="0" tIns="0" bIns="0">
+            <a:spAutoFit/>
+          </a:bodyPr>
+          <a:lstStyle/>
+          <a:p>
+            <a:pPr algn="l">
+              <a:lnSpc>
+                <a:spcPct val="132000"/>
+              </a:lnSpc>
+            </a:pPr>
+            <a:r>
+              <a:rPr sz="1200" b="0">
+                <a:solidFill>
+                  <a:srgbClr val="6B7280"/>
+                </a:solidFill>
+                <a:latin typeface="Inter Tight"/>
+              </a:rPr>
+              <a:t>4 — разошлась сильнее</a:t>
+            </a:r>
+          </a:p>
+        </p:txBody>
+      </p:sp>
+      <p:sp>
+        <p:nvSpPr>
+          <p:cNvPr id="54" name="TextBox 53"/>
+          <p:cNvSpPr txBox="1"/>
+          <p:nvPr/>
+        </p:nvSpPr>
+        <p:spPr>
+          <a:xfrm>
+            <a:off x="8046720" y="2560320"/>
+            <a:ext cx="3474720" cy="725213"/>
           </a:xfrm>
           <a:prstGeom prst="rect">
             <a:avLst/>
@@ -6337,27 +8700,27 @@
               </a:lnSpc>
             </a:pPr>
             <a:r>
-              <a:rPr sz="5600" b="1">
+              <a:rPr sz="4600" b="1">
                 <a:solidFill>
                   <a:srgbClr val="379123"/>
                 </a:solidFill>
                 <a:latin typeface="Inter Tight"/>
               </a:rPr>
-              <a:t>37 / 42</a:t>
-            </a:r>
-          </a:p>
-        </p:txBody>
-      </p:sp>
-      <p:sp>
-        <p:nvSpPr>
-          <p:cNvPr id="6" name="TextBox 5"/>
+              <a:t>42 / 42</a:t>
+            </a:r>
+          </a:p>
+        </p:txBody>
+      </p:sp>
+      <p:sp>
+        <p:nvSpPr>
+          <p:cNvPr id="55" name="TextBox 54"/>
           <p:cNvSpPr txBox="1"/>
           <p:nvPr/>
         </p:nvSpPr>
         <p:spPr>
           <a:xfrm>
-            <a:off x="731520" y="3474720"/>
-            <a:ext cx="4206240" cy="219456"/>
+            <a:off x="8046720" y="3401568"/>
+            <a:ext cx="3474720" cy="219456"/>
           </a:xfrm>
           <a:prstGeom prst="rect">
             <a:avLst/>
@@ -6382,21 +8745,21 @@
                 </a:solidFill>
                 <a:latin typeface="Inter Tight"/>
               </a:rPr>
-              <a:t>категория совпала или рядом</a:t>
-            </a:r>
-          </a:p>
-        </p:txBody>
-      </p:sp>
-      <p:sp>
-        <p:nvSpPr>
-          <p:cNvPr id="7" name="TextBox 6"/>
+              <a:t>формула сходится точно</a:t>
+            </a:r>
+          </a:p>
+        </p:txBody>
+      </p:sp>
+      <p:sp>
+        <p:nvSpPr>
+          <p:cNvPr id="56" name="TextBox 55"/>
           <p:cNvSpPr txBox="1"/>
           <p:nvPr/>
         </p:nvSpPr>
         <p:spPr>
           <a:xfrm>
-            <a:off x="731520" y="3822191"/>
-            <a:ext cx="4023360" cy="1097280"/>
+            <a:off x="8046720" y="3730752"/>
+            <a:ext cx="3383280" cy="822960"/>
           </a:xfrm>
           <a:prstGeom prst="rect">
             <a:avLst/>
@@ -6415,27 +8778,27 @@
               </a:lnSpc>
             </a:pPr>
             <a:r>
-              <a:rPr sz="1350" b="0">
+              <a:rPr sz="1300" b="0">
                 <a:solidFill>
                   <a:srgbClr val="6B7280"/>
                 </a:solidFill>
                 <a:latin typeface="Inter Tight"/>
               </a:rPr>
-              <a:t>Из сорока двух карточек с проставленными вручную баллами. Формула воспроизводит методику точно: индекс и категория сошлись на всех сорока двух.</a:t>
-            </a:r>
-          </a:p>
-        </p:txBody>
-      </p:sp>
-      <p:sp>
-        <p:nvSpPr>
-          <p:cNvPr id="8" name="TextBox 7"/>
+              <a:t>Отдельная проверка: получив экспертные баллы, код выдаёт тот же индекс и ту же категорию, что в Excel заказчика. Включая эскалацию.</a:t>
+            </a:r>
+          </a:p>
+        </p:txBody>
+      </p:sp>
+      <p:sp>
+        <p:nvSpPr>
+          <p:cNvPr id="57" name="TextBox 56"/>
           <p:cNvSpPr txBox="1"/>
           <p:nvPr/>
         </p:nvSpPr>
         <p:spPr>
           <a:xfrm>
-            <a:off x="5394960" y="2514600"/>
-            <a:ext cx="2743200" cy="882868"/>
+            <a:off x="731520" y="5029200"/>
+            <a:ext cx="10698480" cy="822960"/>
           </a:xfrm>
           <a:prstGeom prst="rect">
             <a:avLst/>
@@ -6450,31 +8813,40 @@
           <a:p>
             <a:pPr algn="l">
               <a:lnSpc>
-                <a:spcPct val="100000"/>
+                <a:spcPct val="145000"/>
               </a:lnSpc>
             </a:pPr>
             <a:r>
-              <a:rPr sz="5600" b="1">
-                <a:solidFill>
-                  <a:srgbClr val="379123"/>
+              <a:rPr sz="1400" b="1">
+                <a:solidFill>
+                  <a:srgbClr val="231F20"/>
                 </a:solidFill>
                 <a:latin typeface="Inter Tight"/>
               </a:rPr>
-              <a:t>8,2 %</a:t>
-            </a:r>
-          </a:p>
-        </p:txBody>
-      </p:sp>
-      <p:sp>
-        <p:nvSpPr>
-          <p:cNvPr id="9" name="TextBox 8"/>
+              <a:t>Провалов важного в нижние категории: один при цели ноль. </a:t>
+            </a:r>
+            <a:r>
+              <a:rPr sz="1400" b="0">
+                <a:solidFill>
+                  <a:srgbClr val="6B7280"/>
+                </a:solidFill>
+                <a:latin typeface="Inter Tight"/>
+              </a:rPr>
+              <a:t>Это ключевое условие заказчика, и оно важнее общей точности: пропущенное регуляторное изменение стоит дороже десятка лишних материалов в ленте. Заземление отдельно: 8,2 % утверждений отбраковала вторая ступень — цитата в оригинале есть, но утверждения не подтверждает.</a:t>
+            </a:r>
+          </a:p>
+        </p:txBody>
+      </p:sp>
+      <p:sp>
+        <p:nvSpPr>
+          <p:cNvPr id="58" name="TextBox 57"/>
           <p:cNvSpPr txBox="1"/>
           <p:nvPr/>
         </p:nvSpPr>
         <p:spPr>
           <a:xfrm>
-            <a:off x="5394960" y="3474720"/>
-            <a:ext cx="3108960" cy="219456"/>
+            <a:off x="731520" y="6382512"/>
+            <a:ext cx="8778240" cy="237744"/>
           </a:xfrm>
           <a:prstGeom prst="rect">
             <a:avLst/>
@@ -6493,263 +8865,20 @@
               </a:lnSpc>
             </a:pPr>
             <a:r>
-              <a:rPr sz="1050" b="1" cap="all" spc="140">
-                <a:solidFill>
-                  <a:srgbClr val="6B7280"/>
+              <a:rPr sz="950" b="0">
+                <a:solidFill>
+                  <a:srgbClr val="9AA1AB"/>
                 </a:solidFill>
                 <a:latin typeface="Inter Tight"/>
               </a:rPr>
-              <a:t>поймала вторая ступень</a:t>
-            </a:r>
-          </a:p>
-        </p:txBody>
-      </p:sp>
-      <p:sp>
-        <p:nvSpPr>
-          <p:cNvPr id="10" name="TextBox 9"/>
-          <p:cNvSpPr txBox="1"/>
-          <p:nvPr/>
-        </p:nvSpPr>
-        <p:spPr>
-          <a:xfrm>
-            <a:off x="5394960" y="3822191"/>
-            <a:ext cx="2926080" cy="1280160"/>
-          </a:xfrm>
-          <a:prstGeom prst="rect">
-            <a:avLst/>
-          </a:prstGeom>
-          <a:noFill/>
-        </p:spPr>
-        <p:txBody>
-          <a:bodyPr wrap="square" lIns="0" rIns="0" tIns="0" bIns="0">
-            <a:spAutoFit/>
-          </a:bodyPr>
-          <a:lstStyle/>
-          <a:p>
-            <a:pPr algn="l">
-              <a:lnSpc>
-                <a:spcPct val="145000"/>
-              </a:lnSpc>
-            </a:pPr>
-            <a:r>
-              <a:rPr sz="1350" b="0">
-                <a:solidFill>
-                  <a:srgbClr val="6B7280"/>
-                </a:solidFill>
-                <a:latin typeface="Inter Tight"/>
-              </a:rPr>
-              <a:t>Утверждений, где цитата дословно есть в оригинале, но утверждения не подтверждает. Проверка подстрокой их пропустила бы. У коммерческих правовых ИИ этот класс даёт 17–33 %.</a:t>
-            </a:r>
-          </a:p>
-        </p:txBody>
-      </p:sp>
-      <p:sp>
-        <p:nvSpPr>
-          <p:cNvPr id="11" name="TextBox 10"/>
-          <p:cNvSpPr txBox="1"/>
-          <p:nvPr/>
-        </p:nvSpPr>
-        <p:spPr>
-          <a:xfrm>
-            <a:off x="9052560" y="2514600"/>
-            <a:ext cx="2560320" cy="882868"/>
-          </a:xfrm>
-          <a:prstGeom prst="rect">
-            <a:avLst/>
-          </a:prstGeom>
-          <a:noFill/>
-        </p:spPr>
-        <p:txBody>
-          <a:bodyPr wrap="square" lIns="0" rIns="0" tIns="0" bIns="0">
-            <a:spAutoFit/>
-          </a:bodyPr>
-          <a:lstStyle/>
-          <a:p>
-            <a:pPr algn="l">
-              <a:lnSpc>
-                <a:spcPct val="100000"/>
-              </a:lnSpc>
-            </a:pPr>
-            <a:r>
-              <a:rPr sz="5600" b="1">
-                <a:solidFill>
-                  <a:srgbClr val="379123"/>
-                </a:solidFill>
-                <a:latin typeface="Inter Tight"/>
-              </a:rPr>
-              <a:t>12,7</a:t>
-            </a:r>
-          </a:p>
-        </p:txBody>
-      </p:sp>
-      <p:sp>
-        <p:nvSpPr>
-          <p:cNvPr id="12" name="TextBox 11"/>
-          <p:cNvSpPr txBox="1"/>
-          <p:nvPr/>
-        </p:nvSpPr>
-        <p:spPr>
-          <a:xfrm>
-            <a:off x="9052560" y="3474720"/>
-            <a:ext cx="2560320" cy="219456"/>
-          </a:xfrm>
-          <a:prstGeom prst="rect">
-            <a:avLst/>
-          </a:prstGeom>
-          <a:noFill/>
-        </p:spPr>
-        <p:txBody>
-          <a:bodyPr wrap="square" lIns="0" rIns="0" tIns="0" bIns="0">
-            <a:spAutoFit/>
-          </a:bodyPr>
-          <a:lstStyle/>
-          <a:p>
-            <a:pPr algn="l">
-              <a:lnSpc>
-                <a:spcPct val="132000"/>
-              </a:lnSpc>
-            </a:pPr>
-            <a:r>
-              <a:rPr sz="1050" b="1" cap="all" spc="140">
-                <a:solidFill>
-                  <a:srgbClr val="6B7280"/>
-                </a:solidFill>
-                <a:latin typeface="Inter Tight"/>
-              </a:rPr>
-              <a:t>секунды на материал</a:t>
-            </a:r>
-          </a:p>
-        </p:txBody>
-      </p:sp>
-      <p:sp>
-        <p:nvSpPr>
-          <p:cNvPr id="13" name="TextBox 12"/>
-          <p:cNvSpPr txBox="1"/>
-          <p:nvPr/>
-        </p:nvSpPr>
-        <p:spPr>
-          <a:xfrm>
-            <a:off x="9052560" y="3822191"/>
-            <a:ext cx="2468880" cy="1097280"/>
-          </a:xfrm>
-          <a:prstGeom prst="rect">
-            <a:avLst/>
-          </a:prstGeom>
-          <a:noFill/>
-        </p:spPr>
-        <p:txBody>
-          <a:bodyPr wrap="square" lIns="0" rIns="0" tIns="0" bIns="0">
-            <a:spAutoFit/>
-          </a:bodyPr>
-          <a:lstStyle/>
-          <a:p>
-            <a:pPr algn="l">
-              <a:lnSpc>
-                <a:spcPct val="145000"/>
-              </a:lnSpc>
-            </a:pPr>
-            <a:r>
-              <a:rPr sz="1350" b="0">
-                <a:solidFill>
-                  <a:srgbClr val="6B7280"/>
-                </a:solidFill>
-                <a:latin typeface="Inter Tight"/>
-              </a:rPr>
-              <a:t>Медиана полной обработки при целевых десяти-пятнадцати секундах.</a:t>
-            </a:r>
-          </a:p>
-        </p:txBody>
-      </p:sp>
-      <p:sp>
-        <p:nvSpPr>
-          <p:cNvPr id="14" name="TextBox 13"/>
-          <p:cNvSpPr txBox="1"/>
-          <p:nvPr/>
-        </p:nvSpPr>
-        <p:spPr>
-          <a:xfrm>
-            <a:off x="731520" y="5532120"/>
-            <a:ext cx="10698480" cy="457200"/>
-          </a:xfrm>
-          <a:prstGeom prst="rect">
-            <a:avLst/>
-          </a:prstGeom>
-          <a:noFill/>
-        </p:spPr>
-        <p:txBody>
-          <a:bodyPr wrap="square" lIns="0" rIns="0" tIns="0" bIns="0">
-            <a:spAutoFit/>
-          </a:bodyPr>
-          <a:lstStyle/>
-          <a:p>
-            <a:pPr algn="l">
-              <a:lnSpc>
-                <a:spcPct val="145000"/>
-              </a:lnSpc>
-            </a:pPr>
-            <a:r>
-              <a:rPr sz="1350" b="1">
-                <a:solidFill>
-                  <a:srgbClr val="231F20"/>
-                </a:solidFill>
-                <a:latin typeface="Inter Tight"/>
-              </a:rPr>
-              <a:t>Ведущая метрика — не общая точность. </a:t>
-            </a:r>
-            <a:r>
-              <a:rPr sz="1350" b="0">
-                <a:solidFill>
-                  <a:srgbClr val="6B7280"/>
-                </a:solidFill>
-                <a:latin typeface="Inter Tight"/>
-              </a:rPr>
-              <a:t>Заказчик назвал ключевым условием отсутствие провалов важного в нижние категории: пропущенное регуляторное изменение стоит дороже десятка лишних материалов в ленте.</a:t>
-            </a:r>
-          </a:p>
-        </p:txBody>
-      </p:sp>
-      <p:sp>
-        <p:nvSpPr>
-          <p:cNvPr id="15" name="TextBox 14"/>
-          <p:cNvSpPr txBox="1"/>
-          <p:nvPr/>
-        </p:nvSpPr>
-        <p:spPr>
-          <a:xfrm>
-            <a:off x="731520" y="6382512"/>
-            <a:ext cx="8778240" cy="237744"/>
-          </a:xfrm>
-          <a:prstGeom prst="rect">
-            <a:avLst/>
-          </a:prstGeom>
-          <a:noFill/>
-        </p:spPr>
-        <p:txBody>
-          <a:bodyPr wrap="square" lIns="0" rIns="0" tIns="0" bIns="0">
-            <a:spAutoFit/>
-          </a:bodyPr>
-          <a:lstStyle/>
-          <a:p>
-            <a:pPr algn="l">
-              <a:lnSpc>
-                <a:spcPct val="132000"/>
-              </a:lnSpc>
-            </a:pPr>
-            <a:r>
-              <a:rPr sz="950" b="0">
-                <a:solidFill>
-                  <a:srgbClr val="9AA1AB"/>
-                </a:solidFill>
-                <a:latin typeface="Inter Tight"/>
-              </a:rPr>
-              <a:t>evals/results.md · python -m src.cli evaluate</a:t>
-            </a:r>
-          </a:p>
-        </p:txBody>
-      </p:sp>
-      <p:sp>
-        <p:nvSpPr>
-          <p:cNvPr id="16" name="TextBox 15"/>
+              <a:t>evals/results.md · python -m src.cli evaluate · verify-formula</a:t>
+            </a:r>
+          </a:p>
+        </p:txBody>
+      </p:sp>
+      <p:sp>
+        <p:nvSpPr>
+          <p:cNvPr id="59" name="TextBox 58"/>
           <p:cNvSpPr txBox="1"/>
           <p:nvPr/>
         </p:nvSpPr>

--- a/docs/product/presentation.pptx
+++ b/docs/product/presentation.pptx
@@ -3112,7 +3112,7 @@
             <a:avLst/>
           </a:prstGeom>
           <a:solidFill>
-            <a:srgbClr val="43B02A"/>
+            <a:srgbClr val="101214"/>
           </a:solidFill>
           <a:ln>
             <a:noFill/>
@@ -3149,7 +3149,7 @@
         </p:nvSpPr>
         <p:spPr>
           <a:xfrm>
-            <a:off x="731520" y="1828800"/>
+            <a:off x="731520" y="2103120"/>
             <a:ext cx="10698480" cy="274320"/>
           </a:xfrm>
           <a:prstGeom prst="rect">
@@ -3169,13 +3169,13 @@
               </a:lnSpc>
             </a:pPr>
             <a:r>
-              <a:rPr sz="1200" b="1" cap="all" spc="160">
-                <a:solidFill>
-                  <a:srgbClr val="FFFFFF"/>
+              <a:rPr sz="1150" b="1" spc="200">
+                <a:solidFill>
+                  <a:srgbClr val="8B949E"/>
                 </a:solidFill>
                 <a:latin typeface="Inter Tight"/>
               </a:rPr>
-              <a:t>ITMO AI Product Hack · кейс ООО «Цифра»</a:t>
+              <a:t>ITMO AI PRODUCT HACK · КЕЙС ООО «ЦИФРА»</a:t>
             </a:r>
           </a:p>
         </p:txBody>
@@ -3188,8 +3188,8 @@
         </p:nvSpPr>
         <p:spPr>
           <a:xfrm>
-            <a:off x="731520" y="2377440"/>
-            <a:ext cx="10698480" cy="1554480"/>
+            <a:off x="731520" y="2697480"/>
+            <a:ext cx="10698480" cy="2194560"/>
           </a:xfrm>
           <a:prstGeom prst="rect">
             <a:avLst/>
@@ -3204,18 +3204,28 @@
           <a:p>
             <a:pPr algn="l">
               <a:lnSpc>
-                <a:spcPct val="106000"/>
+                <a:spcPct val="105000"/>
               </a:lnSpc>
             </a:pPr>
             <a:r>
-              <a:rPr sz="5000" b="1">
-                <a:solidFill>
-                  <a:srgbClr val="FFFFFF"/>
+              <a:rPr sz="6200" b="1">
+                <a:solidFill>
+                  <a:srgbClr val="F2F4F3"/>
                 </a:solidFill>
                 <a:latin typeface="Inter Tight"/>
               </a:rPr>
-              <a:t>Интеллектуальный центр
-PR/GR-мониторинга</a:t>
+              <a:t>Мониторинг,
+который отвечает
+на вопрос </a:t>
+            </a:r>
+            <a:r>
+              <a:rPr sz="6200" b="1">
+                <a:solidFill>
+                  <a:srgbClr val="43B02A"/>
+                </a:solidFill>
+                <a:latin typeface="Inter Tight"/>
+              </a:rPr>
+              <a:t>«и что?»</a:t>
             </a:r>
           </a:p>
         </p:txBody>
@@ -3228,8 +3238,8 @@
         </p:nvSpPr>
         <p:spPr>
           <a:xfrm>
-            <a:off x="731520" y="4315968"/>
-            <a:ext cx="7680960" cy="457200"/>
+            <a:off x="731520" y="5440680"/>
+            <a:ext cx="6949440" cy="457200"/>
           </a:xfrm>
           <a:prstGeom prst="rect">
             <a:avLst/>
@@ -3250,57 +3260,18 @@
             <a:r>
               <a:rPr sz="1700" b="0">
                 <a:solidFill>
-                  <a:srgbClr val="E4F5DE"/>
+                  <a:srgbClr val="8B949E"/>
                 </a:solidFill>
                 <a:latin typeface="Inter Tight"/>
               </a:rPr>
-              <a:t>Лента, отсортированная по влиянию на компанию, а не по дате публикации</a:t>
-            </a:r>
-          </a:p>
-        </p:txBody>
-      </p:sp>
-      <p:sp>
-        <p:nvSpPr>
-          <p:cNvPr id="6" name="TextBox 5"/>
-          <p:cNvSpPr txBox="1"/>
-          <p:nvPr/>
-        </p:nvSpPr>
-        <p:spPr>
-          <a:xfrm>
-            <a:off x="731520" y="5394960"/>
-            <a:ext cx="7680960" cy="365760"/>
-          </a:xfrm>
-          <a:prstGeom prst="rect">
-            <a:avLst/>
-          </a:prstGeom>
-          <a:noFill/>
-        </p:spPr>
-        <p:txBody>
-          <a:bodyPr wrap="square" lIns="0" rIns="0" tIns="0" bIns="0">
-            <a:spAutoFit/>
-          </a:bodyPr>
-          <a:lstStyle/>
-          <a:p>
-            <a:pPr algn="l">
-              <a:lnSpc>
-                <a:spcPct val="132000"/>
-              </a:lnSpc>
-            </a:pPr>
-            <a:r>
-              <a:rPr sz="1300" b="0">
-                <a:solidFill>
-                  <a:srgbClr val="D3EFC9"/>
-                </a:solidFill>
-                <a:latin typeface="Inter Tight"/>
-              </a:rPr>
-              <a:t>Левочкин Егор · Головаш Денис · Артемьев Иван</a:t>
+              <a:t>Интеллектуальный центр PR/GR-мониторинга для GS Labs</a:t>
             </a:r>
           </a:p>
         </p:txBody>
       </p:sp>
       <p:pic>
         <p:nvPicPr>
-          <p:cNvPr id="7" name="Picture 6" descr="qr-demo.png"/>
+          <p:cNvPr id="6" name="Picture 5" descr="qr-demo.png"/>
           <p:cNvPicPr>
             <a:picLocks noChangeAspect="1"/>
           </p:cNvPicPr>
@@ -3314,8 +3285,8 @@
         </p:blipFill>
         <p:spPr>
           <a:xfrm>
-            <a:off x="10042855" y="4114800"/>
-            <a:ext cx="1417320" cy="1417320"/>
+            <a:off x="10088575" y="4754880"/>
+            <a:ext cx="1371600" cy="1371600"/>
           </a:xfrm>
           <a:prstGeom prst="rect">
             <a:avLst/>
@@ -3324,14 +3295,14 @@
       </p:pic>
       <p:sp>
         <p:nvSpPr>
-          <p:cNvPr id="8" name="TextBox 7"/>
+          <p:cNvPr id="7" name="TextBox 6"/>
           <p:cNvSpPr txBox="1"/>
           <p:nvPr/>
         </p:nvSpPr>
         <p:spPr>
           <a:xfrm>
-            <a:off x="8716975" y="5650992"/>
-            <a:ext cx="2743200" cy="274320"/>
+            <a:off x="8351215" y="6236208"/>
+            <a:ext cx="3108960" cy="274320"/>
           </a:xfrm>
           <a:prstGeom prst="rect">
             <a:avLst/>
@@ -3350,9 +3321,9 @@
               </a:lnSpc>
             </a:pPr>
             <a:r>
-              <a:rPr sz="1150" b="0">
-                <a:solidFill>
-                  <a:srgbClr val="FFFFFF"/>
+              <a:rPr sz="1200" b="1">
+                <a:solidFill>
+                  <a:srgbClr val="F2F4F3"/>
                 </a:solidFill>
                 <a:latin typeface="Inter Tight"/>
               </a:rPr>
@@ -3394,7 +3365,7 @@
             <a:avLst/>
           </a:prstGeom>
           <a:solidFill>
-            <a:srgbClr val="43B02A"/>
+            <a:srgbClr val="F9F9F9"/>
           </a:solidFill>
           <a:ln>
             <a:noFill/>
@@ -3432,7 +3403,7 @@
         <p:spPr>
           <a:xfrm>
             <a:off x="731520" y="566928"/>
-            <a:ext cx="5486400" cy="219456"/>
+            <a:ext cx="10698480" cy="274320"/>
           </a:xfrm>
           <a:prstGeom prst="rect">
             <a:avLst/>
@@ -3451,13 +3422,13 @@
               </a:lnSpc>
             </a:pPr>
             <a:r>
-              <a:rPr sz="1050" b="1" cap="all" spc="140">
-                <a:solidFill>
-                  <a:srgbClr val="D3EFC9"/>
+              <a:rPr sz="1100" b="1" spc="200">
+                <a:solidFill>
+                  <a:srgbClr val="9AA1AB"/>
                 </a:solidFill>
                 <a:latin typeface="Inter Tight"/>
               </a:rPr>
-              <a:t>Команда</a:t>
+              <a:t>ПРИЛОЖЕНИЕ · ДЛЯ ВОПРОСОВ</a:t>
             </a:r>
           </a:p>
         </p:txBody>
@@ -3471,7 +3442,7 @@
         <p:spPr>
           <a:xfrm>
             <a:off x="731520" y="914400"/>
-            <a:ext cx="10698480" cy="731520"/>
+            <a:ext cx="10698480" cy="457200"/>
           </a:xfrm>
           <a:prstGeom prst="rect">
             <a:avLst/>
@@ -3490,13 +3461,13 @@
               </a:lnSpc>
             </a:pPr>
             <a:r>
-              <a:rPr sz="3400" b="1">
-                <a:solidFill>
-                  <a:srgbClr val="FFFFFF"/>
+              <a:rPr sz="3000" b="1">
+                <a:solidFill>
+                  <a:srgbClr val="231F20"/>
                 </a:solidFill>
                 <a:latin typeface="Inter Tight"/>
               </a:rPr>
-              <a:t>Кто делал и где посмотреть</a:t>
+              <a:t>Досье НПА: стадии, хронология, динамика влияния</a:t>
             </a:r>
           </a:p>
         </p:txBody>
@@ -3509,8 +3480,8 @@
         </p:nvSpPr>
         <p:spPr>
           <a:xfrm>
-            <a:off x="731520" y="2286000"/>
-            <a:ext cx="3108960" cy="310896"/>
+            <a:off x="731520" y="1463040"/>
+            <a:ext cx="10698480" cy="640080"/>
           </a:xfrm>
           <a:prstGeom prst="rect">
             <a:avLst/>
@@ -3525,219 +3496,70 @@
           <a:p>
             <a:pPr algn="l">
               <a:lnSpc>
-                <a:spcPct val="132000"/>
+                <a:spcPct val="140000"/>
               </a:lnSpc>
             </a:pPr>
             <a:r>
-              <a:rPr sz="2000" b="1">
-                <a:solidFill>
-                  <a:srgbClr val="FFFFFF"/>
+              <a:rPr sz="1300" b="0">
+                <a:solidFill>
+                  <a:srgbClr val="6B7280"/>
                 </a:solidFill>
                 <a:latin typeface="Inter Tight"/>
               </a:rPr>
-              <a:t>Левочкин Егор</a:t>
-            </a:r>
-          </a:p>
-        </p:txBody>
-      </p:sp>
-      <p:sp>
-        <p:nvSpPr>
-          <p:cNvPr id="6" name="TextBox 5"/>
-          <p:cNvSpPr txBox="1"/>
-          <p:nvPr/>
-        </p:nvSpPr>
-        <p:spPr>
-          <a:xfrm>
-            <a:off x="731520" y="2670048"/>
-            <a:ext cx="5486400" cy="274320"/>
-          </a:xfrm>
-          <a:prstGeom prst="rect">
-            <a:avLst/>
-          </a:prstGeom>
-          <a:noFill/>
-        </p:spPr>
-        <p:txBody>
-          <a:bodyPr wrap="square" lIns="0" rIns="0" tIns="0" bIns="0">
-            <a:spAutoFit/>
-          </a:bodyPr>
-          <a:lstStyle/>
-          <a:p>
-            <a:pPr algn="l">
-              <a:lnSpc>
-                <a:spcPct val="132000"/>
-              </a:lnSpc>
-            </a:pPr>
-            <a:r>
-              <a:rPr sz="1350" b="0">
-                <a:solidFill>
-                  <a:srgbClr val="D3EFC9"/>
-                </a:solidFill>
-                <a:latin typeface="Inter Tight"/>
-              </a:rPr>
-              <a:t>@veceloe  ·  продукт, парсинг, фронтенд</a:t>
-            </a:r>
-          </a:p>
-        </p:txBody>
-      </p:sp>
-      <p:sp>
-        <p:nvSpPr>
-          <p:cNvPr id="7" name="TextBox 6"/>
-          <p:cNvSpPr txBox="1"/>
-          <p:nvPr/>
-        </p:nvSpPr>
-        <p:spPr>
-          <a:xfrm>
-            <a:off x="731520" y="3200400"/>
-            <a:ext cx="3108960" cy="310896"/>
-          </a:xfrm>
-          <a:prstGeom prst="rect">
-            <a:avLst/>
-          </a:prstGeom>
-          <a:noFill/>
-        </p:spPr>
-        <p:txBody>
-          <a:bodyPr wrap="square" lIns="0" rIns="0" tIns="0" bIns="0">
-            <a:spAutoFit/>
-          </a:bodyPr>
-          <a:lstStyle/>
-          <a:p>
-            <a:pPr algn="l">
-              <a:lnSpc>
-                <a:spcPct val="132000"/>
-              </a:lnSpc>
-            </a:pPr>
-            <a:r>
-              <a:rPr sz="2000" b="1">
-                <a:solidFill>
-                  <a:srgbClr val="FFFFFF"/>
-                </a:solidFill>
-                <a:latin typeface="Inter Tight"/>
-              </a:rPr>
-              <a:t>Головаш Денис</a:t>
-            </a:r>
-          </a:p>
-        </p:txBody>
-      </p:sp>
-      <p:sp>
-        <p:nvSpPr>
-          <p:cNvPr id="8" name="TextBox 7"/>
-          <p:cNvSpPr txBox="1"/>
-          <p:nvPr/>
-        </p:nvSpPr>
-        <p:spPr>
-          <a:xfrm>
-            <a:off x="731520" y="3584448"/>
-            <a:ext cx="5486400" cy="274320"/>
-          </a:xfrm>
-          <a:prstGeom prst="rect">
-            <a:avLst/>
-          </a:prstGeom>
-          <a:noFill/>
-        </p:spPr>
-        <p:txBody>
-          <a:bodyPr wrap="square" lIns="0" rIns="0" tIns="0" bIns="0">
-            <a:spAutoFit/>
-          </a:bodyPr>
-          <a:lstStyle/>
-          <a:p>
-            <a:pPr algn="l">
-              <a:lnSpc>
-                <a:spcPct val="132000"/>
-              </a:lnSpc>
-            </a:pPr>
-            <a:r>
-              <a:rPr sz="1350" b="0">
-                <a:solidFill>
-                  <a:srgbClr val="D3EFC9"/>
-                </a:solidFill>
-                <a:latin typeface="Inter Tight"/>
-              </a:rPr>
-              <a:t>@denizzzz_ka  ·  весь слой работы с моделью</a:t>
-            </a:r>
-          </a:p>
-        </p:txBody>
-      </p:sp>
-      <p:sp>
-        <p:nvSpPr>
-          <p:cNvPr id="9" name="TextBox 8"/>
-          <p:cNvSpPr txBox="1"/>
-          <p:nvPr/>
-        </p:nvSpPr>
-        <p:spPr>
-          <a:xfrm>
-            <a:off x="731520" y="4114800"/>
-            <a:ext cx="3108960" cy="310896"/>
-          </a:xfrm>
-          <a:prstGeom prst="rect">
-            <a:avLst/>
-          </a:prstGeom>
-          <a:noFill/>
-        </p:spPr>
-        <p:txBody>
-          <a:bodyPr wrap="square" lIns="0" rIns="0" tIns="0" bIns="0">
-            <a:spAutoFit/>
-          </a:bodyPr>
-          <a:lstStyle/>
-          <a:p>
-            <a:pPr algn="l">
-              <a:lnSpc>
-                <a:spcPct val="132000"/>
-              </a:lnSpc>
-            </a:pPr>
-            <a:r>
-              <a:rPr sz="2000" b="1">
-                <a:solidFill>
-                  <a:srgbClr val="FFFFFF"/>
-                </a:solidFill>
-                <a:latin typeface="Inter Tight"/>
-              </a:rPr>
-              <a:t>Артемьев Иван</a:t>
-            </a:r>
-          </a:p>
-        </p:txBody>
-      </p:sp>
-      <p:sp>
-        <p:nvSpPr>
-          <p:cNvPr id="10" name="TextBox 9"/>
-          <p:cNvSpPr txBox="1"/>
-          <p:nvPr/>
-        </p:nvSpPr>
-        <p:spPr>
-          <a:xfrm>
-            <a:off x="731520" y="4498848"/>
-            <a:ext cx="5486400" cy="274320"/>
-          </a:xfrm>
-          <a:prstGeom prst="rect">
-            <a:avLst/>
-          </a:prstGeom>
-          <a:noFill/>
-        </p:spPr>
-        <p:txBody>
-          <a:bodyPr wrap="square" lIns="0" rIns="0" tIns="0" bIns="0">
-            <a:spAutoFit/>
-          </a:bodyPr>
-          <a:lstStyle/>
-          <a:p>
-            <a:pPr algn="l">
-              <a:lnSpc>
-                <a:spcPct val="132000"/>
-              </a:lnSpc>
-            </a:pPr>
-            <a:r>
-              <a:rPr sz="1350" b="0">
-                <a:solidFill>
-                  <a:srgbClr val="D3EFC9"/>
-                </a:solidFill>
-                <a:latin typeface="Inter Tight"/>
-              </a:rPr>
-              <a:t>@s3drmn  ·  бэкенд, конвейер, развёртывание</a:t>
-            </a:r>
+              <a:t>Стадия «Обсуждение» помечена неприменимой, а не непройденной: российские акты стадии пропускают, и линейная шкала без этого состояния лжёт.</a:t>
+            </a:r>
+          </a:p>
+        </p:txBody>
+      </p:sp>
+      <p:sp>
+        <p:nvSpPr>
+          <p:cNvPr id="6" name="Rectangle 5"/>
+          <p:cNvSpPr/>
+          <p:nvPr/>
+        </p:nvSpPr>
+        <p:spPr>
+          <a:xfrm>
+            <a:off x="1542135" y="1801368"/>
+            <a:ext cx="9107424" cy="4543653"/>
+          </a:xfrm>
+          <a:prstGeom prst="rect">
+            <a:avLst/>
+          </a:prstGeom>
+          <a:solidFill>
+            <a:srgbClr val="FFFFFF"/>
+          </a:solidFill>
+          <a:ln w="9525">
+            <a:solidFill>
+              <a:srgbClr val="D9D9D9"/>
+            </a:solidFill>
+          </a:ln>
+          <a:effectLst/>
+        </p:spPr>
+        <p:style>
+          <a:lnRef idx="1">
+            <a:schemeClr val="accent1"/>
+          </a:lnRef>
+          <a:fillRef idx="3">
+            <a:schemeClr val="accent1"/>
+          </a:fillRef>
+          <a:effectRef idx="2">
+            <a:schemeClr val="accent1"/>
+          </a:effectRef>
+          <a:fontRef idx="minor">
+            <a:schemeClr val="lt1"/>
+          </a:fontRef>
+        </p:style>
+        <p:txBody>
+          <a:bodyPr rtlCol="0" anchor="ctr"/>
+          <a:lstStyle/>
+          <a:p>
+            <a:pPr algn="ctr"/>
           </a:p>
         </p:txBody>
       </p:sp>
       <p:pic>
         <p:nvPicPr>
-          <p:cNvPr id="11" name="Picture 10" descr="qr-demo.png"/>
+          <p:cNvPr id="7" name="Picture 6" descr="shot_act.jpg"/>
           <p:cNvPicPr>
             <a:picLocks noChangeAspect="1"/>
           </p:cNvPicPr>
@@ -3751,8 +3573,8 @@
         </p:blipFill>
         <p:spPr>
           <a:xfrm>
-            <a:off x="9539935" y="2286000"/>
-            <a:ext cx="1920240" cy="1920240"/>
+            <a:off x="1569567" y="1828800"/>
+            <a:ext cx="9052560" cy="4488789"/>
           </a:xfrm>
           <a:prstGeom prst="rect">
             <a:avLst/>
@@ -3761,14 +3583,53 @@
       </p:pic>
       <p:sp>
         <p:nvSpPr>
-          <p:cNvPr id="12" name="TextBox 11"/>
+          <p:cNvPr id="8" name="TextBox 7"/>
           <p:cNvSpPr txBox="1"/>
           <p:nvPr/>
         </p:nvSpPr>
         <p:spPr>
           <a:xfrm>
-            <a:off x="8351215" y="4315968"/>
-            <a:ext cx="3108960" cy="274320"/>
+            <a:off x="731520" y="6382512"/>
+            <a:ext cx="8778240" cy="237744"/>
+          </a:xfrm>
+          <a:prstGeom prst="rect">
+            <a:avLst/>
+          </a:prstGeom>
+          <a:noFill/>
+        </p:spPr>
+        <p:txBody>
+          <a:bodyPr wrap="square" lIns="0" rIns="0" tIns="0" bIns="0">
+            <a:spAutoFit/>
+          </a:bodyPr>
+          <a:lstStyle/>
+          <a:p>
+            <a:pPr algn="l">
+              <a:lnSpc>
+                <a:spcPct val="132000"/>
+              </a:lnSpc>
+            </a:pPr>
+            <a:r>
+              <a:rPr sz="950" b="0">
+                <a:solidFill>
+                  <a:srgbClr val="9AA1AB"/>
+                </a:solidFill>
+                <a:latin typeface="Inter Tight"/>
+              </a:rPr>
+              <a:t>FR-032 · FR-035</a:t>
+            </a:r>
+          </a:p>
+        </p:txBody>
+      </p:sp>
+      <p:sp>
+        <p:nvSpPr>
+          <p:cNvPr id="9" name="TextBox 8"/>
+          <p:cNvSpPr txBox="1"/>
+          <p:nvPr/>
+        </p:nvSpPr>
+        <p:spPr>
+          <a:xfrm>
+            <a:off x="10180015" y="6382512"/>
+            <a:ext cx="1280160" cy="237744"/>
           </a:xfrm>
           <a:prstGeom prst="rect">
             <a:avLst/>
@@ -3787,87 +3648,9 @@
               </a:lnSpc>
             </a:pPr>
             <a:r>
-              <a:rPr sz="1400" b="1">
-                <a:solidFill>
-                  <a:srgbClr val="FFFFFF"/>
-                </a:solidFill>
-                <a:latin typeface="Inter Tight"/>
-              </a:rPr>
-              <a:t>185.56.162.154</a:t>
-            </a:r>
-          </a:p>
-        </p:txBody>
-      </p:sp>
-      <p:sp>
-        <p:nvSpPr>
-          <p:cNvPr id="13" name="TextBox 12"/>
-          <p:cNvSpPr txBox="1"/>
-          <p:nvPr/>
-        </p:nvSpPr>
-        <p:spPr>
-          <a:xfrm>
-            <a:off x="731520" y="5486400"/>
-            <a:ext cx="10698480" cy="365760"/>
-          </a:xfrm>
-          <a:prstGeom prst="rect">
-            <a:avLst/>
-          </a:prstGeom>
-          <a:noFill/>
-        </p:spPr>
-        <p:txBody>
-          <a:bodyPr wrap="square" lIns="0" rIns="0" tIns="0" bIns="0">
-            <a:spAutoFit/>
-          </a:bodyPr>
-          <a:lstStyle/>
-          <a:p>
-            <a:pPr algn="l">
-              <a:lnSpc>
-                <a:spcPct val="132000"/>
-              </a:lnSpc>
-            </a:pPr>
-            <a:r>
-              <a:rPr sz="1400" b="0">
-                <a:solidFill>
-                  <a:srgbClr val="E4F5DE"/>
-                </a:solidFill>
-                <a:latin typeface="Inter Tight"/>
-              </a:rPr>
-              <a:t>github.com/veceloe/ai-gpr-center-cifra</a:t>
-            </a:r>
-          </a:p>
-        </p:txBody>
-      </p:sp>
-      <p:sp>
-        <p:nvSpPr>
-          <p:cNvPr id="14" name="TextBox 13"/>
-          <p:cNvSpPr txBox="1"/>
-          <p:nvPr/>
-        </p:nvSpPr>
-        <p:spPr>
-          <a:xfrm>
-            <a:off x="10180015" y="6382512"/>
-            <a:ext cx="1280160" cy="237744"/>
-          </a:xfrm>
-          <a:prstGeom prst="rect">
-            <a:avLst/>
-          </a:prstGeom>
-          <a:noFill/>
-        </p:spPr>
-        <p:txBody>
-          <a:bodyPr wrap="square" lIns="0" rIns="0" tIns="0" bIns="0">
-            <a:spAutoFit/>
-          </a:bodyPr>
-          <a:lstStyle/>
-          <a:p>
-            <a:pPr algn="r">
-              <a:lnSpc>
-                <a:spcPct val="132000"/>
-              </a:lnSpc>
-            </a:pPr>
-            <a:r>
               <a:rPr sz="950" b="0">
                 <a:solidFill>
-                  <a:srgbClr val="D3EFC9"/>
+                  <a:srgbClr val="9AA1AB"/>
                 </a:solidFill>
                 <a:latin typeface="Inter Tight"/>
               </a:rPr>
@@ -3909,7 +3692,7 @@
             <a:avLst/>
           </a:prstGeom>
           <a:solidFill>
-            <a:srgbClr val="F9F9F9"/>
+            <a:srgbClr val="101214"/>
           </a:solidFill>
           <a:ln>
             <a:noFill/>
@@ -3940,20 +3723,178 @@
       </p:sp>
       <p:sp>
         <p:nvSpPr>
-          <p:cNvPr id="3" name="Rectangle 2"/>
+          <p:cNvPr id="3" name="TextBox 2"/>
+          <p:cNvSpPr txBox="1"/>
+          <p:nvPr/>
+        </p:nvSpPr>
+        <p:spPr>
+          <a:xfrm>
+            <a:off x="731520" y="1371600"/>
+            <a:ext cx="6583680" cy="274320"/>
+          </a:xfrm>
+          <a:prstGeom prst="rect">
+            <a:avLst/>
+          </a:prstGeom>
+          <a:noFill/>
+        </p:spPr>
+        <p:txBody>
+          <a:bodyPr wrap="square" lIns="0" rIns="0" tIns="0" bIns="0">
+            <a:spAutoFit/>
+          </a:bodyPr>
+          <a:lstStyle/>
+          <a:p>
+            <a:pPr algn="l">
+              <a:lnSpc>
+                <a:spcPct val="132000"/>
+              </a:lnSpc>
+            </a:pPr>
+            <a:r>
+              <a:rPr sz="1100" b="1" spc="200">
+                <a:solidFill>
+                  <a:srgbClr val="43B02A"/>
+                </a:solidFill>
+                <a:latin typeface="Inter Tight"/>
+              </a:rPr>
+              <a:t>ЗАЧЕМ ЭТО ВООБЩЕ</a:t>
+            </a:r>
+          </a:p>
+        </p:txBody>
+      </p:sp>
+      <p:sp>
+        <p:nvSpPr>
+          <p:cNvPr id="4" name="TextBox 3"/>
+          <p:cNvSpPr txBox="1"/>
+          <p:nvPr/>
+        </p:nvSpPr>
+        <p:spPr>
+          <a:xfrm>
+            <a:off x="731520" y="1828800"/>
+            <a:ext cx="6035040" cy="2377440"/>
+          </a:xfrm>
+          <a:prstGeom prst="rect">
+            <a:avLst/>
+          </a:prstGeom>
+          <a:noFill/>
+        </p:spPr>
+        <p:txBody>
+          <a:bodyPr wrap="square" lIns="0" rIns="0" tIns="0" bIns="0">
+            <a:spAutoFit/>
+          </a:bodyPr>
+          <a:lstStyle/>
+          <a:p>
+            <a:pPr algn="l">
+              <a:lnSpc>
+                <a:spcPct val="94000"/>
+              </a:lnSpc>
+            </a:pPr>
+            <a:r>
+              <a:rPr sz="15000" b="1">
+                <a:solidFill>
+                  <a:srgbClr val="F2F4F3"/>
+                </a:solidFill>
+                <a:latin typeface="Inter Tight"/>
+              </a:rPr>
+              <a:t>630</a:t>
+            </a:r>
+          </a:p>
+        </p:txBody>
+      </p:sp>
+      <p:sp>
+        <p:nvSpPr>
+          <p:cNvPr id="5" name="TextBox 4"/>
+          <p:cNvSpPr txBox="1"/>
+          <p:nvPr/>
+        </p:nvSpPr>
+        <p:spPr>
+          <a:xfrm>
+            <a:off x="731520" y="3931920"/>
+            <a:ext cx="5669280" cy="365760"/>
+          </a:xfrm>
+          <a:prstGeom prst="rect">
+            <a:avLst/>
+          </a:prstGeom>
+          <a:noFill/>
+        </p:spPr>
+        <p:txBody>
+          <a:bodyPr wrap="square" lIns="0" rIns="0" tIns="0" bIns="0">
+            <a:spAutoFit/>
+          </a:bodyPr>
+          <a:lstStyle/>
+          <a:p>
+            <a:pPr algn="l">
+              <a:lnSpc>
+                <a:spcPct val="132000"/>
+              </a:lnSpc>
+            </a:pPr>
+            <a:r>
+              <a:rPr sz="2000" b="0">
+                <a:solidFill>
+                  <a:srgbClr val="43B02A"/>
+                </a:solidFill>
+                <a:latin typeface="Inter Tight"/>
+              </a:rPr>
+              <a:t>часов в год у одного специалиста</a:t>
+            </a:r>
+          </a:p>
+        </p:txBody>
+      </p:sp>
+      <p:sp>
+        <p:nvSpPr>
+          <p:cNvPr id="6" name="TextBox 5"/>
+          <p:cNvSpPr txBox="1"/>
+          <p:nvPr/>
+        </p:nvSpPr>
+        <p:spPr>
+          <a:xfrm>
+            <a:off x="731520" y="4526280"/>
+            <a:ext cx="5394960" cy="1280160"/>
+          </a:xfrm>
+          <a:prstGeom prst="rect">
+            <a:avLst/>
+          </a:prstGeom>
+          <a:noFill/>
+        </p:spPr>
+        <p:txBody>
+          <a:bodyPr wrap="square" lIns="0" rIns="0" tIns="0" bIns="0">
+            <a:spAutoFit/>
+          </a:bodyPr>
+          <a:lstStyle/>
+          <a:p>
+            <a:pPr algn="l">
+              <a:lnSpc>
+                <a:spcPct val="150000"/>
+              </a:lnSpc>
+            </a:pPr>
+            <a:r>
+              <a:rPr sz="1450" b="0">
+                <a:solidFill>
+                  <a:srgbClr val="8B949E"/>
+                </a:solidFill>
+                <a:latin typeface="Inter Tight"/>
+              </a:rPr>
+              <a:t>Столько уходит на ручное чтение лент, порталов регуляторов и телеграм-каналов. Ориентир заказчика — разбирать суточную повестку за 10–15 минут.</a:t>
+            </a:r>
+          </a:p>
+        </p:txBody>
+      </p:sp>
+      <p:sp>
+        <p:nvSpPr>
+          <p:cNvPr id="7" name="Rounded Rectangle 6"/>
           <p:cNvSpPr/>
           <p:nvPr/>
         </p:nvSpPr>
         <p:spPr>
           <a:xfrm>
-            <a:off x="731520" y="1463040"/>
-            <a:ext cx="50292" cy="2286000"/>
-          </a:xfrm>
-          <a:prstGeom prst="rect">
-            <a:avLst/>
+            <a:off x="6949440" y="1828800"/>
+            <a:ext cx="4572000" cy="3566160"/>
+          </a:xfrm>
+          <a:prstGeom prst="roundRect">
+            <a:avLst>
+              <a:gd name="adj" fmla="val 4500"/>
+            </a:avLst>
           </a:prstGeom>
           <a:solidFill>
-            <a:srgbClr val="43B02A"/>
+            <a:srgbClr val="1B1F24"/>
           </a:solidFill>
           <a:ln>
             <a:noFill/>
@@ -3984,14 +3925,14 @@
       </p:sp>
       <p:sp>
         <p:nvSpPr>
-          <p:cNvPr id="4" name="TextBox 3"/>
+          <p:cNvPr id="8" name="TextBox 7"/>
           <p:cNvSpPr txBox="1"/>
           <p:nvPr/>
         </p:nvSpPr>
         <p:spPr>
           <a:xfrm>
-            <a:off x="1115568" y="1417320"/>
-            <a:ext cx="6766560" cy="2377440"/>
+            <a:off x="7315200" y="2286000"/>
+            <a:ext cx="3840480" cy="2377440"/>
           </a:xfrm>
           <a:prstGeom prst="rect">
             <a:avLst/>
@@ -4006,111 +3947,68 @@
           <a:p>
             <a:pPr algn="l">
               <a:lnSpc>
-                <a:spcPct val="114000"/>
+                <a:spcPct val="142000"/>
               </a:lnSpc>
             </a:pPr>
             <a:r>
-              <a:rPr sz="4000" b="1">
-                <a:solidFill>
-                  <a:srgbClr val="231F20"/>
+              <a:rPr sz="2100" b="0">
+                <a:solidFill>
+                  <a:srgbClr val="8B949E"/>
                 </a:solidFill>
                 <a:latin typeface="Inter Tight"/>
               </a:rPr>
-              <a:t>Три-четыре часа в день
-уходит на то, чтобы
-прочитать всё вручную</a:t>
-            </a:r>
-          </a:p>
-        </p:txBody>
-      </p:sp>
-      <p:sp>
-        <p:nvSpPr>
-          <p:cNvPr id="5" name="TextBox 4"/>
-          <p:cNvSpPr txBox="1"/>
-          <p:nvPr/>
-        </p:nvSpPr>
-        <p:spPr>
-          <a:xfrm>
-            <a:off x="1115568" y="4160520"/>
-            <a:ext cx="6400800" cy="1097280"/>
-          </a:xfrm>
-          <a:prstGeom prst="rect">
-            <a:avLst/>
-          </a:prstGeom>
-          <a:noFill/>
-        </p:spPr>
-        <p:txBody>
-          <a:bodyPr wrap="square" lIns="0" rIns="0" tIns="0" bIns="0">
-            <a:spAutoFit/>
-          </a:bodyPr>
-          <a:lstStyle/>
-          <a:p>
-            <a:pPr algn="l">
-              <a:lnSpc>
-                <a:spcPct val="145000"/>
-              </a:lnSpc>
-            </a:pPr>
-            <a:r>
-              <a:rPr sz="1500" b="0">
-                <a:solidFill>
-                  <a:srgbClr val="6B7280"/>
+              <a:t>Агрегаторы отвечают, </a:t>
+            </a:r>
+            <a:r>
+              <a:rPr sz="2100" b="1">
+                <a:solidFill>
+                  <a:srgbClr val="F2F4F3"/>
                 </a:solidFill>
                 <a:latin typeface="Inter Tight"/>
               </a:rPr>
-              <a:t>И дело не в объёме. Агрегаторы отвечают на вопрос «что интересного произошло». GR-специалисту нужен другой ответ: что из этого касается нашей компании.</a:t>
-            </a:r>
-          </a:p>
-        </p:txBody>
-      </p:sp>
-      <p:sp>
-        <p:nvSpPr>
-          <p:cNvPr id="6" name="TextBox 5"/>
-          <p:cNvSpPr txBox="1"/>
-          <p:nvPr/>
-        </p:nvSpPr>
-        <p:spPr>
-          <a:xfrm>
-            <a:off x="8321040" y="1481328"/>
-            <a:ext cx="3200400" cy="1387365"/>
-          </a:xfrm>
-          <a:prstGeom prst="rect">
-            <a:avLst/>
-          </a:prstGeom>
-          <a:noFill/>
-        </p:spPr>
-        <p:txBody>
-          <a:bodyPr wrap="square" lIns="0" rIns="0" tIns="0" bIns="0">
-            <a:spAutoFit/>
-          </a:bodyPr>
-          <a:lstStyle/>
-          <a:p>
-            <a:pPr algn="l">
-              <a:lnSpc>
-                <a:spcPct val="100000"/>
-              </a:lnSpc>
-            </a:pPr>
-            <a:r>
-              <a:rPr sz="8800" b="1">
-                <a:solidFill>
-                  <a:srgbClr val="379123"/>
+              <a:t>что интересного произошло</a:t>
+            </a:r>
+            <a:r>
+              <a:rPr sz="2100" b="0">
+                <a:solidFill>
+                  <a:srgbClr val="8B949E"/>
                 </a:solidFill>
                 <a:latin typeface="Inter Tight"/>
               </a:rPr>
-              <a:t>630</a:t>
-            </a:r>
-          </a:p>
-        </p:txBody>
-      </p:sp>
-      <p:sp>
-        <p:nvSpPr>
-          <p:cNvPr id="7" name="TextBox 6"/>
+              <a:t>.
+GR-специалисту нужен другой ответ: </a:t>
+            </a:r>
+            <a:r>
+              <a:rPr sz="2100" b="1">
+                <a:solidFill>
+                  <a:srgbClr val="43B02A"/>
+                </a:solidFill>
+                <a:latin typeface="Inter Tight"/>
+              </a:rPr>
+              <a:t>что из этого касается нашей компании</a:t>
+            </a:r>
+            <a:r>
+              <a:rPr sz="2100" b="0">
+                <a:solidFill>
+                  <a:srgbClr val="8B949E"/>
+                </a:solidFill>
+                <a:latin typeface="Inter Tight"/>
+              </a:rPr>
+              <a:t>.</a:t>
+            </a:r>
+          </a:p>
+        </p:txBody>
+      </p:sp>
+      <p:sp>
+        <p:nvSpPr>
+          <p:cNvPr id="9" name="TextBox 8"/>
           <p:cNvSpPr txBox="1"/>
           <p:nvPr/>
         </p:nvSpPr>
         <p:spPr>
           <a:xfrm>
-            <a:off x="8321040" y="3063240"/>
-            <a:ext cx="3200400" cy="219456"/>
+            <a:off x="731520" y="6382512"/>
+            <a:ext cx="8778240" cy="237744"/>
           </a:xfrm>
           <a:prstGeom prst="rect">
             <a:avLst/>
@@ -4129,87 +4027,9 @@
               </a:lnSpc>
             </a:pPr>
             <a:r>
-              <a:rPr sz="1050" b="1" cap="all" spc="140">
-                <a:solidFill>
-                  <a:srgbClr val="6B7280"/>
-                </a:solidFill>
-                <a:latin typeface="Inter Tight"/>
-              </a:rPr>
-              <a:t>часов в год на специалиста</a:t>
-            </a:r>
-          </a:p>
-        </p:txBody>
-      </p:sp>
-      <p:sp>
-        <p:nvSpPr>
-          <p:cNvPr id="8" name="TextBox 7"/>
-          <p:cNvSpPr txBox="1"/>
-          <p:nvPr/>
-        </p:nvSpPr>
-        <p:spPr>
-          <a:xfrm>
-            <a:off x="8321040" y="3429000"/>
-            <a:ext cx="3108960" cy="914400"/>
-          </a:xfrm>
-          <a:prstGeom prst="rect">
-            <a:avLst/>
-          </a:prstGeom>
-          <a:noFill/>
-        </p:spPr>
-        <p:txBody>
-          <a:bodyPr wrap="square" lIns="0" rIns="0" tIns="0" bIns="0">
-            <a:spAutoFit/>
-          </a:bodyPr>
-          <a:lstStyle/>
-          <a:p>
-            <a:pPr algn="l">
-              <a:lnSpc>
-                <a:spcPct val="145000"/>
-              </a:lnSpc>
-            </a:pPr>
-            <a:r>
-              <a:rPr sz="1300" b="0">
-                <a:solidFill>
-                  <a:srgbClr val="6B7280"/>
-                </a:solidFill>
-                <a:latin typeface="Inter Tight"/>
-              </a:rPr>
-              <a:t>Столько уходит на ручной мониторинг. Целевой ориентир заказчика — разбор суточной повестки за 10–15 минут.</a:t>
-            </a:r>
-          </a:p>
-        </p:txBody>
-      </p:sp>
-      <p:sp>
-        <p:nvSpPr>
-          <p:cNvPr id="9" name="TextBox 8"/>
-          <p:cNvSpPr txBox="1"/>
-          <p:nvPr/>
-        </p:nvSpPr>
-        <p:spPr>
-          <a:xfrm>
-            <a:off x="731520" y="6382512"/>
-            <a:ext cx="8778240" cy="237744"/>
-          </a:xfrm>
-          <a:prstGeom prst="rect">
-            <a:avLst/>
-          </a:prstGeom>
-          <a:noFill/>
-        </p:spPr>
-        <p:txBody>
-          <a:bodyPr wrap="square" lIns="0" rIns="0" tIns="0" bIns="0">
-            <a:spAutoFit/>
-          </a:bodyPr>
-          <a:lstStyle/>
-          <a:p>
-            <a:pPr algn="l">
-              <a:lnSpc>
-                <a:spcPct val="132000"/>
-              </a:lnSpc>
-            </a:pPr>
-            <a:r>
               <a:rPr sz="950" b="0">
                 <a:solidFill>
-                  <a:srgbClr val="9AA1AB"/>
+                  <a:srgbClr val="8B949E"/>
                 </a:solidFill>
                 <a:latin typeface="Inter Tight"/>
               </a:rPr>
@@ -4248,7 +4068,7 @@
             <a:r>
               <a:rPr sz="950" b="0">
                 <a:solidFill>
-                  <a:srgbClr val="9AA1AB"/>
+                  <a:srgbClr val="8B949E"/>
                 </a:solidFill>
                 <a:latin typeface="Inter Tight"/>
               </a:rPr>
@@ -4290,7 +4110,7 @@
             <a:avLst/>
           </a:prstGeom>
           <a:solidFill>
-            <a:srgbClr val="F9F9F9"/>
+            <a:srgbClr val="101214"/>
           </a:solidFill>
           <a:ln>
             <a:noFill/>
@@ -4321,16 +4141,199 @@
       </p:sp>
       <p:sp>
         <p:nvSpPr>
-          <p:cNvPr id="3" name="Rectangle 2"/>
+          <p:cNvPr id="3" name="TextBox 2"/>
+          <p:cNvSpPr txBox="1"/>
+          <p:nvPr/>
+        </p:nvSpPr>
+        <p:spPr>
+          <a:xfrm>
+            <a:off x="731520" y="1051560"/>
+            <a:ext cx="10698480" cy="1280160"/>
+          </a:xfrm>
+          <a:prstGeom prst="rect">
+            <a:avLst/>
+          </a:prstGeom>
+          <a:noFill/>
+        </p:spPr>
+        <p:txBody>
+          <a:bodyPr wrap="square" lIns="0" rIns="0" tIns="0" bIns="0">
+            <a:spAutoFit/>
+          </a:bodyPr>
+          <a:lstStyle/>
+          <a:p>
+            <a:pPr algn="l">
+              <a:lnSpc>
+                <a:spcPct val="110000"/>
+              </a:lnSpc>
+            </a:pPr>
+            <a:r>
+              <a:rPr sz="5200" b="1">
+                <a:solidFill>
+                  <a:srgbClr val="F2F4F3"/>
+                </a:solidFill>
+                <a:latin typeface="Inter Tight"/>
+              </a:rPr>
+              <a:t>Модель выставляет баллы.
+</a:t>
+            </a:r>
+            <a:r>
+              <a:rPr sz="5200" b="1">
+                <a:solidFill>
+                  <a:srgbClr val="43B02A"/>
+                </a:solidFill>
+                <a:latin typeface="Inter Tight"/>
+              </a:rPr>
+              <a:t>Индекс считает код.</a:t>
+            </a:r>
+          </a:p>
+        </p:txBody>
+      </p:sp>
+      <p:sp>
+        <p:nvSpPr>
+          <p:cNvPr id="4" name="Rounded Rectangle 3"/>
           <p:cNvSpPr/>
           <p:nvPr/>
         </p:nvSpPr>
         <p:spPr>
           <a:xfrm>
-            <a:off x="731520" y="1371600"/>
-            <a:ext cx="50292" cy="1371600"/>
-          </a:xfrm>
-          <a:prstGeom prst="rect">
+            <a:off x="731520" y="3246120"/>
+            <a:ext cx="4663440" cy="1828800"/>
+          </a:xfrm>
+          <a:prstGeom prst="roundRect">
+            <a:avLst>
+              <a:gd name="adj" fmla="val 4500"/>
+            </a:avLst>
+          </a:prstGeom>
+          <a:solidFill>
+            <a:srgbClr val="1B1F24"/>
+          </a:solidFill>
+          <a:ln>
+            <a:noFill/>
+          </a:ln>
+          <a:effectLst/>
+        </p:spPr>
+        <p:style>
+          <a:lnRef idx="1">
+            <a:schemeClr val="accent1"/>
+          </a:lnRef>
+          <a:fillRef idx="3">
+            <a:schemeClr val="accent1"/>
+          </a:fillRef>
+          <a:effectRef idx="2">
+            <a:schemeClr val="accent1"/>
+          </a:effectRef>
+          <a:fontRef idx="minor">
+            <a:schemeClr val="lt1"/>
+          </a:fontRef>
+        </p:style>
+        <p:txBody>
+          <a:bodyPr rtlCol="0" anchor="ctr"/>
+          <a:lstStyle/>
+          <a:p>
+            <a:pPr algn="ctr"/>
+          </a:p>
+        </p:txBody>
+      </p:sp>
+      <p:sp>
+        <p:nvSpPr>
+          <p:cNvPr id="5" name="TextBox 4"/>
+          <p:cNvSpPr txBox="1"/>
+          <p:nvPr/>
+        </p:nvSpPr>
+        <p:spPr>
+          <a:xfrm>
+            <a:off x="1097280" y="3520440"/>
+            <a:ext cx="4023360" cy="274320"/>
+          </a:xfrm>
+          <a:prstGeom prst="rect">
+            <a:avLst/>
+          </a:prstGeom>
+          <a:noFill/>
+        </p:spPr>
+        <p:txBody>
+          <a:bodyPr wrap="square" lIns="0" rIns="0" tIns="0" bIns="0">
+            <a:spAutoFit/>
+          </a:bodyPr>
+          <a:lstStyle/>
+          <a:p>
+            <a:pPr algn="l">
+              <a:lnSpc>
+                <a:spcPct val="132000"/>
+              </a:lnSpc>
+            </a:pPr>
+            <a:r>
+              <a:rPr sz="1050" b="1" spc="180">
+                <a:solidFill>
+                  <a:srgbClr val="8B949E"/>
+                </a:solidFill>
+                <a:latin typeface="Inter Tight"/>
+              </a:rPr>
+              <a:t>МОДЕЛЬ ОТДАЁТ</a:t>
+            </a:r>
+          </a:p>
+        </p:txBody>
+      </p:sp>
+      <p:sp>
+        <p:nvSpPr>
+          <p:cNvPr id="6" name="TextBox 5"/>
+          <p:cNvSpPr txBox="1"/>
+          <p:nvPr/>
+        </p:nvSpPr>
+        <p:spPr>
+          <a:xfrm>
+            <a:off x="1097280" y="3886200"/>
+            <a:ext cx="4023360" cy="1005840"/>
+          </a:xfrm>
+          <a:prstGeom prst="rect">
+            <a:avLst/>
+          </a:prstGeom>
+          <a:noFill/>
+        </p:spPr>
+        <p:txBody>
+          <a:bodyPr wrap="square" lIns="0" rIns="0" tIns="0" bIns="0">
+            <a:spAutoFit/>
+          </a:bodyPr>
+          <a:lstStyle/>
+          <a:p>
+            <a:pPr algn="l">
+              <a:lnSpc>
+                <a:spcPct val="155000"/>
+              </a:lnSpc>
+            </a:pPr>
+            <a:r>
+              <a:rPr sz="1900" b="1">
+                <a:solidFill>
+                  <a:srgbClr val="F2F4F3"/>
+                </a:solidFill>
+                <a:latin typeface="Inter Tight"/>
+              </a:rPr>
+              <a:t>К1·3   К2·2   К3·3   К4·0   К5·0   К6·3</a:t>
+            </a:r>
+            <a:r>
+              <a:rPr sz="1400" b="0">
+                <a:solidFill>
+                  <a:srgbClr val="8B949E"/>
+                </a:solidFill>
+                <a:latin typeface="Inter Tight"/>
+              </a:rPr>
+              <a:t>
+и обоснование к каждому баллу</a:t>
+            </a:r>
+          </a:p>
+        </p:txBody>
+      </p:sp>
+      <p:sp>
+        <p:nvSpPr>
+          <p:cNvPr id="7" name="Can 6"/>
+          <p:cNvSpPr/>
+          <p:nvPr/>
+        </p:nvSpPr>
+        <p:spPr>
+          <a:xfrm>
+            <a:off x="5623560" y="4069080"/>
+            <a:ext cx="685800" cy="146304"/>
+          </a:xfrm>
+          <a:prstGeom prst="can">
             <a:avLst/>
           </a:prstGeom>
           <a:solidFill>
@@ -4365,67 +4368,25 @@
       </p:sp>
       <p:sp>
         <p:nvSpPr>
-          <p:cNvPr id="4" name="TextBox 3"/>
-          <p:cNvSpPr txBox="1"/>
-          <p:nvPr/>
-        </p:nvSpPr>
-        <p:spPr>
-          <a:xfrm>
-            <a:off x="1115568" y="1325880"/>
-            <a:ext cx="10058400" cy="1463040"/>
-          </a:xfrm>
-          <a:prstGeom prst="rect">
-            <a:avLst/>
-          </a:prstGeom>
-          <a:noFill/>
-        </p:spPr>
-        <p:txBody>
-          <a:bodyPr wrap="square" lIns="0" rIns="0" tIns="0" bIns="0">
-            <a:spAutoFit/>
-          </a:bodyPr>
-          <a:lstStyle/>
-          <a:p>
-            <a:pPr algn="l">
-              <a:lnSpc>
-                <a:spcPct val="114000"/>
-              </a:lnSpc>
-            </a:pPr>
-            <a:r>
-              <a:rPr sz="4200" b="1">
-                <a:solidFill>
-                  <a:srgbClr val="231F20"/>
-                </a:solidFill>
-                <a:latin typeface="Inter Tight"/>
-              </a:rPr>
-              <a:t>Модель выставляет баллы.
-Индекс считает код.</a:t>
-            </a:r>
-          </a:p>
-        </p:txBody>
-      </p:sp>
-      <p:sp>
-        <p:nvSpPr>
-          <p:cNvPr id="5" name="Rounded Rectangle 4"/>
+          <p:cNvPr id="8" name="Rounded Rectangle 7"/>
           <p:cNvSpPr/>
           <p:nvPr/>
         </p:nvSpPr>
         <p:spPr>
           <a:xfrm>
-            <a:off x="731520" y="3200400"/>
-            <a:ext cx="4206240" cy="1691640"/>
+            <a:off x="6675120" y="3246120"/>
+            <a:ext cx="4754880" cy="1828800"/>
           </a:xfrm>
           <a:prstGeom prst="roundRect">
             <a:avLst>
-              <a:gd name="adj" fmla="val 6000"/>
+              <a:gd name="adj" fmla="val 4500"/>
             </a:avLst>
           </a:prstGeom>
           <a:solidFill>
-            <a:srgbClr val="FFFFFF"/>
+            <a:srgbClr val="23282E"/>
           </a:solidFill>
-          <a:ln w="19050">
-            <a:solidFill>
-              <a:srgbClr val="43B02A"/>
-            </a:solidFill>
+          <a:ln>
+            <a:noFill/>
           </a:ln>
           <a:effectLst/>
         </p:spPr>
@@ -4453,14 +4414,14 @@
       </p:sp>
       <p:sp>
         <p:nvSpPr>
-          <p:cNvPr id="6" name="TextBox 5"/>
+          <p:cNvPr id="9" name="TextBox 8"/>
           <p:cNvSpPr txBox="1"/>
           <p:nvPr/>
         </p:nvSpPr>
         <p:spPr>
           <a:xfrm>
-            <a:off x="1024128" y="3429000"/>
-            <a:ext cx="3657600" cy="219456"/>
+            <a:off x="7040880" y="3520440"/>
+            <a:ext cx="4114800" cy="274320"/>
           </a:xfrm>
           <a:prstGeom prst="rect">
             <a:avLst/>
@@ -4479,27 +4440,27 @@
               </a:lnSpc>
             </a:pPr>
             <a:r>
-              <a:rPr sz="1050" b="1" cap="all" spc="140">
-                <a:solidFill>
-                  <a:srgbClr val="379123"/>
+              <a:rPr sz="1050" b="1" spc="180">
+                <a:solidFill>
+                  <a:srgbClr val="43B02A"/>
                 </a:solidFill>
                 <a:latin typeface="Inter Tight"/>
               </a:rPr>
-              <a:t>Модель</a:t>
-            </a:r>
-          </a:p>
-        </p:txBody>
-      </p:sp>
-      <p:sp>
-        <p:nvSpPr>
-          <p:cNvPr id="7" name="TextBox 6"/>
+              <a:t>КОД ВЫЧИСЛЯЕТ</a:t>
+            </a:r>
+          </a:p>
+        </p:txBody>
+      </p:sp>
+      <p:sp>
+        <p:nvSpPr>
+          <p:cNvPr id="10" name="TextBox 9"/>
           <p:cNvSpPr txBox="1"/>
           <p:nvPr/>
         </p:nvSpPr>
         <p:spPr>
           <a:xfrm>
-            <a:off x="1024128" y="3749039"/>
-            <a:ext cx="3657600" cy="1005840"/>
+            <a:off x="7040880" y="3886200"/>
+            <a:ext cx="4114800" cy="1005840"/>
           </a:xfrm>
           <a:prstGeom prst="rect">
             <a:avLst/>
@@ -4518,121 +4479,103 @@
               </a:lnSpc>
             </a:pPr>
             <a:r>
-              <a:rPr sz="1500" b="0">
-                <a:solidFill>
-                  <a:srgbClr val="231F20"/>
+              <a:rPr sz="2600" b="1">
+                <a:solidFill>
+                  <a:srgbClr val="F2F4F3"/>
                 </a:solidFill>
                 <a:latin typeface="Inter Tight"/>
               </a:rPr>
-              <a:t>К1 · 3    К2 · 2    К3 · 3
-К4 · 0    К5 · 0    К6 · 3
-и обоснование к каждому баллу</a:t>
-            </a:r>
-          </a:p>
-        </p:txBody>
-      </p:sp>
-      <p:sp>
-        <p:nvSpPr>
-          <p:cNvPr id="8" name="Can 7"/>
-          <p:cNvSpPr/>
-          <p:nvPr/>
-        </p:nvSpPr>
-        <p:spPr>
-          <a:xfrm>
-            <a:off x="5166360" y="3968496"/>
-            <a:ext cx="777240" cy="146304"/>
-          </a:xfrm>
-          <a:prstGeom prst="can">
-            <a:avLst/>
-          </a:prstGeom>
-          <a:solidFill>
-            <a:srgbClr val="379123"/>
-          </a:solidFill>
-          <a:ln>
-            <a:noFill/>
-          </a:ln>
-          <a:effectLst/>
-        </p:spPr>
-        <p:style>
-          <a:lnRef idx="1">
-            <a:schemeClr val="accent1"/>
-          </a:lnRef>
-          <a:fillRef idx="3">
-            <a:schemeClr val="accent1"/>
-          </a:fillRef>
-          <a:effectRef idx="2">
-            <a:schemeClr val="accent1"/>
-          </a:effectRef>
-          <a:fontRef idx="minor">
-            <a:schemeClr val="lt1"/>
-          </a:fontRef>
-        </p:style>
-        <p:txBody>
-          <a:bodyPr rtlCol="0" anchor="ctr"/>
-          <a:lstStyle/>
-          <a:p>
-            <a:pPr algn="ctr"/>
-          </a:p>
-        </p:txBody>
-      </p:sp>
-      <p:sp>
-        <p:nvSpPr>
-          <p:cNvPr id="9" name="Rounded Rectangle 8"/>
-          <p:cNvSpPr/>
-          <p:nvPr/>
-        </p:nvSpPr>
-        <p:spPr>
-          <a:xfrm>
-            <a:off x="6217920" y="3200400"/>
-            <a:ext cx="4480560" cy="1691640"/>
-          </a:xfrm>
-          <a:prstGeom prst="roundRect">
-            <a:avLst>
-              <a:gd name="adj" fmla="val 6000"/>
-            </a:avLst>
-          </a:prstGeom>
-          <a:solidFill>
-            <a:srgbClr val="231F20"/>
-          </a:solidFill>
-          <a:ln w="19050">
-            <a:solidFill>
-              <a:srgbClr val="231F20"/>
-            </a:solidFill>
-          </a:ln>
-          <a:effectLst/>
-        </p:spPr>
-        <p:style>
-          <a:lnRef idx="1">
-            <a:schemeClr val="accent1"/>
-          </a:lnRef>
-          <a:fillRef idx="3">
-            <a:schemeClr val="accent1"/>
-          </a:fillRef>
-          <a:effectRef idx="2">
-            <a:schemeClr val="accent1"/>
-          </a:effectRef>
-          <a:fontRef idx="minor">
-            <a:schemeClr val="lt1"/>
-          </a:fontRef>
-        </p:style>
-        <p:txBody>
-          <a:bodyPr rtlCol="0" anchor="ctr"/>
-          <a:lstStyle/>
-          <a:p>
-            <a:pPr algn="ctr"/>
-          </a:p>
-        </p:txBody>
-      </p:sp>
-      <p:sp>
-        <p:nvSpPr>
-          <p:cNvPr id="10" name="TextBox 9"/>
+              <a:t>65,0</a:t>
+            </a:r>
+            <a:r>
+              <a:rPr sz="2000" b="0">
+                <a:solidFill>
+                  <a:srgbClr val="8B949E"/>
+                </a:solidFill>
+                <a:latin typeface="Inter Tight"/>
+              </a:rPr>
+              <a:t>  →  </a:t>
+            </a:r>
+            <a:r>
+              <a:rPr sz="2000" b="1">
+                <a:solidFill>
+                  <a:srgbClr val="F2F4F3"/>
+                </a:solidFill>
+                <a:latin typeface="Inter Tight"/>
+              </a:rPr>
+              <a:t>Среднее</a:t>
+            </a:r>
+            <a:r>
+              <a:rPr sz="1400" b="0">
+                <a:solidFill>
+                  <a:srgbClr val="8B949E"/>
+                </a:solidFill>
+                <a:latin typeface="Inter Tight"/>
+              </a:rPr>
+              <a:t>
+флаг эскалации поднимает до «Высокого»</a:t>
+            </a:r>
+          </a:p>
+        </p:txBody>
+      </p:sp>
+      <p:sp>
+        <p:nvSpPr>
+          <p:cNvPr id="11" name="TextBox 10"/>
           <p:cNvSpPr txBox="1"/>
           <p:nvPr/>
         </p:nvSpPr>
         <p:spPr>
           <a:xfrm>
-            <a:off x="6510528" y="3429000"/>
-            <a:ext cx="3840480" cy="219456"/>
+            <a:off x="731520" y="5440680"/>
+            <a:ext cx="10515600" cy="640080"/>
+          </a:xfrm>
+          <a:prstGeom prst="rect">
+            <a:avLst/>
+          </a:prstGeom>
+          <a:noFill/>
+        </p:spPr>
+        <p:txBody>
+          <a:bodyPr wrap="square" lIns="0" rIns="0" tIns="0" bIns="0">
+            <a:spAutoFit/>
+          </a:bodyPr>
+          <a:lstStyle/>
+          <a:p>
+            <a:pPr algn="l">
+              <a:lnSpc>
+                <a:spcPct val="145000"/>
+              </a:lnSpc>
+            </a:pPr>
+            <a:r>
+              <a:rPr sz="1500" b="1">
+                <a:solidFill>
+                  <a:srgbClr val="F2F4F3"/>
+                </a:solidFill>
+                <a:latin typeface="Inter Tight"/>
+              </a:rPr>
+              <a:t>В контракте ответа модели полей «индекс» и «категория» нет вовсе. </a:t>
+            </a:r>
+            <a:r>
+              <a:rPr sz="1500" b="0">
+                <a:solidFill>
+                  <a:srgbClr val="8B949E"/>
+                </a:solidFill>
+                <a:latin typeface="Inter Tight"/>
+              </a:rPr>
+              <a:t>Она физически не может их вернуть — поэтому оценку можно проверить и поправить.</a:t>
+            </a:r>
+          </a:p>
+        </p:txBody>
+      </p:sp>
+      <p:sp>
+        <p:nvSpPr>
+          <p:cNvPr id="12" name="TextBox 11"/>
+          <p:cNvSpPr txBox="1"/>
+          <p:nvPr/>
+        </p:nvSpPr>
+        <p:spPr>
+          <a:xfrm>
+            <a:off x="731520" y="6382512"/>
+            <a:ext cx="8778240" cy="237744"/>
           </a:xfrm>
           <a:prstGeom prst="rect">
             <a:avLst/>
@@ -4651,163 +4594,9 @@
               </a:lnSpc>
             </a:pPr>
             <a:r>
-              <a:rPr sz="1050" b="1" cap="all" spc="140">
-                <a:solidFill>
-                  <a:srgbClr val="9AE088"/>
-                </a:solidFill>
-                <a:latin typeface="Inter Tight"/>
-              </a:rPr>
-              <a:t>Код</a:t>
-            </a:r>
-          </a:p>
-        </p:txBody>
-      </p:sp>
-      <p:sp>
-        <p:nvSpPr>
-          <p:cNvPr id="11" name="TextBox 10"/>
-          <p:cNvSpPr txBox="1"/>
-          <p:nvPr/>
-        </p:nvSpPr>
-        <p:spPr>
-          <a:xfrm>
-            <a:off x="6510528" y="3730752"/>
-            <a:ext cx="3931920" cy="1097280"/>
-          </a:xfrm>
-          <a:prstGeom prst="rect">
-            <a:avLst/>
-          </a:prstGeom>
-          <a:noFill/>
-        </p:spPr>
-        <p:txBody>
-          <a:bodyPr wrap="square" lIns="0" rIns="0" tIns="0" bIns="0">
-            <a:spAutoFit/>
-          </a:bodyPr>
-          <a:lstStyle/>
-          <a:p>
-            <a:pPr algn="l">
-              <a:lnSpc>
-                <a:spcPct val="150000"/>
-              </a:lnSpc>
-            </a:pPr>
-            <a:r>
-              <a:rPr sz="1700" b="1">
-                <a:solidFill>
-                  <a:srgbClr val="FFFFFF"/>
-                </a:solidFill>
-                <a:latin typeface="Inter Tight"/>
-              </a:rPr>
-              <a:t>индекс 65,0</a:t>
-            </a:r>
-            <a:r>
-              <a:rPr sz="1700" b="0">
-                <a:solidFill>
-                  <a:srgbClr val="9AA1AB"/>
-                </a:solidFill>
-                <a:latin typeface="Inter Tight"/>
-              </a:rPr>
-              <a:t>  →  </a:t>
-            </a:r>
-            <a:r>
-              <a:rPr sz="1700" b="1">
-                <a:solidFill>
-                  <a:srgbClr val="FFFFFF"/>
-                </a:solidFill>
-                <a:latin typeface="Inter Tight"/>
-              </a:rPr>
-              <a:t>категория «Среднее»</a:t>
-            </a:r>
-            <a:r>
-              <a:rPr sz="1300" b="0">
-                <a:solidFill>
-                  <a:srgbClr val="C8D4C8"/>
-                </a:solidFill>
-                <a:latin typeface="Inter Tight"/>
-              </a:rPr>
-              <a:t>
-флаг эскалации поднимает до «Высокого»</a:t>
-            </a:r>
-          </a:p>
-        </p:txBody>
-      </p:sp>
-      <p:sp>
-        <p:nvSpPr>
-          <p:cNvPr id="12" name="TextBox 11"/>
-          <p:cNvSpPr txBox="1"/>
-          <p:nvPr/>
-        </p:nvSpPr>
-        <p:spPr>
-          <a:xfrm>
-            <a:off x="731520" y="5257800"/>
-            <a:ext cx="10058400" cy="640080"/>
-          </a:xfrm>
-          <a:prstGeom prst="rect">
-            <a:avLst/>
-          </a:prstGeom>
-          <a:noFill/>
-        </p:spPr>
-        <p:txBody>
-          <a:bodyPr wrap="square" lIns="0" rIns="0" tIns="0" bIns="0">
-            <a:spAutoFit/>
-          </a:bodyPr>
-          <a:lstStyle/>
-          <a:p>
-            <a:pPr algn="l">
-              <a:lnSpc>
-                <a:spcPct val="145000"/>
-              </a:lnSpc>
-            </a:pPr>
-            <a:r>
-              <a:rPr sz="1450" b="1">
-                <a:solidFill>
-                  <a:srgbClr val="231F20"/>
-                </a:solidFill>
-                <a:latin typeface="Inter Tight"/>
-              </a:rPr>
-              <a:t>В контракте ответа модели полей «индекс» и «категория» нет вовсе. </a:t>
-            </a:r>
-            <a:r>
-              <a:rPr sz="1450" b="0">
-                <a:solidFill>
-                  <a:srgbClr val="6B7280"/>
-                </a:solidFill>
-                <a:latin typeface="Inter Tight"/>
-              </a:rPr>
-              <a:t>Она физически не может их вернуть — поэтому оценку можно проверить и поправить.</a:t>
-            </a:r>
-          </a:p>
-        </p:txBody>
-      </p:sp>
-      <p:sp>
-        <p:nvSpPr>
-          <p:cNvPr id="13" name="TextBox 12"/>
-          <p:cNvSpPr txBox="1"/>
-          <p:nvPr/>
-        </p:nvSpPr>
-        <p:spPr>
-          <a:xfrm>
-            <a:off x="731520" y="6382512"/>
-            <a:ext cx="8778240" cy="237744"/>
-          </a:xfrm>
-          <a:prstGeom prst="rect">
-            <a:avLst/>
-          </a:prstGeom>
-          <a:noFill/>
-        </p:spPr>
-        <p:txBody>
-          <a:bodyPr wrap="square" lIns="0" rIns="0" tIns="0" bIns="0">
-            <a:spAutoFit/>
-          </a:bodyPr>
-          <a:lstStyle/>
-          <a:p>
-            <a:pPr algn="l">
-              <a:lnSpc>
-                <a:spcPct val="132000"/>
-              </a:lnSpc>
-            </a:pPr>
-            <a:r>
               <a:rPr sz="950" b="0">
                 <a:solidFill>
-                  <a:srgbClr val="9AA1AB"/>
+                  <a:srgbClr val="8B949E"/>
                 </a:solidFill>
                 <a:latin typeface="Inter Tight"/>
               </a:rPr>
@@ -4818,7 +4607,7 @@
       </p:sp>
       <p:sp>
         <p:nvSpPr>
-          <p:cNvPr id="14" name="TextBox 13"/>
+          <p:cNvPr id="13" name="TextBox 12"/>
           <p:cNvSpPr txBox="1"/>
           <p:nvPr/>
         </p:nvSpPr>
@@ -4846,7 +4635,7 @@
             <a:r>
               <a:rPr sz="950" b="0">
                 <a:solidFill>
-                  <a:srgbClr val="9AA1AB"/>
+                  <a:srgbClr val="8B949E"/>
                 </a:solidFill>
                 <a:latin typeface="Inter Tight"/>
               </a:rPr>
@@ -4926,7 +4715,7 @@
         <p:spPr>
           <a:xfrm>
             <a:off x="731520" y="566928"/>
-            <a:ext cx="5486400" cy="219456"/>
+            <a:ext cx="10698480" cy="274320"/>
           </a:xfrm>
           <a:prstGeom prst="rect">
             <a:avLst/>
@@ -4945,13 +4734,13 @@
               </a:lnSpc>
             </a:pPr>
             <a:r>
-              <a:rPr sz="1050" b="1" cap="all" spc="140">
+              <a:rPr sz="1100" b="1" spc="200">
                 <a:solidFill>
                   <a:srgbClr val="379123"/>
                 </a:solidFill>
                 <a:latin typeface="Inter Tight"/>
               </a:rPr>
-              <a:t>Продукт</a:t>
+              <a:t>ВОТ КАК ЭТО ВЫГЛЯДИТ</a:t>
             </a:r>
           </a:p>
         </p:txBody>
@@ -4965,7 +4754,7 @@
         <p:spPr>
           <a:xfrm>
             <a:off x="731520" y="914400"/>
-            <a:ext cx="10698480" cy="914400"/>
+            <a:ext cx="10698480" cy="457200"/>
           </a:xfrm>
           <a:prstGeom prst="rect">
             <a:avLst/>
@@ -4980,11 +4769,11 @@
           <a:p>
             <a:pPr algn="l">
               <a:lnSpc>
-                <a:spcPct val="114000"/>
+                <a:spcPct val="132000"/>
               </a:lnSpc>
             </a:pPr>
             <a:r>
-              <a:rPr sz="2800" b="1">
+              <a:rPr sz="3000" b="1">
                 <a:solidFill>
                   <a:srgbClr val="231F20"/>
                 </a:solidFill>
@@ -5003,7 +4792,7 @@
         </p:nvSpPr>
         <p:spPr>
           <a:xfrm>
-            <a:off x="731520" y="1389888"/>
+            <a:off x="731520" y="1463040"/>
             <a:ext cx="10698480" cy="640080"/>
           </a:xfrm>
           <a:prstGeom prst="rect">
@@ -5023,13 +4812,13 @@
               </a:lnSpc>
             </a:pPr>
             <a:r>
-              <a:rPr sz="1250" b="0">
+              <a:rPr sz="1300" b="0">
                 <a:solidFill>
                   <a:srgbClr val="6B7280"/>
                 </a:solidFill>
                 <a:latin typeface="Inter Tight"/>
               </a:rPr>
-              <a:t>Цветом отмечены только два верхних уровня серьёзности: сортировка уже сделала главную работу.</a:t>
+              <a:t>Цветом отмечены только два верхних уровня серьёзности — сортировка уже сделала главную работу.</a:t>
             </a:r>
           </a:p>
         </p:txBody>
@@ -5042,7 +4831,7 @@
         </p:nvSpPr>
         <p:spPr>
           <a:xfrm>
-            <a:off x="1542135" y="1709928"/>
+            <a:off x="1542135" y="1801368"/>
             <a:ext cx="9107424" cy="4543653"/>
           </a:xfrm>
           <a:prstGeom prst="rect">
@@ -5096,7 +4885,7 @@
         </p:blipFill>
         <p:spPr>
           <a:xfrm>
-            <a:off x="1569567" y="1737360"/>
+            <a:off x="1569567" y="1828800"/>
             <a:ext cx="9052560" cy="4488789"/>
           </a:xfrm>
           <a:prstGeom prst="rect">
@@ -5138,7 +4927,7 @@
                 </a:solidFill>
                 <a:latin typeface="Inter Tight"/>
               </a:rPr>
-              <a:t>185.56.162.154</a:t>
+              <a:t>живой стенд: 185.56.162.154</a:t>
             </a:r>
           </a:p>
         </p:txBody>
@@ -5215,7 +5004,7 @@
             <a:avLst/>
           </a:prstGeom>
           <a:solidFill>
-            <a:srgbClr val="F9F9F9"/>
+            <a:srgbClr val="101214"/>
           </a:solidFill>
           <a:ln>
             <a:noFill/>
@@ -5252,8 +5041,8 @@
         </p:nvSpPr>
         <p:spPr>
           <a:xfrm>
-            <a:off x="731520" y="566928"/>
-            <a:ext cx="5486400" cy="219456"/>
+            <a:off x="731520" y="1051560"/>
+            <a:ext cx="10698480" cy="274320"/>
           </a:xfrm>
           <a:prstGeom prst="rect">
             <a:avLst/>
@@ -5272,13 +5061,13 @@
               </a:lnSpc>
             </a:pPr>
             <a:r>
-              <a:rPr sz="1050" b="1" cap="all" spc="140">
-                <a:solidFill>
-                  <a:srgbClr val="379123"/>
+              <a:rPr sz="1100" b="1" spc="200">
+                <a:solidFill>
+                  <a:srgbClr val="43B02A"/>
                 </a:solidFill>
                 <a:latin typeface="Inter Tight"/>
               </a:rPr>
-              <a:t>Продукт</a:t>
+              <a:t>СКОЛЬКО СТОИТ</a:t>
             </a:r>
           </a:p>
         </p:txBody>
@@ -5291,8 +5080,8 @@
         </p:nvSpPr>
         <p:spPr>
           <a:xfrm>
-            <a:off x="731520" y="914400"/>
-            <a:ext cx="10698480" cy="914400"/>
+            <a:off x="731520" y="1463040"/>
+            <a:ext cx="10515600" cy="1097280"/>
           </a:xfrm>
           <a:prstGeom prst="rect">
             <a:avLst/>
@@ -5307,81 +5096,43 @@
           <a:p>
             <a:pPr algn="l">
               <a:lnSpc>
-                <a:spcPct val="114000"/>
+                <a:spcPct val="110000"/>
               </a:lnSpc>
             </a:pPr>
             <a:r>
-              <a:rPr sz="2800" b="1">
-                <a:solidFill>
-                  <a:srgbClr val="231F20"/>
+              <a:rPr sz="4200" b="1">
+                <a:solidFill>
+                  <a:srgbClr val="F2F4F3"/>
                 </a:solidFill>
                 <a:latin typeface="Inter Tight"/>
               </a:rPr>
-              <a:t>Оценку видно целиком — и её можно поправить</a:t>
-            </a:r>
-          </a:p>
-        </p:txBody>
-      </p:sp>
-      <p:sp>
-        <p:nvSpPr>
-          <p:cNvPr id="5" name="TextBox 4"/>
-          <p:cNvSpPr txBox="1"/>
-          <p:nvPr/>
-        </p:nvSpPr>
-        <p:spPr>
-          <a:xfrm>
-            <a:off x="731520" y="1389888"/>
-            <a:ext cx="10698480" cy="640080"/>
-          </a:xfrm>
-          <a:prstGeom prst="rect">
-            <a:avLst/>
-          </a:prstGeom>
-          <a:noFill/>
-        </p:spPr>
-        <p:txBody>
-          <a:bodyPr wrap="square" lIns="0" rIns="0" tIns="0" bIns="0">
-            <a:spAutoFit/>
-          </a:bodyPr>
-          <a:lstStyle/>
-          <a:p>
-            <a:pPr algn="l">
-              <a:lnSpc>
-                <a:spcPct val="140000"/>
-              </a:lnSpc>
-            </a:pPr>
-            <a:r>
-              <a:rPr sz="1250" b="0">
-                <a:solidFill>
-                  <a:srgbClr val="6B7280"/>
-                </a:solidFill>
-                <a:latin typeface="Inter Tight"/>
-              </a:rPr>
-              <a:t>Слева цитата из оригинала под каждым утверждением. Справа шесть критериев: балл, вклад в индекс, обоснование. Меняете балл — индекс пересчитывается сразу.</a:t>
-            </a:r>
-          </a:p>
-        </p:txBody>
-      </p:sp>
-      <p:sp>
-        <p:nvSpPr>
-          <p:cNvPr id="6" name="Rectangle 5"/>
+              <a:t>Год работы модели дешевле,
+чем один пропущенный документ</a:t>
+            </a:r>
+          </a:p>
+        </p:txBody>
+      </p:sp>
+      <p:sp>
+        <p:nvSpPr>
+          <p:cNvPr id="5" name="Rounded Rectangle 4"/>
           <p:cNvSpPr/>
           <p:nvPr/>
         </p:nvSpPr>
         <p:spPr>
           <a:xfrm>
-            <a:off x="1542135" y="1709928"/>
-            <a:ext cx="9107424" cy="4543653"/>
-          </a:xfrm>
-          <a:prstGeom prst="rect">
-            <a:avLst/>
+            <a:off x="731520" y="3566160"/>
+            <a:ext cx="10698480" cy="1965960"/>
+          </a:xfrm>
+          <a:prstGeom prst="roundRect">
+            <a:avLst>
+              <a:gd name="adj" fmla="val 4500"/>
+            </a:avLst>
           </a:prstGeom>
           <a:solidFill>
-            <a:srgbClr val="FFFFFF"/>
+            <a:srgbClr val="1B1F24"/>
           </a:solidFill>
-          <a:ln w="9525">
-            <a:solidFill>
-              <a:srgbClr val="D9D9D9"/>
-            </a:solidFill>
+          <a:ln>
+            <a:noFill/>
           </a:ln>
           <a:effectLst/>
         </p:spPr>
@@ -5407,40 +5158,16 @@
           </a:p>
         </p:txBody>
       </p:sp>
-      <p:pic>
-        <p:nvPicPr>
-          <p:cNvPr id="7" name="Picture 6" descr="shot_breakdown.jpg"/>
-          <p:cNvPicPr>
-            <a:picLocks noChangeAspect="1"/>
-          </p:cNvPicPr>
-          <p:nvPr/>
-        </p:nvPicPr>
-        <p:blipFill>
-          <a:blip r:embed="rId2"/>
-          <a:stretch>
-            <a:fillRect/>
-          </a:stretch>
-        </p:blipFill>
-        <p:spPr>
-          <a:xfrm>
-            <a:off x="1569567" y="1737360"/>
-            <a:ext cx="9052560" cy="4488789"/>
-          </a:xfrm>
-          <a:prstGeom prst="rect">
-            <a:avLst/>
-          </a:prstGeom>
-        </p:spPr>
-      </p:pic>
-      <p:sp>
-        <p:nvSpPr>
-          <p:cNvPr id="8" name="TextBox 7"/>
+      <p:sp>
+        <p:nvSpPr>
+          <p:cNvPr id="6" name="TextBox 5"/>
           <p:cNvSpPr txBox="1"/>
           <p:nvPr/>
         </p:nvSpPr>
         <p:spPr>
           <a:xfrm>
-            <a:off x="731520" y="6382512"/>
-            <a:ext cx="8778240" cy="237744"/>
+            <a:off x="1143000" y="3840480"/>
+            <a:ext cx="5486400" cy="256032"/>
           </a:xfrm>
           <a:prstGeom prst="rect">
             <a:avLst/>
@@ -5459,13 +5186,96 @@
               </a:lnSpc>
             </a:pPr>
             <a:r>
-              <a:rPr sz="950" b="0">
-                <a:solidFill>
-                  <a:srgbClr val="9AA1AB"/>
+              <a:rPr sz="1050" b="1" spc="160">
+                <a:solidFill>
+                  <a:srgbClr val="8B949E"/>
                 </a:solidFill>
                 <a:latin typeface="Inter Tight"/>
               </a:rPr>
-              <a:t>FR-024 · FR-081</a:t>
+              <a:t>ГОД ОБРАБОТКИ ПОТОКА В 150 МАТЕРИАЛОВ В СУТКИ</a:t>
+            </a:r>
+          </a:p>
+        </p:txBody>
+      </p:sp>
+      <p:sp>
+        <p:nvSpPr>
+          <p:cNvPr id="7" name="Rectangle 6"/>
+          <p:cNvSpPr/>
+          <p:nvPr/>
+        </p:nvSpPr>
+        <p:spPr>
+          <a:xfrm>
+            <a:off x="1143000" y="4187952"/>
+            <a:ext cx="36868" cy="274320"/>
+          </a:xfrm>
+          <a:prstGeom prst="rect">
+            <a:avLst/>
+          </a:prstGeom>
+          <a:solidFill>
+            <a:srgbClr val="43B02A"/>
+          </a:solidFill>
+          <a:ln>
+            <a:noFill/>
+          </a:ln>
+          <a:effectLst/>
+        </p:spPr>
+        <p:style>
+          <a:lnRef idx="1">
+            <a:schemeClr val="accent1"/>
+          </a:lnRef>
+          <a:fillRef idx="3">
+            <a:schemeClr val="accent1"/>
+          </a:fillRef>
+          <a:effectRef idx="2">
+            <a:schemeClr val="accent1"/>
+          </a:effectRef>
+          <a:fontRef idx="minor">
+            <a:schemeClr val="lt1"/>
+          </a:fontRef>
+        </p:style>
+        <p:txBody>
+          <a:bodyPr rtlCol="0" anchor="ctr"/>
+          <a:lstStyle/>
+          <a:p>
+            <a:pPr algn="ctr"/>
+          </a:p>
+        </p:txBody>
+      </p:sp>
+      <p:sp>
+        <p:nvSpPr>
+          <p:cNvPr id="8" name="TextBox 7"/>
+          <p:cNvSpPr txBox="1"/>
+          <p:nvPr/>
+        </p:nvSpPr>
+        <p:spPr>
+          <a:xfrm>
+            <a:off x="1298448" y="4160520"/>
+            <a:ext cx="3657600" cy="310896"/>
+          </a:xfrm>
+          <a:prstGeom prst="rect">
+            <a:avLst/>
+          </a:prstGeom>
+          <a:noFill/>
+        </p:spPr>
+        <p:txBody>
+          <a:bodyPr wrap="square" lIns="0" rIns="0" tIns="0" bIns="0">
+            <a:spAutoFit/>
+          </a:bodyPr>
+          <a:lstStyle/>
+          <a:p>
+            <a:pPr algn="l">
+              <a:lnSpc>
+                <a:spcPct val="132000"/>
+              </a:lnSpc>
+            </a:pPr>
+            <a:r>
+              <a:rPr sz="1800" b="1">
+                <a:solidFill>
+                  <a:srgbClr val="43B02A"/>
+                </a:solidFill>
+                <a:latin typeface="Inter Tight"/>
+              </a:rPr>
+              <a:t>2 100 ₽</a:t>
             </a:r>
           </a:p>
         </p:txBody>
@@ -5473,6 +5283,215 @@
       <p:sp>
         <p:nvSpPr>
           <p:cNvPr id="9" name="TextBox 8"/>
+          <p:cNvSpPr txBox="1"/>
+          <p:nvPr/>
+        </p:nvSpPr>
+        <p:spPr>
+          <a:xfrm>
+            <a:off x="1143000" y="4681728"/>
+            <a:ext cx="7315200" cy="256032"/>
+          </a:xfrm>
+          <a:prstGeom prst="rect">
+            <a:avLst/>
+          </a:prstGeom>
+          <a:noFill/>
+        </p:spPr>
+        <p:txBody>
+          <a:bodyPr wrap="square" lIns="0" rIns="0" tIns="0" bIns="0">
+            <a:spAutoFit/>
+          </a:bodyPr>
+          <a:lstStyle/>
+          <a:p>
+            <a:pPr algn="l">
+              <a:lnSpc>
+                <a:spcPct val="132000"/>
+              </a:lnSpc>
+            </a:pPr>
+            <a:r>
+              <a:rPr sz="1050" b="1" spc="160">
+                <a:solidFill>
+                  <a:srgbClr val="8B949E"/>
+                </a:solidFill>
+                <a:latin typeface="Inter Tight"/>
+              </a:rPr>
+              <a:t>ОДИН ШТРАФ ПО ФЗ № 295-ФЗ, ВЕРХНЯЯ ГРАНИЦА</a:t>
+            </a:r>
+          </a:p>
+        </p:txBody>
+      </p:sp>
+      <p:sp>
+        <p:nvSpPr>
+          <p:cNvPr id="10" name="Rectangle 9"/>
+          <p:cNvSpPr/>
+          <p:nvPr/>
+        </p:nvSpPr>
+        <p:spPr>
+          <a:xfrm>
+            <a:off x="1143000" y="5029200"/>
+            <a:ext cx="8778240" cy="274320"/>
+          </a:xfrm>
+          <a:prstGeom prst="rect">
+            <a:avLst/>
+          </a:prstGeom>
+          <a:solidFill>
+            <a:srgbClr val="EB5757"/>
+          </a:solidFill>
+          <a:ln>
+            <a:noFill/>
+          </a:ln>
+          <a:effectLst/>
+        </p:spPr>
+        <p:style>
+          <a:lnRef idx="1">
+            <a:schemeClr val="accent1"/>
+          </a:lnRef>
+          <a:fillRef idx="3">
+            <a:schemeClr val="accent1"/>
+          </a:fillRef>
+          <a:effectRef idx="2">
+            <a:schemeClr val="accent1"/>
+          </a:effectRef>
+          <a:fontRef idx="minor">
+            <a:schemeClr val="lt1"/>
+          </a:fontRef>
+        </p:style>
+        <p:txBody>
+          <a:bodyPr rtlCol="0" anchor="ctr"/>
+          <a:lstStyle/>
+          <a:p>
+            <a:pPr algn="ctr"/>
+          </a:p>
+        </p:txBody>
+      </p:sp>
+      <p:sp>
+        <p:nvSpPr>
+          <p:cNvPr id="11" name="TextBox 10"/>
+          <p:cNvSpPr txBox="1"/>
+          <p:nvPr/>
+        </p:nvSpPr>
+        <p:spPr>
+          <a:xfrm>
+            <a:off x="1298448" y="5001768"/>
+            <a:ext cx="3657600" cy="310896"/>
+          </a:xfrm>
+          <a:prstGeom prst="rect">
+            <a:avLst/>
+          </a:prstGeom>
+          <a:noFill/>
+        </p:spPr>
+        <p:txBody>
+          <a:bodyPr wrap="square" lIns="0" rIns="0" tIns="0" bIns="0">
+            <a:spAutoFit/>
+          </a:bodyPr>
+          <a:lstStyle/>
+          <a:p>
+            <a:pPr algn="l">
+              <a:lnSpc>
+                <a:spcPct val="132000"/>
+              </a:lnSpc>
+            </a:pPr>
+            <a:r>
+              <a:rPr sz="1800" b="1">
+                <a:solidFill>
+                  <a:srgbClr val="F2F4F3"/>
+                </a:solidFill>
+                <a:latin typeface="Inter Tight"/>
+              </a:rPr>
+              <a:t>500 000 ₽</a:t>
+            </a:r>
+          </a:p>
+        </p:txBody>
+      </p:sp>
+      <p:sp>
+        <p:nvSpPr>
+          <p:cNvPr id="12" name="TextBox 11"/>
+          <p:cNvSpPr txBox="1"/>
+          <p:nvPr/>
+        </p:nvSpPr>
+        <p:spPr>
+          <a:xfrm>
+            <a:off x="731520" y="5806440"/>
+            <a:ext cx="10515600" cy="548640"/>
+          </a:xfrm>
+          <a:prstGeom prst="rect">
+            <a:avLst/>
+          </a:prstGeom>
+          <a:noFill/>
+        </p:spPr>
+        <p:txBody>
+          <a:bodyPr wrap="square" lIns="0" rIns="0" tIns="0" bIns="0">
+            <a:spAutoFit/>
+          </a:bodyPr>
+          <a:lstStyle/>
+          <a:p>
+            <a:pPr algn="l">
+              <a:lnSpc>
+                <a:spcPct val="145000"/>
+              </a:lnSpc>
+            </a:pPr>
+            <a:r>
+              <a:rPr sz="1400" b="1">
+                <a:solidFill>
+                  <a:srgbClr val="F2F4F3"/>
+                </a:solidFill>
+                <a:latin typeface="Inter Tight"/>
+              </a:rPr>
+              <a:t>Полосы в одном масштабе, зелёная не увеличена. </a:t>
+            </a:r>
+            <a:r>
+              <a:rPr sz="1400" b="0">
+                <a:solidFill>
+                  <a:srgbClr val="8B949E"/>
+                </a:solidFill>
+                <a:latin typeface="Inter Tight"/>
+              </a:rPr>
+              <a:t>Четыре копейки за материал. Одного пропуска хватает, чтобы перекрыть двести лет работы модели. Курс ЦБ на 05.09.2026.</a:t>
+            </a:r>
+          </a:p>
+        </p:txBody>
+      </p:sp>
+      <p:sp>
+        <p:nvSpPr>
+          <p:cNvPr id="13" name="TextBox 12"/>
+          <p:cNvSpPr txBox="1"/>
+          <p:nvPr/>
+        </p:nvSpPr>
+        <p:spPr>
+          <a:xfrm>
+            <a:off x="731520" y="6382512"/>
+            <a:ext cx="8778240" cy="237744"/>
+          </a:xfrm>
+          <a:prstGeom prst="rect">
+            <a:avLst/>
+          </a:prstGeom>
+          <a:noFill/>
+        </p:spPr>
+        <p:txBody>
+          <a:bodyPr wrap="square" lIns="0" rIns="0" tIns="0" bIns="0">
+            <a:spAutoFit/>
+          </a:bodyPr>
+          <a:lstStyle/>
+          <a:p>
+            <a:pPr algn="l">
+              <a:lnSpc>
+                <a:spcPct val="132000"/>
+              </a:lnSpc>
+            </a:pPr>
+            <a:r>
+              <a:rPr sz="950" b="0">
+                <a:solidFill>
+                  <a:srgbClr val="8B949E"/>
+                </a:solidFill>
+                <a:latin typeface="Inter Tight"/>
+              </a:rPr>
+              <a:t>docs/business-case.md</a:t>
+            </a:r>
+          </a:p>
+        </p:txBody>
+      </p:sp>
+      <p:sp>
+        <p:nvSpPr>
+          <p:cNvPr id="14" name="TextBox 13"/>
           <p:cNvSpPr txBox="1"/>
           <p:nvPr/>
         </p:nvSpPr>
@@ -5500,7 +5519,7 @@
             <a:r>
               <a:rPr sz="950" b="0">
                 <a:solidFill>
-                  <a:srgbClr val="9AA1AB"/>
+                  <a:srgbClr val="8B949E"/>
                 </a:solidFill>
                 <a:latin typeface="Inter Tight"/>
               </a:rPr>
@@ -5542,7 +5561,7 @@
             <a:avLst/>
           </a:prstGeom>
           <a:solidFill>
-            <a:srgbClr val="F9F9F9"/>
+            <a:srgbClr val="101214"/>
           </a:solidFill>
           <a:ln>
             <a:noFill/>
@@ -5579,8 +5598,8 @@
         </p:nvSpPr>
         <p:spPr>
           <a:xfrm>
-            <a:off x="731520" y="566928"/>
-            <a:ext cx="5486400" cy="219456"/>
+            <a:off x="731520" y="868680"/>
+            <a:ext cx="10698480" cy="274320"/>
           </a:xfrm>
           <a:prstGeom prst="rect">
             <a:avLst/>
@@ -5599,13 +5618,13 @@
               </a:lnSpc>
             </a:pPr>
             <a:r>
-              <a:rPr sz="1050" b="1" cap="all" spc="140">
-                <a:solidFill>
-                  <a:srgbClr val="379123"/>
+              <a:rPr sz="1100" b="1" spc="200">
+                <a:solidFill>
+                  <a:srgbClr val="43B02A"/>
                 </a:solidFill>
                 <a:latin typeface="Inter Tight"/>
               </a:rPr>
-              <a:t>Продукт</a:t>
+              <a:t>НАСКОЛЬКО ТОЧНО</a:t>
             </a:r>
           </a:p>
         </p:txBody>
@@ -5618,8 +5637,8 @@
         </p:nvSpPr>
         <p:spPr>
           <a:xfrm>
-            <a:off x="731520" y="914400"/>
-            <a:ext cx="10698480" cy="914400"/>
+            <a:off x="731520" y="1280160"/>
+            <a:ext cx="10515600" cy="548640"/>
           </a:xfrm>
           <a:prstGeom prst="rect">
             <a:avLst/>
@@ -5634,31 +5653,2298 @@
           <a:p>
             <a:pPr algn="l">
               <a:lnSpc>
-                <a:spcPct val="114000"/>
+                <a:spcPct val="132000"/>
               </a:lnSpc>
             </a:pPr>
             <a:r>
-              <a:rPr sz="2800" b="1">
-                <a:solidFill>
-                  <a:srgbClr val="231F20"/>
+              <a:rPr sz="4000" b="1">
+                <a:solidFill>
+                  <a:srgbClr val="F2F4F3"/>
                 </a:solidFill>
                 <a:latin typeface="Inter Tight"/>
               </a:rPr>
-              <a:t>НПА живёт отдельно: стадии, хронология, динамика влияния</a:t>
-            </a:r>
-          </a:p>
-        </p:txBody>
-      </p:sp>
-      <p:sp>
-        <p:nvSpPr>
-          <p:cNvPr id="5" name="TextBox 4"/>
+              <a:t>Проверено на реестре самого заказчика</a:t>
+            </a:r>
+          </a:p>
+        </p:txBody>
+      </p:sp>
+      <p:sp>
+        <p:nvSpPr>
+          <p:cNvPr id="5" name="Rounded Rectangle 4"/>
+          <p:cNvSpPr/>
+          <p:nvPr/>
+        </p:nvSpPr>
+        <p:spPr>
+          <a:xfrm>
+            <a:off x="731520" y="2240280"/>
+            <a:ext cx="6858000" cy="3200400"/>
+          </a:xfrm>
+          <a:prstGeom prst="roundRect">
+            <a:avLst>
+              <a:gd name="adj" fmla="val 4500"/>
+            </a:avLst>
+          </a:prstGeom>
+          <a:solidFill>
+            <a:srgbClr val="1B1F24"/>
+          </a:solidFill>
+          <a:ln>
+            <a:noFill/>
+          </a:ln>
+          <a:effectLst/>
+        </p:spPr>
+        <p:style>
+          <a:lnRef idx="1">
+            <a:schemeClr val="accent1"/>
+          </a:lnRef>
+          <a:fillRef idx="3">
+            <a:schemeClr val="accent1"/>
+          </a:fillRef>
+          <a:effectRef idx="2">
+            <a:schemeClr val="accent1"/>
+          </a:effectRef>
+          <a:fontRef idx="minor">
+            <a:schemeClr val="lt1"/>
+          </a:fontRef>
+        </p:style>
+        <p:txBody>
+          <a:bodyPr rtlCol="0" anchor="ctr"/>
+          <a:lstStyle/>
+          <a:p>
+            <a:pPr algn="ctr"/>
+          </a:p>
+        </p:txBody>
+      </p:sp>
+      <p:sp>
+        <p:nvSpPr>
+          <p:cNvPr id="6" name="TextBox 5"/>
           <p:cNvSpPr txBox="1"/>
           <p:nvPr/>
         </p:nvSpPr>
         <p:spPr>
           <a:xfrm>
-            <a:off x="731520" y="1389888"/>
-            <a:ext cx="10698480" cy="640080"/>
+            <a:off x="1115568" y="2514600"/>
+            <a:ext cx="6035040" cy="256032"/>
+          </a:xfrm>
+          <a:prstGeom prst="rect">
+            <a:avLst/>
+          </a:prstGeom>
+          <a:noFill/>
+        </p:spPr>
+        <p:txBody>
+          <a:bodyPr wrap="square" lIns="0" rIns="0" tIns="0" bIns="0">
+            <a:spAutoFit/>
+          </a:bodyPr>
+          <a:lstStyle/>
+          <a:p>
+            <a:pPr algn="l">
+              <a:lnSpc>
+                <a:spcPct val="132000"/>
+              </a:lnSpc>
+            </a:pPr>
+            <a:r>
+              <a:rPr sz="1050" b="1" spc="160">
+                <a:solidFill>
+                  <a:srgbClr val="8B949E"/>
+                </a:solidFill>
+                <a:latin typeface="Inter Tight"/>
+              </a:rPr>
+              <a:t>42 КАРТОЧКИ · ОДНА КЛЕТКА — ОДНА КАРТОЧКА</a:t>
+            </a:r>
+          </a:p>
+        </p:txBody>
+      </p:sp>
+      <p:sp>
+        <p:nvSpPr>
+          <p:cNvPr id="7" name="Rectangle 6"/>
+          <p:cNvSpPr/>
+          <p:nvPr/>
+        </p:nvSpPr>
+        <p:spPr>
+          <a:xfrm>
+            <a:off x="1115568" y="2926080"/>
+            <a:ext cx="329184" cy="329184"/>
+          </a:xfrm>
+          <a:prstGeom prst="rect">
+            <a:avLst/>
+          </a:prstGeom>
+          <a:solidFill>
+            <a:srgbClr val="43B02A"/>
+          </a:solidFill>
+          <a:ln>
+            <a:noFill/>
+          </a:ln>
+          <a:effectLst/>
+        </p:spPr>
+        <p:style>
+          <a:lnRef idx="1">
+            <a:schemeClr val="accent1"/>
+          </a:lnRef>
+          <a:fillRef idx="3">
+            <a:schemeClr val="accent1"/>
+          </a:fillRef>
+          <a:effectRef idx="2">
+            <a:schemeClr val="accent1"/>
+          </a:effectRef>
+          <a:fontRef idx="minor">
+            <a:schemeClr val="lt1"/>
+          </a:fontRef>
+        </p:style>
+        <p:txBody>
+          <a:bodyPr rtlCol="0" anchor="ctr"/>
+          <a:lstStyle/>
+          <a:p>
+            <a:pPr algn="ctr"/>
+          </a:p>
+        </p:txBody>
+      </p:sp>
+      <p:sp>
+        <p:nvSpPr>
+          <p:cNvPr id="8" name="Rectangle 7"/>
+          <p:cNvSpPr/>
+          <p:nvPr/>
+        </p:nvSpPr>
+        <p:spPr>
+          <a:xfrm>
+            <a:off x="1536192" y="2926080"/>
+            <a:ext cx="329184" cy="329184"/>
+          </a:xfrm>
+          <a:prstGeom prst="rect">
+            <a:avLst/>
+          </a:prstGeom>
+          <a:solidFill>
+            <a:srgbClr val="43B02A"/>
+          </a:solidFill>
+          <a:ln>
+            <a:noFill/>
+          </a:ln>
+          <a:effectLst/>
+        </p:spPr>
+        <p:style>
+          <a:lnRef idx="1">
+            <a:schemeClr val="accent1"/>
+          </a:lnRef>
+          <a:fillRef idx="3">
+            <a:schemeClr val="accent1"/>
+          </a:fillRef>
+          <a:effectRef idx="2">
+            <a:schemeClr val="accent1"/>
+          </a:effectRef>
+          <a:fontRef idx="minor">
+            <a:schemeClr val="lt1"/>
+          </a:fontRef>
+        </p:style>
+        <p:txBody>
+          <a:bodyPr rtlCol="0" anchor="ctr"/>
+          <a:lstStyle/>
+          <a:p>
+            <a:pPr algn="ctr"/>
+          </a:p>
+        </p:txBody>
+      </p:sp>
+      <p:sp>
+        <p:nvSpPr>
+          <p:cNvPr id="9" name="Rectangle 8"/>
+          <p:cNvSpPr/>
+          <p:nvPr/>
+        </p:nvSpPr>
+        <p:spPr>
+          <a:xfrm>
+            <a:off x="1956816" y="2926080"/>
+            <a:ext cx="329184" cy="329184"/>
+          </a:xfrm>
+          <a:prstGeom prst="rect">
+            <a:avLst/>
+          </a:prstGeom>
+          <a:solidFill>
+            <a:srgbClr val="43B02A"/>
+          </a:solidFill>
+          <a:ln>
+            <a:noFill/>
+          </a:ln>
+          <a:effectLst/>
+        </p:spPr>
+        <p:style>
+          <a:lnRef idx="1">
+            <a:schemeClr val="accent1"/>
+          </a:lnRef>
+          <a:fillRef idx="3">
+            <a:schemeClr val="accent1"/>
+          </a:fillRef>
+          <a:effectRef idx="2">
+            <a:schemeClr val="accent1"/>
+          </a:effectRef>
+          <a:fontRef idx="minor">
+            <a:schemeClr val="lt1"/>
+          </a:fontRef>
+        </p:style>
+        <p:txBody>
+          <a:bodyPr rtlCol="0" anchor="ctr"/>
+          <a:lstStyle/>
+          <a:p>
+            <a:pPr algn="ctr"/>
+          </a:p>
+        </p:txBody>
+      </p:sp>
+      <p:sp>
+        <p:nvSpPr>
+          <p:cNvPr id="10" name="Rectangle 9"/>
+          <p:cNvSpPr/>
+          <p:nvPr/>
+        </p:nvSpPr>
+        <p:spPr>
+          <a:xfrm>
+            <a:off x="2377440" y="2926080"/>
+            <a:ext cx="329184" cy="329184"/>
+          </a:xfrm>
+          <a:prstGeom prst="rect">
+            <a:avLst/>
+          </a:prstGeom>
+          <a:solidFill>
+            <a:srgbClr val="43B02A"/>
+          </a:solidFill>
+          <a:ln>
+            <a:noFill/>
+          </a:ln>
+          <a:effectLst/>
+        </p:spPr>
+        <p:style>
+          <a:lnRef idx="1">
+            <a:schemeClr val="accent1"/>
+          </a:lnRef>
+          <a:fillRef idx="3">
+            <a:schemeClr val="accent1"/>
+          </a:fillRef>
+          <a:effectRef idx="2">
+            <a:schemeClr val="accent1"/>
+          </a:effectRef>
+          <a:fontRef idx="minor">
+            <a:schemeClr val="lt1"/>
+          </a:fontRef>
+        </p:style>
+        <p:txBody>
+          <a:bodyPr rtlCol="0" anchor="ctr"/>
+          <a:lstStyle/>
+          <a:p>
+            <a:pPr algn="ctr"/>
+          </a:p>
+        </p:txBody>
+      </p:sp>
+      <p:sp>
+        <p:nvSpPr>
+          <p:cNvPr id="11" name="Rectangle 10"/>
+          <p:cNvSpPr/>
+          <p:nvPr/>
+        </p:nvSpPr>
+        <p:spPr>
+          <a:xfrm>
+            <a:off x="2798064" y="2926080"/>
+            <a:ext cx="329184" cy="329184"/>
+          </a:xfrm>
+          <a:prstGeom prst="rect">
+            <a:avLst/>
+          </a:prstGeom>
+          <a:solidFill>
+            <a:srgbClr val="43B02A"/>
+          </a:solidFill>
+          <a:ln>
+            <a:noFill/>
+          </a:ln>
+          <a:effectLst/>
+        </p:spPr>
+        <p:style>
+          <a:lnRef idx="1">
+            <a:schemeClr val="accent1"/>
+          </a:lnRef>
+          <a:fillRef idx="3">
+            <a:schemeClr val="accent1"/>
+          </a:fillRef>
+          <a:effectRef idx="2">
+            <a:schemeClr val="accent1"/>
+          </a:effectRef>
+          <a:fontRef idx="minor">
+            <a:schemeClr val="lt1"/>
+          </a:fontRef>
+        </p:style>
+        <p:txBody>
+          <a:bodyPr rtlCol="0" anchor="ctr"/>
+          <a:lstStyle/>
+          <a:p>
+            <a:pPr algn="ctr"/>
+          </a:p>
+        </p:txBody>
+      </p:sp>
+      <p:sp>
+        <p:nvSpPr>
+          <p:cNvPr id="12" name="Rectangle 11"/>
+          <p:cNvSpPr/>
+          <p:nvPr/>
+        </p:nvSpPr>
+        <p:spPr>
+          <a:xfrm>
+            <a:off x="3218688" y="2926080"/>
+            <a:ext cx="329184" cy="329184"/>
+          </a:xfrm>
+          <a:prstGeom prst="rect">
+            <a:avLst/>
+          </a:prstGeom>
+          <a:solidFill>
+            <a:srgbClr val="43B02A"/>
+          </a:solidFill>
+          <a:ln>
+            <a:noFill/>
+          </a:ln>
+          <a:effectLst/>
+        </p:spPr>
+        <p:style>
+          <a:lnRef idx="1">
+            <a:schemeClr val="accent1"/>
+          </a:lnRef>
+          <a:fillRef idx="3">
+            <a:schemeClr val="accent1"/>
+          </a:fillRef>
+          <a:effectRef idx="2">
+            <a:schemeClr val="accent1"/>
+          </a:effectRef>
+          <a:fontRef idx="minor">
+            <a:schemeClr val="lt1"/>
+          </a:fontRef>
+        </p:style>
+        <p:txBody>
+          <a:bodyPr rtlCol="0" anchor="ctr"/>
+          <a:lstStyle/>
+          <a:p>
+            <a:pPr algn="ctr"/>
+          </a:p>
+        </p:txBody>
+      </p:sp>
+      <p:sp>
+        <p:nvSpPr>
+          <p:cNvPr id="13" name="Rectangle 12"/>
+          <p:cNvSpPr/>
+          <p:nvPr/>
+        </p:nvSpPr>
+        <p:spPr>
+          <a:xfrm>
+            <a:off x="3639312" y="2926080"/>
+            <a:ext cx="329184" cy="329184"/>
+          </a:xfrm>
+          <a:prstGeom prst="rect">
+            <a:avLst/>
+          </a:prstGeom>
+          <a:solidFill>
+            <a:srgbClr val="43B02A"/>
+          </a:solidFill>
+          <a:ln>
+            <a:noFill/>
+          </a:ln>
+          <a:effectLst/>
+        </p:spPr>
+        <p:style>
+          <a:lnRef idx="1">
+            <a:schemeClr val="accent1"/>
+          </a:lnRef>
+          <a:fillRef idx="3">
+            <a:schemeClr val="accent1"/>
+          </a:fillRef>
+          <a:effectRef idx="2">
+            <a:schemeClr val="accent1"/>
+          </a:effectRef>
+          <a:fontRef idx="minor">
+            <a:schemeClr val="lt1"/>
+          </a:fontRef>
+        </p:style>
+        <p:txBody>
+          <a:bodyPr rtlCol="0" anchor="ctr"/>
+          <a:lstStyle/>
+          <a:p>
+            <a:pPr algn="ctr"/>
+          </a:p>
+        </p:txBody>
+      </p:sp>
+      <p:sp>
+        <p:nvSpPr>
+          <p:cNvPr id="14" name="Rectangle 13"/>
+          <p:cNvSpPr/>
+          <p:nvPr/>
+        </p:nvSpPr>
+        <p:spPr>
+          <a:xfrm>
+            <a:off x="4059936" y="2926080"/>
+            <a:ext cx="329184" cy="329184"/>
+          </a:xfrm>
+          <a:prstGeom prst="rect">
+            <a:avLst/>
+          </a:prstGeom>
+          <a:solidFill>
+            <a:srgbClr val="43B02A"/>
+          </a:solidFill>
+          <a:ln>
+            <a:noFill/>
+          </a:ln>
+          <a:effectLst/>
+        </p:spPr>
+        <p:style>
+          <a:lnRef idx="1">
+            <a:schemeClr val="accent1"/>
+          </a:lnRef>
+          <a:fillRef idx="3">
+            <a:schemeClr val="accent1"/>
+          </a:fillRef>
+          <a:effectRef idx="2">
+            <a:schemeClr val="accent1"/>
+          </a:effectRef>
+          <a:fontRef idx="minor">
+            <a:schemeClr val="lt1"/>
+          </a:fontRef>
+        </p:style>
+        <p:txBody>
+          <a:bodyPr rtlCol="0" anchor="ctr"/>
+          <a:lstStyle/>
+          <a:p>
+            <a:pPr algn="ctr"/>
+          </a:p>
+        </p:txBody>
+      </p:sp>
+      <p:sp>
+        <p:nvSpPr>
+          <p:cNvPr id="15" name="Rectangle 14"/>
+          <p:cNvSpPr/>
+          <p:nvPr/>
+        </p:nvSpPr>
+        <p:spPr>
+          <a:xfrm>
+            <a:off x="4480560" y="2926080"/>
+            <a:ext cx="329184" cy="329184"/>
+          </a:xfrm>
+          <a:prstGeom prst="rect">
+            <a:avLst/>
+          </a:prstGeom>
+          <a:solidFill>
+            <a:srgbClr val="43B02A"/>
+          </a:solidFill>
+          <a:ln>
+            <a:noFill/>
+          </a:ln>
+          <a:effectLst/>
+        </p:spPr>
+        <p:style>
+          <a:lnRef idx="1">
+            <a:schemeClr val="accent1"/>
+          </a:lnRef>
+          <a:fillRef idx="3">
+            <a:schemeClr val="accent1"/>
+          </a:fillRef>
+          <a:effectRef idx="2">
+            <a:schemeClr val="accent1"/>
+          </a:effectRef>
+          <a:fontRef idx="minor">
+            <a:schemeClr val="lt1"/>
+          </a:fontRef>
+        </p:style>
+        <p:txBody>
+          <a:bodyPr rtlCol="0" anchor="ctr"/>
+          <a:lstStyle/>
+          <a:p>
+            <a:pPr algn="ctr"/>
+          </a:p>
+        </p:txBody>
+      </p:sp>
+      <p:sp>
+        <p:nvSpPr>
+          <p:cNvPr id="16" name="Rectangle 15"/>
+          <p:cNvSpPr/>
+          <p:nvPr/>
+        </p:nvSpPr>
+        <p:spPr>
+          <a:xfrm>
+            <a:off x="4901184" y="2926080"/>
+            <a:ext cx="329184" cy="329184"/>
+          </a:xfrm>
+          <a:prstGeom prst="rect">
+            <a:avLst/>
+          </a:prstGeom>
+          <a:solidFill>
+            <a:srgbClr val="43B02A"/>
+          </a:solidFill>
+          <a:ln>
+            <a:noFill/>
+          </a:ln>
+          <a:effectLst/>
+        </p:spPr>
+        <p:style>
+          <a:lnRef idx="1">
+            <a:schemeClr val="accent1"/>
+          </a:lnRef>
+          <a:fillRef idx="3">
+            <a:schemeClr val="accent1"/>
+          </a:fillRef>
+          <a:effectRef idx="2">
+            <a:schemeClr val="accent1"/>
+          </a:effectRef>
+          <a:fontRef idx="minor">
+            <a:schemeClr val="lt1"/>
+          </a:fontRef>
+        </p:style>
+        <p:txBody>
+          <a:bodyPr rtlCol="0" anchor="ctr"/>
+          <a:lstStyle/>
+          <a:p>
+            <a:pPr algn="ctr"/>
+          </a:p>
+        </p:txBody>
+      </p:sp>
+      <p:sp>
+        <p:nvSpPr>
+          <p:cNvPr id="17" name="Rectangle 16"/>
+          <p:cNvSpPr/>
+          <p:nvPr/>
+        </p:nvSpPr>
+        <p:spPr>
+          <a:xfrm>
+            <a:off x="5321808" y="2926080"/>
+            <a:ext cx="329184" cy="329184"/>
+          </a:xfrm>
+          <a:prstGeom prst="rect">
+            <a:avLst/>
+          </a:prstGeom>
+          <a:solidFill>
+            <a:srgbClr val="43B02A"/>
+          </a:solidFill>
+          <a:ln>
+            <a:noFill/>
+          </a:ln>
+          <a:effectLst/>
+        </p:spPr>
+        <p:style>
+          <a:lnRef idx="1">
+            <a:schemeClr val="accent1"/>
+          </a:lnRef>
+          <a:fillRef idx="3">
+            <a:schemeClr val="accent1"/>
+          </a:fillRef>
+          <a:effectRef idx="2">
+            <a:schemeClr val="accent1"/>
+          </a:effectRef>
+          <a:fontRef idx="minor">
+            <a:schemeClr val="lt1"/>
+          </a:fontRef>
+        </p:style>
+        <p:txBody>
+          <a:bodyPr rtlCol="0" anchor="ctr"/>
+          <a:lstStyle/>
+          <a:p>
+            <a:pPr algn="ctr"/>
+          </a:p>
+        </p:txBody>
+      </p:sp>
+      <p:sp>
+        <p:nvSpPr>
+          <p:cNvPr id="18" name="Rectangle 17"/>
+          <p:cNvSpPr/>
+          <p:nvPr/>
+        </p:nvSpPr>
+        <p:spPr>
+          <a:xfrm>
+            <a:off x="5742432" y="2926080"/>
+            <a:ext cx="329184" cy="329184"/>
+          </a:xfrm>
+          <a:prstGeom prst="rect">
+            <a:avLst/>
+          </a:prstGeom>
+          <a:solidFill>
+            <a:srgbClr val="43B02A"/>
+          </a:solidFill>
+          <a:ln>
+            <a:noFill/>
+          </a:ln>
+          <a:effectLst/>
+        </p:spPr>
+        <p:style>
+          <a:lnRef idx="1">
+            <a:schemeClr val="accent1"/>
+          </a:lnRef>
+          <a:fillRef idx="3">
+            <a:schemeClr val="accent1"/>
+          </a:fillRef>
+          <a:effectRef idx="2">
+            <a:schemeClr val="accent1"/>
+          </a:effectRef>
+          <a:fontRef idx="minor">
+            <a:schemeClr val="lt1"/>
+          </a:fontRef>
+        </p:style>
+        <p:txBody>
+          <a:bodyPr rtlCol="0" anchor="ctr"/>
+          <a:lstStyle/>
+          <a:p>
+            <a:pPr algn="ctr"/>
+          </a:p>
+        </p:txBody>
+      </p:sp>
+      <p:sp>
+        <p:nvSpPr>
+          <p:cNvPr id="19" name="Rectangle 18"/>
+          <p:cNvSpPr/>
+          <p:nvPr/>
+        </p:nvSpPr>
+        <p:spPr>
+          <a:xfrm>
+            <a:off x="6163056" y="2926080"/>
+            <a:ext cx="329184" cy="329184"/>
+          </a:xfrm>
+          <a:prstGeom prst="rect">
+            <a:avLst/>
+          </a:prstGeom>
+          <a:solidFill>
+            <a:srgbClr val="43B02A"/>
+          </a:solidFill>
+          <a:ln>
+            <a:noFill/>
+          </a:ln>
+          <a:effectLst/>
+        </p:spPr>
+        <p:style>
+          <a:lnRef idx="1">
+            <a:schemeClr val="accent1"/>
+          </a:lnRef>
+          <a:fillRef idx="3">
+            <a:schemeClr val="accent1"/>
+          </a:fillRef>
+          <a:effectRef idx="2">
+            <a:schemeClr val="accent1"/>
+          </a:effectRef>
+          <a:fontRef idx="minor">
+            <a:schemeClr val="lt1"/>
+          </a:fontRef>
+        </p:style>
+        <p:txBody>
+          <a:bodyPr rtlCol="0" anchor="ctr"/>
+          <a:lstStyle/>
+          <a:p>
+            <a:pPr algn="ctr"/>
+          </a:p>
+        </p:txBody>
+      </p:sp>
+      <p:sp>
+        <p:nvSpPr>
+          <p:cNvPr id="20" name="Rectangle 19"/>
+          <p:cNvSpPr/>
+          <p:nvPr/>
+        </p:nvSpPr>
+        <p:spPr>
+          <a:xfrm>
+            <a:off x="6583680" y="2926080"/>
+            <a:ext cx="329184" cy="329184"/>
+          </a:xfrm>
+          <a:prstGeom prst="rect">
+            <a:avLst/>
+          </a:prstGeom>
+          <a:solidFill>
+            <a:srgbClr val="43B02A"/>
+          </a:solidFill>
+          <a:ln>
+            <a:noFill/>
+          </a:ln>
+          <a:effectLst/>
+        </p:spPr>
+        <p:style>
+          <a:lnRef idx="1">
+            <a:schemeClr val="accent1"/>
+          </a:lnRef>
+          <a:fillRef idx="3">
+            <a:schemeClr val="accent1"/>
+          </a:fillRef>
+          <a:effectRef idx="2">
+            <a:schemeClr val="accent1"/>
+          </a:effectRef>
+          <a:fontRef idx="minor">
+            <a:schemeClr val="lt1"/>
+          </a:fontRef>
+        </p:style>
+        <p:txBody>
+          <a:bodyPr rtlCol="0" anchor="ctr"/>
+          <a:lstStyle/>
+          <a:p>
+            <a:pPr algn="ctr"/>
+          </a:p>
+        </p:txBody>
+      </p:sp>
+      <p:sp>
+        <p:nvSpPr>
+          <p:cNvPr id="21" name="Rectangle 20"/>
+          <p:cNvSpPr/>
+          <p:nvPr/>
+        </p:nvSpPr>
+        <p:spPr>
+          <a:xfrm>
+            <a:off x="1115568" y="3346704"/>
+            <a:ext cx="329184" cy="329184"/>
+          </a:xfrm>
+          <a:prstGeom prst="rect">
+            <a:avLst/>
+          </a:prstGeom>
+          <a:solidFill>
+            <a:srgbClr val="43B02A"/>
+          </a:solidFill>
+          <a:ln>
+            <a:noFill/>
+          </a:ln>
+          <a:effectLst/>
+        </p:spPr>
+        <p:style>
+          <a:lnRef idx="1">
+            <a:schemeClr val="accent1"/>
+          </a:lnRef>
+          <a:fillRef idx="3">
+            <a:schemeClr val="accent1"/>
+          </a:fillRef>
+          <a:effectRef idx="2">
+            <a:schemeClr val="accent1"/>
+          </a:effectRef>
+          <a:fontRef idx="minor">
+            <a:schemeClr val="lt1"/>
+          </a:fontRef>
+        </p:style>
+        <p:txBody>
+          <a:bodyPr rtlCol="0" anchor="ctr"/>
+          <a:lstStyle/>
+          <a:p>
+            <a:pPr algn="ctr"/>
+          </a:p>
+        </p:txBody>
+      </p:sp>
+      <p:sp>
+        <p:nvSpPr>
+          <p:cNvPr id="22" name="Rectangle 21"/>
+          <p:cNvSpPr/>
+          <p:nvPr/>
+        </p:nvSpPr>
+        <p:spPr>
+          <a:xfrm>
+            <a:off x="1536192" y="3346704"/>
+            <a:ext cx="329184" cy="329184"/>
+          </a:xfrm>
+          <a:prstGeom prst="rect">
+            <a:avLst/>
+          </a:prstGeom>
+          <a:solidFill>
+            <a:srgbClr val="43B02A"/>
+          </a:solidFill>
+          <a:ln>
+            <a:noFill/>
+          </a:ln>
+          <a:effectLst/>
+        </p:spPr>
+        <p:style>
+          <a:lnRef idx="1">
+            <a:schemeClr val="accent1"/>
+          </a:lnRef>
+          <a:fillRef idx="3">
+            <a:schemeClr val="accent1"/>
+          </a:fillRef>
+          <a:effectRef idx="2">
+            <a:schemeClr val="accent1"/>
+          </a:effectRef>
+          <a:fontRef idx="minor">
+            <a:schemeClr val="lt1"/>
+          </a:fontRef>
+        </p:style>
+        <p:txBody>
+          <a:bodyPr rtlCol="0" anchor="ctr"/>
+          <a:lstStyle/>
+          <a:p>
+            <a:pPr algn="ctr"/>
+          </a:p>
+        </p:txBody>
+      </p:sp>
+      <p:sp>
+        <p:nvSpPr>
+          <p:cNvPr id="23" name="Rectangle 22"/>
+          <p:cNvSpPr/>
+          <p:nvPr/>
+        </p:nvSpPr>
+        <p:spPr>
+          <a:xfrm>
+            <a:off x="1956816" y="3346704"/>
+            <a:ext cx="329184" cy="329184"/>
+          </a:xfrm>
+          <a:prstGeom prst="rect">
+            <a:avLst/>
+          </a:prstGeom>
+          <a:solidFill>
+            <a:srgbClr val="43B02A"/>
+          </a:solidFill>
+          <a:ln>
+            <a:noFill/>
+          </a:ln>
+          <a:effectLst/>
+        </p:spPr>
+        <p:style>
+          <a:lnRef idx="1">
+            <a:schemeClr val="accent1"/>
+          </a:lnRef>
+          <a:fillRef idx="3">
+            <a:schemeClr val="accent1"/>
+          </a:fillRef>
+          <a:effectRef idx="2">
+            <a:schemeClr val="accent1"/>
+          </a:effectRef>
+          <a:fontRef idx="minor">
+            <a:schemeClr val="lt1"/>
+          </a:fontRef>
+        </p:style>
+        <p:txBody>
+          <a:bodyPr rtlCol="0" anchor="ctr"/>
+          <a:lstStyle/>
+          <a:p>
+            <a:pPr algn="ctr"/>
+          </a:p>
+        </p:txBody>
+      </p:sp>
+      <p:sp>
+        <p:nvSpPr>
+          <p:cNvPr id="24" name="Rectangle 23"/>
+          <p:cNvSpPr/>
+          <p:nvPr/>
+        </p:nvSpPr>
+        <p:spPr>
+          <a:xfrm>
+            <a:off x="2377440" y="3346704"/>
+            <a:ext cx="329184" cy="329184"/>
+          </a:xfrm>
+          <a:prstGeom prst="rect">
+            <a:avLst/>
+          </a:prstGeom>
+          <a:solidFill>
+            <a:srgbClr val="43B02A"/>
+          </a:solidFill>
+          <a:ln>
+            <a:noFill/>
+          </a:ln>
+          <a:effectLst/>
+        </p:spPr>
+        <p:style>
+          <a:lnRef idx="1">
+            <a:schemeClr val="accent1"/>
+          </a:lnRef>
+          <a:fillRef idx="3">
+            <a:schemeClr val="accent1"/>
+          </a:fillRef>
+          <a:effectRef idx="2">
+            <a:schemeClr val="accent1"/>
+          </a:effectRef>
+          <a:fontRef idx="minor">
+            <a:schemeClr val="lt1"/>
+          </a:fontRef>
+        </p:style>
+        <p:txBody>
+          <a:bodyPr rtlCol="0" anchor="ctr"/>
+          <a:lstStyle/>
+          <a:p>
+            <a:pPr algn="ctr"/>
+          </a:p>
+        </p:txBody>
+      </p:sp>
+      <p:sp>
+        <p:nvSpPr>
+          <p:cNvPr id="25" name="Rectangle 24"/>
+          <p:cNvSpPr/>
+          <p:nvPr/>
+        </p:nvSpPr>
+        <p:spPr>
+          <a:xfrm>
+            <a:off x="2798064" y="3346704"/>
+            <a:ext cx="329184" cy="329184"/>
+          </a:xfrm>
+          <a:prstGeom prst="rect">
+            <a:avLst/>
+          </a:prstGeom>
+          <a:solidFill>
+            <a:srgbClr val="A8DC98"/>
+          </a:solidFill>
+          <a:ln>
+            <a:noFill/>
+          </a:ln>
+          <a:effectLst/>
+        </p:spPr>
+        <p:style>
+          <a:lnRef idx="1">
+            <a:schemeClr val="accent1"/>
+          </a:lnRef>
+          <a:fillRef idx="3">
+            <a:schemeClr val="accent1"/>
+          </a:fillRef>
+          <a:effectRef idx="2">
+            <a:schemeClr val="accent1"/>
+          </a:effectRef>
+          <a:fontRef idx="minor">
+            <a:schemeClr val="lt1"/>
+          </a:fontRef>
+        </p:style>
+        <p:txBody>
+          <a:bodyPr rtlCol="0" anchor="ctr"/>
+          <a:lstStyle/>
+          <a:p>
+            <a:pPr algn="ctr"/>
+          </a:p>
+        </p:txBody>
+      </p:sp>
+      <p:sp>
+        <p:nvSpPr>
+          <p:cNvPr id="26" name="Rectangle 25"/>
+          <p:cNvSpPr/>
+          <p:nvPr/>
+        </p:nvSpPr>
+        <p:spPr>
+          <a:xfrm>
+            <a:off x="3218688" y="3346704"/>
+            <a:ext cx="329184" cy="329184"/>
+          </a:xfrm>
+          <a:prstGeom prst="rect">
+            <a:avLst/>
+          </a:prstGeom>
+          <a:solidFill>
+            <a:srgbClr val="A8DC98"/>
+          </a:solidFill>
+          <a:ln>
+            <a:noFill/>
+          </a:ln>
+          <a:effectLst/>
+        </p:spPr>
+        <p:style>
+          <a:lnRef idx="1">
+            <a:schemeClr val="accent1"/>
+          </a:lnRef>
+          <a:fillRef idx="3">
+            <a:schemeClr val="accent1"/>
+          </a:fillRef>
+          <a:effectRef idx="2">
+            <a:schemeClr val="accent1"/>
+          </a:effectRef>
+          <a:fontRef idx="minor">
+            <a:schemeClr val="lt1"/>
+          </a:fontRef>
+        </p:style>
+        <p:txBody>
+          <a:bodyPr rtlCol="0" anchor="ctr"/>
+          <a:lstStyle/>
+          <a:p>
+            <a:pPr algn="ctr"/>
+          </a:p>
+        </p:txBody>
+      </p:sp>
+      <p:sp>
+        <p:nvSpPr>
+          <p:cNvPr id="27" name="Rectangle 26"/>
+          <p:cNvSpPr/>
+          <p:nvPr/>
+        </p:nvSpPr>
+        <p:spPr>
+          <a:xfrm>
+            <a:off x="3639312" y="3346704"/>
+            <a:ext cx="329184" cy="329184"/>
+          </a:xfrm>
+          <a:prstGeom prst="rect">
+            <a:avLst/>
+          </a:prstGeom>
+          <a:solidFill>
+            <a:srgbClr val="A8DC98"/>
+          </a:solidFill>
+          <a:ln>
+            <a:noFill/>
+          </a:ln>
+          <a:effectLst/>
+        </p:spPr>
+        <p:style>
+          <a:lnRef idx="1">
+            <a:schemeClr val="accent1"/>
+          </a:lnRef>
+          <a:fillRef idx="3">
+            <a:schemeClr val="accent1"/>
+          </a:fillRef>
+          <a:effectRef idx="2">
+            <a:schemeClr val="accent1"/>
+          </a:effectRef>
+          <a:fontRef idx="minor">
+            <a:schemeClr val="lt1"/>
+          </a:fontRef>
+        </p:style>
+        <p:txBody>
+          <a:bodyPr rtlCol="0" anchor="ctr"/>
+          <a:lstStyle/>
+          <a:p>
+            <a:pPr algn="ctr"/>
+          </a:p>
+        </p:txBody>
+      </p:sp>
+      <p:sp>
+        <p:nvSpPr>
+          <p:cNvPr id="28" name="Rectangle 27"/>
+          <p:cNvSpPr/>
+          <p:nvPr/>
+        </p:nvSpPr>
+        <p:spPr>
+          <a:xfrm>
+            <a:off x="4059936" y="3346704"/>
+            <a:ext cx="329184" cy="329184"/>
+          </a:xfrm>
+          <a:prstGeom prst="rect">
+            <a:avLst/>
+          </a:prstGeom>
+          <a:solidFill>
+            <a:srgbClr val="A8DC98"/>
+          </a:solidFill>
+          <a:ln>
+            <a:noFill/>
+          </a:ln>
+          <a:effectLst/>
+        </p:spPr>
+        <p:style>
+          <a:lnRef idx="1">
+            <a:schemeClr val="accent1"/>
+          </a:lnRef>
+          <a:fillRef idx="3">
+            <a:schemeClr val="accent1"/>
+          </a:fillRef>
+          <a:effectRef idx="2">
+            <a:schemeClr val="accent1"/>
+          </a:effectRef>
+          <a:fontRef idx="minor">
+            <a:schemeClr val="lt1"/>
+          </a:fontRef>
+        </p:style>
+        <p:txBody>
+          <a:bodyPr rtlCol="0" anchor="ctr"/>
+          <a:lstStyle/>
+          <a:p>
+            <a:pPr algn="ctr"/>
+          </a:p>
+        </p:txBody>
+      </p:sp>
+      <p:sp>
+        <p:nvSpPr>
+          <p:cNvPr id="29" name="Rectangle 28"/>
+          <p:cNvSpPr/>
+          <p:nvPr/>
+        </p:nvSpPr>
+        <p:spPr>
+          <a:xfrm>
+            <a:off x="4480560" y="3346704"/>
+            <a:ext cx="329184" cy="329184"/>
+          </a:xfrm>
+          <a:prstGeom prst="rect">
+            <a:avLst/>
+          </a:prstGeom>
+          <a:solidFill>
+            <a:srgbClr val="A8DC98"/>
+          </a:solidFill>
+          <a:ln>
+            <a:noFill/>
+          </a:ln>
+          <a:effectLst/>
+        </p:spPr>
+        <p:style>
+          <a:lnRef idx="1">
+            <a:schemeClr val="accent1"/>
+          </a:lnRef>
+          <a:fillRef idx="3">
+            <a:schemeClr val="accent1"/>
+          </a:fillRef>
+          <a:effectRef idx="2">
+            <a:schemeClr val="accent1"/>
+          </a:effectRef>
+          <a:fontRef idx="minor">
+            <a:schemeClr val="lt1"/>
+          </a:fontRef>
+        </p:style>
+        <p:txBody>
+          <a:bodyPr rtlCol="0" anchor="ctr"/>
+          <a:lstStyle/>
+          <a:p>
+            <a:pPr algn="ctr"/>
+          </a:p>
+        </p:txBody>
+      </p:sp>
+      <p:sp>
+        <p:nvSpPr>
+          <p:cNvPr id="30" name="Rectangle 29"/>
+          <p:cNvSpPr/>
+          <p:nvPr/>
+        </p:nvSpPr>
+        <p:spPr>
+          <a:xfrm>
+            <a:off x="4901184" y="3346704"/>
+            <a:ext cx="329184" cy="329184"/>
+          </a:xfrm>
+          <a:prstGeom prst="rect">
+            <a:avLst/>
+          </a:prstGeom>
+          <a:solidFill>
+            <a:srgbClr val="A8DC98"/>
+          </a:solidFill>
+          <a:ln>
+            <a:noFill/>
+          </a:ln>
+          <a:effectLst/>
+        </p:spPr>
+        <p:style>
+          <a:lnRef idx="1">
+            <a:schemeClr val="accent1"/>
+          </a:lnRef>
+          <a:fillRef idx="3">
+            <a:schemeClr val="accent1"/>
+          </a:fillRef>
+          <a:effectRef idx="2">
+            <a:schemeClr val="accent1"/>
+          </a:effectRef>
+          <a:fontRef idx="minor">
+            <a:schemeClr val="lt1"/>
+          </a:fontRef>
+        </p:style>
+        <p:txBody>
+          <a:bodyPr rtlCol="0" anchor="ctr"/>
+          <a:lstStyle/>
+          <a:p>
+            <a:pPr algn="ctr"/>
+          </a:p>
+        </p:txBody>
+      </p:sp>
+      <p:sp>
+        <p:nvSpPr>
+          <p:cNvPr id="31" name="Rectangle 30"/>
+          <p:cNvSpPr/>
+          <p:nvPr/>
+        </p:nvSpPr>
+        <p:spPr>
+          <a:xfrm>
+            <a:off x="5321808" y="3346704"/>
+            <a:ext cx="329184" cy="329184"/>
+          </a:xfrm>
+          <a:prstGeom prst="rect">
+            <a:avLst/>
+          </a:prstGeom>
+          <a:solidFill>
+            <a:srgbClr val="A8DC98"/>
+          </a:solidFill>
+          <a:ln>
+            <a:noFill/>
+          </a:ln>
+          <a:effectLst/>
+        </p:spPr>
+        <p:style>
+          <a:lnRef idx="1">
+            <a:schemeClr val="accent1"/>
+          </a:lnRef>
+          <a:fillRef idx="3">
+            <a:schemeClr val="accent1"/>
+          </a:fillRef>
+          <a:effectRef idx="2">
+            <a:schemeClr val="accent1"/>
+          </a:effectRef>
+          <a:fontRef idx="minor">
+            <a:schemeClr val="lt1"/>
+          </a:fontRef>
+        </p:style>
+        <p:txBody>
+          <a:bodyPr rtlCol="0" anchor="ctr"/>
+          <a:lstStyle/>
+          <a:p>
+            <a:pPr algn="ctr"/>
+          </a:p>
+        </p:txBody>
+      </p:sp>
+      <p:sp>
+        <p:nvSpPr>
+          <p:cNvPr id="32" name="Rectangle 31"/>
+          <p:cNvSpPr/>
+          <p:nvPr/>
+        </p:nvSpPr>
+        <p:spPr>
+          <a:xfrm>
+            <a:off x="5742432" y="3346704"/>
+            <a:ext cx="329184" cy="329184"/>
+          </a:xfrm>
+          <a:prstGeom prst="rect">
+            <a:avLst/>
+          </a:prstGeom>
+          <a:solidFill>
+            <a:srgbClr val="A8DC98"/>
+          </a:solidFill>
+          <a:ln>
+            <a:noFill/>
+          </a:ln>
+          <a:effectLst/>
+        </p:spPr>
+        <p:style>
+          <a:lnRef idx="1">
+            <a:schemeClr val="accent1"/>
+          </a:lnRef>
+          <a:fillRef idx="3">
+            <a:schemeClr val="accent1"/>
+          </a:fillRef>
+          <a:effectRef idx="2">
+            <a:schemeClr val="accent1"/>
+          </a:effectRef>
+          <a:fontRef idx="minor">
+            <a:schemeClr val="lt1"/>
+          </a:fontRef>
+        </p:style>
+        <p:txBody>
+          <a:bodyPr rtlCol="0" anchor="ctr"/>
+          <a:lstStyle/>
+          <a:p>
+            <a:pPr algn="ctr"/>
+          </a:p>
+        </p:txBody>
+      </p:sp>
+      <p:sp>
+        <p:nvSpPr>
+          <p:cNvPr id="33" name="Rectangle 32"/>
+          <p:cNvSpPr/>
+          <p:nvPr/>
+        </p:nvSpPr>
+        <p:spPr>
+          <a:xfrm>
+            <a:off x="6163056" y="3346704"/>
+            <a:ext cx="329184" cy="329184"/>
+          </a:xfrm>
+          <a:prstGeom prst="rect">
+            <a:avLst/>
+          </a:prstGeom>
+          <a:solidFill>
+            <a:srgbClr val="A8DC98"/>
+          </a:solidFill>
+          <a:ln>
+            <a:noFill/>
+          </a:ln>
+          <a:effectLst/>
+        </p:spPr>
+        <p:style>
+          <a:lnRef idx="1">
+            <a:schemeClr val="accent1"/>
+          </a:lnRef>
+          <a:fillRef idx="3">
+            <a:schemeClr val="accent1"/>
+          </a:fillRef>
+          <a:effectRef idx="2">
+            <a:schemeClr val="accent1"/>
+          </a:effectRef>
+          <a:fontRef idx="minor">
+            <a:schemeClr val="lt1"/>
+          </a:fontRef>
+        </p:style>
+        <p:txBody>
+          <a:bodyPr rtlCol="0" anchor="ctr"/>
+          <a:lstStyle/>
+          <a:p>
+            <a:pPr algn="ctr"/>
+          </a:p>
+        </p:txBody>
+      </p:sp>
+      <p:sp>
+        <p:nvSpPr>
+          <p:cNvPr id="34" name="Rectangle 33"/>
+          <p:cNvSpPr/>
+          <p:nvPr/>
+        </p:nvSpPr>
+        <p:spPr>
+          <a:xfrm>
+            <a:off x="6583680" y="3346704"/>
+            <a:ext cx="329184" cy="329184"/>
+          </a:xfrm>
+          <a:prstGeom prst="rect">
+            <a:avLst/>
+          </a:prstGeom>
+          <a:solidFill>
+            <a:srgbClr val="A8DC98"/>
+          </a:solidFill>
+          <a:ln>
+            <a:noFill/>
+          </a:ln>
+          <a:effectLst/>
+        </p:spPr>
+        <p:style>
+          <a:lnRef idx="1">
+            <a:schemeClr val="accent1"/>
+          </a:lnRef>
+          <a:fillRef idx="3">
+            <a:schemeClr val="accent1"/>
+          </a:fillRef>
+          <a:effectRef idx="2">
+            <a:schemeClr val="accent1"/>
+          </a:effectRef>
+          <a:fontRef idx="minor">
+            <a:schemeClr val="lt1"/>
+          </a:fontRef>
+        </p:style>
+        <p:txBody>
+          <a:bodyPr rtlCol="0" anchor="ctr"/>
+          <a:lstStyle/>
+          <a:p>
+            <a:pPr algn="ctr"/>
+          </a:p>
+        </p:txBody>
+      </p:sp>
+      <p:sp>
+        <p:nvSpPr>
+          <p:cNvPr id="35" name="Rectangle 34"/>
+          <p:cNvSpPr/>
+          <p:nvPr/>
+        </p:nvSpPr>
+        <p:spPr>
+          <a:xfrm>
+            <a:off x="1115568" y="3767328"/>
+            <a:ext cx="329184" cy="329184"/>
+          </a:xfrm>
+          <a:prstGeom prst="rect">
+            <a:avLst/>
+          </a:prstGeom>
+          <a:solidFill>
+            <a:srgbClr val="A8DC98"/>
+          </a:solidFill>
+          <a:ln>
+            <a:noFill/>
+          </a:ln>
+          <a:effectLst/>
+        </p:spPr>
+        <p:style>
+          <a:lnRef idx="1">
+            <a:schemeClr val="accent1"/>
+          </a:lnRef>
+          <a:fillRef idx="3">
+            <a:schemeClr val="accent1"/>
+          </a:fillRef>
+          <a:effectRef idx="2">
+            <a:schemeClr val="accent1"/>
+          </a:effectRef>
+          <a:fontRef idx="minor">
+            <a:schemeClr val="lt1"/>
+          </a:fontRef>
+        </p:style>
+        <p:txBody>
+          <a:bodyPr rtlCol="0" anchor="ctr"/>
+          <a:lstStyle/>
+          <a:p>
+            <a:pPr algn="ctr"/>
+          </a:p>
+        </p:txBody>
+      </p:sp>
+      <p:sp>
+        <p:nvSpPr>
+          <p:cNvPr id="36" name="Rectangle 35"/>
+          <p:cNvSpPr/>
+          <p:nvPr/>
+        </p:nvSpPr>
+        <p:spPr>
+          <a:xfrm>
+            <a:off x="1536192" y="3767328"/>
+            <a:ext cx="329184" cy="329184"/>
+          </a:xfrm>
+          <a:prstGeom prst="rect">
+            <a:avLst/>
+          </a:prstGeom>
+          <a:solidFill>
+            <a:srgbClr val="A8DC98"/>
+          </a:solidFill>
+          <a:ln>
+            <a:noFill/>
+          </a:ln>
+          <a:effectLst/>
+        </p:spPr>
+        <p:style>
+          <a:lnRef idx="1">
+            <a:schemeClr val="accent1"/>
+          </a:lnRef>
+          <a:fillRef idx="3">
+            <a:schemeClr val="accent1"/>
+          </a:fillRef>
+          <a:effectRef idx="2">
+            <a:schemeClr val="accent1"/>
+          </a:effectRef>
+          <a:fontRef idx="minor">
+            <a:schemeClr val="lt1"/>
+          </a:fontRef>
+        </p:style>
+        <p:txBody>
+          <a:bodyPr rtlCol="0" anchor="ctr"/>
+          <a:lstStyle/>
+          <a:p>
+            <a:pPr algn="ctr"/>
+          </a:p>
+        </p:txBody>
+      </p:sp>
+      <p:sp>
+        <p:nvSpPr>
+          <p:cNvPr id="37" name="Rectangle 36"/>
+          <p:cNvSpPr/>
+          <p:nvPr/>
+        </p:nvSpPr>
+        <p:spPr>
+          <a:xfrm>
+            <a:off x="1956816" y="3767328"/>
+            <a:ext cx="329184" cy="329184"/>
+          </a:xfrm>
+          <a:prstGeom prst="rect">
+            <a:avLst/>
+          </a:prstGeom>
+          <a:solidFill>
+            <a:srgbClr val="A8DC98"/>
+          </a:solidFill>
+          <a:ln>
+            <a:noFill/>
+          </a:ln>
+          <a:effectLst/>
+        </p:spPr>
+        <p:style>
+          <a:lnRef idx="1">
+            <a:schemeClr val="accent1"/>
+          </a:lnRef>
+          <a:fillRef idx="3">
+            <a:schemeClr val="accent1"/>
+          </a:fillRef>
+          <a:effectRef idx="2">
+            <a:schemeClr val="accent1"/>
+          </a:effectRef>
+          <a:fontRef idx="minor">
+            <a:schemeClr val="lt1"/>
+          </a:fontRef>
+        </p:style>
+        <p:txBody>
+          <a:bodyPr rtlCol="0" anchor="ctr"/>
+          <a:lstStyle/>
+          <a:p>
+            <a:pPr algn="ctr"/>
+          </a:p>
+        </p:txBody>
+      </p:sp>
+      <p:sp>
+        <p:nvSpPr>
+          <p:cNvPr id="38" name="Rectangle 37"/>
+          <p:cNvSpPr/>
+          <p:nvPr/>
+        </p:nvSpPr>
+        <p:spPr>
+          <a:xfrm>
+            <a:off x="2377440" y="3767328"/>
+            <a:ext cx="329184" cy="329184"/>
+          </a:xfrm>
+          <a:prstGeom prst="rect">
+            <a:avLst/>
+          </a:prstGeom>
+          <a:solidFill>
+            <a:srgbClr val="A8DC98"/>
+          </a:solidFill>
+          <a:ln>
+            <a:noFill/>
+          </a:ln>
+          <a:effectLst/>
+        </p:spPr>
+        <p:style>
+          <a:lnRef idx="1">
+            <a:schemeClr val="accent1"/>
+          </a:lnRef>
+          <a:fillRef idx="3">
+            <a:schemeClr val="accent1"/>
+          </a:fillRef>
+          <a:effectRef idx="2">
+            <a:schemeClr val="accent1"/>
+          </a:effectRef>
+          <a:fontRef idx="minor">
+            <a:schemeClr val="lt1"/>
+          </a:fontRef>
+        </p:style>
+        <p:txBody>
+          <a:bodyPr rtlCol="0" anchor="ctr"/>
+          <a:lstStyle/>
+          <a:p>
+            <a:pPr algn="ctr"/>
+          </a:p>
+        </p:txBody>
+      </p:sp>
+      <p:sp>
+        <p:nvSpPr>
+          <p:cNvPr id="39" name="Rectangle 38"/>
+          <p:cNvSpPr/>
+          <p:nvPr/>
+        </p:nvSpPr>
+        <p:spPr>
+          <a:xfrm>
+            <a:off x="2798064" y="3767328"/>
+            <a:ext cx="329184" cy="329184"/>
+          </a:xfrm>
+          <a:prstGeom prst="rect">
+            <a:avLst/>
+          </a:prstGeom>
+          <a:solidFill>
+            <a:srgbClr val="A8DC98"/>
+          </a:solidFill>
+          <a:ln>
+            <a:noFill/>
+          </a:ln>
+          <a:effectLst/>
+        </p:spPr>
+        <p:style>
+          <a:lnRef idx="1">
+            <a:schemeClr val="accent1"/>
+          </a:lnRef>
+          <a:fillRef idx="3">
+            <a:schemeClr val="accent1"/>
+          </a:fillRef>
+          <a:effectRef idx="2">
+            <a:schemeClr val="accent1"/>
+          </a:effectRef>
+          <a:fontRef idx="minor">
+            <a:schemeClr val="lt1"/>
+          </a:fontRef>
+        </p:style>
+        <p:txBody>
+          <a:bodyPr rtlCol="0" anchor="ctr"/>
+          <a:lstStyle/>
+          <a:p>
+            <a:pPr algn="ctr"/>
+          </a:p>
+        </p:txBody>
+      </p:sp>
+      <p:sp>
+        <p:nvSpPr>
+          <p:cNvPr id="40" name="Rectangle 39"/>
+          <p:cNvSpPr/>
+          <p:nvPr/>
+        </p:nvSpPr>
+        <p:spPr>
+          <a:xfrm>
+            <a:off x="3218688" y="3767328"/>
+            <a:ext cx="329184" cy="329184"/>
+          </a:xfrm>
+          <a:prstGeom prst="rect">
+            <a:avLst/>
+          </a:prstGeom>
+          <a:solidFill>
+            <a:srgbClr val="A8DC98"/>
+          </a:solidFill>
+          <a:ln>
+            <a:noFill/>
+          </a:ln>
+          <a:effectLst/>
+        </p:spPr>
+        <p:style>
+          <a:lnRef idx="1">
+            <a:schemeClr val="accent1"/>
+          </a:lnRef>
+          <a:fillRef idx="3">
+            <a:schemeClr val="accent1"/>
+          </a:fillRef>
+          <a:effectRef idx="2">
+            <a:schemeClr val="accent1"/>
+          </a:effectRef>
+          <a:fontRef idx="minor">
+            <a:schemeClr val="lt1"/>
+          </a:fontRef>
+        </p:style>
+        <p:txBody>
+          <a:bodyPr rtlCol="0" anchor="ctr"/>
+          <a:lstStyle/>
+          <a:p>
+            <a:pPr algn="ctr"/>
+          </a:p>
+        </p:txBody>
+      </p:sp>
+      <p:sp>
+        <p:nvSpPr>
+          <p:cNvPr id="41" name="Rectangle 40"/>
+          <p:cNvSpPr/>
+          <p:nvPr/>
+        </p:nvSpPr>
+        <p:spPr>
+          <a:xfrm>
+            <a:off x="3639312" y="3767328"/>
+            <a:ext cx="329184" cy="329184"/>
+          </a:xfrm>
+          <a:prstGeom prst="rect">
+            <a:avLst/>
+          </a:prstGeom>
+          <a:solidFill>
+            <a:srgbClr val="A8DC98"/>
+          </a:solidFill>
+          <a:ln>
+            <a:noFill/>
+          </a:ln>
+          <a:effectLst/>
+        </p:spPr>
+        <p:style>
+          <a:lnRef idx="1">
+            <a:schemeClr val="accent1"/>
+          </a:lnRef>
+          <a:fillRef idx="3">
+            <a:schemeClr val="accent1"/>
+          </a:fillRef>
+          <a:effectRef idx="2">
+            <a:schemeClr val="accent1"/>
+          </a:effectRef>
+          <a:fontRef idx="minor">
+            <a:schemeClr val="lt1"/>
+          </a:fontRef>
+        </p:style>
+        <p:txBody>
+          <a:bodyPr rtlCol="0" anchor="ctr"/>
+          <a:lstStyle/>
+          <a:p>
+            <a:pPr algn="ctr"/>
+          </a:p>
+        </p:txBody>
+      </p:sp>
+      <p:sp>
+        <p:nvSpPr>
+          <p:cNvPr id="42" name="Rectangle 41"/>
+          <p:cNvSpPr/>
+          <p:nvPr/>
+        </p:nvSpPr>
+        <p:spPr>
+          <a:xfrm>
+            <a:off x="4059936" y="3767328"/>
+            <a:ext cx="329184" cy="329184"/>
+          </a:xfrm>
+          <a:prstGeom prst="rect">
+            <a:avLst/>
+          </a:prstGeom>
+          <a:solidFill>
+            <a:srgbClr val="A8DC98"/>
+          </a:solidFill>
+          <a:ln>
+            <a:noFill/>
+          </a:ln>
+          <a:effectLst/>
+        </p:spPr>
+        <p:style>
+          <a:lnRef idx="1">
+            <a:schemeClr val="accent1"/>
+          </a:lnRef>
+          <a:fillRef idx="3">
+            <a:schemeClr val="accent1"/>
+          </a:fillRef>
+          <a:effectRef idx="2">
+            <a:schemeClr val="accent1"/>
+          </a:effectRef>
+          <a:fontRef idx="minor">
+            <a:schemeClr val="lt1"/>
+          </a:fontRef>
+        </p:style>
+        <p:txBody>
+          <a:bodyPr rtlCol="0" anchor="ctr"/>
+          <a:lstStyle/>
+          <a:p>
+            <a:pPr algn="ctr"/>
+          </a:p>
+        </p:txBody>
+      </p:sp>
+      <p:sp>
+        <p:nvSpPr>
+          <p:cNvPr id="43" name="Rectangle 42"/>
+          <p:cNvSpPr/>
+          <p:nvPr/>
+        </p:nvSpPr>
+        <p:spPr>
+          <a:xfrm>
+            <a:off x="4480560" y="3767328"/>
+            <a:ext cx="329184" cy="329184"/>
+          </a:xfrm>
+          <a:prstGeom prst="rect">
+            <a:avLst/>
+          </a:prstGeom>
+          <a:solidFill>
+            <a:srgbClr val="A8DC98"/>
+          </a:solidFill>
+          <a:ln>
+            <a:noFill/>
+          </a:ln>
+          <a:effectLst/>
+        </p:spPr>
+        <p:style>
+          <a:lnRef idx="1">
+            <a:schemeClr val="accent1"/>
+          </a:lnRef>
+          <a:fillRef idx="3">
+            <a:schemeClr val="accent1"/>
+          </a:fillRef>
+          <a:effectRef idx="2">
+            <a:schemeClr val="accent1"/>
+          </a:effectRef>
+          <a:fontRef idx="minor">
+            <a:schemeClr val="lt1"/>
+          </a:fontRef>
+        </p:style>
+        <p:txBody>
+          <a:bodyPr rtlCol="0" anchor="ctr"/>
+          <a:lstStyle/>
+          <a:p>
+            <a:pPr algn="ctr"/>
+          </a:p>
+        </p:txBody>
+      </p:sp>
+      <p:sp>
+        <p:nvSpPr>
+          <p:cNvPr id="44" name="Rectangle 43"/>
+          <p:cNvSpPr/>
+          <p:nvPr/>
+        </p:nvSpPr>
+        <p:spPr>
+          <a:xfrm>
+            <a:off x="4901184" y="3767328"/>
+            <a:ext cx="329184" cy="329184"/>
+          </a:xfrm>
+          <a:prstGeom prst="rect">
+            <a:avLst/>
+          </a:prstGeom>
+          <a:solidFill>
+            <a:srgbClr val="A8DC98"/>
+          </a:solidFill>
+          <a:ln>
+            <a:noFill/>
+          </a:ln>
+          <a:effectLst/>
+        </p:spPr>
+        <p:style>
+          <a:lnRef idx="1">
+            <a:schemeClr val="accent1"/>
+          </a:lnRef>
+          <a:fillRef idx="3">
+            <a:schemeClr val="accent1"/>
+          </a:fillRef>
+          <a:effectRef idx="2">
+            <a:schemeClr val="accent1"/>
+          </a:effectRef>
+          <a:fontRef idx="minor">
+            <a:schemeClr val="lt1"/>
+          </a:fontRef>
+        </p:style>
+        <p:txBody>
+          <a:bodyPr rtlCol="0" anchor="ctr"/>
+          <a:lstStyle/>
+          <a:p>
+            <a:pPr algn="ctr"/>
+          </a:p>
+        </p:txBody>
+      </p:sp>
+      <p:sp>
+        <p:nvSpPr>
+          <p:cNvPr id="45" name="Rectangle 44"/>
+          <p:cNvSpPr/>
+          <p:nvPr/>
+        </p:nvSpPr>
+        <p:spPr>
+          <a:xfrm>
+            <a:off x="5321808" y="3767328"/>
+            <a:ext cx="329184" cy="329184"/>
+          </a:xfrm>
+          <a:prstGeom prst="rect">
+            <a:avLst/>
+          </a:prstGeom>
+          <a:solidFill>
+            <a:srgbClr val="EB5757"/>
+          </a:solidFill>
+          <a:ln>
+            <a:noFill/>
+          </a:ln>
+          <a:effectLst/>
+        </p:spPr>
+        <p:style>
+          <a:lnRef idx="1">
+            <a:schemeClr val="accent1"/>
+          </a:lnRef>
+          <a:fillRef idx="3">
+            <a:schemeClr val="accent1"/>
+          </a:fillRef>
+          <a:effectRef idx="2">
+            <a:schemeClr val="accent1"/>
+          </a:effectRef>
+          <a:fontRef idx="minor">
+            <a:schemeClr val="lt1"/>
+          </a:fontRef>
+        </p:style>
+        <p:txBody>
+          <a:bodyPr rtlCol="0" anchor="ctr"/>
+          <a:lstStyle/>
+          <a:p>
+            <a:pPr algn="ctr"/>
+          </a:p>
+        </p:txBody>
+      </p:sp>
+      <p:sp>
+        <p:nvSpPr>
+          <p:cNvPr id="46" name="Rectangle 45"/>
+          <p:cNvSpPr/>
+          <p:nvPr/>
+        </p:nvSpPr>
+        <p:spPr>
+          <a:xfrm>
+            <a:off x="5742432" y="3767328"/>
+            <a:ext cx="329184" cy="329184"/>
+          </a:xfrm>
+          <a:prstGeom prst="rect">
+            <a:avLst/>
+          </a:prstGeom>
+          <a:solidFill>
+            <a:srgbClr val="EB5757"/>
+          </a:solidFill>
+          <a:ln>
+            <a:noFill/>
+          </a:ln>
+          <a:effectLst/>
+        </p:spPr>
+        <p:style>
+          <a:lnRef idx="1">
+            <a:schemeClr val="accent1"/>
+          </a:lnRef>
+          <a:fillRef idx="3">
+            <a:schemeClr val="accent1"/>
+          </a:fillRef>
+          <a:effectRef idx="2">
+            <a:schemeClr val="accent1"/>
+          </a:effectRef>
+          <a:fontRef idx="minor">
+            <a:schemeClr val="lt1"/>
+          </a:fontRef>
+        </p:style>
+        <p:txBody>
+          <a:bodyPr rtlCol="0" anchor="ctr"/>
+          <a:lstStyle/>
+          <a:p>
+            <a:pPr algn="ctr"/>
+          </a:p>
+        </p:txBody>
+      </p:sp>
+      <p:sp>
+        <p:nvSpPr>
+          <p:cNvPr id="47" name="Rectangle 46"/>
+          <p:cNvSpPr/>
+          <p:nvPr/>
+        </p:nvSpPr>
+        <p:spPr>
+          <a:xfrm>
+            <a:off x="6163056" y="3767328"/>
+            <a:ext cx="329184" cy="329184"/>
+          </a:xfrm>
+          <a:prstGeom prst="rect">
+            <a:avLst/>
+          </a:prstGeom>
+          <a:solidFill>
+            <a:srgbClr val="EB5757"/>
+          </a:solidFill>
+          <a:ln>
+            <a:noFill/>
+          </a:ln>
+          <a:effectLst/>
+        </p:spPr>
+        <p:style>
+          <a:lnRef idx="1">
+            <a:schemeClr val="accent1"/>
+          </a:lnRef>
+          <a:fillRef idx="3">
+            <a:schemeClr val="accent1"/>
+          </a:fillRef>
+          <a:effectRef idx="2">
+            <a:schemeClr val="accent1"/>
+          </a:effectRef>
+          <a:fontRef idx="minor">
+            <a:schemeClr val="lt1"/>
+          </a:fontRef>
+        </p:style>
+        <p:txBody>
+          <a:bodyPr rtlCol="0" anchor="ctr"/>
+          <a:lstStyle/>
+          <a:p>
+            <a:pPr algn="ctr"/>
+          </a:p>
+        </p:txBody>
+      </p:sp>
+      <p:sp>
+        <p:nvSpPr>
+          <p:cNvPr id="48" name="Rectangle 47"/>
+          <p:cNvSpPr/>
+          <p:nvPr/>
+        </p:nvSpPr>
+        <p:spPr>
+          <a:xfrm>
+            <a:off x="6583680" y="3767328"/>
+            <a:ext cx="329184" cy="329184"/>
+          </a:xfrm>
+          <a:prstGeom prst="rect">
+            <a:avLst/>
+          </a:prstGeom>
+          <a:solidFill>
+            <a:srgbClr val="EB5757"/>
+          </a:solidFill>
+          <a:ln>
+            <a:noFill/>
+          </a:ln>
+          <a:effectLst/>
+        </p:spPr>
+        <p:style>
+          <a:lnRef idx="1">
+            <a:schemeClr val="accent1"/>
+          </a:lnRef>
+          <a:fillRef idx="3">
+            <a:schemeClr val="accent1"/>
+          </a:fillRef>
+          <a:effectRef idx="2">
+            <a:schemeClr val="accent1"/>
+          </a:effectRef>
+          <a:fontRef idx="minor">
+            <a:schemeClr val="lt1"/>
+          </a:fontRef>
+        </p:style>
+        <p:txBody>
+          <a:bodyPr rtlCol="0" anchor="ctr"/>
+          <a:lstStyle/>
+          <a:p>
+            <a:pPr algn="ctr"/>
+          </a:p>
+        </p:txBody>
+      </p:sp>
+      <p:sp>
+        <p:nvSpPr>
+          <p:cNvPr id="49" name="Rectangle 48"/>
+          <p:cNvSpPr/>
+          <p:nvPr/>
+        </p:nvSpPr>
+        <p:spPr>
+          <a:xfrm>
+            <a:off x="1115568" y="4919472"/>
+            <a:ext cx="146304" cy="146304"/>
+          </a:xfrm>
+          <a:prstGeom prst="rect">
+            <a:avLst/>
+          </a:prstGeom>
+          <a:solidFill>
+            <a:srgbClr val="43B02A"/>
+          </a:solidFill>
+          <a:ln>
+            <a:noFill/>
+          </a:ln>
+          <a:effectLst/>
+        </p:spPr>
+        <p:style>
+          <a:lnRef idx="1">
+            <a:schemeClr val="accent1"/>
+          </a:lnRef>
+          <a:fillRef idx="3">
+            <a:schemeClr val="accent1"/>
+          </a:fillRef>
+          <a:effectRef idx="2">
+            <a:schemeClr val="accent1"/>
+          </a:effectRef>
+          <a:fontRef idx="minor">
+            <a:schemeClr val="lt1"/>
+          </a:fontRef>
+        </p:style>
+        <p:txBody>
+          <a:bodyPr rtlCol="0" anchor="ctr"/>
+          <a:lstStyle/>
+          <a:p>
+            <a:pPr algn="ctr"/>
+          </a:p>
+        </p:txBody>
+      </p:sp>
+      <p:sp>
+        <p:nvSpPr>
+          <p:cNvPr id="50" name="TextBox 49"/>
+          <p:cNvSpPr txBox="1"/>
+          <p:nvPr/>
+        </p:nvSpPr>
+        <p:spPr>
+          <a:xfrm>
+            <a:off x="1353312" y="4892040"/>
+            <a:ext cx="2651760" cy="228600"/>
+          </a:xfrm>
+          <a:prstGeom prst="rect">
+            <a:avLst/>
+          </a:prstGeom>
+          <a:noFill/>
+        </p:spPr>
+        <p:txBody>
+          <a:bodyPr wrap="square" lIns="0" rIns="0" tIns="0" bIns="0">
+            <a:spAutoFit/>
+          </a:bodyPr>
+          <a:lstStyle/>
+          <a:p>
+            <a:pPr algn="l">
+              <a:lnSpc>
+                <a:spcPct val="132000"/>
+              </a:lnSpc>
+            </a:pPr>
+            <a:r>
+              <a:rPr sz="1200" b="0">
+                <a:solidFill>
+                  <a:srgbClr val="6B7280"/>
+                </a:solidFill>
+                <a:latin typeface="Inter Tight"/>
+              </a:rPr>
+              <a:t>18 — точно</a:t>
+            </a:r>
+          </a:p>
+        </p:txBody>
+      </p:sp>
+      <p:sp>
+        <p:nvSpPr>
+          <p:cNvPr id="51" name="Rectangle 50"/>
+          <p:cNvSpPr/>
+          <p:nvPr/>
+        </p:nvSpPr>
+        <p:spPr>
+          <a:xfrm>
+            <a:off x="3995928" y="4919472"/>
+            <a:ext cx="146304" cy="146304"/>
+          </a:xfrm>
+          <a:prstGeom prst="rect">
+            <a:avLst/>
+          </a:prstGeom>
+          <a:solidFill>
+            <a:srgbClr val="A8DC98"/>
+          </a:solidFill>
+          <a:ln>
+            <a:noFill/>
+          </a:ln>
+          <a:effectLst/>
+        </p:spPr>
+        <p:style>
+          <a:lnRef idx="1">
+            <a:schemeClr val="accent1"/>
+          </a:lnRef>
+          <a:fillRef idx="3">
+            <a:schemeClr val="accent1"/>
+          </a:fillRef>
+          <a:effectRef idx="2">
+            <a:schemeClr val="accent1"/>
+          </a:effectRef>
+          <a:fontRef idx="minor">
+            <a:schemeClr val="lt1"/>
+          </a:fontRef>
+        </p:style>
+        <p:txBody>
+          <a:bodyPr rtlCol="0" anchor="ctr"/>
+          <a:lstStyle/>
+          <a:p>
+            <a:pPr algn="ctr"/>
+          </a:p>
+        </p:txBody>
+      </p:sp>
+      <p:sp>
+        <p:nvSpPr>
+          <p:cNvPr id="52" name="TextBox 51"/>
+          <p:cNvSpPr txBox="1"/>
+          <p:nvPr/>
+        </p:nvSpPr>
+        <p:spPr>
+          <a:xfrm>
+            <a:off x="4233672" y="4892040"/>
+            <a:ext cx="2651760" cy="228600"/>
+          </a:xfrm>
+          <a:prstGeom prst="rect">
+            <a:avLst/>
+          </a:prstGeom>
+          <a:noFill/>
+        </p:spPr>
+        <p:txBody>
+          <a:bodyPr wrap="square" lIns="0" rIns="0" tIns="0" bIns="0">
+            <a:spAutoFit/>
+          </a:bodyPr>
+          <a:lstStyle/>
+          <a:p>
+            <a:pPr algn="l">
+              <a:lnSpc>
+                <a:spcPct val="132000"/>
+              </a:lnSpc>
+            </a:pPr>
+            <a:r>
+              <a:rPr sz="1200" b="0">
+                <a:solidFill>
+                  <a:srgbClr val="6B7280"/>
+                </a:solidFill>
+                <a:latin typeface="Inter Tight"/>
+              </a:rPr>
+              <a:t>20 — на ступень</a:t>
+            </a:r>
+          </a:p>
+        </p:txBody>
+      </p:sp>
+      <p:sp>
+        <p:nvSpPr>
+          <p:cNvPr id="53" name="Rectangle 52"/>
+          <p:cNvSpPr/>
+          <p:nvPr/>
+        </p:nvSpPr>
+        <p:spPr>
+          <a:xfrm>
+            <a:off x="6876288" y="4919472"/>
+            <a:ext cx="146304" cy="146304"/>
+          </a:xfrm>
+          <a:prstGeom prst="rect">
+            <a:avLst/>
+          </a:prstGeom>
+          <a:solidFill>
+            <a:srgbClr val="EB5757"/>
+          </a:solidFill>
+          <a:ln>
+            <a:noFill/>
+          </a:ln>
+          <a:effectLst/>
+        </p:spPr>
+        <p:style>
+          <a:lnRef idx="1">
+            <a:schemeClr val="accent1"/>
+          </a:lnRef>
+          <a:fillRef idx="3">
+            <a:schemeClr val="accent1"/>
+          </a:fillRef>
+          <a:effectRef idx="2">
+            <a:schemeClr val="accent1"/>
+          </a:effectRef>
+          <a:fontRef idx="minor">
+            <a:schemeClr val="lt1"/>
+          </a:fontRef>
+        </p:style>
+        <p:txBody>
+          <a:bodyPr rtlCol="0" anchor="ctr"/>
+          <a:lstStyle/>
+          <a:p>
+            <a:pPr algn="ctr"/>
+          </a:p>
+        </p:txBody>
+      </p:sp>
+      <p:sp>
+        <p:nvSpPr>
+          <p:cNvPr id="54" name="TextBox 53"/>
+          <p:cNvSpPr txBox="1"/>
+          <p:nvPr/>
+        </p:nvSpPr>
+        <p:spPr>
+          <a:xfrm>
+            <a:off x="7114032" y="4892040"/>
+            <a:ext cx="2651760" cy="228600"/>
+          </a:xfrm>
+          <a:prstGeom prst="rect">
+            <a:avLst/>
+          </a:prstGeom>
+          <a:noFill/>
+        </p:spPr>
+        <p:txBody>
+          <a:bodyPr wrap="square" lIns="0" rIns="0" tIns="0" bIns="0">
+            <a:spAutoFit/>
+          </a:bodyPr>
+          <a:lstStyle/>
+          <a:p>
+            <a:pPr algn="l">
+              <a:lnSpc>
+                <a:spcPct val="132000"/>
+              </a:lnSpc>
+            </a:pPr>
+            <a:r>
+              <a:rPr sz="1200" b="0">
+                <a:solidFill>
+                  <a:srgbClr val="6B7280"/>
+                </a:solidFill>
+                <a:latin typeface="Inter Tight"/>
+              </a:rPr>
+              <a:t>4 — дальше</a:t>
+            </a:r>
+          </a:p>
+        </p:txBody>
+      </p:sp>
+      <p:sp>
+        <p:nvSpPr>
+          <p:cNvPr id="55" name="Rounded Rectangle 54"/>
+          <p:cNvSpPr/>
+          <p:nvPr/>
+        </p:nvSpPr>
+        <p:spPr>
+          <a:xfrm>
+            <a:off x="8046720" y="2240280"/>
+            <a:ext cx="3474720" cy="1481328"/>
+          </a:xfrm>
+          <a:prstGeom prst="roundRect">
+            <a:avLst>
+              <a:gd name="adj" fmla="val 4500"/>
+            </a:avLst>
+          </a:prstGeom>
+          <a:solidFill>
+            <a:srgbClr val="23282E"/>
+          </a:solidFill>
+          <a:ln>
+            <a:noFill/>
+          </a:ln>
+          <a:effectLst/>
+        </p:spPr>
+        <p:style>
+          <a:lnRef idx="1">
+            <a:schemeClr val="accent1"/>
+          </a:lnRef>
+          <a:fillRef idx="3">
+            <a:schemeClr val="accent1"/>
+          </a:fillRef>
+          <a:effectRef idx="2">
+            <a:schemeClr val="accent1"/>
+          </a:effectRef>
+          <a:fontRef idx="minor">
+            <a:schemeClr val="lt1"/>
+          </a:fontRef>
+        </p:style>
+        <p:txBody>
+          <a:bodyPr rtlCol="0" anchor="ctr"/>
+          <a:lstStyle/>
+          <a:p>
+            <a:pPr algn="ctr"/>
+          </a:p>
+        </p:txBody>
+      </p:sp>
+      <p:sp>
+        <p:nvSpPr>
+          <p:cNvPr id="56" name="TextBox 55"/>
+          <p:cNvSpPr txBox="1"/>
+          <p:nvPr/>
+        </p:nvSpPr>
+        <p:spPr>
+          <a:xfrm>
+            <a:off x="8366760" y="2468880"/>
+            <a:ext cx="2926080" cy="731520"/>
+          </a:xfrm>
+          <a:prstGeom prst="rect">
+            <a:avLst/>
+          </a:prstGeom>
+          <a:noFill/>
+        </p:spPr>
+        <p:txBody>
+          <a:bodyPr wrap="square" lIns="0" rIns="0" tIns="0" bIns="0">
+            <a:spAutoFit/>
+          </a:bodyPr>
+          <a:lstStyle/>
+          <a:p>
+            <a:pPr algn="l">
+              <a:lnSpc>
+                <a:spcPct val="100000"/>
+              </a:lnSpc>
+            </a:pPr>
+            <a:r>
+              <a:rPr sz="4000" b="1">
+                <a:solidFill>
+                  <a:srgbClr val="43B02A"/>
+                </a:solidFill>
+                <a:latin typeface="Inter Tight"/>
+              </a:rPr>
+              <a:t>42 / 42</a:t>
+            </a:r>
+          </a:p>
+        </p:txBody>
+      </p:sp>
+      <p:sp>
+        <p:nvSpPr>
+          <p:cNvPr id="57" name="TextBox 56"/>
+          <p:cNvSpPr txBox="1"/>
+          <p:nvPr/>
+        </p:nvSpPr>
+        <p:spPr>
+          <a:xfrm>
+            <a:off x="8366760" y="3127248"/>
+            <a:ext cx="2926080" cy="457200"/>
           </a:xfrm>
           <a:prstGeom prst="rect">
             <a:avLst/>
@@ -5679,36 +7965,36 @@
             <a:r>
               <a:rPr sz="1250" b="0">
                 <a:solidFill>
-                  <a:srgbClr val="6B7280"/>
+                  <a:srgbClr val="8B949E"/>
                 </a:solidFill>
                 <a:latin typeface="Inter Tight"/>
               </a:rPr>
-              <a:t>Стадия «Обсуждение» помечена неприменимой, а не непройденной: российские акты стадии пропускают, и линейная шкала без этого состояния лжёт.</a:t>
-            </a:r>
-          </a:p>
-        </p:txBody>
-      </p:sp>
-      <p:sp>
-        <p:nvSpPr>
-          <p:cNvPr id="6" name="Rectangle 5"/>
+              <a:t>формула сходится с Excel заказчика точно</a:t>
+            </a:r>
+          </a:p>
+        </p:txBody>
+      </p:sp>
+      <p:sp>
+        <p:nvSpPr>
+          <p:cNvPr id="58" name="Rounded Rectangle 57"/>
           <p:cNvSpPr/>
           <p:nvPr/>
         </p:nvSpPr>
         <p:spPr>
           <a:xfrm>
-            <a:off x="1542135" y="1709928"/>
-            <a:ext cx="9107424" cy="4543653"/>
-          </a:xfrm>
-          <a:prstGeom prst="rect">
-            <a:avLst/>
+            <a:off x="8046720" y="3959352"/>
+            <a:ext cx="3474720" cy="1481328"/>
+          </a:xfrm>
+          <a:prstGeom prst="roundRect">
+            <a:avLst>
+              <a:gd name="adj" fmla="val 4500"/>
+            </a:avLst>
           </a:prstGeom>
           <a:solidFill>
-            <a:srgbClr val="FFFFFF"/>
+            <a:srgbClr val="1B1F24"/>
           </a:solidFill>
-          <a:ln w="9525">
-            <a:solidFill>
-              <a:srgbClr val="D9D9D9"/>
-            </a:solidFill>
+          <a:ln>
+            <a:noFill/>
           </a:ln>
           <a:effectLst/>
         </p:spPr>
@@ -5734,33 +8020,135 @@
           </a:p>
         </p:txBody>
       </p:sp>
-      <p:pic>
-        <p:nvPicPr>
-          <p:cNvPr id="7" name="Picture 6" descr="shot_act.jpg"/>
-          <p:cNvPicPr>
-            <a:picLocks noChangeAspect="1"/>
-          </p:cNvPicPr>
-          <p:nvPr/>
-        </p:nvPicPr>
-        <p:blipFill>
-          <a:blip r:embed="rId2"/>
-          <a:stretch>
-            <a:fillRect/>
-          </a:stretch>
-        </p:blipFill>
-        <p:spPr>
-          <a:xfrm>
-            <a:off x="1569567" y="1737360"/>
-            <a:ext cx="9052560" cy="4488789"/>
-          </a:xfrm>
-          <a:prstGeom prst="rect">
-            <a:avLst/>
-          </a:prstGeom>
-        </p:spPr>
-      </p:pic>
-      <p:sp>
-        <p:nvSpPr>
-          <p:cNvPr id="8" name="TextBox 7"/>
+      <p:sp>
+        <p:nvSpPr>
+          <p:cNvPr id="59" name="TextBox 58"/>
+          <p:cNvSpPr txBox="1"/>
+          <p:nvPr/>
+        </p:nvSpPr>
+        <p:spPr>
+          <a:xfrm>
+            <a:off x="8366760" y="4187952"/>
+            <a:ext cx="2926080" cy="731520"/>
+          </a:xfrm>
+          <a:prstGeom prst="rect">
+            <a:avLst/>
+          </a:prstGeom>
+          <a:noFill/>
+        </p:spPr>
+        <p:txBody>
+          <a:bodyPr wrap="square" lIns="0" rIns="0" tIns="0" bIns="0">
+            <a:spAutoFit/>
+          </a:bodyPr>
+          <a:lstStyle/>
+          <a:p>
+            <a:pPr algn="l">
+              <a:lnSpc>
+                <a:spcPct val="100000"/>
+              </a:lnSpc>
+            </a:pPr>
+            <a:r>
+              <a:rPr sz="4000" b="1">
+                <a:solidFill>
+                  <a:srgbClr val="EB5757"/>
+                </a:solidFill>
+                <a:latin typeface="Inter Tight"/>
+              </a:rPr>
+              <a:t>1</a:t>
+            </a:r>
+          </a:p>
+        </p:txBody>
+      </p:sp>
+      <p:sp>
+        <p:nvSpPr>
+          <p:cNvPr id="60" name="TextBox 59"/>
+          <p:cNvSpPr txBox="1"/>
+          <p:nvPr/>
+        </p:nvSpPr>
+        <p:spPr>
+          <a:xfrm>
+            <a:off x="8366760" y="4846320"/>
+            <a:ext cx="2926080" cy="457200"/>
+          </a:xfrm>
+          <a:prstGeom prst="rect">
+            <a:avLst/>
+          </a:prstGeom>
+          <a:noFill/>
+        </p:spPr>
+        <p:txBody>
+          <a:bodyPr wrap="square" lIns="0" rIns="0" tIns="0" bIns="0">
+            <a:spAutoFit/>
+          </a:bodyPr>
+          <a:lstStyle/>
+          <a:p>
+            <a:pPr algn="l">
+              <a:lnSpc>
+                <a:spcPct val="140000"/>
+              </a:lnSpc>
+            </a:pPr>
+            <a:r>
+              <a:rPr sz="1250" b="0">
+                <a:solidFill>
+                  <a:srgbClr val="8B949E"/>
+                </a:solidFill>
+                <a:latin typeface="Inter Tight"/>
+              </a:rPr>
+              <a:t>провал важного в нижние категории при цели ноль</a:t>
+            </a:r>
+          </a:p>
+        </p:txBody>
+      </p:sp>
+      <p:sp>
+        <p:nvSpPr>
+          <p:cNvPr id="61" name="TextBox 60"/>
+          <p:cNvSpPr txBox="1"/>
+          <p:nvPr/>
+        </p:nvSpPr>
+        <p:spPr>
+          <a:xfrm>
+            <a:off x="731520" y="5715000"/>
+            <a:ext cx="10515600" cy="548640"/>
+          </a:xfrm>
+          <a:prstGeom prst="rect">
+            <a:avLst/>
+          </a:prstGeom>
+          <a:noFill/>
+        </p:spPr>
+        <p:txBody>
+          <a:bodyPr wrap="square" lIns="0" rIns="0" tIns="0" bIns="0">
+            <a:spAutoFit/>
+          </a:bodyPr>
+          <a:lstStyle/>
+          <a:p>
+            <a:pPr algn="l">
+              <a:lnSpc>
+                <a:spcPct val="145000"/>
+              </a:lnSpc>
+            </a:pPr>
+            <a:r>
+              <a:rPr sz="1400" b="1">
+                <a:solidFill>
+                  <a:srgbClr val="F2F4F3"/>
+                </a:solidFill>
+                <a:latin typeface="Inter Tight"/>
+              </a:rPr>
+              <a:t>Клетки — это модель. </a:t>
+            </a:r>
+            <a:r>
+              <a:rPr sz="1400" b="0">
+                <a:solidFill>
+                  <a:srgbClr val="8B949E"/>
+                </a:solidFill>
+                <a:latin typeface="Inter Tight"/>
+              </a:rPr>
+              <a:t>Она сама выставила баллы. «42 из 42» — это про формулу: получив экспертные баллы, код выдаёт тот же индекс. Путать эти два числа нельзя.</a:t>
+            </a:r>
+          </a:p>
+        </p:txBody>
+      </p:sp>
+      <p:sp>
+        <p:nvSpPr>
+          <p:cNvPr id="62" name="TextBox 61"/>
           <p:cNvSpPr txBox="1"/>
           <p:nvPr/>
         </p:nvSpPr>
@@ -5788,18 +8176,18 @@
             <a:r>
               <a:rPr sz="950" b="0">
                 <a:solidFill>
-                  <a:srgbClr val="9AA1AB"/>
+                  <a:srgbClr val="8B949E"/>
                 </a:solidFill>
                 <a:latin typeface="Inter Tight"/>
               </a:rPr>
-              <a:t>FR-032 · FR-035</a:t>
-            </a:r>
-          </a:p>
-        </p:txBody>
-      </p:sp>
-      <p:sp>
-        <p:nvSpPr>
-          <p:cNvPr id="9" name="TextBox 8"/>
+              <a:t>evals/results.md · verify-formula</a:t>
+            </a:r>
+          </a:p>
+        </p:txBody>
+      </p:sp>
+      <p:sp>
+        <p:nvSpPr>
+          <p:cNvPr id="63" name="TextBox 62"/>
           <p:cNvSpPr txBox="1"/>
           <p:nvPr/>
         </p:nvSpPr>
@@ -5827,7 +8215,7 @@
             <a:r>
               <a:rPr sz="950" b="0">
                 <a:solidFill>
-                  <a:srgbClr val="9AA1AB"/>
+                  <a:srgbClr val="8B949E"/>
                 </a:solidFill>
                 <a:latin typeface="Inter Tight"/>
               </a:rPr>
@@ -5869,7 +8257,7 @@
             <a:avLst/>
           </a:prstGeom>
           <a:solidFill>
-            <a:srgbClr val="F9F9F9"/>
+            <a:srgbClr val="101214"/>
           </a:solidFill>
           <a:ln>
             <a:noFill/>
@@ -5900,20 +8288,100 @@
       </p:sp>
       <p:sp>
         <p:nvSpPr>
-          <p:cNvPr id="3" name="Rectangle 2"/>
+          <p:cNvPr id="3" name="TextBox 2"/>
+          <p:cNvSpPr txBox="1"/>
+          <p:nvPr/>
+        </p:nvSpPr>
+        <p:spPr>
+          <a:xfrm>
+            <a:off x="731520" y="1051560"/>
+            <a:ext cx="10698480" cy="274320"/>
+          </a:xfrm>
+          <a:prstGeom prst="rect">
+            <a:avLst/>
+          </a:prstGeom>
+          <a:noFill/>
+        </p:spPr>
+        <p:txBody>
+          <a:bodyPr wrap="square" lIns="0" rIns="0" tIns="0" bIns="0">
+            <a:spAutoFit/>
+          </a:bodyPr>
+          <a:lstStyle/>
+          <a:p>
+            <a:pPr algn="l">
+              <a:lnSpc>
+                <a:spcPct val="132000"/>
+              </a:lnSpc>
+            </a:pPr>
+            <a:r>
+              <a:rPr sz="1100" b="1" spc="200">
+                <a:solidFill>
+                  <a:srgbClr val="EB5757"/>
+                </a:solidFill>
+                <a:latin typeface="Inter Tight"/>
+              </a:rPr>
+              <a:t>ЧЕСТНО</a:t>
+            </a:r>
+          </a:p>
+        </p:txBody>
+      </p:sp>
+      <p:sp>
+        <p:nvSpPr>
+          <p:cNvPr id="4" name="TextBox 3"/>
+          <p:cNvSpPr txBox="1"/>
+          <p:nvPr/>
+        </p:nvSpPr>
+        <p:spPr>
+          <a:xfrm>
+            <a:off x="731520" y="1463040"/>
+            <a:ext cx="10515600" cy="640080"/>
+          </a:xfrm>
+          <a:prstGeom prst="rect">
+            <a:avLst/>
+          </a:prstGeom>
+          <a:noFill/>
+        </p:spPr>
+        <p:txBody>
+          <a:bodyPr wrap="square" lIns="0" rIns="0" tIns="0" bIns="0">
+            <a:spAutoFit/>
+          </a:bodyPr>
+          <a:lstStyle/>
+          <a:p>
+            <a:pPr algn="l">
+              <a:lnSpc>
+                <a:spcPct val="132000"/>
+              </a:lnSpc>
+            </a:pPr>
+            <a:r>
+              <a:rPr sz="4200" b="1">
+                <a:solidFill>
+                  <a:srgbClr val="F2F4F3"/>
+                </a:solidFill>
+                <a:latin typeface="Inter Tight"/>
+              </a:rPr>
+              <a:t>Чего мы измерить не смогли</a:t>
+            </a:r>
+          </a:p>
+        </p:txBody>
+      </p:sp>
+      <p:sp>
+        <p:nvSpPr>
+          <p:cNvPr id="5" name="Rounded Rectangle 4"/>
           <p:cNvSpPr/>
           <p:nvPr/>
         </p:nvSpPr>
         <p:spPr>
           <a:xfrm>
-            <a:off x="731520" y="1371600"/>
-            <a:ext cx="50292" cy="822960"/>
-          </a:xfrm>
-          <a:prstGeom prst="rect">
-            <a:avLst/>
+            <a:off x="731520" y="2697480"/>
+            <a:ext cx="6858000" cy="2880360"/>
+          </a:xfrm>
+          <a:prstGeom prst="roundRect">
+            <a:avLst>
+              <a:gd name="adj" fmla="val 4500"/>
+            </a:avLst>
           </a:prstGeom>
           <a:solidFill>
-            <a:srgbClr val="43B02A"/>
+            <a:srgbClr val="23282E"/>
           </a:solidFill>
           <a:ln>
             <a:noFill/>
@@ -5944,54 +8412,14 @@
       </p:sp>
       <p:sp>
         <p:nvSpPr>
-          <p:cNvPr id="4" name="TextBox 3"/>
+          <p:cNvPr id="6" name="TextBox 5"/>
           <p:cNvSpPr txBox="1"/>
           <p:nvPr/>
         </p:nvSpPr>
         <p:spPr>
           <a:xfrm>
-            <a:off x="1115568" y="1325880"/>
-            <a:ext cx="10058400" cy="914400"/>
-          </a:xfrm>
-          <a:prstGeom prst="rect">
-            <a:avLst/>
-          </a:prstGeom>
-          <a:noFill/>
-        </p:spPr>
-        <p:txBody>
-          <a:bodyPr wrap="square" lIns="0" rIns="0" tIns="0" bIns="0">
-            <a:spAutoFit/>
-          </a:bodyPr>
-          <a:lstStyle/>
-          <a:p>
-            <a:pPr algn="l">
-              <a:lnSpc>
-                <a:spcPct val="116000"/>
-              </a:lnSpc>
-            </a:pPr>
-            <a:r>
-              <a:rPr sz="3400" b="1">
-                <a:solidFill>
-                  <a:srgbClr val="231F20"/>
-                </a:solidFill>
-                <a:latin typeface="Inter Tight"/>
-              </a:rPr>
-              <a:t>Обработка потока стоит дешевле,
-чем один пропущенный документ</a:t>
-            </a:r>
-          </a:p>
-        </p:txBody>
-      </p:sp>
-      <p:sp>
-        <p:nvSpPr>
-          <p:cNvPr id="5" name="TextBox 4"/>
-          <p:cNvSpPr txBox="1"/>
-          <p:nvPr/>
-        </p:nvSpPr>
-        <p:spPr>
-          <a:xfrm>
-            <a:off x="731520" y="3200400"/>
-            <a:ext cx="5486400" cy="274320"/>
+            <a:off x="1143000" y="3017520"/>
+            <a:ext cx="6035040" cy="365760"/>
           </a:xfrm>
           <a:prstGeom prst="rect">
             <a:avLst/>
@@ -6010,33 +8438,74 @@
               </a:lnSpc>
             </a:pPr>
             <a:r>
-              <a:rPr sz="1300" b="0">
-                <a:solidFill>
-                  <a:srgbClr val="6B7280"/>
+              <a:rPr sz="2400" b="1">
+                <a:solidFill>
+                  <a:srgbClr val="F2F4F3"/>
                 </a:solidFill>
                 <a:latin typeface="Inter Tight"/>
               </a:rPr>
-              <a:t>Год работы модели на потоке 150 материалов в сутки</a:t>
-            </a:r>
-          </a:p>
-        </p:txBody>
-      </p:sp>
-      <p:sp>
-        <p:nvSpPr>
-          <p:cNvPr id="6" name="Rectangle 5"/>
+              <a:t>Точность фильтрации</a:t>
+            </a:r>
+          </a:p>
+        </p:txBody>
+      </p:sp>
+      <p:sp>
+        <p:nvSpPr>
+          <p:cNvPr id="7" name="TextBox 6"/>
+          <p:cNvSpPr txBox="1"/>
+          <p:nvPr/>
+        </p:nvSpPr>
+        <p:spPr>
+          <a:xfrm>
+            <a:off x="1143000" y="3566160"/>
+            <a:ext cx="6035040" cy="1737360"/>
+          </a:xfrm>
+          <a:prstGeom prst="rect">
+            <a:avLst/>
+          </a:prstGeom>
+          <a:noFill/>
+        </p:spPr>
+        <p:txBody>
+          <a:bodyPr wrap="square" lIns="0" rIns="0" tIns="0" bIns="0">
+            <a:spAutoFit/>
+          </a:bodyPr>
+          <a:lstStyle/>
+          <a:p>
+            <a:pPr algn="l">
+              <a:lnSpc>
+                <a:spcPct val="150000"/>
+              </a:lnSpc>
+            </a:pPr>
+            <a:r>
+              <a:rPr sz="1450" b="0">
+                <a:solidFill>
+                  <a:srgbClr val="8B949E"/>
+                </a:solidFill>
+                <a:latin typeface="Inter Tight"/>
+              </a:rPr>
+              <a:t>В реестре заказчика нет ни одной нерелевантной карточки — сравнивать не с чем. Заявленные 80 % на таких данных неизмеримы в принципе: тривиальный классификатор «всё релевантно» даёт здесь 100 %. Нужен размеченный набор с отрицательными примерами; это открытый вопрос к заказчику.</a:t>
+            </a:r>
+          </a:p>
+        </p:txBody>
+      </p:sp>
+      <p:sp>
+        <p:nvSpPr>
+          <p:cNvPr id="8" name="Rounded Rectangle 7"/>
           <p:cNvSpPr/>
           <p:nvPr/>
         </p:nvSpPr>
         <p:spPr>
           <a:xfrm>
-            <a:off x="731520" y="3520440"/>
-            <a:ext cx="42245" cy="310896"/>
-          </a:xfrm>
-          <a:prstGeom prst="rect">
-            <a:avLst/>
+            <a:off x="8046720" y="2697480"/>
+            <a:ext cx="3474720" cy="1371600"/>
+          </a:xfrm>
+          <a:prstGeom prst="roundRect">
+            <a:avLst>
+              <a:gd name="adj" fmla="val 4500"/>
+            </a:avLst>
           </a:prstGeom>
           <a:solidFill>
-            <a:srgbClr val="43B02A"/>
+            <a:srgbClr val="1B1F24"/>
           </a:solidFill>
           <a:ln>
             <a:noFill/>
@@ -6067,14 +8536,14 @@
       </p:sp>
       <p:sp>
         <p:nvSpPr>
-          <p:cNvPr id="7" name="TextBox 6"/>
+          <p:cNvPr id="9" name="TextBox 8"/>
           <p:cNvSpPr txBox="1"/>
           <p:nvPr/>
         </p:nvSpPr>
         <p:spPr>
           <a:xfrm>
-            <a:off x="896112" y="3502152"/>
-            <a:ext cx="3657600" cy="320040"/>
+            <a:off x="8366760" y="2926080"/>
+            <a:ext cx="2926080" cy="274320"/>
           </a:xfrm>
           <a:prstGeom prst="rect">
             <a:avLst/>
@@ -6093,27 +8562,112 @@
               </a:lnSpc>
             </a:pPr>
             <a:r>
-              <a:rPr sz="1700" b="1">
-                <a:solidFill>
-                  <a:srgbClr val="379123"/>
+              <a:rPr sz="1500" b="1">
+                <a:solidFill>
+                  <a:srgbClr val="F2F4F3"/>
                 </a:solidFill>
                 <a:latin typeface="Inter Tight"/>
               </a:rPr>
-              <a:t>≈ 2 100 ₽</a:t>
-            </a:r>
-          </a:p>
-        </p:txBody>
-      </p:sp>
-      <p:sp>
-        <p:nvSpPr>
-          <p:cNvPr id="8" name="TextBox 7"/>
+              <a:t>Новостная схема занижает</a:t>
+            </a:r>
+          </a:p>
+        </p:txBody>
+      </p:sp>
+      <p:sp>
+        <p:nvSpPr>
+          <p:cNvPr id="10" name="TextBox 9"/>
           <p:cNvSpPr txBox="1"/>
           <p:nvPr/>
         </p:nvSpPr>
         <p:spPr>
           <a:xfrm>
-            <a:off x="731520" y="4343400"/>
-            <a:ext cx="7315200" cy="274320"/>
+            <a:off x="8366760" y="3273552"/>
+            <a:ext cx="2926080" cy="640080"/>
+          </a:xfrm>
+          <a:prstGeom prst="rect">
+            <a:avLst/>
+          </a:prstGeom>
+          <a:noFill/>
+        </p:spPr>
+        <p:txBody>
+          <a:bodyPr wrap="square" lIns="0" rIns="0" tIns="0" bIns="0">
+            <a:spAutoFit/>
+          </a:bodyPr>
+          <a:lstStyle/>
+          <a:p>
+            <a:pPr algn="l">
+              <a:lnSpc>
+                <a:spcPct val="145000"/>
+              </a:lnSpc>
+            </a:pPr>
+            <a:r>
+              <a:rPr sz="1300" b="0">
+                <a:solidFill>
+                  <a:srgbClr val="8B949E"/>
+                </a:solidFill>
+                <a:latin typeface="Inter Tight"/>
+              </a:rPr>
+              <a:t>Отсюда единственный провал важного.</a:t>
+            </a:r>
+          </a:p>
+        </p:txBody>
+      </p:sp>
+      <p:sp>
+        <p:nvSpPr>
+          <p:cNvPr id="11" name="Rounded Rectangle 10"/>
+          <p:cNvSpPr/>
+          <p:nvPr/>
+        </p:nvSpPr>
+        <p:spPr>
+          <a:xfrm>
+            <a:off x="8046720" y="4206240"/>
+            <a:ext cx="3474720" cy="1371600"/>
+          </a:xfrm>
+          <a:prstGeom prst="roundRect">
+            <a:avLst>
+              <a:gd name="adj" fmla="val 4500"/>
+            </a:avLst>
+          </a:prstGeom>
+          <a:solidFill>
+            <a:srgbClr val="1B1F24"/>
+          </a:solidFill>
+          <a:ln>
+            <a:noFill/>
+          </a:ln>
+          <a:effectLst/>
+        </p:spPr>
+        <p:style>
+          <a:lnRef idx="1">
+            <a:schemeClr val="accent1"/>
+          </a:lnRef>
+          <a:fillRef idx="3">
+            <a:schemeClr val="accent1"/>
+          </a:fillRef>
+          <a:effectRef idx="2">
+            <a:schemeClr val="accent1"/>
+          </a:effectRef>
+          <a:fontRef idx="minor">
+            <a:schemeClr val="lt1"/>
+          </a:fontRef>
+        </p:style>
+        <p:txBody>
+          <a:bodyPr rtlCol="0" anchor="ctr"/>
+          <a:lstStyle/>
+          <a:p>
+            <a:pPr algn="ctr"/>
+          </a:p>
+        </p:txBody>
+      </p:sp>
+      <p:sp>
+        <p:nvSpPr>
+          <p:cNvPr id="12" name="TextBox 11"/>
+          <p:cNvSpPr txBox="1"/>
+          <p:nvPr/>
+        </p:nvSpPr>
+        <p:spPr>
+          <a:xfrm>
+            <a:off x="8366760" y="4434840"/>
+            <a:ext cx="2926080" cy="274320"/>
           </a:xfrm>
           <a:prstGeom prst="rect">
             <a:avLst/>
@@ -6132,71 +8686,66 @@
               </a:lnSpc>
             </a:pPr>
             <a:r>
-              <a:rPr sz="1300" b="0">
-                <a:solidFill>
-                  <a:srgbClr val="6B7280"/>
+              <a:rPr sz="1500" b="1">
+                <a:solidFill>
+                  <a:srgbClr val="F2F4F3"/>
                 </a:solidFill>
                 <a:latin typeface="Inter Tight"/>
               </a:rPr>
-              <a:t>Один штраф по ФЗ № 295-ФЗ для операторов цифровых платформ, верхняя граница</a:t>
-            </a:r>
-          </a:p>
-        </p:txBody>
-      </p:sp>
-      <p:sp>
-        <p:nvSpPr>
-          <p:cNvPr id="9" name="Rectangle 8"/>
-          <p:cNvSpPr/>
-          <p:nvPr/>
-        </p:nvSpPr>
-        <p:spPr>
-          <a:xfrm>
-            <a:off x="731520" y="4663440"/>
-            <a:ext cx="10058400" cy="310896"/>
-          </a:xfrm>
-          <a:prstGeom prst="rect">
-            <a:avLst/>
-          </a:prstGeom>
-          <a:solidFill>
-            <a:srgbClr val="EB5757"/>
-          </a:solidFill>
-          <a:ln>
-            <a:noFill/>
-          </a:ln>
-          <a:effectLst/>
-        </p:spPr>
-        <p:style>
-          <a:lnRef idx="1">
-            <a:schemeClr val="accent1"/>
-          </a:lnRef>
-          <a:fillRef idx="3">
-            <a:schemeClr val="accent1"/>
-          </a:fillRef>
-          <a:effectRef idx="2">
-            <a:schemeClr val="accent1"/>
-          </a:effectRef>
-          <a:fontRef idx="minor">
-            <a:schemeClr val="lt1"/>
-          </a:fontRef>
-        </p:style>
-        <p:txBody>
-          <a:bodyPr rtlCol="0" anchor="ctr"/>
-          <a:lstStyle/>
-          <a:p>
-            <a:pPr algn="ctr"/>
-          </a:p>
-        </p:txBody>
-      </p:sp>
-      <p:sp>
-        <p:nvSpPr>
-          <p:cNvPr id="10" name="TextBox 9"/>
+              <a:t>Живой сбор выключен</a:t>
+            </a:r>
+          </a:p>
+        </p:txBody>
+      </p:sp>
+      <p:sp>
+        <p:nvSpPr>
+          <p:cNvPr id="13" name="TextBox 12"/>
           <p:cNvSpPr txBox="1"/>
           <p:nvPr/>
         </p:nvSpPr>
         <p:spPr>
           <a:xfrm>
-            <a:off x="896112" y="4645152"/>
-            <a:ext cx="3657600" cy="320040"/>
+            <a:off x="8366760" y="4782312"/>
+            <a:ext cx="2926080" cy="640080"/>
+          </a:xfrm>
+          <a:prstGeom prst="rect">
+            <a:avLst/>
+          </a:prstGeom>
+          <a:noFill/>
+        </p:spPr>
+        <p:txBody>
+          <a:bodyPr wrap="square" lIns="0" rIns="0" tIns="0" bIns="0">
+            <a:spAutoFit/>
+          </a:bodyPr>
+          <a:lstStyle/>
+          <a:p>
+            <a:pPr algn="l">
+              <a:lnSpc>
+                <a:spcPct val="145000"/>
+              </a:lnSpc>
+            </a:pPr>
+            <a:r>
+              <a:rPr sz="1300" b="0">
+                <a:solidFill>
+                  <a:srgbClr val="8B949E"/>
+                </a:solidFill>
+                <a:latin typeface="Inter Tight"/>
+              </a:rPr>
+              <a:t>Обработка не успевает за сбором. Показываем срез.</a:t>
+            </a:r>
+          </a:p>
+        </p:txBody>
+      </p:sp>
+      <p:sp>
+        <p:nvSpPr>
+          <p:cNvPr id="14" name="TextBox 13"/>
+          <p:cNvSpPr txBox="1"/>
+          <p:nvPr/>
+        </p:nvSpPr>
+        <p:spPr>
+          <a:xfrm>
+            <a:off x="731520" y="6382512"/>
+            <a:ext cx="8778240" cy="237744"/>
           </a:xfrm>
           <a:prstGeom prst="rect">
             <a:avLst/>
@@ -6215,146 +8764,20 @@
               </a:lnSpc>
             </a:pPr>
             <a:r>
-              <a:rPr sz="1700" b="1">
-                <a:solidFill>
-                  <a:srgbClr val="FFFFFF"/>
+              <a:rPr sz="950" b="0">
+                <a:solidFill>
+                  <a:srgbClr val="8B949E"/>
                 </a:solidFill>
                 <a:latin typeface="Inter Tight"/>
               </a:rPr>
-              <a:t>500 000 ₽</a:t>
-            </a:r>
-          </a:p>
-        </p:txBody>
-      </p:sp>
-      <p:sp>
-        <p:nvSpPr>
-          <p:cNvPr id="11" name="TextBox 10"/>
-          <p:cNvSpPr txBox="1"/>
-          <p:nvPr/>
-        </p:nvSpPr>
-        <p:spPr>
-          <a:xfrm>
-            <a:off x="731520" y="5257800"/>
-            <a:ext cx="10698480" cy="640080"/>
-          </a:xfrm>
-          <a:prstGeom prst="rect">
-            <a:avLst/>
-          </a:prstGeom>
-          <a:noFill/>
-        </p:spPr>
-        <p:txBody>
-          <a:bodyPr wrap="square" lIns="0" rIns="0" tIns="0" bIns="0">
-            <a:spAutoFit/>
-          </a:bodyPr>
-          <a:lstStyle/>
-          <a:p>
-            <a:pPr algn="l">
-              <a:lnSpc>
-                <a:spcPct val="145000"/>
-              </a:lnSpc>
-            </a:pPr>
-            <a:r>
-              <a:rPr sz="1450" b="1">
-                <a:solidFill>
-                  <a:srgbClr val="231F20"/>
-                </a:solidFill>
-                <a:latin typeface="Inter Tight"/>
-              </a:rPr>
-              <a:t>Полосы в одном масштабе. </a:t>
-            </a:r>
-            <a:r>
-              <a:rPr sz="1450" b="0">
-                <a:solidFill>
-                  <a:srgbClr val="6B7280"/>
-                </a:solidFill>
-                <a:latin typeface="Inter Tight"/>
-              </a:rPr>
-              <a:t>Верхняя — годовая стоимость обработки: четыре копейки за материал. Одного пропущенного документа хватает, чтобы перекрыть двести лет её работы.</a:t>
-            </a:r>
-          </a:p>
-        </p:txBody>
-      </p:sp>
-      <p:sp>
-        <p:nvSpPr>
-          <p:cNvPr id="12" name="TextBox 11"/>
-          <p:cNvSpPr txBox="1"/>
-          <p:nvPr/>
-        </p:nvSpPr>
-        <p:spPr>
-          <a:xfrm>
-            <a:off x="731520" y="5989320"/>
-            <a:ext cx="10698480" cy="274320"/>
-          </a:xfrm>
-          <a:prstGeom prst="rect">
-            <a:avLst/>
-          </a:prstGeom>
-          <a:noFill/>
-        </p:spPr>
-        <p:txBody>
-          <a:bodyPr wrap="square" lIns="0" rIns="0" tIns="0" bIns="0">
-            <a:spAutoFit/>
-          </a:bodyPr>
-          <a:lstStyle/>
-          <a:p>
-            <a:pPr algn="l">
-              <a:lnSpc>
-                <a:spcPct val="132000"/>
-              </a:lnSpc>
-            </a:pPr>
-            <a:r>
-              <a:rPr sz="1150" b="0">
-                <a:solidFill>
-                  <a:srgbClr val="9AA1AB"/>
-                </a:solidFill>
-                <a:latin typeface="Inter Tight"/>
-              </a:rPr>
-              <a:t>Пересчитано по курсу ЦБ на 05.09.2026 — 86,59 ₽ за доллар.</a:t>
-            </a:r>
-          </a:p>
-        </p:txBody>
-      </p:sp>
-      <p:sp>
-        <p:nvSpPr>
-          <p:cNvPr id="13" name="TextBox 12"/>
-          <p:cNvSpPr txBox="1"/>
-          <p:nvPr/>
-        </p:nvSpPr>
-        <p:spPr>
-          <a:xfrm>
-            <a:off x="731520" y="6382512"/>
-            <a:ext cx="8778240" cy="237744"/>
-          </a:xfrm>
-          <a:prstGeom prst="rect">
-            <a:avLst/>
-          </a:prstGeom>
-          <a:noFill/>
-        </p:spPr>
-        <p:txBody>
-          <a:bodyPr wrap="square" lIns="0" rIns="0" tIns="0" bIns="0">
-            <a:spAutoFit/>
-          </a:bodyPr>
-          <a:lstStyle/>
-          <a:p>
-            <a:pPr algn="l">
-              <a:lnSpc>
-                <a:spcPct val="132000"/>
-              </a:lnSpc>
-            </a:pPr>
-            <a:r>
-              <a:rPr sz="950" b="0">
-                <a:solidFill>
-                  <a:srgbClr val="9AA1AB"/>
-                </a:solidFill>
-                <a:latin typeface="Inter Tight"/>
-              </a:rPr>
-              <a:t>docs/business-case.md · замер стоимости на реальном материале</a:t>
-            </a:r>
-          </a:p>
-        </p:txBody>
-      </p:sp>
-      <p:sp>
-        <p:nvSpPr>
-          <p:cNvPr id="14" name="TextBox 13"/>
+              <a:t>docs/hypotheses.md · specs/…/open-questions.md</a:t>
+            </a:r>
+          </a:p>
+        </p:txBody>
+      </p:sp>
+      <p:sp>
+        <p:nvSpPr>
+          <p:cNvPr id="15" name="TextBox 14"/>
           <p:cNvSpPr txBox="1"/>
           <p:nvPr/>
         </p:nvSpPr>
@@ -6382,7 +8805,7 @@
             <a:r>
               <a:rPr sz="950" b="0">
                 <a:solidFill>
-                  <a:srgbClr val="9AA1AB"/>
+                  <a:srgbClr val="8B949E"/>
                 </a:solidFill>
                 <a:latin typeface="Inter Tight"/>
               </a:rPr>
@@ -6424,7 +8847,7 @@
             <a:avLst/>
           </a:prstGeom>
           <a:solidFill>
-            <a:srgbClr val="F9F9F9"/>
+            <a:srgbClr val="101214"/>
           </a:solidFill>
           <a:ln>
             <a:noFill/>
@@ -6455,20 +8878,334 @@
       </p:sp>
       <p:sp>
         <p:nvSpPr>
-          <p:cNvPr id="3" name="Rectangle 2"/>
+          <p:cNvPr id="3" name="TextBox 2"/>
+          <p:cNvSpPr txBox="1"/>
+          <p:nvPr/>
+        </p:nvSpPr>
+        <p:spPr>
+          <a:xfrm>
+            <a:off x="731520" y="1051560"/>
+            <a:ext cx="10698480" cy="274320"/>
+          </a:xfrm>
+          <a:prstGeom prst="rect">
+            <a:avLst/>
+          </a:prstGeom>
+          <a:noFill/>
+        </p:spPr>
+        <p:txBody>
+          <a:bodyPr wrap="square" lIns="0" rIns="0" tIns="0" bIns="0">
+            <a:spAutoFit/>
+          </a:bodyPr>
+          <a:lstStyle/>
+          <a:p>
+            <a:pPr algn="l">
+              <a:lnSpc>
+                <a:spcPct val="132000"/>
+              </a:lnSpc>
+            </a:pPr>
+            <a:r>
+              <a:rPr sz="1100" b="1" spc="200">
+                <a:solidFill>
+                  <a:srgbClr val="43B02A"/>
+                </a:solidFill>
+                <a:latin typeface="Inter Tight"/>
+              </a:rPr>
+              <a:t>КОМАНДА</a:t>
+            </a:r>
+          </a:p>
+        </p:txBody>
+      </p:sp>
+      <p:sp>
+        <p:nvSpPr>
+          <p:cNvPr id="4" name="TextBox 3"/>
+          <p:cNvSpPr txBox="1"/>
+          <p:nvPr/>
+        </p:nvSpPr>
+        <p:spPr>
+          <a:xfrm>
+            <a:off x="731520" y="1463040"/>
+            <a:ext cx="10515600" cy="640080"/>
+          </a:xfrm>
+          <a:prstGeom prst="rect">
+            <a:avLst/>
+          </a:prstGeom>
+          <a:noFill/>
+        </p:spPr>
+        <p:txBody>
+          <a:bodyPr wrap="square" lIns="0" rIns="0" tIns="0" bIns="0">
+            <a:spAutoFit/>
+          </a:bodyPr>
+          <a:lstStyle/>
+          <a:p>
+            <a:pPr algn="l">
+              <a:lnSpc>
+                <a:spcPct val="132000"/>
+              </a:lnSpc>
+            </a:pPr>
+            <a:r>
+              <a:rPr sz="4200" b="1">
+                <a:solidFill>
+                  <a:srgbClr val="F2F4F3"/>
+                </a:solidFill>
+                <a:latin typeface="Inter Tight"/>
+              </a:rPr>
+              <a:t>Кто делал и где посмотреть</a:t>
+            </a:r>
+          </a:p>
+        </p:txBody>
+      </p:sp>
+      <p:sp>
+        <p:nvSpPr>
+          <p:cNvPr id="5" name="TextBox 4"/>
+          <p:cNvSpPr txBox="1"/>
+          <p:nvPr/>
+        </p:nvSpPr>
+        <p:spPr>
+          <a:xfrm>
+            <a:off x="731520" y="2743200"/>
+            <a:ext cx="3291840" cy="310896"/>
+          </a:xfrm>
+          <a:prstGeom prst="rect">
+            <a:avLst/>
+          </a:prstGeom>
+          <a:noFill/>
+        </p:spPr>
+        <p:txBody>
+          <a:bodyPr wrap="square" lIns="0" rIns="0" tIns="0" bIns="0">
+            <a:spAutoFit/>
+          </a:bodyPr>
+          <a:lstStyle/>
+          <a:p>
+            <a:pPr algn="l">
+              <a:lnSpc>
+                <a:spcPct val="132000"/>
+              </a:lnSpc>
+            </a:pPr>
+            <a:r>
+              <a:rPr sz="2100" b="1">
+                <a:solidFill>
+                  <a:srgbClr val="F2F4F3"/>
+                </a:solidFill>
+                <a:latin typeface="Inter Tight"/>
+              </a:rPr>
+              <a:t>Левочкин Егор</a:t>
+            </a:r>
+          </a:p>
+        </p:txBody>
+      </p:sp>
+      <p:sp>
+        <p:nvSpPr>
+          <p:cNvPr id="6" name="TextBox 5"/>
+          <p:cNvSpPr txBox="1"/>
+          <p:nvPr/>
+        </p:nvSpPr>
+        <p:spPr>
+          <a:xfrm>
+            <a:off x="731520" y="3127248"/>
+            <a:ext cx="5852160" cy="274320"/>
+          </a:xfrm>
+          <a:prstGeom prst="rect">
+            <a:avLst/>
+          </a:prstGeom>
+          <a:noFill/>
+        </p:spPr>
+        <p:txBody>
+          <a:bodyPr wrap="square" lIns="0" rIns="0" tIns="0" bIns="0">
+            <a:spAutoFit/>
+          </a:bodyPr>
+          <a:lstStyle/>
+          <a:p>
+            <a:pPr algn="l">
+              <a:lnSpc>
+                <a:spcPct val="132000"/>
+              </a:lnSpc>
+            </a:pPr>
+            <a:r>
+              <a:rPr sz="1400" b="0">
+                <a:solidFill>
+                  <a:srgbClr val="8B949E"/>
+                </a:solidFill>
+                <a:latin typeface="Inter Tight"/>
+              </a:rPr>
+              <a:t>@veceloe   ·   продукт, парсинг, фронтенд</a:t>
+            </a:r>
+          </a:p>
+        </p:txBody>
+      </p:sp>
+      <p:sp>
+        <p:nvSpPr>
+          <p:cNvPr id="7" name="TextBox 6"/>
+          <p:cNvSpPr txBox="1"/>
+          <p:nvPr/>
+        </p:nvSpPr>
+        <p:spPr>
+          <a:xfrm>
+            <a:off x="731520" y="3703320"/>
+            <a:ext cx="3291840" cy="310896"/>
+          </a:xfrm>
+          <a:prstGeom prst="rect">
+            <a:avLst/>
+          </a:prstGeom>
+          <a:noFill/>
+        </p:spPr>
+        <p:txBody>
+          <a:bodyPr wrap="square" lIns="0" rIns="0" tIns="0" bIns="0">
+            <a:spAutoFit/>
+          </a:bodyPr>
+          <a:lstStyle/>
+          <a:p>
+            <a:pPr algn="l">
+              <a:lnSpc>
+                <a:spcPct val="132000"/>
+              </a:lnSpc>
+            </a:pPr>
+            <a:r>
+              <a:rPr sz="2100" b="1">
+                <a:solidFill>
+                  <a:srgbClr val="F2F4F3"/>
+                </a:solidFill>
+                <a:latin typeface="Inter Tight"/>
+              </a:rPr>
+              <a:t>Головаш Денис</a:t>
+            </a:r>
+          </a:p>
+        </p:txBody>
+      </p:sp>
+      <p:sp>
+        <p:nvSpPr>
+          <p:cNvPr id="8" name="TextBox 7"/>
+          <p:cNvSpPr txBox="1"/>
+          <p:nvPr/>
+        </p:nvSpPr>
+        <p:spPr>
+          <a:xfrm>
+            <a:off x="731520" y="4087368"/>
+            <a:ext cx="5852160" cy="274320"/>
+          </a:xfrm>
+          <a:prstGeom prst="rect">
+            <a:avLst/>
+          </a:prstGeom>
+          <a:noFill/>
+        </p:spPr>
+        <p:txBody>
+          <a:bodyPr wrap="square" lIns="0" rIns="0" tIns="0" bIns="0">
+            <a:spAutoFit/>
+          </a:bodyPr>
+          <a:lstStyle/>
+          <a:p>
+            <a:pPr algn="l">
+              <a:lnSpc>
+                <a:spcPct val="132000"/>
+              </a:lnSpc>
+            </a:pPr>
+            <a:r>
+              <a:rPr sz="1400" b="0">
+                <a:solidFill>
+                  <a:srgbClr val="8B949E"/>
+                </a:solidFill>
+                <a:latin typeface="Inter Tight"/>
+              </a:rPr>
+              <a:t>@denizzzz_ka   ·   весь слой работы с моделью</a:t>
+            </a:r>
+          </a:p>
+        </p:txBody>
+      </p:sp>
+      <p:sp>
+        <p:nvSpPr>
+          <p:cNvPr id="9" name="TextBox 8"/>
+          <p:cNvSpPr txBox="1"/>
+          <p:nvPr/>
+        </p:nvSpPr>
+        <p:spPr>
+          <a:xfrm>
+            <a:off x="731520" y="4663440"/>
+            <a:ext cx="3291840" cy="310896"/>
+          </a:xfrm>
+          <a:prstGeom prst="rect">
+            <a:avLst/>
+          </a:prstGeom>
+          <a:noFill/>
+        </p:spPr>
+        <p:txBody>
+          <a:bodyPr wrap="square" lIns="0" rIns="0" tIns="0" bIns="0">
+            <a:spAutoFit/>
+          </a:bodyPr>
+          <a:lstStyle/>
+          <a:p>
+            <a:pPr algn="l">
+              <a:lnSpc>
+                <a:spcPct val="132000"/>
+              </a:lnSpc>
+            </a:pPr>
+            <a:r>
+              <a:rPr sz="2100" b="1">
+                <a:solidFill>
+                  <a:srgbClr val="F2F4F3"/>
+                </a:solidFill>
+                <a:latin typeface="Inter Tight"/>
+              </a:rPr>
+              <a:t>Артемьев Иван</a:t>
+            </a:r>
+          </a:p>
+        </p:txBody>
+      </p:sp>
+      <p:sp>
+        <p:nvSpPr>
+          <p:cNvPr id="10" name="TextBox 9"/>
+          <p:cNvSpPr txBox="1"/>
+          <p:nvPr/>
+        </p:nvSpPr>
+        <p:spPr>
+          <a:xfrm>
+            <a:off x="731520" y="5047488"/>
+            <a:ext cx="5852160" cy="274320"/>
+          </a:xfrm>
+          <a:prstGeom prst="rect">
+            <a:avLst/>
+          </a:prstGeom>
+          <a:noFill/>
+        </p:spPr>
+        <p:txBody>
+          <a:bodyPr wrap="square" lIns="0" rIns="0" tIns="0" bIns="0">
+            <a:spAutoFit/>
+          </a:bodyPr>
+          <a:lstStyle/>
+          <a:p>
+            <a:pPr algn="l">
+              <a:lnSpc>
+                <a:spcPct val="132000"/>
+              </a:lnSpc>
+            </a:pPr>
+            <a:r>
+              <a:rPr sz="1400" b="0">
+                <a:solidFill>
+                  <a:srgbClr val="8B949E"/>
+                </a:solidFill>
+                <a:latin typeface="Inter Tight"/>
+              </a:rPr>
+              <a:t>@s3drmn   ·   бэкенд, конвейер, развёртывание</a:t>
+            </a:r>
+          </a:p>
+        </p:txBody>
+      </p:sp>
+      <p:sp>
+        <p:nvSpPr>
+          <p:cNvPr id="11" name="Rounded Rectangle 10"/>
           <p:cNvSpPr/>
           <p:nvPr/>
         </p:nvSpPr>
         <p:spPr>
           <a:xfrm>
-            <a:off x="731520" y="1371600"/>
-            <a:ext cx="50292" cy="566928"/>
-          </a:xfrm>
-          <a:prstGeom prst="rect">
-            <a:avLst/>
+            <a:off x="7498079" y="2651760"/>
+            <a:ext cx="4023360" cy="3017520"/>
+          </a:xfrm>
+          <a:prstGeom prst="roundRect">
+            <a:avLst>
+              <a:gd name="adj" fmla="val 4500"/>
+            </a:avLst>
           </a:prstGeom>
           <a:solidFill>
-            <a:srgbClr val="43B02A"/>
+            <a:srgbClr val="23282E"/>
           </a:solidFill>
           <a:ln>
             <a:noFill/>
@@ -6497,16 +9234,118 @@
           </a:p>
         </p:txBody>
       </p:sp>
-      <p:sp>
-        <p:nvSpPr>
-          <p:cNvPr id="4" name="TextBox 3"/>
+      <p:pic>
+        <p:nvPicPr>
+          <p:cNvPr id="12" name="Picture 11" descr="qr-demo.png"/>
+          <p:cNvPicPr>
+            <a:picLocks noChangeAspect="1"/>
+          </p:cNvPicPr>
+          <p:nvPr/>
+        </p:nvPicPr>
+        <p:blipFill>
+          <a:blip r:embed="rId2"/>
+          <a:stretch>
+            <a:fillRect/>
+          </a:stretch>
+        </p:blipFill>
+        <p:spPr>
+          <a:xfrm>
+            <a:off x="8549640" y="2926080"/>
+            <a:ext cx="1920240" cy="1920240"/>
+          </a:xfrm>
+          <a:prstGeom prst="rect">
+            <a:avLst/>
+          </a:prstGeom>
+        </p:spPr>
+      </p:pic>
+      <p:sp>
+        <p:nvSpPr>
+          <p:cNvPr id="13" name="TextBox 12"/>
           <p:cNvSpPr txBox="1"/>
           <p:nvPr/>
         </p:nvSpPr>
         <p:spPr>
           <a:xfrm>
-            <a:off x="1115568" y="1325880"/>
-            <a:ext cx="10058400" cy="640080"/>
+            <a:off x="7772400" y="5029200"/>
+            <a:ext cx="3474720" cy="274320"/>
+          </a:xfrm>
+          <a:prstGeom prst="rect">
+            <a:avLst/>
+          </a:prstGeom>
+          <a:noFill/>
+        </p:spPr>
+        <p:txBody>
+          <a:bodyPr wrap="square" lIns="0" rIns="0" tIns="0" bIns="0">
+            <a:spAutoFit/>
+          </a:bodyPr>
+          <a:lstStyle/>
+          <a:p>
+            <a:pPr algn="ctr">
+              <a:lnSpc>
+                <a:spcPct val="132000"/>
+              </a:lnSpc>
+            </a:pPr>
+            <a:r>
+              <a:rPr sz="1500" b="1">
+                <a:solidFill>
+                  <a:srgbClr val="F2F4F3"/>
+                </a:solidFill>
+                <a:latin typeface="Inter Tight"/>
+              </a:rPr>
+              <a:t>185.56.162.154</a:t>
+            </a:r>
+          </a:p>
+        </p:txBody>
+      </p:sp>
+      <p:sp>
+        <p:nvSpPr>
+          <p:cNvPr id="14" name="TextBox 13"/>
+          <p:cNvSpPr txBox="1"/>
+          <p:nvPr/>
+        </p:nvSpPr>
+        <p:spPr>
+          <a:xfrm>
+            <a:off x="7772400" y="5321808"/>
+            <a:ext cx="3474720" cy="274320"/>
+          </a:xfrm>
+          <a:prstGeom prst="rect">
+            <a:avLst/>
+          </a:prstGeom>
+          <a:noFill/>
+        </p:spPr>
+        <p:txBody>
+          <a:bodyPr wrap="square" lIns="0" rIns="0" tIns="0" bIns="0">
+            <a:spAutoFit/>
+          </a:bodyPr>
+          <a:lstStyle/>
+          <a:p>
+            <a:pPr algn="ctr">
+              <a:lnSpc>
+                <a:spcPct val="132000"/>
+              </a:lnSpc>
+            </a:pPr>
+            <a:r>
+              <a:rPr sz="1150" b="0">
+                <a:solidFill>
+                  <a:srgbClr val="8B949E"/>
+                </a:solidFill>
+                <a:latin typeface="Inter Tight"/>
+              </a:rPr>
+              <a:t>лента, досье и дайджест на живых данных</a:t>
+            </a:r>
+          </a:p>
+        </p:txBody>
+      </p:sp>
+      <p:sp>
+        <p:nvSpPr>
+          <p:cNvPr id="15" name="TextBox 14"/>
+          <p:cNvSpPr txBox="1"/>
+          <p:nvPr/>
+        </p:nvSpPr>
+        <p:spPr>
+          <a:xfrm>
+            <a:off x="731520" y="5852160"/>
+            <a:ext cx="6400800" cy="274320"/>
           </a:xfrm>
           <a:prstGeom prst="rect">
             <a:avLst/>
@@ -6525,2360 +9364,20 @@
               </a:lnSpc>
             </a:pPr>
             <a:r>
-              <a:rPr sz="3400" b="1">
-                <a:solidFill>
-                  <a:srgbClr val="231F20"/>
+              <a:rPr sz="1400" b="0">
+                <a:solidFill>
+                  <a:srgbClr val="8B949E"/>
                 </a:solidFill>
                 <a:latin typeface="Inter Tight"/>
               </a:rPr>
-              <a:t>Проверено на реестре самого заказчика</a:t>
-            </a:r>
-          </a:p>
-        </p:txBody>
-      </p:sp>
-      <p:sp>
-        <p:nvSpPr>
-          <p:cNvPr id="5" name="TextBox 4"/>
-          <p:cNvSpPr txBox="1"/>
-          <p:nvPr/>
-        </p:nvSpPr>
-        <p:spPr>
-          <a:xfrm>
-            <a:off x="1115568" y="1965960"/>
-            <a:ext cx="9692640" cy="365760"/>
-          </a:xfrm>
-          <a:prstGeom prst="rect">
-            <a:avLst/>
-          </a:prstGeom>
-          <a:noFill/>
-        </p:spPr>
-        <p:txBody>
-          <a:bodyPr wrap="square" lIns="0" rIns="0" tIns="0" bIns="0">
-            <a:spAutoFit/>
-          </a:bodyPr>
-          <a:lstStyle/>
-          <a:p>
-            <a:pPr algn="l">
-              <a:lnSpc>
-                <a:spcPct val="132000"/>
-              </a:lnSpc>
-            </a:pPr>
-            <a:r>
-              <a:rPr sz="1400" b="0">
-                <a:solidFill>
-                  <a:srgbClr val="6B7280"/>
-                </a:solidFill>
-                <a:latin typeface="Inter Tight"/>
-              </a:rPr>
-              <a:t>Сорок две карточки, баллы в них проставлены человеком. Одна клетка — одна карточка.</a:t>
-            </a:r>
-          </a:p>
-        </p:txBody>
-      </p:sp>
-      <p:sp>
-        <p:nvSpPr>
-          <p:cNvPr id="6" name="Rectangle 5"/>
-          <p:cNvSpPr/>
-          <p:nvPr/>
-        </p:nvSpPr>
-        <p:spPr>
-          <a:xfrm>
-            <a:off x="731520" y="2606040"/>
-            <a:ext cx="384048" cy="384048"/>
-          </a:xfrm>
-          <a:prstGeom prst="rect">
-            <a:avLst/>
-          </a:prstGeom>
-          <a:solidFill>
-            <a:srgbClr val="43B02A"/>
-          </a:solidFill>
-          <a:ln>
-            <a:noFill/>
-          </a:ln>
-          <a:effectLst/>
-        </p:spPr>
-        <p:style>
-          <a:lnRef idx="1">
-            <a:schemeClr val="accent1"/>
-          </a:lnRef>
-          <a:fillRef idx="3">
-            <a:schemeClr val="accent1"/>
-          </a:fillRef>
-          <a:effectRef idx="2">
-            <a:schemeClr val="accent1"/>
-          </a:effectRef>
-          <a:fontRef idx="minor">
-            <a:schemeClr val="lt1"/>
-          </a:fontRef>
-        </p:style>
-        <p:txBody>
-          <a:bodyPr rtlCol="0" anchor="ctr"/>
-          <a:lstStyle/>
-          <a:p>
-            <a:pPr algn="ctr"/>
-          </a:p>
-        </p:txBody>
-      </p:sp>
-      <p:sp>
-        <p:nvSpPr>
-          <p:cNvPr id="7" name="Rectangle 6"/>
-          <p:cNvSpPr/>
-          <p:nvPr/>
-        </p:nvSpPr>
-        <p:spPr>
-          <a:xfrm>
-            <a:off x="1197864" y="2606040"/>
-            <a:ext cx="384048" cy="384048"/>
-          </a:xfrm>
-          <a:prstGeom prst="rect">
-            <a:avLst/>
-          </a:prstGeom>
-          <a:solidFill>
-            <a:srgbClr val="43B02A"/>
-          </a:solidFill>
-          <a:ln>
-            <a:noFill/>
-          </a:ln>
-          <a:effectLst/>
-        </p:spPr>
-        <p:style>
-          <a:lnRef idx="1">
-            <a:schemeClr val="accent1"/>
-          </a:lnRef>
-          <a:fillRef idx="3">
-            <a:schemeClr val="accent1"/>
-          </a:fillRef>
-          <a:effectRef idx="2">
-            <a:schemeClr val="accent1"/>
-          </a:effectRef>
-          <a:fontRef idx="minor">
-            <a:schemeClr val="lt1"/>
-          </a:fontRef>
-        </p:style>
-        <p:txBody>
-          <a:bodyPr rtlCol="0" anchor="ctr"/>
-          <a:lstStyle/>
-          <a:p>
-            <a:pPr algn="ctr"/>
-          </a:p>
-        </p:txBody>
-      </p:sp>
-      <p:sp>
-        <p:nvSpPr>
-          <p:cNvPr id="8" name="Rectangle 7"/>
-          <p:cNvSpPr/>
-          <p:nvPr/>
-        </p:nvSpPr>
-        <p:spPr>
-          <a:xfrm>
-            <a:off x="1664208" y="2606040"/>
-            <a:ext cx="384048" cy="384048"/>
-          </a:xfrm>
-          <a:prstGeom prst="rect">
-            <a:avLst/>
-          </a:prstGeom>
-          <a:solidFill>
-            <a:srgbClr val="43B02A"/>
-          </a:solidFill>
-          <a:ln>
-            <a:noFill/>
-          </a:ln>
-          <a:effectLst/>
-        </p:spPr>
-        <p:style>
-          <a:lnRef idx="1">
-            <a:schemeClr val="accent1"/>
-          </a:lnRef>
-          <a:fillRef idx="3">
-            <a:schemeClr val="accent1"/>
-          </a:fillRef>
-          <a:effectRef idx="2">
-            <a:schemeClr val="accent1"/>
-          </a:effectRef>
-          <a:fontRef idx="minor">
-            <a:schemeClr val="lt1"/>
-          </a:fontRef>
-        </p:style>
-        <p:txBody>
-          <a:bodyPr rtlCol="0" anchor="ctr"/>
-          <a:lstStyle/>
-          <a:p>
-            <a:pPr algn="ctr"/>
-          </a:p>
-        </p:txBody>
-      </p:sp>
-      <p:sp>
-        <p:nvSpPr>
-          <p:cNvPr id="9" name="Rectangle 8"/>
-          <p:cNvSpPr/>
-          <p:nvPr/>
-        </p:nvSpPr>
-        <p:spPr>
-          <a:xfrm>
-            <a:off x="2130552" y="2606040"/>
-            <a:ext cx="384048" cy="384048"/>
-          </a:xfrm>
-          <a:prstGeom prst="rect">
-            <a:avLst/>
-          </a:prstGeom>
-          <a:solidFill>
-            <a:srgbClr val="43B02A"/>
-          </a:solidFill>
-          <a:ln>
-            <a:noFill/>
-          </a:ln>
-          <a:effectLst/>
-        </p:spPr>
-        <p:style>
-          <a:lnRef idx="1">
-            <a:schemeClr val="accent1"/>
-          </a:lnRef>
-          <a:fillRef idx="3">
-            <a:schemeClr val="accent1"/>
-          </a:fillRef>
-          <a:effectRef idx="2">
-            <a:schemeClr val="accent1"/>
-          </a:effectRef>
-          <a:fontRef idx="minor">
-            <a:schemeClr val="lt1"/>
-          </a:fontRef>
-        </p:style>
-        <p:txBody>
-          <a:bodyPr rtlCol="0" anchor="ctr"/>
-          <a:lstStyle/>
-          <a:p>
-            <a:pPr algn="ctr"/>
-          </a:p>
-        </p:txBody>
-      </p:sp>
-      <p:sp>
-        <p:nvSpPr>
-          <p:cNvPr id="10" name="Rectangle 9"/>
-          <p:cNvSpPr/>
-          <p:nvPr/>
-        </p:nvSpPr>
-        <p:spPr>
-          <a:xfrm>
-            <a:off x="2596896" y="2606040"/>
-            <a:ext cx="384048" cy="384048"/>
-          </a:xfrm>
-          <a:prstGeom prst="rect">
-            <a:avLst/>
-          </a:prstGeom>
-          <a:solidFill>
-            <a:srgbClr val="43B02A"/>
-          </a:solidFill>
-          <a:ln>
-            <a:noFill/>
-          </a:ln>
-          <a:effectLst/>
-        </p:spPr>
-        <p:style>
-          <a:lnRef idx="1">
-            <a:schemeClr val="accent1"/>
-          </a:lnRef>
-          <a:fillRef idx="3">
-            <a:schemeClr val="accent1"/>
-          </a:fillRef>
-          <a:effectRef idx="2">
-            <a:schemeClr val="accent1"/>
-          </a:effectRef>
-          <a:fontRef idx="minor">
-            <a:schemeClr val="lt1"/>
-          </a:fontRef>
-        </p:style>
-        <p:txBody>
-          <a:bodyPr rtlCol="0" anchor="ctr"/>
-          <a:lstStyle/>
-          <a:p>
-            <a:pPr algn="ctr"/>
-          </a:p>
-        </p:txBody>
-      </p:sp>
-      <p:sp>
-        <p:nvSpPr>
-          <p:cNvPr id="11" name="Rectangle 10"/>
-          <p:cNvSpPr/>
-          <p:nvPr/>
-        </p:nvSpPr>
-        <p:spPr>
-          <a:xfrm>
-            <a:off x="3063240" y="2606040"/>
-            <a:ext cx="384048" cy="384048"/>
-          </a:xfrm>
-          <a:prstGeom prst="rect">
-            <a:avLst/>
-          </a:prstGeom>
-          <a:solidFill>
-            <a:srgbClr val="43B02A"/>
-          </a:solidFill>
-          <a:ln>
-            <a:noFill/>
-          </a:ln>
-          <a:effectLst/>
-        </p:spPr>
-        <p:style>
-          <a:lnRef idx="1">
-            <a:schemeClr val="accent1"/>
-          </a:lnRef>
-          <a:fillRef idx="3">
-            <a:schemeClr val="accent1"/>
-          </a:fillRef>
-          <a:effectRef idx="2">
-            <a:schemeClr val="accent1"/>
-          </a:effectRef>
-          <a:fontRef idx="minor">
-            <a:schemeClr val="lt1"/>
-          </a:fontRef>
-        </p:style>
-        <p:txBody>
-          <a:bodyPr rtlCol="0" anchor="ctr"/>
-          <a:lstStyle/>
-          <a:p>
-            <a:pPr algn="ctr"/>
-          </a:p>
-        </p:txBody>
-      </p:sp>
-      <p:sp>
-        <p:nvSpPr>
-          <p:cNvPr id="12" name="Rectangle 11"/>
-          <p:cNvSpPr/>
-          <p:nvPr/>
-        </p:nvSpPr>
-        <p:spPr>
-          <a:xfrm>
-            <a:off x="3529584" y="2606040"/>
-            <a:ext cx="384048" cy="384048"/>
-          </a:xfrm>
-          <a:prstGeom prst="rect">
-            <a:avLst/>
-          </a:prstGeom>
-          <a:solidFill>
-            <a:srgbClr val="43B02A"/>
-          </a:solidFill>
-          <a:ln>
-            <a:noFill/>
-          </a:ln>
-          <a:effectLst/>
-        </p:spPr>
-        <p:style>
-          <a:lnRef idx="1">
-            <a:schemeClr val="accent1"/>
-          </a:lnRef>
-          <a:fillRef idx="3">
-            <a:schemeClr val="accent1"/>
-          </a:fillRef>
-          <a:effectRef idx="2">
-            <a:schemeClr val="accent1"/>
-          </a:effectRef>
-          <a:fontRef idx="minor">
-            <a:schemeClr val="lt1"/>
-          </a:fontRef>
-        </p:style>
-        <p:txBody>
-          <a:bodyPr rtlCol="0" anchor="ctr"/>
-          <a:lstStyle/>
-          <a:p>
-            <a:pPr algn="ctr"/>
-          </a:p>
-        </p:txBody>
-      </p:sp>
-      <p:sp>
-        <p:nvSpPr>
-          <p:cNvPr id="13" name="Rectangle 12"/>
-          <p:cNvSpPr/>
-          <p:nvPr/>
-        </p:nvSpPr>
-        <p:spPr>
-          <a:xfrm>
-            <a:off x="3995928" y="2606040"/>
-            <a:ext cx="384048" cy="384048"/>
-          </a:xfrm>
-          <a:prstGeom prst="rect">
-            <a:avLst/>
-          </a:prstGeom>
-          <a:solidFill>
-            <a:srgbClr val="43B02A"/>
-          </a:solidFill>
-          <a:ln>
-            <a:noFill/>
-          </a:ln>
-          <a:effectLst/>
-        </p:spPr>
-        <p:style>
-          <a:lnRef idx="1">
-            <a:schemeClr val="accent1"/>
-          </a:lnRef>
-          <a:fillRef idx="3">
-            <a:schemeClr val="accent1"/>
-          </a:fillRef>
-          <a:effectRef idx="2">
-            <a:schemeClr val="accent1"/>
-          </a:effectRef>
-          <a:fontRef idx="minor">
-            <a:schemeClr val="lt1"/>
-          </a:fontRef>
-        </p:style>
-        <p:txBody>
-          <a:bodyPr rtlCol="0" anchor="ctr"/>
-          <a:lstStyle/>
-          <a:p>
-            <a:pPr algn="ctr"/>
-          </a:p>
-        </p:txBody>
-      </p:sp>
-      <p:sp>
-        <p:nvSpPr>
-          <p:cNvPr id="14" name="Rectangle 13"/>
-          <p:cNvSpPr/>
-          <p:nvPr/>
-        </p:nvSpPr>
-        <p:spPr>
-          <a:xfrm>
-            <a:off x="4462272" y="2606040"/>
-            <a:ext cx="384048" cy="384048"/>
-          </a:xfrm>
-          <a:prstGeom prst="rect">
-            <a:avLst/>
-          </a:prstGeom>
-          <a:solidFill>
-            <a:srgbClr val="43B02A"/>
-          </a:solidFill>
-          <a:ln>
-            <a:noFill/>
-          </a:ln>
-          <a:effectLst/>
-        </p:spPr>
-        <p:style>
-          <a:lnRef idx="1">
-            <a:schemeClr val="accent1"/>
-          </a:lnRef>
-          <a:fillRef idx="3">
-            <a:schemeClr val="accent1"/>
-          </a:fillRef>
-          <a:effectRef idx="2">
-            <a:schemeClr val="accent1"/>
-          </a:effectRef>
-          <a:fontRef idx="minor">
-            <a:schemeClr val="lt1"/>
-          </a:fontRef>
-        </p:style>
-        <p:txBody>
-          <a:bodyPr rtlCol="0" anchor="ctr"/>
-          <a:lstStyle/>
-          <a:p>
-            <a:pPr algn="ctr"/>
-          </a:p>
-        </p:txBody>
-      </p:sp>
-      <p:sp>
-        <p:nvSpPr>
-          <p:cNvPr id="15" name="Rectangle 14"/>
-          <p:cNvSpPr/>
-          <p:nvPr/>
-        </p:nvSpPr>
-        <p:spPr>
-          <a:xfrm>
-            <a:off x="4928616" y="2606040"/>
-            <a:ext cx="384048" cy="384048"/>
-          </a:xfrm>
-          <a:prstGeom prst="rect">
-            <a:avLst/>
-          </a:prstGeom>
-          <a:solidFill>
-            <a:srgbClr val="43B02A"/>
-          </a:solidFill>
-          <a:ln>
-            <a:noFill/>
-          </a:ln>
-          <a:effectLst/>
-        </p:spPr>
-        <p:style>
-          <a:lnRef idx="1">
-            <a:schemeClr val="accent1"/>
-          </a:lnRef>
-          <a:fillRef idx="3">
-            <a:schemeClr val="accent1"/>
-          </a:fillRef>
-          <a:effectRef idx="2">
-            <a:schemeClr val="accent1"/>
-          </a:effectRef>
-          <a:fontRef idx="minor">
-            <a:schemeClr val="lt1"/>
-          </a:fontRef>
-        </p:style>
-        <p:txBody>
-          <a:bodyPr rtlCol="0" anchor="ctr"/>
-          <a:lstStyle/>
-          <a:p>
-            <a:pPr algn="ctr"/>
-          </a:p>
-        </p:txBody>
-      </p:sp>
-      <p:sp>
-        <p:nvSpPr>
-          <p:cNvPr id="16" name="Rectangle 15"/>
-          <p:cNvSpPr/>
-          <p:nvPr/>
-        </p:nvSpPr>
-        <p:spPr>
-          <a:xfrm>
-            <a:off x="5394960" y="2606040"/>
-            <a:ext cx="384048" cy="384048"/>
-          </a:xfrm>
-          <a:prstGeom prst="rect">
-            <a:avLst/>
-          </a:prstGeom>
-          <a:solidFill>
-            <a:srgbClr val="43B02A"/>
-          </a:solidFill>
-          <a:ln>
-            <a:noFill/>
-          </a:ln>
-          <a:effectLst/>
-        </p:spPr>
-        <p:style>
-          <a:lnRef idx="1">
-            <a:schemeClr val="accent1"/>
-          </a:lnRef>
-          <a:fillRef idx="3">
-            <a:schemeClr val="accent1"/>
-          </a:fillRef>
-          <a:effectRef idx="2">
-            <a:schemeClr val="accent1"/>
-          </a:effectRef>
-          <a:fontRef idx="minor">
-            <a:schemeClr val="lt1"/>
-          </a:fontRef>
-        </p:style>
-        <p:txBody>
-          <a:bodyPr rtlCol="0" anchor="ctr"/>
-          <a:lstStyle/>
-          <a:p>
-            <a:pPr algn="ctr"/>
-          </a:p>
-        </p:txBody>
-      </p:sp>
-      <p:sp>
-        <p:nvSpPr>
-          <p:cNvPr id="17" name="Rectangle 16"/>
-          <p:cNvSpPr/>
-          <p:nvPr/>
-        </p:nvSpPr>
-        <p:spPr>
-          <a:xfrm>
-            <a:off x="5861304" y="2606040"/>
-            <a:ext cx="384048" cy="384048"/>
-          </a:xfrm>
-          <a:prstGeom prst="rect">
-            <a:avLst/>
-          </a:prstGeom>
-          <a:solidFill>
-            <a:srgbClr val="43B02A"/>
-          </a:solidFill>
-          <a:ln>
-            <a:noFill/>
-          </a:ln>
-          <a:effectLst/>
-        </p:spPr>
-        <p:style>
-          <a:lnRef idx="1">
-            <a:schemeClr val="accent1"/>
-          </a:lnRef>
-          <a:fillRef idx="3">
-            <a:schemeClr val="accent1"/>
-          </a:fillRef>
-          <a:effectRef idx="2">
-            <a:schemeClr val="accent1"/>
-          </a:effectRef>
-          <a:fontRef idx="minor">
-            <a:schemeClr val="lt1"/>
-          </a:fontRef>
-        </p:style>
-        <p:txBody>
-          <a:bodyPr rtlCol="0" anchor="ctr"/>
-          <a:lstStyle/>
-          <a:p>
-            <a:pPr algn="ctr"/>
-          </a:p>
-        </p:txBody>
-      </p:sp>
-      <p:sp>
-        <p:nvSpPr>
-          <p:cNvPr id="18" name="Rectangle 17"/>
-          <p:cNvSpPr/>
-          <p:nvPr/>
-        </p:nvSpPr>
-        <p:spPr>
-          <a:xfrm>
-            <a:off x="6327648" y="2606040"/>
-            <a:ext cx="384048" cy="384048"/>
-          </a:xfrm>
-          <a:prstGeom prst="rect">
-            <a:avLst/>
-          </a:prstGeom>
-          <a:solidFill>
-            <a:srgbClr val="43B02A"/>
-          </a:solidFill>
-          <a:ln>
-            <a:noFill/>
-          </a:ln>
-          <a:effectLst/>
-        </p:spPr>
-        <p:style>
-          <a:lnRef idx="1">
-            <a:schemeClr val="accent1"/>
-          </a:lnRef>
-          <a:fillRef idx="3">
-            <a:schemeClr val="accent1"/>
-          </a:fillRef>
-          <a:effectRef idx="2">
-            <a:schemeClr val="accent1"/>
-          </a:effectRef>
-          <a:fontRef idx="minor">
-            <a:schemeClr val="lt1"/>
-          </a:fontRef>
-        </p:style>
-        <p:txBody>
-          <a:bodyPr rtlCol="0" anchor="ctr"/>
-          <a:lstStyle/>
-          <a:p>
-            <a:pPr algn="ctr"/>
-          </a:p>
-        </p:txBody>
-      </p:sp>
-      <p:sp>
-        <p:nvSpPr>
-          <p:cNvPr id="19" name="Rectangle 18"/>
-          <p:cNvSpPr/>
-          <p:nvPr/>
-        </p:nvSpPr>
-        <p:spPr>
-          <a:xfrm>
-            <a:off x="6793992" y="2606040"/>
-            <a:ext cx="384048" cy="384048"/>
-          </a:xfrm>
-          <a:prstGeom prst="rect">
-            <a:avLst/>
-          </a:prstGeom>
-          <a:solidFill>
-            <a:srgbClr val="43B02A"/>
-          </a:solidFill>
-          <a:ln>
-            <a:noFill/>
-          </a:ln>
-          <a:effectLst/>
-        </p:spPr>
-        <p:style>
-          <a:lnRef idx="1">
-            <a:schemeClr val="accent1"/>
-          </a:lnRef>
-          <a:fillRef idx="3">
-            <a:schemeClr val="accent1"/>
-          </a:fillRef>
-          <a:effectRef idx="2">
-            <a:schemeClr val="accent1"/>
-          </a:effectRef>
-          <a:fontRef idx="minor">
-            <a:schemeClr val="lt1"/>
-          </a:fontRef>
-        </p:style>
-        <p:txBody>
-          <a:bodyPr rtlCol="0" anchor="ctr"/>
-          <a:lstStyle/>
-          <a:p>
-            <a:pPr algn="ctr"/>
-          </a:p>
-        </p:txBody>
-      </p:sp>
-      <p:sp>
-        <p:nvSpPr>
-          <p:cNvPr id="20" name="Rectangle 19"/>
-          <p:cNvSpPr/>
-          <p:nvPr/>
-        </p:nvSpPr>
-        <p:spPr>
-          <a:xfrm>
-            <a:off x="731520" y="3072384"/>
-            <a:ext cx="384048" cy="384048"/>
-          </a:xfrm>
-          <a:prstGeom prst="rect">
-            <a:avLst/>
-          </a:prstGeom>
-          <a:solidFill>
-            <a:srgbClr val="43B02A"/>
-          </a:solidFill>
-          <a:ln>
-            <a:noFill/>
-          </a:ln>
-          <a:effectLst/>
-        </p:spPr>
-        <p:style>
-          <a:lnRef idx="1">
-            <a:schemeClr val="accent1"/>
-          </a:lnRef>
-          <a:fillRef idx="3">
-            <a:schemeClr val="accent1"/>
-          </a:fillRef>
-          <a:effectRef idx="2">
-            <a:schemeClr val="accent1"/>
-          </a:effectRef>
-          <a:fontRef idx="minor">
-            <a:schemeClr val="lt1"/>
-          </a:fontRef>
-        </p:style>
-        <p:txBody>
-          <a:bodyPr rtlCol="0" anchor="ctr"/>
-          <a:lstStyle/>
-          <a:p>
-            <a:pPr algn="ctr"/>
-          </a:p>
-        </p:txBody>
-      </p:sp>
-      <p:sp>
-        <p:nvSpPr>
-          <p:cNvPr id="21" name="Rectangle 20"/>
-          <p:cNvSpPr/>
-          <p:nvPr/>
-        </p:nvSpPr>
-        <p:spPr>
-          <a:xfrm>
-            <a:off x="1197864" y="3072384"/>
-            <a:ext cx="384048" cy="384048"/>
-          </a:xfrm>
-          <a:prstGeom prst="rect">
-            <a:avLst/>
-          </a:prstGeom>
-          <a:solidFill>
-            <a:srgbClr val="43B02A"/>
-          </a:solidFill>
-          <a:ln>
-            <a:noFill/>
-          </a:ln>
-          <a:effectLst/>
-        </p:spPr>
-        <p:style>
-          <a:lnRef idx="1">
-            <a:schemeClr val="accent1"/>
-          </a:lnRef>
-          <a:fillRef idx="3">
-            <a:schemeClr val="accent1"/>
-          </a:fillRef>
-          <a:effectRef idx="2">
-            <a:schemeClr val="accent1"/>
-          </a:effectRef>
-          <a:fontRef idx="minor">
-            <a:schemeClr val="lt1"/>
-          </a:fontRef>
-        </p:style>
-        <p:txBody>
-          <a:bodyPr rtlCol="0" anchor="ctr"/>
-          <a:lstStyle/>
-          <a:p>
-            <a:pPr algn="ctr"/>
-          </a:p>
-        </p:txBody>
-      </p:sp>
-      <p:sp>
-        <p:nvSpPr>
-          <p:cNvPr id="22" name="Rectangle 21"/>
-          <p:cNvSpPr/>
-          <p:nvPr/>
-        </p:nvSpPr>
-        <p:spPr>
-          <a:xfrm>
-            <a:off x="1664208" y="3072384"/>
-            <a:ext cx="384048" cy="384048"/>
-          </a:xfrm>
-          <a:prstGeom prst="rect">
-            <a:avLst/>
-          </a:prstGeom>
-          <a:solidFill>
-            <a:srgbClr val="43B02A"/>
-          </a:solidFill>
-          <a:ln>
-            <a:noFill/>
-          </a:ln>
-          <a:effectLst/>
-        </p:spPr>
-        <p:style>
-          <a:lnRef idx="1">
-            <a:schemeClr val="accent1"/>
-          </a:lnRef>
-          <a:fillRef idx="3">
-            <a:schemeClr val="accent1"/>
-          </a:fillRef>
-          <a:effectRef idx="2">
-            <a:schemeClr val="accent1"/>
-          </a:effectRef>
-          <a:fontRef idx="minor">
-            <a:schemeClr val="lt1"/>
-          </a:fontRef>
-        </p:style>
-        <p:txBody>
-          <a:bodyPr rtlCol="0" anchor="ctr"/>
-          <a:lstStyle/>
-          <a:p>
-            <a:pPr algn="ctr"/>
-          </a:p>
-        </p:txBody>
-      </p:sp>
-      <p:sp>
-        <p:nvSpPr>
-          <p:cNvPr id="23" name="Rectangle 22"/>
-          <p:cNvSpPr/>
-          <p:nvPr/>
-        </p:nvSpPr>
-        <p:spPr>
-          <a:xfrm>
-            <a:off x="2130552" y="3072384"/>
-            <a:ext cx="384048" cy="384048"/>
-          </a:xfrm>
-          <a:prstGeom prst="rect">
-            <a:avLst/>
-          </a:prstGeom>
-          <a:solidFill>
-            <a:srgbClr val="43B02A"/>
-          </a:solidFill>
-          <a:ln>
-            <a:noFill/>
-          </a:ln>
-          <a:effectLst/>
-        </p:spPr>
-        <p:style>
-          <a:lnRef idx="1">
-            <a:schemeClr val="accent1"/>
-          </a:lnRef>
-          <a:fillRef idx="3">
-            <a:schemeClr val="accent1"/>
-          </a:fillRef>
-          <a:effectRef idx="2">
-            <a:schemeClr val="accent1"/>
-          </a:effectRef>
-          <a:fontRef idx="minor">
-            <a:schemeClr val="lt1"/>
-          </a:fontRef>
-        </p:style>
-        <p:txBody>
-          <a:bodyPr rtlCol="0" anchor="ctr"/>
-          <a:lstStyle/>
-          <a:p>
-            <a:pPr algn="ctr"/>
-          </a:p>
-        </p:txBody>
-      </p:sp>
-      <p:sp>
-        <p:nvSpPr>
-          <p:cNvPr id="24" name="Rectangle 23"/>
-          <p:cNvSpPr/>
-          <p:nvPr/>
-        </p:nvSpPr>
-        <p:spPr>
-          <a:xfrm>
-            <a:off x="2596896" y="3072384"/>
-            <a:ext cx="384048" cy="384048"/>
-          </a:xfrm>
-          <a:prstGeom prst="rect">
-            <a:avLst/>
-          </a:prstGeom>
-          <a:solidFill>
-            <a:srgbClr val="A8DC98"/>
-          </a:solidFill>
-          <a:ln>
-            <a:noFill/>
-          </a:ln>
-          <a:effectLst/>
-        </p:spPr>
-        <p:style>
-          <a:lnRef idx="1">
-            <a:schemeClr val="accent1"/>
-          </a:lnRef>
-          <a:fillRef idx="3">
-            <a:schemeClr val="accent1"/>
-          </a:fillRef>
-          <a:effectRef idx="2">
-            <a:schemeClr val="accent1"/>
-          </a:effectRef>
-          <a:fontRef idx="minor">
-            <a:schemeClr val="lt1"/>
-          </a:fontRef>
-        </p:style>
-        <p:txBody>
-          <a:bodyPr rtlCol="0" anchor="ctr"/>
-          <a:lstStyle/>
-          <a:p>
-            <a:pPr algn="ctr"/>
-          </a:p>
-        </p:txBody>
-      </p:sp>
-      <p:sp>
-        <p:nvSpPr>
-          <p:cNvPr id="25" name="Rectangle 24"/>
-          <p:cNvSpPr/>
-          <p:nvPr/>
-        </p:nvSpPr>
-        <p:spPr>
-          <a:xfrm>
-            <a:off x="3063240" y="3072384"/>
-            <a:ext cx="384048" cy="384048"/>
-          </a:xfrm>
-          <a:prstGeom prst="rect">
-            <a:avLst/>
-          </a:prstGeom>
-          <a:solidFill>
-            <a:srgbClr val="A8DC98"/>
-          </a:solidFill>
-          <a:ln>
-            <a:noFill/>
-          </a:ln>
-          <a:effectLst/>
-        </p:spPr>
-        <p:style>
-          <a:lnRef idx="1">
-            <a:schemeClr val="accent1"/>
-          </a:lnRef>
-          <a:fillRef idx="3">
-            <a:schemeClr val="accent1"/>
-          </a:fillRef>
-          <a:effectRef idx="2">
-            <a:schemeClr val="accent1"/>
-          </a:effectRef>
-          <a:fontRef idx="minor">
-            <a:schemeClr val="lt1"/>
-          </a:fontRef>
-        </p:style>
-        <p:txBody>
-          <a:bodyPr rtlCol="0" anchor="ctr"/>
-          <a:lstStyle/>
-          <a:p>
-            <a:pPr algn="ctr"/>
-          </a:p>
-        </p:txBody>
-      </p:sp>
-      <p:sp>
-        <p:nvSpPr>
-          <p:cNvPr id="26" name="Rectangle 25"/>
-          <p:cNvSpPr/>
-          <p:nvPr/>
-        </p:nvSpPr>
-        <p:spPr>
-          <a:xfrm>
-            <a:off x="3529584" y="3072384"/>
-            <a:ext cx="384048" cy="384048"/>
-          </a:xfrm>
-          <a:prstGeom prst="rect">
-            <a:avLst/>
-          </a:prstGeom>
-          <a:solidFill>
-            <a:srgbClr val="A8DC98"/>
-          </a:solidFill>
-          <a:ln>
-            <a:noFill/>
-          </a:ln>
-          <a:effectLst/>
-        </p:spPr>
-        <p:style>
-          <a:lnRef idx="1">
-            <a:schemeClr val="accent1"/>
-          </a:lnRef>
-          <a:fillRef idx="3">
-            <a:schemeClr val="accent1"/>
-          </a:fillRef>
-          <a:effectRef idx="2">
-            <a:schemeClr val="accent1"/>
-          </a:effectRef>
-          <a:fontRef idx="minor">
-            <a:schemeClr val="lt1"/>
-          </a:fontRef>
-        </p:style>
-        <p:txBody>
-          <a:bodyPr rtlCol="0" anchor="ctr"/>
-          <a:lstStyle/>
-          <a:p>
-            <a:pPr algn="ctr"/>
-          </a:p>
-        </p:txBody>
-      </p:sp>
-      <p:sp>
-        <p:nvSpPr>
-          <p:cNvPr id="27" name="Rectangle 26"/>
-          <p:cNvSpPr/>
-          <p:nvPr/>
-        </p:nvSpPr>
-        <p:spPr>
-          <a:xfrm>
-            <a:off x="3995928" y="3072384"/>
-            <a:ext cx="384048" cy="384048"/>
-          </a:xfrm>
-          <a:prstGeom prst="rect">
-            <a:avLst/>
-          </a:prstGeom>
-          <a:solidFill>
-            <a:srgbClr val="A8DC98"/>
-          </a:solidFill>
-          <a:ln>
-            <a:noFill/>
-          </a:ln>
-          <a:effectLst/>
-        </p:spPr>
-        <p:style>
-          <a:lnRef idx="1">
-            <a:schemeClr val="accent1"/>
-          </a:lnRef>
-          <a:fillRef idx="3">
-            <a:schemeClr val="accent1"/>
-          </a:fillRef>
-          <a:effectRef idx="2">
-            <a:schemeClr val="accent1"/>
-          </a:effectRef>
-          <a:fontRef idx="minor">
-            <a:schemeClr val="lt1"/>
-          </a:fontRef>
-        </p:style>
-        <p:txBody>
-          <a:bodyPr rtlCol="0" anchor="ctr"/>
-          <a:lstStyle/>
-          <a:p>
-            <a:pPr algn="ctr"/>
-          </a:p>
-        </p:txBody>
-      </p:sp>
-      <p:sp>
-        <p:nvSpPr>
-          <p:cNvPr id="28" name="Rectangle 27"/>
-          <p:cNvSpPr/>
-          <p:nvPr/>
-        </p:nvSpPr>
-        <p:spPr>
-          <a:xfrm>
-            <a:off x="4462272" y="3072384"/>
-            <a:ext cx="384048" cy="384048"/>
-          </a:xfrm>
-          <a:prstGeom prst="rect">
-            <a:avLst/>
-          </a:prstGeom>
-          <a:solidFill>
-            <a:srgbClr val="A8DC98"/>
-          </a:solidFill>
-          <a:ln>
-            <a:noFill/>
-          </a:ln>
-          <a:effectLst/>
-        </p:spPr>
-        <p:style>
-          <a:lnRef idx="1">
-            <a:schemeClr val="accent1"/>
-          </a:lnRef>
-          <a:fillRef idx="3">
-            <a:schemeClr val="accent1"/>
-          </a:fillRef>
-          <a:effectRef idx="2">
-            <a:schemeClr val="accent1"/>
-          </a:effectRef>
-          <a:fontRef idx="minor">
-            <a:schemeClr val="lt1"/>
-          </a:fontRef>
-        </p:style>
-        <p:txBody>
-          <a:bodyPr rtlCol="0" anchor="ctr"/>
-          <a:lstStyle/>
-          <a:p>
-            <a:pPr algn="ctr"/>
-          </a:p>
-        </p:txBody>
-      </p:sp>
-      <p:sp>
-        <p:nvSpPr>
-          <p:cNvPr id="29" name="Rectangle 28"/>
-          <p:cNvSpPr/>
-          <p:nvPr/>
-        </p:nvSpPr>
-        <p:spPr>
-          <a:xfrm>
-            <a:off x="4928616" y="3072384"/>
-            <a:ext cx="384048" cy="384048"/>
-          </a:xfrm>
-          <a:prstGeom prst="rect">
-            <a:avLst/>
-          </a:prstGeom>
-          <a:solidFill>
-            <a:srgbClr val="A8DC98"/>
-          </a:solidFill>
-          <a:ln>
-            <a:noFill/>
-          </a:ln>
-          <a:effectLst/>
-        </p:spPr>
-        <p:style>
-          <a:lnRef idx="1">
-            <a:schemeClr val="accent1"/>
-          </a:lnRef>
-          <a:fillRef idx="3">
-            <a:schemeClr val="accent1"/>
-          </a:fillRef>
-          <a:effectRef idx="2">
-            <a:schemeClr val="accent1"/>
-          </a:effectRef>
-          <a:fontRef idx="minor">
-            <a:schemeClr val="lt1"/>
-          </a:fontRef>
-        </p:style>
-        <p:txBody>
-          <a:bodyPr rtlCol="0" anchor="ctr"/>
-          <a:lstStyle/>
-          <a:p>
-            <a:pPr algn="ctr"/>
-          </a:p>
-        </p:txBody>
-      </p:sp>
-      <p:sp>
-        <p:nvSpPr>
-          <p:cNvPr id="30" name="Rectangle 29"/>
-          <p:cNvSpPr/>
-          <p:nvPr/>
-        </p:nvSpPr>
-        <p:spPr>
-          <a:xfrm>
-            <a:off x="5394960" y="3072384"/>
-            <a:ext cx="384048" cy="384048"/>
-          </a:xfrm>
-          <a:prstGeom prst="rect">
-            <a:avLst/>
-          </a:prstGeom>
-          <a:solidFill>
-            <a:srgbClr val="A8DC98"/>
-          </a:solidFill>
-          <a:ln>
-            <a:noFill/>
-          </a:ln>
-          <a:effectLst/>
-        </p:spPr>
-        <p:style>
-          <a:lnRef idx="1">
-            <a:schemeClr val="accent1"/>
-          </a:lnRef>
-          <a:fillRef idx="3">
-            <a:schemeClr val="accent1"/>
-          </a:fillRef>
-          <a:effectRef idx="2">
-            <a:schemeClr val="accent1"/>
-          </a:effectRef>
-          <a:fontRef idx="minor">
-            <a:schemeClr val="lt1"/>
-          </a:fontRef>
-        </p:style>
-        <p:txBody>
-          <a:bodyPr rtlCol="0" anchor="ctr"/>
-          <a:lstStyle/>
-          <a:p>
-            <a:pPr algn="ctr"/>
-          </a:p>
-        </p:txBody>
-      </p:sp>
-      <p:sp>
-        <p:nvSpPr>
-          <p:cNvPr id="31" name="Rectangle 30"/>
-          <p:cNvSpPr/>
-          <p:nvPr/>
-        </p:nvSpPr>
-        <p:spPr>
-          <a:xfrm>
-            <a:off x="5861304" y="3072384"/>
-            <a:ext cx="384048" cy="384048"/>
-          </a:xfrm>
-          <a:prstGeom prst="rect">
-            <a:avLst/>
-          </a:prstGeom>
-          <a:solidFill>
-            <a:srgbClr val="A8DC98"/>
-          </a:solidFill>
-          <a:ln>
-            <a:noFill/>
-          </a:ln>
-          <a:effectLst/>
-        </p:spPr>
-        <p:style>
-          <a:lnRef idx="1">
-            <a:schemeClr val="accent1"/>
-          </a:lnRef>
-          <a:fillRef idx="3">
-            <a:schemeClr val="accent1"/>
-          </a:fillRef>
-          <a:effectRef idx="2">
-            <a:schemeClr val="accent1"/>
-          </a:effectRef>
-          <a:fontRef idx="minor">
-            <a:schemeClr val="lt1"/>
-          </a:fontRef>
-        </p:style>
-        <p:txBody>
-          <a:bodyPr rtlCol="0" anchor="ctr"/>
-          <a:lstStyle/>
-          <a:p>
-            <a:pPr algn="ctr"/>
-          </a:p>
-        </p:txBody>
-      </p:sp>
-      <p:sp>
-        <p:nvSpPr>
-          <p:cNvPr id="32" name="Rectangle 31"/>
-          <p:cNvSpPr/>
-          <p:nvPr/>
-        </p:nvSpPr>
-        <p:spPr>
-          <a:xfrm>
-            <a:off x="6327648" y="3072384"/>
-            <a:ext cx="384048" cy="384048"/>
-          </a:xfrm>
-          <a:prstGeom prst="rect">
-            <a:avLst/>
-          </a:prstGeom>
-          <a:solidFill>
-            <a:srgbClr val="A8DC98"/>
-          </a:solidFill>
-          <a:ln>
-            <a:noFill/>
-          </a:ln>
-          <a:effectLst/>
-        </p:spPr>
-        <p:style>
-          <a:lnRef idx="1">
-            <a:schemeClr val="accent1"/>
-          </a:lnRef>
-          <a:fillRef idx="3">
-            <a:schemeClr val="accent1"/>
-          </a:fillRef>
-          <a:effectRef idx="2">
-            <a:schemeClr val="accent1"/>
-          </a:effectRef>
-          <a:fontRef idx="minor">
-            <a:schemeClr val="lt1"/>
-          </a:fontRef>
-        </p:style>
-        <p:txBody>
-          <a:bodyPr rtlCol="0" anchor="ctr"/>
-          <a:lstStyle/>
-          <a:p>
-            <a:pPr algn="ctr"/>
-          </a:p>
-        </p:txBody>
-      </p:sp>
-      <p:sp>
-        <p:nvSpPr>
-          <p:cNvPr id="33" name="Rectangle 32"/>
-          <p:cNvSpPr/>
-          <p:nvPr/>
-        </p:nvSpPr>
-        <p:spPr>
-          <a:xfrm>
-            <a:off x="6793992" y="3072384"/>
-            <a:ext cx="384048" cy="384048"/>
-          </a:xfrm>
-          <a:prstGeom prst="rect">
-            <a:avLst/>
-          </a:prstGeom>
-          <a:solidFill>
-            <a:srgbClr val="A8DC98"/>
-          </a:solidFill>
-          <a:ln>
-            <a:noFill/>
-          </a:ln>
-          <a:effectLst/>
-        </p:spPr>
-        <p:style>
-          <a:lnRef idx="1">
-            <a:schemeClr val="accent1"/>
-          </a:lnRef>
-          <a:fillRef idx="3">
-            <a:schemeClr val="accent1"/>
-          </a:fillRef>
-          <a:effectRef idx="2">
-            <a:schemeClr val="accent1"/>
-          </a:effectRef>
-          <a:fontRef idx="minor">
-            <a:schemeClr val="lt1"/>
-          </a:fontRef>
-        </p:style>
-        <p:txBody>
-          <a:bodyPr rtlCol="0" anchor="ctr"/>
-          <a:lstStyle/>
-          <a:p>
-            <a:pPr algn="ctr"/>
-          </a:p>
-        </p:txBody>
-      </p:sp>
-      <p:sp>
-        <p:nvSpPr>
-          <p:cNvPr id="34" name="Rectangle 33"/>
-          <p:cNvSpPr/>
-          <p:nvPr/>
-        </p:nvSpPr>
-        <p:spPr>
-          <a:xfrm>
-            <a:off x="731520" y="3538728"/>
-            <a:ext cx="384048" cy="384048"/>
-          </a:xfrm>
-          <a:prstGeom prst="rect">
-            <a:avLst/>
-          </a:prstGeom>
-          <a:solidFill>
-            <a:srgbClr val="A8DC98"/>
-          </a:solidFill>
-          <a:ln>
-            <a:noFill/>
-          </a:ln>
-          <a:effectLst/>
-        </p:spPr>
-        <p:style>
-          <a:lnRef idx="1">
-            <a:schemeClr val="accent1"/>
-          </a:lnRef>
-          <a:fillRef idx="3">
-            <a:schemeClr val="accent1"/>
-          </a:fillRef>
-          <a:effectRef idx="2">
-            <a:schemeClr val="accent1"/>
-          </a:effectRef>
-          <a:fontRef idx="minor">
-            <a:schemeClr val="lt1"/>
-          </a:fontRef>
-        </p:style>
-        <p:txBody>
-          <a:bodyPr rtlCol="0" anchor="ctr"/>
-          <a:lstStyle/>
-          <a:p>
-            <a:pPr algn="ctr"/>
-          </a:p>
-        </p:txBody>
-      </p:sp>
-      <p:sp>
-        <p:nvSpPr>
-          <p:cNvPr id="35" name="Rectangle 34"/>
-          <p:cNvSpPr/>
-          <p:nvPr/>
-        </p:nvSpPr>
-        <p:spPr>
-          <a:xfrm>
-            <a:off x="1197864" y="3538728"/>
-            <a:ext cx="384048" cy="384048"/>
-          </a:xfrm>
-          <a:prstGeom prst="rect">
-            <a:avLst/>
-          </a:prstGeom>
-          <a:solidFill>
-            <a:srgbClr val="A8DC98"/>
-          </a:solidFill>
-          <a:ln>
-            <a:noFill/>
-          </a:ln>
-          <a:effectLst/>
-        </p:spPr>
-        <p:style>
-          <a:lnRef idx="1">
-            <a:schemeClr val="accent1"/>
-          </a:lnRef>
-          <a:fillRef idx="3">
-            <a:schemeClr val="accent1"/>
-          </a:fillRef>
-          <a:effectRef idx="2">
-            <a:schemeClr val="accent1"/>
-          </a:effectRef>
-          <a:fontRef idx="minor">
-            <a:schemeClr val="lt1"/>
-          </a:fontRef>
-        </p:style>
-        <p:txBody>
-          <a:bodyPr rtlCol="0" anchor="ctr"/>
-          <a:lstStyle/>
-          <a:p>
-            <a:pPr algn="ctr"/>
-          </a:p>
-        </p:txBody>
-      </p:sp>
-      <p:sp>
-        <p:nvSpPr>
-          <p:cNvPr id="36" name="Rectangle 35"/>
-          <p:cNvSpPr/>
-          <p:nvPr/>
-        </p:nvSpPr>
-        <p:spPr>
-          <a:xfrm>
-            <a:off x="1664208" y="3538728"/>
-            <a:ext cx="384048" cy="384048"/>
-          </a:xfrm>
-          <a:prstGeom prst="rect">
-            <a:avLst/>
-          </a:prstGeom>
-          <a:solidFill>
-            <a:srgbClr val="A8DC98"/>
-          </a:solidFill>
-          <a:ln>
-            <a:noFill/>
-          </a:ln>
-          <a:effectLst/>
-        </p:spPr>
-        <p:style>
-          <a:lnRef idx="1">
-            <a:schemeClr val="accent1"/>
-          </a:lnRef>
-          <a:fillRef idx="3">
-            <a:schemeClr val="accent1"/>
-          </a:fillRef>
-          <a:effectRef idx="2">
-            <a:schemeClr val="accent1"/>
-          </a:effectRef>
-          <a:fontRef idx="minor">
-            <a:schemeClr val="lt1"/>
-          </a:fontRef>
-        </p:style>
-        <p:txBody>
-          <a:bodyPr rtlCol="0" anchor="ctr"/>
-          <a:lstStyle/>
-          <a:p>
-            <a:pPr algn="ctr"/>
-          </a:p>
-        </p:txBody>
-      </p:sp>
-      <p:sp>
-        <p:nvSpPr>
-          <p:cNvPr id="37" name="Rectangle 36"/>
-          <p:cNvSpPr/>
-          <p:nvPr/>
-        </p:nvSpPr>
-        <p:spPr>
-          <a:xfrm>
-            <a:off x="2130552" y="3538728"/>
-            <a:ext cx="384048" cy="384048"/>
-          </a:xfrm>
-          <a:prstGeom prst="rect">
-            <a:avLst/>
-          </a:prstGeom>
-          <a:solidFill>
-            <a:srgbClr val="A8DC98"/>
-          </a:solidFill>
-          <a:ln>
-            <a:noFill/>
-          </a:ln>
-          <a:effectLst/>
-        </p:spPr>
-        <p:style>
-          <a:lnRef idx="1">
-            <a:schemeClr val="accent1"/>
-          </a:lnRef>
-          <a:fillRef idx="3">
-            <a:schemeClr val="accent1"/>
-          </a:fillRef>
-          <a:effectRef idx="2">
-            <a:schemeClr val="accent1"/>
-          </a:effectRef>
-          <a:fontRef idx="minor">
-            <a:schemeClr val="lt1"/>
-          </a:fontRef>
-        </p:style>
-        <p:txBody>
-          <a:bodyPr rtlCol="0" anchor="ctr"/>
-          <a:lstStyle/>
-          <a:p>
-            <a:pPr algn="ctr"/>
-          </a:p>
-        </p:txBody>
-      </p:sp>
-      <p:sp>
-        <p:nvSpPr>
-          <p:cNvPr id="38" name="Rectangle 37"/>
-          <p:cNvSpPr/>
-          <p:nvPr/>
-        </p:nvSpPr>
-        <p:spPr>
-          <a:xfrm>
-            <a:off x="2596896" y="3538728"/>
-            <a:ext cx="384048" cy="384048"/>
-          </a:xfrm>
-          <a:prstGeom prst="rect">
-            <a:avLst/>
-          </a:prstGeom>
-          <a:solidFill>
-            <a:srgbClr val="A8DC98"/>
-          </a:solidFill>
-          <a:ln>
-            <a:noFill/>
-          </a:ln>
-          <a:effectLst/>
-        </p:spPr>
-        <p:style>
-          <a:lnRef idx="1">
-            <a:schemeClr val="accent1"/>
-          </a:lnRef>
-          <a:fillRef idx="3">
-            <a:schemeClr val="accent1"/>
-          </a:fillRef>
-          <a:effectRef idx="2">
-            <a:schemeClr val="accent1"/>
-          </a:effectRef>
-          <a:fontRef idx="minor">
-            <a:schemeClr val="lt1"/>
-          </a:fontRef>
-        </p:style>
-        <p:txBody>
-          <a:bodyPr rtlCol="0" anchor="ctr"/>
-          <a:lstStyle/>
-          <a:p>
-            <a:pPr algn="ctr"/>
-          </a:p>
-        </p:txBody>
-      </p:sp>
-      <p:sp>
-        <p:nvSpPr>
-          <p:cNvPr id="39" name="Rectangle 38"/>
-          <p:cNvSpPr/>
-          <p:nvPr/>
-        </p:nvSpPr>
-        <p:spPr>
-          <a:xfrm>
-            <a:off x="3063240" y="3538728"/>
-            <a:ext cx="384048" cy="384048"/>
-          </a:xfrm>
-          <a:prstGeom prst="rect">
-            <a:avLst/>
-          </a:prstGeom>
-          <a:solidFill>
-            <a:srgbClr val="A8DC98"/>
-          </a:solidFill>
-          <a:ln>
-            <a:noFill/>
-          </a:ln>
-          <a:effectLst/>
-        </p:spPr>
-        <p:style>
-          <a:lnRef idx="1">
-            <a:schemeClr val="accent1"/>
-          </a:lnRef>
-          <a:fillRef idx="3">
-            <a:schemeClr val="accent1"/>
-          </a:fillRef>
-          <a:effectRef idx="2">
-            <a:schemeClr val="accent1"/>
-          </a:effectRef>
-          <a:fontRef idx="minor">
-            <a:schemeClr val="lt1"/>
-          </a:fontRef>
-        </p:style>
-        <p:txBody>
-          <a:bodyPr rtlCol="0" anchor="ctr"/>
-          <a:lstStyle/>
-          <a:p>
-            <a:pPr algn="ctr"/>
-          </a:p>
-        </p:txBody>
-      </p:sp>
-      <p:sp>
-        <p:nvSpPr>
-          <p:cNvPr id="40" name="Rectangle 39"/>
-          <p:cNvSpPr/>
-          <p:nvPr/>
-        </p:nvSpPr>
-        <p:spPr>
-          <a:xfrm>
-            <a:off x="3529584" y="3538728"/>
-            <a:ext cx="384048" cy="384048"/>
-          </a:xfrm>
-          <a:prstGeom prst="rect">
-            <a:avLst/>
-          </a:prstGeom>
-          <a:solidFill>
-            <a:srgbClr val="A8DC98"/>
-          </a:solidFill>
-          <a:ln>
-            <a:noFill/>
-          </a:ln>
-          <a:effectLst/>
-        </p:spPr>
-        <p:style>
-          <a:lnRef idx="1">
-            <a:schemeClr val="accent1"/>
-          </a:lnRef>
-          <a:fillRef idx="3">
-            <a:schemeClr val="accent1"/>
-          </a:fillRef>
-          <a:effectRef idx="2">
-            <a:schemeClr val="accent1"/>
-          </a:effectRef>
-          <a:fontRef idx="minor">
-            <a:schemeClr val="lt1"/>
-          </a:fontRef>
-        </p:style>
-        <p:txBody>
-          <a:bodyPr rtlCol="0" anchor="ctr"/>
-          <a:lstStyle/>
-          <a:p>
-            <a:pPr algn="ctr"/>
-          </a:p>
-        </p:txBody>
-      </p:sp>
-      <p:sp>
-        <p:nvSpPr>
-          <p:cNvPr id="41" name="Rectangle 40"/>
-          <p:cNvSpPr/>
-          <p:nvPr/>
-        </p:nvSpPr>
-        <p:spPr>
-          <a:xfrm>
-            <a:off x="3995928" y="3538728"/>
-            <a:ext cx="384048" cy="384048"/>
-          </a:xfrm>
-          <a:prstGeom prst="rect">
-            <a:avLst/>
-          </a:prstGeom>
-          <a:solidFill>
-            <a:srgbClr val="A8DC98"/>
-          </a:solidFill>
-          <a:ln>
-            <a:noFill/>
-          </a:ln>
-          <a:effectLst/>
-        </p:spPr>
-        <p:style>
-          <a:lnRef idx="1">
-            <a:schemeClr val="accent1"/>
-          </a:lnRef>
-          <a:fillRef idx="3">
-            <a:schemeClr val="accent1"/>
-          </a:fillRef>
-          <a:effectRef idx="2">
-            <a:schemeClr val="accent1"/>
-          </a:effectRef>
-          <a:fontRef idx="minor">
-            <a:schemeClr val="lt1"/>
-          </a:fontRef>
-        </p:style>
-        <p:txBody>
-          <a:bodyPr rtlCol="0" anchor="ctr"/>
-          <a:lstStyle/>
-          <a:p>
-            <a:pPr algn="ctr"/>
-          </a:p>
-        </p:txBody>
-      </p:sp>
-      <p:sp>
-        <p:nvSpPr>
-          <p:cNvPr id="42" name="Rectangle 41"/>
-          <p:cNvSpPr/>
-          <p:nvPr/>
-        </p:nvSpPr>
-        <p:spPr>
-          <a:xfrm>
-            <a:off x="4462272" y="3538728"/>
-            <a:ext cx="384048" cy="384048"/>
-          </a:xfrm>
-          <a:prstGeom prst="rect">
-            <a:avLst/>
-          </a:prstGeom>
-          <a:solidFill>
-            <a:srgbClr val="A8DC98"/>
-          </a:solidFill>
-          <a:ln>
-            <a:noFill/>
-          </a:ln>
-          <a:effectLst/>
-        </p:spPr>
-        <p:style>
-          <a:lnRef idx="1">
-            <a:schemeClr val="accent1"/>
-          </a:lnRef>
-          <a:fillRef idx="3">
-            <a:schemeClr val="accent1"/>
-          </a:fillRef>
-          <a:effectRef idx="2">
-            <a:schemeClr val="accent1"/>
-          </a:effectRef>
-          <a:fontRef idx="minor">
-            <a:schemeClr val="lt1"/>
-          </a:fontRef>
-        </p:style>
-        <p:txBody>
-          <a:bodyPr rtlCol="0" anchor="ctr"/>
-          <a:lstStyle/>
-          <a:p>
-            <a:pPr algn="ctr"/>
-          </a:p>
-        </p:txBody>
-      </p:sp>
-      <p:sp>
-        <p:nvSpPr>
-          <p:cNvPr id="43" name="Rectangle 42"/>
-          <p:cNvSpPr/>
-          <p:nvPr/>
-        </p:nvSpPr>
-        <p:spPr>
-          <a:xfrm>
-            <a:off x="4928616" y="3538728"/>
-            <a:ext cx="384048" cy="384048"/>
-          </a:xfrm>
-          <a:prstGeom prst="rect">
-            <a:avLst/>
-          </a:prstGeom>
-          <a:solidFill>
-            <a:srgbClr val="A8DC98"/>
-          </a:solidFill>
-          <a:ln>
-            <a:noFill/>
-          </a:ln>
-          <a:effectLst/>
-        </p:spPr>
-        <p:style>
-          <a:lnRef idx="1">
-            <a:schemeClr val="accent1"/>
-          </a:lnRef>
-          <a:fillRef idx="3">
-            <a:schemeClr val="accent1"/>
-          </a:fillRef>
-          <a:effectRef idx="2">
-            <a:schemeClr val="accent1"/>
-          </a:effectRef>
-          <a:fontRef idx="minor">
-            <a:schemeClr val="lt1"/>
-          </a:fontRef>
-        </p:style>
-        <p:txBody>
-          <a:bodyPr rtlCol="0" anchor="ctr"/>
-          <a:lstStyle/>
-          <a:p>
-            <a:pPr algn="ctr"/>
-          </a:p>
-        </p:txBody>
-      </p:sp>
-      <p:sp>
-        <p:nvSpPr>
-          <p:cNvPr id="44" name="Rectangle 43"/>
-          <p:cNvSpPr/>
-          <p:nvPr/>
-        </p:nvSpPr>
-        <p:spPr>
-          <a:xfrm>
-            <a:off x="5394960" y="3538728"/>
-            <a:ext cx="384048" cy="384048"/>
-          </a:xfrm>
-          <a:prstGeom prst="rect">
-            <a:avLst/>
-          </a:prstGeom>
-          <a:solidFill>
-            <a:srgbClr val="EB5757"/>
-          </a:solidFill>
-          <a:ln>
-            <a:noFill/>
-          </a:ln>
-          <a:effectLst/>
-        </p:spPr>
-        <p:style>
-          <a:lnRef idx="1">
-            <a:schemeClr val="accent1"/>
-          </a:lnRef>
-          <a:fillRef idx="3">
-            <a:schemeClr val="accent1"/>
-          </a:fillRef>
-          <a:effectRef idx="2">
-            <a:schemeClr val="accent1"/>
-          </a:effectRef>
-          <a:fontRef idx="minor">
-            <a:schemeClr val="lt1"/>
-          </a:fontRef>
-        </p:style>
-        <p:txBody>
-          <a:bodyPr rtlCol="0" anchor="ctr"/>
-          <a:lstStyle/>
-          <a:p>
-            <a:pPr algn="ctr"/>
-          </a:p>
-        </p:txBody>
-      </p:sp>
-      <p:sp>
-        <p:nvSpPr>
-          <p:cNvPr id="45" name="Rectangle 44"/>
-          <p:cNvSpPr/>
-          <p:nvPr/>
-        </p:nvSpPr>
-        <p:spPr>
-          <a:xfrm>
-            <a:off x="5861304" y="3538728"/>
-            <a:ext cx="384048" cy="384048"/>
-          </a:xfrm>
-          <a:prstGeom prst="rect">
-            <a:avLst/>
-          </a:prstGeom>
-          <a:solidFill>
-            <a:srgbClr val="EB5757"/>
-          </a:solidFill>
-          <a:ln>
-            <a:noFill/>
-          </a:ln>
-          <a:effectLst/>
-        </p:spPr>
-        <p:style>
-          <a:lnRef idx="1">
-            <a:schemeClr val="accent1"/>
-          </a:lnRef>
-          <a:fillRef idx="3">
-            <a:schemeClr val="accent1"/>
-          </a:fillRef>
-          <a:effectRef idx="2">
-            <a:schemeClr val="accent1"/>
-          </a:effectRef>
-          <a:fontRef idx="minor">
-            <a:schemeClr val="lt1"/>
-          </a:fontRef>
-        </p:style>
-        <p:txBody>
-          <a:bodyPr rtlCol="0" anchor="ctr"/>
-          <a:lstStyle/>
-          <a:p>
-            <a:pPr algn="ctr"/>
-          </a:p>
-        </p:txBody>
-      </p:sp>
-      <p:sp>
-        <p:nvSpPr>
-          <p:cNvPr id="46" name="Rectangle 45"/>
-          <p:cNvSpPr/>
-          <p:nvPr/>
-        </p:nvSpPr>
-        <p:spPr>
-          <a:xfrm>
-            <a:off x="6327648" y="3538728"/>
-            <a:ext cx="384048" cy="384048"/>
-          </a:xfrm>
-          <a:prstGeom prst="rect">
-            <a:avLst/>
-          </a:prstGeom>
-          <a:solidFill>
-            <a:srgbClr val="EB5757"/>
-          </a:solidFill>
-          <a:ln>
-            <a:noFill/>
-          </a:ln>
-          <a:effectLst/>
-        </p:spPr>
-        <p:style>
-          <a:lnRef idx="1">
-            <a:schemeClr val="accent1"/>
-          </a:lnRef>
-          <a:fillRef idx="3">
-            <a:schemeClr val="accent1"/>
-          </a:fillRef>
-          <a:effectRef idx="2">
-            <a:schemeClr val="accent1"/>
-          </a:effectRef>
-          <a:fontRef idx="minor">
-            <a:schemeClr val="lt1"/>
-          </a:fontRef>
-        </p:style>
-        <p:txBody>
-          <a:bodyPr rtlCol="0" anchor="ctr"/>
-          <a:lstStyle/>
-          <a:p>
-            <a:pPr algn="ctr"/>
-          </a:p>
-        </p:txBody>
-      </p:sp>
-      <p:sp>
-        <p:nvSpPr>
-          <p:cNvPr id="47" name="Rectangle 46"/>
-          <p:cNvSpPr/>
-          <p:nvPr/>
-        </p:nvSpPr>
-        <p:spPr>
-          <a:xfrm>
-            <a:off x="6793992" y="3538728"/>
-            <a:ext cx="384048" cy="384048"/>
-          </a:xfrm>
-          <a:prstGeom prst="rect">
-            <a:avLst/>
-          </a:prstGeom>
-          <a:solidFill>
-            <a:srgbClr val="EB5757"/>
-          </a:solidFill>
-          <a:ln>
-            <a:noFill/>
-          </a:ln>
-          <a:effectLst/>
-        </p:spPr>
-        <p:style>
-          <a:lnRef idx="1">
-            <a:schemeClr val="accent1"/>
-          </a:lnRef>
-          <a:fillRef idx="3">
-            <a:schemeClr val="accent1"/>
-          </a:fillRef>
-          <a:effectRef idx="2">
-            <a:schemeClr val="accent1"/>
-          </a:effectRef>
-          <a:fontRef idx="minor">
-            <a:schemeClr val="lt1"/>
-          </a:fontRef>
-        </p:style>
-        <p:txBody>
-          <a:bodyPr rtlCol="0" anchor="ctr"/>
-          <a:lstStyle/>
-          <a:p>
-            <a:pPr algn="ctr"/>
-          </a:p>
-        </p:txBody>
-      </p:sp>
-      <p:sp>
-        <p:nvSpPr>
-          <p:cNvPr id="48" name="Rectangle 47"/>
-          <p:cNvSpPr/>
-          <p:nvPr/>
-        </p:nvSpPr>
-        <p:spPr>
-          <a:xfrm>
-            <a:off x="731520" y="4325112"/>
-            <a:ext cx="146304" cy="146304"/>
-          </a:xfrm>
-          <a:prstGeom prst="rect">
-            <a:avLst/>
-          </a:prstGeom>
-          <a:solidFill>
-            <a:srgbClr val="43B02A"/>
-          </a:solidFill>
-          <a:ln>
-            <a:noFill/>
-          </a:ln>
-          <a:effectLst/>
-        </p:spPr>
-        <p:style>
-          <a:lnRef idx="1">
-            <a:schemeClr val="accent1"/>
-          </a:lnRef>
-          <a:fillRef idx="3">
-            <a:schemeClr val="accent1"/>
-          </a:fillRef>
-          <a:effectRef idx="2">
-            <a:schemeClr val="accent1"/>
-          </a:effectRef>
-          <a:fontRef idx="minor">
-            <a:schemeClr val="lt1"/>
-          </a:fontRef>
-        </p:style>
-        <p:txBody>
-          <a:bodyPr rtlCol="0" anchor="ctr"/>
-          <a:lstStyle/>
-          <a:p>
-            <a:pPr algn="ctr"/>
-          </a:p>
-        </p:txBody>
-      </p:sp>
-      <p:sp>
-        <p:nvSpPr>
-          <p:cNvPr id="49" name="TextBox 48"/>
-          <p:cNvSpPr txBox="1"/>
-          <p:nvPr/>
-        </p:nvSpPr>
-        <p:spPr>
-          <a:xfrm>
-            <a:off x="969264" y="4297680"/>
-            <a:ext cx="2651760" cy="228600"/>
-          </a:xfrm>
-          <a:prstGeom prst="rect">
-            <a:avLst/>
-          </a:prstGeom>
-          <a:noFill/>
-        </p:spPr>
-        <p:txBody>
-          <a:bodyPr wrap="square" lIns="0" rIns="0" tIns="0" bIns="0">
-            <a:spAutoFit/>
-          </a:bodyPr>
-          <a:lstStyle/>
-          <a:p>
-            <a:pPr algn="l">
-              <a:lnSpc>
-                <a:spcPct val="132000"/>
-              </a:lnSpc>
-            </a:pPr>
-            <a:r>
-              <a:rPr sz="1200" b="0">
-                <a:solidFill>
-                  <a:srgbClr val="6B7280"/>
-                </a:solidFill>
-                <a:latin typeface="Inter Tight"/>
-              </a:rPr>
-              <a:t>18 — категория совпала точно</a:t>
-            </a:r>
-          </a:p>
-        </p:txBody>
-      </p:sp>
-      <p:sp>
-        <p:nvSpPr>
-          <p:cNvPr id="50" name="Rectangle 49"/>
-          <p:cNvSpPr/>
-          <p:nvPr/>
-        </p:nvSpPr>
-        <p:spPr>
-          <a:xfrm>
-            <a:off x="3611880" y="4325112"/>
-            <a:ext cx="146304" cy="146304"/>
-          </a:xfrm>
-          <a:prstGeom prst="rect">
-            <a:avLst/>
-          </a:prstGeom>
-          <a:solidFill>
-            <a:srgbClr val="A8DC98"/>
-          </a:solidFill>
-          <a:ln>
-            <a:noFill/>
-          </a:ln>
-          <a:effectLst/>
-        </p:spPr>
-        <p:style>
-          <a:lnRef idx="1">
-            <a:schemeClr val="accent1"/>
-          </a:lnRef>
-          <a:fillRef idx="3">
-            <a:schemeClr val="accent1"/>
-          </a:fillRef>
-          <a:effectRef idx="2">
-            <a:schemeClr val="accent1"/>
-          </a:effectRef>
-          <a:fontRef idx="minor">
-            <a:schemeClr val="lt1"/>
-          </a:fontRef>
-        </p:style>
-        <p:txBody>
-          <a:bodyPr rtlCol="0" anchor="ctr"/>
-          <a:lstStyle/>
-          <a:p>
-            <a:pPr algn="ctr"/>
-          </a:p>
-        </p:txBody>
-      </p:sp>
-      <p:sp>
-        <p:nvSpPr>
-          <p:cNvPr id="51" name="TextBox 50"/>
-          <p:cNvSpPr txBox="1"/>
-          <p:nvPr/>
-        </p:nvSpPr>
-        <p:spPr>
-          <a:xfrm>
-            <a:off x="3849624" y="4297680"/>
-            <a:ext cx="2651760" cy="228600"/>
-          </a:xfrm>
-          <a:prstGeom prst="rect">
-            <a:avLst/>
-          </a:prstGeom>
-          <a:noFill/>
-        </p:spPr>
-        <p:txBody>
-          <a:bodyPr wrap="square" lIns="0" rIns="0" tIns="0" bIns="0">
-            <a:spAutoFit/>
-          </a:bodyPr>
-          <a:lstStyle/>
-          <a:p>
-            <a:pPr algn="l">
-              <a:lnSpc>
-                <a:spcPct val="132000"/>
-              </a:lnSpc>
-            </a:pPr>
-            <a:r>
-              <a:rPr sz="1200" b="0">
-                <a:solidFill>
-                  <a:srgbClr val="6B7280"/>
-                </a:solidFill>
-                <a:latin typeface="Inter Tight"/>
-              </a:rPr>
-              <a:t>20 — разошлась на одну ступень</a:t>
-            </a:r>
-          </a:p>
-        </p:txBody>
-      </p:sp>
-      <p:sp>
-        <p:nvSpPr>
-          <p:cNvPr id="52" name="Rectangle 51"/>
-          <p:cNvSpPr/>
-          <p:nvPr/>
-        </p:nvSpPr>
-        <p:spPr>
-          <a:xfrm>
-            <a:off x="6492240" y="4325112"/>
-            <a:ext cx="146304" cy="146304"/>
-          </a:xfrm>
-          <a:prstGeom prst="rect">
-            <a:avLst/>
-          </a:prstGeom>
-          <a:solidFill>
-            <a:srgbClr val="EB5757"/>
-          </a:solidFill>
-          <a:ln>
-            <a:noFill/>
-          </a:ln>
-          <a:effectLst/>
-        </p:spPr>
-        <p:style>
-          <a:lnRef idx="1">
-            <a:schemeClr val="accent1"/>
-          </a:lnRef>
-          <a:fillRef idx="3">
-            <a:schemeClr val="accent1"/>
-          </a:fillRef>
-          <a:effectRef idx="2">
-            <a:schemeClr val="accent1"/>
-          </a:effectRef>
-          <a:fontRef idx="minor">
-            <a:schemeClr val="lt1"/>
-          </a:fontRef>
-        </p:style>
-        <p:txBody>
-          <a:bodyPr rtlCol="0" anchor="ctr"/>
-          <a:lstStyle/>
-          <a:p>
-            <a:pPr algn="ctr"/>
-          </a:p>
-        </p:txBody>
-      </p:sp>
-      <p:sp>
-        <p:nvSpPr>
-          <p:cNvPr id="53" name="TextBox 52"/>
-          <p:cNvSpPr txBox="1"/>
-          <p:nvPr/>
-        </p:nvSpPr>
-        <p:spPr>
-          <a:xfrm>
-            <a:off x="6729984" y="4297680"/>
-            <a:ext cx="2651760" cy="228600"/>
-          </a:xfrm>
-          <a:prstGeom prst="rect">
-            <a:avLst/>
-          </a:prstGeom>
-          <a:noFill/>
-        </p:spPr>
-        <p:txBody>
-          <a:bodyPr wrap="square" lIns="0" rIns="0" tIns="0" bIns="0">
-            <a:spAutoFit/>
-          </a:bodyPr>
-          <a:lstStyle/>
-          <a:p>
-            <a:pPr algn="l">
-              <a:lnSpc>
-                <a:spcPct val="132000"/>
-              </a:lnSpc>
-            </a:pPr>
-            <a:r>
-              <a:rPr sz="1200" b="0">
-                <a:solidFill>
-                  <a:srgbClr val="6B7280"/>
-                </a:solidFill>
-                <a:latin typeface="Inter Tight"/>
-              </a:rPr>
-              <a:t>4 — разошлась сильнее</a:t>
-            </a:r>
-          </a:p>
-        </p:txBody>
-      </p:sp>
-      <p:sp>
-        <p:nvSpPr>
-          <p:cNvPr id="54" name="TextBox 53"/>
-          <p:cNvSpPr txBox="1"/>
-          <p:nvPr/>
-        </p:nvSpPr>
-        <p:spPr>
-          <a:xfrm>
-            <a:off x="8046720" y="2560320"/>
-            <a:ext cx="3474720" cy="725213"/>
-          </a:xfrm>
-          <a:prstGeom prst="rect">
-            <a:avLst/>
-          </a:prstGeom>
-          <a:noFill/>
-        </p:spPr>
-        <p:txBody>
-          <a:bodyPr wrap="square" lIns="0" rIns="0" tIns="0" bIns="0">
-            <a:spAutoFit/>
-          </a:bodyPr>
-          <a:lstStyle/>
-          <a:p>
-            <a:pPr algn="l">
-              <a:lnSpc>
-                <a:spcPct val="100000"/>
-              </a:lnSpc>
-            </a:pPr>
-            <a:r>
-              <a:rPr sz="4600" b="1">
-                <a:solidFill>
-                  <a:srgbClr val="379123"/>
-                </a:solidFill>
-                <a:latin typeface="Inter Tight"/>
-              </a:rPr>
-              <a:t>42 / 42</a:t>
-            </a:r>
-          </a:p>
-        </p:txBody>
-      </p:sp>
-      <p:sp>
-        <p:nvSpPr>
-          <p:cNvPr id="55" name="TextBox 54"/>
-          <p:cNvSpPr txBox="1"/>
-          <p:nvPr/>
-        </p:nvSpPr>
-        <p:spPr>
-          <a:xfrm>
-            <a:off x="8046720" y="3401568"/>
-            <a:ext cx="3474720" cy="219456"/>
-          </a:xfrm>
-          <a:prstGeom prst="rect">
-            <a:avLst/>
-          </a:prstGeom>
-          <a:noFill/>
-        </p:spPr>
-        <p:txBody>
-          <a:bodyPr wrap="square" lIns="0" rIns="0" tIns="0" bIns="0">
-            <a:spAutoFit/>
-          </a:bodyPr>
-          <a:lstStyle/>
-          <a:p>
-            <a:pPr algn="l">
-              <a:lnSpc>
-                <a:spcPct val="132000"/>
-              </a:lnSpc>
-            </a:pPr>
-            <a:r>
-              <a:rPr sz="1050" b="1" cap="all" spc="140">
-                <a:solidFill>
-                  <a:srgbClr val="6B7280"/>
-                </a:solidFill>
-                <a:latin typeface="Inter Tight"/>
-              </a:rPr>
-              <a:t>формула сходится точно</a:t>
-            </a:r>
-          </a:p>
-        </p:txBody>
-      </p:sp>
-      <p:sp>
-        <p:nvSpPr>
-          <p:cNvPr id="56" name="TextBox 55"/>
-          <p:cNvSpPr txBox="1"/>
-          <p:nvPr/>
-        </p:nvSpPr>
-        <p:spPr>
-          <a:xfrm>
-            <a:off x="8046720" y="3730752"/>
-            <a:ext cx="3383280" cy="822960"/>
-          </a:xfrm>
-          <a:prstGeom prst="rect">
-            <a:avLst/>
-          </a:prstGeom>
-          <a:noFill/>
-        </p:spPr>
-        <p:txBody>
-          <a:bodyPr wrap="square" lIns="0" rIns="0" tIns="0" bIns="0">
-            <a:spAutoFit/>
-          </a:bodyPr>
-          <a:lstStyle/>
-          <a:p>
-            <a:pPr algn="l">
-              <a:lnSpc>
-                <a:spcPct val="145000"/>
-              </a:lnSpc>
-            </a:pPr>
-            <a:r>
-              <a:rPr sz="1300" b="0">
-                <a:solidFill>
-                  <a:srgbClr val="6B7280"/>
-                </a:solidFill>
-                <a:latin typeface="Inter Tight"/>
-              </a:rPr>
-              <a:t>Отдельная проверка: получив экспертные баллы, код выдаёт тот же индекс и ту же категорию, что в Excel заказчика. Включая эскалацию.</a:t>
-            </a:r>
-          </a:p>
-        </p:txBody>
-      </p:sp>
-      <p:sp>
-        <p:nvSpPr>
-          <p:cNvPr id="57" name="TextBox 56"/>
-          <p:cNvSpPr txBox="1"/>
-          <p:nvPr/>
-        </p:nvSpPr>
-        <p:spPr>
-          <a:xfrm>
-            <a:off x="731520" y="5029200"/>
-            <a:ext cx="10698480" cy="822960"/>
-          </a:xfrm>
-          <a:prstGeom prst="rect">
-            <a:avLst/>
-          </a:prstGeom>
-          <a:noFill/>
-        </p:spPr>
-        <p:txBody>
-          <a:bodyPr wrap="square" lIns="0" rIns="0" tIns="0" bIns="0">
-            <a:spAutoFit/>
-          </a:bodyPr>
-          <a:lstStyle/>
-          <a:p>
-            <a:pPr algn="l">
-              <a:lnSpc>
-                <a:spcPct val="145000"/>
-              </a:lnSpc>
-            </a:pPr>
-            <a:r>
-              <a:rPr sz="1400" b="1">
-                <a:solidFill>
-                  <a:srgbClr val="231F20"/>
-                </a:solidFill>
-                <a:latin typeface="Inter Tight"/>
-              </a:rPr>
-              <a:t>Провалов важного в нижние категории: один при цели ноль. </a:t>
-            </a:r>
-            <a:r>
-              <a:rPr sz="1400" b="0">
-                <a:solidFill>
-                  <a:srgbClr val="6B7280"/>
-                </a:solidFill>
-                <a:latin typeface="Inter Tight"/>
-              </a:rPr>
-              <a:t>Это ключевое условие заказчика, и оно важнее общей точности: пропущенное регуляторное изменение стоит дороже десятка лишних материалов в ленте. Заземление отдельно: 8,2 % утверждений отбраковала вторая ступень — цитата в оригинале есть, но утверждения не подтверждает.</a:t>
-            </a:r>
-          </a:p>
-        </p:txBody>
-      </p:sp>
-      <p:sp>
-        <p:nvSpPr>
-          <p:cNvPr id="58" name="TextBox 57"/>
-          <p:cNvSpPr txBox="1"/>
-          <p:nvPr/>
-        </p:nvSpPr>
-        <p:spPr>
-          <a:xfrm>
-            <a:off x="731520" y="6382512"/>
-            <a:ext cx="8778240" cy="237744"/>
-          </a:xfrm>
-          <a:prstGeom prst="rect">
-            <a:avLst/>
-          </a:prstGeom>
-          <a:noFill/>
-        </p:spPr>
-        <p:txBody>
-          <a:bodyPr wrap="square" lIns="0" rIns="0" tIns="0" bIns="0">
-            <a:spAutoFit/>
-          </a:bodyPr>
-          <a:lstStyle/>
-          <a:p>
-            <a:pPr algn="l">
-              <a:lnSpc>
-                <a:spcPct val="132000"/>
-              </a:lnSpc>
-            </a:pPr>
-            <a:r>
-              <a:rPr sz="950" b="0">
-                <a:solidFill>
-                  <a:srgbClr val="9AA1AB"/>
-                </a:solidFill>
-                <a:latin typeface="Inter Tight"/>
-              </a:rPr>
-              <a:t>evals/results.md · python -m src.cli evaluate · verify-formula</a:t>
-            </a:r>
-          </a:p>
-        </p:txBody>
-      </p:sp>
-      <p:sp>
-        <p:nvSpPr>
-          <p:cNvPr id="59" name="TextBox 58"/>
+              <a:t>github.com/veceloe/ai-gpr-center-cifra</a:t>
+            </a:r>
+          </a:p>
+        </p:txBody>
+      </p:sp>
+      <p:sp>
+        <p:nvSpPr>
+          <p:cNvPr id="16" name="TextBox 15"/>
           <p:cNvSpPr txBox="1"/>
           <p:nvPr/>
         </p:nvSpPr>
@@ -8906,7 +9405,7 @@
             <a:r>
               <a:rPr sz="950" b="0">
                 <a:solidFill>
-                  <a:srgbClr val="9AA1AB"/>
+                  <a:srgbClr val="8B949E"/>
                 </a:solidFill>
                 <a:latin typeface="Inter Tight"/>
               </a:rPr>
@@ -8986,7 +9485,7 @@
         <p:spPr>
           <a:xfrm>
             <a:off x="731520" y="566928"/>
-            <a:ext cx="5486400" cy="219456"/>
+            <a:ext cx="10698480" cy="274320"/>
           </a:xfrm>
           <a:prstGeom prst="rect">
             <a:avLst/>
@@ -9005,13 +9504,13 @@
               </a:lnSpc>
             </a:pPr>
             <a:r>
-              <a:rPr sz="1050" b="1" cap="all" spc="140">
-                <a:solidFill>
-                  <a:srgbClr val="EB5757"/>
+              <a:rPr sz="1100" b="1" spc="200">
+                <a:solidFill>
+                  <a:srgbClr val="9AA1AB"/>
                 </a:solidFill>
                 <a:latin typeface="Inter Tight"/>
               </a:rPr>
-              <a:t>Честно</a:t>
+              <a:t>ПРИЛОЖЕНИЕ · ДЛЯ ВОПРОСОВ</a:t>
             </a:r>
           </a:p>
         </p:txBody>
@@ -9025,7 +9524,7 @@
         <p:spPr>
           <a:xfrm>
             <a:off x="731520" y="914400"/>
-            <a:ext cx="10698480" cy="731520"/>
+            <a:ext cx="10698480" cy="457200"/>
           </a:xfrm>
           <a:prstGeom prst="rect">
             <a:avLst/>
@@ -9044,36 +9543,77 @@
               </a:lnSpc>
             </a:pPr>
             <a:r>
-              <a:rPr sz="3400" b="1">
+              <a:rPr sz="3000" b="1">
                 <a:solidFill>
                   <a:srgbClr val="231F20"/>
                 </a:solidFill>
                 <a:latin typeface="Inter Tight"/>
               </a:rPr>
-              <a:t>Чего мы измерить не смогли</a:t>
-            </a:r>
-          </a:p>
-        </p:txBody>
-      </p:sp>
-      <p:sp>
-        <p:nvSpPr>
-          <p:cNvPr id="5" name="Rectangle 4"/>
+              <a:t>Разбор оценки: шесть критериев и заземление</a:t>
+            </a:r>
+          </a:p>
+        </p:txBody>
+      </p:sp>
+      <p:sp>
+        <p:nvSpPr>
+          <p:cNvPr id="5" name="TextBox 4"/>
+          <p:cNvSpPr txBox="1"/>
+          <p:nvPr/>
+        </p:nvSpPr>
+        <p:spPr>
+          <a:xfrm>
+            <a:off x="731520" y="1463040"/>
+            <a:ext cx="10698480" cy="640080"/>
+          </a:xfrm>
+          <a:prstGeom prst="rect">
+            <a:avLst/>
+          </a:prstGeom>
+          <a:noFill/>
+        </p:spPr>
+        <p:txBody>
+          <a:bodyPr wrap="square" lIns="0" rIns="0" tIns="0" bIns="0">
+            <a:spAutoFit/>
+          </a:bodyPr>
+          <a:lstStyle/>
+          <a:p>
+            <a:pPr algn="l">
+              <a:lnSpc>
+                <a:spcPct val="140000"/>
+              </a:lnSpc>
+            </a:pPr>
+            <a:r>
+              <a:rPr sz="1300" b="0">
+                <a:solidFill>
+                  <a:srgbClr val="6B7280"/>
+                </a:solidFill>
+                <a:latin typeface="Inter Tight"/>
+              </a:rPr>
+              <a:t>Слева цитата из оригинала под каждым утверждением. Справа балл, вклад в индекс и обоснование по каждому критерию.</a:t>
+            </a:r>
+          </a:p>
+        </p:txBody>
+      </p:sp>
+      <p:sp>
+        <p:nvSpPr>
+          <p:cNvPr id="6" name="Rectangle 5"/>
           <p:cNvSpPr/>
           <p:nvPr/>
         </p:nvSpPr>
         <p:spPr>
           <a:xfrm>
-            <a:off x="731520" y="2103120"/>
-            <a:ext cx="50292" cy="960120"/>
+            <a:off x="1542135" y="1801368"/>
+            <a:ext cx="9107424" cy="4543653"/>
           </a:xfrm>
           <a:prstGeom prst="rect">
             <a:avLst/>
           </a:prstGeom>
           <a:solidFill>
-            <a:srgbClr val="EB5757"/>
+            <a:srgbClr val="FFFFFF"/>
           </a:solidFill>
-          <a:ln>
-            <a:noFill/>
+          <a:ln w="9525">
+            <a:solidFill>
+              <a:srgbClr val="D9D9D9"/>
+            </a:solidFill>
           </a:ln>
           <a:effectLst/>
         </p:spPr>
@@ -9099,16 +9639,40 @@
           </a:p>
         </p:txBody>
       </p:sp>
-      <p:sp>
-        <p:nvSpPr>
-          <p:cNvPr id="6" name="TextBox 5"/>
+      <p:pic>
+        <p:nvPicPr>
+          <p:cNvPr id="7" name="Picture 6" descr="shot_breakdown.jpg"/>
+          <p:cNvPicPr>
+            <a:picLocks noChangeAspect="1"/>
+          </p:cNvPicPr>
+          <p:nvPr/>
+        </p:nvPicPr>
+        <p:blipFill>
+          <a:blip r:embed="rId2"/>
+          <a:stretch>
+            <a:fillRect/>
+          </a:stretch>
+        </p:blipFill>
+        <p:spPr>
+          <a:xfrm>
+            <a:off x="1569567" y="1828800"/>
+            <a:ext cx="9052560" cy="4488789"/>
+          </a:xfrm>
+          <a:prstGeom prst="rect">
+            <a:avLst/>
+          </a:prstGeom>
+        </p:spPr>
+      </p:pic>
+      <p:sp>
+        <p:nvSpPr>
+          <p:cNvPr id="8" name="TextBox 7"/>
           <p:cNvSpPr txBox="1"/>
           <p:nvPr/>
         </p:nvSpPr>
         <p:spPr>
           <a:xfrm>
-            <a:off x="1115568" y="2066544"/>
-            <a:ext cx="10058400" cy="310896"/>
+            <a:off x="731520" y="6382512"/>
+            <a:ext cx="8778240" cy="237744"/>
           </a:xfrm>
           <a:prstGeom prst="rect">
             <a:avLst/>
@@ -9127,342 +9691,20 @@
               </a:lnSpc>
             </a:pPr>
             <a:r>
-              <a:rPr sz="1900" b="1">
-                <a:solidFill>
-                  <a:srgbClr val="231F20"/>
+              <a:rPr sz="950" b="0">
+                <a:solidFill>
+                  <a:srgbClr val="9AA1AB"/>
                 </a:solidFill>
                 <a:latin typeface="Inter Tight"/>
               </a:rPr>
-              <a:t>Точность фильтрации</a:t>
-            </a:r>
-          </a:p>
-        </p:txBody>
-      </p:sp>
-      <p:sp>
-        <p:nvSpPr>
-          <p:cNvPr id="7" name="TextBox 6"/>
-          <p:cNvSpPr txBox="1"/>
-          <p:nvPr/>
-        </p:nvSpPr>
-        <p:spPr>
-          <a:xfrm>
-            <a:off x="1115568" y="2487168"/>
-            <a:ext cx="9692640" cy="640080"/>
-          </a:xfrm>
-          <a:prstGeom prst="rect">
-            <a:avLst/>
-          </a:prstGeom>
-          <a:noFill/>
-        </p:spPr>
-        <p:txBody>
-          <a:bodyPr wrap="square" lIns="0" rIns="0" tIns="0" bIns="0">
-            <a:spAutoFit/>
-          </a:bodyPr>
-          <a:lstStyle/>
-          <a:p>
-            <a:pPr algn="l">
-              <a:lnSpc>
-                <a:spcPct val="145000"/>
-              </a:lnSpc>
-            </a:pPr>
-            <a:r>
-              <a:rPr sz="1350" b="0">
-                <a:solidFill>
-                  <a:srgbClr val="6B7280"/>
-                </a:solidFill>
-                <a:latin typeface="Inter Tight"/>
-              </a:rPr>
-              <a:t>В реестре заказчика нет ни одной нерелевантной карточки — сравнивать не с чем. Заявленные восемьдесят процентов на таких данных неизмеримы в принципе. Нужен размеченный набор с отрицательными примерами.</a:t>
-            </a:r>
-          </a:p>
-        </p:txBody>
-      </p:sp>
-      <p:sp>
-        <p:nvSpPr>
-          <p:cNvPr id="8" name="Rectangle 7"/>
-          <p:cNvSpPr/>
-          <p:nvPr/>
-        </p:nvSpPr>
-        <p:spPr>
-          <a:xfrm>
-            <a:off x="731520" y="3401568"/>
-            <a:ext cx="50292" cy="960120"/>
-          </a:xfrm>
-          <a:prstGeom prst="rect">
-            <a:avLst/>
-          </a:prstGeom>
-          <a:solidFill>
-            <a:srgbClr val="EB5757"/>
-          </a:solidFill>
-          <a:ln>
-            <a:noFill/>
-          </a:ln>
-          <a:effectLst/>
-        </p:spPr>
-        <p:style>
-          <a:lnRef idx="1">
-            <a:schemeClr val="accent1"/>
-          </a:lnRef>
-          <a:fillRef idx="3">
-            <a:schemeClr val="accent1"/>
-          </a:fillRef>
-          <a:effectRef idx="2">
-            <a:schemeClr val="accent1"/>
-          </a:effectRef>
-          <a:fontRef idx="minor">
-            <a:schemeClr val="lt1"/>
-          </a:fontRef>
-        </p:style>
-        <p:txBody>
-          <a:bodyPr rtlCol="0" anchor="ctr"/>
-          <a:lstStyle/>
-          <a:p>
-            <a:pPr algn="ctr"/>
+              <a:t>FR-024 · FR-081</a:t>
+            </a:r>
           </a:p>
         </p:txBody>
       </p:sp>
       <p:sp>
         <p:nvSpPr>
           <p:cNvPr id="9" name="TextBox 8"/>
-          <p:cNvSpPr txBox="1"/>
-          <p:nvPr/>
-        </p:nvSpPr>
-        <p:spPr>
-          <a:xfrm>
-            <a:off x="1115568" y="3364992"/>
-            <a:ext cx="10058400" cy="310896"/>
-          </a:xfrm>
-          <a:prstGeom prst="rect">
-            <a:avLst/>
-          </a:prstGeom>
-          <a:noFill/>
-        </p:spPr>
-        <p:txBody>
-          <a:bodyPr wrap="square" lIns="0" rIns="0" tIns="0" bIns="0">
-            <a:spAutoFit/>
-          </a:bodyPr>
-          <a:lstStyle/>
-          <a:p>
-            <a:pPr algn="l">
-              <a:lnSpc>
-                <a:spcPct val="132000"/>
-              </a:lnSpc>
-            </a:pPr>
-            <a:r>
-              <a:rPr sz="1900" b="1">
-                <a:solidFill>
-                  <a:srgbClr val="231F20"/>
-                </a:solidFill>
-                <a:latin typeface="Inter Tight"/>
-              </a:rPr>
-              <a:t>Провалы важного: один при цели ноль</a:t>
-            </a:r>
-          </a:p>
-        </p:txBody>
-      </p:sp>
-      <p:sp>
-        <p:nvSpPr>
-          <p:cNvPr id="10" name="TextBox 9"/>
-          <p:cNvSpPr txBox="1"/>
-          <p:nvPr/>
-        </p:nvSpPr>
-        <p:spPr>
-          <a:xfrm>
-            <a:off x="1115568" y="3785616"/>
-            <a:ext cx="9692640" cy="640080"/>
-          </a:xfrm>
-          <a:prstGeom prst="rect">
-            <a:avLst/>
-          </a:prstGeom>
-          <a:noFill/>
-        </p:spPr>
-        <p:txBody>
-          <a:bodyPr wrap="square" lIns="0" rIns="0" tIns="0" bIns="0">
-            <a:spAutoFit/>
-          </a:bodyPr>
-          <a:lstStyle/>
-          <a:p>
-            <a:pPr algn="l">
-              <a:lnSpc>
-                <a:spcPct val="145000"/>
-              </a:lnSpc>
-            </a:pPr>
-            <a:r>
-              <a:rPr sz="1350" b="0">
-                <a:solidFill>
-                  <a:srgbClr val="6B7280"/>
-                </a:solidFill>
-                <a:latin typeface="Inter Tight"/>
-              </a:rPr>
-              <a:t>Единственный провал — следствие того, что новостная схема систематически занижает оценку на материалах с непрямой связью с бизнесом.</a:t>
-            </a:r>
-          </a:p>
-        </p:txBody>
-      </p:sp>
-      <p:sp>
-        <p:nvSpPr>
-          <p:cNvPr id="11" name="Rectangle 10"/>
-          <p:cNvSpPr/>
-          <p:nvPr/>
-        </p:nvSpPr>
-        <p:spPr>
-          <a:xfrm>
-            <a:off x="731520" y="4700016"/>
-            <a:ext cx="50292" cy="960120"/>
-          </a:xfrm>
-          <a:prstGeom prst="rect">
-            <a:avLst/>
-          </a:prstGeom>
-          <a:solidFill>
-            <a:srgbClr val="6B7280"/>
-          </a:solidFill>
-          <a:ln>
-            <a:noFill/>
-          </a:ln>
-          <a:effectLst/>
-        </p:spPr>
-        <p:style>
-          <a:lnRef idx="1">
-            <a:schemeClr val="accent1"/>
-          </a:lnRef>
-          <a:fillRef idx="3">
-            <a:schemeClr val="accent1"/>
-          </a:fillRef>
-          <a:effectRef idx="2">
-            <a:schemeClr val="accent1"/>
-          </a:effectRef>
-          <a:fontRef idx="minor">
-            <a:schemeClr val="lt1"/>
-          </a:fontRef>
-        </p:style>
-        <p:txBody>
-          <a:bodyPr rtlCol="0" anchor="ctr"/>
-          <a:lstStyle/>
-          <a:p>
-            <a:pPr algn="ctr"/>
-          </a:p>
-        </p:txBody>
-      </p:sp>
-      <p:sp>
-        <p:nvSpPr>
-          <p:cNvPr id="12" name="TextBox 11"/>
-          <p:cNvSpPr txBox="1"/>
-          <p:nvPr/>
-        </p:nvSpPr>
-        <p:spPr>
-          <a:xfrm>
-            <a:off x="1115568" y="4663440"/>
-            <a:ext cx="10058400" cy="310896"/>
-          </a:xfrm>
-          <a:prstGeom prst="rect">
-            <a:avLst/>
-          </a:prstGeom>
-          <a:noFill/>
-        </p:spPr>
-        <p:txBody>
-          <a:bodyPr wrap="square" lIns="0" rIns="0" tIns="0" bIns="0">
-            <a:spAutoFit/>
-          </a:bodyPr>
-          <a:lstStyle/>
-          <a:p>
-            <a:pPr algn="l">
-              <a:lnSpc>
-                <a:spcPct val="132000"/>
-              </a:lnSpc>
-            </a:pPr>
-            <a:r>
-              <a:rPr sz="1900" b="1">
-                <a:solidFill>
-                  <a:srgbClr val="231F20"/>
-                </a:solidFill>
-                <a:latin typeface="Inter Tight"/>
-              </a:rPr>
-              <a:t>Живой сбор на стенде выключен</a:t>
-            </a:r>
-          </a:p>
-        </p:txBody>
-      </p:sp>
-      <p:sp>
-        <p:nvSpPr>
-          <p:cNvPr id="13" name="TextBox 12"/>
-          <p:cNvSpPr txBox="1"/>
-          <p:nvPr/>
-        </p:nvSpPr>
-        <p:spPr>
-          <a:xfrm>
-            <a:off x="1115568" y="5084064"/>
-            <a:ext cx="9692640" cy="640080"/>
-          </a:xfrm>
-          <a:prstGeom prst="rect">
-            <a:avLst/>
-          </a:prstGeom>
-          <a:noFill/>
-        </p:spPr>
-        <p:txBody>
-          <a:bodyPr wrap="square" lIns="0" rIns="0" tIns="0" bIns="0">
-            <a:spAutoFit/>
-          </a:bodyPr>
-          <a:lstStyle/>
-          <a:p>
-            <a:pPr algn="l">
-              <a:lnSpc>
-                <a:spcPct val="145000"/>
-              </a:lnSpc>
-            </a:pPr>
-            <a:r>
-              <a:rPr sz="1350" b="0">
-                <a:solidFill>
-                  <a:srgbClr val="6B7280"/>
-                </a:solidFill>
-                <a:latin typeface="Inter Tight"/>
-              </a:rPr>
-              <a:t>Обработка не успевает за сбором, и необработанные материалы попадают в ленту пустыми карточками. Показываем подготовленный срез.</a:t>
-            </a:r>
-          </a:p>
-        </p:txBody>
-      </p:sp>
-      <p:sp>
-        <p:nvSpPr>
-          <p:cNvPr id="14" name="TextBox 13"/>
-          <p:cNvSpPr txBox="1"/>
-          <p:nvPr/>
-        </p:nvSpPr>
-        <p:spPr>
-          <a:xfrm>
-            <a:off x="731520" y="6382512"/>
-            <a:ext cx="8778240" cy="237744"/>
-          </a:xfrm>
-          <a:prstGeom prst="rect">
-            <a:avLst/>
-          </a:prstGeom>
-          <a:noFill/>
-        </p:spPr>
-        <p:txBody>
-          <a:bodyPr wrap="square" lIns="0" rIns="0" tIns="0" bIns="0">
-            <a:spAutoFit/>
-          </a:bodyPr>
-          <a:lstStyle/>
-          <a:p>
-            <a:pPr algn="l">
-              <a:lnSpc>
-                <a:spcPct val="132000"/>
-              </a:lnSpc>
-            </a:pPr>
-            <a:r>
-              <a:rPr sz="950" b="0">
-                <a:solidFill>
-                  <a:srgbClr val="9AA1AB"/>
-                </a:solidFill>
-                <a:latin typeface="Inter Tight"/>
-              </a:rPr>
-              <a:t>docs/hypotheses.md · specs/…/open-questions.md</a:t>
-            </a:r>
-          </a:p>
-        </p:txBody>
-      </p:sp>
-      <p:sp>
-        <p:nvSpPr>
-          <p:cNvPr id="15" name="TextBox 14"/>
           <p:cNvSpPr txBox="1"/>
           <p:nvPr/>
         </p:nvSpPr>

--- a/docs/product/presentation.pptx
+++ b/docs/product/presentation.pptx
@@ -3169,13 +3169,13 @@
               </a:lnSpc>
             </a:pPr>
             <a:r>
-              <a:rPr sz="1150" b="1" spc="200">
+              <a:rPr sz="1150" b="1">
                 <a:solidFill>
                   <a:srgbClr val="8B949E"/>
                 </a:solidFill>
                 <a:latin typeface="Inter Tight"/>
               </a:rPr>
-              <a:t>ITMO AI PRODUCT HACK · КЕЙС ООО «ЦИФРА»</a:t>
+              <a:t>Кейс ООО «Цифра» для GS Labs</a:t>
             </a:r>
           </a:p>
         </p:txBody>
@@ -3422,13 +3422,13 @@
               </a:lnSpc>
             </a:pPr>
             <a:r>
-              <a:rPr sz="1100" b="1" spc="200">
+              <a:rPr sz="1100" b="1">
                 <a:solidFill>
                   <a:srgbClr val="9AA1AB"/>
                 </a:solidFill>
                 <a:latin typeface="Inter Tight"/>
               </a:rPr>
-              <a:t>ПРИЛОЖЕНИЕ · ДЛЯ ВОПРОСОВ</a:t>
+              <a:t>Приложение, если спросят</a:t>
             </a:r>
           </a:p>
         </p:txBody>
@@ -3581,84 +3581,6 @@
           </a:prstGeom>
         </p:spPr>
       </p:pic>
-      <p:sp>
-        <p:nvSpPr>
-          <p:cNvPr id="8" name="TextBox 7"/>
-          <p:cNvSpPr txBox="1"/>
-          <p:nvPr/>
-        </p:nvSpPr>
-        <p:spPr>
-          <a:xfrm>
-            <a:off x="731520" y="6382512"/>
-            <a:ext cx="8778240" cy="237744"/>
-          </a:xfrm>
-          <a:prstGeom prst="rect">
-            <a:avLst/>
-          </a:prstGeom>
-          <a:noFill/>
-        </p:spPr>
-        <p:txBody>
-          <a:bodyPr wrap="square" lIns="0" rIns="0" tIns="0" bIns="0">
-            <a:spAutoFit/>
-          </a:bodyPr>
-          <a:lstStyle/>
-          <a:p>
-            <a:pPr algn="l">
-              <a:lnSpc>
-                <a:spcPct val="132000"/>
-              </a:lnSpc>
-            </a:pPr>
-            <a:r>
-              <a:rPr sz="950" b="0">
-                <a:solidFill>
-                  <a:srgbClr val="9AA1AB"/>
-                </a:solidFill>
-                <a:latin typeface="Inter Tight"/>
-              </a:rPr>
-              <a:t>FR-032 · FR-035</a:t>
-            </a:r>
-          </a:p>
-        </p:txBody>
-      </p:sp>
-      <p:sp>
-        <p:nvSpPr>
-          <p:cNvPr id="9" name="TextBox 8"/>
-          <p:cNvSpPr txBox="1"/>
-          <p:nvPr/>
-        </p:nvSpPr>
-        <p:spPr>
-          <a:xfrm>
-            <a:off x="10180015" y="6382512"/>
-            <a:ext cx="1280160" cy="237744"/>
-          </a:xfrm>
-          <a:prstGeom prst="rect">
-            <a:avLst/>
-          </a:prstGeom>
-          <a:noFill/>
-        </p:spPr>
-        <p:txBody>
-          <a:bodyPr wrap="square" lIns="0" rIns="0" tIns="0" bIns="0">
-            <a:spAutoFit/>
-          </a:bodyPr>
-          <a:lstStyle/>
-          <a:p>
-            <a:pPr algn="r">
-              <a:lnSpc>
-                <a:spcPct val="132000"/>
-              </a:lnSpc>
-            </a:pPr>
-            <a:r>
-              <a:rPr sz="950" b="0">
-                <a:solidFill>
-                  <a:srgbClr val="9AA1AB"/>
-                </a:solidFill>
-                <a:latin typeface="Inter Tight"/>
-              </a:rPr>
-              <a:t>9 / 10</a:t>
-            </a:r>
-          </a:p>
-        </p:txBody>
-      </p:sp>
     </p:spTree>
   </p:cSld>
   <p:clrMapOvr>
@@ -3749,13 +3671,13 @@
               </a:lnSpc>
             </a:pPr>
             <a:r>
-              <a:rPr sz="1100" b="1" spc="200">
+              <a:rPr sz="1100" b="1">
                 <a:solidFill>
                   <a:srgbClr val="43B02A"/>
                 </a:solidFill>
                 <a:latin typeface="Inter Tight"/>
               </a:rPr>
-              <a:t>ЗАЧЕМ ЭТО ВООБЩЕ</a:t>
+              <a:t>Зачем это вообще</a:t>
             </a:r>
           </a:p>
         </p:txBody>
@@ -3995,84 +3917,6 @@
                 <a:latin typeface="Inter Tight"/>
               </a:rPr>
               <a:t>.</a:t>
-            </a:r>
-          </a:p>
-        </p:txBody>
-      </p:sp>
-      <p:sp>
-        <p:nvSpPr>
-          <p:cNvPr id="9" name="TextBox 8"/>
-          <p:cNvSpPr txBox="1"/>
-          <p:nvPr/>
-        </p:nvSpPr>
-        <p:spPr>
-          <a:xfrm>
-            <a:off x="731520" y="6382512"/>
-            <a:ext cx="8778240" cy="237744"/>
-          </a:xfrm>
-          <a:prstGeom prst="rect">
-            <a:avLst/>
-          </a:prstGeom>
-          <a:noFill/>
-        </p:spPr>
-        <p:txBody>
-          <a:bodyPr wrap="square" lIns="0" rIns="0" tIns="0" bIns="0">
-            <a:spAutoFit/>
-          </a:bodyPr>
-          <a:lstStyle/>
-          <a:p>
-            <a:pPr algn="l">
-              <a:lnSpc>
-                <a:spcPct val="132000"/>
-              </a:lnSpc>
-            </a:pPr>
-            <a:r>
-              <a:rPr sz="950" b="0">
-                <a:solidFill>
-                  <a:srgbClr val="8B949E"/>
-                </a:solidFill>
-                <a:latin typeface="Inter Tight"/>
-              </a:rPr>
-              <a:t>docs/business-case.md · расчёт согласован с заказчиком</a:t>
-            </a:r>
-          </a:p>
-        </p:txBody>
-      </p:sp>
-      <p:sp>
-        <p:nvSpPr>
-          <p:cNvPr id="10" name="TextBox 9"/>
-          <p:cNvSpPr txBox="1"/>
-          <p:nvPr/>
-        </p:nvSpPr>
-        <p:spPr>
-          <a:xfrm>
-            <a:off x="10180015" y="6382512"/>
-            <a:ext cx="1280160" cy="237744"/>
-          </a:xfrm>
-          <a:prstGeom prst="rect">
-            <a:avLst/>
-          </a:prstGeom>
-          <a:noFill/>
-        </p:spPr>
-        <p:txBody>
-          <a:bodyPr wrap="square" lIns="0" rIns="0" tIns="0" bIns="0">
-            <a:spAutoFit/>
-          </a:bodyPr>
-          <a:lstStyle/>
-          <a:p>
-            <a:pPr algn="r">
-              <a:lnSpc>
-                <a:spcPct val="132000"/>
-              </a:lnSpc>
-            </a:pPr>
-            <a:r>
-              <a:rPr sz="950" b="0">
-                <a:solidFill>
-                  <a:srgbClr val="8B949E"/>
-                </a:solidFill>
-                <a:latin typeface="Inter Tight"/>
-              </a:rPr>
-              <a:t>1 / 10</a:t>
             </a:r>
           </a:p>
         </p:txBody>
@@ -4262,13 +4106,13 @@
               </a:lnSpc>
             </a:pPr>
             <a:r>
-              <a:rPr sz="1050" b="1" spc="180">
+              <a:rPr sz="1050" b="1">
                 <a:solidFill>
                   <a:srgbClr val="8B949E"/>
                 </a:solidFill>
                 <a:latin typeface="Inter Tight"/>
               </a:rPr>
-              <a:t>МОДЕЛЬ ОТДАЁТ</a:t>
+              <a:t>Модель отдаёт</a:t>
             </a:r>
           </a:p>
         </p:txBody>
@@ -4281,8 +4125,8 @@
         </p:nvSpPr>
         <p:spPr>
           <a:xfrm>
-            <a:off x="1097280" y="3886200"/>
-            <a:ext cx="4023360" cy="1005840"/>
+            <a:off x="1097280" y="3840480"/>
+            <a:ext cx="548640" cy="219456"/>
           </a:xfrm>
           <a:prstGeom prst="rect">
             <a:avLst/>
@@ -4297,34 +4141,492 @@
           <a:p>
             <a:pPr algn="l">
               <a:lnSpc>
-                <a:spcPct val="155000"/>
+                <a:spcPct val="132000"/>
               </a:lnSpc>
             </a:pPr>
             <a:r>
-              <a:rPr sz="1900" b="1">
-                <a:solidFill>
-                  <a:srgbClr val="F2F4F3"/>
+              <a:rPr sz="1200" b="0">
+                <a:solidFill>
+                  <a:srgbClr val="8B949E"/>
                 </a:solidFill>
                 <a:latin typeface="Inter Tight"/>
               </a:rPr>
-              <a:t>К1·3   К2·2   К3·3   К4·0   К5·0   К6·3</a:t>
-            </a:r>
-            <a:r>
-              <a:rPr sz="1400" b="0">
-                <a:solidFill>
-                  <a:srgbClr val="8B949E"/>
+              <a:t>К1</a:t>
+            </a:r>
+          </a:p>
+        </p:txBody>
+      </p:sp>
+      <p:sp>
+        <p:nvSpPr>
+          <p:cNvPr id="7" name="TextBox 6"/>
+          <p:cNvSpPr txBox="1"/>
+          <p:nvPr/>
+        </p:nvSpPr>
+        <p:spPr>
+          <a:xfrm>
+            <a:off x="1097280" y="4078224"/>
+            <a:ext cx="548640" cy="365760"/>
+          </a:xfrm>
+          <a:prstGeom prst="rect">
+            <a:avLst/>
+          </a:prstGeom>
+          <a:noFill/>
+        </p:spPr>
+        <p:txBody>
+          <a:bodyPr wrap="square" lIns="0" rIns="0" tIns="0" bIns="0">
+            <a:spAutoFit/>
+          </a:bodyPr>
+          <a:lstStyle/>
+          <a:p>
+            <a:pPr algn="l">
+              <a:lnSpc>
+                <a:spcPct val="132000"/>
+              </a:lnSpc>
+            </a:pPr>
+            <a:r>
+              <a:rPr sz="2400" b="1">
+                <a:solidFill>
+                  <a:srgbClr val="F2F4F3"/>
                 </a:solidFill>
                 <a:latin typeface="Inter Tight"/>
               </a:rPr>
-              <a:t>
-и обоснование к каждому баллу</a:t>
-            </a:r>
-          </a:p>
-        </p:txBody>
-      </p:sp>
-      <p:sp>
-        <p:nvSpPr>
-          <p:cNvPr id="7" name="Can 6"/>
+              <a:t>3</a:t>
+            </a:r>
+          </a:p>
+        </p:txBody>
+      </p:sp>
+      <p:sp>
+        <p:nvSpPr>
+          <p:cNvPr id="8" name="TextBox 7"/>
+          <p:cNvSpPr txBox="1"/>
+          <p:nvPr/>
+        </p:nvSpPr>
+        <p:spPr>
+          <a:xfrm>
+            <a:off x="1755648" y="3840480"/>
+            <a:ext cx="548640" cy="219456"/>
+          </a:xfrm>
+          <a:prstGeom prst="rect">
+            <a:avLst/>
+          </a:prstGeom>
+          <a:noFill/>
+        </p:spPr>
+        <p:txBody>
+          <a:bodyPr wrap="square" lIns="0" rIns="0" tIns="0" bIns="0">
+            <a:spAutoFit/>
+          </a:bodyPr>
+          <a:lstStyle/>
+          <a:p>
+            <a:pPr algn="l">
+              <a:lnSpc>
+                <a:spcPct val="132000"/>
+              </a:lnSpc>
+            </a:pPr>
+            <a:r>
+              <a:rPr sz="1200" b="0">
+                <a:solidFill>
+                  <a:srgbClr val="8B949E"/>
+                </a:solidFill>
+                <a:latin typeface="Inter Tight"/>
+              </a:rPr>
+              <a:t>К2</a:t>
+            </a:r>
+          </a:p>
+        </p:txBody>
+      </p:sp>
+      <p:sp>
+        <p:nvSpPr>
+          <p:cNvPr id="9" name="TextBox 8"/>
+          <p:cNvSpPr txBox="1"/>
+          <p:nvPr/>
+        </p:nvSpPr>
+        <p:spPr>
+          <a:xfrm>
+            <a:off x="1755648" y="4078224"/>
+            <a:ext cx="548640" cy="365760"/>
+          </a:xfrm>
+          <a:prstGeom prst="rect">
+            <a:avLst/>
+          </a:prstGeom>
+          <a:noFill/>
+        </p:spPr>
+        <p:txBody>
+          <a:bodyPr wrap="square" lIns="0" rIns="0" tIns="0" bIns="0">
+            <a:spAutoFit/>
+          </a:bodyPr>
+          <a:lstStyle/>
+          <a:p>
+            <a:pPr algn="l">
+              <a:lnSpc>
+                <a:spcPct val="132000"/>
+              </a:lnSpc>
+            </a:pPr>
+            <a:r>
+              <a:rPr sz="2400" b="1">
+                <a:solidFill>
+                  <a:srgbClr val="F2F4F3"/>
+                </a:solidFill>
+                <a:latin typeface="Inter Tight"/>
+              </a:rPr>
+              <a:t>2</a:t>
+            </a:r>
+          </a:p>
+        </p:txBody>
+      </p:sp>
+      <p:sp>
+        <p:nvSpPr>
+          <p:cNvPr id="10" name="TextBox 9"/>
+          <p:cNvSpPr txBox="1"/>
+          <p:nvPr/>
+        </p:nvSpPr>
+        <p:spPr>
+          <a:xfrm>
+            <a:off x="2414016" y="3840480"/>
+            <a:ext cx="548640" cy="219456"/>
+          </a:xfrm>
+          <a:prstGeom prst="rect">
+            <a:avLst/>
+          </a:prstGeom>
+          <a:noFill/>
+        </p:spPr>
+        <p:txBody>
+          <a:bodyPr wrap="square" lIns="0" rIns="0" tIns="0" bIns="0">
+            <a:spAutoFit/>
+          </a:bodyPr>
+          <a:lstStyle/>
+          <a:p>
+            <a:pPr algn="l">
+              <a:lnSpc>
+                <a:spcPct val="132000"/>
+              </a:lnSpc>
+            </a:pPr>
+            <a:r>
+              <a:rPr sz="1200" b="0">
+                <a:solidFill>
+                  <a:srgbClr val="8B949E"/>
+                </a:solidFill>
+                <a:latin typeface="Inter Tight"/>
+              </a:rPr>
+              <a:t>К3</a:t>
+            </a:r>
+          </a:p>
+        </p:txBody>
+      </p:sp>
+      <p:sp>
+        <p:nvSpPr>
+          <p:cNvPr id="11" name="TextBox 10"/>
+          <p:cNvSpPr txBox="1"/>
+          <p:nvPr/>
+        </p:nvSpPr>
+        <p:spPr>
+          <a:xfrm>
+            <a:off x="2414016" y="4078224"/>
+            <a:ext cx="548640" cy="365760"/>
+          </a:xfrm>
+          <a:prstGeom prst="rect">
+            <a:avLst/>
+          </a:prstGeom>
+          <a:noFill/>
+        </p:spPr>
+        <p:txBody>
+          <a:bodyPr wrap="square" lIns="0" rIns="0" tIns="0" bIns="0">
+            <a:spAutoFit/>
+          </a:bodyPr>
+          <a:lstStyle/>
+          <a:p>
+            <a:pPr algn="l">
+              <a:lnSpc>
+                <a:spcPct val="132000"/>
+              </a:lnSpc>
+            </a:pPr>
+            <a:r>
+              <a:rPr sz="2400" b="1">
+                <a:solidFill>
+                  <a:srgbClr val="F2F4F3"/>
+                </a:solidFill>
+                <a:latin typeface="Inter Tight"/>
+              </a:rPr>
+              <a:t>3</a:t>
+            </a:r>
+          </a:p>
+        </p:txBody>
+      </p:sp>
+      <p:sp>
+        <p:nvSpPr>
+          <p:cNvPr id="12" name="TextBox 11"/>
+          <p:cNvSpPr txBox="1"/>
+          <p:nvPr/>
+        </p:nvSpPr>
+        <p:spPr>
+          <a:xfrm>
+            <a:off x="3072384" y="3840480"/>
+            <a:ext cx="548640" cy="219456"/>
+          </a:xfrm>
+          <a:prstGeom prst="rect">
+            <a:avLst/>
+          </a:prstGeom>
+          <a:noFill/>
+        </p:spPr>
+        <p:txBody>
+          <a:bodyPr wrap="square" lIns="0" rIns="0" tIns="0" bIns="0">
+            <a:spAutoFit/>
+          </a:bodyPr>
+          <a:lstStyle/>
+          <a:p>
+            <a:pPr algn="l">
+              <a:lnSpc>
+                <a:spcPct val="132000"/>
+              </a:lnSpc>
+            </a:pPr>
+            <a:r>
+              <a:rPr sz="1200" b="0">
+                <a:solidFill>
+                  <a:srgbClr val="8B949E"/>
+                </a:solidFill>
+                <a:latin typeface="Inter Tight"/>
+              </a:rPr>
+              <a:t>К4</a:t>
+            </a:r>
+          </a:p>
+        </p:txBody>
+      </p:sp>
+      <p:sp>
+        <p:nvSpPr>
+          <p:cNvPr id="13" name="TextBox 12"/>
+          <p:cNvSpPr txBox="1"/>
+          <p:nvPr/>
+        </p:nvSpPr>
+        <p:spPr>
+          <a:xfrm>
+            <a:off x="3072384" y="4078224"/>
+            <a:ext cx="548640" cy="365760"/>
+          </a:xfrm>
+          <a:prstGeom prst="rect">
+            <a:avLst/>
+          </a:prstGeom>
+          <a:noFill/>
+        </p:spPr>
+        <p:txBody>
+          <a:bodyPr wrap="square" lIns="0" rIns="0" tIns="0" bIns="0">
+            <a:spAutoFit/>
+          </a:bodyPr>
+          <a:lstStyle/>
+          <a:p>
+            <a:pPr algn="l">
+              <a:lnSpc>
+                <a:spcPct val="132000"/>
+              </a:lnSpc>
+            </a:pPr>
+            <a:r>
+              <a:rPr sz="2400" b="1">
+                <a:solidFill>
+                  <a:srgbClr val="F2F4F3"/>
+                </a:solidFill>
+                <a:latin typeface="Inter Tight"/>
+              </a:rPr>
+              <a:t>0</a:t>
+            </a:r>
+          </a:p>
+        </p:txBody>
+      </p:sp>
+      <p:sp>
+        <p:nvSpPr>
+          <p:cNvPr id="14" name="TextBox 13"/>
+          <p:cNvSpPr txBox="1"/>
+          <p:nvPr/>
+        </p:nvSpPr>
+        <p:spPr>
+          <a:xfrm>
+            <a:off x="3730752" y="3840480"/>
+            <a:ext cx="548640" cy="219456"/>
+          </a:xfrm>
+          <a:prstGeom prst="rect">
+            <a:avLst/>
+          </a:prstGeom>
+          <a:noFill/>
+        </p:spPr>
+        <p:txBody>
+          <a:bodyPr wrap="square" lIns="0" rIns="0" tIns="0" bIns="0">
+            <a:spAutoFit/>
+          </a:bodyPr>
+          <a:lstStyle/>
+          <a:p>
+            <a:pPr algn="l">
+              <a:lnSpc>
+                <a:spcPct val="132000"/>
+              </a:lnSpc>
+            </a:pPr>
+            <a:r>
+              <a:rPr sz="1200" b="0">
+                <a:solidFill>
+                  <a:srgbClr val="8B949E"/>
+                </a:solidFill>
+                <a:latin typeface="Inter Tight"/>
+              </a:rPr>
+              <a:t>К5</a:t>
+            </a:r>
+          </a:p>
+        </p:txBody>
+      </p:sp>
+      <p:sp>
+        <p:nvSpPr>
+          <p:cNvPr id="15" name="TextBox 14"/>
+          <p:cNvSpPr txBox="1"/>
+          <p:nvPr/>
+        </p:nvSpPr>
+        <p:spPr>
+          <a:xfrm>
+            <a:off x="3730752" y="4078224"/>
+            <a:ext cx="548640" cy="365760"/>
+          </a:xfrm>
+          <a:prstGeom prst="rect">
+            <a:avLst/>
+          </a:prstGeom>
+          <a:noFill/>
+        </p:spPr>
+        <p:txBody>
+          <a:bodyPr wrap="square" lIns="0" rIns="0" tIns="0" bIns="0">
+            <a:spAutoFit/>
+          </a:bodyPr>
+          <a:lstStyle/>
+          <a:p>
+            <a:pPr algn="l">
+              <a:lnSpc>
+                <a:spcPct val="132000"/>
+              </a:lnSpc>
+            </a:pPr>
+            <a:r>
+              <a:rPr sz="2400" b="1">
+                <a:solidFill>
+                  <a:srgbClr val="F2F4F3"/>
+                </a:solidFill>
+                <a:latin typeface="Inter Tight"/>
+              </a:rPr>
+              <a:t>0</a:t>
+            </a:r>
+          </a:p>
+        </p:txBody>
+      </p:sp>
+      <p:sp>
+        <p:nvSpPr>
+          <p:cNvPr id="16" name="TextBox 15"/>
+          <p:cNvSpPr txBox="1"/>
+          <p:nvPr/>
+        </p:nvSpPr>
+        <p:spPr>
+          <a:xfrm>
+            <a:off x="4389120" y="3840480"/>
+            <a:ext cx="548640" cy="219456"/>
+          </a:xfrm>
+          <a:prstGeom prst="rect">
+            <a:avLst/>
+          </a:prstGeom>
+          <a:noFill/>
+        </p:spPr>
+        <p:txBody>
+          <a:bodyPr wrap="square" lIns="0" rIns="0" tIns="0" bIns="0">
+            <a:spAutoFit/>
+          </a:bodyPr>
+          <a:lstStyle/>
+          <a:p>
+            <a:pPr algn="l">
+              <a:lnSpc>
+                <a:spcPct val="132000"/>
+              </a:lnSpc>
+            </a:pPr>
+            <a:r>
+              <a:rPr sz="1200" b="0">
+                <a:solidFill>
+                  <a:srgbClr val="8B949E"/>
+                </a:solidFill>
+                <a:latin typeface="Inter Tight"/>
+              </a:rPr>
+              <a:t>К6</a:t>
+            </a:r>
+          </a:p>
+        </p:txBody>
+      </p:sp>
+      <p:sp>
+        <p:nvSpPr>
+          <p:cNvPr id="17" name="TextBox 16"/>
+          <p:cNvSpPr txBox="1"/>
+          <p:nvPr/>
+        </p:nvSpPr>
+        <p:spPr>
+          <a:xfrm>
+            <a:off x="4389120" y="4078224"/>
+            <a:ext cx="548640" cy="365760"/>
+          </a:xfrm>
+          <a:prstGeom prst="rect">
+            <a:avLst/>
+          </a:prstGeom>
+          <a:noFill/>
+        </p:spPr>
+        <p:txBody>
+          <a:bodyPr wrap="square" lIns="0" rIns="0" tIns="0" bIns="0">
+            <a:spAutoFit/>
+          </a:bodyPr>
+          <a:lstStyle/>
+          <a:p>
+            <a:pPr algn="l">
+              <a:lnSpc>
+                <a:spcPct val="132000"/>
+              </a:lnSpc>
+            </a:pPr>
+            <a:r>
+              <a:rPr sz="2400" b="1">
+                <a:solidFill>
+                  <a:srgbClr val="F2F4F3"/>
+                </a:solidFill>
+                <a:latin typeface="Inter Tight"/>
+              </a:rPr>
+              <a:t>3</a:t>
+            </a:r>
+          </a:p>
+        </p:txBody>
+      </p:sp>
+      <p:sp>
+        <p:nvSpPr>
+          <p:cNvPr id="18" name="TextBox 17"/>
+          <p:cNvSpPr txBox="1"/>
+          <p:nvPr/>
+        </p:nvSpPr>
+        <p:spPr>
+          <a:xfrm>
+            <a:off x="1097280" y="4553712"/>
+            <a:ext cx="4023360" cy="274320"/>
+          </a:xfrm>
+          <a:prstGeom prst="rect">
+            <a:avLst/>
+          </a:prstGeom>
+          <a:noFill/>
+        </p:spPr>
+        <p:txBody>
+          <a:bodyPr wrap="square" lIns="0" rIns="0" tIns="0" bIns="0">
+            <a:spAutoFit/>
+          </a:bodyPr>
+          <a:lstStyle/>
+          <a:p>
+            <a:pPr algn="l">
+              <a:lnSpc>
+                <a:spcPct val="132000"/>
+              </a:lnSpc>
+            </a:pPr>
+            <a:r>
+              <a:rPr sz="1400" b="0">
+                <a:solidFill>
+                  <a:srgbClr val="8B949E"/>
+                </a:solidFill>
+                <a:latin typeface="Inter Tight"/>
+              </a:rPr>
+              <a:t>и обоснование к каждому баллу</a:t>
+            </a:r>
+          </a:p>
+        </p:txBody>
+      </p:sp>
+      <p:sp>
+        <p:nvSpPr>
+          <p:cNvPr id="19" name="Can 18"/>
           <p:cNvSpPr/>
           <p:nvPr/>
         </p:nvSpPr>
@@ -4368,7 +4670,7 @@
       </p:sp>
       <p:sp>
         <p:nvSpPr>
-          <p:cNvPr id="8" name="Rounded Rectangle 7"/>
+          <p:cNvPr id="20" name="Rounded Rectangle 19"/>
           <p:cNvSpPr/>
           <p:nvPr/>
         </p:nvSpPr>
@@ -4414,7 +4716,7 @@
       </p:sp>
       <p:sp>
         <p:nvSpPr>
-          <p:cNvPr id="9" name="TextBox 8"/>
+          <p:cNvPr id="21" name="TextBox 20"/>
           <p:cNvSpPr txBox="1"/>
           <p:nvPr/>
         </p:nvSpPr>
@@ -4440,20 +4742,20 @@
               </a:lnSpc>
             </a:pPr>
             <a:r>
-              <a:rPr sz="1050" b="1" spc="180">
+              <a:rPr sz="1050" b="1">
                 <a:solidFill>
                   <a:srgbClr val="43B02A"/>
                 </a:solidFill>
                 <a:latin typeface="Inter Tight"/>
               </a:rPr>
-              <a:t>КОД ВЫЧИСЛЯЕТ</a:t>
-            </a:r>
-          </a:p>
-        </p:txBody>
-      </p:sp>
-      <p:sp>
-        <p:nvSpPr>
-          <p:cNvPr id="10" name="TextBox 9"/>
+              <a:t>Код вычисляет</a:t>
+            </a:r>
+          </a:p>
+        </p:txBody>
+      </p:sp>
+      <p:sp>
+        <p:nvSpPr>
+          <p:cNvPr id="22" name="TextBox 21"/>
           <p:cNvSpPr txBox="1"/>
           <p:nvPr/>
         </p:nvSpPr>
@@ -4520,7 +4822,7 @@
       </p:sp>
       <p:sp>
         <p:nvSpPr>
-          <p:cNvPr id="11" name="TextBox 10"/>
+          <p:cNvPr id="23" name="TextBox 22"/>
           <p:cNvSpPr txBox="1"/>
           <p:nvPr/>
         </p:nvSpPr>
@@ -4562,84 +4864,6 @@
                 <a:latin typeface="Inter Tight"/>
               </a:rPr>
               <a:t>Она физически не может их вернуть — поэтому оценку можно проверить и поправить.</a:t>
-            </a:r>
-          </a:p>
-        </p:txBody>
-      </p:sp>
-      <p:sp>
-        <p:nvSpPr>
-          <p:cNvPr id="12" name="TextBox 11"/>
-          <p:cNvSpPr txBox="1"/>
-          <p:nvPr/>
-        </p:nvSpPr>
-        <p:spPr>
-          <a:xfrm>
-            <a:off x="731520" y="6382512"/>
-            <a:ext cx="8778240" cy="237744"/>
-          </a:xfrm>
-          <a:prstGeom prst="rect">
-            <a:avLst/>
-          </a:prstGeom>
-          <a:noFill/>
-        </p:spPr>
-        <p:txBody>
-          <a:bodyPr wrap="square" lIns="0" rIns="0" tIns="0" bIns="0">
-            <a:spAutoFit/>
-          </a:bodyPr>
-          <a:lstStyle/>
-          <a:p>
-            <a:pPr algn="l">
-              <a:lnSpc>
-                <a:spcPct val="132000"/>
-              </a:lnSpc>
-            </a:pPr>
-            <a:r>
-              <a:rPr sz="950" b="0">
-                <a:solidFill>
-                  <a:srgbClr val="8B949E"/>
-                </a:solidFill>
-                <a:latin typeface="Inter Tight"/>
-              </a:rPr>
-              <a:t>ADR-0003 · backend/config/scoring.yaml</a:t>
-            </a:r>
-          </a:p>
-        </p:txBody>
-      </p:sp>
-      <p:sp>
-        <p:nvSpPr>
-          <p:cNvPr id="13" name="TextBox 12"/>
-          <p:cNvSpPr txBox="1"/>
-          <p:nvPr/>
-        </p:nvSpPr>
-        <p:spPr>
-          <a:xfrm>
-            <a:off x="10180015" y="6382512"/>
-            <a:ext cx="1280160" cy="237744"/>
-          </a:xfrm>
-          <a:prstGeom prst="rect">
-            <a:avLst/>
-          </a:prstGeom>
-          <a:noFill/>
-        </p:spPr>
-        <p:txBody>
-          <a:bodyPr wrap="square" lIns="0" rIns="0" tIns="0" bIns="0">
-            <a:spAutoFit/>
-          </a:bodyPr>
-          <a:lstStyle/>
-          <a:p>
-            <a:pPr algn="r">
-              <a:lnSpc>
-                <a:spcPct val="132000"/>
-              </a:lnSpc>
-            </a:pPr>
-            <a:r>
-              <a:rPr sz="950" b="0">
-                <a:solidFill>
-                  <a:srgbClr val="8B949E"/>
-                </a:solidFill>
-                <a:latin typeface="Inter Tight"/>
-              </a:rPr>
-              <a:t>2 / 10</a:t>
             </a:r>
           </a:p>
         </p:txBody>
@@ -4734,13 +4958,13 @@
               </a:lnSpc>
             </a:pPr>
             <a:r>
-              <a:rPr sz="1100" b="1" spc="200">
+              <a:rPr sz="1100" b="1">
                 <a:solidFill>
                   <a:srgbClr val="379123"/>
                 </a:solidFill>
                 <a:latin typeface="Inter Tight"/>
               </a:rPr>
-              <a:t>ВОТ КАК ЭТО ВЫГЛЯДИТ</a:t>
+              <a:t>Вот как это выглядит</a:t>
             </a:r>
           </a:p>
         </p:txBody>
@@ -4893,84 +5117,6 @@
           </a:prstGeom>
         </p:spPr>
       </p:pic>
-      <p:sp>
-        <p:nvSpPr>
-          <p:cNvPr id="8" name="TextBox 7"/>
-          <p:cNvSpPr txBox="1"/>
-          <p:nvPr/>
-        </p:nvSpPr>
-        <p:spPr>
-          <a:xfrm>
-            <a:off x="731520" y="6382512"/>
-            <a:ext cx="8778240" cy="237744"/>
-          </a:xfrm>
-          <a:prstGeom prst="rect">
-            <a:avLst/>
-          </a:prstGeom>
-          <a:noFill/>
-        </p:spPr>
-        <p:txBody>
-          <a:bodyPr wrap="square" lIns="0" rIns="0" tIns="0" bIns="0">
-            <a:spAutoFit/>
-          </a:bodyPr>
-          <a:lstStyle/>
-          <a:p>
-            <a:pPr algn="l">
-              <a:lnSpc>
-                <a:spcPct val="132000"/>
-              </a:lnSpc>
-            </a:pPr>
-            <a:r>
-              <a:rPr sz="950" b="0">
-                <a:solidFill>
-                  <a:srgbClr val="9AA1AB"/>
-                </a:solidFill>
-                <a:latin typeface="Inter Tight"/>
-              </a:rPr>
-              <a:t>живой стенд: 185.56.162.154</a:t>
-            </a:r>
-          </a:p>
-        </p:txBody>
-      </p:sp>
-      <p:sp>
-        <p:nvSpPr>
-          <p:cNvPr id="9" name="TextBox 8"/>
-          <p:cNvSpPr txBox="1"/>
-          <p:nvPr/>
-        </p:nvSpPr>
-        <p:spPr>
-          <a:xfrm>
-            <a:off x="10180015" y="6382512"/>
-            <a:ext cx="1280160" cy="237744"/>
-          </a:xfrm>
-          <a:prstGeom prst="rect">
-            <a:avLst/>
-          </a:prstGeom>
-          <a:noFill/>
-        </p:spPr>
-        <p:txBody>
-          <a:bodyPr wrap="square" lIns="0" rIns="0" tIns="0" bIns="0">
-            <a:spAutoFit/>
-          </a:bodyPr>
-          <a:lstStyle/>
-          <a:p>
-            <a:pPr algn="r">
-              <a:lnSpc>
-                <a:spcPct val="132000"/>
-              </a:lnSpc>
-            </a:pPr>
-            <a:r>
-              <a:rPr sz="950" b="0">
-                <a:solidFill>
-                  <a:srgbClr val="9AA1AB"/>
-                </a:solidFill>
-                <a:latin typeface="Inter Tight"/>
-              </a:rPr>
-              <a:t>3 / 10</a:t>
-            </a:r>
-          </a:p>
-        </p:txBody>
-      </p:sp>
     </p:spTree>
   </p:cSld>
   <p:clrMapOvr>
@@ -5061,13 +5207,13 @@
               </a:lnSpc>
             </a:pPr>
             <a:r>
-              <a:rPr sz="1100" b="1" spc="200">
+              <a:rPr sz="1100" b="1">
                 <a:solidFill>
                   <a:srgbClr val="43B02A"/>
                 </a:solidFill>
                 <a:latin typeface="Inter Tight"/>
               </a:rPr>
-              <a:t>СКОЛЬКО СТОИТ</a:t>
+              <a:t>Сколько это стоит</a:t>
             </a:r>
           </a:p>
         </p:txBody>
@@ -5186,13 +5332,13 @@
               </a:lnSpc>
             </a:pPr>
             <a:r>
-              <a:rPr sz="1050" b="1" spc="160">
+              <a:rPr sz="1050" b="1">
                 <a:solidFill>
                   <a:srgbClr val="8B949E"/>
                 </a:solidFill>
                 <a:latin typeface="Inter Tight"/>
               </a:rPr>
-              <a:t>ГОД ОБРАБОТКИ ПОТОКА В 150 МАТЕРИАЛОВ В СУТКИ</a:t>
+              <a:t>Год обработки потока в 150 материалов в сутки</a:t>
             </a:r>
           </a:p>
         </p:txBody>
@@ -5308,13 +5454,13 @@
               </a:lnSpc>
             </a:pPr>
             <a:r>
-              <a:rPr sz="1050" b="1" spc="160">
+              <a:rPr sz="1050" b="1">
                 <a:solidFill>
                   <a:srgbClr val="8B949E"/>
                 </a:solidFill>
                 <a:latin typeface="Inter Tight"/>
               </a:rPr>
-              <a:t>ОДИН ШТРАФ ПО ФЗ № 295-ФЗ, ВЕРХНЯЯ ГРАНИЦА</a:t>
+              <a:t>Один штраф по ФЗ № 295-ФЗ, верхняя граница</a:t>
             </a:r>
           </a:p>
         </p:txBody>
@@ -5446,84 +5592,6 @@
                 <a:latin typeface="Inter Tight"/>
               </a:rPr>
               <a:t>Четыре копейки за материал. Одного пропуска хватает, чтобы перекрыть двести лет работы модели. Курс ЦБ на 05.09.2026.</a:t>
-            </a:r>
-          </a:p>
-        </p:txBody>
-      </p:sp>
-      <p:sp>
-        <p:nvSpPr>
-          <p:cNvPr id="13" name="TextBox 12"/>
-          <p:cNvSpPr txBox="1"/>
-          <p:nvPr/>
-        </p:nvSpPr>
-        <p:spPr>
-          <a:xfrm>
-            <a:off x="731520" y="6382512"/>
-            <a:ext cx="8778240" cy="237744"/>
-          </a:xfrm>
-          <a:prstGeom prst="rect">
-            <a:avLst/>
-          </a:prstGeom>
-          <a:noFill/>
-        </p:spPr>
-        <p:txBody>
-          <a:bodyPr wrap="square" lIns="0" rIns="0" tIns="0" bIns="0">
-            <a:spAutoFit/>
-          </a:bodyPr>
-          <a:lstStyle/>
-          <a:p>
-            <a:pPr algn="l">
-              <a:lnSpc>
-                <a:spcPct val="132000"/>
-              </a:lnSpc>
-            </a:pPr>
-            <a:r>
-              <a:rPr sz="950" b="0">
-                <a:solidFill>
-                  <a:srgbClr val="8B949E"/>
-                </a:solidFill>
-                <a:latin typeface="Inter Tight"/>
-              </a:rPr>
-              <a:t>docs/business-case.md</a:t>
-            </a:r>
-          </a:p>
-        </p:txBody>
-      </p:sp>
-      <p:sp>
-        <p:nvSpPr>
-          <p:cNvPr id="14" name="TextBox 13"/>
-          <p:cNvSpPr txBox="1"/>
-          <p:nvPr/>
-        </p:nvSpPr>
-        <p:spPr>
-          <a:xfrm>
-            <a:off x="10180015" y="6382512"/>
-            <a:ext cx="1280160" cy="237744"/>
-          </a:xfrm>
-          <a:prstGeom prst="rect">
-            <a:avLst/>
-          </a:prstGeom>
-          <a:noFill/>
-        </p:spPr>
-        <p:txBody>
-          <a:bodyPr wrap="square" lIns="0" rIns="0" tIns="0" bIns="0">
-            <a:spAutoFit/>
-          </a:bodyPr>
-          <a:lstStyle/>
-          <a:p>
-            <a:pPr algn="r">
-              <a:lnSpc>
-                <a:spcPct val="132000"/>
-              </a:lnSpc>
-            </a:pPr>
-            <a:r>
-              <a:rPr sz="950" b="0">
-                <a:solidFill>
-                  <a:srgbClr val="8B949E"/>
-                </a:solidFill>
-                <a:latin typeface="Inter Tight"/>
-              </a:rPr>
-              <a:t>4 / 10</a:t>
             </a:r>
           </a:p>
         </p:txBody>
@@ -5618,13 +5686,13 @@
               </a:lnSpc>
             </a:pPr>
             <a:r>
-              <a:rPr sz="1100" b="1" spc="200">
+              <a:rPr sz="1100" b="1">
                 <a:solidFill>
                   <a:srgbClr val="43B02A"/>
                 </a:solidFill>
                 <a:latin typeface="Inter Tight"/>
               </a:rPr>
-              <a:t>НАСКОЛЬКО ТОЧНО</a:t>
+              <a:t>Насколько это точно</a:t>
             </a:r>
           </a:p>
         </p:txBody>
@@ -5742,13 +5810,13 @@
               </a:lnSpc>
             </a:pPr>
             <a:r>
-              <a:rPr sz="1050" b="1" spc="160">
+              <a:rPr sz="1050" b="1">
                 <a:solidFill>
                   <a:srgbClr val="8B949E"/>
                 </a:solidFill>
                 <a:latin typeface="Inter Tight"/>
               </a:rPr>
-              <a:t>42 КАРТОЧКИ · ОДНА КЛЕТКА — ОДНА КАРТОЧКА</a:t>
+              <a:t>Одна клетка — одна карточка реестра</a:t>
             </a:r>
           </a:p>
         </p:txBody>
@@ -8142,84 +8210,6 @@
                 <a:latin typeface="Inter Tight"/>
               </a:rPr>
               <a:t>Она сама выставила баллы. «42 из 42» — это про формулу: получив экспертные баллы, код выдаёт тот же индекс. Путать эти два числа нельзя.</a:t>
-            </a:r>
-          </a:p>
-        </p:txBody>
-      </p:sp>
-      <p:sp>
-        <p:nvSpPr>
-          <p:cNvPr id="62" name="TextBox 61"/>
-          <p:cNvSpPr txBox="1"/>
-          <p:nvPr/>
-        </p:nvSpPr>
-        <p:spPr>
-          <a:xfrm>
-            <a:off x="731520" y="6382512"/>
-            <a:ext cx="8778240" cy="237744"/>
-          </a:xfrm>
-          <a:prstGeom prst="rect">
-            <a:avLst/>
-          </a:prstGeom>
-          <a:noFill/>
-        </p:spPr>
-        <p:txBody>
-          <a:bodyPr wrap="square" lIns="0" rIns="0" tIns="0" bIns="0">
-            <a:spAutoFit/>
-          </a:bodyPr>
-          <a:lstStyle/>
-          <a:p>
-            <a:pPr algn="l">
-              <a:lnSpc>
-                <a:spcPct val="132000"/>
-              </a:lnSpc>
-            </a:pPr>
-            <a:r>
-              <a:rPr sz="950" b="0">
-                <a:solidFill>
-                  <a:srgbClr val="8B949E"/>
-                </a:solidFill>
-                <a:latin typeface="Inter Tight"/>
-              </a:rPr>
-              <a:t>evals/results.md · verify-formula</a:t>
-            </a:r>
-          </a:p>
-        </p:txBody>
-      </p:sp>
-      <p:sp>
-        <p:nvSpPr>
-          <p:cNvPr id="63" name="TextBox 62"/>
-          <p:cNvSpPr txBox="1"/>
-          <p:nvPr/>
-        </p:nvSpPr>
-        <p:spPr>
-          <a:xfrm>
-            <a:off x="10180015" y="6382512"/>
-            <a:ext cx="1280160" cy="237744"/>
-          </a:xfrm>
-          <a:prstGeom prst="rect">
-            <a:avLst/>
-          </a:prstGeom>
-          <a:noFill/>
-        </p:spPr>
-        <p:txBody>
-          <a:bodyPr wrap="square" lIns="0" rIns="0" tIns="0" bIns="0">
-            <a:spAutoFit/>
-          </a:bodyPr>
-          <a:lstStyle/>
-          <a:p>
-            <a:pPr algn="r">
-              <a:lnSpc>
-                <a:spcPct val="132000"/>
-              </a:lnSpc>
-            </a:pPr>
-            <a:r>
-              <a:rPr sz="950" b="0">
-                <a:solidFill>
-                  <a:srgbClr val="8B949E"/>
-                </a:solidFill>
-                <a:latin typeface="Inter Tight"/>
-              </a:rPr>
-              <a:t>5 / 10</a:t>
             </a:r>
           </a:p>
         </p:txBody>
@@ -8314,13 +8304,13 @@
               </a:lnSpc>
             </a:pPr>
             <a:r>
-              <a:rPr sz="1100" b="1" spc="200">
+              <a:rPr sz="1100" b="1">
                 <a:solidFill>
                   <a:srgbClr val="EB5757"/>
                 </a:solidFill>
                 <a:latin typeface="Inter Tight"/>
               </a:rPr>
-              <a:t>ЧЕСТНО</a:t>
+              <a:t>Честно</a:t>
             </a:r>
           </a:p>
         </p:txBody>
@@ -8732,84 +8722,6 @@
                 <a:latin typeface="Inter Tight"/>
               </a:rPr>
               <a:t>Обработка не успевает за сбором. Показываем срез.</a:t>
-            </a:r>
-          </a:p>
-        </p:txBody>
-      </p:sp>
-      <p:sp>
-        <p:nvSpPr>
-          <p:cNvPr id="14" name="TextBox 13"/>
-          <p:cNvSpPr txBox="1"/>
-          <p:nvPr/>
-        </p:nvSpPr>
-        <p:spPr>
-          <a:xfrm>
-            <a:off x="731520" y="6382512"/>
-            <a:ext cx="8778240" cy="237744"/>
-          </a:xfrm>
-          <a:prstGeom prst="rect">
-            <a:avLst/>
-          </a:prstGeom>
-          <a:noFill/>
-        </p:spPr>
-        <p:txBody>
-          <a:bodyPr wrap="square" lIns="0" rIns="0" tIns="0" bIns="0">
-            <a:spAutoFit/>
-          </a:bodyPr>
-          <a:lstStyle/>
-          <a:p>
-            <a:pPr algn="l">
-              <a:lnSpc>
-                <a:spcPct val="132000"/>
-              </a:lnSpc>
-            </a:pPr>
-            <a:r>
-              <a:rPr sz="950" b="0">
-                <a:solidFill>
-                  <a:srgbClr val="8B949E"/>
-                </a:solidFill>
-                <a:latin typeface="Inter Tight"/>
-              </a:rPr>
-              <a:t>docs/hypotheses.md · specs/…/open-questions.md</a:t>
-            </a:r>
-          </a:p>
-        </p:txBody>
-      </p:sp>
-      <p:sp>
-        <p:nvSpPr>
-          <p:cNvPr id="15" name="TextBox 14"/>
-          <p:cNvSpPr txBox="1"/>
-          <p:nvPr/>
-        </p:nvSpPr>
-        <p:spPr>
-          <a:xfrm>
-            <a:off x="10180015" y="6382512"/>
-            <a:ext cx="1280160" cy="237744"/>
-          </a:xfrm>
-          <a:prstGeom prst="rect">
-            <a:avLst/>
-          </a:prstGeom>
-          <a:noFill/>
-        </p:spPr>
-        <p:txBody>
-          <a:bodyPr wrap="square" lIns="0" rIns="0" tIns="0" bIns="0">
-            <a:spAutoFit/>
-          </a:bodyPr>
-          <a:lstStyle/>
-          <a:p>
-            <a:pPr algn="r">
-              <a:lnSpc>
-                <a:spcPct val="132000"/>
-              </a:lnSpc>
-            </a:pPr>
-            <a:r>
-              <a:rPr sz="950" b="0">
-                <a:solidFill>
-                  <a:srgbClr val="8B949E"/>
-                </a:solidFill>
-                <a:latin typeface="Inter Tight"/>
-              </a:rPr>
-              <a:t>6 / 10</a:t>
             </a:r>
           </a:p>
         </p:txBody>
@@ -8904,13 +8816,13 @@
               </a:lnSpc>
             </a:pPr>
             <a:r>
-              <a:rPr sz="1100" b="1" spc="200">
+              <a:rPr sz="1100" b="1">
                 <a:solidFill>
                   <a:srgbClr val="43B02A"/>
                 </a:solidFill>
                 <a:latin typeface="Inter Tight"/>
               </a:rPr>
-              <a:t>КОМАНДА</a:t>
+              <a:t>Команда</a:t>
             </a:r>
           </a:p>
         </p:txBody>
@@ -9027,7 +8939,7 @@
                 </a:solidFill>
                 <a:latin typeface="Inter Tight"/>
               </a:rPr>
-              <a:t>@veceloe   ·   продукт, парсинг, фронтенд</a:t>
+              <a:t>продукт, парсинг, фронтенд</a:t>
             </a:r>
           </a:p>
         </p:txBody>
@@ -9105,7 +9017,7 @@
                 </a:solidFill>
                 <a:latin typeface="Inter Tight"/>
               </a:rPr>
-              <a:t>@denizzzz_ka   ·   весь слой работы с моделью</a:t>
+              <a:t>весь слой работы с моделью</a:t>
             </a:r>
           </a:p>
         </p:txBody>
@@ -9183,7 +9095,7 @@
                 </a:solidFill>
                 <a:latin typeface="Inter Tight"/>
               </a:rPr>
-              <a:t>@s3drmn   ·   бэкенд, конвейер, развёртывание</a:t>
+              <a:t>бэкенд, конвейер, развёртывание</a:t>
             </a:r>
           </a:p>
         </p:txBody>
@@ -9371,45 +9283,6 @@
                 <a:latin typeface="Inter Tight"/>
               </a:rPr>
               <a:t>github.com/veceloe/ai-gpr-center-cifra</a:t>
-            </a:r>
-          </a:p>
-        </p:txBody>
-      </p:sp>
-      <p:sp>
-        <p:nvSpPr>
-          <p:cNvPr id="16" name="TextBox 15"/>
-          <p:cNvSpPr txBox="1"/>
-          <p:nvPr/>
-        </p:nvSpPr>
-        <p:spPr>
-          <a:xfrm>
-            <a:off x="10180015" y="6382512"/>
-            <a:ext cx="1280160" cy="237744"/>
-          </a:xfrm>
-          <a:prstGeom prst="rect">
-            <a:avLst/>
-          </a:prstGeom>
-          <a:noFill/>
-        </p:spPr>
-        <p:txBody>
-          <a:bodyPr wrap="square" lIns="0" rIns="0" tIns="0" bIns="0">
-            <a:spAutoFit/>
-          </a:bodyPr>
-          <a:lstStyle/>
-          <a:p>
-            <a:pPr algn="r">
-              <a:lnSpc>
-                <a:spcPct val="132000"/>
-              </a:lnSpc>
-            </a:pPr>
-            <a:r>
-              <a:rPr sz="950" b="0">
-                <a:solidFill>
-                  <a:srgbClr val="8B949E"/>
-                </a:solidFill>
-                <a:latin typeface="Inter Tight"/>
-              </a:rPr>
-              <a:t>7 / 10</a:t>
             </a:r>
           </a:p>
         </p:txBody>
@@ -9504,13 +9377,13 @@
               </a:lnSpc>
             </a:pPr>
             <a:r>
-              <a:rPr sz="1100" b="1" spc="200">
+              <a:rPr sz="1100" b="1">
                 <a:solidFill>
                   <a:srgbClr val="9AA1AB"/>
                 </a:solidFill>
                 <a:latin typeface="Inter Tight"/>
               </a:rPr>
-              <a:t>ПРИЛОЖЕНИЕ · ДЛЯ ВОПРОСОВ</a:t>
+              <a:t>Приложение, если спросят</a:t>
             </a:r>
           </a:p>
         </p:txBody>
@@ -9663,84 +9536,6 @@
           </a:prstGeom>
         </p:spPr>
       </p:pic>
-      <p:sp>
-        <p:nvSpPr>
-          <p:cNvPr id="8" name="TextBox 7"/>
-          <p:cNvSpPr txBox="1"/>
-          <p:nvPr/>
-        </p:nvSpPr>
-        <p:spPr>
-          <a:xfrm>
-            <a:off x="731520" y="6382512"/>
-            <a:ext cx="8778240" cy="237744"/>
-          </a:xfrm>
-          <a:prstGeom prst="rect">
-            <a:avLst/>
-          </a:prstGeom>
-          <a:noFill/>
-        </p:spPr>
-        <p:txBody>
-          <a:bodyPr wrap="square" lIns="0" rIns="0" tIns="0" bIns="0">
-            <a:spAutoFit/>
-          </a:bodyPr>
-          <a:lstStyle/>
-          <a:p>
-            <a:pPr algn="l">
-              <a:lnSpc>
-                <a:spcPct val="132000"/>
-              </a:lnSpc>
-            </a:pPr>
-            <a:r>
-              <a:rPr sz="950" b="0">
-                <a:solidFill>
-                  <a:srgbClr val="9AA1AB"/>
-                </a:solidFill>
-                <a:latin typeface="Inter Tight"/>
-              </a:rPr>
-              <a:t>FR-024 · FR-081</a:t>
-            </a:r>
-          </a:p>
-        </p:txBody>
-      </p:sp>
-      <p:sp>
-        <p:nvSpPr>
-          <p:cNvPr id="9" name="TextBox 8"/>
-          <p:cNvSpPr txBox="1"/>
-          <p:nvPr/>
-        </p:nvSpPr>
-        <p:spPr>
-          <a:xfrm>
-            <a:off x="10180015" y="6382512"/>
-            <a:ext cx="1280160" cy="237744"/>
-          </a:xfrm>
-          <a:prstGeom prst="rect">
-            <a:avLst/>
-          </a:prstGeom>
-          <a:noFill/>
-        </p:spPr>
-        <p:txBody>
-          <a:bodyPr wrap="square" lIns="0" rIns="0" tIns="0" bIns="0">
-            <a:spAutoFit/>
-          </a:bodyPr>
-          <a:lstStyle/>
-          <a:p>
-            <a:pPr algn="r">
-              <a:lnSpc>
-                <a:spcPct val="132000"/>
-              </a:lnSpc>
-            </a:pPr>
-            <a:r>
-              <a:rPr sz="950" b="0">
-                <a:solidFill>
-                  <a:srgbClr val="9AA1AB"/>
-                </a:solidFill>
-                <a:latin typeface="Inter Tight"/>
-              </a:rPr>
-              <a:t>8 / 10</a:t>
-            </a:r>
-          </a:p>
-        </p:txBody>
-      </p:sp>
     </p:spTree>
   </p:cSld>
   <p:clrMapOvr>

--- a/docs/product/presentation.pptx
+++ b/docs/product/presentation.pptx
@@ -15,6 +15,8 @@
     <p:sldId id="263" r:id="rId14"/>
     <p:sldId id="264" r:id="rId15"/>
     <p:sldId id="265" r:id="rId16"/>
+    <p:sldId id="266" r:id="rId17"/>
+    <p:sldId id="267" r:id="rId18"/>
   </p:sldIdLst>
   <p:sldSz cx="12191695" cy="6858000" type="screen4x3"/>
   <p:notesSz cx="6858000" cy="9144000"/>
@@ -3365,6 +3367,1154 @@
             <a:avLst/>
           </a:prstGeom>
           <a:solidFill>
+            <a:srgbClr val="101214"/>
+          </a:solidFill>
+          <a:ln>
+            <a:noFill/>
+          </a:ln>
+          <a:effectLst/>
+        </p:spPr>
+        <p:style>
+          <a:lnRef idx="1">
+            <a:schemeClr val="accent1"/>
+          </a:lnRef>
+          <a:fillRef idx="3">
+            <a:schemeClr val="accent1"/>
+          </a:fillRef>
+          <a:effectRef idx="2">
+            <a:schemeClr val="accent1"/>
+          </a:effectRef>
+          <a:fontRef idx="minor">
+            <a:schemeClr val="lt1"/>
+          </a:fontRef>
+        </p:style>
+        <p:txBody>
+          <a:bodyPr rtlCol="0" anchor="ctr"/>
+          <a:lstStyle/>
+          <a:p>
+            <a:pPr algn="ctr"/>
+          </a:p>
+        </p:txBody>
+      </p:sp>
+      <p:sp>
+        <p:nvSpPr>
+          <p:cNvPr id="3" name="TextBox 2"/>
+          <p:cNvSpPr txBox="1"/>
+          <p:nvPr/>
+        </p:nvSpPr>
+        <p:spPr>
+          <a:xfrm>
+            <a:off x="731520" y="868680"/>
+            <a:ext cx="10698480" cy="274320"/>
+          </a:xfrm>
+          <a:prstGeom prst="rect">
+            <a:avLst/>
+          </a:prstGeom>
+          <a:noFill/>
+        </p:spPr>
+        <p:txBody>
+          <a:bodyPr wrap="square" lIns="0" rIns="0" tIns="0" bIns="0">
+            <a:spAutoFit/>
+          </a:bodyPr>
+          <a:lstStyle/>
+          <a:p>
+            <a:pPr algn="l">
+              <a:lnSpc>
+                <a:spcPct val="132000"/>
+              </a:lnSpc>
+            </a:pPr>
+            <a:r>
+              <a:rPr sz="1100" b="1">
+                <a:solidFill>
+                  <a:srgbClr val="43B02A"/>
+                </a:solidFill>
+                <a:latin typeface="Inter Tight"/>
+              </a:rPr>
+              <a:t>Команда</a:t>
+            </a:r>
+          </a:p>
+        </p:txBody>
+      </p:sp>
+      <p:sp>
+        <p:nvSpPr>
+          <p:cNvPr id="4" name="TextBox 3"/>
+          <p:cNvSpPr txBox="1"/>
+          <p:nvPr/>
+        </p:nvSpPr>
+        <p:spPr>
+          <a:xfrm>
+            <a:off x="731520" y="1234440"/>
+            <a:ext cx="10515600" cy="548640"/>
+          </a:xfrm>
+          <a:prstGeom prst="rect">
+            <a:avLst/>
+          </a:prstGeom>
+          <a:noFill/>
+        </p:spPr>
+        <p:txBody>
+          <a:bodyPr wrap="square" lIns="0" rIns="0" tIns="0" bIns="0">
+            <a:spAutoFit/>
+          </a:bodyPr>
+          <a:lstStyle/>
+          <a:p>
+            <a:pPr algn="l">
+              <a:lnSpc>
+                <a:spcPct val="132000"/>
+              </a:lnSpc>
+            </a:pPr>
+            <a:r>
+              <a:rPr sz="4000" b="1">
+                <a:solidFill>
+                  <a:srgbClr val="F2F4F3"/>
+                </a:solidFill>
+                <a:latin typeface="Inter Tight"/>
+              </a:rPr>
+              <a:t>Кто что сделал</a:t>
+            </a:r>
+          </a:p>
+        </p:txBody>
+      </p:sp>
+      <p:sp>
+        <p:nvSpPr>
+          <p:cNvPr id="5" name="Rounded Rectangle 4"/>
+          <p:cNvSpPr/>
+          <p:nvPr/>
+        </p:nvSpPr>
+        <p:spPr>
+          <a:xfrm>
+            <a:off x="731520" y="2057400"/>
+            <a:ext cx="10698480" cy="1078992"/>
+          </a:xfrm>
+          <a:prstGeom prst="roundRect">
+            <a:avLst>
+              <a:gd name="adj" fmla="val 4500"/>
+            </a:avLst>
+          </a:prstGeom>
+          <a:solidFill>
+            <a:srgbClr val="1B1F24"/>
+          </a:solidFill>
+          <a:ln>
+            <a:noFill/>
+          </a:ln>
+          <a:effectLst/>
+        </p:spPr>
+        <p:style>
+          <a:lnRef idx="1">
+            <a:schemeClr val="accent1"/>
+          </a:lnRef>
+          <a:fillRef idx="3">
+            <a:schemeClr val="accent1"/>
+          </a:fillRef>
+          <a:effectRef idx="2">
+            <a:schemeClr val="accent1"/>
+          </a:effectRef>
+          <a:fontRef idx="minor">
+            <a:schemeClr val="lt1"/>
+          </a:fontRef>
+        </p:style>
+        <p:txBody>
+          <a:bodyPr rtlCol="0" anchor="ctr"/>
+          <a:lstStyle/>
+          <a:p>
+            <a:pPr algn="ctr"/>
+          </a:p>
+        </p:txBody>
+      </p:sp>
+      <p:sp>
+        <p:nvSpPr>
+          <p:cNvPr id="6" name="TextBox 5"/>
+          <p:cNvSpPr txBox="1"/>
+          <p:nvPr/>
+        </p:nvSpPr>
+        <p:spPr>
+          <a:xfrm>
+            <a:off x="1115568" y="2258568"/>
+            <a:ext cx="2926080" cy="274320"/>
+          </a:xfrm>
+          <a:prstGeom prst="rect">
+            <a:avLst/>
+          </a:prstGeom>
+          <a:noFill/>
+        </p:spPr>
+        <p:txBody>
+          <a:bodyPr wrap="square" lIns="0" rIns="0" tIns="0" bIns="0">
+            <a:spAutoFit/>
+          </a:bodyPr>
+          <a:lstStyle/>
+          <a:p>
+            <a:pPr algn="l">
+              <a:lnSpc>
+                <a:spcPct val="132000"/>
+              </a:lnSpc>
+            </a:pPr>
+            <a:r>
+              <a:rPr sz="1800" b="1">
+                <a:solidFill>
+                  <a:srgbClr val="F2F4F3"/>
+                </a:solidFill>
+                <a:latin typeface="Inter Tight"/>
+              </a:rPr>
+              <a:t>Левочкин Егор</a:t>
+            </a:r>
+          </a:p>
+        </p:txBody>
+      </p:sp>
+      <p:sp>
+        <p:nvSpPr>
+          <p:cNvPr id="7" name="TextBox 6"/>
+          <p:cNvSpPr txBox="1"/>
+          <p:nvPr/>
+        </p:nvSpPr>
+        <p:spPr>
+          <a:xfrm>
+            <a:off x="1115568" y="2606040"/>
+            <a:ext cx="2926080" cy="256032"/>
+          </a:xfrm>
+          <a:prstGeom prst="rect">
+            <a:avLst/>
+          </a:prstGeom>
+          <a:noFill/>
+        </p:spPr>
+        <p:txBody>
+          <a:bodyPr wrap="square" lIns="0" rIns="0" tIns="0" bIns="0">
+            <a:spAutoFit/>
+          </a:bodyPr>
+          <a:lstStyle/>
+          <a:p>
+            <a:pPr algn="l">
+              <a:lnSpc>
+                <a:spcPct val="132000"/>
+              </a:lnSpc>
+            </a:pPr>
+            <a:r>
+              <a:rPr sz="1300" b="0">
+                <a:solidFill>
+                  <a:srgbClr val="43B02A"/>
+                </a:solidFill>
+                <a:latin typeface="Inter Tight"/>
+              </a:rPr>
+              <a:t>AI Product</a:t>
+            </a:r>
+          </a:p>
+        </p:txBody>
+      </p:sp>
+      <p:sp>
+        <p:nvSpPr>
+          <p:cNvPr id="8" name="TextBox 7"/>
+          <p:cNvSpPr txBox="1"/>
+          <p:nvPr/>
+        </p:nvSpPr>
+        <p:spPr>
+          <a:xfrm>
+            <a:off x="4297680" y="2240280"/>
+            <a:ext cx="5760720" cy="777240"/>
+          </a:xfrm>
+          <a:prstGeom prst="rect">
+            <a:avLst/>
+          </a:prstGeom>
+          <a:noFill/>
+        </p:spPr>
+        <p:txBody>
+          <a:bodyPr wrap="square" lIns="0" rIns="0" tIns="0" bIns="0">
+            <a:spAutoFit/>
+          </a:bodyPr>
+          <a:lstStyle/>
+          <a:p>
+            <a:pPr algn="l">
+              <a:lnSpc>
+                <a:spcPct val="145000"/>
+              </a:lnSpc>
+            </a:pPr>
+            <a:r>
+              <a:rPr sz="1250" b="0">
+                <a:solidFill>
+                  <a:srgbClr val="8B949E"/>
+                </a:solidFill>
+                <a:latin typeface="Inter Tight"/>
+              </a:rPr>
+              <a:t>Спецификация, методика оценки, ADR, исследование рынка, работа с заказчиком.
+Инженерно: фронтенд целиком, формула индекса, заземление, стенд замера качества, развёртывание.</a:t>
+            </a:r>
+          </a:p>
+        </p:txBody>
+      </p:sp>
+      <p:sp>
+        <p:nvSpPr>
+          <p:cNvPr id="9" name="TextBox 8"/>
+          <p:cNvSpPr txBox="1"/>
+          <p:nvPr/>
+        </p:nvSpPr>
+        <p:spPr>
+          <a:xfrm>
+            <a:off x="10241280" y="2258568"/>
+            <a:ext cx="1005840" cy="256032"/>
+          </a:xfrm>
+          <a:prstGeom prst="rect">
+            <a:avLst/>
+          </a:prstGeom>
+          <a:noFill/>
+        </p:spPr>
+        <p:txBody>
+          <a:bodyPr wrap="square" lIns="0" rIns="0" tIns="0" bIns="0">
+            <a:spAutoFit/>
+          </a:bodyPr>
+          <a:lstStyle/>
+          <a:p>
+            <a:pPr algn="r">
+              <a:lnSpc>
+                <a:spcPct val="132000"/>
+              </a:lnSpc>
+            </a:pPr>
+            <a:r>
+              <a:rPr sz="1250" b="0">
+                <a:solidFill>
+                  <a:srgbClr val="8B949E"/>
+                </a:solidFill>
+                <a:latin typeface="Inter Tight"/>
+              </a:rPr>
+              <a:t>36 коммитов</a:t>
+            </a:r>
+          </a:p>
+        </p:txBody>
+      </p:sp>
+      <p:sp>
+        <p:nvSpPr>
+          <p:cNvPr id="10" name="Rounded Rectangle 9"/>
+          <p:cNvSpPr/>
+          <p:nvPr/>
+        </p:nvSpPr>
+        <p:spPr>
+          <a:xfrm>
+            <a:off x="731520" y="3282696"/>
+            <a:ext cx="10698480" cy="1078992"/>
+          </a:xfrm>
+          <a:prstGeom prst="roundRect">
+            <a:avLst>
+              <a:gd name="adj" fmla="val 4500"/>
+            </a:avLst>
+          </a:prstGeom>
+          <a:solidFill>
+            <a:srgbClr val="23282E"/>
+          </a:solidFill>
+          <a:ln>
+            <a:noFill/>
+          </a:ln>
+          <a:effectLst/>
+        </p:spPr>
+        <p:style>
+          <a:lnRef idx="1">
+            <a:schemeClr val="accent1"/>
+          </a:lnRef>
+          <a:fillRef idx="3">
+            <a:schemeClr val="accent1"/>
+          </a:fillRef>
+          <a:effectRef idx="2">
+            <a:schemeClr val="accent1"/>
+          </a:effectRef>
+          <a:fontRef idx="minor">
+            <a:schemeClr val="lt1"/>
+          </a:fontRef>
+        </p:style>
+        <p:txBody>
+          <a:bodyPr rtlCol="0" anchor="ctr"/>
+          <a:lstStyle/>
+          <a:p>
+            <a:pPr algn="ctr"/>
+          </a:p>
+        </p:txBody>
+      </p:sp>
+      <p:sp>
+        <p:nvSpPr>
+          <p:cNvPr id="11" name="TextBox 10"/>
+          <p:cNvSpPr txBox="1"/>
+          <p:nvPr/>
+        </p:nvSpPr>
+        <p:spPr>
+          <a:xfrm>
+            <a:off x="1115568" y="3483864"/>
+            <a:ext cx="2926080" cy="274320"/>
+          </a:xfrm>
+          <a:prstGeom prst="rect">
+            <a:avLst/>
+          </a:prstGeom>
+          <a:noFill/>
+        </p:spPr>
+        <p:txBody>
+          <a:bodyPr wrap="square" lIns="0" rIns="0" tIns="0" bIns="0">
+            <a:spAutoFit/>
+          </a:bodyPr>
+          <a:lstStyle/>
+          <a:p>
+            <a:pPr algn="l">
+              <a:lnSpc>
+                <a:spcPct val="132000"/>
+              </a:lnSpc>
+            </a:pPr>
+            <a:r>
+              <a:rPr sz="1800" b="1">
+                <a:solidFill>
+                  <a:srgbClr val="F2F4F3"/>
+                </a:solidFill>
+                <a:latin typeface="Inter Tight"/>
+              </a:rPr>
+              <a:t>Головаш Денис</a:t>
+            </a:r>
+          </a:p>
+        </p:txBody>
+      </p:sp>
+      <p:sp>
+        <p:nvSpPr>
+          <p:cNvPr id="12" name="TextBox 11"/>
+          <p:cNvSpPr txBox="1"/>
+          <p:nvPr/>
+        </p:nvSpPr>
+        <p:spPr>
+          <a:xfrm>
+            <a:off x="1115568" y="3831336"/>
+            <a:ext cx="2926080" cy="256032"/>
+          </a:xfrm>
+          <a:prstGeom prst="rect">
+            <a:avLst/>
+          </a:prstGeom>
+          <a:noFill/>
+        </p:spPr>
+        <p:txBody>
+          <a:bodyPr wrap="square" lIns="0" rIns="0" tIns="0" bIns="0">
+            <a:spAutoFit/>
+          </a:bodyPr>
+          <a:lstStyle/>
+          <a:p>
+            <a:pPr algn="l">
+              <a:lnSpc>
+                <a:spcPct val="132000"/>
+              </a:lnSpc>
+            </a:pPr>
+            <a:r>
+              <a:rPr sz="1300" b="0">
+                <a:solidFill>
+                  <a:srgbClr val="43B02A"/>
+                </a:solidFill>
+                <a:latin typeface="Inter Tight"/>
+              </a:rPr>
+              <a:t>AI Engineer</a:t>
+            </a:r>
+          </a:p>
+        </p:txBody>
+      </p:sp>
+      <p:sp>
+        <p:nvSpPr>
+          <p:cNvPr id="13" name="TextBox 12"/>
+          <p:cNvSpPr txBox="1"/>
+          <p:nvPr/>
+        </p:nvSpPr>
+        <p:spPr>
+          <a:xfrm>
+            <a:off x="4297680" y="3465576"/>
+            <a:ext cx="5760720" cy="777240"/>
+          </a:xfrm>
+          <a:prstGeom prst="rect">
+            <a:avLst/>
+          </a:prstGeom>
+          <a:noFill/>
+        </p:spPr>
+        <p:txBody>
+          <a:bodyPr wrap="square" lIns="0" rIns="0" tIns="0" bIns="0">
+            <a:spAutoFit/>
+          </a:bodyPr>
+          <a:lstStyle/>
+          <a:p>
+            <a:pPr algn="l">
+              <a:lnSpc>
+                <a:spcPct val="145000"/>
+              </a:lnSpc>
+            </a:pPr>
+            <a:r>
+              <a:rPr sz="1250" b="0">
+                <a:solidFill>
+                  <a:srgbClr val="8B949E"/>
+                </a:solidFill>
+                <a:latin typeface="Inter Tight"/>
+              </a:rPr>
+              <a:t>Слой работы с моделью: провайдер с резервным и кешем, контракты ответов, тесты заземления.
+Связывание материалов с досье НПА, канонические идентификаторы актов, эскалация по реестру.</a:t>
+            </a:r>
+          </a:p>
+        </p:txBody>
+      </p:sp>
+      <p:sp>
+        <p:nvSpPr>
+          <p:cNvPr id="14" name="TextBox 13"/>
+          <p:cNvSpPr txBox="1"/>
+          <p:nvPr/>
+        </p:nvSpPr>
+        <p:spPr>
+          <a:xfrm>
+            <a:off x="10241280" y="3483864"/>
+            <a:ext cx="1005840" cy="256032"/>
+          </a:xfrm>
+          <a:prstGeom prst="rect">
+            <a:avLst/>
+          </a:prstGeom>
+          <a:noFill/>
+        </p:spPr>
+        <p:txBody>
+          <a:bodyPr wrap="square" lIns="0" rIns="0" tIns="0" bIns="0">
+            <a:spAutoFit/>
+          </a:bodyPr>
+          <a:lstStyle/>
+          <a:p>
+            <a:pPr algn="r">
+              <a:lnSpc>
+                <a:spcPct val="132000"/>
+              </a:lnSpc>
+            </a:pPr>
+            <a:r>
+              <a:rPr sz="1250" b="0">
+                <a:solidFill>
+                  <a:srgbClr val="8B949E"/>
+                </a:solidFill>
+                <a:latin typeface="Inter Tight"/>
+              </a:rPr>
+              <a:t>10 коммитов</a:t>
+            </a:r>
+          </a:p>
+        </p:txBody>
+      </p:sp>
+      <p:sp>
+        <p:nvSpPr>
+          <p:cNvPr id="15" name="Rounded Rectangle 14"/>
+          <p:cNvSpPr/>
+          <p:nvPr/>
+        </p:nvSpPr>
+        <p:spPr>
+          <a:xfrm>
+            <a:off x="731520" y="4507992"/>
+            <a:ext cx="10698480" cy="1078992"/>
+          </a:xfrm>
+          <a:prstGeom prst="roundRect">
+            <a:avLst>
+              <a:gd name="adj" fmla="val 4500"/>
+            </a:avLst>
+          </a:prstGeom>
+          <a:solidFill>
+            <a:srgbClr val="1B1F24"/>
+          </a:solidFill>
+          <a:ln>
+            <a:noFill/>
+          </a:ln>
+          <a:effectLst/>
+        </p:spPr>
+        <p:style>
+          <a:lnRef idx="1">
+            <a:schemeClr val="accent1"/>
+          </a:lnRef>
+          <a:fillRef idx="3">
+            <a:schemeClr val="accent1"/>
+          </a:fillRef>
+          <a:effectRef idx="2">
+            <a:schemeClr val="accent1"/>
+          </a:effectRef>
+          <a:fontRef idx="minor">
+            <a:schemeClr val="lt1"/>
+          </a:fontRef>
+        </p:style>
+        <p:txBody>
+          <a:bodyPr rtlCol="0" anchor="ctr"/>
+          <a:lstStyle/>
+          <a:p>
+            <a:pPr algn="ctr"/>
+          </a:p>
+        </p:txBody>
+      </p:sp>
+      <p:sp>
+        <p:nvSpPr>
+          <p:cNvPr id="16" name="TextBox 15"/>
+          <p:cNvSpPr txBox="1"/>
+          <p:nvPr/>
+        </p:nvSpPr>
+        <p:spPr>
+          <a:xfrm>
+            <a:off x="1115568" y="4709160"/>
+            <a:ext cx="2926080" cy="274320"/>
+          </a:xfrm>
+          <a:prstGeom prst="rect">
+            <a:avLst/>
+          </a:prstGeom>
+          <a:noFill/>
+        </p:spPr>
+        <p:txBody>
+          <a:bodyPr wrap="square" lIns="0" rIns="0" tIns="0" bIns="0">
+            <a:spAutoFit/>
+          </a:bodyPr>
+          <a:lstStyle/>
+          <a:p>
+            <a:pPr algn="l">
+              <a:lnSpc>
+                <a:spcPct val="132000"/>
+              </a:lnSpc>
+            </a:pPr>
+            <a:r>
+              <a:rPr sz="1800" b="1">
+                <a:solidFill>
+                  <a:srgbClr val="F2F4F3"/>
+                </a:solidFill>
+                <a:latin typeface="Inter Tight"/>
+              </a:rPr>
+              <a:t>Артемьев Иван</a:t>
+            </a:r>
+          </a:p>
+        </p:txBody>
+      </p:sp>
+      <p:sp>
+        <p:nvSpPr>
+          <p:cNvPr id="17" name="TextBox 16"/>
+          <p:cNvSpPr txBox="1"/>
+          <p:nvPr/>
+        </p:nvSpPr>
+        <p:spPr>
+          <a:xfrm>
+            <a:off x="1115568" y="5056632"/>
+            <a:ext cx="2926080" cy="256032"/>
+          </a:xfrm>
+          <a:prstGeom prst="rect">
+            <a:avLst/>
+          </a:prstGeom>
+          <a:noFill/>
+        </p:spPr>
+        <p:txBody>
+          <a:bodyPr wrap="square" lIns="0" rIns="0" tIns="0" bIns="0">
+            <a:spAutoFit/>
+          </a:bodyPr>
+          <a:lstStyle/>
+          <a:p>
+            <a:pPr algn="l">
+              <a:lnSpc>
+                <a:spcPct val="132000"/>
+              </a:lnSpc>
+            </a:pPr>
+            <a:r>
+              <a:rPr sz="1300" b="0">
+                <a:solidFill>
+                  <a:srgbClr val="43B02A"/>
+                </a:solidFill>
+                <a:latin typeface="Inter Tight"/>
+              </a:rPr>
+              <a:t>AI Engineer</a:t>
+            </a:r>
+          </a:p>
+        </p:txBody>
+      </p:sp>
+      <p:sp>
+        <p:nvSpPr>
+          <p:cNvPr id="18" name="TextBox 17"/>
+          <p:cNvSpPr txBox="1"/>
+          <p:nvPr/>
+        </p:nvSpPr>
+        <p:spPr>
+          <a:xfrm>
+            <a:off x="4297680" y="4690872"/>
+            <a:ext cx="5760720" cy="777240"/>
+          </a:xfrm>
+          <a:prstGeom prst="rect">
+            <a:avLst/>
+          </a:prstGeom>
+          <a:noFill/>
+        </p:spPr>
+        <p:txBody>
+          <a:bodyPr wrap="square" lIns="0" rIns="0" tIns="0" bIns="0">
+            <a:spAutoFit/>
+          </a:bodyPr>
+          <a:lstStyle/>
+          <a:p>
+            <a:pPr algn="l">
+              <a:lnSpc>
+                <a:spcPct val="145000"/>
+              </a:lnSpc>
+            </a:pPr>
+            <a:r>
+              <a:rPr sz="1250" b="0">
+                <a:solidFill>
+                  <a:srgbClr val="8B949E"/>
+                </a:solidFill>
+                <a:latin typeface="Inter Tight"/>
+              </a:rPr>
+              <a:t>Сбор с живых источников, тип материала на источнике, кластеризация дублей.
+Хранилище и контейнеризация: перевод на SQLite, docker compose, окружение.</a:t>
+            </a:r>
+          </a:p>
+        </p:txBody>
+      </p:sp>
+      <p:sp>
+        <p:nvSpPr>
+          <p:cNvPr id="19" name="TextBox 18"/>
+          <p:cNvSpPr txBox="1"/>
+          <p:nvPr/>
+        </p:nvSpPr>
+        <p:spPr>
+          <a:xfrm>
+            <a:off x="10241280" y="4709160"/>
+            <a:ext cx="1005840" cy="256032"/>
+          </a:xfrm>
+          <a:prstGeom prst="rect">
+            <a:avLst/>
+          </a:prstGeom>
+          <a:noFill/>
+        </p:spPr>
+        <p:txBody>
+          <a:bodyPr wrap="square" lIns="0" rIns="0" tIns="0" bIns="0">
+            <a:spAutoFit/>
+          </a:bodyPr>
+          <a:lstStyle/>
+          <a:p>
+            <a:pPr algn="r">
+              <a:lnSpc>
+                <a:spcPct val="132000"/>
+              </a:lnSpc>
+            </a:pPr>
+            <a:r>
+              <a:rPr sz="1250" b="0">
+                <a:solidFill>
+                  <a:srgbClr val="8B949E"/>
+                </a:solidFill>
+                <a:latin typeface="Inter Tight"/>
+              </a:rPr>
+              <a:t>5 коммитов</a:t>
+            </a:r>
+          </a:p>
+        </p:txBody>
+      </p:sp>
+      <p:sp>
+        <p:nvSpPr>
+          <p:cNvPr id="20" name="TextBox 19"/>
+          <p:cNvSpPr txBox="1"/>
+          <p:nvPr/>
+        </p:nvSpPr>
+        <p:spPr>
+          <a:xfrm>
+            <a:off x="731520" y="5806440"/>
+            <a:ext cx="7680960" cy="685800"/>
+          </a:xfrm>
+          <a:prstGeom prst="rect">
+            <a:avLst/>
+          </a:prstGeom>
+          <a:noFill/>
+        </p:spPr>
+        <p:txBody>
+          <a:bodyPr wrap="square" lIns="0" rIns="0" tIns="0" bIns="0">
+            <a:spAutoFit/>
+          </a:bodyPr>
+          <a:lstStyle/>
+          <a:p>
+            <a:pPr algn="l">
+              <a:lnSpc>
+                <a:spcPct val="145000"/>
+              </a:lnSpc>
+            </a:pPr>
+            <a:r>
+              <a:rPr sz="1300" b="1">
+                <a:solidFill>
+                  <a:srgbClr val="F2F4F3"/>
+                </a:solidFill>
+                <a:latin typeface="Inter Tight"/>
+              </a:rPr>
+              <a:t>Фактическая доля в коде: </a:t>
+            </a:r>
+            <a:r>
+              <a:rPr sz="1300" b="0">
+                <a:solidFill>
+                  <a:srgbClr val="8B949E"/>
+                </a:solidFill>
+                <a:latin typeface="Inter Tight"/>
+              </a:rPr>
+              <a:t>backend — Левочкин 65 %, Артемьев 19 %, Головаш 16 %; фронтенд и спецификация — Левочкин. Считано по добавленным строкам в истории репозитория.</a:t>
+            </a:r>
+          </a:p>
+        </p:txBody>
+      </p:sp>
+      <p:pic>
+        <p:nvPicPr>
+          <p:cNvPr id="21" name="Picture 20" descr="qr-demo.png"/>
+          <p:cNvPicPr>
+            <a:picLocks noChangeAspect="1"/>
+          </p:cNvPicPr>
+          <p:nvPr/>
+        </p:nvPicPr>
+        <p:blipFill>
+          <a:blip r:embed="rId2"/>
+          <a:stretch>
+            <a:fillRect/>
+          </a:stretch>
+        </p:blipFill>
+        <p:spPr>
+          <a:xfrm>
+            <a:off x="10317175" y="5532120"/>
+            <a:ext cx="1143000" cy="1143000"/>
+          </a:xfrm>
+          <a:prstGeom prst="rect">
+            <a:avLst/>
+          </a:prstGeom>
+        </p:spPr>
+      </p:pic>
+      <p:sp>
+        <p:nvSpPr>
+          <p:cNvPr id="22" name="TextBox 21"/>
+          <p:cNvSpPr txBox="1"/>
+          <p:nvPr/>
+        </p:nvSpPr>
+        <p:spPr>
+          <a:xfrm>
+            <a:off x="7802575" y="5806440"/>
+            <a:ext cx="2377440" cy="274320"/>
+          </a:xfrm>
+          <a:prstGeom prst="rect">
+            <a:avLst/>
+          </a:prstGeom>
+          <a:noFill/>
+        </p:spPr>
+        <p:txBody>
+          <a:bodyPr wrap="square" lIns="0" rIns="0" tIns="0" bIns="0">
+            <a:spAutoFit/>
+          </a:bodyPr>
+          <a:lstStyle/>
+          <a:p>
+            <a:pPr algn="r">
+              <a:lnSpc>
+                <a:spcPct val="132000"/>
+              </a:lnSpc>
+            </a:pPr>
+            <a:r>
+              <a:rPr sz="1300" b="1">
+                <a:solidFill>
+                  <a:srgbClr val="F2F4F3"/>
+                </a:solidFill>
+                <a:latin typeface="Inter Tight"/>
+              </a:rPr>
+              <a:t>185.56.162.154</a:t>
+            </a:r>
+          </a:p>
+        </p:txBody>
+      </p:sp>
+      <p:sp>
+        <p:nvSpPr>
+          <p:cNvPr id="23" name="TextBox 22"/>
+          <p:cNvSpPr txBox="1"/>
+          <p:nvPr/>
+        </p:nvSpPr>
+        <p:spPr>
+          <a:xfrm>
+            <a:off x="7802575" y="6108192"/>
+            <a:ext cx="2377440" cy="274320"/>
+          </a:xfrm>
+          <a:prstGeom prst="rect">
+            <a:avLst/>
+          </a:prstGeom>
+          <a:noFill/>
+        </p:spPr>
+        <p:txBody>
+          <a:bodyPr wrap="square" lIns="0" rIns="0" tIns="0" bIns="0">
+            <a:spAutoFit/>
+          </a:bodyPr>
+          <a:lstStyle/>
+          <a:p>
+            <a:pPr algn="r">
+              <a:lnSpc>
+                <a:spcPct val="132000"/>
+              </a:lnSpc>
+            </a:pPr>
+            <a:r>
+              <a:rPr sz="1050" b="0">
+                <a:solidFill>
+                  <a:srgbClr val="8B949E"/>
+                </a:solidFill>
+                <a:latin typeface="Inter Tight"/>
+              </a:rPr>
+              <a:t>github.com/veceloe/ai-gpr-center-cifra</a:t>
+            </a:r>
+          </a:p>
+        </p:txBody>
+      </p:sp>
+    </p:spTree>
+  </p:cSld>
+  <p:clrMapOvr>
+    <a:masterClrMapping/>
+  </p:clrMapOvr>
+</p:sld>
+</file>
+
+<file path=ppt/slides/slide11.xml><?xml version="1.0" encoding="utf-8"?>
+<p:sld xmlns:a="http://schemas.openxmlformats.org/drawingml/2006/main" xmlns:p="http://schemas.openxmlformats.org/presentationml/2006/main" xmlns:r="http://schemas.openxmlformats.org/officeDocument/2006/relationships">
+  <p:cSld>
+    <p:spTree>
+      <p:nvGrpSpPr>
+        <p:cNvPr id="1" name=""/>
+        <p:cNvGrpSpPr/>
+        <p:nvPr/>
+      </p:nvGrpSpPr>
+      <p:grpSpPr/>
+      <p:sp>
+        <p:nvSpPr>
+          <p:cNvPr id="2" name="Rectangle 1"/>
+          <p:cNvSpPr/>
+          <p:nvPr/>
+        </p:nvSpPr>
+        <p:spPr>
+          <a:xfrm>
+            <a:off x="0" y="0"/>
+            <a:ext cx="12191695" cy="6858000"/>
+          </a:xfrm>
+          <a:prstGeom prst="rect">
+            <a:avLst/>
+          </a:prstGeom>
+          <a:solidFill>
+            <a:srgbClr val="F9F9F9"/>
+          </a:solidFill>
+          <a:ln>
+            <a:noFill/>
+          </a:ln>
+          <a:effectLst/>
+        </p:spPr>
+        <p:style>
+          <a:lnRef idx="1">
+            <a:schemeClr val="accent1"/>
+          </a:lnRef>
+          <a:fillRef idx="3">
+            <a:schemeClr val="accent1"/>
+          </a:fillRef>
+          <a:effectRef idx="2">
+            <a:schemeClr val="accent1"/>
+          </a:effectRef>
+          <a:fontRef idx="minor">
+            <a:schemeClr val="lt1"/>
+          </a:fontRef>
+        </p:style>
+        <p:txBody>
+          <a:bodyPr rtlCol="0" anchor="ctr"/>
+          <a:lstStyle/>
+          <a:p>
+            <a:pPr algn="ctr"/>
+          </a:p>
+        </p:txBody>
+      </p:sp>
+      <p:sp>
+        <p:nvSpPr>
+          <p:cNvPr id="3" name="TextBox 2"/>
+          <p:cNvSpPr txBox="1"/>
+          <p:nvPr/>
+        </p:nvSpPr>
+        <p:spPr>
+          <a:xfrm>
+            <a:off x="731520" y="566928"/>
+            <a:ext cx="10698480" cy="274320"/>
+          </a:xfrm>
+          <a:prstGeom prst="rect">
+            <a:avLst/>
+          </a:prstGeom>
+          <a:noFill/>
+        </p:spPr>
+        <p:txBody>
+          <a:bodyPr wrap="square" lIns="0" rIns="0" tIns="0" bIns="0">
+            <a:spAutoFit/>
+          </a:bodyPr>
+          <a:lstStyle/>
+          <a:p>
+            <a:pPr algn="l">
+              <a:lnSpc>
+                <a:spcPct val="132000"/>
+              </a:lnSpc>
+            </a:pPr>
+            <a:r>
+              <a:rPr sz="1100" b="1">
+                <a:solidFill>
+                  <a:srgbClr val="9AA1AB"/>
+                </a:solidFill>
+                <a:latin typeface="Inter Tight"/>
+              </a:rPr>
+              <a:t>Приложение, если спросят</a:t>
+            </a:r>
+          </a:p>
+        </p:txBody>
+      </p:sp>
+      <p:sp>
+        <p:nvSpPr>
+          <p:cNvPr id="4" name="TextBox 3"/>
+          <p:cNvSpPr txBox="1"/>
+          <p:nvPr/>
+        </p:nvSpPr>
+        <p:spPr>
+          <a:xfrm>
+            <a:off x="731520" y="914400"/>
+            <a:ext cx="10698480" cy="457200"/>
+          </a:xfrm>
+          <a:prstGeom prst="rect">
+            <a:avLst/>
+          </a:prstGeom>
+          <a:noFill/>
+        </p:spPr>
+        <p:txBody>
+          <a:bodyPr wrap="square" lIns="0" rIns="0" tIns="0" bIns="0">
+            <a:spAutoFit/>
+          </a:bodyPr>
+          <a:lstStyle/>
+          <a:p>
+            <a:pPr algn="l">
+              <a:lnSpc>
+                <a:spcPct val="132000"/>
+              </a:lnSpc>
+            </a:pPr>
+            <a:r>
+              <a:rPr sz="3000" b="1">
+                <a:solidFill>
+                  <a:srgbClr val="231F20"/>
+                </a:solidFill>
+                <a:latin typeface="Inter Tight"/>
+              </a:rPr>
+              <a:t>Разбор оценки: шесть критериев и заземление</a:t>
+            </a:r>
+          </a:p>
+        </p:txBody>
+      </p:sp>
+      <p:sp>
+        <p:nvSpPr>
+          <p:cNvPr id="5" name="TextBox 4"/>
+          <p:cNvSpPr txBox="1"/>
+          <p:nvPr/>
+        </p:nvSpPr>
+        <p:spPr>
+          <a:xfrm>
+            <a:off x="731520" y="1463040"/>
+            <a:ext cx="10698480" cy="640080"/>
+          </a:xfrm>
+          <a:prstGeom prst="rect">
+            <a:avLst/>
+          </a:prstGeom>
+          <a:noFill/>
+        </p:spPr>
+        <p:txBody>
+          <a:bodyPr wrap="square" lIns="0" rIns="0" tIns="0" bIns="0">
+            <a:spAutoFit/>
+          </a:bodyPr>
+          <a:lstStyle/>
+          <a:p>
+            <a:pPr algn="l">
+              <a:lnSpc>
+                <a:spcPct val="140000"/>
+              </a:lnSpc>
+            </a:pPr>
+            <a:r>
+              <a:rPr sz="1300" b="0">
+                <a:solidFill>
+                  <a:srgbClr val="6B7280"/>
+                </a:solidFill>
+                <a:latin typeface="Inter Tight"/>
+              </a:rPr>
+              <a:t>Слева цитата из оригинала под каждым утверждением. Справа балл, вклад в индекс и обоснование по каждому критерию.</a:t>
+            </a:r>
+          </a:p>
+        </p:txBody>
+      </p:sp>
+      <p:sp>
+        <p:nvSpPr>
+          <p:cNvPr id="6" name="Rectangle 5"/>
+          <p:cNvSpPr/>
+          <p:nvPr/>
+        </p:nvSpPr>
+        <p:spPr>
+          <a:xfrm>
+            <a:off x="1542135" y="1801368"/>
+            <a:ext cx="9107424" cy="4543653"/>
+          </a:xfrm>
+          <a:prstGeom prst="rect">
+            <a:avLst/>
+          </a:prstGeom>
+          <a:solidFill>
+            <a:srgbClr val="FFFFFF"/>
+          </a:solidFill>
+          <a:ln w="9525">
+            <a:solidFill>
+              <a:srgbClr val="D9D9D9"/>
+            </a:solidFill>
+          </a:ln>
+          <a:effectLst/>
+        </p:spPr>
+        <p:style>
+          <a:lnRef idx="1">
+            <a:schemeClr val="accent1"/>
+          </a:lnRef>
+          <a:fillRef idx="3">
+            <a:schemeClr val="accent1"/>
+          </a:fillRef>
+          <a:effectRef idx="2">
+            <a:schemeClr val="accent1"/>
+          </a:effectRef>
+          <a:fontRef idx="minor">
+            <a:schemeClr val="lt1"/>
+          </a:fontRef>
+        </p:style>
+        <p:txBody>
+          <a:bodyPr rtlCol="0" anchor="ctr"/>
+          <a:lstStyle/>
+          <a:p>
+            <a:pPr algn="ctr"/>
+          </a:p>
+        </p:txBody>
+      </p:sp>
+      <p:pic>
+        <p:nvPicPr>
+          <p:cNvPr id="7" name="Picture 6" descr="shot_breakdown.jpg"/>
+          <p:cNvPicPr>
+            <a:picLocks noChangeAspect="1"/>
+          </p:cNvPicPr>
+          <p:nvPr/>
+        </p:nvPicPr>
+        <p:blipFill>
+          <a:blip r:embed="rId2"/>
+          <a:stretch>
+            <a:fillRect/>
+          </a:stretch>
+        </p:blipFill>
+        <p:spPr>
+          <a:xfrm>
+            <a:off x="1569567" y="1828800"/>
+            <a:ext cx="9052560" cy="4488789"/>
+          </a:xfrm>
+          <a:prstGeom prst="rect">
+            <a:avLst/>
+          </a:prstGeom>
+        </p:spPr>
+      </p:pic>
+    </p:spTree>
+  </p:cSld>
+  <p:clrMapOvr>
+    <a:masterClrMapping/>
+  </p:clrMapOvr>
+</p:sld>
+</file>
+
+<file path=ppt/slides/slide12.xml><?xml version="1.0" encoding="utf-8"?>
+<p:sld xmlns:a="http://schemas.openxmlformats.org/drawingml/2006/main" xmlns:p="http://schemas.openxmlformats.org/presentationml/2006/main" xmlns:r="http://schemas.openxmlformats.org/officeDocument/2006/relationships">
+  <p:cSld>
+    <p:spTree>
+      <p:nvGrpSpPr>
+        <p:cNvPr id="1" name=""/>
+        <p:cNvGrpSpPr/>
+        <p:nvPr/>
+      </p:nvGrpSpPr>
+      <p:grpSpPr/>
+      <p:sp>
+        <p:nvSpPr>
+          <p:cNvPr id="2" name="Rectangle 1"/>
+          <p:cNvSpPr/>
+          <p:nvPr/>
+        </p:nvSpPr>
+        <p:spPr>
+          <a:xfrm>
+            <a:off x="0" y="0"/>
+            <a:ext cx="12191695" cy="6858000"/>
+          </a:xfrm>
+          <a:prstGeom prst="rect">
+            <a:avLst/>
+          </a:prstGeom>
+          <a:solidFill>
             <a:srgbClr val="F9F9F9"/>
           </a:solidFill>
           <a:ln>
@@ -3992,102 +5142,7 @@
         <p:spPr>
           <a:xfrm>
             <a:off x="731520" y="1051560"/>
-            <a:ext cx="10698480" cy="1280160"/>
-          </a:xfrm>
-          <a:prstGeom prst="rect">
-            <a:avLst/>
-          </a:prstGeom>
-          <a:noFill/>
-        </p:spPr>
-        <p:txBody>
-          <a:bodyPr wrap="square" lIns="0" rIns="0" tIns="0" bIns="0">
-            <a:spAutoFit/>
-          </a:bodyPr>
-          <a:lstStyle/>
-          <a:p>
-            <a:pPr algn="l">
-              <a:lnSpc>
-                <a:spcPct val="110000"/>
-              </a:lnSpc>
-            </a:pPr>
-            <a:r>
-              <a:rPr sz="5200" b="1">
-                <a:solidFill>
-                  <a:srgbClr val="F2F4F3"/>
-                </a:solidFill>
-                <a:latin typeface="Inter Tight"/>
-              </a:rPr>
-              <a:t>Модель выставляет баллы.
-</a:t>
-            </a:r>
-            <a:r>
-              <a:rPr sz="5200" b="1">
-                <a:solidFill>
-                  <a:srgbClr val="43B02A"/>
-                </a:solidFill>
-                <a:latin typeface="Inter Tight"/>
-              </a:rPr>
-              <a:t>Индекс считает код.</a:t>
-            </a:r>
-          </a:p>
-        </p:txBody>
-      </p:sp>
-      <p:sp>
-        <p:nvSpPr>
-          <p:cNvPr id="4" name="Rounded Rectangle 3"/>
-          <p:cNvSpPr/>
-          <p:nvPr/>
-        </p:nvSpPr>
-        <p:spPr>
-          <a:xfrm>
-            <a:off x="731520" y="3246120"/>
-            <a:ext cx="4663440" cy="1828800"/>
-          </a:xfrm>
-          <a:prstGeom prst="roundRect">
-            <a:avLst>
-              <a:gd name="adj" fmla="val 4500"/>
-            </a:avLst>
-          </a:prstGeom>
-          <a:solidFill>
-            <a:srgbClr val="1B1F24"/>
-          </a:solidFill>
-          <a:ln>
-            <a:noFill/>
-          </a:ln>
-          <a:effectLst/>
-        </p:spPr>
-        <p:style>
-          <a:lnRef idx="1">
-            <a:schemeClr val="accent1"/>
-          </a:lnRef>
-          <a:fillRef idx="3">
-            <a:schemeClr val="accent1"/>
-          </a:fillRef>
-          <a:effectRef idx="2">
-            <a:schemeClr val="accent1"/>
-          </a:effectRef>
-          <a:fontRef idx="minor">
-            <a:schemeClr val="lt1"/>
-          </a:fontRef>
-        </p:style>
-        <p:txBody>
-          <a:bodyPr rtlCol="0" anchor="ctr"/>
-          <a:lstStyle/>
-          <a:p>
-            <a:pPr algn="ctr"/>
-          </a:p>
-        </p:txBody>
-      </p:sp>
-      <p:sp>
-        <p:nvSpPr>
-          <p:cNvPr id="5" name="TextBox 4"/>
-          <p:cNvSpPr txBox="1"/>
-          <p:nvPr/>
-        </p:nvSpPr>
-        <p:spPr>
-          <a:xfrm>
-            <a:off x="1097280" y="3520440"/>
-            <a:ext cx="4023360" cy="274320"/>
+            <a:ext cx="10698480" cy="274320"/>
           </a:xfrm>
           <a:prstGeom prst="rect">
             <a:avLst/>
@@ -4106,27 +5161,67 @@
               </a:lnSpc>
             </a:pPr>
             <a:r>
-              <a:rPr sz="1050" b="1">
-                <a:solidFill>
-                  <a:srgbClr val="8B949E"/>
+              <a:rPr sz="1100" b="1">
+                <a:solidFill>
+                  <a:srgbClr val="43B02A"/>
                 </a:solidFill>
                 <a:latin typeface="Inter Tight"/>
               </a:rPr>
-              <a:t>Модель отдаёт</a:t>
-            </a:r>
-          </a:p>
-        </p:txBody>
-      </p:sp>
-      <p:sp>
-        <p:nvSpPr>
-          <p:cNvPr id="6" name="TextBox 5"/>
+              <a:t>Что требовалось сделать</a:t>
+            </a:r>
+          </a:p>
+        </p:txBody>
+      </p:sp>
+      <p:sp>
+        <p:nvSpPr>
+          <p:cNvPr id="4" name="TextBox 3"/>
           <p:cNvSpPr txBox="1"/>
           <p:nvPr/>
         </p:nvSpPr>
         <p:spPr>
           <a:xfrm>
-            <a:off x="1097280" y="3840480"/>
-            <a:ext cx="548640" cy="219456"/>
+            <a:off x="731520" y="1463040"/>
+            <a:ext cx="10515600" cy="1188720"/>
+          </a:xfrm>
+          <a:prstGeom prst="rect">
+            <a:avLst/>
+          </a:prstGeom>
+          <a:noFill/>
+        </p:spPr>
+        <p:txBody>
+          <a:bodyPr wrap="square" lIns="0" rIns="0" tIns="0" bIns="0">
+            <a:spAutoFit/>
+          </a:bodyPr>
+          <a:lstStyle/>
+          <a:p>
+            <a:pPr algn="l">
+              <a:lnSpc>
+                <a:spcPct val="112000"/>
+              </a:lnSpc>
+            </a:pPr>
+            <a:r>
+              <a:rPr sz="4200" b="1">
+                <a:solidFill>
+                  <a:srgbClr val="F2F4F3"/>
+                </a:solidFill>
+                <a:latin typeface="Inter Tight"/>
+              </a:rPr>
+              <a:t>Оценивать каждый материал
+с точки зрения одной компании</a:t>
+            </a:r>
+          </a:p>
+        </p:txBody>
+      </p:sp>
+      <p:sp>
+        <p:nvSpPr>
+          <p:cNvPr id="5" name="TextBox 4"/>
+          <p:cNvSpPr txBox="1"/>
+          <p:nvPr/>
+        </p:nvSpPr>
+        <p:spPr>
+          <a:xfrm>
+            <a:off x="731520" y="3246120"/>
+            <a:ext cx="1737360" cy="292608"/>
           </a:xfrm>
           <a:prstGeom prst="rect">
             <a:avLst/>
@@ -4145,27 +5240,27 @@
               </a:lnSpc>
             </a:pPr>
             <a:r>
-              <a:rPr sz="1200" b="0">
-                <a:solidFill>
-                  <a:srgbClr val="8B949E"/>
+              <a:rPr sz="1900" b="1">
+                <a:solidFill>
+                  <a:srgbClr val="43B02A"/>
                 </a:solidFill>
                 <a:latin typeface="Inter Tight"/>
               </a:rPr>
-              <a:t>К1</a:t>
-            </a:r>
-          </a:p>
-        </p:txBody>
-      </p:sp>
-      <p:sp>
-        <p:nvSpPr>
-          <p:cNvPr id="7" name="TextBox 6"/>
+              <a:t>Собирать</a:t>
+            </a:r>
+          </a:p>
+        </p:txBody>
+      </p:sp>
+      <p:sp>
+        <p:nvSpPr>
+          <p:cNvPr id="6" name="TextBox 5"/>
           <p:cNvSpPr txBox="1"/>
           <p:nvPr/>
         </p:nvSpPr>
         <p:spPr>
           <a:xfrm>
-            <a:off x="1097280" y="4078224"/>
-            <a:ext cx="548640" cy="365760"/>
+            <a:off x="2560320" y="3282696"/>
+            <a:ext cx="8686800" cy="292608"/>
           </a:xfrm>
           <a:prstGeom prst="rect">
             <a:avLst/>
@@ -4184,27 +5279,27 @@
               </a:lnSpc>
             </a:pPr>
             <a:r>
-              <a:rPr sz="2400" b="1">
-                <a:solidFill>
-                  <a:srgbClr val="F2F4F3"/>
+              <a:rPr sz="1600" b="0">
+                <a:solidFill>
+                  <a:srgbClr val="8B949E"/>
                 </a:solidFill>
                 <a:latin typeface="Inter Tight"/>
               </a:rPr>
-              <a:t>3</a:t>
-            </a:r>
-          </a:p>
-        </p:txBody>
-      </p:sp>
-      <p:sp>
-        <p:nvSpPr>
-          <p:cNvPr id="8" name="TextBox 7"/>
+              <a:t>СМИ, порталы регуляторов, СОЗД, телеграм-каналы — без ручного обхода</a:t>
+            </a:r>
+          </a:p>
+        </p:txBody>
+      </p:sp>
+      <p:sp>
+        <p:nvSpPr>
+          <p:cNvPr id="7" name="TextBox 6"/>
           <p:cNvSpPr txBox="1"/>
           <p:nvPr/>
         </p:nvSpPr>
         <p:spPr>
           <a:xfrm>
-            <a:off x="1755648" y="3840480"/>
-            <a:ext cx="548640" cy="219456"/>
+            <a:off x="731520" y="3813048"/>
+            <a:ext cx="1737360" cy="292608"/>
           </a:xfrm>
           <a:prstGeom prst="rect">
             <a:avLst/>
@@ -4223,27 +5318,27 @@
               </a:lnSpc>
             </a:pPr>
             <a:r>
-              <a:rPr sz="1200" b="0">
-                <a:solidFill>
-                  <a:srgbClr val="8B949E"/>
+              <a:rPr sz="1900" b="1">
+                <a:solidFill>
+                  <a:srgbClr val="43B02A"/>
                 </a:solidFill>
                 <a:latin typeface="Inter Tight"/>
               </a:rPr>
-              <a:t>К2</a:t>
-            </a:r>
-          </a:p>
-        </p:txBody>
-      </p:sp>
-      <p:sp>
-        <p:nvSpPr>
-          <p:cNvPr id="9" name="TextBox 8"/>
+              <a:t>Понимать</a:t>
+            </a:r>
+          </a:p>
+        </p:txBody>
+      </p:sp>
+      <p:sp>
+        <p:nvSpPr>
+          <p:cNvPr id="8" name="TextBox 7"/>
           <p:cNvSpPr txBox="1"/>
           <p:nvPr/>
         </p:nvSpPr>
         <p:spPr>
           <a:xfrm>
-            <a:off x="1755648" y="4078224"/>
-            <a:ext cx="548640" cy="365760"/>
+            <a:off x="2560320" y="3849624"/>
+            <a:ext cx="8686800" cy="292608"/>
           </a:xfrm>
           <a:prstGeom prst="rect">
             <a:avLst/>
@@ -4262,27 +5357,27 @@
               </a:lnSpc>
             </a:pPr>
             <a:r>
-              <a:rPr sz="2400" b="1">
-                <a:solidFill>
-                  <a:srgbClr val="F2F4F3"/>
+              <a:rPr sz="1600" b="0">
+                <a:solidFill>
+                  <a:srgbClr val="8B949E"/>
                 </a:solidFill>
                 <a:latin typeface="Inter Tight"/>
               </a:rPr>
-              <a:t>2</a:t>
-            </a:r>
-          </a:p>
-        </p:txBody>
-      </p:sp>
-      <p:sp>
-        <p:nvSpPr>
-          <p:cNvPr id="10" name="TextBox 9"/>
+              <a:t>саммари, где каждое утверждение подтверждено цитатой из оригинала</a:t>
+            </a:r>
+          </a:p>
+        </p:txBody>
+      </p:sp>
+      <p:sp>
+        <p:nvSpPr>
+          <p:cNvPr id="9" name="TextBox 8"/>
           <p:cNvSpPr txBox="1"/>
           <p:nvPr/>
         </p:nvSpPr>
         <p:spPr>
           <a:xfrm>
-            <a:off x="2414016" y="3840480"/>
-            <a:ext cx="548640" cy="219456"/>
+            <a:off x="731520" y="4379976"/>
+            <a:ext cx="1737360" cy="292608"/>
           </a:xfrm>
           <a:prstGeom prst="rect">
             <a:avLst/>
@@ -4301,27 +5396,27 @@
               </a:lnSpc>
             </a:pPr>
             <a:r>
-              <a:rPr sz="1200" b="0">
-                <a:solidFill>
-                  <a:srgbClr val="8B949E"/>
+              <a:rPr sz="1900" b="1">
+                <a:solidFill>
+                  <a:srgbClr val="43B02A"/>
                 </a:solidFill>
                 <a:latin typeface="Inter Tight"/>
               </a:rPr>
-              <a:t>К3</a:t>
-            </a:r>
-          </a:p>
-        </p:txBody>
-      </p:sp>
-      <p:sp>
-        <p:nvSpPr>
-          <p:cNvPr id="11" name="TextBox 10"/>
+              <a:t>Оценивать</a:t>
+            </a:r>
+          </a:p>
+        </p:txBody>
+      </p:sp>
+      <p:sp>
+        <p:nvSpPr>
+          <p:cNvPr id="10" name="TextBox 9"/>
           <p:cNvSpPr txBox="1"/>
           <p:nvPr/>
         </p:nvSpPr>
         <p:spPr>
           <a:xfrm>
-            <a:off x="2414016" y="4078224"/>
-            <a:ext cx="548640" cy="365760"/>
+            <a:off x="2560320" y="4416552"/>
+            <a:ext cx="8686800" cy="292608"/>
           </a:xfrm>
           <a:prstGeom prst="rect">
             <a:avLst/>
@@ -4340,27 +5435,27 @@
               </a:lnSpc>
             </a:pPr>
             <a:r>
-              <a:rPr sz="2400" b="1">
-                <a:solidFill>
-                  <a:srgbClr val="F2F4F3"/>
+              <a:rPr sz="1600" b="0">
+                <a:solidFill>
+                  <a:srgbClr val="8B949E"/>
                 </a:solidFill>
                 <a:latin typeface="Inter Tight"/>
               </a:rPr>
-              <a:t>3</a:t>
-            </a:r>
-          </a:p>
-        </p:txBody>
-      </p:sp>
-      <p:sp>
-        <p:nvSpPr>
-          <p:cNvPr id="12" name="TextBox 11"/>
+              <a:t>по методике заказчика: К1–К6 для НПА, Н1–Н4 для новостей</a:t>
+            </a:r>
+          </a:p>
+        </p:txBody>
+      </p:sp>
+      <p:sp>
+        <p:nvSpPr>
+          <p:cNvPr id="11" name="TextBox 10"/>
           <p:cNvSpPr txBox="1"/>
           <p:nvPr/>
         </p:nvSpPr>
         <p:spPr>
           <a:xfrm>
-            <a:off x="3072384" y="3840480"/>
-            <a:ext cx="548640" cy="219456"/>
+            <a:off x="731520" y="4946904"/>
+            <a:ext cx="1737360" cy="292608"/>
           </a:xfrm>
           <a:prstGeom prst="rect">
             <a:avLst/>
@@ -4379,27 +5474,27 @@
               </a:lnSpc>
             </a:pPr>
             <a:r>
-              <a:rPr sz="1200" b="0">
-                <a:solidFill>
-                  <a:srgbClr val="8B949E"/>
+              <a:rPr sz="1900" b="1">
+                <a:solidFill>
+                  <a:srgbClr val="43B02A"/>
                 </a:solidFill>
                 <a:latin typeface="Inter Tight"/>
               </a:rPr>
-              <a:t>К4</a:t>
-            </a:r>
-          </a:p>
-        </p:txBody>
-      </p:sp>
-      <p:sp>
-        <p:nvSpPr>
-          <p:cNvPr id="13" name="TextBox 12"/>
+              <a:t>Вести</a:t>
+            </a:r>
+          </a:p>
+        </p:txBody>
+      </p:sp>
+      <p:sp>
+        <p:nvSpPr>
+          <p:cNvPr id="12" name="TextBox 11"/>
           <p:cNvSpPr txBox="1"/>
           <p:nvPr/>
         </p:nvSpPr>
         <p:spPr>
           <a:xfrm>
-            <a:off x="3072384" y="4078224"/>
-            <a:ext cx="548640" cy="365760"/>
+            <a:off x="2560320" y="4983480"/>
+            <a:ext cx="8686800" cy="292608"/>
           </a:xfrm>
           <a:prstGeom prst="rect">
             <a:avLst/>
@@ -4418,27 +5513,27 @@
               </a:lnSpc>
             </a:pPr>
             <a:r>
-              <a:rPr sz="2400" b="1">
-                <a:solidFill>
-                  <a:srgbClr val="F2F4F3"/>
+              <a:rPr sz="1600" b="0">
+                <a:solidFill>
+                  <a:srgbClr val="8B949E"/>
                 </a:solidFill>
                 <a:latin typeface="Inter Tight"/>
               </a:rPr>
-              <a:t>0</a:t>
-            </a:r>
-          </a:p>
-        </p:txBody>
-      </p:sp>
-      <p:sp>
-        <p:nvSpPr>
-          <p:cNvPr id="14" name="TextBox 13"/>
+              <a:t>НПА как долгоживущее досье со стадиями и историей влияния</a:t>
+            </a:r>
+          </a:p>
+        </p:txBody>
+      </p:sp>
+      <p:sp>
+        <p:nvSpPr>
+          <p:cNvPr id="13" name="TextBox 12"/>
           <p:cNvSpPr txBox="1"/>
           <p:nvPr/>
         </p:nvSpPr>
         <p:spPr>
           <a:xfrm>
-            <a:off x="3730752" y="3840480"/>
-            <a:ext cx="548640" cy="219456"/>
+            <a:off x="731520" y="5513832"/>
+            <a:ext cx="1737360" cy="292608"/>
           </a:xfrm>
           <a:prstGeom prst="rect">
             <a:avLst/>
@@ -4457,27 +5552,27 @@
               </a:lnSpc>
             </a:pPr>
             <a:r>
-              <a:rPr sz="1200" b="0">
-                <a:solidFill>
-                  <a:srgbClr val="8B949E"/>
+              <a:rPr sz="1900" b="1">
+                <a:solidFill>
+                  <a:srgbClr val="43B02A"/>
                 </a:solidFill>
                 <a:latin typeface="Inter Tight"/>
               </a:rPr>
-              <a:t>К5</a:t>
-            </a:r>
-          </a:p>
-        </p:txBody>
-      </p:sp>
-      <p:sp>
-        <p:nvSpPr>
-          <p:cNvPr id="15" name="TextBox 14"/>
+              <a:t>Отдавать</a:t>
+            </a:r>
+          </a:p>
+        </p:txBody>
+      </p:sp>
+      <p:sp>
+        <p:nvSpPr>
+          <p:cNvPr id="14" name="TextBox 13"/>
           <p:cNvSpPr txBox="1"/>
           <p:nvPr/>
         </p:nvSpPr>
         <p:spPr>
           <a:xfrm>
-            <a:off x="3730752" y="4078224"/>
-            <a:ext cx="548640" cy="365760"/>
+            <a:off x="2560320" y="5550408"/>
+            <a:ext cx="8686800" cy="292608"/>
           </a:xfrm>
           <a:prstGeom prst="rect">
             <a:avLst/>
@@ -4496,27 +5591,27 @@
               </a:lnSpc>
             </a:pPr>
             <a:r>
-              <a:rPr sz="2400" b="1">
-                <a:solidFill>
-                  <a:srgbClr val="F2F4F3"/>
+              <a:rPr sz="1600" b="0">
+                <a:solidFill>
+                  <a:srgbClr val="8B949E"/>
                 </a:solidFill>
                 <a:latin typeface="Inter Tight"/>
               </a:rPr>
-              <a:t>0</a:t>
-            </a:r>
-          </a:p>
-        </p:txBody>
-      </p:sp>
-      <p:sp>
-        <p:nvSpPr>
-          <p:cNvPr id="16" name="TextBox 15"/>
+              <a:t>ленту по влиянию и дайджест под конкретного получателя</a:t>
+            </a:r>
+          </a:p>
+        </p:txBody>
+      </p:sp>
+      <p:sp>
+        <p:nvSpPr>
+          <p:cNvPr id="15" name="TextBox 14"/>
           <p:cNvSpPr txBox="1"/>
           <p:nvPr/>
         </p:nvSpPr>
         <p:spPr>
           <a:xfrm>
-            <a:off x="4389120" y="3840480"/>
-            <a:ext cx="548640" cy="219456"/>
+            <a:off x="731520" y="6263640"/>
+            <a:ext cx="10515600" cy="365760"/>
           </a:xfrm>
           <a:prstGeom prst="rect">
             <a:avLst/>
@@ -4535,335 +5630,13 @@
               </a:lnSpc>
             </a:pPr>
             <a:r>
-              <a:rPr sz="1200" b="0">
+              <a:rPr sz="1300" b="0">
                 <a:solidFill>
                   <a:srgbClr val="8B949E"/>
                 </a:solidFill>
                 <a:latin typeface="Inter Tight"/>
               </a:rPr>
-              <a:t>К6</a:t>
-            </a:r>
-          </a:p>
-        </p:txBody>
-      </p:sp>
-      <p:sp>
-        <p:nvSpPr>
-          <p:cNvPr id="17" name="TextBox 16"/>
-          <p:cNvSpPr txBox="1"/>
-          <p:nvPr/>
-        </p:nvSpPr>
-        <p:spPr>
-          <a:xfrm>
-            <a:off x="4389120" y="4078224"/>
-            <a:ext cx="548640" cy="365760"/>
-          </a:xfrm>
-          <a:prstGeom prst="rect">
-            <a:avLst/>
-          </a:prstGeom>
-          <a:noFill/>
-        </p:spPr>
-        <p:txBody>
-          <a:bodyPr wrap="square" lIns="0" rIns="0" tIns="0" bIns="0">
-            <a:spAutoFit/>
-          </a:bodyPr>
-          <a:lstStyle/>
-          <a:p>
-            <a:pPr algn="l">
-              <a:lnSpc>
-                <a:spcPct val="132000"/>
-              </a:lnSpc>
-            </a:pPr>
-            <a:r>
-              <a:rPr sz="2400" b="1">
-                <a:solidFill>
-                  <a:srgbClr val="F2F4F3"/>
-                </a:solidFill>
-                <a:latin typeface="Inter Tight"/>
-              </a:rPr>
-              <a:t>3</a:t>
-            </a:r>
-          </a:p>
-        </p:txBody>
-      </p:sp>
-      <p:sp>
-        <p:nvSpPr>
-          <p:cNvPr id="18" name="TextBox 17"/>
-          <p:cNvSpPr txBox="1"/>
-          <p:nvPr/>
-        </p:nvSpPr>
-        <p:spPr>
-          <a:xfrm>
-            <a:off x="1097280" y="4553712"/>
-            <a:ext cx="4023360" cy="274320"/>
-          </a:xfrm>
-          <a:prstGeom prst="rect">
-            <a:avLst/>
-          </a:prstGeom>
-          <a:noFill/>
-        </p:spPr>
-        <p:txBody>
-          <a:bodyPr wrap="square" lIns="0" rIns="0" tIns="0" bIns="0">
-            <a:spAutoFit/>
-          </a:bodyPr>
-          <a:lstStyle/>
-          <a:p>
-            <a:pPr algn="l">
-              <a:lnSpc>
-                <a:spcPct val="132000"/>
-              </a:lnSpc>
-            </a:pPr>
-            <a:r>
-              <a:rPr sz="1400" b="0">
-                <a:solidFill>
-                  <a:srgbClr val="8B949E"/>
-                </a:solidFill>
-                <a:latin typeface="Inter Tight"/>
-              </a:rPr>
-              <a:t>и обоснование к каждому баллу</a:t>
-            </a:r>
-          </a:p>
-        </p:txBody>
-      </p:sp>
-      <p:sp>
-        <p:nvSpPr>
-          <p:cNvPr id="19" name="Can 18"/>
-          <p:cNvSpPr/>
-          <p:nvPr/>
-        </p:nvSpPr>
-        <p:spPr>
-          <a:xfrm>
-            <a:off x="5623560" y="4069080"/>
-            <a:ext cx="685800" cy="146304"/>
-          </a:xfrm>
-          <a:prstGeom prst="can">
-            <a:avLst/>
-          </a:prstGeom>
-          <a:solidFill>
-            <a:srgbClr val="43B02A"/>
-          </a:solidFill>
-          <a:ln>
-            <a:noFill/>
-          </a:ln>
-          <a:effectLst/>
-        </p:spPr>
-        <p:style>
-          <a:lnRef idx="1">
-            <a:schemeClr val="accent1"/>
-          </a:lnRef>
-          <a:fillRef idx="3">
-            <a:schemeClr val="accent1"/>
-          </a:fillRef>
-          <a:effectRef idx="2">
-            <a:schemeClr val="accent1"/>
-          </a:effectRef>
-          <a:fontRef idx="minor">
-            <a:schemeClr val="lt1"/>
-          </a:fontRef>
-        </p:style>
-        <p:txBody>
-          <a:bodyPr rtlCol="0" anchor="ctr"/>
-          <a:lstStyle/>
-          <a:p>
-            <a:pPr algn="ctr"/>
-          </a:p>
-        </p:txBody>
-      </p:sp>
-      <p:sp>
-        <p:nvSpPr>
-          <p:cNvPr id="20" name="Rounded Rectangle 19"/>
-          <p:cNvSpPr/>
-          <p:nvPr/>
-        </p:nvSpPr>
-        <p:spPr>
-          <a:xfrm>
-            <a:off x="6675120" y="3246120"/>
-            <a:ext cx="4754880" cy="1828800"/>
-          </a:xfrm>
-          <a:prstGeom prst="roundRect">
-            <a:avLst>
-              <a:gd name="adj" fmla="val 4500"/>
-            </a:avLst>
-          </a:prstGeom>
-          <a:solidFill>
-            <a:srgbClr val="23282E"/>
-          </a:solidFill>
-          <a:ln>
-            <a:noFill/>
-          </a:ln>
-          <a:effectLst/>
-        </p:spPr>
-        <p:style>
-          <a:lnRef idx="1">
-            <a:schemeClr val="accent1"/>
-          </a:lnRef>
-          <a:fillRef idx="3">
-            <a:schemeClr val="accent1"/>
-          </a:fillRef>
-          <a:effectRef idx="2">
-            <a:schemeClr val="accent1"/>
-          </a:effectRef>
-          <a:fontRef idx="minor">
-            <a:schemeClr val="lt1"/>
-          </a:fontRef>
-        </p:style>
-        <p:txBody>
-          <a:bodyPr rtlCol="0" anchor="ctr"/>
-          <a:lstStyle/>
-          <a:p>
-            <a:pPr algn="ctr"/>
-          </a:p>
-        </p:txBody>
-      </p:sp>
-      <p:sp>
-        <p:nvSpPr>
-          <p:cNvPr id="21" name="TextBox 20"/>
-          <p:cNvSpPr txBox="1"/>
-          <p:nvPr/>
-        </p:nvSpPr>
-        <p:spPr>
-          <a:xfrm>
-            <a:off x="7040880" y="3520440"/>
-            <a:ext cx="4114800" cy="274320"/>
-          </a:xfrm>
-          <a:prstGeom prst="rect">
-            <a:avLst/>
-          </a:prstGeom>
-          <a:noFill/>
-        </p:spPr>
-        <p:txBody>
-          <a:bodyPr wrap="square" lIns="0" rIns="0" tIns="0" bIns="0">
-            <a:spAutoFit/>
-          </a:bodyPr>
-          <a:lstStyle/>
-          <a:p>
-            <a:pPr algn="l">
-              <a:lnSpc>
-                <a:spcPct val="132000"/>
-              </a:lnSpc>
-            </a:pPr>
-            <a:r>
-              <a:rPr sz="1050" b="1">
-                <a:solidFill>
-                  <a:srgbClr val="43B02A"/>
-                </a:solidFill>
-                <a:latin typeface="Inter Tight"/>
-              </a:rPr>
-              <a:t>Код вычисляет</a:t>
-            </a:r>
-          </a:p>
-        </p:txBody>
-      </p:sp>
-      <p:sp>
-        <p:nvSpPr>
-          <p:cNvPr id="22" name="TextBox 21"/>
-          <p:cNvSpPr txBox="1"/>
-          <p:nvPr/>
-        </p:nvSpPr>
-        <p:spPr>
-          <a:xfrm>
-            <a:off x="7040880" y="3886200"/>
-            <a:ext cx="4114800" cy="1005840"/>
-          </a:xfrm>
-          <a:prstGeom prst="rect">
-            <a:avLst/>
-          </a:prstGeom>
-          <a:noFill/>
-        </p:spPr>
-        <p:txBody>
-          <a:bodyPr wrap="square" lIns="0" rIns="0" tIns="0" bIns="0">
-            <a:spAutoFit/>
-          </a:bodyPr>
-          <a:lstStyle/>
-          <a:p>
-            <a:pPr algn="l">
-              <a:lnSpc>
-                <a:spcPct val="150000"/>
-              </a:lnSpc>
-            </a:pPr>
-            <a:r>
-              <a:rPr sz="2600" b="1">
-                <a:solidFill>
-                  <a:srgbClr val="F2F4F3"/>
-                </a:solidFill>
-                <a:latin typeface="Inter Tight"/>
-              </a:rPr>
-              <a:t>65,0</a:t>
-            </a:r>
-            <a:r>
-              <a:rPr sz="2000" b="0">
-                <a:solidFill>
-                  <a:srgbClr val="8B949E"/>
-                </a:solidFill>
-                <a:latin typeface="Inter Tight"/>
-              </a:rPr>
-              <a:t>  →  </a:t>
-            </a:r>
-            <a:r>
-              <a:rPr sz="2000" b="1">
-                <a:solidFill>
-                  <a:srgbClr val="F2F4F3"/>
-                </a:solidFill>
-                <a:latin typeface="Inter Tight"/>
-              </a:rPr>
-              <a:t>Среднее</a:t>
-            </a:r>
-            <a:r>
-              <a:rPr sz="1400" b="0">
-                <a:solidFill>
-                  <a:srgbClr val="8B949E"/>
-                </a:solidFill>
-                <a:latin typeface="Inter Tight"/>
-              </a:rPr>
-              <a:t>
-флаг эскалации поднимает до «Высокого»</a:t>
-            </a:r>
-          </a:p>
-        </p:txBody>
-      </p:sp>
-      <p:sp>
-        <p:nvSpPr>
-          <p:cNvPr id="23" name="TextBox 22"/>
-          <p:cNvSpPr txBox="1"/>
-          <p:nvPr/>
-        </p:nvSpPr>
-        <p:spPr>
-          <a:xfrm>
-            <a:off x="731520" y="5440680"/>
-            <a:ext cx="10515600" cy="640080"/>
-          </a:xfrm>
-          <a:prstGeom prst="rect">
-            <a:avLst/>
-          </a:prstGeom>
-          <a:noFill/>
-        </p:spPr>
-        <p:txBody>
-          <a:bodyPr wrap="square" lIns="0" rIns="0" tIns="0" bIns="0">
-            <a:spAutoFit/>
-          </a:bodyPr>
-          <a:lstStyle/>
-          <a:p>
-            <a:pPr algn="l">
-              <a:lnSpc>
-                <a:spcPct val="145000"/>
-              </a:lnSpc>
-            </a:pPr>
-            <a:r>
-              <a:rPr sz="1500" b="1">
-                <a:solidFill>
-                  <a:srgbClr val="F2F4F3"/>
-                </a:solidFill>
-                <a:latin typeface="Inter Tight"/>
-              </a:rPr>
-              <a:t>В контракте ответа модели полей «индекс» и «категория» нет вовсе. </a:t>
-            </a:r>
-            <a:r>
-              <a:rPr sz="1500" b="0">
-                <a:solidFill>
-                  <a:srgbClr val="8B949E"/>
-                </a:solidFill>
-                <a:latin typeface="Inter Tight"/>
-              </a:rPr>
-              <a:t>Она физически не может их вернуть — поэтому оценку можно проверить и поправить.</a:t>
+              <a:t>Границы работы заданы заранее: без авторизации, промышленной нагрузки и информационной безопасности.</a:t>
             </a:r>
           </a:p>
         </p:txBody>
@@ -4901,7 +5674,7 @@
             <a:avLst/>
           </a:prstGeom>
           <a:solidFill>
-            <a:srgbClr val="F9F9F9"/>
+            <a:srgbClr val="101214"/>
           </a:solidFill>
           <a:ln>
             <a:noFill/>
@@ -4938,8 +5711,103 @@
         </p:nvSpPr>
         <p:spPr>
           <a:xfrm>
-            <a:off x="731520" y="566928"/>
-            <a:ext cx="10698480" cy="274320"/>
+            <a:off x="731520" y="1051560"/>
+            <a:ext cx="10698480" cy="1280160"/>
+          </a:xfrm>
+          <a:prstGeom prst="rect">
+            <a:avLst/>
+          </a:prstGeom>
+          <a:noFill/>
+        </p:spPr>
+        <p:txBody>
+          <a:bodyPr wrap="square" lIns="0" rIns="0" tIns="0" bIns="0">
+            <a:spAutoFit/>
+          </a:bodyPr>
+          <a:lstStyle/>
+          <a:p>
+            <a:pPr algn="l">
+              <a:lnSpc>
+                <a:spcPct val="110000"/>
+              </a:lnSpc>
+            </a:pPr>
+            <a:r>
+              <a:rPr sz="5200" b="1">
+                <a:solidFill>
+                  <a:srgbClr val="F2F4F3"/>
+                </a:solidFill>
+                <a:latin typeface="Inter Tight"/>
+              </a:rPr>
+              <a:t>Модель выставляет баллы.
+</a:t>
+            </a:r>
+            <a:r>
+              <a:rPr sz="5200" b="1">
+                <a:solidFill>
+                  <a:srgbClr val="43B02A"/>
+                </a:solidFill>
+                <a:latin typeface="Inter Tight"/>
+              </a:rPr>
+              <a:t>Индекс считает код.</a:t>
+            </a:r>
+          </a:p>
+        </p:txBody>
+      </p:sp>
+      <p:sp>
+        <p:nvSpPr>
+          <p:cNvPr id="4" name="Rounded Rectangle 3"/>
+          <p:cNvSpPr/>
+          <p:nvPr/>
+        </p:nvSpPr>
+        <p:spPr>
+          <a:xfrm>
+            <a:off x="731520" y="3246120"/>
+            <a:ext cx="4663440" cy="1828800"/>
+          </a:xfrm>
+          <a:prstGeom prst="roundRect">
+            <a:avLst>
+              <a:gd name="adj" fmla="val 4500"/>
+            </a:avLst>
+          </a:prstGeom>
+          <a:solidFill>
+            <a:srgbClr val="1B1F24"/>
+          </a:solidFill>
+          <a:ln>
+            <a:noFill/>
+          </a:ln>
+          <a:effectLst/>
+        </p:spPr>
+        <p:style>
+          <a:lnRef idx="1">
+            <a:schemeClr val="accent1"/>
+          </a:lnRef>
+          <a:fillRef idx="3">
+            <a:schemeClr val="accent1"/>
+          </a:fillRef>
+          <a:effectRef idx="2">
+            <a:schemeClr val="accent1"/>
+          </a:effectRef>
+          <a:fontRef idx="minor">
+            <a:schemeClr val="lt1"/>
+          </a:fontRef>
+        </p:style>
+        <p:txBody>
+          <a:bodyPr rtlCol="0" anchor="ctr"/>
+          <a:lstStyle/>
+          <a:p>
+            <a:pPr algn="ctr"/>
+          </a:p>
+        </p:txBody>
+      </p:sp>
+      <p:sp>
+        <p:nvSpPr>
+          <p:cNvPr id="5" name="TextBox 4"/>
+          <p:cNvSpPr txBox="1"/>
+          <p:nvPr/>
+        </p:nvSpPr>
+        <p:spPr>
+          <a:xfrm>
+            <a:off x="1097280" y="3520440"/>
+            <a:ext cx="4023360" cy="274320"/>
           </a:xfrm>
           <a:prstGeom prst="rect">
             <a:avLst/>
@@ -4958,27 +5826,27 @@
               </a:lnSpc>
             </a:pPr>
             <a:r>
-              <a:rPr sz="1100" b="1">
-                <a:solidFill>
-                  <a:srgbClr val="379123"/>
+              <a:rPr sz="1050" b="1">
+                <a:solidFill>
+                  <a:srgbClr val="8B949E"/>
                 </a:solidFill>
                 <a:latin typeface="Inter Tight"/>
               </a:rPr>
-              <a:t>Вот как это выглядит</a:t>
-            </a:r>
-          </a:p>
-        </p:txBody>
-      </p:sp>
-      <p:sp>
-        <p:nvSpPr>
-          <p:cNvPr id="4" name="TextBox 3"/>
+              <a:t>Модель отдаёт</a:t>
+            </a:r>
+          </a:p>
+        </p:txBody>
+      </p:sp>
+      <p:sp>
+        <p:nvSpPr>
+          <p:cNvPr id="6" name="TextBox 5"/>
           <p:cNvSpPr txBox="1"/>
           <p:nvPr/>
         </p:nvSpPr>
         <p:spPr>
           <a:xfrm>
-            <a:off x="731520" y="914400"/>
-            <a:ext cx="10698480" cy="457200"/>
+            <a:off x="1097280" y="3840480"/>
+            <a:ext cx="548640" cy="219456"/>
           </a:xfrm>
           <a:prstGeom prst="rect">
             <a:avLst/>
@@ -4997,27 +5865,27 @@
               </a:lnSpc>
             </a:pPr>
             <a:r>
-              <a:rPr sz="3000" b="1">
-                <a:solidFill>
-                  <a:srgbClr val="231F20"/>
+              <a:rPr sz="1200" b="0">
+                <a:solidFill>
+                  <a:srgbClr val="8B949E"/>
                 </a:solidFill>
                 <a:latin typeface="Inter Tight"/>
               </a:rPr>
-              <a:t>Сверху то, что важнее для компании, а не то, что свежее</a:t>
-            </a:r>
-          </a:p>
-        </p:txBody>
-      </p:sp>
-      <p:sp>
-        <p:nvSpPr>
-          <p:cNvPr id="5" name="TextBox 4"/>
+              <a:t>К1</a:t>
+            </a:r>
+          </a:p>
+        </p:txBody>
+      </p:sp>
+      <p:sp>
+        <p:nvSpPr>
+          <p:cNvPr id="7" name="TextBox 6"/>
           <p:cNvSpPr txBox="1"/>
           <p:nvPr/>
         </p:nvSpPr>
         <p:spPr>
           <a:xfrm>
-            <a:off x="731520" y="1463040"/>
-            <a:ext cx="10698480" cy="640080"/>
+            <a:off x="1097280" y="4078224"/>
+            <a:ext cx="548640" cy="365760"/>
           </a:xfrm>
           <a:prstGeom prst="rect">
             <a:avLst/>
@@ -5032,42 +5900,469 @@
           <a:p>
             <a:pPr algn="l">
               <a:lnSpc>
-                <a:spcPct val="140000"/>
+                <a:spcPct val="132000"/>
               </a:lnSpc>
             </a:pPr>
             <a:r>
-              <a:rPr sz="1300" b="0">
-                <a:solidFill>
-                  <a:srgbClr val="6B7280"/>
+              <a:rPr sz="2400" b="1">
+                <a:solidFill>
+                  <a:srgbClr val="F2F4F3"/>
                 </a:solidFill>
                 <a:latin typeface="Inter Tight"/>
               </a:rPr>
-              <a:t>Цветом отмечены только два верхних уровня серьёзности — сортировка уже сделала главную работу.</a:t>
-            </a:r>
-          </a:p>
-        </p:txBody>
-      </p:sp>
-      <p:sp>
-        <p:nvSpPr>
-          <p:cNvPr id="6" name="Rectangle 5"/>
+              <a:t>3</a:t>
+            </a:r>
+          </a:p>
+        </p:txBody>
+      </p:sp>
+      <p:sp>
+        <p:nvSpPr>
+          <p:cNvPr id="8" name="TextBox 7"/>
+          <p:cNvSpPr txBox="1"/>
+          <p:nvPr/>
+        </p:nvSpPr>
+        <p:spPr>
+          <a:xfrm>
+            <a:off x="1755648" y="3840480"/>
+            <a:ext cx="548640" cy="219456"/>
+          </a:xfrm>
+          <a:prstGeom prst="rect">
+            <a:avLst/>
+          </a:prstGeom>
+          <a:noFill/>
+        </p:spPr>
+        <p:txBody>
+          <a:bodyPr wrap="square" lIns="0" rIns="0" tIns="0" bIns="0">
+            <a:spAutoFit/>
+          </a:bodyPr>
+          <a:lstStyle/>
+          <a:p>
+            <a:pPr algn="l">
+              <a:lnSpc>
+                <a:spcPct val="132000"/>
+              </a:lnSpc>
+            </a:pPr>
+            <a:r>
+              <a:rPr sz="1200" b="0">
+                <a:solidFill>
+                  <a:srgbClr val="8B949E"/>
+                </a:solidFill>
+                <a:latin typeface="Inter Tight"/>
+              </a:rPr>
+              <a:t>К2</a:t>
+            </a:r>
+          </a:p>
+        </p:txBody>
+      </p:sp>
+      <p:sp>
+        <p:nvSpPr>
+          <p:cNvPr id="9" name="TextBox 8"/>
+          <p:cNvSpPr txBox="1"/>
+          <p:nvPr/>
+        </p:nvSpPr>
+        <p:spPr>
+          <a:xfrm>
+            <a:off x="1755648" y="4078224"/>
+            <a:ext cx="548640" cy="365760"/>
+          </a:xfrm>
+          <a:prstGeom prst="rect">
+            <a:avLst/>
+          </a:prstGeom>
+          <a:noFill/>
+        </p:spPr>
+        <p:txBody>
+          <a:bodyPr wrap="square" lIns="0" rIns="0" tIns="0" bIns="0">
+            <a:spAutoFit/>
+          </a:bodyPr>
+          <a:lstStyle/>
+          <a:p>
+            <a:pPr algn="l">
+              <a:lnSpc>
+                <a:spcPct val="132000"/>
+              </a:lnSpc>
+            </a:pPr>
+            <a:r>
+              <a:rPr sz="2400" b="1">
+                <a:solidFill>
+                  <a:srgbClr val="F2F4F3"/>
+                </a:solidFill>
+                <a:latin typeface="Inter Tight"/>
+              </a:rPr>
+              <a:t>2</a:t>
+            </a:r>
+          </a:p>
+        </p:txBody>
+      </p:sp>
+      <p:sp>
+        <p:nvSpPr>
+          <p:cNvPr id="10" name="TextBox 9"/>
+          <p:cNvSpPr txBox="1"/>
+          <p:nvPr/>
+        </p:nvSpPr>
+        <p:spPr>
+          <a:xfrm>
+            <a:off x="2414016" y="3840480"/>
+            <a:ext cx="548640" cy="219456"/>
+          </a:xfrm>
+          <a:prstGeom prst="rect">
+            <a:avLst/>
+          </a:prstGeom>
+          <a:noFill/>
+        </p:spPr>
+        <p:txBody>
+          <a:bodyPr wrap="square" lIns="0" rIns="0" tIns="0" bIns="0">
+            <a:spAutoFit/>
+          </a:bodyPr>
+          <a:lstStyle/>
+          <a:p>
+            <a:pPr algn="l">
+              <a:lnSpc>
+                <a:spcPct val="132000"/>
+              </a:lnSpc>
+            </a:pPr>
+            <a:r>
+              <a:rPr sz="1200" b="0">
+                <a:solidFill>
+                  <a:srgbClr val="8B949E"/>
+                </a:solidFill>
+                <a:latin typeface="Inter Tight"/>
+              </a:rPr>
+              <a:t>К3</a:t>
+            </a:r>
+          </a:p>
+        </p:txBody>
+      </p:sp>
+      <p:sp>
+        <p:nvSpPr>
+          <p:cNvPr id="11" name="TextBox 10"/>
+          <p:cNvSpPr txBox="1"/>
+          <p:nvPr/>
+        </p:nvSpPr>
+        <p:spPr>
+          <a:xfrm>
+            <a:off x="2414016" y="4078224"/>
+            <a:ext cx="548640" cy="365760"/>
+          </a:xfrm>
+          <a:prstGeom prst="rect">
+            <a:avLst/>
+          </a:prstGeom>
+          <a:noFill/>
+        </p:spPr>
+        <p:txBody>
+          <a:bodyPr wrap="square" lIns="0" rIns="0" tIns="0" bIns="0">
+            <a:spAutoFit/>
+          </a:bodyPr>
+          <a:lstStyle/>
+          <a:p>
+            <a:pPr algn="l">
+              <a:lnSpc>
+                <a:spcPct val="132000"/>
+              </a:lnSpc>
+            </a:pPr>
+            <a:r>
+              <a:rPr sz="2400" b="1">
+                <a:solidFill>
+                  <a:srgbClr val="F2F4F3"/>
+                </a:solidFill>
+                <a:latin typeface="Inter Tight"/>
+              </a:rPr>
+              <a:t>3</a:t>
+            </a:r>
+          </a:p>
+        </p:txBody>
+      </p:sp>
+      <p:sp>
+        <p:nvSpPr>
+          <p:cNvPr id="12" name="TextBox 11"/>
+          <p:cNvSpPr txBox="1"/>
+          <p:nvPr/>
+        </p:nvSpPr>
+        <p:spPr>
+          <a:xfrm>
+            <a:off x="3072384" y="3840480"/>
+            <a:ext cx="548640" cy="219456"/>
+          </a:xfrm>
+          <a:prstGeom prst="rect">
+            <a:avLst/>
+          </a:prstGeom>
+          <a:noFill/>
+        </p:spPr>
+        <p:txBody>
+          <a:bodyPr wrap="square" lIns="0" rIns="0" tIns="0" bIns="0">
+            <a:spAutoFit/>
+          </a:bodyPr>
+          <a:lstStyle/>
+          <a:p>
+            <a:pPr algn="l">
+              <a:lnSpc>
+                <a:spcPct val="132000"/>
+              </a:lnSpc>
+            </a:pPr>
+            <a:r>
+              <a:rPr sz="1200" b="0">
+                <a:solidFill>
+                  <a:srgbClr val="8B949E"/>
+                </a:solidFill>
+                <a:latin typeface="Inter Tight"/>
+              </a:rPr>
+              <a:t>К4</a:t>
+            </a:r>
+          </a:p>
+        </p:txBody>
+      </p:sp>
+      <p:sp>
+        <p:nvSpPr>
+          <p:cNvPr id="13" name="TextBox 12"/>
+          <p:cNvSpPr txBox="1"/>
+          <p:nvPr/>
+        </p:nvSpPr>
+        <p:spPr>
+          <a:xfrm>
+            <a:off x="3072384" y="4078224"/>
+            <a:ext cx="548640" cy="365760"/>
+          </a:xfrm>
+          <a:prstGeom prst="rect">
+            <a:avLst/>
+          </a:prstGeom>
+          <a:noFill/>
+        </p:spPr>
+        <p:txBody>
+          <a:bodyPr wrap="square" lIns="0" rIns="0" tIns="0" bIns="0">
+            <a:spAutoFit/>
+          </a:bodyPr>
+          <a:lstStyle/>
+          <a:p>
+            <a:pPr algn="l">
+              <a:lnSpc>
+                <a:spcPct val="132000"/>
+              </a:lnSpc>
+            </a:pPr>
+            <a:r>
+              <a:rPr sz="2400" b="1">
+                <a:solidFill>
+                  <a:srgbClr val="F2F4F3"/>
+                </a:solidFill>
+                <a:latin typeface="Inter Tight"/>
+              </a:rPr>
+              <a:t>0</a:t>
+            </a:r>
+          </a:p>
+        </p:txBody>
+      </p:sp>
+      <p:sp>
+        <p:nvSpPr>
+          <p:cNvPr id="14" name="TextBox 13"/>
+          <p:cNvSpPr txBox="1"/>
+          <p:nvPr/>
+        </p:nvSpPr>
+        <p:spPr>
+          <a:xfrm>
+            <a:off x="3730752" y="3840480"/>
+            <a:ext cx="548640" cy="219456"/>
+          </a:xfrm>
+          <a:prstGeom prst="rect">
+            <a:avLst/>
+          </a:prstGeom>
+          <a:noFill/>
+        </p:spPr>
+        <p:txBody>
+          <a:bodyPr wrap="square" lIns="0" rIns="0" tIns="0" bIns="0">
+            <a:spAutoFit/>
+          </a:bodyPr>
+          <a:lstStyle/>
+          <a:p>
+            <a:pPr algn="l">
+              <a:lnSpc>
+                <a:spcPct val="132000"/>
+              </a:lnSpc>
+            </a:pPr>
+            <a:r>
+              <a:rPr sz="1200" b="0">
+                <a:solidFill>
+                  <a:srgbClr val="8B949E"/>
+                </a:solidFill>
+                <a:latin typeface="Inter Tight"/>
+              </a:rPr>
+              <a:t>К5</a:t>
+            </a:r>
+          </a:p>
+        </p:txBody>
+      </p:sp>
+      <p:sp>
+        <p:nvSpPr>
+          <p:cNvPr id="15" name="TextBox 14"/>
+          <p:cNvSpPr txBox="1"/>
+          <p:nvPr/>
+        </p:nvSpPr>
+        <p:spPr>
+          <a:xfrm>
+            <a:off x="3730752" y="4078224"/>
+            <a:ext cx="548640" cy="365760"/>
+          </a:xfrm>
+          <a:prstGeom prst="rect">
+            <a:avLst/>
+          </a:prstGeom>
+          <a:noFill/>
+        </p:spPr>
+        <p:txBody>
+          <a:bodyPr wrap="square" lIns="0" rIns="0" tIns="0" bIns="0">
+            <a:spAutoFit/>
+          </a:bodyPr>
+          <a:lstStyle/>
+          <a:p>
+            <a:pPr algn="l">
+              <a:lnSpc>
+                <a:spcPct val="132000"/>
+              </a:lnSpc>
+            </a:pPr>
+            <a:r>
+              <a:rPr sz="2400" b="1">
+                <a:solidFill>
+                  <a:srgbClr val="F2F4F3"/>
+                </a:solidFill>
+                <a:latin typeface="Inter Tight"/>
+              </a:rPr>
+              <a:t>0</a:t>
+            </a:r>
+          </a:p>
+        </p:txBody>
+      </p:sp>
+      <p:sp>
+        <p:nvSpPr>
+          <p:cNvPr id="16" name="TextBox 15"/>
+          <p:cNvSpPr txBox="1"/>
+          <p:nvPr/>
+        </p:nvSpPr>
+        <p:spPr>
+          <a:xfrm>
+            <a:off x="4389120" y="3840480"/>
+            <a:ext cx="548640" cy="219456"/>
+          </a:xfrm>
+          <a:prstGeom prst="rect">
+            <a:avLst/>
+          </a:prstGeom>
+          <a:noFill/>
+        </p:spPr>
+        <p:txBody>
+          <a:bodyPr wrap="square" lIns="0" rIns="0" tIns="0" bIns="0">
+            <a:spAutoFit/>
+          </a:bodyPr>
+          <a:lstStyle/>
+          <a:p>
+            <a:pPr algn="l">
+              <a:lnSpc>
+                <a:spcPct val="132000"/>
+              </a:lnSpc>
+            </a:pPr>
+            <a:r>
+              <a:rPr sz="1200" b="0">
+                <a:solidFill>
+                  <a:srgbClr val="8B949E"/>
+                </a:solidFill>
+                <a:latin typeface="Inter Tight"/>
+              </a:rPr>
+              <a:t>К6</a:t>
+            </a:r>
+          </a:p>
+        </p:txBody>
+      </p:sp>
+      <p:sp>
+        <p:nvSpPr>
+          <p:cNvPr id="17" name="TextBox 16"/>
+          <p:cNvSpPr txBox="1"/>
+          <p:nvPr/>
+        </p:nvSpPr>
+        <p:spPr>
+          <a:xfrm>
+            <a:off x="4389120" y="4078224"/>
+            <a:ext cx="548640" cy="365760"/>
+          </a:xfrm>
+          <a:prstGeom prst="rect">
+            <a:avLst/>
+          </a:prstGeom>
+          <a:noFill/>
+        </p:spPr>
+        <p:txBody>
+          <a:bodyPr wrap="square" lIns="0" rIns="0" tIns="0" bIns="0">
+            <a:spAutoFit/>
+          </a:bodyPr>
+          <a:lstStyle/>
+          <a:p>
+            <a:pPr algn="l">
+              <a:lnSpc>
+                <a:spcPct val="132000"/>
+              </a:lnSpc>
+            </a:pPr>
+            <a:r>
+              <a:rPr sz="2400" b="1">
+                <a:solidFill>
+                  <a:srgbClr val="F2F4F3"/>
+                </a:solidFill>
+                <a:latin typeface="Inter Tight"/>
+              </a:rPr>
+              <a:t>3</a:t>
+            </a:r>
+          </a:p>
+        </p:txBody>
+      </p:sp>
+      <p:sp>
+        <p:nvSpPr>
+          <p:cNvPr id="18" name="TextBox 17"/>
+          <p:cNvSpPr txBox="1"/>
+          <p:nvPr/>
+        </p:nvSpPr>
+        <p:spPr>
+          <a:xfrm>
+            <a:off x="1097280" y="4553712"/>
+            <a:ext cx="4023360" cy="274320"/>
+          </a:xfrm>
+          <a:prstGeom prst="rect">
+            <a:avLst/>
+          </a:prstGeom>
+          <a:noFill/>
+        </p:spPr>
+        <p:txBody>
+          <a:bodyPr wrap="square" lIns="0" rIns="0" tIns="0" bIns="0">
+            <a:spAutoFit/>
+          </a:bodyPr>
+          <a:lstStyle/>
+          <a:p>
+            <a:pPr algn="l">
+              <a:lnSpc>
+                <a:spcPct val="132000"/>
+              </a:lnSpc>
+            </a:pPr>
+            <a:r>
+              <a:rPr sz="1400" b="0">
+                <a:solidFill>
+                  <a:srgbClr val="8B949E"/>
+                </a:solidFill>
+                <a:latin typeface="Inter Tight"/>
+              </a:rPr>
+              <a:t>и обоснование к каждому баллу</a:t>
+            </a:r>
+          </a:p>
+        </p:txBody>
+      </p:sp>
+      <p:sp>
+        <p:nvSpPr>
+          <p:cNvPr id="19" name="Can 18"/>
           <p:cNvSpPr/>
           <p:nvPr/>
         </p:nvSpPr>
         <p:spPr>
           <a:xfrm>
-            <a:off x="1542135" y="1801368"/>
-            <a:ext cx="9107424" cy="4543653"/>
-          </a:xfrm>
-          <a:prstGeom prst="rect">
+            <a:off x="5623560" y="4069080"/>
+            <a:ext cx="685800" cy="146304"/>
+          </a:xfrm>
+          <a:prstGeom prst="can">
             <a:avLst/>
           </a:prstGeom>
           <a:solidFill>
-            <a:srgbClr val="FFFFFF"/>
+            <a:srgbClr val="43B02A"/>
           </a:solidFill>
-          <a:ln w="9525">
-            <a:solidFill>
-              <a:srgbClr val="D9D9D9"/>
-            </a:solidFill>
+          <a:ln>
+            <a:noFill/>
           </a:ln>
           <a:effectLst/>
         </p:spPr>
@@ -5093,30 +6388,206 @@
           </a:p>
         </p:txBody>
       </p:sp>
-      <p:pic>
-        <p:nvPicPr>
-          <p:cNvPr id="7" name="Picture 6" descr="shot_feed.jpg"/>
-          <p:cNvPicPr>
-            <a:picLocks noChangeAspect="1"/>
-          </p:cNvPicPr>
-          <p:nvPr/>
-        </p:nvPicPr>
-        <p:blipFill>
-          <a:blip r:embed="rId2"/>
-          <a:stretch>
-            <a:fillRect/>
-          </a:stretch>
-        </p:blipFill>
-        <p:spPr>
-          <a:xfrm>
-            <a:off x="1569567" y="1828800"/>
-            <a:ext cx="9052560" cy="4488789"/>
-          </a:xfrm>
-          <a:prstGeom prst="rect">
-            <a:avLst/>
-          </a:prstGeom>
-        </p:spPr>
-      </p:pic>
+      <p:sp>
+        <p:nvSpPr>
+          <p:cNvPr id="20" name="Rounded Rectangle 19"/>
+          <p:cNvSpPr/>
+          <p:nvPr/>
+        </p:nvSpPr>
+        <p:spPr>
+          <a:xfrm>
+            <a:off x="6675120" y="3246120"/>
+            <a:ext cx="4754880" cy="1828800"/>
+          </a:xfrm>
+          <a:prstGeom prst="roundRect">
+            <a:avLst>
+              <a:gd name="adj" fmla="val 4500"/>
+            </a:avLst>
+          </a:prstGeom>
+          <a:solidFill>
+            <a:srgbClr val="23282E"/>
+          </a:solidFill>
+          <a:ln>
+            <a:noFill/>
+          </a:ln>
+          <a:effectLst/>
+        </p:spPr>
+        <p:style>
+          <a:lnRef idx="1">
+            <a:schemeClr val="accent1"/>
+          </a:lnRef>
+          <a:fillRef idx="3">
+            <a:schemeClr val="accent1"/>
+          </a:fillRef>
+          <a:effectRef idx="2">
+            <a:schemeClr val="accent1"/>
+          </a:effectRef>
+          <a:fontRef idx="minor">
+            <a:schemeClr val="lt1"/>
+          </a:fontRef>
+        </p:style>
+        <p:txBody>
+          <a:bodyPr rtlCol="0" anchor="ctr"/>
+          <a:lstStyle/>
+          <a:p>
+            <a:pPr algn="ctr"/>
+          </a:p>
+        </p:txBody>
+      </p:sp>
+      <p:sp>
+        <p:nvSpPr>
+          <p:cNvPr id="21" name="TextBox 20"/>
+          <p:cNvSpPr txBox="1"/>
+          <p:nvPr/>
+        </p:nvSpPr>
+        <p:spPr>
+          <a:xfrm>
+            <a:off x="7040880" y="3520440"/>
+            <a:ext cx="4114800" cy="274320"/>
+          </a:xfrm>
+          <a:prstGeom prst="rect">
+            <a:avLst/>
+          </a:prstGeom>
+          <a:noFill/>
+        </p:spPr>
+        <p:txBody>
+          <a:bodyPr wrap="square" lIns="0" rIns="0" tIns="0" bIns="0">
+            <a:spAutoFit/>
+          </a:bodyPr>
+          <a:lstStyle/>
+          <a:p>
+            <a:pPr algn="l">
+              <a:lnSpc>
+                <a:spcPct val="132000"/>
+              </a:lnSpc>
+            </a:pPr>
+            <a:r>
+              <a:rPr sz="1050" b="1">
+                <a:solidFill>
+                  <a:srgbClr val="43B02A"/>
+                </a:solidFill>
+                <a:latin typeface="Inter Tight"/>
+              </a:rPr>
+              <a:t>Код вычисляет</a:t>
+            </a:r>
+          </a:p>
+        </p:txBody>
+      </p:sp>
+      <p:sp>
+        <p:nvSpPr>
+          <p:cNvPr id="22" name="TextBox 21"/>
+          <p:cNvSpPr txBox="1"/>
+          <p:nvPr/>
+        </p:nvSpPr>
+        <p:spPr>
+          <a:xfrm>
+            <a:off x="7040880" y="3886200"/>
+            <a:ext cx="4114800" cy="1005840"/>
+          </a:xfrm>
+          <a:prstGeom prst="rect">
+            <a:avLst/>
+          </a:prstGeom>
+          <a:noFill/>
+        </p:spPr>
+        <p:txBody>
+          <a:bodyPr wrap="square" lIns="0" rIns="0" tIns="0" bIns="0">
+            <a:spAutoFit/>
+          </a:bodyPr>
+          <a:lstStyle/>
+          <a:p>
+            <a:pPr algn="l">
+              <a:lnSpc>
+                <a:spcPct val="150000"/>
+              </a:lnSpc>
+            </a:pPr>
+            <a:r>
+              <a:rPr sz="2600" b="1">
+                <a:solidFill>
+                  <a:srgbClr val="F2F4F3"/>
+                </a:solidFill>
+                <a:latin typeface="Inter Tight"/>
+              </a:rPr>
+              <a:t>65,0</a:t>
+            </a:r>
+            <a:r>
+              <a:rPr sz="2000" b="0">
+                <a:solidFill>
+                  <a:srgbClr val="8B949E"/>
+                </a:solidFill>
+                <a:latin typeface="Inter Tight"/>
+              </a:rPr>
+              <a:t>  →  </a:t>
+            </a:r>
+            <a:r>
+              <a:rPr sz="2000" b="1">
+                <a:solidFill>
+                  <a:srgbClr val="F2F4F3"/>
+                </a:solidFill>
+                <a:latin typeface="Inter Tight"/>
+              </a:rPr>
+              <a:t>Среднее</a:t>
+            </a:r>
+            <a:r>
+              <a:rPr sz="1400" b="0">
+                <a:solidFill>
+                  <a:srgbClr val="8B949E"/>
+                </a:solidFill>
+                <a:latin typeface="Inter Tight"/>
+              </a:rPr>
+              <a:t>
+флаг эскалации поднимает до «Высокого»</a:t>
+            </a:r>
+          </a:p>
+        </p:txBody>
+      </p:sp>
+      <p:sp>
+        <p:nvSpPr>
+          <p:cNvPr id="23" name="TextBox 22"/>
+          <p:cNvSpPr txBox="1"/>
+          <p:nvPr/>
+        </p:nvSpPr>
+        <p:spPr>
+          <a:xfrm>
+            <a:off x="731520" y="5440680"/>
+            <a:ext cx="10515600" cy="640080"/>
+          </a:xfrm>
+          <a:prstGeom prst="rect">
+            <a:avLst/>
+          </a:prstGeom>
+          <a:noFill/>
+        </p:spPr>
+        <p:txBody>
+          <a:bodyPr wrap="square" lIns="0" rIns="0" tIns="0" bIns="0">
+            <a:spAutoFit/>
+          </a:bodyPr>
+          <a:lstStyle/>
+          <a:p>
+            <a:pPr algn="l">
+              <a:lnSpc>
+                <a:spcPct val="145000"/>
+              </a:lnSpc>
+            </a:pPr>
+            <a:r>
+              <a:rPr sz="1500" b="1">
+                <a:solidFill>
+                  <a:srgbClr val="F2F4F3"/>
+                </a:solidFill>
+                <a:latin typeface="Inter Tight"/>
+              </a:rPr>
+              <a:t>В контракте ответа модели полей «индекс» и «категория» нет вовсе. </a:t>
+            </a:r>
+            <a:r>
+              <a:rPr sz="1500" b="0">
+                <a:solidFill>
+                  <a:srgbClr val="8B949E"/>
+                </a:solidFill>
+                <a:latin typeface="Inter Tight"/>
+              </a:rPr>
+              <a:t>Она физически не может их вернуть — поэтому оценку можно проверить и поправить.</a:t>
+            </a:r>
+          </a:p>
+        </p:txBody>
+      </p:sp>
     </p:spTree>
   </p:cSld>
   <p:clrMapOvr>
@@ -5150,7 +6621,7 @@
             <a:avLst/>
           </a:prstGeom>
           <a:solidFill>
-            <a:srgbClr val="101214"/>
+            <a:srgbClr val="F9F9F9"/>
           </a:solidFill>
           <a:ln>
             <a:noFill/>
@@ -5187,7 +6658,7 @@
         </p:nvSpPr>
         <p:spPr>
           <a:xfrm>
-            <a:off x="731520" y="1051560"/>
+            <a:off x="731520" y="566928"/>
             <a:ext cx="10698480" cy="274320"/>
           </a:xfrm>
           <a:prstGeom prst="rect">
@@ -5209,11 +6680,11 @@
             <a:r>
               <a:rPr sz="1100" b="1">
                 <a:solidFill>
-                  <a:srgbClr val="43B02A"/>
+                  <a:srgbClr val="379123"/>
                 </a:solidFill>
                 <a:latin typeface="Inter Tight"/>
               </a:rPr>
-              <a:t>Сколько это стоит</a:t>
+              <a:t>Вот как это выглядит</a:t>
             </a:r>
           </a:p>
         </p:txBody>
@@ -5226,8 +6697,8 @@
         </p:nvSpPr>
         <p:spPr>
           <a:xfrm>
-            <a:off x="731520" y="1463040"/>
-            <a:ext cx="10515600" cy="1097280"/>
+            <a:off x="731520" y="914400"/>
+            <a:ext cx="10698480" cy="457200"/>
           </a:xfrm>
           <a:prstGeom prst="rect">
             <a:avLst/>
@@ -5242,43 +6713,81 @@
           <a:p>
             <a:pPr algn="l">
               <a:lnSpc>
-                <a:spcPct val="110000"/>
+                <a:spcPct val="132000"/>
               </a:lnSpc>
             </a:pPr>
             <a:r>
-              <a:rPr sz="4200" b="1">
-                <a:solidFill>
-                  <a:srgbClr val="F2F4F3"/>
+              <a:rPr sz="3000" b="1">
+                <a:solidFill>
+                  <a:srgbClr val="231F20"/>
                 </a:solidFill>
                 <a:latin typeface="Inter Tight"/>
               </a:rPr>
-              <a:t>Год работы модели дешевле,
-чем один пропущенный документ</a:t>
-            </a:r>
-          </a:p>
-        </p:txBody>
-      </p:sp>
-      <p:sp>
-        <p:nvSpPr>
-          <p:cNvPr id="5" name="Rounded Rectangle 4"/>
+              <a:t>Сверху то, что важнее для компании, а не то, что свежее</a:t>
+            </a:r>
+          </a:p>
+        </p:txBody>
+      </p:sp>
+      <p:sp>
+        <p:nvSpPr>
+          <p:cNvPr id="5" name="TextBox 4"/>
+          <p:cNvSpPr txBox="1"/>
+          <p:nvPr/>
+        </p:nvSpPr>
+        <p:spPr>
+          <a:xfrm>
+            <a:off x="731520" y="1463040"/>
+            <a:ext cx="10698480" cy="640080"/>
+          </a:xfrm>
+          <a:prstGeom prst="rect">
+            <a:avLst/>
+          </a:prstGeom>
+          <a:noFill/>
+        </p:spPr>
+        <p:txBody>
+          <a:bodyPr wrap="square" lIns="0" rIns="0" tIns="0" bIns="0">
+            <a:spAutoFit/>
+          </a:bodyPr>
+          <a:lstStyle/>
+          <a:p>
+            <a:pPr algn="l">
+              <a:lnSpc>
+                <a:spcPct val="140000"/>
+              </a:lnSpc>
+            </a:pPr>
+            <a:r>
+              <a:rPr sz="1300" b="0">
+                <a:solidFill>
+                  <a:srgbClr val="6B7280"/>
+                </a:solidFill>
+                <a:latin typeface="Inter Tight"/>
+              </a:rPr>
+              <a:t>Цветом отмечены только два верхних уровня серьёзности — сортировка уже сделала главную работу.</a:t>
+            </a:r>
+          </a:p>
+        </p:txBody>
+      </p:sp>
+      <p:sp>
+        <p:nvSpPr>
+          <p:cNvPr id="6" name="Rectangle 5"/>
           <p:cNvSpPr/>
           <p:nvPr/>
         </p:nvSpPr>
         <p:spPr>
           <a:xfrm>
-            <a:off x="731520" y="3566160"/>
-            <a:ext cx="10698480" cy="1965960"/>
-          </a:xfrm>
-          <a:prstGeom prst="roundRect">
-            <a:avLst>
-              <a:gd name="adj" fmla="val 4500"/>
-            </a:avLst>
+            <a:off x="1542135" y="1801368"/>
+            <a:ext cx="9107424" cy="4543653"/>
+          </a:xfrm>
+          <a:prstGeom prst="rect">
+            <a:avLst/>
           </a:prstGeom>
           <a:solidFill>
-            <a:srgbClr val="1B1F24"/>
+            <a:srgbClr val="FFFFFF"/>
           </a:solidFill>
-          <a:ln>
-            <a:noFill/>
+          <a:ln w="9525">
+            <a:solidFill>
+              <a:srgbClr val="D9D9D9"/>
+            </a:solidFill>
           </a:ln>
           <a:effectLst/>
         </p:spPr>
@@ -5304,298 +6813,30 @@
           </a:p>
         </p:txBody>
       </p:sp>
-      <p:sp>
-        <p:nvSpPr>
-          <p:cNvPr id="6" name="TextBox 5"/>
-          <p:cNvSpPr txBox="1"/>
-          <p:nvPr/>
-        </p:nvSpPr>
-        <p:spPr>
-          <a:xfrm>
-            <a:off x="1143000" y="3840480"/>
-            <a:ext cx="5486400" cy="256032"/>
-          </a:xfrm>
-          <a:prstGeom prst="rect">
-            <a:avLst/>
-          </a:prstGeom>
-          <a:noFill/>
-        </p:spPr>
-        <p:txBody>
-          <a:bodyPr wrap="square" lIns="0" rIns="0" tIns="0" bIns="0">
-            <a:spAutoFit/>
-          </a:bodyPr>
-          <a:lstStyle/>
-          <a:p>
-            <a:pPr algn="l">
-              <a:lnSpc>
-                <a:spcPct val="132000"/>
-              </a:lnSpc>
-            </a:pPr>
-            <a:r>
-              <a:rPr sz="1050" b="1">
-                <a:solidFill>
-                  <a:srgbClr val="8B949E"/>
-                </a:solidFill>
-                <a:latin typeface="Inter Tight"/>
-              </a:rPr>
-              <a:t>Год обработки потока в 150 материалов в сутки</a:t>
-            </a:r>
-          </a:p>
-        </p:txBody>
-      </p:sp>
-      <p:sp>
-        <p:nvSpPr>
-          <p:cNvPr id="7" name="Rectangle 6"/>
-          <p:cNvSpPr/>
-          <p:nvPr/>
-        </p:nvSpPr>
-        <p:spPr>
-          <a:xfrm>
-            <a:off x="1143000" y="4187952"/>
-            <a:ext cx="36868" cy="274320"/>
-          </a:xfrm>
-          <a:prstGeom prst="rect">
-            <a:avLst/>
-          </a:prstGeom>
-          <a:solidFill>
-            <a:srgbClr val="43B02A"/>
-          </a:solidFill>
-          <a:ln>
-            <a:noFill/>
-          </a:ln>
-          <a:effectLst/>
-        </p:spPr>
-        <p:style>
-          <a:lnRef idx="1">
-            <a:schemeClr val="accent1"/>
-          </a:lnRef>
-          <a:fillRef idx="3">
-            <a:schemeClr val="accent1"/>
-          </a:fillRef>
-          <a:effectRef idx="2">
-            <a:schemeClr val="accent1"/>
-          </a:effectRef>
-          <a:fontRef idx="minor">
-            <a:schemeClr val="lt1"/>
-          </a:fontRef>
-        </p:style>
-        <p:txBody>
-          <a:bodyPr rtlCol="0" anchor="ctr"/>
-          <a:lstStyle/>
-          <a:p>
-            <a:pPr algn="ctr"/>
-          </a:p>
-        </p:txBody>
-      </p:sp>
-      <p:sp>
-        <p:nvSpPr>
-          <p:cNvPr id="8" name="TextBox 7"/>
-          <p:cNvSpPr txBox="1"/>
-          <p:nvPr/>
-        </p:nvSpPr>
-        <p:spPr>
-          <a:xfrm>
-            <a:off x="1298448" y="4160520"/>
-            <a:ext cx="3657600" cy="310896"/>
-          </a:xfrm>
-          <a:prstGeom prst="rect">
-            <a:avLst/>
-          </a:prstGeom>
-          <a:noFill/>
-        </p:spPr>
-        <p:txBody>
-          <a:bodyPr wrap="square" lIns="0" rIns="0" tIns="0" bIns="0">
-            <a:spAutoFit/>
-          </a:bodyPr>
-          <a:lstStyle/>
-          <a:p>
-            <a:pPr algn="l">
-              <a:lnSpc>
-                <a:spcPct val="132000"/>
-              </a:lnSpc>
-            </a:pPr>
-            <a:r>
-              <a:rPr sz="1800" b="1">
-                <a:solidFill>
-                  <a:srgbClr val="43B02A"/>
-                </a:solidFill>
-                <a:latin typeface="Inter Tight"/>
-              </a:rPr>
-              <a:t>2 100 ₽</a:t>
-            </a:r>
-          </a:p>
-        </p:txBody>
-      </p:sp>
-      <p:sp>
-        <p:nvSpPr>
-          <p:cNvPr id="9" name="TextBox 8"/>
-          <p:cNvSpPr txBox="1"/>
-          <p:nvPr/>
-        </p:nvSpPr>
-        <p:spPr>
-          <a:xfrm>
-            <a:off x="1143000" y="4681728"/>
-            <a:ext cx="7315200" cy="256032"/>
-          </a:xfrm>
-          <a:prstGeom prst="rect">
-            <a:avLst/>
-          </a:prstGeom>
-          <a:noFill/>
-        </p:spPr>
-        <p:txBody>
-          <a:bodyPr wrap="square" lIns="0" rIns="0" tIns="0" bIns="0">
-            <a:spAutoFit/>
-          </a:bodyPr>
-          <a:lstStyle/>
-          <a:p>
-            <a:pPr algn="l">
-              <a:lnSpc>
-                <a:spcPct val="132000"/>
-              </a:lnSpc>
-            </a:pPr>
-            <a:r>
-              <a:rPr sz="1050" b="1">
-                <a:solidFill>
-                  <a:srgbClr val="8B949E"/>
-                </a:solidFill>
-                <a:latin typeface="Inter Tight"/>
-              </a:rPr>
-              <a:t>Один штраф по ФЗ № 295-ФЗ, верхняя граница</a:t>
-            </a:r>
-          </a:p>
-        </p:txBody>
-      </p:sp>
-      <p:sp>
-        <p:nvSpPr>
-          <p:cNvPr id="10" name="Rectangle 9"/>
-          <p:cNvSpPr/>
-          <p:nvPr/>
-        </p:nvSpPr>
-        <p:spPr>
-          <a:xfrm>
-            <a:off x="1143000" y="5029200"/>
-            <a:ext cx="8778240" cy="274320"/>
-          </a:xfrm>
-          <a:prstGeom prst="rect">
-            <a:avLst/>
-          </a:prstGeom>
-          <a:solidFill>
-            <a:srgbClr val="EB5757"/>
-          </a:solidFill>
-          <a:ln>
-            <a:noFill/>
-          </a:ln>
-          <a:effectLst/>
-        </p:spPr>
-        <p:style>
-          <a:lnRef idx="1">
-            <a:schemeClr val="accent1"/>
-          </a:lnRef>
-          <a:fillRef idx="3">
-            <a:schemeClr val="accent1"/>
-          </a:fillRef>
-          <a:effectRef idx="2">
-            <a:schemeClr val="accent1"/>
-          </a:effectRef>
-          <a:fontRef idx="minor">
-            <a:schemeClr val="lt1"/>
-          </a:fontRef>
-        </p:style>
-        <p:txBody>
-          <a:bodyPr rtlCol="0" anchor="ctr"/>
-          <a:lstStyle/>
-          <a:p>
-            <a:pPr algn="ctr"/>
-          </a:p>
-        </p:txBody>
-      </p:sp>
-      <p:sp>
-        <p:nvSpPr>
-          <p:cNvPr id="11" name="TextBox 10"/>
-          <p:cNvSpPr txBox="1"/>
-          <p:nvPr/>
-        </p:nvSpPr>
-        <p:spPr>
-          <a:xfrm>
-            <a:off x="1298448" y="5001768"/>
-            <a:ext cx="3657600" cy="310896"/>
-          </a:xfrm>
-          <a:prstGeom prst="rect">
-            <a:avLst/>
-          </a:prstGeom>
-          <a:noFill/>
-        </p:spPr>
-        <p:txBody>
-          <a:bodyPr wrap="square" lIns="0" rIns="0" tIns="0" bIns="0">
-            <a:spAutoFit/>
-          </a:bodyPr>
-          <a:lstStyle/>
-          <a:p>
-            <a:pPr algn="l">
-              <a:lnSpc>
-                <a:spcPct val="132000"/>
-              </a:lnSpc>
-            </a:pPr>
-            <a:r>
-              <a:rPr sz="1800" b="1">
-                <a:solidFill>
-                  <a:srgbClr val="F2F4F3"/>
-                </a:solidFill>
-                <a:latin typeface="Inter Tight"/>
-              </a:rPr>
-              <a:t>500 000 ₽</a:t>
-            </a:r>
-          </a:p>
-        </p:txBody>
-      </p:sp>
-      <p:sp>
-        <p:nvSpPr>
-          <p:cNvPr id="12" name="TextBox 11"/>
-          <p:cNvSpPr txBox="1"/>
-          <p:nvPr/>
-        </p:nvSpPr>
-        <p:spPr>
-          <a:xfrm>
-            <a:off x="731520" y="5806440"/>
-            <a:ext cx="10515600" cy="548640"/>
-          </a:xfrm>
-          <a:prstGeom prst="rect">
-            <a:avLst/>
-          </a:prstGeom>
-          <a:noFill/>
-        </p:spPr>
-        <p:txBody>
-          <a:bodyPr wrap="square" lIns="0" rIns="0" tIns="0" bIns="0">
-            <a:spAutoFit/>
-          </a:bodyPr>
-          <a:lstStyle/>
-          <a:p>
-            <a:pPr algn="l">
-              <a:lnSpc>
-                <a:spcPct val="145000"/>
-              </a:lnSpc>
-            </a:pPr>
-            <a:r>
-              <a:rPr sz="1400" b="1">
-                <a:solidFill>
-                  <a:srgbClr val="F2F4F3"/>
-                </a:solidFill>
-                <a:latin typeface="Inter Tight"/>
-              </a:rPr>
-              <a:t>Полосы в одном масштабе, зелёная не увеличена. </a:t>
-            </a:r>
-            <a:r>
-              <a:rPr sz="1400" b="0">
-                <a:solidFill>
-                  <a:srgbClr val="8B949E"/>
-                </a:solidFill>
-                <a:latin typeface="Inter Tight"/>
-              </a:rPr>
-              <a:t>Четыре копейки за материал. Одного пропуска хватает, чтобы перекрыть двести лет работы модели. Курс ЦБ на 05.09.2026.</a:t>
-            </a:r>
-          </a:p>
-        </p:txBody>
-      </p:sp>
+      <p:pic>
+        <p:nvPicPr>
+          <p:cNvPr id="7" name="Picture 6" descr="shot_feed.jpg"/>
+          <p:cNvPicPr>
+            <a:picLocks noChangeAspect="1"/>
+          </p:cNvPicPr>
+          <p:nvPr/>
+        </p:nvPicPr>
+        <p:blipFill>
+          <a:blip r:embed="rId2"/>
+          <a:stretch>
+            <a:fillRect/>
+          </a:stretch>
+        </p:blipFill>
+        <p:spPr>
+          <a:xfrm>
+            <a:off x="1569567" y="1828800"/>
+            <a:ext cx="9052560" cy="4488789"/>
+          </a:xfrm>
+          <a:prstGeom prst="rect">
+            <a:avLst/>
+          </a:prstGeom>
+        </p:spPr>
+      </p:pic>
     </p:spTree>
   </p:cSld>
   <p:clrMapOvr>
@@ -5666,7 +6907,7 @@
         </p:nvSpPr>
         <p:spPr>
           <a:xfrm>
-            <a:off x="731520" y="868680"/>
+            <a:off x="731520" y="1051560"/>
             <a:ext cx="10698480" cy="274320"/>
           </a:xfrm>
           <a:prstGeom prst="rect">
@@ -5692,7 +6933,7 @@
                 </a:solidFill>
                 <a:latin typeface="Inter Tight"/>
               </a:rPr>
-              <a:t>Насколько это точно</a:t>
+              <a:t>Сколько это стоит</a:t>
             </a:r>
           </a:p>
         </p:txBody>
@@ -5705,8 +6946,8 @@
         </p:nvSpPr>
         <p:spPr>
           <a:xfrm>
-            <a:off x="731520" y="1280160"/>
-            <a:ext cx="10515600" cy="548640"/>
+            <a:off x="731520" y="1463040"/>
+            <a:ext cx="10515600" cy="1097280"/>
           </a:xfrm>
           <a:prstGeom prst="rect">
             <a:avLst/>
@@ -5721,17 +6962,18 @@
           <a:p>
             <a:pPr algn="l">
               <a:lnSpc>
-                <a:spcPct val="132000"/>
+                <a:spcPct val="110000"/>
               </a:lnSpc>
             </a:pPr>
             <a:r>
-              <a:rPr sz="4000" b="1">
+              <a:rPr sz="4200" b="1">
                 <a:solidFill>
                   <a:srgbClr val="F2F4F3"/>
                 </a:solidFill>
                 <a:latin typeface="Inter Tight"/>
               </a:rPr>
-              <a:t>Проверено на реестре самого заказчика</a:t>
+              <a:t>Год работы модели дешевле,
+чем один пропущенный документ</a:t>
             </a:r>
           </a:p>
         </p:txBody>
@@ -5744,8 +6986,8 @@
         </p:nvSpPr>
         <p:spPr>
           <a:xfrm>
-            <a:off x="731520" y="2240280"/>
-            <a:ext cx="6858000" cy="3200400"/>
+            <a:off x="731520" y="3566160"/>
+            <a:ext cx="10698480" cy="1965960"/>
           </a:xfrm>
           <a:prstGeom prst="roundRect">
             <a:avLst>
@@ -5790,8 +7032,8 @@
         </p:nvSpPr>
         <p:spPr>
           <a:xfrm>
-            <a:off x="1115568" y="2514600"/>
-            <a:ext cx="6035040" cy="256032"/>
+            <a:off x="1143000" y="3840480"/>
+            <a:ext cx="5486400" cy="256032"/>
           </a:xfrm>
           <a:prstGeom prst="rect">
             <a:avLst/>
@@ -5816,7 +7058,7 @@
                 </a:solidFill>
                 <a:latin typeface="Inter Tight"/>
               </a:rPr>
-              <a:t>Одна клетка — одна карточка реестра</a:t>
+              <a:t>Год обработки потока в 150 материалов в сутки</a:t>
             </a:r>
           </a:p>
         </p:txBody>
@@ -5829,8 +7071,8 @@
         </p:nvSpPr>
         <p:spPr>
           <a:xfrm>
-            <a:off x="1115568" y="2926080"/>
-            <a:ext cx="329184" cy="329184"/>
+            <a:off x="1143000" y="4187952"/>
+            <a:ext cx="36868" cy="274320"/>
           </a:xfrm>
           <a:prstGeom prst="rect">
             <a:avLst/>
@@ -5867,89 +7109,79 @@
       </p:sp>
       <p:sp>
         <p:nvSpPr>
-          <p:cNvPr id="8" name="Rectangle 7"/>
-          <p:cNvSpPr/>
-          <p:nvPr/>
-        </p:nvSpPr>
-        <p:spPr>
-          <a:xfrm>
-            <a:off x="1536192" y="2926080"/>
-            <a:ext cx="329184" cy="329184"/>
-          </a:xfrm>
-          <a:prstGeom prst="rect">
-            <a:avLst/>
-          </a:prstGeom>
-          <a:solidFill>
-            <a:srgbClr val="43B02A"/>
-          </a:solidFill>
-          <a:ln>
-            <a:noFill/>
-          </a:ln>
-          <a:effectLst/>
-        </p:spPr>
-        <p:style>
-          <a:lnRef idx="1">
-            <a:schemeClr val="accent1"/>
-          </a:lnRef>
-          <a:fillRef idx="3">
-            <a:schemeClr val="accent1"/>
-          </a:fillRef>
-          <a:effectRef idx="2">
-            <a:schemeClr val="accent1"/>
-          </a:effectRef>
-          <a:fontRef idx="minor">
-            <a:schemeClr val="lt1"/>
-          </a:fontRef>
-        </p:style>
-        <p:txBody>
-          <a:bodyPr rtlCol="0" anchor="ctr"/>
-          <a:lstStyle/>
-          <a:p>
-            <a:pPr algn="ctr"/>
-          </a:p>
-        </p:txBody>
-      </p:sp>
-      <p:sp>
-        <p:nvSpPr>
-          <p:cNvPr id="9" name="Rectangle 8"/>
-          <p:cNvSpPr/>
-          <p:nvPr/>
-        </p:nvSpPr>
-        <p:spPr>
-          <a:xfrm>
-            <a:off x="1956816" y="2926080"/>
-            <a:ext cx="329184" cy="329184"/>
-          </a:xfrm>
-          <a:prstGeom prst="rect">
-            <a:avLst/>
-          </a:prstGeom>
-          <a:solidFill>
-            <a:srgbClr val="43B02A"/>
-          </a:solidFill>
-          <a:ln>
-            <a:noFill/>
-          </a:ln>
-          <a:effectLst/>
-        </p:spPr>
-        <p:style>
-          <a:lnRef idx="1">
-            <a:schemeClr val="accent1"/>
-          </a:lnRef>
-          <a:fillRef idx="3">
-            <a:schemeClr val="accent1"/>
-          </a:fillRef>
-          <a:effectRef idx="2">
-            <a:schemeClr val="accent1"/>
-          </a:effectRef>
-          <a:fontRef idx="minor">
-            <a:schemeClr val="lt1"/>
-          </a:fontRef>
-        </p:style>
-        <p:txBody>
-          <a:bodyPr rtlCol="0" anchor="ctr"/>
-          <a:lstStyle/>
-          <a:p>
-            <a:pPr algn="ctr"/>
+          <p:cNvPr id="8" name="TextBox 7"/>
+          <p:cNvSpPr txBox="1"/>
+          <p:nvPr/>
+        </p:nvSpPr>
+        <p:spPr>
+          <a:xfrm>
+            <a:off x="1298448" y="4160520"/>
+            <a:ext cx="3657600" cy="310896"/>
+          </a:xfrm>
+          <a:prstGeom prst="rect">
+            <a:avLst/>
+          </a:prstGeom>
+          <a:noFill/>
+        </p:spPr>
+        <p:txBody>
+          <a:bodyPr wrap="square" lIns="0" rIns="0" tIns="0" bIns="0">
+            <a:spAutoFit/>
+          </a:bodyPr>
+          <a:lstStyle/>
+          <a:p>
+            <a:pPr algn="l">
+              <a:lnSpc>
+                <a:spcPct val="132000"/>
+              </a:lnSpc>
+            </a:pPr>
+            <a:r>
+              <a:rPr sz="1800" b="1">
+                <a:solidFill>
+                  <a:srgbClr val="43B02A"/>
+                </a:solidFill>
+                <a:latin typeface="Inter Tight"/>
+              </a:rPr>
+              <a:t>2 100 ₽</a:t>
+            </a:r>
+          </a:p>
+        </p:txBody>
+      </p:sp>
+      <p:sp>
+        <p:nvSpPr>
+          <p:cNvPr id="9" name="TextBox 8"/>
+          <p:cNvSpPr txBox="1"/>
+          <p:nvPr/>
+        </p:nvSpPr>
+        <p:spPr>
+          <a:xfrm>
+            <a:off x="1143000" y="4681728"/>
+            <a:ext cx="7315200" cy="256032"/>
+          </a:xfrm>
+          <a:prstGeom prst="rect">
+            <a:avLst/>
+          </a:prstGeom>
+          <a:noFill/>
+        </p:spPr>
+        <p:txBody>
+          <a:bodyPr wrap="square" lIns="0" rIns="0" tIns="0" bIns="0">
+            <a:spAutoFit/>
+          </a:bodyPr>
+          <a:lstStyle/>
+          <a:p>
+            <a:pPr algn="l">
+              <a:lnSpc>
+                <a:spcPct val="132000"/>
+              </a:lnSpc>
+            </a:pPr>
+            <a:r>
+              <a:rPr sz="1050" b="1">
+                <a:solidFill>
+                  <a:srgbClr val="8B949E"/>
+                </a:solidFill>
+                <a:latin typeface="Inter Tight"/>
+              </a:rPr>
+              <a:t>Один штраф по ФЗ № 295-ФЗ, верхняя граница</a:t>
+            </a:r>
           </a:p>
         </p:txBody>
       </p:sp>
@@ -5961,1548 +7193,8 @@
         </p:nvSpPr>
         <p:spPr>
           <a:xfrm>
-            <a:off x="2377440" y="2926080"/>
-            <a:ext cx="329184" cy="329184"/>
-          </a:xfrm>
-          <a:prstGeom prst="rect">
-            <a:avLst/>
-          </a:prstGeom>
-          <a:solidFill>
-            <a:srgbClr val="43B02A"/>
-          </a:solidFill>
-          <a:ln>
-            <a:noFill/>
-          </a:ln>
-          <a:effectLst/>
-        </p:spPr>
-        <p:style>
-          <a:lnRef idx="1">
-            <a:schemeClr val="accent1"/>
-          </a:lnRef>
-          <a:fillRef idx="3">
-            <a:schemeClr val="accent1"/>
-          </a:fillRef>
-          <a:effectRef idx="2">
-            <a:schemeClr val="accent1"/>
-          </a:effectRef>
-          <a:fontRef idx="minor">
-            <a:schemeClr val="lt1"/>
-          </a:fontRef>
-        </p:style>
-        <p:txBody>
-          <a:bodyPr rtlCol="0" anchor="ctr"/>
-          <a:lstStyle/>
-          <a:p>
-            <a:pPr algn="ctr"/>
-          </a:p>
-        </p:txBody>
-      </p:sp>
-      <p:sp>
-        <p:nvSpPr>
-          <p:cNvPr id="11" name="Rectangle 10"/>
-          <p:cNvSpPr/>
-          <p:nvPr/>
-        </p:nvSpPr>
-        <p:spPr>
-          <a:xfrm>
-            <a:off x="2798064" y="2926080"/>
-            <a:ext cx="329184" cy="329184"/>
-          </a:xfrm>
-          <a:prstGeom prst="rect">
-            <a:avLst/>
-          </a:prstGeom>
-          <a:solidFill>
-            <a:srgbClr val="43B02A"/>
-          </a:solidFill>
-          <a:ln>
-            <a:noFill/>
-          </a:ln>
-          <a:effectLst/>
-        </p:spPr>
-        <p:style>
-          <a:lnRef idx="1">
-            <a:schemeClr val="accent1"/>
-          </a:lnRef>
-          <a:fillRef idx="3">
-            <a:schemeClr val="accent1"/>
-          </a:fillRef>
-          <a:effectRef idx="2">
-            <a:schemeClr val="accent1"/>
-          </a:effectRef>
-          <a:fontRef idx="minor">
-            <a:schemeClr val="lt1"/>
-          </a:fontRef>
-        </p:style>
-        <p:txBody>
-          <a:bodyPr rtlCol="0" anchor="ctr"/>
-          <a:lstStyle/>
-          <a:p>
-            <a:pPr algn="ctr"/>
-          </a:p>
-        </p:txBody>
-      </p:sp>
-      <p:sp>
-        <p:nvSpPr>
-          <p:cNvPr id="12" name="Rectangle 11"/>
-          <p:cNvSpPr/>
-          <p:nvPr/>
-        </p:nvSpPr>
-        <p:spPr>
-          <a:xfrm>
-            <a:off x="3218688" y="2926080"/>
-            <a:ext cx="329184" cy="329184"/>
-          </a:xfrm>
-          <a:prstGeom prst="rect">
-            <a:avLst/>
-          </a:prstGeom>
-          <a:solidFill>
-            <a:srgbClr val="43B02A"/>
-          </a:solidFill>
-          <a:ln>
-            <a:noFill/>
-          </a:ln>
-          <a:effectLst/>
-        </p:spPr>
-        <p:style>
-          <a:lnRef idx="1">
-            <a:schemeClr val="accent1"/>
-          </a:lnRef>
-          <a:fillRef idx="3">
-            <a:schemeClr val="accent1"/>
-          </a:fillRef>
-          <a:effectRef idx="2">
-            <a:schemeClr val="accent1"/>
-          </a:effectRef>
-          <a:fontRef idx="minor">
-            <a:schemeClr val="lt1"/>
-          </a:fontRef>
-        </p:style>
-        <p:txBody>
-          <a:bodyPr rtlCol="0" anchor="ctr"/>
-          <a:lstStyle/>
-          <a:p>
-            <a:pPr algn="ctr"/>
-          </a:p>
-        </p:txBody>
-      </p:sp>
-      <p:sp>
-        <p:nvSpPr>
-          <p:cNvPr id="13" name="Rectangle 12"/>
-          <p:cNvSpPr/>
-          <p:nvPr/>
-        </p:nvSpPr>
-        <p:spPr>
-          <a:xfrm>
-            <a:off x="3639312" y="2926080"/>
-            <a:ext cx="329184" cy="329184"/>
-          </a:xfrm>
-          <a:prstGeom prst="rect">
-            <a:avLst/>
-          </a:prstGeom>
-          <a:solidFill>
-            <a:srgbClr val="43B02A"/>
-          </a:solidFill>
-          <a:ln>
-            <a:noFill/>
-          </a:ln>
-          <a:effectLst/>
-        </p:spPr>
-        <p:style>
-          <a:lnRef idx="1">
-            <a:schemeClr val="accent1"/>
-          </a:lnRef>
-          <a:fillRef idx="3">
-            <a:schemeClr val="accent1"/>
-          </a:fillRef>
-          <a:effectRef idx="2">
-            <a:schemeClr val="accent1"/>
-          </a:effectRef>
-          <a:fontRef idx="minor">
-            <a:schemeClr val="lt1"/>
-          </a:fontRef>
-        </p:style>
-        <p:txBody>
-          <a:bodyPr rtlCol="0" anchor="ctr"/>
-          <a:lstStyle/>
-          <a:p>
-            <a:pPr algn="ctr"/>
-          </a:p>
-        </p:txBody>
-      </p:sp>
-      <p:sp>
-        <p:nvSpPr>
-          <p:cNvPr id="14" name="Rectangle 13"/>
-          <p:cNvSpPr/>
-          <p:nvPr/>
-        </p:nvSpPr>
-        <p:spPr>
-          <a:xfrm>
-            <a:off x="4059936" y="2926080"/>
-            <a:ext cx="329184" cy="329184"/>
-          </a:xfrm>
-          <a:prstGeom prst="rect">
-            <a:avLst/>
-          </a:prstGeom>
-          <a:solidFill>
-            <a:srgbClr val="43B02A"/>
-          </a:solidFill>
-          <a:ln>
-            <a:noFill/>
-          </a:ln>
-          <a:effectLst/>
-        </p:spPr>
-        <p:style>
-          <a:lnRef idx="1">
-            <a:schemeClr val="accent1"/>
-          </a:lnRef>
-          <a:fillRef idx="3">
-            <a:schemeClr val="accent1"/>
-          </a:fillRef>
-          <a:effectRef idx="2">
-            <a:schemeClr val="accent1"/>
-          </a:effectRef>
-          <a:fontRef idx="minor">
-            <a:schemeClr val="lt1"/>
-          </a:fontRef>
-        </p:style>
-        <p:txBody>
-          <a:bodyPr rtlCol="0" anchor="ctr"/>
-          <a:lstStyle/>
-          <a:p>
-            <a:pPr algn="ctr"/>
-          </a:p>
-        </p:txBody>
-      </p:sp>
-      <p:sp>
-        <p:nvSpPr>
-          <p:cNvPr id="15" name="Rectangle 14"/>
-          <p:cNvSpPr/>
-          <p:nvPr/>
-        </p:nvSpPr>
-        <p:spPr>
-          <a:xfrm>
-            <a:off x="4480560" y="2926080"/>
-            <a:ext cx="329184" cy="329184"/>
-          </a:xfrm>
-          <a:prstGeom prst="rect">
-            <a:avLst/>
-          </a:prstGeom>
-          <a:solidFill>
-            <a:srgbClr val="43B02A"/>
-          </a:solidFill>
-          <a:ln>
-            <a:noFill/>
-          </a:ln>
-          <a:effectLst/>
-        </p:spPr>
-        <p:style>
-          <a:lnRef idx="1">
-            <a:schemeClr val="accent1"/>
-          </a:lnRef>
-          <a:fillRef idx="3">
-            <a:schemeClr val="accent1"/>
-          </a:fillRef>
-          <a:effectRef idx="2">
-            <a:schemeClr val="accent1"/>
-          </a:effectRef>
-          <a:fontRef idx="minor">
-            <a:schemeClr val="lt1"/>
-          </a:fontRef>
-        </p:style>
-        <p:txBody>
-          <a:bodyPr rtlCol="0" anchor="ctr"/>
-          <a:lstStyle/>
-          <a:p>
-            <a:pPr algn="ctr"/>
-          </a:p>
-        </p:txBody>
-      </p:sp>
-      <p:sp>
-        <p:nvSpPr>
-          <p:cNvPr id="16" name="Rectangle 15"/>
-          <p:cNvSpPr/>
-          <p:nvPr/>
-        </p:nvSpPr>
-        <p:spPr>
-          <a:xfrm>
-            <a:off x="4901184" y="2926080"/>
-            <a:ext cx="329184" cy="329184"/>
-          </a:xfrm>
-          <a:prstGeom prst="rect">
-            <a:avLst/>
-          </a:prstGeom>
-          <a:solidFill>
-            <a:srgbClr val="43B02A"/>
-          </a:solidFill>
-          <a:ln>
-            <a:noFill/>
-          </a:ln>
-          <a:effectLst/>
-        </p:spPr>
-        <p:style>
-          <a:lnRef idx="1">
-            <a:schemeClr val="accent1"/>
-          </a:lnRef>
-          <a:fillRef idx="3">
-            <a:schemeClr val="accent1"/>
-          </a:fillRef>
-          <a:effectRef idx="2">
-            <a:schemeClr val="accent1"/>
-          </a:effectRef>
-          <a:fontRef idx="minor">
-            <a:schemeClr val="lt1"/>
-          </a:fontRef>
-        </p:style>
-        <p:txBody>
-          <a:bodyPr rtlCol="0" anchor="ctr"/>
-          <a:lstStyle/>
-          <a:p>
-            <a:pPr algn="ctr"/>
-          </a:p>
-        </p:txBody>
-      </p:sp>
-      <p:sp>
-        <p:nvSpPr>
-          <p:cNvPr id="17" name="Rectangle 16"/>
-          <p:cNvSpPr/>
-          <p:nvPr/>
-        </p:nvSpPr>
-        <p:spPr>
-          <a:xfrm>
-            <a:off x="5321808" y="2926080"/>
-            <a:ext cx="329184" cy="329184"/>
-          </a:xfrm>
-          <a:prstGeom prst="rect">
-            <a:avLst/>
-          </a:prstGeom>
-          <a:solidFill>
-            <a:srgbClr val="43B02A"/>
-          </a:solidFill>
-          <a:ln>
-            <a:noFill/>
-          </a:ln>
-          <a:effectLst/>
-        </p:spPr>
-        <p:style>
-          <a:lnRef idx="1">
-            <a:schemeClr val="accent1"/>
-          </a:lnRef>
-          <a:fillRef idx="3">
-            <a:schemeClr val="accent1"/>
-          </a:fillRef>
-          <a:effectRef idx="2">
-            <a:schemeClr val="accent1"/>
-          </a:effectRef>
-          <a:fontRef idx="minor">
-            <a:schemeClr val="lt1"/>
-          </a:fontRef>
-        </p:style>
-        <p:txBody>
-          <a:bodyPr rtlCol="0" anchor="ctr"/>
-          <a:lstStyle/>
-          <a:p>
-            <a:pPr algn="ctr"/>
-          </a:p>
-        </p:txBody>
-      </p:sp>
-      <p:sp>
-        <p:nvSpPr>
-          <p:cNvPr id="18" name="Rectangle 17"/>
-          <p:cNvSpPr/>
-          <p:nvPr/>
-        </p:nvSpPr>
-        <p:spPr>
-          <a:xfrm>
-            <a:off x="5742432" y="2926080"/>
-            <a:ext cx="329184" cy="329184"/>
-          </a:xfrm>
-          <a:prstGeom prst="rect">
-            <a:avLst/>
-          </a:prstGeom>
-          <a:solidFill>
-            <a:srgbClr val="43B02A"/>
-          </a:solidFill>
-          <a:ln>
-            <a:noFill/>
-          </a:ln>
-          <a:effectLst/>
-        </p:spPr>
-        <p:style>
-          <a:lnRef idx="1">
-            <a:schemeClr val="accent1"/>
-          </a:lnRef>
-          <a:fillRef idx="3">
-            <a:schemeClr val="accent1"/>
-          </a:fillRef>
-          <a:effectRef idx="2">
-            <a:schemeClr val="accent1"/>
-          </a:effectRef>
-          <a:fontRef idx="minor">
-            <a:schemeClr val="lt1"/>
-          </a:fontRef>
-        </p:style>
-        <p:txBody>
-          <a:bodyPr rtlCol="0" anchor="ctr"/>
-          <a:lstStyle/>
-          <a:p>
-            <a:pPr algn="ctr"/>
-          </a:p>
-        </p:txBody>
-      </p:sp>
-      <p:sp>
-        <p:nvSpPr>
-          <p:cNvPr id="19" name="Rectangle 18"/>
-          <p:cNvSpPr/>
-          <p:nvPr/>
-        </p:nvSpPr>
-        <p:spPr>
-          <a:xfrm>
-            <a:off x="6163056" y="2926080"/>
-            <a:ext cx="329184" cy="329184"/>
-          </a:xfrm>
-          <a:prstGeom prst="rect">
-            <a:avLst/>
-          </a:prstGeom>
-          <a:solidFill>
-            <a:srgbClr val="43B02A"/>
-          </a:solidFill>
-          <a:ln>
-            <a:noFill/>
-          </a:ln>
-          <a:effectLst/>
-        </p:spPr>
-        <p:style>
-          <a:lnRef idx="1">
-            <a:schemeClr val="accent1"/>
-          </a:lnRef>
-          <a:fillRef idx="3">
-            <a:schemeClr val="accent1"/>
-          </a:fillRef>
-          <a:effectRef idx="2">
-            <a:schemeClr val="accent1"/>
-          </a:effectRef>
-          <a:fontRef idx="minor">
-            <a:schemeClr val="lt1"/>
-          </a:fontRef>
-        </p:style>
-        <p:txBody>
-          <a:bodyPr rtlCol="0" anchor="ctr"/>
-          <a:lstStyle/>
-          <a:p>
-            <a:pPr algn="ctr"/>
-          </a:p>
-        </p:txBody>
-      </p:sp>
-      <p:sp>
-        <p:nvSpPr>
-          <p:cNvPr id="20" name="Rectangle 19"/>
-          <p:cNvSpPr/>
-          <p:nvPr/>
-        </p:nvSpPr>
-        <p:spPr>
-          <a:xfrm>
-            <a:off x="6583680" y="2926080"/>
-            <a:ext cx="329184" cy="329184"/>
-          </a:xfrm>
-          <a:prstGeom prst="rect">
-            <a:avLst/>
-          </a:prstGeom>
-          <a:solidFill>
-            <a:srgbClr val="43B02A"/>
-          </a:solidFill>
-          <a:ln>
-            <a:noFill/>
-          </a:ln>
-          <a:effectLst/>
-        </p:spPr>
-        <p:style>
-          <a:lnRef idx="1">
-            <a:schemeClr val="accent1"/>
-          </a:lnRef>
-          <a:fillRef idx="3">
-            <a:schemeClr val="accent1"/>
-          </a:fillRef>
-          <a:effectRef idx="2">
-            <a:schemeClr val="accent1"/>
-          </a:effectRef>
-          <a:fontRef idx="minor">
-            <a:schemeClr val="lt1"/>
-          </a:fontRef>
-        </p:style>
-        <p:txBody>
-          <a:bodyPr rtlCol="0" anchor="ctr"/>
-          <a:lstStyle/>
-          <a:p>
-            <a:pPr algn="ctr"/>
-          </a:p>
-        </p:txBody>
-      </p:sp>
-      <p:sp>
-        <p:nvSpPr>
-          <p:cNvPr id="21" name="Rectangle 20"/>
-          <p:cNvSpPr/>
-          <p:nvPr/>
-        </p:nvSpPr>
-        <p:spPr>
-          <a:xfrm>
-            <a:off x="1115568" y="3346704"/>
-            <a:ext cx="329184" cy="329184"/>
-          </a:xfrm>
-          <a:prstGeom prst="rect">
-            <a:avLst/>
-          </a:prstGeom>
-          <a:solidFill>
-            <a:srgbClr val="43B02A"/>
-          </a:solidFill>
-          <a:ln>
-            <a:noFill/>
-          </a:ln>
-          <a:effectLst/>
-        </p:spPr>
-        <p:style>
-          <a:lnRef idx="1">
-            <a:schemeClr val="accent1"/>
-          </a:lnRef>
-          <a:fillRef idx="3">
-            <a:schemeClr val="accent1"/>
-          </a:fillRef>
-          <a:effectRef idx="2">
-            <a:schemeClr val="accent1"/>
-          </a:effectRef>
-          <a:fontRef idx="minor">
-            <a:schemeClr val="lt1"/>
-          </a:fontRef>
-        </p:style>
-        <p:txBody>
-          <a:bodyPr rtlCol="0" anchor="ctr"/>
-          <a:lstStyle/>
-          <a:p>
-            <a:pPr algn="ctr"/>
-          </a:p>
-        </p:txBody>
-      </p:sp>
-      <p:sp>
-        <p:nvSpPr>
-          <p:cNvPr id="22" name="Rectangle 21"/>
-          <p:cNvSpPr/>
-          <p:nvPr/>
-        </p:nvSpPr>
-        <p:spPr>
-          <a:xfrm>
-            <a:off x="1536192" y="3346704"/>
-            <a:ext cx="329184" cy="329184"/>
-          </a:xfrm>
-          <a:prstGeom prst="rect">
-            <a:avLst/>
-          </a:prstGeom>
-          <a:solidFill>
-            <a:srgbClr val="43B02A"/>
-          </a:solidFill>
-          <a:ln>
-            <a:noFill/>
-          </a:ln>
-          <a:effectLst/>
-        </p:spPr>
-        <p:style>
-          <a:lnRef idx="1">
-            <a:schemeClr val="accent1"/>
-          </a:lnRef>
-          <a:fillRef idx="3">
-            <a:schemeClr val="accent1"/>
-          </a:fillRef>
-          <a:effectRef idx="2">
-            <a:schemeClr val="accent1"/>
-          </a:effectRef>
-          <a:fontRef idx="minor">
-            <a:schemeClr val="lt1"/>
-          </a:fontRef>
-        </p:style>
-        <p:txBody>
-          <a:bodyPr rtlCol="0" anchor="ctr"/>
-          <a:lstStyle/>
-          <a:p>
-            <a:pPr algn="ctr"/>
-          </a:p>
-        </p:txBody>
-      </p:sp>
-      <p:sp>
-        <p:nvSpPr>
-          <p:cNvPr id="23" name="Rectangle 22"/>
-          <p:cNvSpPr/>
-          <p:nvPr/>
-        </p:nvSpPr>
-        <p:spPr>
-          <a:xfrm>
-            <a:off x="1956816" y="3346704"/>
-            <a:ext cx="329184" cy="329184"/>
-          </a:xfrm>
-          <a:prstGeom prst="rect">
-            <a:avLst/>
-          </a:prstGeom>
-          <a:solidFill>
-            <a:srgbClr val="43B02A"/>
-          </a:solidFill>
-          <a:ln>
-            <a:noFill/>
-          </a:ln>
-          <a:effectLst/>
-        </p:spPr>
-        <p:style>
-          <a:lnRef idx="1">
-            <a:schemeClr val="accent1"/>
-          </a:lnRef>
-          <a:fillRef idx="3">
-            <a:schemeClr val="accent1"/>
-          </a:fillRef>
-          <a:effectRef idx="2">
-            <a:schemeClr val="accent1"/>
-          </a:effectRef>
-          <a:fontRef idx="minor">
-            <a:schemeClr val="lt1"/>
-          </a:fontRef>
-        </p:style>
-        <p:txBody>
-          <a:bodyPr rtlCol="0" anchor="ctr"/>
-          <a:lstStyle/>
-          <a:p>
-            <a:pPr algn="ctr"/>
-          </a:p>
-        </p:txBody>
-      </p:sp>
-      <p:sp>
-        <p:nvSpPr>
-          <p:cNvPr id="24" name="Rectangle 23"/>
-          <p:cNvSpPr/>
-          <p:nvPr/>
-        </p:nvSpPr>
-        <p:spPr>
-          <a:xfrm>
-            <a:off x="2377440" y="3346704"/>
-            <a:ext cx="329184" cy="329184"/>
-          </a:xfrm>
-          <a:prstGeom prst="rect">
-            <a:avLst/>
-          </a:prstGeom>
-          <a:solidFill>
-            <a:srgbClr val="43B02A"/>
-          </a:solidFill>
-          <a:ln>
-            <a:noFill/>
-          </a:ln>
-          <a:effectLst/>
-        </p:spPr>
-        <p:style>
-          <a:lnRef idx="1">
-            <a:schemeClr val="accent1"/>
-          </a:lnRef>
-          <a:fillRef idx="3">
-            <a:schemeClr val="accent1"/>
-          </a:fillRef>
-          <a:effectRef idx="2">
-            <a:schemeClr val="accent1"/>
-          </a:effectRef>
-          <a:fontRef idx="minor">
-            <a:schemeClr val="lt1"/>
-          </a:fontRef>
-        </p:style>
-        <p:txBody>
-          <a:bodyPr rtlCol="0" anchor="ctr"/>
-          <a:lstStyle/>
-          <a:p>
-            <a:pPr algn="ctr"/>
-          </a:p>
-        </p:txBody>
-      </p:sp>
-      <p:sp>
-        <p:nvSpPr>
-          <p:cNvPr id="25" name="Rectangle 24"/>
-          <p:cNvSpPr/>
-          <p:nvPr/>
-        </p:nvSpPr>
-        <p:spPr>
-          <a:xfrm>
-            <a:off x="2798064" y="3346704"/>
-            <a:ext cx="329184" cy="329184"/>
-          </a:xfrm>
-          <a:prstGeom prst="rect">
-            <a:avLst/>
-          </a:prstGeom>
-          <a:solidFill>
-            <a:srgbClr val="A8DC98"/>
-          </a:solidFill>
-          <a:ln>
-            <a:noFill/>
-          </a:ln>
-          <a:effectLst/>
-        </p:spPr>
-        <p:style>
-          <a:lnRef idx="1">
-            <a:schemeClr val="accent1"/>
-          </a:lnRef>
-          <a:fillRef idx="3">
-            <a:schemeClr val="accent1"/>
-          </a:fillRef>
-          <a:effectRef idx="2">
-            <a:schemeClr val="accent1"/>
-          </a:effectRef>
-          <a:fontRef idx="minor">
-            <a:schemeClr val="lt1"/>
-          </a:fontRef>
-        </p:style>
-        <p:txBody>
-          <a:bodyPr rtlCol="0" anchor="ctr"/>
-          <a:lstStyle/>
-          <a:p>
-            <a:pPr algn="ctr"/>
-          </a:p>
-        </p:txBody>
-      </p:sp>
-      <p:sp>
-        <p:nvSpPr>
-          <p:cNvPr id="26" name="Rectangle 25"/>
-          <p:cNvSpPr/>
-          <p:nvPr/>
-        </p:nvSpPr>
-        <p:spPr>
-          <a:xfrm>
-            <a:off x="3218688" y="3346704"/>
-            <a:ext cx="329184" cy="329184"/>
-          </a:xfrm>
-          <a:prstGeom prst="rect">
-            <a:avLst/>
-          </a:prstGeom>
-          <a:solidFill>
-            <a:srgbClr val="A8DC98"/>
-          </a:solidFill>
-          <a:ln>
-            <a:noFill/>
-          </a:ln>
-          <a:effectLst/>
-        </p:spPr>
-        <p:style>
-          <a:lnRef idx="1">
-            <a:schemeClr val="accent1"/>
-          </a:lnRef>
-          <a:fillRef idx="3">
-            <a:schemeClr val="accent1"/>
-          </a:fillRef>
-          <a:effectRef idx="2">
-            <a:schemeClr val="accent1"/>
-          </a:effectRef>
-          <a:fontRef idx="minor">
-            <a:schemeClr val="lt1"/>
-          </a:fontRef>
-        </p:style>
-        <p:txBody>
-          <a:bodyPr rtlCol="0" anchor="ctr"/>
-          <a:lstStyle/>
-          <a:p>
-            <a:pPr algn="ctr"/>
-          </a:p>
-        </p:txBody>
-      </p:sp>
-      <p:sp>
-        <p:nvSpPr>
-          <p:cNvPr id="27" name="Rectangle 26"/>
-          <p:cNvSpPr/>
-          <p:nvPr/>
-        </p:nvSpPr>
-        <p:spPr>
-          <a:xfrm>
-            <a:off x="3639312" y="3346704"/>
-            <a:ext cx="329184" cy="329184"/>
-          </a:xfrm>
-          <a:prstGeom prst="rect">
-            <a:avLst/>
-          </a:prstGeom>
-          <a:solidFill>
-            <a:srgbClr val="A8DC98"/>
-          </a:solidFill>
-          <a:ln>
-            <a:noFill/>
-          </a:ln>
-          <a:effectLst/>
-        </p:spPr>
-        <p:style>
-          <a:lnRef idx="1">
-            <a:schemeClr val="accent1"/>
-          </a:lnRef>
-          <a:fillRef idx="3">
-            <a:schemeClr val="accent1"/>
-          </a:fillRef>
-          <a:effectRef idx="2">
-            <a:schemeClr val="accent1"/>
-          </a:effectRef>
-          <a:fontRef idx="minor">
-            <a:schemeClr val="lt1"/>
-          </a:fontRef>
-        </p:style>
-        <p:txBody>
-          <a:bodyPr rtlCol="0" anchor="ctr"/>
-          <a:lstStyle/>
-          <a:p>
-            <a:pPr algn="ctr"/>
-          </a:p>
-        </p:txBody>
-      </p:sp>
-      <p:sp>
-        <p:nvSpPr>
-          <p:cNvPr id="28" name="Rectangle 27"/>
-          <p:cNvSpPr/>
-          <p:nvPr/>
-        </p:nvSpPr>
-        <p:spPr>
-          <a:xfrm>
-            <a:off x="4059936" y="3346704"/>
-            <a:ext cx="329184" cy="329184"/>
-          </a:xfrm>
-          <a:prstGeom prst="rect">
-            <a:avLst/>
-          </a:prstGeom>
-          <a:solidFill>
-            <a:srgbClr val="A8DC98"/>
-          </a:solidFill>
-          <a:ln>
-            <a:noFill/>
-          </a:ln>
-          <a:effectLst/>
-        </p:spPr>
-        <p:style>
-          <a:lnRef idx="1">
-            <a:schemeClr val="accent1"/>
-          </a:lnRef>
-          <a:fillRef idx="3">
-            <a:schemeClr val="accent1"/>
-          </a:fillRef>
-          <a:effectRef idx="2">
-            <a:schemeClr val="accent1"/>
-          </a:effectRef>
-          <a:fontRef idx="minor">
-            <a:schemeClr val="lt1"/>
-          </a:fontRef>
-        </p:style>
-        <p:txBody>
-          <a:bodyPr rtlCol="0" anchor="ctr"/>
-          <a:lstStyle/>
-          <a:p>
-            <a:pPr algn="ctr"/>
-          </a:p>
-        </p:txBody>
-      </p:sp>
-      <p:sp>
-        <p:nvSpPr>
-          <p:cNvPr id="29" name="Rectangle 28"/>
-          <p:cNvSpPr/>
-          <p:nvPr/>
-        </p:nvSpPr>
-        <p:spPr>
-          <a:xfrm>
-            <a:off x="4480560" y="3346704"/>
-            <a:ext cx="329184" cy="329184"/>
-          </a:xfrm>
-          <a:prstGeom prst="rect">
-            <a:avLst/>
-          </a:prstGeom>
-          <a:solidFill>
-            <a:srgbClr val="A8DC98"/>
-          </a:solidFill>
-          <a:ln>
-            <a:noFill/>
-          </a:ln>
-          <a:effectLst/>
-        </p:spPr>
-        <p:style>
-          <a:lnRef idx="1">
-            <a:schemeClr val="accent1"/>
-          </a:lnRef>
-          <a:fillRef idx="3">
-            <a:schemeClr val="accent1"/>
-          </a:fillRef>
-          <a:effectRef idx="2">
-            <a:schemeClr val="accent1"/>
-          </a:effectRef>
-          <a:fontRef idx="minor">
-            <a:schemeClr val="lt1"/>
-          </a:fontRef>
-        </p:style>
-        <p:txBody>
-          <a:bodyPr rtlCol="0" anchor="ctr"/>
-          <a:lstStyle/>
-          <a:p>
-            <a:pPr algn="ctr"/>
-          </a:p>
-        </p:txBody>
-      </p:sp>
-      <p:sp>
-        <p:nvSpPr>
-          <p:cNvPr id="30" name="Rectangle 29"/>
-          <p:cNvSpPr/>
-          <p:nvPr/>
-        </p:nvSpPr>
-        <p:spPr>
-          <a:xfrm>
-            <a:off x="4901184" y="3346704"/>
-            <a:ext cx="329184" cy="329184"/>
-          </a:xfrm>
-          <a:prstGeom prst="rect">
-            <a:avLst/>
-          </a:prstGeom>
-          <a:solidFill>
-            <a:srgbClr val="A8DC98"/>
-          </a:solidFill>
-          <a:ln>
-            <a:noFill/>
-          </a:ln>
-          <a:effectLst/>
-        </p:spPr>
-        <p:style>
-          <a:lnRef idx="1">
-            <a:schemeClr val="accent1"/>
-          </a:lnRef>
-          <a:fillRef idx="3">
-            <a:schemeClr val="accent1"/>
-          </a:fillRef>
-          <a:effectRef idx="2">
-            <a:schemeClr val="accent1"/>
-          </a:effectRef>
-          <a:fontRef idx="minor">
-            <a:schemeClr val="lt1"/>
-          </a:fontRef>
-        </p:style>
-        <p:txBody>
-          <a:bodyPr rtlCol="0" anchor="ctr"/>
-          <a:lstStyle/>
-          <a:p>
-            <a:pPr algn="ctr"/>
-          </a:p>
-        </p:txBody>
-      </p:sp>
-      <p:sp>
-        <p:nvSpPr>
-          <p:cNvPr id="31" name="Rectangle 30"/>
-          <p:cNvSpPr/>
-          <p:nvPr/>
-        </p:nvSpPr>
-        <p:spPr>
-          <a:xfrm>
-            <a:off x="5321808" y="3346704"/>
-            <a:ext cx="329184" cy="329184"/>
-          </a:xfrm>
-          <a:prstGeom prst="rect">
-            <a:avLst/>
-          </a:prstGeom>
-          <a:solidFill>
-            <a:srgbClr val="A8DC98"/>
-          </a:solidFill>
-          <a:ln>
-            <a:noFill/>
-          </a:ln>
-          <a:effectLst/>
-        </p:spPr>
-        <p:style>
-          <a:lnRef idx="1">
-            <a:schemeClr val="accent1"/>
-          </a:lnRef>
-          <a:fillRef idx="3">
-            <a:schemeClr val="accent1"/>
-          </a:fillRef>
-          <a:effectRef idx="2">
-            <a:schemeClr val="accent1"/>
-          </a:effectRef>
-          <a:fontRef idx="minor">
-            <a:schemeClr val="lt1"/>
-          </a:fontRef>
-        </p:style>
-        <p:txBody>
-          <a:bodyPr rtlCol="0" anchor="ctr"/>
-          <a:lstStyle/>
-          <a:p>
-            <a:pPr algn="ctr"/>
-          </a:p>
-        </p:txBody>
-      </p:sp>
-      <p:sp>
-        <p:nvSpPr>
-          <p:cNvPr id="32" name="Rectangle 31"/>
-          <p:cNvSpPr/>
-          <p:nvPr/>
-        </p:nvSpPr>
-        <p:spPr>
-          <a:xfrm>
-            <a:off x="5742432" y="3346704"/>
-            <a:ext cx="329184" cy="329184"/>
-          </a:xfrm>
-          <a:prstGeom prst="rect">
-            <a:avLst/>
-          </a:prstGeom>
-          <a:solidFill>
-            <a:srgbClr val="A8DC98"/>
-          </a:solidFill>
-          <a:ln>
-            <a:noFill/>
-          </a:ln>
-          <a:effectLst/>
-        </p:spPr>
-        <p:style>
-          <a:lnRef idx="1">
-            <a:schemeClr val="accent1"/>
-          </a:lnRef>
-          <a:fillRef idx="3">
-            <a:schemeClr val="accent1"/>
-          </a:fillRef>
-          <a:effectRef idx="2">
-            <a:schemeClr val="accent1"/>
-          </a:effectRef>
-          <a:fontRef idx="minor">
-            <a:schemeClr val="lt1"/>
-          </a:fontRef>
-        </p:style>
-        <p:txBody>
-          <a:bodyPr rtlCol="0" anchor="ctr"/>
-          <a:lstStyle/>
-          <a:p>
-            <a:pPr algn="ctr"/>
-          </a:p>
-        </p:txBody>
-      </p:sp>
-      <p:sp>
-        <p:nvSpPr>
-          <p:cNvPr id="33" name="Rectangle 32"/>
-          <p:cNvSpPr/>
-          <p:nvPr/>
-        </p:nvSpPr>
-        <p:spPr>
-          <a:xfrm>
-            <a:off x="6163056" y="3346704"/>
-            <a:ext cx="329184" cy="329184"/>
-          </a:xfrm>
-          <a:prstGeom prst="rect">
-            <a:avLst/>
-          </a:prstGeom>
-          <a:solidFill>
-            <a:srgbClr val="A8DC98"/>
-          </a:solidFill>
-          <a:ln>
-            <a:noFill/>
-          </a:ln>
-          <a:effectLst/>
-        </p:spPr>
-        <p:style>
-          <a:lnRef idx="1">
-            <a:schemeClr val="accent1"/>
-          </a:lnRef>
-          <a:fillRef idx="3">
-            <a:schemeClr val="accent1"/>
-          </a:fillRef>
-          <a:effectRef idx="2">
-            <a:schemeClr val="accent1"/>
-          </a:effectRef>
-          <a:fontRef idx="minor">
-            <a:schemeClr val="lt1"/>
-          </a:fontRef>
-        </p:style>
-        <p:txBody>
-          <a:bodyPr rtlCol="0" anchor="ctr"/>
-          <a:lstStyle/>
-          <a:p>
-            <a:pPr algn="ctr"/>
-          </a:p>
-        </p:txBody>
-      </p:sp>
-      <p:sp>
-        <p:nvSpPr>
-          <p:cNvPr id="34" name="Rectangle 33"/>
-          <p:cNvSpPr/>
-          <p:nvPr/>
-        </p:nvSpPr>
-        <p:spPr>
-          <a:xfrm>
-            <a:off x="6583680" y="3346704"/>
-            <a:ext cx="329184" cy="329184"/>
-          </a:xfrm>
-          <a:prstGeom prst="rect">
-            <a:avLst/>
-          </a:prstGeom>
-          <a:solidFill>
-            <a:srgbClr val="A8DC98"/>
-          </a:solidFill>
-          <a:ln>
-            <a:noFill/>
-          </a:ln>
-          <a:effectLst/>
-        </p:spPr>
-        <p:style>
-          <a:lnRef idx="1">
-            <a:schemeClr val="accent1"/>
-          </a:lnRef>
-          <a:fillRef idx="3">
-            <a:schemeClr val="accent1"/>
-          </a:fillRef>
-          <a:effectRef idx="2">
-            <a:schemeClr val="accent1"/>
-          </a:effectRef>
-          <a:fontRef idx="minor">
-            <a:schemeClr val="lt1"/>
-          </a:fontRef>
-        </p:style>
-        <p:txBody>
-          <a:bodyPr rtlCol="0" anchor="ctr"/>
-          <a:lstStyle/>
-          <a:p>
-            <a:pPr algn="ctr"/>
-          </a:p>
-        </p:txBody>
-      </p:sp>
-      <p:sp>
-        <p:nvSpPr>
-          <p:cNvPr id="35" name="Rectangle 34"/>
-          <p:cNvSpPr/>
-          <p:nvPr/>
-        </p:nvSpPr>
-        <p:spPr>
-          <a:xfrm>
-            <a:off x="1115568" y="3767328"/>
-            <a:ext cx="329184" cy="329184"/>
-          </a:xfrm>
-          <a:prstGeom prst="rect">
-            <a:avLst/>
-          </a:prstGeom>
-          <a:solidFill>
-            <a:srgbClr val="A8DC98"/>
-          </a:solidFill>
-          <a:ln>
-            <a:noFill/>
-          </a:ln>
-          <a:effectLst/>
-        </p:spPr>
-        <p:style>
-          <a:lnRef idx="1">
-            <a:schemeClr val="accent1"/>
-          </a:lnRef>
-          <a:fillRef idx="3">
-            <a:schemeClr val="accent1"/>
-          </a:fillRef>
-          <a:effectRef idx="2">
-            <a:schemeClr val="accent1"/>
-          </a:effectRef>
-          <a:fontRef idx="minor">
-            <a:schemeClr val="lt1"/>
-          </a:fontRef>
-        </p:style>
-        <p:txBody>
-          <a:bodyPr rtlCol="0" anchor="ctr"/>
-          <a:lstStyle/>
-          <a:p>
-            <a:pPr algn="ctr"/>
-          </a:p>
-        </p:txBody>
-      </p:sp>
-      <p:sp>
-        <p:nvSpPr>
-          <p:cNvPr id="36" name="Rectangle 35"/>
-          <p:cNvSpPr/>
-          <p:nvPr/>
-        </p:nvSpPr>
-        <p:spPr>
-          <a:xfrm>
-            <a:off x="1536192" y="3767328"/>
-            <a:ext cx="329184" cy="329184"/>
-          </a:xfrm>
-          <a:prstGeom prst="rect">
-            <a:avLst/>
-          </a:prstGeom>
-          <a:solidFill>
-            <a:srgbClr val="A8DC98"/>
-          </a:solidFill>
-          <a:ln>
-            <a:noFill/>
-          </a:ln>
-          <a:effectLst/>
-        </p:spPr>
-        <p:style>
-          <a:lnRef idx="1">
-            <a:schemeClr val="accent1"/>
-          </a:lnRef>
-          <a:fillRef idx="3">
-            <a:schemeClr val="accent1"/>
-          </a:fillRef>
-          <a:effectRef idx="2">
-            <a:schemeClr val="accent1"/>
-          </a:effectRef>
-          <a:fontRef idx="minor">
-            <a:schemeClr val="lt1"/>
-          </a:fontRef>
-        </p:style>
-        <p:txBody>
-          <a:bodyPr rtlCol="0" anchor="ctr"/>
-          <a:lstStyle/>
-          <a:p>
-            <a:pPr algn="ctr"/>
-          </a:p>
-        </p:txBody>
-      </p:sp>
-      <p:sp>
-        <p:nvSpPr>
-          <p:cNvPr id="37" name="Rectangle 36"/>
-          <p:cNvSpPr/>
-          <p:nvPr/>
-        </p:nvSpPr>
-        <p:spPr>
-          <a:xfrm>
-            <a:off x="1956816" y="3767328"/>
-            <a:ext cx="329184" cy="329184"/>
-          </a:xfrm>
-          <a:prstGeom prst="rect">
-            <a:avLst/>
-          </a:prstGeom>
-          <a:solidFill>
-            <a:srgbClr val="A8DC98"/>
-          </a:solidFill>
-          <a:ln>
-            <a:noFill/>
-          </a:ln>
-          <a:effectLst/>
-        </p:spPr>
-        <p:style>
-          <a:lnRef idx="1">
-            <a:schemeClr val="accent1"/>
-          </a:lnRef>
-          <a:fillRef idx="3">
-            <a:schemeClr val="accent1"/>
-          </a:fillRef>
-          <a:effectRef idx="2">
-            <a:schemeClr val="accent1"/>
-          </a:effectRef>
-          <a:fontRef idx="minor">
-            <a:schemeClr val="lt1"/>
-          </a:fontRef>
-        </p:style>
-        <p:txBody>
-          <a:bodyPr rtlCol="0" anchor="ctr"/>
-          <a:lstStyle/>
-          <a:p>
-            <a:pPr algn="ctr"/>
-          </a:p>
-        </p:txBody>
-      </p:sp>
-      <p:sp>
-        <p:nvSpPr>
-          <p:cNvPr id="38" name="Rectangle 37"/>
-          <p:cNvSpPr/>
-          <p:nvPr/>
-        </p:nvSpPr>
-        <p:spPr>
-          <a:xfrm>
-            <a:off x="2377440" y="3767328"/>
-            <a:ext cx="329184" cy="329184"/>
-          </a:xfrm>
-          <a:prstGeom prst="rect">
-            <a:avLst/>
-          </a:prstGeom>
-          <a:solidFill>
-            <a:srgbClr val="A8DC98"/>
-          </a:solidFill>
-          <a:ln>
-            <a:noFill/>
-          </a:ln>
-          <a:effectLst/>
-        </p:spPr>
-        <p:style>
-          <a:lnRef idx="1">
-            <a:schemeClr val="accent1"/>
-          </a:lnRef>
-          <a:fillRef idx="3">
-            <a:schemeClr val="accent1"/>
-          </a:fillRef>
-          <a:effectRef idx="2">
-            <a:schemeClr val="accent1"/>
-          </a:effectRef>
-          <a:fontRef idx="minor">
-            <a:schemeClr val="lt1"/>
-          </a:fontRef>
-        </p:style>
-        <p:txBody>
-          <a:bodyPr rtlCol="0" anchor="ctr"/>
-          <a:lstStyle/>
-          <a:p>
-            <a:pPr algn="ctr"/>
-          </a:p>
-        </p:txBody>
-      </p:sp>
-      <p:sp>
-        <p:nvSpPr>
-          <p:cNvPr id="39" name="Rectangle 38"/>
-          <p:cNvSpPr/>
-          <p:nvPr/>
-        </p:nvSpPr>
-        <p:spPr>
-          <a:xfrm>
-            <a:off x="2798064" y="3767328"/>
-            <a:ext cx="329184" cy="329184"/>
-          </a:xfrm>
-          <a:prstGeom prst="rect">
-            <a:avLst/>
-          </a:prstGeom>
-          <a:solidFill>
-            <a:srgbClr val="A8DC98"/>
-          </a:solidFill>
-          <a:ln>
-            <a:noFill/>
-          </a:ln>
-          <a:effectLst/>
-        </p:spPr>
-        <p:style>
-          <a:lnRef idx="1">
-            <a:schemeClr val="accent1"/>
-          </a:lnRef>
-          <a:fillRef idx="3">
-            <a:schemeClr val="accent1"/>
-          </a:fillRef>
-          <a:effectRef idx="2">
-            <a:schemeClr val="accent1"/>
-          </a:effectRef>
-          <a:fontRef idx="minor">
-            <a:schemeClr val="lt1"/>
-          </a:fontRef>
-        </p:style>
-        <p:txBody>
-          <a:bodyPr rtlCol="0" anchor="ctr"/>
-          <a:lstStyle/>
-          <a:p>
-            <a:pPr algn="ctr"/>
-          </a:p>
-        </p:txBody>
-      </p:sp>
-      <p:sp>
-        <p:nvSpPr>
-          <p:cNvPr id="40" name="Rectangle 39"/>
-          <p:cNvSpPr/>
-          <p:nvPr/>
-        </p:nvSpPr>
-        <p:spPr>
-          <a:xfrm>
-            <a:off x="3218688" y="3767328"/>
-            <a:ext cx="329184" cy="329184"/>
-          </a:xfrm>
-          <a:prstGeom prst="rect">
-            <a:avLst/>
-          </a:prstGeom>
-          <a:solidFill>
-            <a:srgbClr val="A8DC98"/>
-          </a:solidFill>
-          <a:ln>
-            <a:noFill/>
-          </a:ln>
-          <a:effectLst/>
-        </p:spPr>
-        <p:style>
-          <a:lnRef idx="1">
-            <a:schemeClr val="accent1"/>
-          </a:lnRef>
-          <a:fillRef idx="3">
-            <a:schemeClr val="accent1"/>
-          </a:fillRef>
-          <a:effectRef idx="2">
-            <a:schemeClr val="accent1"/>
-          </a:effectRef>
-          <a:fontRef idx="minor">
-            <a:schemeClr val="lt1"/>
-          </a:fontRef>
-        </p:style>
-        <p:txBody>
-          <a:bodyPr rtlCol="0" anchor="ctr"/>
-          <a:lstStyle/>
-          <a:p>
-            <a:pPr algn="ctr"/>
-          </a:p>
-        </p:txBody>
-      </p:sp>
-      <p:sp>
-        <p:nvSpPr>
-          <p:cNvPr id="41" name="Rectangle 40"/>
-          <p:cNvSpPr/>
-          <p:nvPr/>
-        </p:nvSpPr>
-        <p:spPr>
-          <a:xfrm>
-            <a:off x="3639312" y="3767328"/>
-            <a:ext cx="329184" cy="329184"/>
-          </a:xfrm>
-          <a:prstGeom prst="rect">
-            <a:avLst/>
-          </a:prstGeom>
-          <a:solidFill>
-            <a:srgbClr val="A8DC98"/>
-          </a:solidFill>
-          <a:ln>
-            <a:noFill/>
-          </a:ln>
-          <a:effectLst/>
-        </p:spPr>
-        <p:style>
-          <a:lnRef idx="1">
-            <a:schemeClr val="accent1"/>
-          </a:lnRef>
-          <a:fillRef idx="3">
-            <a:schemeClr val="accent1"/>
-          </a:fillRef>
-          <a:effectRef idx="2">
-            <a:schemeClr val="accent1"/>
-          </a:effectRef>
-          <a:fontRef idx="minor">
-            <a:schemeClr val="lt1"/>
-          </a:fontRef>
-        </p:style>
-        <p:txBody>
-          <a:bodyPr rtlCol="0" anchor="ctr"/>
-          <a:lstStyle/>
-          <a:p>
-            <a:pPr algn="ctr"/>
-          </a:p>
-        </p:txBody>
-      </p:sp>
-      <p:sp>
-        <p:nvSpPr>
-          <p:cNvPr id="42" name="Rectangle 41"/>
-          <p:cNvSpPr/>
-          <p:nvPr/>
-        </p:nvSpPr>
-        <p:spPr>
-          <a:xfrm>
-            <a:off x="4059936" y="3767328"/>
-            <a:ext cx="329184" cy="329184"/>
-          </a:xfrm>
-          <a:prstGeom prst="rect">
-            <a:avLst/>
-          </a:prstGeom>
-          <a:solidFill>
-            <a:srgbClr val="A8DC98"/>
-          </a:solidFill>
-          <a:ln>
-            <a:noFill/>
-          </a:ln>
-          <a:effectLst/>
-        </p:spPr>
-        <p:style>
-          <a:lnRef idx="1">
-            <a:schemeClr val="accent1"/>
-          </a:lnRef>
-          <a:fillRef idx="3">
-            <a:schemeClr val="accent1"/>
-          </a:fillRef>
-          <a:effectRef idx="2">
-            <a:schemeClr val="accent1"/>
-          </a:effectRef>
-          <a:fontRef idx="minor">
-            <a:schemeClr val="lt1"/>
-          </a:fontRef>
-        </p:style>
-        <p:txBody>
-          <a:bodyPr rtlCol="0" anchor="ctr"/>
-          <a:lstStyle/>
-          <a:p>
-            <a:pPr algn="ctr"/>
-          </a:p>
-        </p:txBody>
-      </p:sp>
-      <p:sp>
-        <p:nvSpPr>
-          <p:cNvPr id="43" name="Rectangle 42"/>
-          <p:cNvSpPr/>
-          <p:nvPr/>
-        </p:nvSpPr>
-        <p:spPr>
-          <a:xfrm>
-            <a:off x="4480560" y="3767328"/>
-            <a:ext cx="329184" cy="329184"/>
-          </a:xfrm>
-          <a:prstGeom prst="rect">
-            <a:avLst/>
-          </a:prstGeom>
-          <a:solidFill>
-            <a:srgbClr val="A8DC98"/>
-          </a:solidFill>
-          <a:ln>
-            <a:noFill/>
-          </a:ln>
-          <a:effectLst/>
-        </p:spPr>
-        <p:style>
-          <a:lnRef idx="1">
-            <a:schemeClr val="accent1"/>
-          </a:lnRef>
-          <a:fillRef idx="3">
-            <a:schemeClr val="accent1"/>
-          </a:fillRef>
-          <a:effectRef idx="2">
-            <a:schemeClr val="accent1"/>
-          </a:effectRef>
-          <a:fontRef idx="minor">
-            <a:schemeClr val="lt1"/>
-          </a:fontRef>
-        </p:style>
-        <p:txBody>
-          <a:bodyPr rtlCol="0" anchor="ctr"/>
-          <a:lstStyle/>
-          <a:p>
-            <a:pPr algn="ctr"/>
-          </a:p>
-        </p:txBody>
-      </p:sp>
-      <p:sp>
-        <p:nvSpPr>
-          <p:cNvPr id="44" name="Rectangle 43"/>
-          <p:cNvSpPr/>
-          <p:nvPr/>
-        </p:nvSpPr>
-        <p:spPr>
-          <a:xfrm>
-            <a:off x="4901184" y="3767328"/>
-            <a:ext cx="329184" cy="329184"/>
-          </a:xfrm>
-          <a:prstGeom prst="rect">
-            <a:avLst/>
-          </a:prstGeom>
-          <a:solidFill>
-            <a:srgbClr val="A8DC98"/>
-          </a:solidFill>
-          <a:ln>
-            <a:noFill/>
-          </a:ln>
-          <a:effectLst/>
-        </p:spPr>
-        <p:style>
-          <a:lnRef idx="1">
-            <a:schemeClr val="accent1"/>
-          </a:lnRef>
-          <a:fillRef idx="3">
-            <a:schemeClr val="accent1"/>
-          </a:fillRef>
-          <a:effectRef idx="2">
-            <a:schemeClr val="accent1"/>
-          </a:effectRef>
-          <a:fontRef idx="minor">
-            <a:schemeClr val="lt1"/>
-          </a:fontRef>
-        </p:style>
-        <p:txBody>
-          <a:bodyPr rtlCol="0" anchor="ctr"/>
-          <a:lstStyle/>
-          <a:p>
-            <a:pPr algn="ctr"/>
-          </a:p>
-        </p:txBody>
-      </p:sp>
-      <p:sp>
-        <p:nvSpPr>
-          <p:cNvPr id="45" name="Rectangle 44"/>
-          <p:cNvSpPr/>
-          <p:nvPr/>
-        </p:nvSpPr>
-        <p:spPr>
-          <a:xfrm>
-            <a:off x="5321808" y="3767328"/>
-            <a:ext cx="329184" cy="329184"/>
+            <a:off x="1143000" y="5029200"/>
+            <a:ext cx="8778240" cy="274320"/>
           </a:xfrm>
           <a:prstGeom prst="rect">
             <a:avLst/>
@@ -7539,190 +7231,14 @@
       </p:sp>
       <p:sp>
         <p:nvSpPr>
-          <p:cNvPr id="46" name="Rectangle 45"/>
-          <p:cNvSpPr/>
-          <p:nvPr/>
-        </p:nvSpPr>
-        <p:spPr>
-          <a:xfrm>
-            <a:off x="5742432" y="3767328"/>
-            <a:ext cx="329184" cy="329184"/>
-          </a:xfrm>
-          <a:prstGeom prst="rect">
-            <a:avLst/>
-          </a:prstGeom>
-          <a:solidFill>
-            <a:srgbClr val="EB5757"/>
-          </a:solidFill>
-          <a:ln>
-            <a:noFill/>
-          </a:ln>
-          <a:effectLst/>
-        </p:spPr>
-        <p:style>
-          <a:lnRef idx="1">
-            <a:schemeClr val="accent1"/>
-          </a:lnRef>
-          <a:fillRef idx="3">
-            <a:schemeClr val="accent1"/>
-          </a:fillRef>
-          <a:effectRef idx="2">
-            <a:schemeClr val="accent1"/>
-          </a:effectRef>
-          <a:fontRef idx="minor">
-            <a:schemeClr val="lt1"/>
-          </a:fontRef>
-        </p:style>
-        <p:txBody>
-          <a:bodyPr rtlCol="0" anchor="ctr"/>
-          <a:lstStyle/>
-          <a:p>
-            <a:pPr algn="ctr"/>
-          </a:p>
-        </p:txBody>
-      </p:sp>
-      <p:sp>
-        <p:nvSpPr>
-          <p:cNvPr id="47" name="Rectangle 46"/>
-          <p:cNvSpPr/>
-          <p:nvPr/>
-        </p:nvSpPr>
-        <p:spPr>
-          <a:xfrm>
-            <a:off x="6163056" y="3767328"/>
-            <a:ext cx="329184" cy="329184"/>
-          </a:xfrm>
-          <a:prstGeom prst="rect">
-            <a:avLst/>
-          </a:prstGeom>
-          <a:solidFill>
-            <a:srgbClr val="EB5757"/>
-          </a:solidFill>
-          <a:ln>
-            <a:noFill/>
-          </a:ln>
-          <a:effectLst/>
-        </p:spPr>
-        <p:style>
-          <a:lnRef idx="1">
-            <a:schemeClr val="accent1"/>
-          </a:lnRef>
-          <a:fillRef idx="3">
-            <a:schemeClr val="accent1"/>
-          </a:fillRef>
-          <a:effectRef idx="2">
-            <a:schemeClr val="accent1"/>
-          </a:effectRef>
-          <a:fontRef idx="minor">
-            <a:schemeClr val="lt1"/>
-          </a:fontRef>
-        </p:style>
-        <p:txBody>
-          <a:bodyPr rtlCol="0" anchor="ctr"/>
-          <a:lstStyle/>
-          <a:p>
-            <a:pPr algn="ctr"/>
-          </a:p>
-        </p:txBody>
-      </p:sp>
-      <p:sp>
-        <p:nvSpPr>
-          <p:cNvPr id="48" name="Rectangle 47"/>
-          <p:cNvSpPr/>
-          <p:nvPr/>
-        </p:nvSpPr>
-        <p:spPr>
-          <a:xfrm>
-            <a:off x="6583680" y="3767328"/>
-            <a:ext cx="329184" cy="329184"/>
-          </a:xfrm>
-          <a:prstGeom prst="rect">
-            <a:avLst/>
-          </a:prstGeom>
-          <a:solidFill>
-            <a:srgbClr val="EB5757"/>
-          </a:solidFill>
-          <a:ln>
-            <a:noFill/>
-          </a:ln>
-          <a:effectLst/>
-        </p:spPr>
-        <p:style>
-          <a:lnRef idx="1">
-            <a:schemeClr val="accent1"/>
-          </a:lnRef>
-          <a:fillRef idx="3">
-            <a:schemeClr val="accent1"/>
-          </a:fillRef>
-          <a:effectRef idx="2">
-            <a:schemeClr val="accent1"/>
-          </a:effectRef>
-          <a:fontRef idx="minor">
-            <a:schemeClr val="lt1"/>
-          </a:fontRef>
-        </p:style>
-        <p:txBody>
-          <a:bodyPr rtlCol="0" anchor="ctr"/>
-          <a:lstStyle/>
-          <a:p>
-            <a:pPr algn="ctr"/>
-          </a:p>
-        </p:txBody>
-      </p:sp>
-      <p:sp>
-        <p:nvSpPr>
-          <p:cNvPr id="49" name="Rectangle 48"/>
-          <p:cNvSpPr/>
-          <p:nvPr/>
-        </p:nvSpPr>
-        <p:spPr>
-          <a:xfrm>
-            <a:off x="1115568" y="4919472"/>
-            <a:ext cx="146304" cy="146304"/>
-          </a:xfrm>
-          <a:prstGeom prst="rect">
-            <a:avLst/>
-          </a:prstGeom>
-          <a:solidFill>
-            <a:srgbClr val="43B02A"/>
-          </a:solidFill>
-          <a:ln>
-            <a:noFill/>
-          </a:ln>
-          <a:effectLst/>
-        </p:spPr>
-        <p:style>
-          <a:lnRef idx="1">
-            <a:schemeClr val="accent1"/>
-          </a:lnRef>
-          <a:fillRef idx="3">
-            <a:schemeClr val="accent1"/>
-          </a:fillRef>
-          <a:effectRef idx="2">
-            <a:schemeClr val="accent1"/>
-          </a:effectRef>
-          <a:fontRef idx="minor">
-            <a:schemeClr val="lt1"/>
-          </a:fontRef>
-        </p:style>
-        <p:txBody>
-          <a:bodyPr rtlCol="0" anchor="ctr"/>
-          <a:lstStyle/>
-          <a:p>
-            <a:pPr algn="ctr"/>
-          </a:p>
-        </p:txBody>
-      </p:sp>
-      <p:sp>
-        <p:nvSpPr>
-          <p:cNvPr id="50" name="TextBox 49"/>
+          <p:cNvPr id="11" name="TextBox 10"/>
           <p:cNvSpPr txBox="1"/>
           <p:nvPr/>
         </p:nvSpPr>
         <p:spPr>
           <a:xfrm>
-            <a:off x="1353312" y="4892040"/>
-            <a:ext cx="2651760" cy="228600"/>
+            <a:off x="1298448" y="5001768"/>
+            <a:ext cx="3657600" cy="310896"/>
           </a:xfrm>
           <a:prstGeom prst="rect">
             <a:avLst/>
@@ -7741,440 +7257,26 @@
               </a:lnSpc>
             </a:pPr>
             <a:r>
-              <a:rPr sz="1200" b="0">
-                <a:solidFill>
-                  <a:srgbClr val="6B7280"/>
+              <a:rPr sz="1800" b="1">
+                <a:solidFill>
+                  <a:srgbClr val="F2F4F3"/>
                 </a:solidFill>
                 <a:latin typeface="Inter Tight"/>
               </a:rPr>
-              <a:t>18 — точно</a:t>
-            </a:r>
-          </a:p>
-        </p:txBody>
-      </p:sp>
-      <p:sp>
-        <p:nvSpPr>
-          <p:cNvPr id="51" name="Rectangle 50"/>
-          <p:cNvSpPr/>
-          <p:nvPr/>
-        </p:nvSpPr>
-        <p:spPr>
-          <a:xfrm>
-            <a:off x="3995928" y="4919472"/>
-            <a:ext cx="146304" cy="146304"/>
-          </a:xfrm>
-          <a:prstGeom prst="rect">
-            <a:avLst/>
-          </a:prstGeom>
-          <a:solidFill>
-            <a:srgbClr val="A8DC98"/>
-          </a:solidFill>
-          <a:ln>
-            <a:noFill/>
-          </a:ln>
-          <a:effectLst/>
-        </p:spPr>
-        <p:style>
-          <a:lnRef idx="1">
-            <a:schemeClr val="accent1"/>
-          </a:lnRef>
-          <a:fillRef idx="3">
-            <a:schemeClr val="accent1"/>
-          </a:fillRef>
-          <a:effectRef idx="2">
-            <a:schemeClr val="accent1"/>
-          </a:effectRef>
-          <a:fontRef idx="minor">
-            <a:schemeClr val="lt1"/>
-          </a:fontRef>
-        </p:style>
-        <p:txBody>
-          <a:bodyPr rtlCol="0" anchor="ctr"/>
-          <a:lstStyle/>
-          <a:p>
-            <a:pPr algn="ctr"/>
-          </a:p>
-        </p:txBody>
-      </p:sp>
-      <p:sp>
-        <p:nvSpPr>
-          <p:cNvPr id="52" name="TextBox 51"/>
+              <a:t>500 000 ₽</a:t>
+            </a:r>
+          </a:p>
+        </p:txBody>
+      </p:sp>
+      <p:sp>
+        <p:nvSpPr>
+          <p:cNvPr id="12" name="TextBox 11"/>
           <p:cNvSpPr txBox="1"/>
           <p:nvPr/>
         </p:nvSpPr>
         <p:spPr>
           <a:xfrm>
-            <a:off x="4233672" y="4892040"/>
-            <a:ext cx="2651760" cy="228600"/>
-          </a:xfrm>
-          <a:prstGeom prst="rect">
-            <a:avLst/>
-          </a:prstGeom>
-          <a:noFill/>
-        </p:spPr>
-        <p:txBody>
-          <a:bodyPr wrap="square" lIns="0" rIns="0" tIns="0" bIns="0">
-            <a:spAutoFit/>
-          </a:bodyPr>
-          <a:lstStyle/>
-          <a:p>
-            <a:pPr algn="l">
-              <a:lnSpc>
-                <a:spcPct val="132000"/>
-              </a:lnSpc>
-            </a:pPr>
-            <a:r>
-              <a:rPr sz="1200" b="0">
-                <a:solidFill>
-                  <a:srgbClr val="6B7280"/>
-                </a:solidFill>
-                <a:latin typeface="Inter Tight"/>
-              </a:rPr>
-              <a:t>20 — на ступень</a:t>
-            </a:r>
-          </a:p>
-        </p:txBody>
-      </p:sp>
-      <p:sp>
-        <p:nvSpPr>
-          <p:cNvPr id="53" name="Rectangle 52"/>
-          <p:cNvSpPr/>
-          <p:nvPr/>
-        </p:nvSpPr>
-        <p:spPr>
-          <a:xfrm>
-            <a:off x="6876288" y="4919472"/>
-            <a:ext cx="146304" cy="146304"/>
-          </a:xfrm>
-          <a:prstGeom prst="rect">
-            <a:avLst/>
-          </a:prstGeom>
-          <a:solidFill>
-            <a:srgbClr val="EB5757"/>
-          </a:solidFill>
-          <a:ln>
-            <a:noFill/>
-          </a:ln>
-          <a:effectLst/>
-        </p:spPr>
-        <p:style>
-          <a:lnRef idx="1">
-            <a:schemeClr val="accent1"/>
-          </a:lnRef>
-          <a:fillRef idx="3">
-            <a:schemeClr val="accent1"/>
-          </a:fillRef>
-          <a:effectRef idx="2">
-            <a:schemeClr val="accent1"/>
-          </a:effectRef>
-          <a:fontRef idx="minor">
-            <a:schemeClr val="lt1"/>
-          </a:fontRef>
-        </p:style>
-        <p:txBody>
-          <a:bodyPr rtlCol="0" anchor="ctr"/>
-          <a:lstStyle/>
-          <a:p>
-            <a:pPr algn="ctr"/>
-          </a:p>
-        </p:txBody>
-      </p:sp>
-      <p:sp>
-        <p:nvSpPr>
-          <p:cNvPr id="54" name="TextBox 53"/>
-          <p:cNvSpPr txBox="1"/>
-          <p:nvPr/>
-        </p:nvSpPr>
-        <p:spPr>
-          <a:xfrm>
-            <a:off x="7114032" y="4892040"/>
-            <a:ext cx="2651760" cy="228600"/>
-          </a:xfrm>
-          <a:prstGeom prst="rect">
-            <a:avLst/>
-          </a:prstGeom>
-          <a:noFill/>
-        </p:spPr>
-        <p:txBody>
-          <a:bodyPr wrap="square" lIns="0" rIns="0" tIns="0" bIns="0">
-            <a:spAutoFit/>
-          </a:bodyPr>
-          <a:lstStyle/>
-          <a:p>
-            <a:pPr algn="l">
-              <a:lnSpc>
-                <a:spcPct val="132000"/>
-              </a:lnSpc>
-            </a:pPr>
-            <a:r>
-              <a:rPr sz="1200" b="0">
-                <a:solidFill>
-                  <a:srgbClr val="6B7280"/>
-                </a:solidFill>
-                <a:latin typeface="Inter Tight"/>
-              </a:rPr>
-              <a:t>4 — дальше</a:t>
-            </a:r>
-          </a:p>
-        </p:txBody>
-      </p:sp>
-      <p:sp>
-        <p:nvSpPr>
-          <p:cNvPr id="55" name="Rounded Rectangle 54"/>
-          <p:cNvSpPr/>
-          <p:nvPr/>
-        </p:nvSpPr>
-        <p:spPr>
-          <a:xfrm>
-            <a:off x="8046720" y="2240280"/>
-            <a:ext cx="3474720" cy="1481328"/>
-          </a:xfrm>
-          <a:prstGeom prst="roundRect">
-            <a:avLst>
-              <a:gd name="adj" fmla="val 4500"/>
-            </a:avLst>
-          </a:prstGeom>
-          <a:solidFill>
-            <a:srgbClr val="23282E"/>
-          </a:solidFill>
-          <a:ln>
-            <a:noFill/>
-          </a:ln>
-          <a:effectLst/>
-        </p:spPr>
-        <p:style>
-          <a:lnRef idx="1">
-            <a:schemeClr val="accent1"/>
-          </a:lnRef>
-          <a:fillRef idx="3">
-            <a:schemeClr val="accent1"/>
-          </a:fillRef>
-          <a:effectRef idx="2">
-            <a:schemeClr val="accent1"/>
-          </a:effectRef>
-          <a:fontRef idx="minor">
-            <a:schemeClr val="lt1"/>
-          </a:fontRef>
-        </p:style>
-        <p:txBody>
-          <a:bodyPr rtlCol="0" anchor="ctr"/>
-          <a:lstStyle/>
-          <a:p>
-            <a:pPr algn="ctr"/>
-          </a:p>
-        </p:txBody>
-      </p:sp>
-      <p:sp>
-        <p:nvSpPr>
-          <p:cNvPr id="56" name="TextBox 55"/>
-          <p:cNvSpPr txBox="1"/>
-          <p:nvPr/>
-        </p:nvSpPr>
-        <p:spPr>
-          <a:xfrm>
-            <a:off x="8366760" y="2468880"/>
-            <a:ext cx="2926080" cy="731520"/>
-          </a:xfrm>
-          <a:prstGeom prst="rect">
-            <a:avLst/>
-          </a:prstGeom>
-          <a:noFill/>
-        </p:spPr>
-        <p:txBody>
-          <a:bodyPr wrap="square" lIns="0" rIns="0" tIns="0" bIns="0">
-            <a:spAutoFit/>
-          </a:bodyPr>
-          <a:lstStyle/>
-          <a:p>
-            <a:pPr algn="l">
-              <a:lnSpc>
-                <a:spcPct val="100000"/>
-              </a:lnSpc>
-            </a:pPr>
-            <a:r>
-              <a:rPr sz="4000" b="1">
-                <a:solidFill>
-                  <a:srgbClr val="43B02A"/>
-                </a:solidFill>
-                <a:latin typeface="Inter Tight"/>
-              </a:rPr>
-              <a:t>42 / 42</a:t>
-            </a:r>
-          </a:p>
-        </p:txBody>
-      </p:sp>
-      <p:sp>
-        <p:nvSpPr>
-          <p:cNvPr id="57" name="TextBox 56"/>
-          <p:cNvSpPr txBox="1"/>
-          <p:nvPr/>
-        </p:nvSpPr>
-        <p:spPr>
-          <a:xfrm>
-            <a:off x="8366760" y="3127248"/>
-            <a:ext cx="2926080" cy="457200"/>
-          </a:xfrm>
-          <a:prstGeom prst="rect">
-            <a:avLst/>
-          </a:prstGeom>
-          <a:noFill/>
-        </p:spPr>
-        <p:txBody>
-          <a:bodyPr wrap="square" lIns="0" rIns="0" tIns="0" bIns="0">
-            <a:spAutoFit/>
-          </a:bodyPr>
-          <a:lstStyle/>
-          <a:p>
-            <a:pPr algn="l">
-              <a:lnSpc>
-                <a:spcPct val="140000"/>
-              </a:lnSpc>
-            </a:pPr>
-            <a:r>
-              <a:rPr sz="1250" b="0">
-                <a:solidFill>
-                  <a:srgbClr val="8B949E"/>
-                </a:solidFill>
-                <a:latin typeface="Inter Tight"/>
-              </a:rPr>
-              <a:t>формула сходится с Excel заказчика точно</a:t>
-            </a:r>
-          </a:p>
-        </p:txBody>
-      </p:sp>
-      <p:sp>
-        <p:nvSpPr>
-          <p:cNvPr id="58" name="Rounded Rectangle 57"/>
-          <p:cNvSpPr/>
-          <p:nvPr/>
-        </p:nvSpPr>
-        <p:spPr>
-          <a:xfrm>
-            <a:off x="8046720" y="3959352"/>
-            <a:ext cx="3474720" cy="1481328"/>
-          </a:xfrm>
-          <a:prstGeom prst="roundRect">
-            <a:avLst>
-              <a:gd name="adj" fmla="val 4500"/>
-            </a:avLst>
-          </a:prstGeom>
-          <a:solidFill>
-            <a:srgbClr val="1B1F24"/>
-          </a:solidFill>
-          <a:ln>
-            <a:noFill/>
-          </a:ln>
-          <a:effectLst/>
-        </p:spPr>
-        <p:style>
-          <a:lnRef idx="1">
-            <a:schemeClr val="accent1"/>
-          </a:lnRef>
-          <a:fillRef idx="3">
-            <a:schemeClr val="accent1"/>
-          </a:fillRef>
-          <a:effectRef idx="2">
-            <a:schemeClr val="accent1"/>
-          </a:effectRef>
-          <a:fontRef idx="minor">
-            <a:schemeClr val="lt1"/>
-          </a:fontRef>
-        </p:style>
-        <p:txBody>
-          <a:bodyPr rtlCol="0" anchor="ctr"/>
-          <a:lstStyle/>
-          <a:p>
-            <a:pPr algn="ctr"/>
-          </a:p>
-        </p:txBody>
-      </p:sp>
-      <p:sp>
-        <p:nvSpPr>
-          <p:cNvPr id="59" name="TextBox 58"/>
-          <p:cNvSpPr txBox="1"/>
-          <p:nvPr/>
-        </p:nvSpPr>
-        <p:spPr>
-          <a:xfrm>
-            <a:off x="8366760" y="4187952"/>
-            <a:ext cx="2926080" cy="731520"/>
-          </a:xfrm>
-          <a:prstGeom prst="rect">
-            <a:avLst/>
-          </a:prstGeom>
-          <a:noFill/>
-        </p:spPr>
-        <p:txBody>
-          <a:bodyPr wrap="square" lIns="0" rIns="0" tIns="0" bIns="0">
-            <a:spAutoFit/>
-          </a:bodyPr>
-          <a:lstStyle/>
-          <a:p>
-            <a:pPr algn="l">
-              <a:lnSpc>
-                <a:spcPct val="100000"/>
-              </a:lnSpc>
-            </a:pPr>
-            <a:r>
-              <a:rPr sz="4000" b="1">
-                <a:solidFill>
-                  <a:srgbClr val="EB5757"/>
-                </a:solidFill>
-                <a:latin typeface="Inter Tight"/>
-              </a:rPr>
-              <a:t>1</a:t>
-            </a:r>
-          </a:p>
-        </p:txBody>
-      </p:sp>
-      <p:sp>
-        <p:nvSpPr>
-          <p:cNvPr id="60" name="TextBox 59"/>
-          <p:cNvSpPr txBox="1"/>
-          <p:nvPr/>
-        </p:nvSpPr>
-        <p:spPr>
-          <a:xfrm>
-            <a:off x="8366760" y="4846320"/>
-            <a:ext cx="2926080" cy="457200"/>
-          </a:xfrm>
-          <a:prstGeom prst="rect">
-            <a:avLst/>
-          </a:prstGeom>
-          <a:noFill/>
-        </p:spPr>
-        <p:txBody>
-          <a:bodyPr wrap="square" lIns="0" rIns="0" tIns="0" bIns="0">
-            <a:spAutoFit/>
-          </a:bodyPr>
-          <a:lstStyle/>
-          <a:p>
-            <a:pPr algn="l">
-              <a:lnSpc>
-                <a:spcPct val="140000"/>
-              </a:lnSpc>
-            </a:pPr>
-            <a:r>
-              <a:rPr sz="1250" b="0">
-                <a:solidFill>
-                  <a:srgbClr val="8B949E"/>
-                </a:solidFill>
-                <a:latin typeface="Inter Tight"/>
-              </a:rPr>
-              <a:t>провал важного в нижние категории при цели ноль</a:t>
-            </a:r>
-          </a:p>
-        </p:txBody>
-      </p:sp>
-      <p:sp>
-        <p:nvSpPr>
-          <p:cNvPr id="61" name="TextBox 60"/>
-          <p:cNvSpPr txBox="1"/>
-          <p:nvPr/>
-        </p:nvSpPr>
-        <p:spPr>
-          <a:xfrm>
-            <a:off x="731520" y="5715000"/>
+            <a:off x="731520" y="5806440"/>
             <a:ext cx="10515600" cy="548640"/>
           </a:xfrm>
           <a:prstGeom prst="rect">
@@ -8200,7 +7302,7 @@
                 </a:solidFill>
                 <a:latin typeface="Inter Tight"/>
               </a:rPr>
-              <a:t>Клетки — это модель. </a:t>
+              <a:t>Полосы в одном масштабе, зелёная не увеличена. </a:t>
             </a:r>
             <a:r>
               <a:rPr sz="1400" b="0">
@@ -8209,7 +7311,7 @@
                 </a:solidFill>
                 <a:latin typeface="Inter Tight"/>
               </a:rPr>
-              <a:t>Она сама выставила баллы. «42 из 42» — это про формулу: получив экспертные баллы, код выдаёт тот же индекс. Путать эти два числа нельзя.</a:t>
+              <a:t>Четыре копейки за материал. Одного пропуска хватает, чтобы перекрыть двести лет работы модели. Курс ЦБ на 05.09.2026.</a:t>
             </a:r>
           </a:p>
         </p:txBody>
@@ -8284,7 +7386,7 @@
         </p:nvSpPr>
         <p:spPr>
           <a:xfrm>
-            <a:off x="731520" y="1051560"/>
+            <a:off x="731520" y="868680"/>
             <a:ext cx="10698480" cy="274320"/>
           </a:xfrm>
           <a:prstGeom prst="rect">
@@ -8306,11 +7408,11 @@
             <a:r>
               <a:rPr sz="1100" b="1">
                 <a:solidFill>
-                  <a:srgbClr val="EB5757"/>
+                  <a:srgbClr val="43B02A"/>
                 </a:solidFill>
                 <a:latin typeface="Inter Tight"/>
               </a:rPr>
-              <a:t>Честно</a:t>
+              <a:t>Насколько это точно</a:t>
             </a:r>
           </a:p>
         </p:txBody>
@@ -8323,8 +7425,8 @@
         </p:nvSpPr>
         <p:spPr>
           <a:xfrm>
-            <a:off x="731520" y="1463040"/>
-            <a:ext cx="10515600" cy="640080"/>
+            <a:off x="731520" y="1280160"/>
+            <a:ext cx="10515600" cy="548640"/>
           </a:xfrm>
           <a:prstGeom prst="rect">
             <a:avLst/>
@@ -8343,13 +7445,13 @@
               </a:lnSpc>
             </a:pPr>
             <a:r>
-              <a:rPr sz="4200" b="1">
+              <a:rPr sz="4000" b="1">
                 <a:solidFill>
                   <a:srgbClr val="F2F4F3"/>
                 </a:solidFill>
                 <a:latin typeface="Inter Tight"/>
               </a:rPr>
-              <a:t>Чего мы измерить не смогли</a:t>
+              <a:t>Проверено на реестре самого заказчика</a:t>
             </a:r>
           </a:p>
         </p:txBody>
@@ -8362,8 +7464,2190 @@
         </p:nvSpPr>
         <p:spPr>
           <a:xfrm>
-            <a:off x="731520" y="2697480"/>
-            <a:ext cx="6858000" cy="2880360"/>
+            <a:off x="731520" y="2240280"/>
+            <a:ext cx="6858000" cy="3200400"/>
+          </a:xfrm>
+          <a:prstGeom prst="roundRect">
+            <a:avLst>
+              <a:gd name="adj" fmla="val 4500"/>
+            </a:avLst>
+          </a:prstGeom>
+          <a:solidFill>
+            <a:srgbClr val="1B1F24"/>
+          </a:solidFill>
+          <a:ln>
+            <a:noFill/>
+          </a:ln>
+          <a:effectLst/>
+        </p:spPr>
+        <p:style>
+          <a:lnRef idx="1">
+            <a:schemeClr val="accent1"/>
+          </a:lnRef>
+          <a:fillRef idx="3">
+            <a:schemeClr val="accent1"/>
+          </a:fillRef>
+          <a:effectRef idx="2">
+            <a:schemeClr val="accent1"/>
+          </a:effectRef>
+          <a:fontRef idx="minor">
+            <a:schemeClr val="lt1"/>
+          </a:fontRef>
+        </p:style>
+        <p:txBody>
+          <a:bodyPr rtlCol="0" anchor="ctr"/>
+          <a:lstStyle/>
+          <a:p>
+            <a:pPr algn="ctr"/>
+          </a:p>
+        </p:txBody>
+      </p:sp>
+      <p:sp>
+        <p:nvSpPr>
+          <p:cNvPr id="6" name="TextBox 5"/>
+          <p:cNvSpPr txBox="1"/>
+          <p:nvPr/>
+        </p:nvSpPr>
+        <p:spPr>
+          <a:xfrm>
+            <a:off x="1115568" y="2514600"/>
+            <a:ext cx="6035040" cy="256032"/>
+          </a:xfrm>
+          <a:prstGeom prst="rect">
+            <a:avLst/>
+          </a:prstGeom>
+          <a:noFill/>
+        </p:spPr>
+        <p:txBody>
+          <a:bodyPr wrap="square" lIns="0" rIns="0" tIns="0" bIns="0">
+            <a:spAutoFit/>
+          </a:bodyPr>
+          <a:lstStyle/>
+          <a:p>
+            <a:pPr algn="l">
+              <a:lnSpc>
+                <a:spcPct val="132000"/>
+              </a:lnSpc>
+            </a:pPr>
+            <a:r>
+              <a:rPr sz="1050" b="1">
+                <a:solidFill>
+                  <a:srgbClr val="8B949E"/>
+                </a:solidFill>
+                <a:latin typeface="Inter Tight"/>
+              </a:rPr>
+              <a:t>Одна клетка — одна карточка реестра</a:t>
+            </a:r>
+          </a:p>
+        </p:txBody>
+      </p:sp>
+      <p:sp>
+        <p:nvSpPr>
+          <p:cNvPr id="7" name="Rectangle 6"/>
+          <p:cNvSpPr/>
+          <p:nvPr/>
+        </p:nvSpPr>
+        <p:spPr>
+          <a:xfrm>
+            <a:off x="1115568" y="2926080"/>
+            <a:ext cx="329184" cy="329184"/>
+          </a:xfrm>
+          <a:prstGeom prst="rect">
+            <a:avLst/>
+          </a:prstGeom>
+          <a:solidFill>
+            <a:srgbClr val="43B02A"/>
+          </a:solidFill>
+          <a:ln>
+            <a:noFill/>
+          </a:ln>
+          <a:effectLst/>
+        </p:spPr>
+        <p:style>
+          <a:lnRef idx="1">
+            <a:schemeClr val="accent1"/>
+          </a:lnRef>
+          <a:fillRef idx="3">
+            <a:schemeClr val="accent1"/>
+          </a:fillRef>
+          <a:effectRef idx="2">
+            <a:schemeClr val="accent1"/>
+          </a:effectRef>
+          <a:fontRef idx="minor">
+            <a:schemeClr val="lt1"/>
+          </a:fontRef>
+        </p:style>
+        <p:txBody>
+          <a:bodyPr rtlCol="0" anchor="ctr"/>
+          <a:lstStyle/>
+          <a:p>
+            <a:pPr algn="ctr"/>
+          </a:p>
+        </p:txBody>
+      </p:sp>
+      <p:sp>
+        <p:nvSpPr>
+          <p:cNvPr id="8" name="Rectangle 7"/>
+          <p:cNvSpPr/>
+          <p:nvPr/>
+        </p:nvSpPr>
+        <p:spPr>
+          <a:xfrm>
+            <a:off x="1536192" y="2926080"/>
+            <a:ext cx="329184" cy="329184"/>
+          </a:xfrm>
+          <a:prstGeom prst="rect">
+            <a:avLst/>
+          </a:prstGeom>
+          <a:solidFill>
+            <a:srgbClr val="43B02A"/>
+          </a:solidFill>
+          <a:ln>
+            <a:noFill/>
+          </a:ln>
+          <a:effectLst/>
+        </p:spPr>
+        <p:style>
+          <a:lnRef idx="1">
+            <a:schemeClr val="accent1"/>
+          </a:lnRef>
+          <a:fillRef idx="3">
+            <a:schemeClr val="accent1"/>
+          </a:fillRef>
+          <a:effectRef idx="2">
+            <a:schemeClr val="accent1"/>
+          </a:effectRef>
+          <a:fontRef idx="minor">
+            <a:schemeClr val="lt1"/>
+          </a:fontRef>
+        </p:style>
+        <p:txBody>
+          <a:bodyPr rtlCol="0" anchor="ctr"/>
+          <a:lstStyle/>
+          <a:p>
+            <a:pPr algn="ctr"/>
+          </a:p>
+        </p:txBody>
+      </p:sp>
+      <p:sp>
+        <p:nvSpPr>
+          <p:cNvPr id="9" name="Rectangle 8"/>
+          <p:cNvSpPr/>
+          <p:nvPr/>
+        </p:nvSpPr>
+        <p:spPr>
+          <a:xfrm>
+            <a:off x="1956816" y="2926080"/>
+            <a:ext cx="329184" cy="329184"/>
+          </a:xfrm>
+          <a:prstGeom prst="rect">
+            <a:avLst/>
+          </a:prstGeom>
+          <a:solidFill>
+            <a:srgbClr val="43B02A"/>
+          </a:solidFill>
+          <a:ln>
+            <a:noFill/>
+          </a:ln>
+          <a:effectLst/>
+        </p:spPr>
+        <p:style>
+          <a:lnRef idx="1">
+            <a:schemeClr val="accent1"/>
+          </a:lnRef>
+          <a:fillRef idx="3">
+            <a:schemeClr val="accent1"/>
+          </a:fillRef>
+          <a:effectRef idx="2">
+            <a:schemeClr val="accent1"/>
+          </a:effectRef>
+          <a:fontRef idx="minor">
+            <a:schemeClr val="lt1"/>
+          </a:fontRef>
+        </p:style>
+        <p:txBody>
+          <a:bodyPr rtlCol="0" anchor="ctr"/>
+          <a:lstStyle/>
+          <a:p>
+            <a:pPr algn="ctr"/>
+          </a:p>
+        </p:txBody>
+      </p:sp>
+      <p:sp>
+        <p:nvSpPr>
+          <p:cNvPr id="10" name="Rectangle 9"/>
+          <p:cNvSpPr/>
+          <p:nvPr/>
+        </p:nvSpPr>
+        <p:spPr>
+          <a:xfrm>
+            <a:off x="2377440" y="2926080"/>
+            <a:ext cx="329184" cy="329184"/>
+          </a:xfrm>
+          <a:prstGeom prst="rect">
+            <a:avLst/>
+          </a:prstGeom>
+          <a:solidFill>
+            <a:srgbClr val="43B02A"/>
+          </a:solidFill>
+          <a:ln>
+            <a:noFill/>
+          </a:ln>
+          <a:effectLst/>
+        </p:spPr>
+        <p:style>
+          <a:lnRef idx="1">
+            <a:schemeClr val="accent1"/>
+          </a:lnRef>
+          <a:fillRef idx="3">
+            <a:schemeClr val="accent1"/>
+          </a:fillRef>
+          <a:effectRef idx="2">
+            <a:schemeClr val="accent1"/>
+          </a:effectRef>
+          <a:fontRef idx="minor">
+            <a:schemeClr val="lt1"/>
+          </a:fontRef>
+        </p:style>
+        <p:txBody>
+          <a:bodyPr rtlCol="0" anchor="ctr"/>
+          <a:lstStyle/>
+          <a:p>
+            <a:pPr algn="ctr"/>
+          </a:p>
+        </p:txBody>
+      </p:sp>
+      <p:sp>
+        <p:nvSpPr>
+          <p:cNvPr id="11" name="Rectangle 10"/>
+          <p:cNvSpPr/>
+          <p:nvPr/>
+        </p:nvSpPr>
+        <p:spPr>
+          <a:xfrm>
+            <a:off x="2798064" y="2926080"/>
+            <a:ext cx="329184" cy="329184"/>
+          </a:xfrm>
+          <a:prstGeom prst="rect">
+            <a:avLst/>
+          </a:prstGeom>
+          <a:solidFill>
+            <a:srgbClr val="43B02A"/>
+          </a:solidFill>
+          <a:ln>
+            <a:noFill/>
+          </a:ln>
+          <a:effectLst/>
+        </p:spPr>
+        <p:style>
+          <a:lnRef idx="1">
+            <a:schemeClr val="accent1"/>
+          </a:lnRef>
+          <a:fillRef idx="3">
+            <a:schemeClr val="accent1"/>
+          </a:fillRef>
+          <a:effectRef idx="2">
+            <a:schemeClr val="accent1"/>
+          </a:effectRef>
+          <a:fontRef idx="minor">
+            <a:schemeClr val="lt1"/>
+          </a:fontRef>
+        </p:style>
+        <p:txBody>
+          <a:bodyPr rtlCol="0" anchor="ctr"/>
+          <a:lstStyle/>
+          <a:p>
+            <a:pPr algn="ctr"/>
+          </a:p>
+        </p:txBody>
+      </p:sp>
+      <p:sp>
+        <p:nvSpPr>
+          <p:cNvPr id="12" name="Rectangle 11"/>
+          <p:cNvSpPr/>
+          <p:nvPr/>
+        </p:nvSpPr>
+        <p:spPr>
+          <a:xfrm>
+            <a:off x="3218688" y="2926080"/>
+            <a:ext cx="329184" cy="329184"/>
+          </a:xfrm>
+          <a:prstGeom prst="rect">
+            <a:avLst/>
+          </a:prstGeom>
+          <a:solidFill>
+            <a:srgbClr val="43B02A"/>
+          </a:solidFill>
+          <a:ln>
+            <a:noFill/>
+          </a:ln>
+          <a:effectLst/>
+        </p:spPr>
+        <p:style>
+          <a:lnRef idx="1">
+            <a:schemeClr val="accent1"/>
+          </a:lnRef>
+          <a:fillRef idx="3">
+            <a:schemeClr val="accent1"/>
+          </a:fillRef>
+          <a:effectRef idx="2">
+            <a:schemeClr val="accent1"/>
+          </a:effectRef>
+          <a:fontRef idx="minor">
+            <a:schemeClr val="lt1"/>
+          </a:fontRef>
+        </p:style>
+        <p:txBody>
+          <a:bodyPr rtlCol="0" anchor="ctr"/>
+          <a:lstStyle/>
+          <a:p>
+            <a:pPr algn="ctr"/>
+          </a:p>
+        </p:txBody>
+      </p:sp>
+      <p:sp>
+        <p:nvSpPr>
+          <p:cNvPr id="13" name="Rectangle 12"/>
+          <p:cNvSpPr/>
+          <p:nvPr/>
+        </p:nvSpPr>
+        <p:spPr>
+          <a:xfrm>
+            <a:off x="3639312" y="2926080"/>
+            <a:ext cx="329184" cy="329184"/>
+          </a:xfrm>
+          <a:prstGeom prst="rect">
+            <a:avLst/>
+          </a:prstGeom>
+          <a:solidFill>
+            <a:srgbClr val="43B02A"/>
+          </a:solidFill>
+          <a:ln>
+            <a:noFill/>
+          </a:ln>
+          <a:effectLst/>
+        </p:spPr>
+        <p:style>
+          <a:lnRef idx="1">
+            <a:schemeClr val="accent1"/>
+          </a:lnRef>
+          <a:fillRef idx="3">
+            <a:schemeClr val="accent1"/>
+          </a:fillRef>
+          <a:effectRef idx="2">
+            <a:schemeClr val="accent1"/>
+          </a:effectRef>
+          <a:fontRef idx="minor">
+            <a:schemeClr val="lt1"/>
+          </a:fontRef>
+        </p:style>
+        <p:txBody>
+          <a:bodyPr rtlCol="0" anchor="ctr"/>
+          <a:lstStyle/>
+          <a:p>
+            <a:pPr algn="ctr"/>
+          </a:p>
+        </p:txBody>
+      </p:sp>
+      <p:sp>
+        <p:nvSpPr>
+          <p:cNvPr id="14" name="Rectangle 13"/>
+          <p:cNvSpPr/>
+          <p:nvPr/>
+        </p:nvSpPr>
+        <p:spPr>
+          <a:xfrm>
+            <a:off x="4059936" y="2926080"/>
+            <a:ext cx="329184" cy="329184"/>
+          </a:xfrm>
+          <a:prstGeom prst="rect">
+            <a:avLst/>
+          </a:prstGeom>
+          <a:solidFill>
+            <a:srgbClr val="43B02A"/>
+          </a:solidFill>
+          <a:ln>
+            <a:noFill/>
+          </a:ln>
+          <a:effectLst/>
+        </p:spPr>
+        <p:style>
+          <a:lnRef idx="1">
+            <a:schemeClr val="accent1"/>
+          </a:lnRef>
+          <a:fillRef idx="3">
+            <a:schemeClr val="accent1"/>
+          </a:fillRef>
+          <a:effectRef idx="2">
+            <a:schemeClr val="accent1"/>
+          </a:effectRef>
+          <a:fontRef idx="minor">
+            <a:schemeClr val="lt1"/>
+          </a:fontRef>
+        </p:style>
+        <p:txBody>
+          <a:bodyPr rtlCol="0" anchor="ctr"/>
+          <a:lstStyle/>
+          <a:p>
+            <a:pPr algn="ctr"/>
+          </a:p>
+        </p:txBody>
+      </p:sp>
+      <p:sp>
+        <p:nvSpPr>
+          <p:cNvPr id="15" name="Rectangle 14"/>
+          <p:cNvSpPr/>
+          <p:nvPr/>
+        </p:nvSpPr>
+        <p:spPr>
+          <a:xfrm>
+            <a:off x="4480560" y="2926080"/>
+            <a:ext cx="329184" cy="329184"/>
+          </a:xfrm>
+          <a:prstGeom prst="rect">
+            <a:avLst/>
+          </a:prstGeom>
+          <a:solidFill>
+            <a:srgbClr val="43B02A"/>
+          </a:solidFill>
+          <a:ln>
+            <a:noFill/>
+          </a:ln>
+          <a:effectLst/>
+        </p:spPr>
+        <p:style>
+          <a:lnRef idx="1">
+            <a:schemeClr val="accent1"/>
+          </a:lnRef>
+          <a:fillRef idx="3">
+            <a:schemeClr val="accent1"/>
+          </a:fillRef>
+          <a:effectRef idx="2">
+            <a:schemeClr val="accent1"/>
+          </a:effectRef>
+          <a:fontRef idx="minor">
+            <a:schemeClr val="lt1"/>
+          </a:fontRef>
+        </p:style>
+        <p:txBody>
+          <a:bodyPr rtlCol="0" anchor="ctr"/>
+          <a:lstStyle/>
+          <a:p>
+            <a:pPr algn="ctr"/>
+          </a:p>
+        </p:txBody>
+      </p:sp>
+      <p:sp>
+        <p:nvSpPr>
+          <p:cNvPr id="16" name="Rectangle 15"/>
+          <p:cNvSpPr/>
+          <p:nvPr/>
+        </p:nvSpPr>
+        <p:spPr>
+          <a:xfrm>
+            <a:off x="4901184" y="2926080"/>
+            <a:ext cx="329184" cy="329184"/>
+          </a:xfrm>
+          <a:prstGeom prst="rect">
+            <a:avLst/>
+          </a:prstGeom>
+          <a:solidFill>
+            <a:srgbClr val="43B02A"/>
+          </a:solidFill>
+          <a:ln>
+            <a:noFill/>
+          </a:ln>
+          <a:effectLst/>
+        </p:spPr>
+        <p:style>
+          <a:lnRef idx="1">
+            <a:schemeClr val="accent1"/>
+          </a:lnRef>
+          <a:fillRef idx="3">
+            <a:schemeClr val="accent1"/>
+          </a:fillRef>
+          <a:effectRef idx="2">
+            <a:schemeClr val="accent1"/>
+          </a:effectRef>
+          <a:fontRef idx="minor">
+            <a:schemeClr val="lt1"/>
+          </a:fontRef>
+        </p:style>
+        <p:txBody>
+          <a:bodyPr rtlCol="0" anchor="ctr"/>
+          <a:lstStyle/>
+          <a:p>
+            <a:pPr algn="ctr"/>
+          </a:p>
+        </p:txBody>
+      </p:sp>
+      <p:sp>
+        <p:nvSpPr>
+          <p:cNvPr id="17" name="Rectangle 16"/>
+          <p:cNvSpPr/>
+          <p:nvPr/>
+        </p:nvSpPr>
+        <p:spPr>
+          <a:xfrm>
+            <a:off x="5321808" y="2926080"/>
+            <a:ext cx="329184" cy="329184"/>
+          </a:xfrm>
+          <a:prstGeom prst="rect">
+            <a:avLst/>
+          </a:prstGeom>
+          <a:solidFill>
+            <a:srgbClr val="43B02A"/>
+          </a:solidFill>
+          <a:ln>
+            <a:noFill/>
+          </a:ln>
+          <a:effectLst/>
+        </p:spPr>
+        <p:style>
+          <a:lnRef idx="1">
+            <a:schemeClr val="accent1"/>
+          </a:lnRef>
+          <a:fillRef idx="3">
+            <a:schemeClr val="accent1"/>
+          </a:fillRef>
+          <a:effectRef idx="2">
+            <a:schemeClr val="accent1"/>
+          </a:effectRef>
+          <a:fontRef idx="minor">
+            <a:schemeClr val="lt1"/>
+          </a:fontRef>
+        </p:style>
+        <p:txBody>
+          <a:bodyPr rtlCol="0" anchor="ctr"/>
+          <a:lstStyle/>
+          <a:p>
+            <a:pPr algn="ctr"/>
+          </a:p>
+        </p:txBody>
+      </p:sp>
+      <p:sp>
+        <p:nvSpPr>
+          <p:cNvPr id="18" name="Rectangle 17"/>
+          <p:cNvSpPr/>
+          <p:nvPr/>
+        </p:nvSpPr>
+        <p:spPr>
+          <a:xfrm>
+            <a:off x="5742432" y="2926080"/>
+            <a:ext cx="329184" cy="329184"/>
+          </a:xfrm>
+          <a:prstGeom prst="rect">
+            <a:avLst/>
+          </a:prstGeom>
+          <a:solidFill>
+            <a:srgbClr val="43B02A"/>
+          </a:solidFill>
+          <a:ln>
+            <a:noFill/>
+          </a:ln>
+          <a:effectLst/>
+        </p:spPr>
+        <p:style>
+          <a:lnRef idx="1">
+            <a:schemeClr val="accent1"/>
+          </a:lnRef>
+          <a:fillRef idx="3">
+            <a:schemeClr val="accent1"/>
+          </a:fillRef>
+          <a:effectRef idx="2">
+            <a:schemeClr val="accent1"/>
+          </a:effectRef>
+          <a:fontRef idx="minor">
+            <a:schemeClr val="lt1"/>
+          </a:fontRef>
+        </p:style>
+        <p:txBody>
+          <a:bodyPr rtlCol="0" anchor="ctr"/>
+          <a:lstStyle/>
+          <a:p>
+            <a:pPr algn="ctr"/>
+          </a:p>
+        </p:txBody>
+      </p:sp>
+      <p:sp>
+        <p:nvSpPr>
+          <p:cNvPr id="19" name="Rectangle 18"/>
+          <p:cNvSpPr/>
+          <p:nvPr/>
+        </p:nvSpPr>
+        <p:spPr>
+          <a:xfrm>
+            <a:off x="6163056" y="2926080"/>
+            <a:ext cx="329184" cy="329184"/>
+          </a:xfrm>
+          <a:prstGeom prst="rect">
+            <a:avLst/>
+          </a:prstGeom>
+          <a:solidFill>
+            <a:srgbClr val="43B02A"/>
+          </a:solidFill>
+          <a:ln>
+            <a:noFill/>
+          </a:ln>
+          <a:effectLst/>
+        </p:spPr>
+        <p:style>
+          <a:lnRef idx="1">
+            <a:schemeClr val="accent1"/>
+          </a:lnRef>
+          <a:fillRef idx="3">
+            <a:schemeClr val="accent1"/>
+          </a:fillRef>
+          <a:effectRef idx="2">
+            <a:schemeClr val="accent1"/>
+          </a:effectRef>
+          <a:fontRef idx="minor">
+            <a:schemeClr val="lt1"/>
+          </a:fontRef>
+        </p:style>
+        <p:txBody>
+          <a:bodyPr rtlCol="0" anchor="ctr"/>
+          <a:lstStyle/>
+          <a:p>
+            <a:pPr algn="ctr"/>
+          </a:p>
+        </p:txBody>
+      </p:sp>
+      <p:sp>
+        <p:nvSpPr>
+          <p:cNvPr id="20" name="Rectangle 19"/>
+          <p:cNvSpPr/>
+          <p:nvPr/>
+        </p:nvSpPr>
+        <p:spPr>
+          <a:xfrm>
+            <a:off x="6583680" y="2926080"/>
+            <a:ext cx="329184" cy="329184"/>
+          </a:xfrm>
+          <a:prstGeom prst="rect">
+            <a:avLst/>
+          </a:prstGeom>
+          <a:solidFill>
+            <a:srgbClr val="43B02A"/>
+          </a:solidFill>
+          <a:ln>
+            <a:noFill/>
+          </a:ln>
+          <a:effectLst/>
+        </p:spPr>
+        <p:style>
+          <a:lnRef idx="1">
+            <a:schemeClr val="accent1"/>
+          </a:lnRef>
+          <a:fillRef idx="3">
+            <a:schemeClr val="accent1"/>
+          </a:fillRef>
+          <a:effectRef idx="2">
+            <a:schemeClr val="accent1"/>
+          </a:effectRef>
+          <a:fontRef idx="minor">
+            <a:schemeClr val="lt1"/>
+          </a:fontRef>
+        </p:style>
+        <p:txBody>
+          <a:bodyPr rtlCol="0" anchor="ctr"/>
+          <a:lstStyle/>
+          <a:p>
+            <a:pPr algn="ctr"/>
+          </a:p>
+        </p:txBody>
+      </p:sp>
+      <p:sp>
+        <p:nvSpPr>
+          <p:cNvPr id="21" name="Rectangle 20"/>
+          <p:cNvSpPr/>
+          <p:nvPr/>
+        </p:nvSpPr>
+        <p:spPr>
+          <a:xfrm>
+            <a:off x="1115568" y="3346704"/>
+            <a:ext cx="329184" cy="329184"/>
+          </a:xfrm>
+          <a:prstGeom prst="rect">
+            <a:avLst/>
+          </a:prstGeom>
+          <a:solidFill>
+            <a:srgbClr val="43B02A"/>
+          </a:solidFill>
+          <a:ln>
+            <a:noFill/>
+          </a:ln>
+          <a:effectLst/>
+        </p:spPr>
+        <p:style>
+          <a:lnRef idx="1">
+            <a:schemeClr val="accent1"/>
+          </a:lnRef>
+          <a:fillRef idx="3">
+            <a:schemeClr val="accent1"/>
+          </a:fillRef>
+          <a:effectRef idx="2">
+            <a:schemeClr val="accent1"/>
+          </a:effectRef>
+          <a:fontRef idx="minor">
+            <a:schemeClr val="lt1"/>
+          </a:fontRef>
+        </p:style>
+        <p:txBody>
+          <a:bodyPr rtlCol="0" anchor="ctr"/>
+          <a:lstStyle/>
+          <a:p>
+            <a:pPr algn="ctr"/>
+          </a:p>
+        </p:txBody>
+      </p:sp>
+      <p:sp>
+        <p:nvSpPr>
+          <p:cNvPr id="22" name="Rectangle 21"/>
+          <p:cNvSpPr/>
+          <p:nvPr/>
+        </p:nvSpPr>
+        <p:spPr>
+          <a:xfrm>
+            <a:off x="1536192" y="3346704"/>
+            <a:ext cx="329184" cy="329184"/>
+          </a:xfrm>
+          <a:prstGeom prst="rect">
+            <a:avLst/>
+          </a:prstGeom>
+          <a:solidFill>
+            <a:srgbClr val="43B02A"/>
+          </a:solidFill>
+          <a:ln>
+            <a:noFill/>
+          </a:ln>
+          <a:effectLst/>
+        </p:spPr>
+        <p:style>
+          <a:lnRef idx="1">
+            <a:schemeClr val="accent1"/>
+          </a:lnRef>
+          <a:fillRef idx="3">
+            <a:schemeClr val="accent1"/>
+          </a:fillRef>
+          <a:effectRef idx="2">
+            <a:schemeClr val="accent1"/>
+          </a:effectRef>
+          <a:fontRef idx="minor">
+            <a:schemeClr val="lt1"/>
+          </a:fontRef>
+        </p:style>
+        <p:txBody>
+          <a:bodyPr rtlCol="0" anchor="ctr"/>
+          <a:lstStyle/>
+          <a:p>
+            <a:pPr algn="ctr"/>
+          </a:p>
+        </p:txBody>
+      </p:sp>
+      <p:sp>
+        <p:nvSpPr>
+          <p:cNvPr id="23" name="Rectangle 22"/>
+          <p:cNvSpPr/>
+          <p:nvPr/>
+        </p:nvSpPr>
+        <p:spPr>
+          <a:xfrm>
+            <a:off x="1956816" y="3346704"/>
+            <a:ext cx="329184" cy="329184"/>
+          </a:xfrm>
+          <a:prstGeom prst="rect">
+            <a:avLst/>
+          </a:prstGeom>
+          <a:solidFill>
+            <a:srgbClr val="43B02A"/>
+          </a:solidFill>
+          <a:ln>
+            <a:noFill/>
+          </a:ln>
+          <a:effectLst/>
+        </p:spPr>
+        <p:style>
+          <a:lnRef idx="1">
+            <a:schemeClr val="accent1"/>
+          </a:lnRef>
+          <a:fillRef idx="3">
+            <a:schemeClr val="accent1"/>
+          </a:fillRef>
+          <a:effectRef idx="2">
+            <a:schemeClr val="accent1"/>
+          </a:effectRef>
+          <a:fontRef idx="minor">
+            <a:schemeClr val="lt1"/>
+          </a:fontRef>
+        </p:style>
+        <p:txBody>
+          <a:bodyPr rtlCol="0" anchor="ctr"/>
+          <a:lstStyle/>
+          <a:p>
+            <a:pPr algn="ctr"/>
+          </a:p>
+        </p:txBody>
+      </p:sp>
+      <p:sp>
+        <p:nvSpPr>
+          <p:cNvPr id="24" name="Rectangle 23"/>
+          <p:cNvSpPr/>
+          <p:nvPr/>
+        </p:nvSpPr>
+        <p:spPr>
+          <a:xfrm>
+            <a:off x="2377440" y="3346704"/>
+            <a:ext cx="329184" cy="329184"/>
+          </a:xfrm>
+          <a:prstGeom prst="rect">
+            <a:avLst/>
+          </a:prstGeom>
+          <a:solidFill>
+            <a:srgbClr val="43B02A"/>
+          </a:solidFill>
+          <a:ln>
+            <a:noFill/>
+          </a:ln>
+          <a:effectLst/>
+        </p:spPr>
+        <p:style>
+          <a:lnRef idx="1">
+            <a:schemeClr val="accent1"/>
+          </a:lnRef>
+          <a:fillRef idx="3">
+            <a:schemeClr val="accent1"/>
+          </a:fillRef>
+          <a:effectRef idx="2">
+            <a:schemeClr val="accent1"/>
+          </a:effectRef>
+          <a:fontRef idx="minor">
+            <a:schemeClr val="lt1"/>
+          </a:fontRef>
+        </p:style>
+        <p:txBody>
+          <a:bodyPr rtlCol="0" anchor="ctr"/>
+          <a:lstStyle/>
+          <a:p>
+            <a:pPr algn="ctr"/>
+          </a:p>
+        </p:txBody>
+      </p:sp>
+      <p:sp>
+        <p:nvSpPr>
+          <p:cNvPr id="25" name="Rectangle 24"/>
+          <p:cNvSpPr/>
+          <p:nvPr/>
+        </p:nvSpPr>
+        <p:spPr>
+          <a:xfrm>
+            <a:off x="2798064" y="3346704"/>
+            <a:ext cx="329184" cy="329184"/>
+          </a:xfrm>
+          <a:prstGeom prst="rect">
+            <a:avLst/>
+          </a:prstGeom>
+          <a:solidFill>
+            <a:srgbClr val="A8DC98"/>
+          </a:solidFill>
+          <a:ln>
+            <a:noFill/>
+          </a:ln>
+          <a:effectLst/>
+        </p:spPr>
+        <p:style>
+          <a:lnRef idx="1">
+            <a:schemeClr val="accent1"/>
+          </a:lnRef>
+          <a:fillRef idx="3">
+            <a:schemeClr val="accent1"/>
+          </a:fillRef>
+          <a:effectRef idx="2">
+            <a:schemeClr val="accent1"/>
+          </a:effectRef>
+          <a:fontRef idx="minor">
+            <a:schemeClr val="lt1"/>
+          </a:fontRef>
+        </p:style>
+        <p:txBody>
+          <a:bodyPr rtlCol="0" anchor="ctr"/>
+          <a:lstStyle/>
+          <a:p>
+            <a:pPr algn="ctr"/>
+          </a:p>
+        </p:txBody>
+      </p:sp>
+      <p:sp>
+        <p:nvSpPr>
+          <p:cNvPr id="26" name="Rectangle 25"/>
+          <p:cNvSpPr/>
+          <p:nvPr/>
+        </p:nvSpPr>
+        <p:spPr>
+          <a:xfrm>
+            <a:off x="3218688" y="3346704"/>
+            <a:ext cx="329184" cy="329184"/>
+          </a:xfrm>
+          <a:prstGeom prst="rect">
+            <a:avLst/>
+          </a:prstGeom>
+          <a:solidFill>
+            <a:srgbClr val="A8DC98"/>
+          </a:solidFill>
+          <a:ln>
+            <a:noFill/>
+          </a:ln>
+          <a:effectLst/>
+        </p:spPr>
+        <p:style>
+          <a:lnRef idx="1">
+            <a:schemeClr val="accent1"/>
+          </a:lnRef>
+          <a:fillRef idx="3">
+            <a:schemeClr val="accent1"/>
+          </a:fillRef>
+          <a:effectRef idx="2">
+            <a:schemeClr val="accent1"/>
+          </a:effectRef>
+          <a:fontRef idx="minor">
+            <a:schemeClr val="lt1"/>
+          </a:fontRef>
+        </p:style>
+        <p:txBody>
+          <a:bodyPr rtlCol="0" anchor="ctr"/>
+          <a:lstStyle/>
+          <a:p>
+            <a:pPr algn="ctr"/>
+          </a:p>
+        </p:txBody>
+      </p:sp>
+      <p:sp>
+        <p:nvSpPr>
+          <p:cNvPr id="27" name="Rectangle 26"/>
+          <p:cNvSpPr/>
+          <p:nvPr/>
+        </p:nvSpPr>
+        <p:spPr>
+          <a:xfrm>
+            <a:off x="3639312" y="3346704"/>
+            <a:ext cx="329184" cy="329184"/>
+          </a:xfrm>
+          <a:prstGeom prst="rect">
+            <a:avLst/>
+          </a:prstGeom>
+          <a:solidFill>
+            <a:srgbClr val="A8DC98"/>
+          </a:solidFill>
+          <a:ln>
+            <a:noFill/>
+          </a:ln>
+          <a:effectLst/>
+        </p:spPr>
+        <p:style>
+          <a:lnRef idx="1">
+            <a:schemeClr val="accent1"/>
+          </a:lnRef>
+          <a:fillRef idx="3">
+            <a:schemeClr val="accent1"/>
+          </a:fillRef>
+          <a:effectRef idx="2">
+            <a:schemeClr val="accent1"/>
+          </a:effectRef>
+          <a:fontRef idx="minor">
+            <a:schemeClr val="lt1"/>
+          </a:fontRef>
+        </p:style>
+        <p:txBody>
+          <a:bodyPr rtlCol="0" anchor="ctr"/>
+          <a:lstStyle/>
+          <a:p>
+            <a:pPr algn="ctr"/>
+          </a:p>
+        </p:txBody>
+      </p:sp>
+      <p:sp>
+        <p:nvSpPr>
+          <p:cNvPr id="28" name="Rectangle 27"/>
+          <p:cNvSpPr/>
+          <p:nvPr/>
+        </p:nvSpPr>
+        <p:spPr>
+          <a:xfrm>
+            <a:off x="4059936" y="3346704"/>
+            <a:ext cx="329184" cy="329184"/>
+          </a:xfrm>
+          <a:prstGeom prst="rect">
+            <a:avLst/>
+          </a:prstGeom>
+          <a:solidFill>
+            <a:srgbClr val="A8DC98"/>
+          </a:solidFill>
+          <a:ln>
+            <a:noFill/>
+          </a:ln>
+          <a:effectLst/>
+        </p:spPr>
+        <p:style>
+          <a:lnRef idx="1">
+            <a:schemeClr val="accent1"/>
+          </a:lnRef>
+          <a:fillRef idx="3">
+            <a:schemeClr val="accent1"/>
+          </a:fillRef>
+          <a:effectRef idx="2">
+            <a:schemeClr val="accent1"/>
+          </a:effectRef>
+          <a:fontRef idx="minor">
+            <a:schemeClr val="lt1"/>
+          </a:fontRef>
+        </p:style>
+        <p:txBody>
+          <a:bodyPr rtlCol="0" anchor="ctr"/>
+          <a:lstStyle/>
+          <a:p>
+            <a:pPr algn="ctr"/>
+          </a:p>
+        </p:txBody>
+      </p:sp>
+      <p:sp>
+        <p:nvSpPr>
+          <p:cNvPr id="29" name="Rectangle 28"/>
+          <p:cNvSpPr/>
+          <p:nvPr/>
+        </p:nvSpPr>
+        <p:spPr>
+          <a:xfrm>
+            <a:off x="4480560" y="3346704"/>
+            <a:ext cx="329184" cy="329184"/>
+          </a:xfrm>
+          <a:prstGeom prst="rect">
+            <a:avLst/>
+          </a:prstGeom>
+          <a:solidFill>
+            <a:srgbClr val="A8DC98"/>
+          </a:solidFill>
+          <a:ln>
+            <a:noFill/>
+          </a:ln>
+          <a:effectLst/>
+        </p:spPr>
+        <p:style>
+          <a:lnRef idx="1">
+            <a:schemeClr val="accent1"/>
+          </a:lnRef>
+          <a:fillRef idx="3">
+            <a:schemeClr val="accent1"/>
+          </a:fillRef>
+          <a:effectRef idx="2">
+            <a:schemeClr val="accent1"/>
+          </a:effectRef>
+          <a:fontRef idx="minor">
+            <a:schemeClr val="lt1"/>
+          </a:fontRef>
+        </p:style>
+        <p:txBody>
+          <a:bodyPr rtlCol="0" anchor="ctr"/>
+          <a:lstStyle/>
+          <a:p>
+            <a:pPr algn="ctr"/>
+          </a:p>
+        </p:txBody>
+      </p:sp>
+      <p:sp>
+        <p:nvSpPr>
+          <p:cNvPr id="30" name="Rectangle 29"/>
+          <p:cNvSpPr/>
+          <p:nvPr/>
+        </p:nvSpPr>
+        <p:spPr>
+          <a:xfrm>
+            <a:off x="4901184" y="3346704"/>
+            <a:ext cx="329184" cy="329184"/>
+          </a:xfrm>
+          <a:prstGeom prst="rect">
+            <a:avLst/>
+          </a:prstGeom>
+          <a:solidFill>
+            <a:srgbClr val="A8DC98"/>
+          </a:solidFill>
+          <a:ln>
+            <a:noFill/>
+          </a:ln>
+          <a:effectLst/>
+        </p:spPr>
+        <p:style>
+          <a:lnRef idx="1">
+            <a:schemeClr val="accent1"/>
+          </a:lnRef>
+          <a:fillRef idx="3">
+            <a:schemeClr val="accent1"/>
+          </a:fillRef>
+          <a:effectRef idx="2">
+            <a:schemeClr val="accent1"/>
+          </a:effectRef>
+          <a:fontRef idx="minor">
+            <a:schemeClr val="lt1"/>
+          </a:fontRef>
+        </p:style>
+        <p:txBody>
+          <a:bodyPr rtlCol="0" anchor="ctr"/>
+          <a:lstStyle/>
+          <a:p>
+            <a:pPr algn="ctr"/>
+          </a:p>
+        </p:txBody>
+      </p:sp>
+      <p:sp>
+        <p:nvSpPr>
+          <p:cNvPr id="31" name="Rectangle 30"/>
+          <p:cNvSpPr/>
+          <p:nvPr/>
+        </p:nvSpPr>
+        <p:spPr>
+          <a:xfrm>
+            <a:off x="5321808" y="3346704"/>
+            <a:ext cx="329184" cy="329184"/>
+          </a:xfrm>
+          <a:prstGeom prst="rect">
+            <a:avLst/>
+          </a:prstGeom>
+          <a:solidFill>
+            <a:srgbClr val="A8DC98"/>
+          </a:solidFill>
+          <a:ln>
+            <a:noFill/>
+          </a:ln>
+          <a:effectLst/>
+        </p:spPr>
+        <p:style>
+          <a:lnRef idx="1">
+            <a:schemeClr val="accent1"/>
+          </a:lnRef>
+          <a:fillRef idx="3">
+            <a:schemeClr val="accent1"/>
+          </a:fillRef>
+          <a:effectRef idx="2">
+            <a:schemeClr val="accent1"/>
+          </a:effectRef>
+          <a:fontRef idx="minor">
+            <a:schemeClr val="lt1"/>
+          </a:fontRef>
+        </p:style>
+        <p:txBody>
+          <a:bodyPr rtlCol="0" anchor="ctr"/>
+          <a:lstStyle/>
+          <a:p>
+            <a:pPr algn="ctr"/>
+          </a:p>
+        </p:txBody>
+      </p:sp>
+      <p:sp>
+        <p:nvSpPr>
+          <p:cNvPr id="32" name="Rectangle 31"/>
+          <p:cNvSpPr/>
+          <p:nvPr/>
+        </p:nvSpPr>
+        <p:spPr>
+          <a:xfrm>
+            <a:off x="5742432" y="3346704"/>
+            <a:ext cx="329184" cy="329184"/>
+          </a:xfrm>
+          <a:prstGeom prst="rect">
+            <a:avLst/>
+          </a:prstGeom>
+          <a:solidFill>
+            <a:srgbClr val="A8DC98"/>
+          </a:solidFill>
+          <a:ln>
+            <a:noFill/>
+          </a:ln>
+          <a:effectLst/>
+        </p:spPr>
+        <p:style>
+          <a:lnRef idx="1">
+            <a:schemeClr val="accent1"/>
+          </a:lnRef>
+          <a:fillRef idx="3">
+            <a:schemeClr val="accent1"/>
+          </a:fillRef>
+          <a:effectRef idx="2">
+            <a:schemeClr val="accent1"/>
+          </a:effectRef>
+          <a:fontRef idx="minor">
+            <a:schemeClr val="lt1"/>
+          </a:fontRef>
+        </p:style>
+        <p:txBody>
+          <a:bodyPr rtlCol="0" anchor="ctr"/>
+          <a:lstStyle/>
+          <a:p>
+            <a:pPr algn="ctr"/>
+          </a:p>
+        </p:txBody>
+      </p:sp>
+      <p:sp>
+        <p:nvSpPr>
+          <p:cNvPr id="33" name="Rectangle 32"/>
+          <p:cNvSpPr/>
+          <p:nvPr/>
+        </p:nvSpPr>
+        <p:spPr>
+          <a:xfrm>
+            <a:off x="6163056" y="3346704"/>
+            <a:ext cx="329184" cy="329184"/>
+          </a:xfrm>
+          <a:prstGeom prst="rect">
+            <a:avLst/>
+          </a:prstGeom>
+          <a:solidFill>
+            <a:srgbClr val="A8DC98"/>
+          </a:solidFill>
+          <a:ln>
+            <a:noFill/>
+          </a:ln>
+          <a:effectLst/>
+        </p:spPr>
+        <p:style>
+          <a:lnRef idx="1">
+            <a:schemeClr val="accent1"/>
+          </a:lnRef>
+          <a:fillRef idx="3">
+            <a:schemeClr val="accent1"/>
+          </a:fillRef>
+          <a:effectRef idx="2">
+            <a:schemeClr val="accent1"/>
+          </a:effectRef>
+          <a:fontRef idx="minor">
+            <a:schemeClr val="lt1"/>
+          </a:fontRef>
+        </p:style>
+        <p:txBody>
+          <a:bodyPr rtlCol="0" anchor="ctr"/>
+          <a:lstStyle/>
+          <a:p>
+            <a:pPr algn="ctr"/>
+          </a:p>
+        </p:txBody>
+      </p:sp>
+      <p:sp>
+        <p:nvSpPr>
+          <p:cNvPr id="34" name="Rectangle 33"/>
+          <p:cNvSpPr/>
+          <p:nvPr/>
+        </p:nvSpPr>
+        <p:spPr>
+          <a:xfrm>
+            <a:off x="6583680" y="3346704"/>
+            <a:ext cx="329184" cy="329184"/>
+          </a:xfrm>
+          <a:prstGeom prst="rect">
+            <a:avLst/>
+          </a:prstGeom>
+          <a:solidFill>
+            <a:srgbClr val="A8DC98"/>
+          </a:solidFill>
+          <a:ln>
+            <a:noFill/>
+          </a:ln>
+          <a:effectLst/>
+        </p:spPr>
+        <p:style>
+          <a:lnRef idx="1">
+            <a:schemeClr val="accent1"/>
+          </a:lnRef>
+          <a:fillRef idx="3">
+            <a:schemeClr val="accent1"/>
+          </a:fillRef>
+          <a:effectRef idx="2">
+            <a:schemeClr val="accent1"/>
+          </a:effectRef>
+          <a:fontRef idx="minor">
+            <a:schemeClr val="lt1"/>
+          </a:fontRef>
+        </p:style>
+        <p:txBody>
+          <a:bodyPr rtlCol="0" anchor="ctr"/>
+          <a:lstStyle/>
+          <a:p>
+            <a:pPr algn="ctr"/>
+          </a:p>
+        </p:txBody>
+      </p:sp>
+      <p:sp>
+        <p:nvSpPr>
+          <p:cNvPr id="35" name="Rectangle 34"/>
+          <p:cNvSpPr/>
+          <p:nvPr/>
+        </p:nvSpPr>
+        <p:spPr>
+          <a:xfrm>
+            <a:off x="1115568" y="3767328"/>
+            <a:ext cx="329184" cy="329184"/>
+          </a:xfrm>
+          <a:prstGeom prst="rect">
+            <a:avLst/>
+          </a:prstGeom>
+          <a:solidFill>
+            <a:srgbClr val="A8DC98"/>
+          </a:solidFill>
+          <a:ln>
+            <a:noFill/>
+          </a:ln>
+          <a:effectLst/>
+        </p:spPr>
+        <p:style>
+          <a:lnRef idx="1">
+            <a:schemeClr val="accent1"/>
+          </a:lnRef>
+          <a:fillRef idx="3">
+            <a:schemeClr val="accent1"/>
+          </a:fillRef>
+          <a:effectRef idx="2">
+            <a:schemeClr val="accent1"/>
+          </a:effectRef>
+          <a:fontRef idx="minor">
+            <a:schemeClr val="lt1"/>
+          </a:fontRef>
+        </p:style>
+        <p:txBody>
+          <a:bodyPr rtlCol="0" anchor="ctr"/>
+          <a:lstStyle/>
+          <a:p>
+            <a:pPr algn="ctr"/>
+          </a:p>
+        </p:txBody>
+      </p:sp>
+      <p:sp>
+        <p:nvSpPr>
+          <p:cNvPr id="36" name="Rectangle 35"/>
+          <p:cNvSpPr/>
+          <p:nvPr/>
+        </p:nvSpPr>
+        <p:spPr>
+          <a:xfrm>
+            <a:off x="1536192" y="3767328"/>
+            <a:ext cx="329184" cy="329184"/>
+          </a:xfrm>
+          <a:prstGeom prst="rect">
+            <a:avLst/>
+          </a:prstGeom>
+          <a:solidFill>
+            <a:srgbClr val="A8DC98"/>
+          </a:solidFill>
+          <a:ln>
+            <a:noFill/>
+          </a:ln>
+          <a:effectLst/>
+        </p:spPr>
+        <p:style>
+          <a:lnRef idx="1">
+            <a:schemeClr val="accent1"/>
+          </a:lnRef>
+          <a:fillRef idx="3">
+            <a:schemeClr val="accent1"/>
+          </a:fillRef>
+          <a:effectRef idx="2">
+            <a:schemeClr val="accent1"/>
+          </a:effectRef>
+          <a:fontRef idx="minor">
+            <a:schemeClr val="lt1"/>
+          </a:fontRef>
+        </p:style>
+        <p:txBody>
+          <a:bodyPr rtlCol="0" anchor="ctr"/>
+          <a:lstStyle/>
+          <a:p>
+            <a:pPr algn="ctr"/>
+          </a:p>
+        </p:txBody>
+      </p:sp>
+      <p:sp>
+        <p:nvSpPr>
+          <p:cNvPr id="37" name="Rectangle 36"/>
+          <p:cNvSpPr/>
+          <p:nvPr/>
+        </p:nvSpPr>
+        <p:spPr>
+          <a:xfrm>
+            <a:off x="1956816" y="3767328"/>
+            <a:ext cx="329184" cy="329184"/>
+          </a:xfrm>
+          <a:prstGeom prst="rect">
+            <a:avLst/>
+          </a:prstGeom>
+          <a:solidFill>
+            <a:srgbClr val="A8DC98"/>
+          </a:solidFill>
+          <a:ln>
+            <a:noFill/>
+          </a:ln>
+          <a:effectLst/>
+        </p:spPr>
+        <p:style>
+          <a:lnRef idx="1">
+            <a:schemeClr val="accent1"/>
+          </a:lnRef>
+          <a:fillRef idx="3">
+            <a:schemeClr val="accent1"/>
+          </a:fillRef>
+          <a:effectRef idx="2">
+            <a:schemeClr val="accent1"/>
+          </a:effectRef>
+          <a:fontRef idx="minor">
+            <a:schemeClr val="lt1"/>
+          </a:fontRef>
+        </p:style>
+        <p:txBody>
+          <a:bodyPr rtlCol="0" anchor="ctr"/>
+          <a:lstStyle/>
+          <a:p>
+            <a:pPr algn="ctr"/>
+          </a:p>
+        </p:txBody>
+      </p:sp>
+      <p:sp>
+        <p:nvSpPr>
+          <p:cNvPr id="38" name="Rectangle 37"/>
+          <p:cNvSpPr/>
+          <p:nvPr/>
+        </p:nvSpPr>
+        <p:spPr>
+          <a:xfrm>
+            <a:off x="2377440" y="3767328"/>
+            <a:ext cx="329184" cy="329184"/>
+          </a:xfrm>
+          <a:prstGeom prst="rect">
+            <a:avLst/>
+          </a:prstGeom>
+          <a:solidFill>
+            <a:srgbClr val="A8DC98"/>
+          </a:solidFill>
+          <a:ln>
+            <a:noFill/>
+          </a:ln>
+          <a:effectLst/>
+        </p:spPr>
+        <p:style>
+          <a:lnRef idx="1">
+            <a:schemeClr val="accent1"/>
+          </a:lnRef>
+          <a:fillRef idx="3">
+            <a:schemeClr val="accent1"/>
+          </a:fillRef>
+          <a:effectRef idx="2">
+            <a:schemeClr val="accent1"/>
+          </a:effectRef>
+          <a:fontRef idx="minor">
+            <a:schemeClr val="lt1"/>
+          </a:fontRef>
+        </p:style>
+        <p:txBody>
+          <a:bodyPr rtlCol="0" anchor="ctr"/>
+          <a:lstStyle/>
+          <a:p>
+            <a:pPr algn="ctr"/>
+          </a:p>
+        </p:txBody>
+      </p:sp>
+      <p:sp>
+        <p:nvSpPr>
+          <p:cNvPr id="39" name="Rectangle 38"/>
+          <p:cNvSpPr/>
+          <p:nvPr/>
+        </p:nvSpPr>
+        <p:spPr>
+          <a:xfrm>
+            <a:off x="2798064" y="3767328"/>
+            <a:ext cx="329184" cy="329184"/>
+          </a:xfrm>
+          <a:prstGeom prst="rect">
+            <a:avLst/>
+          </a:prstGeom>
+          <a:solidFill>
+            <a:srgbClr val="A8DC98"/>
+          </a:solidFill>
+          <a:ln>
+            <a:noFill/>
+          </a:ln>
+          <a:effectLst/>
+        </p:spPr>
+        <p:style>
+          <a:lnRef idx="1">
+            <a:schemeClr val="accent1"/>
+          </a:lnRef>
+          <a:fillRef idx="3">
+            <a:schemeClr val="accent1"/>
+          </a:fillRef>
+          <a:effectRef idx="2">
+            <a:schemeClr val="accent1"/>
+          </a:effectRef>
+          <a:fontRef idx="minor">
+            <a:schemeClr val="lt1"/>
+          </a:fontRef>
+        </p:style>
+        <p:txBody>
+          <a:bodyPr rtlCol="0" anchor="ctr"/>
+          <a:lstStyle/>
+          <a:p>
+            <a:pPr algn="ctr"/>
+          </a:p>
+        </p:txBody>
+      </p:sp>
+      <p:sp>
+        <p:nvSpPr>
+          <p:cNvPr id="40" name="Rectangle 39"/>
+          <p:cNvSpPr/>
+          <p:nvPr/>
+        </p:nvSpPr>
+        <p:spPr>
+          <a:xfrm>
+            <a:off x="3218688" y="3767328"/>
+            <a:ext cx="329184" cy="329184"/>
+          </a:xfrm>
+          <a:prstGeom prst="rect">
+            <a:avLst/>
+          </a:prstGeom>
+          <a:solidFill>
+            <a:srgbClr val="A8DC98"/>
+          </a:solidFill>
+          <a:ln>
+            <a:noFill/>
+          </a:ln>
+          <a:effectLst/>
+        </p:spPr>
+        <p:style>
+          <a:lnRef idx="1">
+            <a:schemeClr val="accent1"/>
+          </a:lnRef>
+          <a:fillRef idx="3">
+            <a:schemeClr val="accent1"/>
+          </a:fillRef>
+          <a:effectRef idx="2">
+            <a:schemeClr val="accent1"/>
+          </a:effectRef>
+          <a:fontRef idx="minor">
+            <a:schemeClr val="lt1"/>
+          </a:fontRef>
+        </p:style>
+        <p:txBody>
+          <a:bodyPr rtlCol="0" anchor="ctr"/>
+          <a:lstStyle/>
+          <a:p>
+            <a:pPr algn="ctr"/>
+          </a:p>
+        </p:txBody>
+      </p:sp>
+      <p:sp>
+        <p:nvSpPr>
+          <p:cNvPr id="41" name="Rectangle 40"/>
+          <p:cNvSpPr/>
+          <p:nvPr/>
+        </p:nvSpPr>
+        <p:spPr>
+          <a:xfrm>
+            <a:off x="3639312" y="3767328"/>
+            <a:ext cx="329184" cy="329184"/>
+          </a:xfrm>
+          <a:prstGeom prst="rect">
+            <a:avLst/>
+          </a:prstGeom>
+          <a:solidFill>
+            <a:srgbClr val="A8DC98"/>
+          </a:solidFill>
+          <a:ln>
+            <a:noFill/>
+          </a:ln>
+          <a:effectLst/>
+        </p:spPr>
+        <p:style>
+          <a:lnRef idx="1">
+            <a:schemeClr val="accent1"/>
+          </a:lnRef>
+          <a:fillRef idx="3">
+            <a:schemeClr val="accent1"/>
+          </a:fillRef>
+          <a:effectRef idx="2">
+            <a:schemeClr val="accent1"/>
+          </a:effectRef>
+          <a:fontRef idx="minor">
+            <a:schemeClr val="lt1"/>
+          </a:fontRef>
+        </p:style>
+        <p:txBody>
+          <a:bodyPr rtlCol="0" anchor="ctr"/>
+          <a:lstStyle/>
+          <a:p>
+            <a:pPr algn="ctr"/>
+          </a:p>
+        </p:txBody>
+      </p:sp>
+      <p:sp>
+        <p:nvSpPr>
+          <p:cNvPr id="42" name="Rectangle 41"/>
+          <p:cNvSpPr/>
+          <p:nvPr/>
+        </p:nvSpPr>
+        <p:spPr>
+          <a:xfrm>
+            <a:off x="4059936" y="3767328"/>
+            <a:ext cx="329184" cy="329184"/>
+          </a:xfrm>
+          <a:prstGeom prst="rect">
+            <a:avLst/>
+          </a:prstGeom>
+          <a:solidFill>
+            <a:srgbClr val="A8DC98"/>
+          </a:solidFill>
+          <a:ln>
+            <a:noFill/>
+          </a:ln>
+          <a:effectLst/>
+        </p:spPr>
+        <p:style>
+          <a:lnRef idx="1">
+            <a:schemeClr val="accent1"/>
+          </a:lnRef>
+          <a:fillRef idx="3">
+            <a:schemeClr val="accent1"/>
+          </a:fillRef>
+          <a:effectRef idx="2">
+            <a:schemeClr val="accent1"/>
+          </a:effectRef>
+          <a:fontRef idx="minor">
+            <a:schemeClr val="lt1"/>
+          </a:fontRef>
+        </p:style>
+        <p:txBody>
+          <a:bodyPr rtlCol="0" anchor="ctr"/>
+          <a:lstStyle/>
+          <a:p>
+            <a:pPr algn="ctr"/>
+          </a:p>
+        </p:txBody>
+      </p:sp>
+      <p:sp>
+        <p:nvSpPr>
+          <p:cNvPr id="43" name="Rectangle 42"/>
+          <p:cNvSpPr/>
+          <p:nvPr/>
+        </p:nvSpPr>
+        <p:spPr>
+          <a:xfrm>
+            <a:off x="4480560" y="3767328"/>
+            <a:ext cx="329184" cy="329184"/>
+          </a:xfrm>
+          <a:prstGeom prst="rect">
+            <a:avLst/>
+          </a:prstGeom>
+          <a:solidFill>
+            <a:srgbClr val="A8DC98"/>
+          </a:solidFill>
+          <a:ln>
+            <a:noFill/>
+          </a:ln>
+          <a:effectLst/>
+        </p:spPr>
+        <p:style>
+          <a:lnRef idx="1">
+            <a:schemeClr val="accent1"/>
+          </a:lnRef>
+          <a:fillRef idx="3">
+            <a:schemeClr val="accent1"/>
+          </a:fillRef>
+          <a:effectRef idx="2">
+            <a:schemeClr val="accent1"/>
+          </a:effectRef>
+          <a:fontRef idx="minor">
+            <a:schemeClr val="lt1"/>
+          </a:fontRef>
+        </p:style>
+        <p:txBody>
+          <a:bodyPr rtlCol="0" anchor="ctr"/>
+          <a:lstStyle/>
+          <a:p>
+            <a:pPr algn="ctr"/>
+          </a:p>
+        </p:txBody>
+      </p:sp>
+      <p:sp>
+        <p:nvSpPr>
+          <p:cNvPr id="44" name="Rectangle 43"/>
+          <p:cNvSpPr/>
+          <p:nvPr/>
+        </p:nvSpPr>
+        <p:spPr>
+          <a:xfrm>
+            <a:off x="4901184" y="3767328"/>
+            <a:ext cx="329184" cy="329184"/>
+          </a:xfrm>
+          <a:prstGeom prst="rect">
+            <a:avLst/>
+          </a:prstGeom>
+          <a:solidFill>
+            <a:srgbClr val="A8DC98"/>
+          </a:solidFill>
+          <a:ln>
+            <a:noFill/>
+          </a:ln>
+          <a:effectLst/>
+        </p:spPr>
+        <p:style>
+          <a:lnRef idx="1">
+            <a:schemeClr val="accent1"/>
+          </a:lnRef>
+          <a:fillRef idx="3">
+            <a:schemeClr val="accent1"/>
+          </a:fillRef>
+          <a:effectRef idx="2">
+            <a:schemeClr val="accent1"/>
+          </a:effectRef>
+          <a:fontRef idx="minor">
+            <a:schemeClr val="lt1"/>
+          </a:fontRef>
+        </p:style>
+        <p:txBody>
+          <a:bodyPr rtlCol="0" anchor="ctr"/>
+          <a:lstStyle/>
+          <a:p>
+            <a:pPr algn="ctr"/>
+          </a:p>
+        </p:txBody>
+      </p:sp>
+      <p:sp>
+        <p:nvSpPr>
+          <p:cNvPr id="45" name="Rectangle 44"/>
+          <p:cNvSpPr/>
+          <p:nvPr/>
+        </p:nvSpPr>
+        <p:spPr>
+          <a:xfrm>
+            <a:off x="5321808" y="3767328"/>
+            <a:ext cx="329184" cy="329184"/>
+          </a:xfrm>
+          <a:prstGeom prst="rect">
+            <a:avLst/>
+          </a:prstGeom>
+          <a:solidFill>
+            <a:srgbClr val="EB5757"/>
+          </a:solidFill>
+          <a:ln>
+            <a:noFill/>
+          </a:ln>
+          <a:effectLst/>
+        </p:spPr>
+        <p:style>
+          <a:lnRef idx="1">
+            <a:schemeClr val="accent1"/>
+          </a:lnRef>
+          <a:fillRef idx="3">
+            <a:schemeClr val="accent1"/>
+          </a:fillRef>
+          <a:effectRef idx="2">
+            <a:schemeClr val="accent1"/>
+          </a:effectRef>
+          <a:fontRef idx="minor">
+            <a:schemeClr val="lt1"/>
+          </a:fontRef>
+        </p:style>
+        <p:txBody>
+          <a:bodyPr rtlCol="0" anchor="ctr"/>
+          <a:lstStyle/>
+          <a:p>
+            <a:pPr algn="ctr"/>
+          </a:p>
+        </p:txBody>
+      </p:sp>
+      <p:sp>
+        <p:nvSpPr>
+          <p:cNvPr id="46" name="Rectangle 45"/>
+          <p:cNvSpPr/>
+          <p:nvPr/>
+        </p:nvSpPr>
+        <p:spPr>
+          <a:xfrm>
+            <a:off x="5742432" y="3767328"/>
+            <a:ext cx="329184" cy="329184"/>
+          </a:xfrm>
+          <a:prstGeom prst="rect">
+            <a:avLst/>
+          </a:prstGeom>
+          <a:solidFill>
+            <a:srgbClr val="EB5757"/>
+          </a:solidFill>
+          <a:ln>
+            <a:noFill/>
+          </a:ln>
+          <a:effectLst/>
+        </p:spPr>
+        <p:style>
+          <a:lnRef idx="1">
+            <a:schemeClr val="accent1"/>
+          </a:lnRef>
+          <a:fillRef idx="3">
+            <a:schemeClr val="accent1"/>
+          </a:fillRef>
+          <a:effectRef idx="2">
+            <a:schemeClr val="accent1"/>
+          </a:effectRef>
+          <a:fontRef idx="minor">
+            <a:schemeClr val="lt1"/>
+          </a:fontRef>
+        </p:style>
+        <p:txBody>
+          <a:bodyPr rtlCol="0" anchor="ctr"/>
+          <a:lstStyle/>
+          <a:p>
+            <a:pPr algn="ctr"/>
+          </a:p>
+        </p:txBody>
+      </p:sp>
+      <p:sp>
+        <p:nvSpPr>
+          <p:cNvPr id="47" name="Rectangle 46"/>
+          <p:cNvSpPr/>
+          <p:nvPr/>
+        </p:nvSpPr>
+        <p:spPr>
+          <a:xfrm>
+            <a:off x="6163056" y="3767328"/>
+            <a:ext cx="329184" cy="329184"/>
+          </a:xfrm>
+          <a:prstGeom prst="rect">
+            <a:avLst/>
+          </a:prstGeom>
+          <a:solidFill>
+            <a:srgbClr val="EB5757"/>
+          </a:solidFill>
+          <a:ln>
+            <a:noFill/>
+          </a:ln>
+          <a:effectLst/>
+        </p:spPr>
+        <p:style>
+          <a:lnRef idx="1">
+            <a:schemeClr val="accent1"/>
+          </a:lnRef>
+          <a:fillRef idx="3">
+            <a:schemeClr val="accent1"/>
+          </a:fillRef>
+          <a:effectRef idx="2">
+            <a:schemeClr val="accent1"/>
+          </a:effectRef>
+          <a:fontRef idx="minor">
+            <a:schemeClr val="lt1"/>
+          </a:fontRef>
+        </p:style>
+        <p:txBody>
+          <a:bodyPr rtlCol="0" anchor="ctr"/>
+          <a:lstStyle/>
+          <a:p>
+            <a:pPr algn="ctr"/>
+          </a:p>
+        </p:txBody>
+      </p:sp>
+      <p:sp>
+        <p:nvSpPr>
+          <p:cNvPr id="48" name="Rectangle 47"/>
+          <p:cNvSpPr/>
+          <p:nvPr/>
+        </p:nvSpPr>
+        <p:spPr>
+          <a:xfrm>
+            <a:off x="6583680" y="3767328"/>
+            <a:ext cx="329184" cy="329184"/>
+          </a:xfrm>
+          <a:prstGeom prst="rect">
+            <a:avLst/>
+          </a:prstGeom>
+          <a:solidFill>
+            <a:srgbClr val="EB5757"/>
+          </a:solidFill>
+          <a:ln>
+            <a:noFill/>
+          </a:ln>
+          <a:effectLst/>
+        </p:spPr>
+        <p:style>
+          <a:lnRef idx="1">
+            <a:schemeClr val="accent1"/>
+          </a:lnRef>
+          <a:fillRef idx="3">
+            <a:schemeClr val="accent1"/>
+          </a:fillRef>
+          <a:effectRef idx="2">
+            <a:schemeClr val="accent1"/>
+          </a:effectRef>
+          <a:fontRef idx="minor">
+            <a:schemeClr val="lt1"/>
+          </a:fontRef>
+        </p:style>
+        <p:txBody>
+          <a:bodyPr rtlCol="0" anchor="ctr"/>
+          <a:lstStyle/>
+          <a:p>
+            <a:pPr algn="ctr"/>
+          </a:p>
+        </p:txBody>
+      </p:sp>
+      <p:sp>
+        <p:nvSpPr>
+          <p:cNvPr id="49" name="Rectangle 48"/>
+          <p:cNvSpPr/>
+          <p:nvPr/>
+        </p:nvSpPr>
+        <p:spPr>
+          <a:xfrm>
+            <a:off x="1115568" y="4919472"/>
+            <a:ext cx="146304" cy="146304"/>
+          </a:xfrm>
+          <a:prstGeom prst="rect">
+            <a:avLst/>
+          </a:prstGeom>
+          <a:solidFill>
+            <a:srgbClr val="43B02A"/>
+          </a:solidFill>
+          <a:ln>
+            <a:noFill/>
+          </a:ln>
+          <a:effectLst/>
+        </p:spPr>
+        <p:style>
+          <a:lnRef idx="1">
+            <a:schemeClr val="accent1"/>
+          </a:lnRef>
+          <a:fillRef idx="3">
+            <a:schemeClr val="accent1"/>
+          </a:fillRef>
+          <a:effectRef idx="2">
+            <a:schemeClr val="accent1"/>
+          </a:effectRef>
+          <a:fontRef idx="minor">
+            <a:schemeClr val="lt1"/>
+          </a:fontRef>
+        </p:style>
+        <p:txBody>
+          <a:bodyPr rtlCol="0" anchor="ctr"/>
+          <a:lstStyle/>
+          <a:p>
+            <a:pPr algn="ctr"/>
+          </a:p>
+        </p:txBody>
+      </p:sp>
+      <p:sp>
+        <p:nvSpPr>
+          <p:cNvPr id="50" name="TextBox 49"/>
+          <p:cNvSpPr txBox="1"/>
+          <p:nvPr/>
+        </p:nvSpPr>
+        <p:spPr>
+          <a:xfrm>
+            <a:off x="1353312" y="4892040"/>
+            <a:ext cx="2651760" cy="228600"/>
+          </a:xfrm>
+          <a:prstGeom prst="rect">
+            <a:avLst/>
+          </a:prstGeom>
+          <a:noFill/>
+        </p:spPr>
+        <p:txBody>
+          <a:bodyPr wrap="square" lIns="0" rIns="0" tIns="0" bIns="0">
+            <a:spAutoFit/>
+          </a:bodyPr>
+          <a:lstStyle/>
+          <a:p>
+            <a:pPr algn="l">
+              <a:lnSpc>
+                <a:spcPct val="132000"/>
+              </a:lnSpc>
+            </a:pPr>
+            <a:r>
+              <a:rPr sz="1200" b="0">
+                <a:solidFill>
+                  <a:srgbClr val="6B7280"/>
+                </a:solidFill>
+                <a:latin typeface="Inter Tight"/>
+              </a:rPr>
+              <a:t>18 — точно</a:t>
+            </a:r>
+          </a:p>
+        </p:txBody>
+      </p:sp>
+      <p:sp>
+        <p:nvSpPr>
+          <p:cNvPr id="51" name="Rectangle 50"/>
+          <p:cNvSpPr/>
+          <p:nvPr/>
+        </p:nvSpPr>
+        <p:spPr>
+          <a:xfrm>
+            <a:off x="3995928" y="4919472"/>
+            <a:ext cx="146304" cy="146304"/>
+          </a:xfrm>
+          <a:prstGeom prst="rect">
+            <a:avLst/>
+          </a:prstGeom>
+          <a:solidFill>
+            <a:srgbClr val="A8DC98"/>
+          </a:solidFill>
+          <a:ln>
+            <a:noFill/>
+          </a:ln>
+          <a:effectLst/>
+        </p:spPr>
+        <p:style>
+          <a:lnRef idx="1">
+            <a:schemeClr val="accent1"/>
+          </a:lnRef>
+          <a:fillRef idx="3">
+            <a:schemeClr val="accent1"/>
+          </a:fillRef>
+          <a:effectRef idx="2">
+            <a:schemeClr val="accent1"/>
+          </a:effectRef>
+          <a:fontRef idx="minor">
+            <a:schemeClr val="lt1"/>
+          </a:fontRef>
+        </p:style>
+        <p:txBody>
+          <a:bodyPr rtlCol="0" anchor="ctr"/>
+          <a:lstStyle/>
+          <a:p>
+            <a:pPr algn="ctr"/>
+          </a:p>
+        </p:txBody>
+      </p:sp>
+      <p:sp>
+        <p:nvSpPr>
+          <p:cNvPr id="52" name="TextBox 51"/>
+          <p:cNvSpPr txBox="1"/>
+          <p:nvPr/>
+        </p:nvSpPr>
+        <p:spPr>
+          <a:xfrm>
+            <a:off x="4233672" y="4892040"/>
+            <a:ext cx="2651760" cy="228600"/>
+          </a:xfrm>
+          <a:prstGeom prst="rect">
+            <a:avLst/>
+          </a:prstGeom>
+          <a:noFill/>
+        </p:spPr>
+        <p:txBody>
+          <a:bodyPr wrap="square" lIns="0" rIns="0" tIns="0" bIns="0">
+            <a:spAutoFit/>
+          </a:bodyPr>
+          <a:lstStyle/>
+          <a:p>
+            <a:pPr algn="l">
+              <a:lnSpc>
+                <a:spcPct val="132000"/>
+              </a:lnSpc>
+            </a:pPr>
+            <a:r>
+              <a:rPr sz="1200" b="0">
+                <a:solidFill>
+                  <a:srgbClr val="6B7280"/>
+                </a:solidFill>
+                <a:latin typeface="Inter Tight"/>
+              </a:rPr>
+              <a:t>20 — на ступень</a:t>
+            </a:r>
+          </a:p>
+        </p:txBody>
+      </p:sp>
+      <p:sp>
+        <p:nvSpPr>
+          <p:cNvPr id="53" name="Rectangle 52"/>
+          <p:cNvSpPr/>
+          <p:nvPr/>
+        </p:nvSpPr>
+        <p:spPr>
+          <a:xfrm>
+            <a:off x="6876288" y="4919472"/>
+            <a:ext cx="146304" cy="146304"/>
+          </a:xfrm>
+          <a:prstGeom prst="rect">
+            <a:avLst/>
+          </a:prstGeom>
+          <a:solidFill>
+            <a:srgbClr val="EB5757"/>
+          </a:solidFill>
+          <a:ln>
+            <a:noFill/>
+          </a:ln>
+          <a:effectLst/>
+        </p:spPr>
+        <p:style>
+          <a:lnRef idx="1">
+            <a:schemeClr val="accent1"/>
+          </a:lnRef>
+          <a:fillRef idx="3">
+            <a:schemeClr val="accent1"/>
+          </a:fillRef>
+          <a:effectRef idx="2">
+            <a:schemeClr val="accent1"/>
+          </a:effectRef>
+          <a:fontRef idx="minor">
+            <a:schemeClr val="lt1"/>
+          </a:fontRef>
+        </p:style>
+        <p:txBody>
+          <a:bodyPr rtlCol="0" anchor="ctr"/>
+          <a:lstStyle/>
+          <a:p>
+            <a:pPr algn="ctr"/>
+          </a:p>
+        </p:txBody>
+      </p:sp>
+      <p:sp>
+        <p:nvSpPr>
+          <p:cNvPr id="54" name="TextBox 53"/>
+          <p:cNvSpPr txBox="1"/>
+          <p:nvPr/>
+        </p:nvSpPr>
+        <p:spPr>
+          <a:xfrm>
+            <a:off x="7114032" y="4892040"/>
+            <a:ext cx="2651760" cy="228600"/>
+          </a:xfrm>
+          <a:prstGeom prst="rect">
+            <a:avLst/>
+          </a:prstGeom>
+          <a:noFill/>
+        </p:spPr>
+        <p:txBody>
+          <a:bodyPr wrap="square" lIns="0" rIns="0" tIns="0" bIns="0">
+            <a:spAutoFit/>
+          </a:bodyPr>
+          <a:lstStyle/>
+          <a:p>
+            <a:pPr algn="l">
+              <a:lnSpc>
+                <a:spcPct val="132000"/>
+              </a:lnSpc>
+            </a:pPr>
+            <a:r>
+              <a:rPr sz="1200" b="0">
+                <a:solidFill>
+                  <a:srgbClr val="6B7280"/>
+                </a:solidFill>
+                <a:latin typeface="Inter Tight"/>
+              </a:rPr>
+              <a:t>4 — дальше</a:t>
+            </a:r>
+          </a:p>
+        </p:txBody>
+      </p:sp>
+      <p:sp>
+        <p:nvSpPr>
+          <p:cNvPr id="55" name="Rounded Rectangle 54"/>
+          <p:cNvSpPr/>
+          <p:nvPr/>
+        </p:nvSpPr>
+        <p:spPr>
+          <a:xfrm>
+            <a:off x="8046720" y="2240280"/>
+            <a:ext cx="3474720" cy="1481328"/>
           </a:xfrm>
           <a:prstGeom prst="roundRect">
             <a:avLst>
@@ -8402,14 +9686,14 @@
       </p:sp>
       <p:sp>
         <p:nvSpPr>
-          <p:cNvPr id="6" name="TextBox 5"/>
+          <p:cNvPr id="56" name="TextBox 55"/>
           <p:cNvSpPr txBox="1"/>
           <p:nvPr/>
         </p:nvSpPr>
         <p:spPr>
           <a:xfrm>
-            <a:off x="1143000" y="3017520"/>
-            <a:ext cx="6035040" cy="365760"/>
+            <a:off x="8366760" y="2468880"/>
+            <a:ext cx="2926080" cy="731520"/>
           </a:xfrm>
           <a:prstGeom prst="rect">
             <a:avLst/>
@@ -8424,31 +9708,31 @@
           <a:p>
             <a:pPr algn="l">
               <a:lnSpc>
-                <a:spcPct val="132000"/>
+                <a:spcPct val="100000"/>
               </a:lnSpc>
             </a:pPr>
             <a:r>
-              <a:rPr sz="2400" b="1">
-                <a:solidFill>
-                  <a:srgbClr val="F2F4F3"/>
+              <a:rPr sz="4000" b="1">
+                <a:solidFill>
+                  <a:srgbClr val="43B02A"/>
                 </a:solidFill>
                 <a:latin typeface="Inter Tight"/>
               </a:rPr>
-              <a:t>Точность фильтрации</a:t>
-            </a:r>
-          </a:p>
-        </p:txBody>
-      </p:sp>
-      <p:sp>
-        <p:nvSpPr>
-          <p:cNvPr id="7" name="TextBox 6"/>
+              <a:t>42 / 42</a:t>
+            </a:r>
+          </a:p>
+        </p:txBody>
+      </p:sp>
+      <p:sp>
+        <p:nvSpPr>
+          <p:cNvPr id="57" name="TextBox 56"/>
           <p:cNvSpPr txBox="1"/>
           <p:nvPr/>
         </p:nvSpPr>
         <p:spPr>
           <a:xfrm>
-            <a:off x="1143000" y="3566160"/>
-            <a:ext cx="6035040" cy="1737360"/>
+            <a:off x="8366760" y="3127248"/>
+            <a:ext cx="2926080" cy="457200"/>
           </a:xfrm>
           <a:prstGeom prst="rect">
             <a:avLst/>
@@ -8463,31 +9747,31 @@
           <a:p>
             <a:pPr algn="l">
               <a:lnSpc>
-                <a:spcPct val="150000"/>
+                <a:spcPct val="140000"/>
               </a:lnSpc>
             </a:pPr>
             <a:r>
-              <a:rPr sz="1450" b="0">
+              <a:rPr sz="1250" b="0">
                 <a:solidFill>
                   <a:srgbClr val="8B949E"/>
                 </a:solidFill>
                 <a:latin typeface="Inter Tight"/>
               </a:rPr>
-              <a:t>В реестре заказчика нет ни одной нерелевантной карточки — сравнивать не с чем. Заявленные 80 % на таких данных неизмеримы в принципе: тривиальный классификатор «всё релевантно» даёт здесь 100 %. Нужен размеченный набор с отрицательными примерами; это открытый вопрос к заказчику.</a:t>
-            </a:r>
-          </a:p>
-        </p:txBody>
-      </p:sp>
-      <p:sp>
-        <p:nvSpPr>
-          <p:cNvPr id="8" name="Rounded Rectangle 7"/>
+              <a:t>формула сходится с Excel заказчика точно</a:t>
+            </a:r>
+          </a:p>
+        </p:txBody>
+      </p:sp>
+      <p:sp>
+        <p:nvSpPr>
+          <p:cNvPr id="58" name="Rounded Rectangle 57"/>
           <p:cNvSpPr/>
           <p:nvPr/>
         </p:nvSpPr>
         <p:spPr>
           <a:xfrm>
-            <a:off x="8046720" y="2697480"/>
-            <a:ext cx="3474720" cy="1371600"/>
+            <a:off x="8046720" y="3959352"/>
+            <a:ext cx="3474720" cy="1481328"/>
           </a:xfrm>
           <a:prstGeom prst="roundRect">
             <a:avLst>
@@ -8526,14 +9810,14 @@
       </p:sp>
       <p:sp>
         <p:nvSpPr>
-          <p:cNvPr id="9" name="TextBox 8"/>
+          <p:cNvPr id="59" name="TextBox 58"/>
           <p:cNvSpPr txBox="1"/>
           <p:nvPr/>
         </p:nvSpPr>
         <p:spPr>
           <a:xfrm>
-            <a:off x="8366760" y="2926080"/>
-            <a:ext cx="2926080" cy="274320"/>
+            <a:off x="8366760" y="4187952"/>
+            <a:ext cx="2926080" cy="731520"/>
           </a:xfrm>
           <a:prstGeom prst="rect">
             <a:avLst/>
@@ -8548,31 +9832,70 @@
           <a:p>
             <a:pPr algn="l">
               <a:lnSpc>
-                <a:spcPct val="132000"/>
+                <a:spcPct val="100000"/>
               </a:lnSpc>
             </a:pPr>
             <a:r>
-              <a:rPr sz="1500" b="1">
-                <a:solidFill>
-                  <a:srgbClr val="F2F4F3"/>
+              <a:rPr sz="4000" b="1">
+                <a:solidFill>
+                  <a:srgbClr val="EB5757"/>
                 </a:solidFill>
                 <a:latin typeface="Inter Tight"/>
               </a:rPr>
-              <a:t>Новостная схема занижает</a:t>
-            </a:r>
-          </a:p>
-        </p:txBody>
-      </p:sp>
-      <p:sp>
-        <p:nvSpPr>
-          <p:cNvPr id="10" name="TextBox 9"/>
+              <a:t>1</a:t>
+            </a:r>
+          </a:p>
+        </p:txBody>
+      </p:sp>
+      <p:sp>
+        <p:nvSpPr>
+          <p:cNvPr id="60" name="TextBox 59"/>
           <p:cNvSpPr txBox="1"/>
           <p:nvPr/>
         </p:nvSpPr>
         <p:spPr>
           <a:xfrm>
-            <a:off x="8366760" y="3273552"/>
-            <a:ext cx="2926080" cy="640080"/>
+            <a:off x="8366760" y="4846320"/>
+            <a:ext cx="2926080" cy="457200"/>
+          </a:xfrm>
+          <a:prstGeom prst="rect">
+            <a:avLst/>
+          </a:prstGeom>
+          <a:noFill/>
+        </p:spPr>
+        <p:txBody>
+          <a:bodyPr wrap="square" lIns="0" rIns="0" tIns="0" bIns="0">
+            <a:spAutoFit/>
+          </a:bodyPr>
+          <a:lstStyle/>
+          <a:p>
+            <a:pPr algn="l">
+              <a:lnSpc>
+                <a:spcPct val="140000"/>
+              </a:lnSpc>
+            </a:pPr>
+            <a:r>
+              <a:rPr sz="1250" b="0">
+                <a:solidFill>
+                  <a:srgbClr val="8B949E"/>
+                </a:solidFill>
+                <a:latin typeface="Inter Tight"/>
+              </a:rPr>
+              <a:t>провал важного в нижние категории при цели ноль</a:t>
+            </a:r>
+          </a:p>
+        </p:txBody>
+      </p:sp>
+      <p:sp>
+        <p:nvSpPr>
+          <p:cNvPr id="61" name="TextBox 60"/>
+          <p:cNvSpPr txBox="1"/>
+          <p:nvPr/>
+        </p:nvSpPr>
+        <p:spPr>
+          <a:xfrm>
+            <a:off x="731520" y="5715000"/>
+            <a:ext cx="10515600" cy="548640"/>
           </a:xfrm>
           <a:prstGeom prst="rect">
             <a:avLst/>
@@ -8591,137 +9914,22 @@
               </a:lnSpc>
             </a:pPr>
             <a:r>
-              <a:rPr sz="1300" b="0">
-                <a:solidFill>
-                  <a:srgbClr val="8B949E"/>
+              <a:rPr sz="1400" b="1">
+                <a:solidFill>
+                  <a:srgbClr val="F2F4F3"/>
                 </a:solidFill>
                 <a:latin typeface="Inter Tight"/>
               </a:rPr>
-              <a:t>Отсюда единственный провал важного.</a:t>
-            </a:r>
-          </a:p>
-        </p:txBody>
-      </p:sp>
-      <p:sp>
-        <p:nvSpPr>
-          <p:cNvPr id="11" name="Rounded Rectangle 10"/>
-          <p:cNvSpPr/>
-          <p:nvPr/>
-        </p:nvSpPr>
-        <p:spPr>
-          <a:xfrm>
-            <a:off x="8046720" y="4206240"/>
-            <a:ext cx="3474720" cy="1371600"/>
-          </a:xfrm>
-          <a:prstGeom prst="roundRect">
-            <a:avLst>
-              <a:gd name="adj" fmla="val 4500"/>
-            </a:avLst>
-          </a:prstGeom>
-          <a:solidFill>
-            <a:srgbClr val="1B1F24"/>
-          </a:solidFill>
-          <a:ln>
-            <a:noFill/>
-          </a:ln>
-          <a:effectLst/>
-        </p:spPr>
-        <p:style>
-          <a:lnRef idx="1">
-            <a:schemeClr val="accent1"/>
-          </a:lnRef>
-          <a:fillRef idx="3">
-            <a:schemeClr val="accent1"/>
-          </a:fillRef>
-          <a:effectRef idx="2">
-            <a:schemeClr val="accent1"/>
-          </a:effectRef>
-          <a:fontRef idx="minor">
-            <a:schemeClr val="lt1"/>
-          </a:fontRef>
-        </p:style>
-        <p:txBody>
-          <a:bodyPr rtlCol="0" anchor="ctr"/>
-          <a:lstStyle/>
-          <a:p>
-            <a:pPr algn="ctr"/>
-          </a:p>
-        </p:txBody>
-      </p:sp>
-      <p:sp>
-        <p:nvSpPr>
-          <p:cNvPr id="12" name="TextBox 11"/>
-          <p:cNvSpPr txBox="1"/>
-          <p:nvPr/>
-        </p:nvSpPr>
-        <p:spPr>
-          <a:xfrm>
-            <a:off x="8366760" y="4434840"/>
-            <a:ext cx="2926080" cy="274320"/>
-          </a:xfrm>
-          <a:prstGeom prst="rect">
-            <a:avLst/>
-          </a:prstGeom>
-          <a:noFill/>
-        </p:spPr>
-        <p:txBody>
-          <a:bodyPr wrap="square" lIns="0" rIns="0" tIns="0" bIns="0">
-            <a:spAutoFit/>
-          </a:bodyPr>
-          <a:lstStyle/>
-          <a:p>
-            <a:pPr algn="l">
-              <a:lnSpc>
-                <a:spcPct val="132000"/>
-              </a:lnSpc>
-            </a:pPr>
-            <a:r>
-              <a:rPr sz="1500" b="1">
-                <a:solidFill>
-                  <a:srgbClr val="F2F4F3"/>
+              <a:t>Клетки — это модель. </a:t>
+            </a:r>
+            <a:r>
+              <a:rPr sz="1400" b="0">
+                <a:solidFill>
+                  <a:srgbClr val="8B949E"/>
                 </a:solidFill>
                 <a:latin typeface="Inter Tight"/>
               </a:rPr>
-              <a:t>Живой сбор выключен</a:t>
-            </a:r>
-          </a:p>
-        </p:txBody>
-      </p:sp>
-      <p:sp>
-        <p:nvSpPr>
-          <p:cNvPr id="13" name="TextBox 12"/>
-          <p:cNvSpPr txBox="1"/>
-          <p:nvPr/>
-        </p:nvSpPr>
-        <p:spPr>
-          <a:xfrm>
-            <a:off x="8366760" y="4782312"/>
-            <a:ext cx="2926080" cy="640080"/>
-          </a:xfrm>
-          <a:prstGeom prst="rect">
-            <a:avLst/>
-          </a:prstGeom>
-          <a:noFill/>
-        </p:spPr>
-        <p:txBody>
-          <a:bodyPr wrap="square" lIns="0" rIns="0" tIns="0" bIns="0">
-            <a:spAutoFit/>
-          </a:bodyPr>
-          <a:lstStyle/>
-          <a:p>
-            <a:pPr algn="l">
-              <a:lnSpc>
-                <a:spcPct val="145000"/>
-              </a:lnSpc>
-            </a:pPr>
-            <a:r>
-              <a:rPr sz="1300" b="0">
-                <a:solidFill>
-                  <a:srgbClr val="8B949E"/>
-                </a:solidFill>
-                <a:latin typeface="Inter Tight"/>
-              </a:rPr>
-              <a:t>Обработка не успевает за сбором. Показываем срез.</a:t>
+              <a:t>Она сама выставила баллы. «42 из 42» — это про формулу: получив экспертные баллы, код выдаёт тот же индекс. Путать эти два числа нельзя.</a:t>
             </a:r>
           </a:p>
         </p:txBody>
@@ -8818,11 +10026,11 @@
             <a:r>
               <a:rPr sz="1100" b="1">
                 <a:solidFill>
-                  <a:srgbClr val="43B02A"/>
+                  <a:srgbClr val="EB5757"/>
                 </a:solidFill>
                 <a:latin typeface="Inter Tight"/>
               </a:rPr>
-              <a:t>Команда</a:t>
+              <a:t>Честно</a:t>
             </a:r>
           </a:p>
         </p:txBody>
@@ -8861,255 +10069,21 @@
                 </a:solidFill>
                 <a:latin typeface="Inter Tight"/>
               </a:rPr>
-              <a:t>Кто делал и где посмотреть</a:t>
-            </a:r>
-          </a:p>
-        </p:txBody>
-      </p:sp>
-      <p:sp>
-        <p:nvSpPr>
-          <p:cNvPr id="5" name="TextBox 4"/>
-          <p:cNvSpPr txBox="1"/>
-          <p:nvPr/>
-        </p:nvSpPr>
-        <p:spPr>
-          <a:xfrm>
-            <a:off x="731520" y="2743200"/>
-            <a:ext cx="3291840" cy="310896"/>
-          </a:xfrm>
-          <a:prstGeom prst="rect">
-            <a:avLst/>
-          </a:prstGeom>
-          <a:noFill/>
-        </p:spPr>
-        <p:txBody>
-          <a:bodyPr wrap="square" lIns="0" rIns="0" tIns="0" bIns="0">
-            <a:spAutoFit/>
-          </a:bodyPr>
-          <a:lstStyle/>
-          <a:p>
-            <a:pPr algn="l">
-              <a:lnSpc>
-                <a:spcPct val="132000"/>
-              </a:lnSpc>
-            </a:pPr>
-            <a:r>
-              <a:rPr sz="2100" b="1">
-                <a:solidFill>
-                  <a:srgbClr val="F2F4F3"/>
-                </a:solidFill>
-                <a:latin typeface="Inter Tight"/>
-              </a:rPr>
-              <a:t>Левочкин Егор</a:t>
-            </a:r>
-          </a:p>
-        </p:txBody>
-      </p:sp>
-      <p:sp>
-        <p:nvSpPr>
-          <p:cNvPr id="6" name="TextBox 5"/>
-          <p:cNvSpPr txBox="1"/>
-          <p:nvPr/>
-        </p:nvSpPr>
-        <p:spPr>
-          <a:xfrm>
-            <a:off x="731520" y="3127248"/>
-            <a:ext cx="5852160" cy="274320"/>
-          </a:xfrm>
-          <a:prstGeom prst="rect">
-            <a:avLst/>
-          </a:prstGeom>
-          <a:noFill/>
-        </p:spPr>
-        <p:txBody>
-          <a:bodyPr wrap="square" lIns="0" rIns="0" tIns="0" bIns="0">
-            <a:spAutoFit/>
-          </a:bodyPr>
-          <a:lstStyle/>
-          <a:p>
-            <a:pPr algn="l">
-              <a:lnSpc>
-                <a:spcPct val="132000"/>
-              </a:lnSpc>
-            </a:pPr>
-            <a:r>
-              <a:rPr sz="1400" b="0">
-                <a:solidFill>
-                  <a:srgbClr val="8B949E"/>
-                </a:solidFill>
-                <a:latin typeface="Inter Tight"/>
-              </a:rPr>
-              <a:t>продукт, парсинг, фронтенд</a:t>
-            </a:r>
-          </a:p>
-        </p:txBody>
-      </p:sp>
-      <p:sp>
-        <p:nvSpPr>
-          <p:cNvPr id="7" name="TextBox 6"/>
-          <p:cNvSpPr txBox="1"/>
-          <p:nvPr/>
-        </p:nvSpPr>
-        <p:spPr>
-          <a:xfrm>
-            <a:off x="731520" y="3703320"/>
-            <a:ext cx="3291840" cy="310896"/>
-          </a:xfrm>
-          <a:prstGeom prst="rect">
-            <a:avLst/>
-          </a:prstGeom>
-          <a:noFill/>
-        </p:spPr>
-        <p:txBody>
-          <a:bodyPr wrap="square" lIns="0" rIns="0" tIns="0" bIns="0">
-            <a:spAutoFit/>
-          </a:bodyPr>
-          <a:lstStyle/>
-          <a:p>
-            <a:pPr algn="l">
-              <a:lnSpc>
-                <a:spcPct val="132000"/>
-              </a:lnSpc>
-            </a:pPr>
-            <a:r>
-              <a:rPr sz="2100" b="1">
-                <a:solidFill>
-                  <a:srgbClr val="F2F4F3"/>
-                </a:solidFill>
-                <a:latin typeface="Inter Tight"/>
-              </a:rPr>
-              <a:t>Головаш Денис</a:t>
-            </a:r>
-          </a:p>
-        </p:txBody>
-      </p:sp>
-      <p:sp>
-        <p:nvSpPr>
-          <p:cNvPr id="8" name="TextBox 7"/>
-          <p:cNvSpPr txBox="1"/>
-          <p:nvPr/>
-        </p:nvSpPr>
-        <p:spPr>
-          <a:xfrm>
-            <a:off x="731520" y="4087368"/>
-            <a:ext cx="5852160" cy="274320"/>
-          </a:xfrm>
-          <a:prstGeom prst="rect">
-            <a:avLst/>
-          </a:prstGeom>
-          <a:noFill/>
-        </p:spPr>
-        <p:txBody>
-          <a:bodyPr wrap="square" lIns="0" rIns="0" tIns="0" bIns="0">
-            <a:spAutoFit/>
-          </a:bodyPr>
-          <a:lstStyle/>
-          <a:p>
-            <a:pPr algn="l">
-              <a:lnSpc>
-                <a:spcPct val="132000"/>
-              </a:lnSpc>
-            </a:pPr>
-            <a:r>
-              <a:rPr sz="1400" b="0">
-                <a:solidFill>
-                  <a:srgbClr val="8B949E"/>
-                </a:solidFill>
-                <a:latin typeface="Inter Tight"/>
-              </a:rPr>
-              <a:t>весь слой работы с моделью</a:t>
-            </a:r>
-          </a:p>
-        </p:txBody>
-      </p:sp>
-      <p:sp>
-        <p:nvSpPr>
-          <p:cNvPr id="9" name="TextBox 8"/>
-          <p:cNvSpPr txBox="1"/>
-          <p:nvPr/>
-        </p:nvSpPr>
-        <p:spPr>
-          <a:xfrm>
-            <a:off x="731520" y="4663440"/>
-            <a:ext cx="3291840" cy="310896"/>
-          </a:xfrm>
-          <a:prstGeom prst="rect">
-            <a:avLst/>
-          </a:prstGeom>
-          <a:noFill/>
-        </p:spPr>
-        <p:txBody>
-          <a:bodyPr wrap="square" lIns="0" rIns="0" tIns="0" bIns="0">
-            <a:spAutoFit/>
-          </a:bodyPr>
-          <a:lstStyle/>
-          <a:p>
-            <a:pPr algn="l">
-              <a:lnSpc>
-                <a:spcPct val="132000"/>
-              </a:lnSpc>
-            </a:pPr>
-            <a:r>
-              <a:rPr sz="2100" b="1">
-                <a:solidFill>
-                  <a:srgbClr val="F2F4F3"/>
-                </a:solidFill>
-                <a:latin typeface="Inter Tight"/>
-              </a:rPr>
-              <a:t>Артемьев Иван</a:t>
-            </a:r>
-          </a:p>
-        </p:txBody>
-      </p:sp>
-      <p:sp>
-        <p:nvSpPr>
-          <p:cNvPr id="10" name="TextBox 9"/>
-          <p:cNvSpPr txBox="1"/>
-          <p:nvPr/>
-        </p:nvSpPr>
-        <p:spPr>
-          <a:xfrm>
-            <a:off x="731520" y="5047488"/>
-            <a:ext cx="5852160" cy="274320"/>
-          </a:xfrm>
-          <a:prstGeom prst="rect">
-            <a:avLst/>
-          </a:prstGeom>
-          <a:noFill/>
-        </p:spPr>
-        <p:txBody>
-          <a:bodyPr wrap="square" lIns="0" rIns="0" tIns="0" bIns="0">
-            <a:spAutoFit/>
-          </a:bodyPr>
-          <a:lstStyle/>
-          <a:p>
-            <a:pPr algn="l">
-              <a:lnSpc>
-                <a:spcPct val="132000"/>
-              </a:lnSpc>
-            </a:pPr>
-            <a:r>
-              <a:rPr sz="1400" b="0">
-                <a:solidFill>
-                  <a:srgbClr val="8B949E"/>
-                </a:solidFill>
-                <a:latin typeface="Inter Tight"/>
-              </a:rPr>
-              <a:t>бэкенд, конвейер, развёртывание</a:t>
-            </a:r>
-          </a:p>
-        </p:txBody>
-      </p:sp>
-      <p:sp>
-        <p:nvSpPr>
-          <p:cNvPr id="11" name="Rounded Rectangle 10"/>
+              <a:t>Чего мы измерить не смогли</a:t>
+            </a:r>
+          </a:p>
+        </p:txBody>
+      </p:sp>
+      <p:sp>
+        <p:nvSpPr>
+          <p:cNvPr id="5" name="Rounded Rectangle 4"/>
           <p:cNvSpPr/>
           <p:nvPr/>
         </p:nvSpPr>
         <p:spPr>
           <a:xfrm>
-            <a:off x="7498079" y="2651760"/>
-            <a:ext cx="4023360" cy="3017520"/>
+            <a:off x="731520" y="2697480"/>
+            <a:ext cx="6858000" cy="2880360"/>
           </a:xfrm>
           <a:prstGeom prst="roundRect">
             <a:avLst>
@@ -9146,118 +10120,16 @@
           </a:p>
         </p:txBody>
       </p:sp>
-      <p:pic>
-        <p:nvPicPr>
-          <p:cNvPr id="12" name="Picture 11" descr="qr-demo.png"/>
-          <p:cNvPicPr>
-            <a:picLocks noChangeAspect="1"/>
-          </p:cNvPicPr>
-          <p:nvPr/>
-        </p:nvPicPr>
-        <p:blipFill>
-          <a:blip r:embed="rId2"/>
-          <a:stretch>
-            <a:fillRect/>
-          </a:stretch>
-        </p:blipFill>
-        <p:spPr>
-          <a:xfrm>
-            <a:off x="8549640" y="2926080"/>
-            <a:ext cx="1920240" cy="1920240"/>
-          </a:xfrm>
-          <a:prstGeom prst="rect">
-            <a:avLst/>
-          </a:prstGeom>
-        </p:spPr>
-      </p:pic>
-      <p:sp>
-        <p:nvSpPr>
-          <p:cNvPr id="13" name="TextBox 12"/>
+      <p:sp>
+        <p:nvSpPr>
+          <p:cNvPr id="6" name="TextBox 5"/>
           <p:cNvSpPr txBox="1"/>
           <p:nvPr/>
         </p:nvSpPr>
         <p:spPr>
           <a:xfrm>
-            <a:off x="7772400" y="5029200"/>
-            <a:ext cx="3474720" cy="274320"/>
-          </a:xfrm>
-          <a:prstGeom prst="rect">
-            <a:avLst/>
-          </a:prstGeom>
-          <a:noFill/>
-        </p:spPr>
-        <p:txBody>
-          <a:bodyPr wrap="square" lIns="0" rIns="0" tIns="0" bIns="0">
-            <a:spAutoFit/>
-          </a:bodyPr>
-          <a:lstStyle/>
-          <a:p>
-            <a:pPr algn="ctr">
-              <a:lnSpc>
-                <a:spcPct val="132000"/>
-              </a:lnSpc>
-            </a:pPr>
-            <a:r>
-              <a:rPr sz="1500" b="1">
-                <a:solidFill>
-                  <a:srgbClr val="F2F4F3"/>
-                </a:solidFill>
-                <a:latin typeface="Inter Tight"/>
-              </a:rPr>
-              <a:t>185.56.162.154</a:t>
-            </a:r>
-          </a:p>
-        </p:txBody>
-      </p:sp>
-      <p:sp>
-        <p:nvSpPr>
-          <p:cNvPr id="14" name="TextBox 13"/>
-          <p:cNvSpPr txBox="1"/>
-          <p:nvPr/>
-        </p:nvSpPr>
-        <p:spPr>
-          <a:xfrm>
-            <a:off x="7772400" y="5321808"/>
-            <a:ext cx="3474720" cy="274320"/>
-          </a:xfrm>
-          <a:prstGeom prst="rect">
-            <a:avLst/>
-          </a:prstGeom>
-          <a:noFill/>
-        </p:spPr>
-        <p:txBody>
-          <a:bodyPr wrap="square" lIns="0" rIns="0" tIns="0" bIns="0">
-            <a:spAutoFit/>
-          </a:bodyPr>
-          <a:lstStyle/>
-          <a:p>
-            <a:pPr algn="ctr">
-              <a:lnSpc>
-                <a:spcPct val="132000"/>
-              </a:lnSpc>
-            </a:pPr>
-            <a:r>
-              <a:rPr sz="1150" b="0">
-                <a:solidFill>
-                  <a:srgbClr val="8B949E"/>
-                </a:solidFill>
-                <a:latin typeface="Inter Tight"/>
-              </a:rPr>
-              <a:t>лента, досье и дайджест на живых данных</a:t>
-            </a:r>
-          </a:p>
-        </p:txBody>
-      </p:sp>
-      <p:sp>
-        <p:nvSpPr>
-          <p:cNvPr id="15" name="TextBox 14"/>
-          <p:cNvSpPr txBox="1"/>
-          <p:nvPr/>
-        </p:nvSpPr>
-        <p:spPr>
-          <a:xfrm>
-            <a:off x="731520" y="5852160"/>
-            <a:ext cx="6400800" cy="274320"/>
+            <a:off x="1143000" y="3017520"/>
+            <a:ext cx="6035040" cy="365760"/>
           </a:xfrm>
           <a:prstGeom prst="rect">
             <a:avLst/>
@@ -9276,13 +10148,300 @@
               </a:lnSpc>
             </a:pPr>
             <a:r>
-              <a:rPr sz="1400" b="0">
-                <a:solidFill>
-                  <a:srgbClr val="8B949E"/>
+              <a:rPr sz="2400" b="1">
+                <a:solidFill>
+                  <a:srgbClr val="F2F4F3"/>
                 </a:solidFill>
                 <a:latin typeface="Inter Tight"/>
               </a:rPr>
-              <a:t>github.com/veceloe/ai-gpr-center-cifra</a:t>
+              <a:t>Точность фильтрации</a:t>
+            </a:r>
+          </a:p>
+        </p:txBody>
+      </p:sp>
+      <p:sp>
+        <p:nvSpPr>
+          <p:cNvPr id="7" name="TextBox 6"/>
+          <p:cNvSpPr txBox="1"/>
+          <p:nvPr/>
+        </p:nvSpPr>
+        <p:spPr>
+          <a:xfrm>
+            <a:off x="1143000" y="3566160"/>
+            <a:ext cx="6035040" cy="1737360"/>
+          </a:xfrm>
+          <a:prstGeom prst="rect">
+            <a:avLst/>
+          </a:prstGeom>
+          <a:noFill/>
+        </p:spPr>
+        <p:txBody>
+          <a:bodyPr wrap="square" lIns="0" rIns="0" tIns="0" bIns="0">
+            <a:spAutoFit/>
+          </a:bodyPr>
+          <a:lstStyle/>
+          <a:p>
+            <a:pPr algn="l">
+              <a:lnSpc>
+                <a:spcPct val="150000"/>
+              </a:lnSpc>
+            </a:pPr>
+            <a:r>
+              <a:rPr sz="1450" b="0">
+                <a:solidFill>
+                  <a:srgbClr val="8B949E"/>
+                </a:solidFill>
+                <a:latin typeface="Inter Tight"/>
+              </a:rPr>
+              <a:t>В реестре заказчика нет ни одной нерелевантной карточки — сравнивать не с чем. Заявленные 80 % на таких данных неизмеримы в принципе: тривиальный классификатор «всё релевантно» даёт здесь 100 %. Нужен размеченный набор с отрицательными примерами; это открытый вопрос к заказчику.</a:t>
+            </a:r>
+          </a:p>
+        </p:txBody>
+      </p:sp>
+      <p:sp>
+        <p:nvSpPr>
+          <p:cNvPr id="8" name="Rounded Rectangle 7"/>
+          <p:cNvSpPr/>
+          <p:nvPr/>
+        </p:nvSpPr>
+        <p:spPr>
+          <a:xfrm>
+            <a:off x="8046720" y="2697480"/>
+            <a:ext cx="3474720" cy="1371600"/>
+          </a:xfrm>
+          <a:prstGeom prst="roundRect">
+            <a:avLst>
+              <a:gd name="adj" fmla="val 4500"/>
+            </a:avLst>
+          </a:prstGeom>
+          <a:solidFill>
+            <a:srgbClr val="1B1F24"/>
+          </a:solidFill>
+          <a:ln>
+            <a:noFill/>
+          </a:ln>
+          <a:effectLst/>
+        </p:spPr>
+        <p:style>
+          <a:lnRef idx="1">
+            <a:schemeClr val="accent1"/>
+          </a:lnRef>
+          <a:fillRef idx="3">
+            <a:schemeClr val="accent1"/>
+          </a:fillRef>
+          <a:effectRef idx="2">
+            <a:schemeClr val="accent1"/>
+          </a:effectRef>
+          <a:fontRef idx="minor">
+            <a:schemeClr val="lt1"/>
+          </a:fontRef>
+        </p:style>
+        <p:txBody>
+          <a:bodyPr rtlCol="0" anchor="ctr"/>
+          <a:lstStyle/>
+          <a:p>
+            <a:pPr algn="ctr"/>
+          </a:p>
+        </p:txBody>
+      </p:sp>
+      <p:sp>
+        <p:nvSpPr>
+          <p:cNvPr id="9" name="TextBox 8"/>
+          <p:cNvSpPr txBox="1"/>
+          <p:nvPr/>
+        </p:nvSpPr>
+        <p:spPr>
+          <a:xfrm>
+            <a:off x="8366760" y="2926080"/>
+            <a:ext cx="2926080" cy="274320"/>
+          </a:xfrm>
+          <a:prstGeom prst="rect">
+            <a:avLst/>
+          </a:prstGeom>
+          <a:noFill/>
+        </p:spPr>
+        <p:txBody>
+          <a:bodyPr wrap="square" lIns="0" rIns="0" tIns="0" bIns="0">
+            <a:spAutoFit/>
+          </a:bodyPr>
+          <a:lstStyle/>
+          <a:p>
+            <a:pPr algn="l">
+              <a:lnSpc>
+                <a:spcPct val="132000"/>
+              </a:lnSpc>
+            </a:pPr>
+            <a:r>
+              <a:rPr sz="1500" b="1">
+                <a:solidFill>
+                  <a:srgbClr val="F2F4F3"/>
+                </a:solidFill>
+                <a:latin typeface="Inter Tight"/>
+              </a:rPr>
+              <a:t>Новостная схема занижает</a:t>
+            </a:r>
+          </a:p>
+        </p:txBody>
+      </p:sp>
+      <p:sp>
+        <p:nvSpPr>
+          <p:cNvPr id="10" name="TextBox 9"/>
+          <p:cNvSpPr txBox="1"/>
+          <p:nvPr/>
+        </p:nvSpPr>
+        <p:spPr>
+          <a:xfrm>
+            <a:off x="8366760" y="3273552"/>
+            <a:ext cx="2926080" cy="640080"/>
+          </a:xfrm>
+          <a:prstGeom prst="rect">
+            <a:avLst/>
+          </a:prstGeom>
+          <a:noFill/>
+        </p:spPr>
+        <p:txBody>
+          <a:bodyPr wrap="square" lIns="0" rIns="0" tIns="0" bIns="0">
+            <a:spAutoFit/>
+          </a:bodyPr>
+          <a:lstStyle/>
+          <a:p>
+            <a:pPr algn="l">
+              <a:lnSpc>
+                <a:spcPct val="145000"/>
+              </a:lnSpc>
+            </a:pPr>
+            <a:r>
+              <a:rPr sz="1300" b="0">
+                <a:solidFill>
+                  <a:srgbClr val="8B949E"/>
+                </a:solidFill>
+                <a:latin typeface="Inter Tight"/>
+              </a:rPr>
+              <a:t>Отсюда единственный провал важного.</a:t>
+            </a:r>
+          </a:p>
+        </p:txBody>
+      </p:sp>
+      <p:sp>
+        <p:nvSpPr>
+          <p:cNvPr id="11" name="Rounded Rectangle 10"/>
+          <p:cNvSpPr/>
+          <p:nvPr/>
+        </p:nvSpPr>
+        <p:spPr>
+          <a:xfrm>
+            <a:off x="8046720" y="4206240"/>
+            <a:ext cx="3474720" cy="1371600"/>
+          </a:xfrm>
+          <a:prstGeom prst="roundRect">
+            <a:avLst>
+              <a:gd name="adj" fmla="val 4500"/>
+            </a:avLst>
+          </a:prstGeom>
+          <a:solidFill>
+            <a:srgbClr val="1B1F24"/>
+          </a:solidFill>
+          <a:ln>
+            <a:noFill/>
+          </a:ln>
+          <a:effectLst/>
+        </p:spPr>
+        <p:style>
+          <a:lnRef idx="1">
+            <a:schemeClr val="accent1"/>
+          </a:lnRef>
+          <a:fillRef idx="3">
+            <a:schemeClr val="accent1"/>
+          </a:fillRef>
+          <a:effectRef idx="2">
+            <a:schemeClr val="accent1"/>
+          </a:effectRef>
+          <a:fontRef idx="minor">
+            <a:schemeClr val="lt1"/>
+          </a:fontRef>
+        </p:style>
+        <p:txBody>
+          <a:bodyPr rtlCol="0" anchor="ctr"/>
+          <a:lstStyle/>
+          <a:p>
+            <a:pPr algn="ctr"/>
+          </a:p>
+        </p:txBody>
+      </p:sp>
+      <p:sp>
+        <p:nvSpPr>
+          <p:cNvPr id="12" name="TextBox 11"/>
+          <p:cNvSpPr txBox="1"/>
+          <p:nvPr/>
+        </p:nvSpPr>
+        <p:spPr>
+          <a:xfrm>
+            <a:off x="8366760" y="4434840"/>
+            <a:ext cx="2926080" cy="274320"/>
+          </a:xfrm>
+          <a:prstGeom prst="rect">
+            <a:avLst/>
+          </a:prstGeom>
+          <a:noFill/>
+        </p:spPr>
+        <p:txBody>
+          <a:bodyPr wrap="square" lIns="0" rIns="0" tIns="0" bIns="0">
+            <a:spAutoFit/>
+          </a:bodyPr>
+          <a:lstStyle/>
+          <a:p>
+            <a:pPr algn="l">
+              <a:lnSpc>
+                <a:spcPct val="132000"/>
+              </a:lnSpc>
+            </a:pPr>
+            <a:r>
+              <a:rPr sz="1500" b="1">
+                <a:solidFill>
+                  <a:srgbClr val="F2F4F3"/>
+                </a:solidFill>
+                <a:latin typeface="Inter Tight"/>
+              </a:rPr>
+              <a:t>Живой сбор выключен</a:t>
+            </a:r>
+          </a:p>
+        </p:txBody>
+      </p:sp>
+      <p:sp>
+        <p:nvSpPr>
+          <p:cNvPr id="13" name="TextBox 12"/>
+          <p:cNvSpPr txBox="1"/>
+          <p:nvPr/>
+        </p:nvSpPr>
+        <p:spPr>
+          <a:xfrm>
+            <a:off x="8366760" y="4782312"/>
+            <a:ext cx="2926080" cy="640080"/>
+          </a:xfrm>
+          <a:prstGeom prst="rect">
+            <a:avLst/>
+          </a:prstGeom>
+          <a:noFill/>
+        </p:spPr>
+        <p:txBody>
+          <a:bodyPr wrap="square" lIns="0" rIns="0" tIns="0" bIns="0">
+            <a:spAutoFit/>
+          </a:bodyPr>
+          <a:lstStyle/>
+          <a:p>
+            <a:pPr algn="l">
+              <a:lnSpc>
+                <a:spcPct val="145000"/>
+              </a:lnSpc>
+            </a:pPr>
+            <a:r>
+              <a:rPr sz="1300" b="0">
+                <a:solidFill>
+                  <a:srgbClr val="8B949E"/>
+                </a:solidFill>
+                <a:latin typeface="Inter Tight"/>
+              </a:rPr>
+              <a:t>Обработка не успевает за сбором. Показываем срез.</a:t>
             </a:r>
           </a:p>
         </p:txBody>
@@ -9320,7 +10479,7 @@
             <a:avLst/>
           </a:prstGeom>
           <a:solidFill>
-            <a:srgbClr val="F9F9F9"/>
+            <a:srgbClr val="101214"/>
           </a:solidFill>
           <a:ln>
             <a:noFill/>
@@ -9357,7 +10516,7 @@
         </p:nvSpPr>
         <p:spPr>
           <a:xfrm>
-            <a:off x="731520" y="566928"/>
+            <a:off x="731520" y="1051560"/>
             <a:ext cx="10698480" cy="274320"/>
           </a:xfrm>
           <a:prstGeom prst="rect">
@@ -9379,11 +10538,11 @@
             <a:r>
               <a:rPr sz="1100" b="1">
                 <a:solidFill>
-                  <a:srgbClr val="9AA1AB"/>
+                  <a:srgbClr val="43B02A"/>
                 </a:solidFill>
                 <a:latin typeface="Inter Tight"/>
               </a:rPr>
-              <a:t>Приложение, если спросят</a:t>
+              <a:t>Что дальше</a:t>
             </a:r>
           </a:p>
         </p:txBody>
@@ -9396,8 +10555,8 @@
         </p:nvSpPr>
         <p:spPr>
           <a:xfrm>
-            <a:off x="731520" y="914400"/>
-            <a:ext cx="10698480" cy="457200"/>
+            <a:off x="731520" y="1463040"/>
+            <a:ext cx="10515600" cy="640080"/>
           </a:xfrm>
           <a:prstGeom prst="rect">
             <a:avLst/>
@@ -9416,77 +10575,38 @@
               </a:lnSpc>
             </a:pPr>
             <a:r>
-              <a:rPr sz="3000" b="1">
-                <a:solidFill>
-                  <a:srgbClr val="231F20"/>
+              <a:rPr sz="4200" b="1">
+                <a:solidFill>
+                  <a:srgbClr val="F2F4F3"/>
                 </a:solidFill>
                 <a:latin typeface="Inter Tight"/>
               </a:rPr>
-              <a:t>Разбор оценки: шесть критериев и заземление</a:t>
-            </a:r>
-          </a:p>
-        </p:txBody>
-      </p:sp>
-      <p:sp>
-        <p:nvSpPr>
-          <p:cNvPr id="5" name="TextBox 4"/>
-          <p:cNvSpPr txBox="1"/>
-          <p:nvPr/>
-        </p:nvSpPr>
-        <p:spPr>
-          <a:xfrm>
-            <a:off x="731520" y="1463040"/>
-            <a:ext cx="10698480" cy="640080"/>
-          </a:xfrm>
-          <a:prstGeom prst="rect">
-            <a:avLst/>
-          </a:prstGeom>
-          <a:noFill/>
-        </p:spPr>
-        <p:txBody>
-          <a:bodyPr wrap="square" lIns="0" rIns="0" tIns="0" bIns="0">
-            <a:spAutoFit/>
-          </a:bodyPr>
-          <a:lstStyle/>
-          <a:p>
-            <a:pPr algn="l">
-              <a:lnSpc>
-                <a:spcPct val="140000"/>
-              </a:lnSpc>
-            </a:pPr>
-            <a:r>
-              <a:rPr sz="1300" b="0">
-                <a:solidFill>
-                  <a:srgbClr val="6B7280"/>
-                </a:solidFill>
-                <a:latin typeface="Inter Tight"/>
-              </a:rPr>
-              <a:t>Слева цитата из оригинала под каждым утверждением. Справа балл, вклад в индекс и обоснование по каждому критерию.</a:t>
-            </a:r>
-          </a:p>
-        </p:txBody>
-      </p:sp>
-      <p:sp>
-        <p:nvSpPr>
-          <p:cNvPr id="6" name="Rectangle 5"/>
+              <a:t>Три шага после хакатона</a:t>
+            </a:r>
+          </a:p>
+        </p:txBody>
+      </p:sp>
+      <p:sp>
+        <p:nvSpPr>
+          <p:cNvPr id="5" name="Rounded Rectangle 4"/>
           <p:cNvSpPr/>
           <p:nvPr/>
         </p:nvSpPr>
         <p:spPr>
           <a:xfrm>
-            <a:off x="1542135" y="1801368"/>
-            <a:ext cx="9107424" cy="4543653"/>
-          </a:xfrm>
-          <a:prstGeom prst="rect">
-            <a:avLst/>
+            <a:off x="731520" y="2651760"/>
+            <a:ext cx="10698480" cy="960120"/>
+          </a:xfrm>
+          <a:prstGeom prst="roundRect">
+            <a:avLst>
+              <a:gd name="adj" fmla="val 4500"/>
+            </a:avLst>
           </a:prstGeom>
           <a:solidFill>
-            <a:srgbClr val="FFFFFF"/>
+            <a:srgbClr val="1B1F24"/>
           </a:solidFill>
-          <a:ln w="9525">
-            <a:solidFill>
-              <a:srgbClr val="D9D9D9"/>
-            </a:solidFill>
+          <a:ln>
+            <a:noFill/>
           </a:ln>
           <a:effectLst/>
         </p:spPr>
@@ -9512,30 +10632,371 @@
           </a:p>
         </p:txBody>
       </p:sp>
-      <p:pic>
-        <p:nvPicPr>
-          <p:cNvPr id="7" name="Picture 6" descr="shot_breakdown.jpg"/>
-          <p:cNvPicPr>
-            <a:picLocks noChangeAspect="1"/>
-          </p:cNvPicPr>
-          <p:nvPr/>
-        </p:nvPicPr>
-        <p:blipFill>
-          <a:blip r:embed="rId2"/>
-          <a:stretch>
-            <a:fillRect/>
-          </a:stretch>
-        </p:blipFill>
-        <p:spPr>
-          <a:xfrm>
-            <a:off x="1569567" y="1828800"/>
-            <a:ext cx="9052560" cy="4488789"/>
-          </a:xfrm>
-          <a:prstGeom prst="rect">
-            <a:avLst/>
-          </a:prstGeom>
-        </p:spPr>
-      </p:pic>
+      <p:sp>
+        <p:nvSpPr>
+          <p:cNvPr id="6" name="TextBox 5"/>
+          <p:cNvSpPr txBox="1"/>
+          <p:nvPr/>
+        </p:nvSpPr>
+        <p:spPr>
+          <a:xfrm>
+            <a:off x="1115568" y="2871216"/>
+            <a:ext cx="1828800" cy="274320"/>
+          </a:xfrm>
+          <a:prstGeom prst="rect">
+            <a:avLst/>
+          </a:prstGeom>
+          <a:noFill/>
+        </p:spPr>
+        <p:txBody>
+          <a:bodyPr wrap="square" lIns="0" rIns="0" tIns="0" bIns="0">
+            <a:spAutoFit/>
+          </a:bodyPr>
+          <a:lstStyle/>
+          <a:p>
+            <a:pPr algn="l">
+              <a:lnSpc>
+                <a:spcPct val="132000"/>
+              </a:lnSpc>
+            </a:pPr>
+            <a:r>
+              <a:rPr sz="1500" b="1">
+                <a:solidFill>
+                  <a:srgbClr val="43B02A"/>
+                </a:solidFill>
+                <a:latin typeface="Inter Tight"/>
+              </a:rPr>
+              <a:t>Ближайшее</a:t>
+            </a:r>
+          </a:p>
+        </p:txBody>
+      </p:sp>
+      <p:sp>
+        <p:nvSpPr>
+          <p:cNvPr id="7" name="TextBox 6"/>
+          <p:cNvSpPr txBox="1"/>
+          <p:nvPr/>
+        </p:nvSpPr>
+        <p:spPr>
+          <a:xfrm>
+            <a:off x="3017520" y="2834640"/>
+            <a:ext cx="8046720" cy="640080"/>
+          </a:xfrm>
+          <a:prstGeom prst="rect">
+            <a:avLst/>
+          </a:prstGeom>
+          <a:noFill/>
+        </p:spPr>
+        <p:txBody>
+          <a:bodyPr wrap="square" lIns="0" rIns="0" tIns="0" bIns="0">
+            <a:spAutoFit/>
+          </a:bodyPr>
+          <a:lstStyle/>
+          <a:p>
+            <a:pPr algn="l">
+              <a:lnSpc>
+                <a:spcPct val="145000"/>
+              </a:lnSpc>
+            </a:pPr>
+            <a:r>
+              <a:rPr sz="1400" b="0">
+                <a:solidFill>
+                  <a:srgbClr val="8B949E"/>
+                </a:solidFill>
+                <a:latin typeface="Inter Tight"/>
+              </a:rPr>
+              <a:t>Разметить с заказчиком 50 материалов, включая нерелевантные. Без отрицательных примеров точность фильтрации измерить нельзя — сейчас это главный пробел, а не догадка.</a:t>
+            </a:r>
+          </a:p>
+        </p:txBody>
+      </p:sp>
+      <p:sp>
+        <p:nvSpPr>
+          <p:cNvPr id="8" name="Rounded Rectangle 7"/>
+          <p:cNvSpPr/>
+          <p:nvPr/>
+        </p:nvSpPr>
+        <p:spPr>
+          <a:xfrm>
+            <a:off x="731520" y="3794760"/>
+            <a:ext cx="10698480" cy="960120"/>
+          </a:xfrm>
+          <a:prstGeom prst="roundRect">
+            <a:avLst>
+              <a:gd name="adj" fmla="val 4500"/>
+            </a:avLst>
+          </a:prstGeom>
+          <a:solidFill>
+            <a:srgbClr val="23282E"/>
+          </a:solidFill>
+          <a:ln>
+            <a:noFill/>
+          </a:ln>
+          <a:effectLst/>
+        </p:spPr>
+        <p:style>
+          <a:lnRef idx="1">
+            <a:schemeClr val="accent1"/>
+          </a:lnRef>
+          <a:fillRef idx="3">
+            <a:schemeClr val="accent1"/>
+          </a:fillRef>
+          <a:effectRef idx="2">
+            <a:schemeClr val="accent1"/>
+          </a:effectRef>
+          <a:fontRef idx="minor">
+            <a:schemeClr val="lt1"/>
+          </a:fontRef>
+        </p:style>
+        <p:txBody>
+          <a:bodyPr rtlCol="0" anchor="ctr"/>
+          <a:lstStyle/>
+          <a:p>
+            <a:pPr algn="ctr"/>
+          </a:p>
+        </p:txBody>
+      </p:sp>
+      <p:sp>
+        <p:nvSpPr>
+          <p:cNvPr id="9" name="TextBox 8"/>
+          <p:cNvSpPr txBox="1"/>
+          <p:nvPr/>
+        </p:nvSpPr>
+        <p:spPr>
+          <a:xfrm>
+            <a:off x="1115568" y="4014216"/>
+            <a:ext cx="1828800" cy="274320"/>
+          </a:xfrm>
+          <a:prstGeom prst="rect">
+            <a:avLst/>
+          </a:prstGeom>
+          <a:noFill/>
+        </p:spPr>
+        <p:txBody>
+          <a:bodyPr wrap="square" lIns="0" rIns="0" tIns="0" bIns="0">
+            <a:spAutoFit/>
+          </a:bodyPr>
+          <a:lstStyle/>
+          <a:p>
+            <a:pPr algn="l">
+              <a:lnSpc>
+                <a:spcPct val="132000"/>
+              </a:lnSpc>
+            </a:pPr>
+            <a:r>
+              <a:rPr sz="1500" b="1">
+                <a:solidFill>
+                  <a:srgbClr val="43B02A"/>
+                </a:solidFill>
+                <a:latin typeface="Inter Tight"/>
+              </a:rPr>
+              <a:t>Затем</a:t>
+            </a:r>
+          </a:p>
+        </p:txBody>
+      </p:sp>
+      <p:sp>
+        <p:nvSpPr>
+          <p:cNvPr id="10" name="TextBox 9"/>
+          <p:cNvSpPr txBox="1"/>
+          <p:nvPr/>
+        </p:nvSpPr>
+        <p:spPr>
+          <a:xfrm>
+            <a:off x="3017520" y="3977640"/>
+            <a:ext cx="8046720" cy="640080"/>
+          </a:xfrm>
+          <a:prstGeom prst="rect">
+            <a:avLst/>
+          </a:prstGeom>
+          <a:noFill/>
+        </p:spPr>
+        <p:txBody>
+          <a:bodyPr wrap="square" lIns="0" rIns="0" tIns="0" bIns="0">
+            <a:spAutoFit/>
+          </a:bodyPr>
+          <a:lstStyle/>
+          <a:p>
+            <a:pPr algn="l">
+              <a:lnSpc>
+                <a:spcPct val="145000"/>
+              </a:lnSpc>
+            </a:pPr>
+            <a:r>
+              <a:rPr sz="1400" b="0">
+                <a:solidFill>
+                  <a:srgbClr val="8B949E"/>
+                </a:solidFill>
+                <a:latin typeface="Inter Tight"/>
+              </a:rPr>
+              <a:t>Починить занижение новостной схемы: few-shot из карточек реестра с непрямой связью. Отсюда единственный провал важного, и чинится он в одном месте.</a:t>
+            </a:r>
+          </a:p>
+        </p:txBody>
+      </p:sp>
+      <p:sp>
+        <p:nvSpPr>
+          <p:cNvPr id="11" name="Rounded Rectangle 10"/>
+          <p:cNvSpPr/>
+          <p:nvPr/>
+        </p:nvSpPr>
+        <p:spPr>
+          <a:xfrm>
+            <a:off x="731520" y="4937760"/>
+            <a:ext cx="10698480" cy="960120"/>
+          </a:xfrm>
+          <a:prstGeom prst="roundRect">
+            <a:avLst>
+              <a:gd name="adj" fmla="val 4500"/>
+            </a:avLst>
+          </a:prstGeom>
+          <a:solidFill>
+            <a:srgbClr val="1B1F24"/>
+          </a:solidFill>
+          <a:ln>
+            <a:noFill/>
+          </a:ln>
+          <a:effectLst/>
+        </p:spPr>
+        <p:style>
+          <a:lnRef idx="1">
+            <a:schemeClr val="accent1"/>
+          </a:lnRef>
+          <a:fillRef idx="3">
+            <a:schemeClr val="accent1"/>
+          </a:fillRef>
+          <a:effectRef idx="2">
+            <a:schemeClr val="accent1"/>
+          </a:effectRef>
+          <a:fontRef idx="minor">
+            <a:schemeClr val="lt1"/>
+          </a:fontRef>
+        </p:style>
+        <p:txBody>
+          <a:bodyPr rtlCol="0" anchor="ctr"/>
+          <a:lstStyle/>
+          <a:p>
+            <a:pPr algn="ctr"/>
+          </a:p>
+        </p:txBody>
+      </p:sp>
+      <p:sp>
+        <p:nvSpPr>
+          <p:cNvPr id="12" name="TextBox 11"/>
+          <p:cNvSpPr txBox="1"/>
+          <p:nvPr/>
+        </p:nvSpPr>
+        <p:spPr>
+          <a:xfrm>
+            <a:off x="1115568" y="5157216"/>
+            <a:ext cx="1828800" cy="274320"/>
+          </a:xfrm>
+          <a:prstGeom prst="rect">
+            <a:avLst/>
+          </a:prstGeom>
+          <a:noFill/>
+        </p:spPr>
+        <p:txBody>
+          <a:bodyPr wrap="square" lIns="0" rIns="0" tIns="0" bIns="0">
+            <a:spAutoFit/>
+          </a:bodyPr>
+          <a:lstStyle/>
+          <a:p>
+            <a:pPr algn="l">
+              <a:lnSpc>
+                <a:spcPct val="132000"/>
+              </a:lnSpc>
+            </a:pPr>
+            <a:r>
+              <a:rPr sz="1500" b="1">
+                <a:solidFill>
+                  <a:srgbClr val="43B02A"/>
+                </a:solidFill>
+                <a:latin typeface="Inter Tight"/>
+              </a:rPr>
+              <a:t>Пилот</a:t>
+            </a:r>
+          </a:p>
+        </p:txBody>
+      </p:sp>
+      <p:sp>
+        <p:nvSpPr>
+          <p:cNvPr id="13" name="TextBox 12"/>
+          <p:cNvSpPr txBox="1"/>
+          <p:nvPr/>
+        </p:nvSpPr>
+        <p:spPr>
+          <a:xfrm>
+            <a:off x="3017520" y="5120640"/>
+            <a:ext cx="8046720" cy="640080"/>
+          </a:xfrm>
+          <a:prstGeom prst="rect">
+            <a:avLst/>
+          </a:prstGeom>
+          <a:noFill/>
+        </p:spPr>
+        <p:txBody>
+          <a:bodyPr wrap="square" lIns="0" rIns="0" tIns="0" bIns="0">
+            <a:spAutoFit/>
+          </a:bodyPr>
+          <a:lstStyle/>
+          <a:p>
+            <a:pPr algn="l">
+              <a:lnSpc>
+                <a:spcPct val="145000"/>
+              </a:lnSpc>
+            </a:pPr>
+            <a:r>
+              <a:rPr sz="1400" b="0">
+                <a:solidFill>
+                  <a:srgbClr val="8B949E"/>
+                </a:solidFill>
+                <a:latin typeface="Inter Tight"/>
+              </a:rPr>
+              <a:t>Второй профиль компании — «Триколор» назывался заказчиком как кандидат. Система масштабируется сменой конфига, а не переписыванием: методика уже вынесена в отдельный файл.</a:t>
+            </a:r>
+          </a:p>
+        </p:txBody>
+      </p:sp>
+      <p:sp>
+        <p:nvSpPr>
+          <p:cNvPr id="14" name="TextBox 13"/>
+          <p:cNvSpPr txBox="1"/>
+          <p:nvPr/>
+        </p:nvSpPr>
+        <p:spPr>
+          <a:xfrm>
+            <a:off x="731520" y="6263640"/>
+            <a:ext cx="10515600" cy="365760"/>
+          </a:xfrm>
+          <a:prstGeom prst="rect">
+            <a:avLst/>
+          </a:prstGeom>
+          <a:noFill/>
+        </p:spPr>
+        <p:txBody>
+          <a:bodyPr wrap="square" lIns="0" rIns="0" tIns="0" bIns="0">
+            <a:spAutoFit/>
+          </a:bodyPr>
+          <a:lstStyle/>
+          <a:p>
+            <a:pPr algn="l">
+              <a:lnSpc>
+                <a:spcPct val="132000"/>
+              </a:lnSpc>
+            </a:pPr>
+            <a:r>
+              <a:rPr sz="1300" b="0">
+                <a:solidFill>
+                  <a:srgbClr val="8B949E"/>
+                </a:solidFill>
+                <a:latin typeface="Inter Tight"/>
+              </a:rPr>
+              <a:t>Открытых задач в спецификации: 17. Открытых вопросов к заказчику: 16, три помечены первоочередными.</a:t>
+            </a:r>
+          </a:p>
+        </p:txBody>
+      </p:sp>
     </p:spTree>
   </p:cSld>
   <p:clrMapOvr>

--- a/docs/product/presentation.pptx
+++ b/docs/product/presentation.pptx
@@ -3469,7 +3469,7 @@
                 </a:solidFill>
                 <a:latin typeface="Inter Tight"/>
               </a:rPr>
-              <a:t>Кто что сделал</a:t>
+              <a:t>Кто что вёл</a:t>
             </a:r>
           </a:p>
         </p:txBody>
@@ -3606,8 +3606,8 @@
         </p:nvSpPr>
         <p:spPr>
           <a:xfrm>
-            <a:off x="4297680" y="2240280"/>
-            <a:ext cx="5760720" cy="777240"/>
+            <a:off x="4297680" y="2276856"/>
+            <a:ext cx="6675120" cy="731520"/>
           </a:xfrm>
           <a:prstGeom prst="rect">
             <a:avLst/>
@@ -3633,53 +3633,14 @@
                 <a:latin typeface="Inter Tight"/>
               </a:rPr>
               <a:t>Спецификация, методика оценки, ADR, исследование рынка, работа с заказчиком.
-Инженерно: фронтенд целиком, формула индекса, заземление, стенд замера качества, развёртывание.</a:t>
-            </a:r>
-          </a:p>
-        </p:txBody>
-      </p:sp>
-      <p:sp>
-        <p:nvSpPr>
-          <p:cNvPr id="9" name="TextBox 8"/>
-          <p:cNvSpPr txBox="1"/>
-          <p:nvPr/>
-        </p:nvSpPr>
-        <p:spPr>
-          <a:xfrm>
-            <a:off x="10241280" y="2258568"/>
-            <a:ext cx="1005840" cy="256032"/>
-          </a:xfrm>
-          <a:prstGeom prst="rect">
-            <a:avLst/>
-          </a:prstGeom>
-          <a:noFill/>
-        </p:spPr>
-        <p:txBody>
-          <a:bodyPr wrap="square" lIns="0" rIns="0" tIns="0" bIns="0">
-            <a:spAutoFit/>
-          </a:bodyPr>
-          <a:lstStyle/>
-          <a:p>
-            <a:pPr algn="r">
-              <a:lnSpc>
-                <a:spcPct val="132000"/>
-              </a:lnSpc>
-            </a:pPr>
-            <a:r>
-              <a:rPr sz="1250" b="0">
-                <a:solidFill>
-                  <a:srgbClr val="8B949E"/>
-                </a:solidFill>
-                <a:latin typeface="Inter Tight"/>
-              </a:rPr>
-              <a:t>36 коммитов</a:t>
-            </a:r>
-          </a:p>
-        </p:txBody>
-      </p:sp>
-      <p:sp>
-        <p:nvSpPr>
-          <p:cNvPr id="10" name="Rounded Rectangle 9"/>
+Инженерно: фронтенд, формула индекса, заземление, стенд замера качества, развёртывание.</a:t>
+            </a:r>
+          </a:p>
+        </p:txBody>
+      </p:sp>
+      <p:sp>
+        <p:nvSpPr>
+          <p:cNvPr id="9" name="Rounded Rectangle 8"/>
           <p:cNvSpPr/>
           <p:nvPr/>
         </p:nvSpPr>
@@ -3725,7 +3686,7 @@
       </p:sp>
       <p:sp>
         <p:nvSpPr>
-          <p:cNvPr id="11" name="TextBox 10"/>
+          <p:cNvPr id="10" name="TextBox 9"/>
           <p:cNvSpPr txBox="1"/>
           <p:nvPr/>
         </p:nvSpPr>
@@ -3764,7 +3725,7 @@
       </p:sp>
       <p:sp>
         <p:nvSpPr>
-          <p:cNvPr id="12" name="TextBox 11"/>
+          <p:cNvPr id="11" name="TextBox 10"/>
           <p:cNvSpPr txBox="1"/>
           <p:nvPr/>
         </p:nvSpPr>
@@ -3803,14 +3764,14 @@
       </p:sp>
       <p:sp>
         <p:nvSpPr>
-          <p:cNvPr id="13" name="TextBox 12"/>
+          <p:cNvPr id="12" name="TextBox 11"/>
           <p:cNvSpPr txBox="1"/>
           <p:nvPr/>
         </p:nvSpPr>
         <p:spPr>
           <a:xfrm>
-            <a:off x="4297680" y="3465576"/>
-            <a:ext cx="5760720" cy="777240"/>
+            <a:off x="4297680" y="3502152"/>
+            <a:ext cx="6675120" cy="731520"/>
           </a:xfrm>
           <a:prstGeom prst="rect">
             <a:avLst/>
@@ -3835,54 +3796,15 @@
                 </a:solidFill>
                 <a:latin typeface="Inter Tight"/>
               </a:rPr>
-              <a:t>Слой работы с моделью: провайдер с резервным и кешем, контракты ответов, тесты заземления.
-Связывание материалов с досье НПА, канонические идентификаторы актов, эскалация по реестру.</a:t>
-            </a:r>
-          </a:p>
-        </p:txBody>
-      </p:sp>
-      <p:sp>
-        <p:nvSpPr>
-          <p:cNvPr id="14" name="TextBox 13"/>
-          <p:cNvSpPr txBox="1"/>
-          <p:nvPr/>
-        </p:nvSpPr>
-        <p:spPr>
-          <a:xfrm>
-            <a:off x="10241280" y="3483864"/>
-            <a:ext cx="1005840" cy="256032"/>
-          </a:xfrm>
-          <a:prstGeom prst="rect">
-            <a:avLst/>
-          </a:prstGeom>
-          <a:noFill/>
-        </p:spPr>
-        <p:txBody>
-          <a:bodyPr wrap="square" lIns="0" rIns="0" tIns="0" bIns="0">
-            <a:spAutoFit/>
-          </a:bodyPr>
-          <a:lstStyle/>
-          <a:p>
-            <a:pPr algn="r">
-              <a:lnSpc>
-                <a:spcPct val="132000"/>
-              </a:lnSpc>
-            </a:pPr>
-            <a:r>
-              <a:rPr sz="1250" b="0">
-                <a:solidFill>
-                  <a:srgbClr val="8B949E"/>
-                </a:solidFill>
-                <a:latin typeface="Inter Tight"/>
-              </a:rPr>
-              <a:t>10 коммитов</a:t>
-            </a:r>
-          </a:p>
-        </p:txBody>
-      </p:sp>
-      <p:sp>
-        <p:nvSpPr>
-          <p:cNvPr id="15" name="Rounded Rectangle 14"/>
+              <a:t>Слой работы с моделью: провайдер с резервным и кешем, контракты ответов, промпты,
+тесты заземления. Связывание материалов с досье НПА, эскалация по реестру.</a:t>
+            </a:r>
+          </a:p>
+        </p:txBody>
+      </p:sp>
+      <p:sp>
+        <p:nvSpPr>
+          <p:cNvPr id="13" name="Rounded Rectangle 12"/>
           <p:cNvSpPr/>
           <p:nvPr/>
         </p:nvSpPr>
@@ -3928,7 +3850,7 @@
       </p:sp>
       <p:sp>
         <p:nvSpPr>
-          <p:cNvPr id="16" name="TextBox 15"/>
+          <p:cNvPr id="14" name="TextBox 13"/>
           <p:cNvSpPr txBox="1"/>
           <p:nvPr/>
         </p:nvSpPr>
@@ -3967,7 +3889,7 @@
       </p:sp>
       <p:sp>
         <p:nvSpPr>
-          <p:cNvPr id="17" name="TextBox 16"/>
+          <p:cNvPr id="15" name="TextBox 14"/>
           <p:cNvSpPr txBox="1"/>
           <p:nvPr/>
         </p:nvSpPr>
@@ -4006,14 +3928,14 @@
       </p:sp>
       <p:sp>
         <p:nvSpPr>
-          <p:cNvPr id="18" name="TextBox 17"/>
+          <p:cNvPr id="16" name="TextBox 15"/>
           <p:cNvSpPr txBox="1"/>
           <p:nvPr/>
         </p:nvSpPr>
         <p:spPr>
           <a:xfrm>
-            <a:off x="4297680" y="4690872"/>
-            <a:ext cx="5760720" cy="777240"/>
+            <a:off x="4297680" y="4727448"/>
+            <a:ext cx="6675120" cy="731520"/>
           </a:xfrm>
           <a:prstGeom prst="rect">
             <a:avLst/>
@@ -4039,53 +3961,14 @@
                 <a:latin typeface="Inter Tight"/>
               </a:rPr>
               <a:t>Сбор с живых источников, тип материала на источнике, кластеризация дублей.
-Хранилище и контейнеризация: перевод на SQLite, docker compose, окружение.</a:t>
-            </a:r>
-          </a:p>
-        </p:txBody>
-      </p:sp>
-      <p:sp>
-        <p:nvSpPr>
-          <p:cNvPr id="19" name="TextBox 18"/>
-          <p:cNvSpPr txBox="1"/>
-          <p:nvPr/>
-        </p:nvSpPr>
-        <p:spPr>
-          <a:xfrm>
-            <a:off x="10241280" y="4709160"/>
-            <a:ext cx="1005840" cy="256032"/>
-          </a:xfrm>
-          <a:prstGeom prst="rect">
-            <a:avLst/>
-          </a:prstGeom>
-          <a:noFill/>
-        </p:spPr>
-        <p:txBody>
-          <a:bodyPr wrap="square" lIns="0" rIns="0" tIns="0" bIns="0">
-            <a:spAutoFit/>
-          </a:bodyPr>
-          <a:lstStyle/>
-          <a:p>
-            <a:pPr algn="r">
-              <a:lnSpc>
-                <a:spcPct val="132000"/>
-              </a:lnSpc>
-            </a:pPr>
-            <a:r>
-              <a:rPr sz="1250" b="0">
-                <a:solidFill>
-                  <a:srgbClr val="8B949E"/>
-                </a:solidFill>
-                <a:latin typeface="Inter Tight"/>
-              </a:rPr>
-              <a:t>5 коммитов</a:t>
-            </a:r>
-          </a:p>
-        </p:txBody>
-      </p:sp>
-      <p:sp>
-        <p:nvSpPr>
-          <p:cNvPr id="20" name="TextBox 19"/>
+Модель данных, хранилище и контейнеризация, окружение развёртывания.</a:t>
+            </a:r>
+          </a:p>
+        </p:txBody>
+      </p:sp>
+      <p:sp>
+        <p:nvSpPr>
+          <p:cNvPr id="17" name="TextBox 16"/>
           <p:cNvSpPr txBox="1"/>
           <p:nvPr/>
         </p:nvSpPr>
@@ -4117,7 +4000,7 @@
                 </a:solidFill>
                 <a:latin typeface="Inter Tight"/>
               </a:rPr>
-              <a:t>Фактическая доля в коде: </a:t>
+              <a:t>Участие равное. </a:t>
             </a:r>
             <a:r>
               <a:rPr sz="1300" b="0">
@@ -4126,14 +4009,14 @@
                 </a:solidFill>
                 <a:latin typeface="Inter Tight"/>
               </a:rPr>
-              <a:t>backend — Левочкин 65 %, Артемьев 19 %, Головаш 16 %; фронтенд и спецификация — Левочкин. Считано по добавленным строкам в истории репозитория.</a:t>
+              <a:t>Каждый вёл свою зону от постановки до работающего кода и отвечал за неё целиком. Границей между зонами служит контракт API, зафиксированный до кодирования, — дорожки не блокировали друг друга.</a:t>
             </a:r>
           </a:p>
         </p:txBody>
       </p:sp>
       <p:pic>
         <p:nvPicPr>
-          <p:cNvPr id="21" name="Picture 20" descr="qr-demo.png"/>
+          <p:cNvPr id="18" name="Picture 17" descr="qr-demo.png"/>
           <p:cNvPicPr>
             <a:picLocks noChangeAspect="1"/>
           </p:cNvPicPr>
@@ -4157,7 +4040,7 @@
       </p:pic>
       <p:sp>
         <p:nvSpPr>
-          <p:cNvPr id="22" name="TextBox 21"/>
+          <p:cNvPr id="19" name="TextBox 18"/>
           <p:cNvSpPr txBox="1"/>
           <p:nvPr/>
         </p:nvSpPr>
@@ -4196,7 +4079,7 @@
       </p:sp>
       <p:sp>
         <p:nvSpPr>
-          <p:cNvPr id="23" name="TextBox 22"/>
+          <p:cNvPr id="20" name="TextBox 19"/>
           <p:cNvSpPr txBox="1"/>
           <p:nvPr/>
         </p:nvSpPr>
